--- a/md/seminar/中間発表スライド_2026-08-10.pptx
+++ b/md/seminar/中間発表スライド_2026-08-10.pptx
@@ -5,25 +5,25 @@
     <p:sldMasterId id="2147483648" r:id="rId1"/>
   </p:sldMasterIdLst>
   <p:sldIdLst>
-    <p:sldId id="256" r:id="rId7"/>
-    <p:sldId id="257" r:id="rId8"/>
-    <p:sldId id="258" r:id="rId9"/>
-    <p:sldId id="259" r:id="rId10"/>
-    <p:sldId id="260" r:id="rId11"/>
-    <p:sldId id="261" r:id="rId12"/>
-    <p:sldId id="262" r:id="rId13"/>
-    <p:sldId id="263" r:id="rId14"/>
-    <p:sldId id="264" r:id="rId15"/>
-    <p:sldId id="265" r:id="rId16"/>
-    <p:sldId id="266" r:id="rId17"/>
-    <p:sldId id="267" r:id="rId18"/>
-    <p:sldId id="268" r:id="rId19"/>
-    <p:sldId id="269" r:id="rId20"/>
-    <p:sldId id="270" r:id="rId21"/>
-    <p:sldId id="271" r:id="rId22"/>
-    <p:sldId id="272" r:id="rId23"/>
+    <p:sldId id="256" r:id="rId2"/>
+    <p:sldId id="257" r:id="rId3"/>
+    <p:sldId id="258" r:id="rId4"/>
+    <p:sldId id="259" r:id="rId5"/>
+    <p:sldId id="260" r:id="rId6"/>
+    <p:sldId id="261" r:id="rId7"/>
+    <p:sldId id="262" r:id="rId8"/>
+    <p:sldId id="263" r:id="rId9"/>
+    <p:sldId id="264" r:id="rId10"/>
+    <p:sldId id="265" r:id="rId11"/>
+    <p:sldId id="266" r:id="rId12"/>
+    <p:sldId id="267" r:id="rId13"/>
+    <p:sldId id="268" r:id="rId14"/>
+    <p:sldId id="269" r:id="rId15"/>
+    <p:sldId id="270" r:id="rId16"/>
+    <p:sldId id="271" r:id="rId17"/>
+    <p:sldId id="272" r:id="rId18"/>
   </p:sldIdLst>
-  <p:sldSz cx="12192000" cy="6858000" type="screen4x3"/>
+  <p:sldSz cx="12192000" cy="6858000"/>
   <p:notesSz cx="6858000" cy="9144000"/>
   <p:defaultTextStyle>
     <a:defPPr>
@@ -120,6 +120,22 @@
       </a:defRPr>
     </a:lvl9pPr>
   </p:defaultTextStyle>
+  <p:extLst>
+    <p:ext uri="{EFAFB233-063F-42B5-8137-9DF3F51BA10A}">
+      <p15:sldGuideLst xmlns:p15="http://schemas.microsoft.com/office/powerpoint/2012/main">
+        <p15:guide id="1" orient="horz" pos="2160">
+          <p15:clr>
+            <a:srgbClr val="A4A3A4"/>
+          </p15:clr>
+        </p15:guide>
+        <p15:guide id="2" pos="2880">
+          <p15:clr>
+            <a:srgbClr val="A4A3A4"/>
+          </p15:clr>
+        </p15:guide>
+      </p15:sldGuideLst>
+    </p:ext>
+  </p:extLst>
 </p:presentation>
 </file>
 
@@ -161,10 +177,9 @@
           <a:lstStyle/>
           <a:p>
             <a:r>
-              <a:rPr lang="en-US" smtClean="0"/>
+              <a:rPr lang="en-US"/>
               <a:t>Click to edit Master title style</a:t>
             </a:r>
-            <a:endParaRPr lang="en-US"/>
           </a:p>
         </p:txBody>
       </p:sp>
@@ -280,10 +295,9 @@
           </a:lstStyle>
           <a:p>
             <a:r>
-              <a:rPr lang="en-US" smtClean="0"/>
+              <a:rPr lang="en-US"/>
               <a:t>Click to edit Master subtitle style</a:t>
             </a:r>
-            <a:endParaRPr lang="en-US"/>
           </a:p>
         </p:txBody>
       </p:sp>
@@ -304,7 +318,7 @@
           <a:p>
             <a:fld id="{5BCAD085-E8A6-8845-BD4E-CB4CCA059FC4}" type="datetimeFigureOut">
               <a:rPr lang="en-US" smtClean="0"/>
-              <a:t>1/27/13</a:t>
+              <a:t>8/10/2026</a:t>
             </a:fld>
             <a:endParaRPr lang="en-US"/>
           </a:p>
@@ -398,10 +412,9 @@
           <a:lstStyle/>
           <a:p>
             <a:r>
-              <a:rPr lang="en-US" smtClean="0"/>
+              <a:rPr lang="en-US"/>
               <a:t>Click to edit Master title style</a:t>
             </a:r>
-            <a:endParaRPr lang="en-US"/>
           </a:p>
         </p:txBody>
       </p:sp>
@@ -422,38 +435,37 @@
           <a:p>
             <a:pPr lvl="0"/>
             <a:r>
-              <a:rPr lang="en-US" smtClean="0"/>
+              <a:rPr lang="en-US"/>
               <a:t>Click to edit Master text styles</a:t>
             </a:r>
           </a:p>
           <a:p>
             <a:pPr lvl="1"/>
             <a:r>
-              <a:rPr lang="en-US" smtClean="0"/>
+              <a:rPr lang="en-US"/>
               <a:t>Second level</a:t>
             </a:r>
           </a:p>
           <a:p>
             <a:pPr lvl="2"/>
             <a:r>
-              <a:rPr lang="en-US" smtClean="0"/>
+              <a:rPr lang="en-US"/>
               <a:t>Third level</a:t>
             </a:r>
           </a:p>
           <a:p>
             <a:pPr lvl="3"/>
             <a:r>
-              <a:rPr lang="en-US" smtClean="0"/>
+              <a:rPr lang="en-US"/>
               <a:t>Fourth level</a:t>
             </a:r>
           </a:p>
           <a:p>
             <a:pPr lvl="4"/>
             <a:r>
-              <a:rPr lang="en-US" smtClean="0"/>
+              <a:rPr lang="en-US"/>
               <a:t>Fifth level</a:t>
             </a:r>
-            <a:endParaRPr lang="en-US"/>
           </a:p>
         </p:txBody>
       </p:sp>
@@ -474,7 +486,7 @@
           <a:p>
             <a:fld id="{5BCAD085-E8A6-8845-BD4E-CB4CCA059FC4}" type="datetimeFigureOut">
               <a:rPr lang="en-US" smtClean="0"/>
-              <a:t>1/27/13</a:t>
+              <a:t>8/10/2026</a:t>
             </a:fld>
             <a:endParaRPr lang="en-US"/>
           </a:p>
@@ -573,10 +585,9 @@
           <a:lstStyle/>
           <a:p>
             <a:r>
-              <a:rPr lang="en-US" smtClean="0"/>
+              <a:rPr lang="en-US"/>
               <a:t>Click to edit Master title style</a:t>
             </a:r>
-            <a:endParaRPr lang="en-US"/>
           </a:p>
         </p:txBody>
       </p:sp>
@@ -602,38 +613,37 @@
           <a:p>
             <a:pPr lvl="0"/>
             <a:r>
-              <a:rPr lang="en-US" smtClean="0"/>
+              <a:rPr lang="en-US"/>
               <a:t>Click to edit Master text styles</a:t>
             </a:r>
           </a:p>
           <a:p>
             <a:pPr lvl="1"/>
             <a:r>
-              <a:rPr lang="en-US" smtClean="0"/>
+              <a:rPr lang="en-US"/>
               <a:t>Second level</a:t>
             </a:r>
           </a:p>
           <a:p>
             <a:pPr lvl="2"/>
             <a:r>
-              <a:rPr lang="en-US" smtClean="0"/>
+              <a:rPr lang="en-US"/>
               <a:t>Third level</a:t>
             </a:r>
           </a:p>
           <a:p>
             <a:pPr lvl="3"/>
             <a:r>
-              <a:rPr lang="en-US" smtClean="0"/>
+              <a:rPr lang="en-US"/>
               <a:t>Fourth level</a:t>
             </a:r>
           </a:p>
           <a:p>
             <a:pPr lvl="4"/>
             <a:r>
-              <a:rPr lang="en-US" smtClean="0"/>
+              <a:rPr lang="en-US"/>
               <a:t>Fifth level</a:t>
             </a:r>
-            <a:endParaRPr lang="en-US"/>
           </a:p>
         </p:txBody>
       </p:sp>
@@ -654,7 +664,7 @@
           <a:p>
             <a:fld id="{5BCAD085-E8A6-8845-BD4E-CB4CCA059FC4}" type="datetimeFigureOut">
               <a:rPr lang="en-US" smtClean="0"/>
-              <a:t>1/27/13</a:t>
+              <a:t>8/10/2026</a:t>
             </a:fld>
             <a:endParaRPr lang="en-US"/>
           </a:p>
@@ -748,10 +758,9 @@
           <a:lstStyle/>
           <a:p>
             <a:r>
-              <a:rPr lang="en-US" smtClean="0"/>
+              <a:rPr lang="en-US"/>
               <a:t>Click to edit Master title style</a:t>
             </a:r>
-            <a:endParaRPr lang="en-US"/>
           </a:p>
         </p:txBody>
       </p:sp>
@@ -772,38 +781,37 @@
           <a:p>
             <a:pPr lvl="0"/>
             <a:r>
-              <a:rPr lang="en-US" smtClean="0"/>
+              <a:rPr lang="en-US"/>
               <a:t>Click to edit Master text styles</a:t>
             </a:r>
           </a:p>
           <a:p>
             <a:pPr lvl="1"/>
             <a:r>
-              <a:rPr lang="en-US" smtClean="0"/>
+              <a:rPr lang="en-US"/>
               <a:t>Second level</a:t>
             </a:r>
           </a:p>
           <a:p>
             <a:pPr lvl="2"/>
             <a:r>
-              <a:rPr lang="en-US" smtClean="0"/>
+              <a:rPr lang="en-US"/>
               <a:t>Third level</a:t>
             </a:r>
           </a:p>
           <a:p>
             <a:pPr lvl="3"/>
             <a:r>
-              <a:rPr lang="en-US" smtClean="0"/>
+              <a:rPr lang="en-US"/>
               <a:t>Fourth level</a:t>
             </a:r>
           </a:p>
           <a:p>
             <a:pPr lvl="4"/>
             <a:r>
-              <a:rPr lang="en-US" smtClean="0"/>
+              <a:rPr lang="en-US"/>
               <a:t>Fifth level</a:t>
             </a:r>
-            <a:endParaRPr lang="en-US"/>
           </a:p>
         </p:txBody>
       </p:sp>
@@ -824,7 +832,7 @@
           <a:p>
             <a:fld id="{5BCAD085-E8A6-8845-BD4E-CB4CCA059FC4}" type="datetimeFigureOut">
               <a:rPr lang="en-US" smtClean="0"/>
-              <a:t>1/27/13</a:t>
+              <a:t>8/10/2026</a:t>
             </a:fld>
             <a:endParaRPr lang="en-US"/>
           </a:p>
@@ -927,10 +935,9 @@
           </a:lstStyle>
           <a:p>
             <a:r>
-              <a:rPr lang="en-US" smtClean="0"/>
+              <a:rPr lang="en-US"/>
               <a:t>Click to edit Master title style</a:t>
             </a:r>
-            <a:endParaRPr lang="en-US"/>
           </a:p>
         </p:txBody>
       </p:sp>
@@ -1047,7 +1054,7 @@
           <a:p>
             <a:pPr lvl="0"/>
             <a:r>
-              <a:rPr lang="en-US" smtClean="0"/>
+              <a:rPr lang="en-US"/>
               <a:t>Click to edit Master text styles</a:t>
             </a:r>
           </a:p>
@@ -1070,7 +1077,7 @@
           <a:p>
             <a:fld id="{5BCAD085-E8A6-8845-BD4E-CB4CCA059FC4}" type="datetimeFigureOut">
               <a:rPr lang="en-US" smtClean="0"/>
-              <a:t>1/27/13</a:t>
+              <a:t>8/10/2026</a:t>
             </a:fld>
             <a:endParaRPr lang="en-US"/>
           </a:p>
@@ -1164,10 +1171,9 @@
           <a:lstStyle/>
           <a:p>
             <a:r>
-              <a:rPr lang="en-US" smtClean="0"/>
+              <a:rPr lang="en-US"/>
               <a:t>Click to edit Master title style</a:t>
             </a:r>
-            <a:endParaRPr lang="en-US"/>
           </a:p>
         </p:txBody>
       </p:sp>
@@ -1221,38 +1227,37 @@
           <a:p>
             <a:pPr lvl="0"/>
             <a:r>
-              <a:rPr lang="en-US" smtClean="0"/>
+              <a:rPr lang="en-US"/>
               <a:t>Click to edit Master text styles</a:t>
             </a:r>
           </a:p>
           <a:p>
             <a:pPr lvl="1"/>
             <a:r>
-              <a:rPr lang="en-US" smtClean="0"/>
+              <a:rPr lang="en-US"/>
               <a:t>Second level</a:t>
             </a:r>
           </a:p>
           <a:p>
             <a:pPr lvl="2"/>
             <a:r>
-              <a:rPr lang="en-US" smtClean="0"/>
+              <a:rPr lang="en-US"/>
               <a:t>Third level</a:t>
             </a:r>
           </a:p>
           <a:p>
             <a:pPr lvl="3"/>
             <a:r>
-              <a:rPr lang="en-US" smtClean="0"/>
+              <a:rPr lang="en-US"/>
               <a:t>Fourth level</a:t>
             </a:r>
           </a:p>
           <a:p>
             <a:pPr lvl="4"/>
             <a:r>
-              <a:rPr lang="en-US" smtClean="0"/>
+              <a:rPr lang="en-US"/>
               <a:t>Fifth level</a:t>
             </a:r>
-            <a:endParaRPr lang="en-US"/>
           </a:p>
         </p:txBody>
       </p:sp>
@@ -1306,38 +1311,37 @@
           <a:p>
             <a:pPr lvl="0"/>
             <a:r>
-              <a:rPr lang="en-US" smtClean="0"/>
+              <a:rPr lang="en-US"/>
               <a:t>Click to edit Master text styles</a:t>
             </a:r>
           </a:p>
           <a:p>
             <a:pPr lvl="1"/>
             <a:r>
-              <a:rPr lang="en-US" smtClean="0"/>
+              <a:rPr lang="en-US"/>
               <a:t>Second level</a:t>
             </a:r>
           </a:p>
           <a:p>
             <a:pPr lvl="2"/>
             <a:r>
-              <a:rPr lang="en-US" smtClean="0"/>
+              <a:rPr lang="en-US"/>
               <a:t>Third level</a:t>
             </a:r>
           </a:p>
           <a:p>
             <a:pPr lvl="3"/>
             <a:r>
-              <a:rPr lang="en-US" smtClean="0"/>
+              <a:rPr lang="en-US"/>
               <a:t>Fourth level</a:t>
             </a:r>
           </a:p>
           <a:p>
             <a:pPr lvl="4"/>
             <a:r>
-              <a:rPr lang="en-US" smtClean="0"/>
+              <a:rPr lang="en-US"/>
               <a:t>Fifth level</a:t>
             </a:r>
-            <a:endParaRPr lang="en-US"/>
           </a:p>
         </p:txBody>
       </p:sp>
@@ -1358,7 +1362,7 @@
           <a:p>
             <a:fld id="{5BCAD085-E8A6-8845-BD4E-CB4CCA059FC4}" type="datetimeFigureOut">
               <a:rPr lang="en-US" smtClean="0"/>
-              <a:t>1/27/13</a:t>
+              <a:t>8/10/2026</a:t>
             </a:fld>
             <a:endParaRPr lang="en-US"/>
           </a:p>
@@ -1456,10 +1460,9 @@
           </a:lstStyle>
           <a:p>
             <a:r>
-              <a:rPr lang="en-US" smtClean="0"/>
+              <a:rPr lang="en-US"/>
               <a:t>Click to edit Master title style</a:t>
             </a:r>
-            <a:endParaRPr lang="en-US"/>
           </a:p>
         </p:txBody>
       </p:sp>
@@ -1522,7 +1525,7 @@
           <a:p>
             <a:pPr lvl="0"/>
             <a:r>
-              <a:rPr lang="en-US" smtClean="0"/>
+              <a:rPr lang="en-US"/>
               <a:t>Click to edit Master text styles</a:t>
             </a:r>
           </a:p>
@@ -1578,38 +1581,37 @@
           <a:p>
             <a:pPr lvl="0"/>
             <a:r>
-              <a:rPr lang="en-US" smtClean="0"/>
+              <a:rPr lang="en-US"/>
               <a:t>Click to edit Master text styles</a:t>
             </a:r>
           </a:p>
           <a:p>
             <a:pPr lvl="1"/>
             <a:r>
-              <a:rPr lang="en-US" smtClean="0"/>
+              <a:rPr lang="en-US"/>
               <a:t>Second level</a:t>
             </a:r>
           </a:p>
           <a:p>
             <a:pPr lvl="2"/>
             <a:r>
-              <a:rPr lang="en-US" smtClean="0"/>
+              <a:rPr lang="en-US"/>
               <a:t>Third level</a:t>
             </a:r>
           </a:p>
           <a:p>
             <a:pPr lvl="3"/>
             <a:r>
-              <a:rPr lang="en-US" smtClean="0"/>
+              <a:rPr lang="en-US"/>
               <a:t>Fourth level</a:t>
             </a:r>
           </a:p>
           <a:p>
             <a:pPr lvl="4"/>
             <a:r>
-              <a:rPr lang="en-US" smtClean="0"/>
+              <a:rPr lang="en-US"/>
               <a:t>Fifth level</a:t>
             </a:r>
-            <a:endParaRPr lang="en-US"/>
           </a:p>
         </p:txBody>
       </p:sp>
@@ -1672,7 +1674,7 @@
           <a:p>
             <a:pPr lvl="0"/>
             <a:r>
-              <a:rPr lang="en-US" smtClean="0"/>
+              <a:rPr lang="en-US"/>
               <a:t>Click to edit Master text styles</a:t>
             </a:r>
           </a:p>
@@ -1728,38 +1730,37 @@
           <a:p>
             <a:pPr lvl="0"/>
             <a:r>
-              <a:rPr lang="en-US" smtClean="0"/>
+              <a:rPr lang="en-US"/>
               <a:t>Click to edit Master text styles</a:t>
             </a:r>
           </a:p>
           <a:p>
             <a:pPr lvl="1"/>
             <a:r>
-              <a:rPr lang="en-US" smtClean="0"/>
+              <a:rPr lang="en-US"/>
               <a:t>Second level</a:t>
             </a:r>
           </a:p>
           <a:p>
             <a:pPr lvl="2"/>
             <a:r>
-              <a:rPr lang="en-US" smtClean="0"/>
+              <a:rPr lang="en-US"/>
               <a:t>Third level</a:t>
             </a:r>
           </a:p>
           <a:p>
             <a:pPr lvl="3"/>
             <a:r>
-              <a:rPr lang="en-US" smtClean="0"/>
+              <a:rPr lang="en-US"/>
               <a:t>Fourth level</a:t>
             </a:r>
           </a:p>
           <a:p>
             <a:pPr lvl="4"/>
             <a:r>
-              <a:rPr lang="en-US" smtClean="0"/>
+              <a:rPr lang="en-US"/>
               <a:t>Fifth level</a:t>
             </a:r>
-            <a:endParaRPr lang="en-US"/>
           </a:p>
         </p:txBody>
       </p:sp>
@@ -1780,7 +1781,7 @@
           <a:p>
             <a:fld id="{5BCAD085-E8A6-8845-BD4E-CB4CCA059FC4}" type="datetimeFigureOut">
               <a:rPr lang="en-US" smtClean="0"/>
-              <a:t>1/27/13</a:t>
+              <a:t>8/10/2026</a:t>
             </a:fld>
             <a:endParaRPr lang="en-US"/>
           </a:p>
@@ -1874,10 +1875,9 @@
           <a:lstStyle/>
           <a:p>
             <a:r>
-              <a:rPr lang="en-US" smtClean="0"/>
+              <a:rPr lang="en-US"/>
               <a:t>Click to edit Master title style</a:t>
             </a:r>
-            <a:endParaRPr lang="en-US"/>
           </a:p>
         </p:txBody>
       </p:sp>
@@ -1898,7 +1898,7 @@
           <a:p>
             <a:fld id="{5BCAD085-E8A6-8845-BD4E-CB4CCA059FC4}" type="datetimeFigureOut">
               <a:rPr lang="en-US" smtClean="0"/>
-              <a:t>1/27/13</a:t>
+              <a:t>8/10/2026</a:t>
             </a:fld>
             <a:endParaRPr lang="en-US"/>
           </a:p>
@@ -1993,7 +1993,7 @@
           <a:p>
             <a:fld id="{5BCAD085-E8A6-8845-BD4E-CB4CCA059FC4}" type="datetimeFigureOut">
               <a:rPr lang="en-US" smtClean="0"/>
-              <a:t>1/27/13</a:t>
+              <a:t>8/10/2026</a:t>
             </a:fld>
             <a:endParaRPr lang="en-US"/>
           </a:p>
@@ -2096,10 +2096,9 @@
           </a:lstStyle>
           <a:p>
             <a:r>
-              <a:rPr lang="en-US" smtClean="0"/>
+              <a:rPr lang="en-US"/>
               <a:t>Click to edit Master title style</a:t>
             </a:r>
-            <a:endParaRPr lang="en-US"/>
           </a:p>
         </p:txBody>
       </p:sp>
@@ -2153,38 +2152,37 @@
           <a:p>
             <a:pPr lvl="0"/>
             <a:r>
-              <a:rPr lang="en-US" smtClean="0"/>
+              <a:rPr lang="en-US"/>
               <a:t>Click to edit Master text styles</a:t>
             </a:r>
           </a:p>
           <a:p>
             <a:pPr lvl="1"/>
             <a:r>
-              <a:rPr lang="en-US" smtClean="0"/>
+              <a:rPr lang="en-US"/>
               <a:t>Second level</a:t>
             </a:r>
           </a:p>
           <a:p>
             <a:pPr lvl="2"/>
             <a:r>
-              <a:rPr lang="en-US" smtClean="0"/>
+              <a:rPr lang="en-US"/>
               <a:t>Third level</a:t>
             </a:r>
           </a:p>
           <a:p>
             <a:pPr lvl="3"/>
             <a:r>
-              <a:rPr lang="en-US" smtClean="0"/>
+              <a:rPr lang="en-US"/>
               <a:t>Fourth level</a:t>
             </a:r>
           </a:p>
           <a:p>
             <a:pPr lvl="4"/>
             <a:r>
-              <a:rPr lang="en-US" smtClean="0"/>
+              <a:rPr lang="en-US"/>
               <a:t>Fifth level</a:t>
             </a:r>
-            <a:endParaRPr lang="en-US"/>
           </a:p>
         </p:txBody>
       </p:sp>
@@ -2247,7 +2245,7 @@
           <a:p>
             <a:pPr lvl="0"/>
             <a:r>
-              <a:rPr lang="en-US" smtClean="0"/>
+              <a:rPr lang="en-US"/>
               <a:t>Click to edit Master text styles</a:t>
             </a:r>
           </a:p>
@@ -2270,7 +2268,7 @@
           <a:p>
             <a:fld id="{5BCAD085-E8A6-8845-BD4E-CB4CCA059FC4}" type="datetimeFigureOut">
               <a:rPr lang="en-US" smtClean="0"/>
-              <a:t>1/27/13</a:t>
+              <a:t>8/10/2026</a:t>
             </a:fld>
             <a:endParaRPr lang="en-US"/>
           </a:p>
@@ -2373,10 +2371,9 @@
           </a:lstStyle>
           <a:p>
             <a:r>
-              <a:rPr lang="en-US" smtClean="0"/>
+              <a:rPr lang="en-US"/>
               <a:t>Click to edit Master title style</a:t>
             </a:r>
-            <a:endParaRPr lang="en-US"/>
           </a:p>
         </p:txBody>
       </p:sp>
@@ -2500,7 +2497,7 @@
           <a:p>
             <a:pPr lvl="0"/>
             <a:r>
-              <a:rPr lang="en-US" smtClean="0"/>
+              <a:rPr lang="en-US"/>
               <a:t>Click to edit Master text styles</a:t>
             </a:r>
           </a:p>
@@ -2523,7 +2520,7 @@
           <a:p>
             <a:fld id="{5BCAD085-E8A6-8845-BD4E-CB4CCA059FC4}" type="datetimeFigureOut">
               <a:rPr lang="en-US" smtClean="0"/>
-              <a:t>1/27/13</a:t>
+              <a:t>8/10/2026</a:t>
             </a:fld>
             <a:endParaRPr lang="en-US"/>
           </a:p>
@@ -2632,10 +2629,9 @@
           <a:lstStyle/>
           <a:p>
             <a:r>
-              <a:rPr lang="en-US" smtClean="0"/>
+              <a:rPr lang="en-US"/>
               <a:t>Click to edit Master title style</a:t>
             </a:r>
-            <a:endParaRPr lang="en-US"/>
           </a:p>
         </p:txBody>
       </p:sp>
@@ -2666,38 +2662,37 @@
           <a:p>
             <a:pPr lvl="0"/>
             <a:r>
-              <a:rPr lang="en-US" smtClean="0"/>
+              <a:rPr lang="en-US"/>
               <a:t>Click to edit Master text styles</a:t>
             </a:r>
           </a:p>
           <a:p>
             <a:pPr lvl="1"/>
             <a:r>
-              <a:rPr lang="en-US" smtClean="0"/>
+              <a:rPr lang="en-US"/>
               <a:t>Second level</a:t>
             </a:r>
           </a:p>
           <a:p>
             <a:pPr lvl="2"/>
             <a:r>
-              <a:rPr lang="en-US" smtClean="0"/>
+              <a:rPr lang="en-US"/>
               <a:t>Third level</a:t>
             </a:r>
           </a:p>
           <a:p>
             <a:pPr lvl="3"/>
             <a:r>
-              <a:rPr lang="en-US" smtClean="0"/>
+              <a:rPr lang="en-US"/>
               <a:t>Fourth level</a:t>
             </a:r>
           </a:p>
           <a:p>
             <a:pPr lvl="4"/>
             <a:r>
-              <a:rPr lang="en-US" smtClean="0"/>
+              <a:rPr lang="en-US"/>
               <a:t>Fifth level</a:t>
             </a:r>
-            <a:endParaRPr lang="en-US"/>
           </a:p>
         </p:txBody>
       </p:sp>
@@ -2736,7 +2731,7 @@
           <a:p>
             <a:fld id="{5BCAD085-E8A6-8845-BD4E-CB4CCA059FC4}" type="datetimeFigureOut">
               <a:rPr lang="en-US" smtClean="0"/>
-              <a:t>1/27/13</a:t>
+              <a:t>8/10/2026</a:t>
             </a:fld>
             <a:endParaRPr lang="en-US"/>
           </a:p>
@@ -3095,7 +3090,7 @@
 </file>
 
 <file path=ppt/slides/slide1.xml><?xml version="1.0" encoding="utf-8"?>
-<p:sld xmlns:a="http://schemas.openxmlformats.org/drawingml/2006/main" xmlns:p="http://schemas.openxmlformats.org/presentationml/2006/main" xmlns:r="http://schemas.openxmlformats.org/officeDocument/2006/relationships">
+<p:sld xmlns:a="http://schemas.openxmlformats.org/drawingml/2006/main" xmlns:r="http://schemas.openxmlformats.org/officeDocument/2006/relationships" xmlns:p="http://schemas.openxmlformats.org/presentationml/2006/main">
   <p:cSld>
     <p:spTree>
       <p:nvGrpSpPr>
@@ -3103,23 +3098,30 @@
         <p:cNvGrpSpPr/>
         <p:nvPr/>
       </p:nvGrpSpPr>
-      <p:grpSpPr/>
-      <p:sp>
-        <p:nvSpPr>
-          <p:cNvPr id="2" name="Rectangle 1"/>
+      <p:grpSpPr>
+        <a:xfrm>
+          <a:off x="0" y="0"/>
+          <a:ext cx="0" cy="0"/>
+          <a:chOff x="0" y="0"/>
+          <a:chExt cx="0" cy="0"/>
+        </a:xfrm>
+      </p:grpSpPr>
+      <p:sp>
+        <p:nvSpPr>
+          <p:cNvPr id="3" name="Rectangle 2"/>
           <p:cNvSpPr/>
           <p:nvPr/>
         </p:nvSpPr>
         <p:spPr>
           <a:xfrm>
             <a:off x="-25400" y="-25400"/>
-            <a:ext cx="12242800" cy="6908800"/>
+            <a:ext cx="12242800" cy="939800"/>
           </a:xfrm>
           <a:prstGeom prst="rect">
             <a:avLst/>
           </a:prstGeom>
           <a:solidFill>
-            <a:srgbClr val="F7F7F3"/>
+            <a:srgbClr val="16233A"/>
           </a:solidFill>
           <a:ln>
             <a:noFill/>
@@ -3141,54 +3143,11 @@
           </a:fontRef>
         </p:style>
         <p:txBody>
-          <a:bodyPr rtlCol="0" anchor="ctr" wrap="square"/>
+          <a:bodyPr wrap="square" rtlCol="0" anchor="ctr"/>
           <a:lstStyle/>
           <a:p>
             <a:pPr algn="ctr"/>
-          </a:p>
-        </p:txBody>
-      </p:sp>
-      <p:sp>
-        <p:nvSpPr>
-          <p:cNvPr id="3" name="Rectangle 2"/>
-          <p:cNvSpPr/>
-          <p:nvPr/>
-        </p:nvSpPr>
-        <p:spPr>
-          <a:xfrm>
-            <a:off x="-25400" y="-25400"/>
-            <a:ext cx="12242800" cy="939800"/>
-          </a:xfrm>
-          <a:prstGeom prst="rect">
-            <a:avLst/>
-          </a:prstGeom>
-          <a:solidFill>
-            <a:srgbClr val="16233A"/>
-          </a:solidFill>
-          <a:ln>
-            <a:noFill/>
-          </a:ln>
-          <a:effectLst/>
-        </p:spPr>
-        <p:style>
-          <a:lnRef idx="1">
-            <a:schemeClr val="accent1"/>
-          </a:lnRef>
-          <a:fillRef idx="3">
-            <a:schemeClr val="accent1"/>
-          </a:fillRef>
-          <a:effectRef idx="2">
-            <a:schemeClr val="accent1"/>
-          </a:effectRef>
-          <a:fontRef idx="minor">
-            <a:schemeClr val="lt1"/>
-          </a:fontRef>
-        </p:style>
-        <p:txBody>
-          <a:bodyPr rtlCol="0" anchor="ctr" wrap="square"/>
-          <a:lstStyle/>
-          <a:p>
-            <a:pPr algn="ctr"/>
+            <a:endParaRPr/>
           </a:p>
         </p:txBody>
       </p:sp>
@@ -3272,10 +3231,11 @@
           </a:fontRef>
         </p:style>
         <p:txBody>
-          <a:bodyPr rtlCol="0" anchor="ctr" wrap="square"/>
+          <a:bodyPr wrap="square" rtlCol="0" anchor="ctr"/>
           <a:lstStyle/>
           <a:p>
             <a:pPr algn="ctr"/>
+            <a:endParaRPr/>
           </a:p>
         </p:txBody>
       </p:sp>
@@ -3316,10 +3276,11 @@
           </a:fontRef>
         </p:style>
         <p:txBody>
-          <a:bodyPr rtlCol="0" anchor="ctr" wrap="square"/>
+          <a:bodyPr wrap="square" rtlCol="0" anchor="ctr"/>
           <a:lstStyle/>
           <a:p>
             <a:pPr algn="ctr"/>
+            <a:endParaRPr/>
           </a:p>
         </p:txBody>
       </p:sp>
@@ -3360,10 +3321,11 @@
           </a:fontRef>
         </p:style>
         <p:txBody>
-          <a:bodyPr rtlCol="0" anchor="ctr" wrap="square"/>
+          <a:bodyPr wrap="square" rtlCol="0" anchor="ctr"/>
           <a:lstStyle/>
           <a:p>
             <a:pPr algn="ctr"/>
+            <a:endParaRPr/>
           </a:p>
         </p:txBody>
       </p:sp>
@@ -3404,10 +3366,11 @@
           </a:fontRef>
         </p:style>
         <p:txBody>
-          <a:bodyPr rtlCol="0" anchor="ctr" wrap="square"/>
+          <a:bodyPr wrap="square" rtlCol="0" anchor="ctr"/>
           <a:lstStyle/>
           <a:p>
             <a:pPr algn="ctr"/>
+            <a:endParaRPr/>
           </a:p>
         </p:txBody>
       </p:sp>
@@ -3448,10 +3411,11 @@
           </a:fontRef>
         </p:style>
         <p:txBody>
-          <a:bodyPr rtlCol="0" anchor="ctr" wrap="square"/>
+          <a:bodyPr wrap="square" rtlCol="0" anchor="ctr"/>
           <a:lstStyle/>
           <a:p>
             <a:pPr algn="ctr"/>
+            <a:endParaRPr/>
           </a:p>
         </p:txBody>
       </p:sp>
@@ -3489,7 +3453,7 @@
               </a:spcAft>
             </a:pPr>
             <a:r>
-              <a:rPr sz="4000" b="1">
+              <a:rPr sz="4000" b="1" dirty="0" err="1">
                 <a:solidFill>
                   <a:srgbClr val="16233A"/>
                 </a:solidFill>
@@ -3498,6 +3462,13 @@
               </a:rPr>
               <a:t>SELDモデルを用いた</a:t>
             </a:r>
+            <a:endParaRPr sz="4000" b="1" dirty="0">
+              <a:solidFill>
+                <a:srgbClr val="16233A"/>
+              </a:solidFill>
+              <a:latin typeface="Meiryo"/>
+              <a:ea typeface="メイリオ"/>
+            </a:endParaRPr>
           </a:p>
           <a:p>
             <a:pPr algn="l">
@@ -3512,7 +3483,7 @@
               </a:spcAft>
             </a:pPr>
             <a:r>
-              <a:rPr sz="4000" b="1">
+              <a:rPr sz="4000" b="1" dirty="0" err="1">
                 <a:solidFill>
                   <a:srgbClr val="16233A"/>
                 </a:solidFill>
@@ -3521,6 +3492,13 @@
               </a:rPr>
               <a:t>難聴歩行者向け屋外危険音</a:t>
             </a:r>
+            <a:endParaRPr sz="4000" b="1" dirty="0">
+              <a:solidFill>
+                <a:srgbClr val="16233A"/>
+              </a:solidFill>
+              <a:latin typeface="Meiryo"/>
+              <a:ea typeface="メイリオ"/>
+            </a:endParaRPr>
           </a:p>
           <a:p>
             <a:pPr algn="l">
@@ -3535,7 +3513,7 @@
               </a:spcAft>
             </a:pPr>
             <a:r>
-              <a:rPr sz="4000" b="1">
+              <a:rPr sz="4000" b="1" dirty="0" err="1">
                 <a:solidFill>
                   <a:srgbClr val="16233A"/>
                 </a:solidFill>
@@ -3544,6 +3522,13 @@
               </a:rPr>
               <a:t>通知システムの構築</a:t>
             </a:r>
+            <a:endParaRPr sz="4000" b="1" dirty="0">
+              <a:solidFill>
+                <a:srgbClr val="16233A"/>
+              </a:solidFill>
+              <a:latin typeface="Meiryo"/>
+              <a:ea typeface="メイリオ"/>
+            </a:endParaRPr>
           </a:p>
         </p:txBody>
       </p:sp>
@@ -3637,10 +3622,11 @@
           </a:fontRef>
         </p:style>
         <p:txBody>
-          <a:bodyPr rtlCol="0" anchor="ctr" wrap="square"/>
+          <a:bodyPr wrap="square" rtlCol="0" anchor="ctr"/>
           <a:lstStyle/>
           <a:p>
             <a:pPr algn="ctr"/>
+            <a:endParaRPr/>
           </a:p>
         </p:txBody>
       </p:sp>
@@ -3681,10 +3667,11 @@
           </a:fontRef>
         </p:style>
         <p:txBody>
-          <a:bodyPr rtlCol="0" anchor="ctr" wrap="square"/>
+          <a:bodyPr wrap="square" rtlCol="0" anchor="ctr"/>
           <a:lstStyle/>
           <a:p>
             <a:pPr algn="ctr"/>
+            <a:endParaRPr/>
           </a:p>
         </p:txBody>
       </p:sp>
@@ -3725,10 +3712,11 @@
           </a:fontRef>
         </p:style>
         <p:txBody>
-          <a:bodyPr rtlCol="0" anchor="ctr" wrap="square"/>
+          <a:bodyPr wrap="square" rtlCol="0" anchor="ctr"/>
           <a:lstStyle/>
           <a:p>
             <a:pPr algn="ctr"/>
+            <a:endParaRPr/>
           </a:p>
         </p:txBody>
       </p:sp>
@@ -3769,10 +3757,11 @@
           </a:fontRef>
         </p:style>
         <p:txBody>
-          <a:bodyPr rtlCol="0" anchor="ctr" wrap="square"/>
+          <a:bodyPr wrap="square" rtlCol="0" anchor="ctr"/>
           <a:lstStyle/>
           <a:p>
             <a:pPr algn="ctr"/>
+            <a:endParaRPr/>
           </a:p>
         </p:txBody>
       </p:sp>
@@ -3813,10 +3802,11 @@
           </a:fontRef>
         </p:style>
         <p:txBody>
-          <a:bodyPr rtlCol="0" anchor="ctr" wrap="square"/>
+          <a:bodyPr wrap="square" rtlCol="0" anchor="ctr"/>
           <a:lstStyle/>
           <a:p>
             <a:pPr algn="ctr"/>
+            <a:endParaRPr/>
           </a:p>
         </p:txBody>
       </p:sp>
@@ -3857,10 +3847,11 @@
           </a:fontRef>
         </p:style>
         <p:txBody>
-          <a:bodyPr rtlCol="0" anchor="ctr" wrap="square"/>
+          <a:bodyPr wrap="square" rtlCol="0" anchor="ctr"/>
           <a:lstStyle/>
           <a:p>
             <a:pPr algn="ctr"/>
+            <a:endParaRPr/>
           </a:p>
         </p:txBody>
       </p:sp>
@@ -3901,10 +3892,11 @@
           </a:fontRef>
         </p:style>
         <p:txBody>
-          <a:bodyPr rtlCol="0" anchor="ctr" wrap="square"/>
+          <a:bodyPr wrap="square" rtlCol="0" anchor="ctr"/>
           <a:lstStyle/>
           <a:p>
             <a:pPr algn="ctr"/>
+            <a:endParaRPr/>
           </a:p>
         </p:txBody>
       </p:sp>
@@ -3945,10 +3937,11 @@
           </a:fontRef>
         </p:style>
         <p:txBody>
-          <a:bodyPr rtlCol="0" anchor="ctr" wrap="square"/>
+          <a:bodyPr wrap="square" rtlCol="0" anchor="ctr"/>
           <a:lstStyle/>
           <a:p>
             <a:pPr algn="ctr"/>
+            <a:endParaRPr/>
           </a:p>
         </p:txBody>
       </p:sp>
@@ -3989,10 +3982,11 @@
           </a:fontRef>
         </p:style>
         <p:txBody>
-          <a:bodyPr rtlCol="0" anchor="ctr" wrap="square"/>
+          <a:bodyPr wrap="square" rtlCol="0" anchor="ctr"/>
           <a:lstStyle/>
           <a:p>
             <a:pPr algn="ctr"/>
+            <a:endParaRPr/>
           </a:p>
         </p:txBody>
       </p:sp>
@@ -4033,10 +4027,11 @@
           </a:fontRef>
         </p:style>
         <p:txBody>
-          <a:bodyPr rtlCol="0" anchor="ctr" wrap="square"/>
+          <a:bodyPr wrap="square" rtlCol="0" anchor="ctr"/>
           <a:lstStyle/>
           <a:p>
             <a:pPr algn="ctr"/>
+            <a:endParaRPr/>
           </a:p>
         </p:txBody>
       </p:sp>
@@ -4077,10 +4072,11 @@
           </a:fontRef>
         </p:style>
         <p:txBody>
-          <a:bodyPr rtlCol="0" anchor="ctr" wrap="square"/>
+          <a:bodyPr wrap="square" rtlCol="0" anchor="ctr"/>
           <a:lstStyle/>
           <a:p>
             <a:pPr algn="ctr"/>
+            <a:endParaRPr/>
           </a:p>
         </p:txBody>
       </p:sp>
@@ -4121,10 +4117,11 @@
           </a:fontRef>
         </p:style>
         <p:txBody>
-          <a:bodyPr rtlCol="0" anchor="ctr" wrap="square"/>
+          <a:bodyPr wrap="square" rtlCol="0" anchor="ctr"/>
           <a:lstStyle/>
           <a:p>
             <a:pPr algn="ctr"/>
+            <a:endParaRPr/>
           </a:p>
         </p:txBody>
       </p:sp>
@@ -4165,10 +4162,11 @@
           </a:fontRef>
         </p:style>
         <p:txBody>
-          <a:bodyPr rtlCol="0" anchor="ctr" wrap="square"/>
+          <a:bodyPr wrap="square" rtlCol="0" anchor="ctr"/>
           <a:lstStyle/>
           <a:p>
             <a:pPr algn="ctr"/>
+            <a:endParaRPr/>
           </a:p>
         </p:txBody>
       </p:sp>
@@ -4209,10 +4207,11 @@
           </a:fontRef>
         </p:style>
         <p:txBody>
-          <a:bodyPr rtlCol="0" anchor="ctr" wrap="square"/>
+          <a:bodyPr wrap="square" rtlCol="0" anchor="ctr"/>
           <a:lstStyle/>
           <a:p>
             <a:pPr algn="ctr"/>
+            <a:endParaRPr/>
           </a:p>
         </p:txBody>
       </p:sp>
@@ -4253,10 +4252,11 @@
           </a:fontRef>
         </p:style>
         <p:txBody>
-          <a:bodyPr rtlCol="0" anchor="ctr" wrap="square"/>
+          <a:bodyPr wrap="square" rtlCol="0" anchor="ctr"/>
           <a:lstStyle/>
           <a:p>
             <a:pPr algn="ctr"/>
+            <a:endParaRPr/>
           </a:p>
         </p:txBody>
       </p:sp>
@@ -4297,10 +4297,11 @@
           </a:fontRef>
         </p:style>
         <p:txBody>
-          <a:bodyPr rtlCol="0" anchor="ctr" wrap="square"/>
+          <a:bodyPr wrap="square" rtlCol="0" anchor="ctr"/>
           <a:lstStyle/>
           <a:p>
             <a:pPr algn="ctr"/>
+            <a:endParaRPr/>
           </a:p>
         </p:txBody>
       </p:sp>
@@ -4341,10 +4342,11 @@
           </a:fontRef>
         </p:style>
         <p:txBody>
-          <a:bodyPr rtlCol="0" anchor="ctr" wrap="square"/>
+          <a:bodyPr wrap="square" rtlCol="0" anchor="ctr"/>
           <a:lstStyle/>
           <a:p>
             <a:pPr algn="ctr"/>
+            <a:endParaRPr/>
           </a:p>
         </p:txBody>
       </p:sp>
@@ -4385,10 +4387,11 @@
           </a:fontRef>
         </p:style>
         <p:txBody>
-          <a:bodyPr rtlCol="0" anchor="ctr" wrap="square"/>
+          <a:bodyPr wrap="square" rtlCol="0" anchor="ctr"/>
           <a:lstStyle/>
           <a:p>
             <a:pPr algn="ctr"/>
+            <a:endParaRPr/>
           </a:p>
         </p:txBody>
       </p:sp>
@@ -4429,10 +4432,11 @@
           </a:fontRef>
         </p:style>
         <p:txBody>
-          <a:bodyPr rtlCol="0" anchor="ctr" wrap="square"/>
+          <a:bodyPr wrap="square" rtlCol="0" anchor="ctr"/>
           <a:lstStyle/>
           <a:p>
             <a:pPr algn="ctr"/>
+            <a:endParaRPr/>
           </a:p>
         </p:txBody>
       </p:sp>
@@ -4473,10 +4477,11 @@
           </a:fontRef>
         </p:style>
         <p:txBody>
-          <a:bodyPr rtlCol="0" anchor="ctr" wrap="square"/>
+          <a:bodyPr wrap="square" rtlCol="0" anchor="ctr"/>
           <a:lstStyle/>
           <a:p>
             <a:pPr algn="ctr"/>
+            <a:endParaRPr/>
           </a:p>
         </p:txBody>
       </p:sp>
@@ -4517,10 +4522,11 @@
           </a:fontRef>
         </p:style>
         <p:txBody>
-          <a:bodyPr rtlCol="0" anchor="ctr" wrap="square"/>
+          <a:bodyPr wrap="square" rtlCol="0" anchor="ctr"/>
           <a:lstStyle/>
           <a:p>
             <a:pPr algn="ctr"/>
+            <a:endParaRPr/>
           </a:p>
         </p:txBody>
       </p:sp>
@@ -4561,10 +4567,11 @@
           </a:fontRef>
         </p:style>
         <p:txBody>
-          <a:bodyPr rtlCol="0" anchor="ctr" wrap="square"/>
+          <a:bodyPr wrap="square" rtlCol="0" anchor="ctr"/>
           <a:lstStyle/>
           <a:p>
             <a:pPr algn="ctr"/>
+            <a:endParaRPr/>
           </a:p>
         </p:txBody>
       </p:sp>
@@ -4605,10 +4612,11 @@
           </a:fontRef>
         </p:style>
         <p:txBody>
-          <a:bodyPr rtlCol="0" anchor="ctr" wrap="square"/>
+          <a:bodyPr wrap="square" rtlCol="0" anchor="ctr"/>
           <a:lstStyle/>
           <a:p>
             <a:pPr algn="ctr"/>
+            <a:endParaRPr/>
           </a:p>
         </p:txBody>
       </p:sp>
@@ -4649,10 +4657,11 @@
           </a:fontRef>
         </p:style>
         <p:txBody>
-          <a:bodyPr rtlCol="0" anchor="ctr" wrap="square"/>
+          <a:bodyPr wrap="square" rtlCol="0" anchor="ctr"/>
           <a:lstStyle/>
           <a:p>
             <a:pPr algn="ctr"/>
+            <a:endParaRPr/>
           </a:p>
         </p:txBody>
       </p:sp>
@@ -4693,10 +4702,11 @@
           </a:fontRef>
         </p:style>
         <p:txBody>
-          <a:bodyPr rtlCol="0" anchor="ctr" wrap="square"/>
+          <a:bodyPr wrap="square" rtlCol="0" anchor="ctr"/>
           <a:lstStyle/>
           <a:p>
             <a:pPr algn="ctr"/>
+            <a:endParaRPr/>
           </a:p>
         </p:txBody>
       </p:sp>
@@ -4737,10 +4747,11 @@
           </a:fontRef>
         </p:style>
         <p:txBody>
-          <a:bodyPr rtlCol="0" anchor="ctr" wrap="square"/>
+          <a:bodyPr wrap="square" rtlCol="0" anchor="ctr"/>
           <a:lstStyle/>
           <a:p>
             <a:pPr algn="ctr"/>
+            <a:endParaRPr/>
           </a:p>
         </p:txBody>
       </p:sp>
@@ -4781,10 +4792,11 @@
           </a:fontRef>
         </p:style>
         <p:txBody>
-          <a:bodyPr rtlCol="0" anchor="ctr" wrap="square"/>
+          <a:bodyPr wrap="square" rtlCol="0" anchor="ctr"/>
           <a:lstStyle/>
           <a:p>
             <a:pPr algn="ctr"/>
+            <a:endParaRPr/>
           </a:p>
         </p:txBody>
       </p:sp>
@@ -4825,10 +4837,11 @@
           </a:fontRef>
         </p:style>
         <p:txBody>
-          <a:bodyPr rtlCol="0" anchor="ctr" wrap="square"/>
+          <a:bodyPr wrap="square" rtlCol="0" anchor="ctr"/>
           <a:lstStyle/>
           <a:p>
             <a:pPr algn="ctr"/>
+            <a:endParaRPr/>
           </a:p>
         </p:txBody>
       </p:sp>
@@ -4869,10 +4882,11 @@
           </a:fontRef>
         </p:style>
         <p:txBody>
-          <a:bodyPr rtlCol="0" anchor="ctr" wrap="square"/>
+          <a:bodyPr wrap="square" rtlCol="0" anchor="ctr"/>
           <a:lstStyle/>
           <a:p>
             <a:pPr algn="ctr"/>
+            <a:endParaRPr/>
           </a:p>
         </p:txBody>
       </p:sp>
@@ -4913,10 +4927,11 @@
           </a:fontRef>
         </p:style>
         <p:txBody>
-          <a:bodyPr rtlCol="0" anchor="ctr" wrap="square"/>
+          <a:bodyPr wrap="square" rtlCol="0" anchor="ctr"/>
           <a:lstStyle/>
           <a:p>
             <a:pPr algn="ctr"/>
+            <a:endParaRPr/>
           </a:p>
         </p:txBody>
       </p:sp>
@@ -4957,10 +4972,11 @@
           </a:fontRef>
         </p:style>
         <p:txBody>
-          <a:bodyPr rtlCol="0" anchor="ctr" wrap="square"/>
+          <a:bodyPr wrap="square" rtlCol="0" anchor="ctr"/>
           <a:lstStyle/>
           <a:p>
             <a:pPr algn="ctr"/>
+            <a:endParaRPr/>
           </a:p>
         </p:txBody>
       </p:sp>
@@ -5001,10 +5017,11 @@
           </a:fontRef>
         </p:style>
         <p:txBody>
-          <a:bodyPr rtlCol="0" anchor="ctr" wrap="square"/>
+          <a:bodyPr wrap="square" rtlCol="0" anchor="ctr"/>
           <a:lstStyle/>
           <a:p>
             <a:pPr algn="ctr"/>
+            <a:endParaRPr/>
           </a:p>
         </p:txBody>
       </p:sp>
@@ -5045,10 +5062,11 @@
           </a:fontRef>
         </p:style>
         <p:txBody>
-          <a:bodyPr rtlCol="0" anchor="ctr" wrap="square"/>
+          <a:bodyPr wrap="square" rtlCol="0" anchor="ctr"/>
           <a:lstStyle/>
           <a:p>
             <a:pPr algn="ctr"/>
+            <a:endParaRPr/>
           </a:p>
         </p:txBody>
       </p:sp>
@@ -5089,10 +5107,11 @@
           </a:fontRef>
         </p:style>
         <p:txBody>
-          <a:bodyPr rtlCol="0" anchor="ctr" wrap="square"/>
+          <a:bodyPr wrap="square" rtlCol="0" anchor="ctr"/>
           <a:lstStyle/>
           <a:p>
             <a:pPr algn="ctr"/>
+            <a:endParaRPr/>
           </a:p>
         </p:txBody>
       </p:sp>
@@ -5133,10 +5152,11 @@
           </a:fontRef>
         </p:style>
         <p:txBody>
-          <a:bodyPr rtlCol="0" anchor="ctr" wrap="square"/>
+          <a:bodyPr wrap="square" rtlCol="0" anchor="ctr"/>
           <a:lstStyle/>
           <a:p>
             <a:pPr algn="ctr"/>
+            <a:endParaRPr/>
           </a:p>
         </p:txBody>
       </p:sp>
@@ -5177,10 +5197,11 @@
           </a:fontRef>
         </p:style>
         <p:txBody>
-          <a:bodyPr rtlCol="0" anchor="ctr" wrap="square"/>
+          <a:bodyPr wrap="square" rtlCol="0" anchor="ctr"/>
           <a:lstStyle/>
           <a:p>
             <a:pPr algn="ctr"/>
+            <a:endParaRPr/>
           </a:p>
         </p:txBody>
       </p:sp>
@@ -5221,10 +5242,11 @@
           </a:fontRef>
         </p:style>
         <p:txBody>
-          <a:bodyPr rtlCol="0" anchor="ctr" wrap="square"/>
+          <a:bodyPr wrap="square" rtlCol="0" anchor="ctr"/>
           <a:lstStyle/>
           <a:p>
             <a:pPr algn="ctr"/>
+            <a:endParaRPr/>
           </a:p>
         </p:txBody>
       </p:sp>
@@ -5265,10 +5287,11 @@
           </a:fontRef>
         </p:style>
         <p:txBody>
-          <a:bodyPr rtlCol="0" anchor="ctr" wrap="square"/>
+          <a:bodyPr wrap="square" rtlCol="0" anchor="ctr"/>
           <a:lstStyle/>
           <a:p>
             <a:pPr algn="ctr"/>
+            <a:endParaRPr/>
           </a:p>
         </p:txBody>
       </p:sp>
@@ -5309,10 +5332,11 @@
           </a:fontRef>
         </p:style>
         <p:txBody>
-          <a:bodyPr rtlCol="0" anchor="ctr" wrap="square"/>
+          <a:bodyPr wrap="square" rtlCol="0" anchor="ctr"/>
           <a:lstStyle/>
           <a:p>
             <a:pPr algn="ctr"/>
+            <a:endParaRPr/>
           </a:p>
         </p:txBody>
       </p:sp>
@@ -5353,10 +5377,11 @@
           </a:fontRef>
         </p:style>
         <p:txBody>
-          <a:bodyPr rtlCol="0" anchor="ctr" wrap="square"/>
+          <a:bodyPr wrap="square" rtlCol="0" anchor="ctr"/>
           <a:lstStyle/>
           <a:p>
             <a:pPr algn="ctr"/>
+            <a:endParaRPr/>
           </a:p>
         </p:txBody>
       </p:sp>
@@ -5397,10 +5422,11 @@
           </a:fontRef>
         </p:style>
         <p:txBody>
-          <a:bodyPr rtlCol="0" anchor="ctr" wrap="square"/>
+          <a:bodyPr wrap="square" rtlCol="0" anchor="ctr"/>
           <a:lstStyle/>
           <a:p>
             <a:pPr algn="ctr"/>
+            <a:endParaRPr/>
           </a:p>
         </p:txBody>
       </p:sp>
@@ -5441,10 +5467,11 @@
           </a:fontRef>
         </p:style>
         <p:txBody>
-          <a:bodyPr rtlCol="0" anchor="ctr" wrap="square"/>
+          <a:bodyPr wrap="square" rtlCol="0" anchor="ctr"/>
           <a:lstStyle/>
           <a:p>
             <a:pPr algn="ctr"/>
+            <a:endParaRPr/>
           </a:p>
         </p:txBody>
       </p:sp>
@@ -5485,10 +5512,11 @@
           </a:fontRef>
         </p:style>
         <p:txBody>
-          <a:bodyPr rtlCol="0" anchor="ctr" wrap="square"/>
+          <a:bodyPr wrap="square" rtlCol="0" anchor="ctr"/>
           <a:lstStyle/>
           <a:p>
             <a:pPr algn="ctr"/>
+            <a:endParaRPr/>
           </a:p>
         </p:txBody>
       </p:sp>
@@ -5529,10 +5557,11 @@
           </a:fontRef>
         </p:style>
         <p:txBody>
-          <a:bodyPr rtlCol="0" anchor="ctr" wrap="square"/>
+          <a:bodyPr wrap="square" rtlCol="0" anchor="ctr"/>
           <a:lstStyle/>
           <a:p>
             <a:pPr algn="ctr"/>
+            <a:endParaRPr/>
           </a:p>
         </p:txBody>
       </p:sp>
@@ -5573,10 +5602,11 @@
           </a:fontRef>
         </p:style>
         <p:txBody>
-          <a:bodyPr rtlCol="0" anchor="ctr" wrap="square"/>
+          <a:bodyPr wrap="square" rtlCol="0" anchor="ctr"/>
           <a:lstStyle/>
           <a:p>
             <a:pPr algn="ctr"/>
+            <a:endParaRPr/>
           </a:p>
         </p:txBody>
       </p:sp>
@@ -5617,10 +5647,11 @@
           </a:fontRef>
         </p:style>
         <p:txBody>
-          <a:bodyPr rtlCol="0" anchor="ctr" wrap="square"/>
+          <a:bodyPr wrap="square" rtlCol="0" anchor="ctr"/>
           <a:lstStyle/>
           <a:p>
             <a:pPr algn="ctr"/>
+            <a:endParaRPr/>
           </a:p>
         </p:txBody>
       </p:sp>
@@ -5661,10 +5692,11 @@
           </a:fontRef>
         </p:style>
         <p:txBody>
-          <a:bodyPr rtlCol="0" anchor="ctr" wrap="square"/>
+          <a:bodyPr wrap="square" rtlCol="0" anchor="ctr"/>
           <a:lstStyle/>
           <a:p>
             <a:pPr algn="ctr"/>
+            <a:endParaRPr/>
           </a:p>
         </p:txBody>
       </p:sp>
@@ -5705,10 +5737,11 @@
           </a:fontRef>
         </p:style>
         <p:txBody>
-          <a:bodyPr rtlCol="0" anchor="ctr" wrap="square"/>
+          <a:bodyPr wrap="square" rtlCol="0" anchor="ctr"/>
           <a:lstStyle/>
           <a:p>
             <a:pPr algn="ctr"/>
+            <a:endParaRPr/>
           </a:p>
         </p:txBody>
       </p:sp>
@@ -5749,10 +5782,11 @@
           </a:fontRef>
         </p:style>
         <p:txBody>
-          <a:bodyPr rtlCol="0" anchor="ctr" wrap="square"/>
+          <a:bodyPr wrap="square" rtlCol="0" anchor="ctr"/>
           <a:lstStyle/>
           <a:p>
             <a:pPr algn="ctr"/>
+            <a:endParaRPr/>
           </a:p>
         </p:txBody>
       </p:sp>
@@ -5793,10 +5827,11 @@
           </a:fontRef>
         </p:style>
         <p:txBody>
-          <a:bodyPr rtlCol="0" anchor="ctr" wrap="square"/>
+          <a:bodyPr wrap="square" rtlCol="0" anchor="ctr"/>
           <a:lstStyle/>
           <a:p>
             <a:pPr algn="ctr"/>
+            <a:endParaRPr/>
           </a:p>
         </p:txBody>
       </p:sp>
@@ -5837,10 +5872,11 @@
           </a:fontRef>
         </p:style>
         <p:txBody>
-          <a:bodyPr rtlCol="0" anchor="ctr" wrap="square"/>
+          <a:bodyPr wrap="square" rtlCol="0" anchor="ctr"/>
           <a:lstStyle/>
           <a:p>
             <a:pPr algn="ctr"/>
+            <a:endParaRPr/>
           </a:p>
         </p:txBody>
       </p:sp>
@@ -5881,10 +5917,11 @@
           </a:fontRef>
         </p:style>
         <p:txBody>
-          <a:bodyPr rtlCol="0" anchor="ctr" wrap="square"/>
+          <a:bodyPr wrap="square" rtlCol="0" anchor="ctr"/>
           <a:lstStyle/>
           <a:p>
             <a:pPr algn="ctr"/>
+            <a:endParaRPr/>
           </a:p>
         </p:txBody>
       </p:sp>
@@ -5925,10 +5962,11 @@
           </a:fontRef>
         </p:style>
         <p:txBody>
-          <a:bodyPr rtlCol="0" anchor="ctr" wrap="square"/>
+          <a:bodyPr wrap="square" rtlCol="0" anchor="ctr"/>
           <a:lstStyle/>
           <a:p>
             <a:pPr algn="ctr"/>
+            <a:endParaRPr/>
           </a:p>
         </p:txBody>
       </p:sp>
@@ -5969,10 +6007,11 @@
           </a:fontRef>
         </p:style>
         <p:txBody>
-          <a:bodyPr rtlCol="0" anchor="ctr" wrap="square"/>
+          <a:bodyPr wrap="square" rtlCol="0" anchor="ctr"/>
           <a:lstStyle/>
           <a:p>
             <a:pPr algn="ctr"/>
+            <a:endParaRPr/>
           </a:p>
         </p:txBody>
       </p:sp>
@@ -6013,10 +6052,11 @@
           </a:fontRef>
         </p:style>
         <p:txBody>
-          <a:bodyPr rtlCol="0" anchor="ctr" wrap="square"/>
+          <a:bodyPr wrap="square" rtlCol="0" anchor="ctr"/>
           <a:lstStyle/>
           <a:p>
             <a:pPr algn="ctr"/>
+            <a:endParaRPr/>
           </a:p>
         </p:txBody>
       </p:sp>
@@ -6057,10 +6097,11 @@
           </a:fontRef>
         </p:style>
         <p:txBody>
-          <a:bodyPr rtlCol="0" anchor="ctr" wrap="square"/>
+          <a:bodyPr wrap="square" rtlCol="0" anchor="ctr"/>
           <a:lstStyle/>
           <a:p>
             <a:pPr algn="ctr"/>
+            <a:endParaRPr/>
           </a:p>
         </p:txBody>
       </p:sp>
@@ -6101,10 +6142,11 @@
           </a:fontRef>
         </p:style>
         <p:txBody>
-          <a:bodyPr rtlCol="0" anchor="ctr" wrap="square"/>
+          <a:bodyPr wrap="square" rtlCol="0" anchor="ctr"/>
           <a:lstStyle/>
           <a:p>
             <a:pPr algn="ctr"/>
+            <a:endParaRPr/>
           </a:p>
         </p:txBody>
       </p:sp>
@@ -6145,10 +6187,11 @@
           </a:fontRef>
         </p:style>
         <p:txBody>
-          <a:bodyPr rtlCol="0" anchor="ctr" wrap="square"/>
+          <a:bodyPr wrap="square" rtlCol="0" anchor="ctr"/>
           <a:lstStyle/>
           <a:p>
             <a:pPr algn="ctr"/>
+            <a:endParaRPr/>
           </a:p>
         </p:txBody>
       </p:sp>
@@ -6189,10 +6232,11 @@
           </a:fontRef>
         </p:style>
         <p:txBody>
-          <a:bodyPr rtlCol="0" anchor="ctr" wrap="square"/>
+          <a:bodyPr wrap="square" rtlCol="0" anchor="ctr"/>
           <a:lstStyle/>
           <a:p>
             <a:pPr algn="ctr"/>
+            <a:endParaRPr/>
           </a:p>
         </p:txBody>
       </p:sp>
@@ -6233,10 +6277,11 @@
           </a:fontRef>
         </p:style>
         <p:txBody>
-          <a:bodyPr rtlCol="0" anchor="ctr" wrap="square"/>
+          <a:bodyPr wrap="square" rtlCol="0" anchor="ctr"/>
           <a:lstStyle/>
           <a:p>
             <a:pPr algn="ctr"/>
+            <a:endParaRPr/>
           </a:p>
         </p:txBody>
       </p:sp>
@@ -6277,10 +6322,11 @@
           </a:fontRef>
         </p:style>
         <p:txBody>
-          <a:bodyPr rtlCol="0" anchor="ctr" wrap="square"/>
+          <a:bodyPr wrap="square" rtlCol="0" anchor="ctr"/>
           <a:lstStyle/>
           <a:p>
             <a:pPr algn="ctr"/>
+            <a:endParaRPr/>
           </a:p>
         </p:txBody>
       </p:sp>
@@ -6321,10 +6367,11 @@
           </a:fontRef>
         </p:style>
         <p:txBody>
-          <a:bodyPr rtlCol="0" anchor="ctr" wrap="square"/>
+          <a:bodyPr wrap="square" rtlCol="0" anchor="ctr"/>
           <a:lstStyle/>
           <a:p>
             <a:pPr algn="ctr"/>
+            <a:endParaRPr/>
           </a:p>
         </p:txBody>
       </p:sp>
@@ -6365,10 +6412,11 @@
           </a:fontRef>
         </p:style>
         <p:txBody>
-          <a:bodyPr rtlCol="0" anchor="ctr" wrap="square"/>
+          <a:bodyPr wrap="square" rtlCol="0" anchor="ctr"/>
           <a:lstStyle/>
           <a:p>
             <a:pPr algn="ctr"/>
+            <a:endParaRPr/>
           </a:p>
         </p:txBody>
       </p:sp>
@@ -6409,10 +6457,11 @@
           </a:fontRef>
         </p:style>
         <p:txBody>
-          <a:bodyPr rtlCol="0" anchor="ctr" wrap="square"/>
+          <a:bodyPr wrap="square" rtlCol="0" anchor="ctr"/>
           <a:lstStyle/>
           <a:p>
             <a:pPr algn="ctr"/>
+            <a:endParaRPr/>
           </a:p>
         </p:txBody>
       </p:sp>
@@ -6453,10 +6502,11 @@
           </a:fontRef>
         </p:style>
         <p:txBody>
-          <a:bodyPr rtlCol="0" anchor="ctr" wrap="square"/>
+          <a:bodyPr wrap="square" rtlCol="0" anchor="ctr"/>
           <a:lstStyle/>
           <a:p>
             <a:pPr algn="ctr"/>
+            <a:endParaRPr/>
           </a:p>
         </p:txBody>
       </p:sp>
@@ -6497,10 +6547,11 @@
           </a:fontRef>
         </p:style>
         <p:txBody>
-          <a:bodyPr rtlCol="0" anchor="ctr" wrap="square"/>
+          <a:bodyPr wrap="square" rtlCol="0" anchor="ctr"/>
           <a:lstStyle/>
           <a:p>
             <a:pPr algn="ctr"/>
+            <a:endParaRPr/>
           </a:p>
         </p:txBody>
       </p:sp>
@@ -6541,10 +6592,11 @@
           </a:fontRef>
         </p:style>
         <p:txBody>
-          <a:bodyPr rtlCol="0" anchor="ctr" wrap="square"/>
+          <a:bodyPr wrap="square" rtlCol="0" anchor="ctr"/>
           <a:lstStyle/>
           <a:p>
             <a:pPr algn="ctr"/>
+            <a:endParaRPr/>
           </a:p>
         </p:txBody>
       </p:sp>
@@ -6585,10 +6637,11 @@
           </a:fontRef>
         </p:style>
         <p:txBody>
-          <a:bodyPr rtlCol="0" anchor="ctr" wrap="square"/>
+          <a:bodyPr wrap="square" rtlCol="0" anchor="ctr"/>
           <a:lstStyle/>
           <a:p>
             <a:pPr algn="ctr"/>
+            <a:endParaRPr/>
           </a:p>
         </p:txBody>
       </p:sp>
@@ -6629,10 +6682,11 @@
           </a:fontRef>
         </p:style>
         <p:txBody>
-          <a:bodyPr rtlCol="0" anchor="ctr" wrap="square"/>
+          <a:bodyPr wrap="square" rtlCol="0" anchor="ctr"/>
           <a:lstStyle/>
           <a:p>
             <a:pPr algn="ctr"/>
+            <a:endParaRPr/>
           </a:p>
         </p:txBody>
       </p:sp>
@@ -6673,10 +6727,11 @@
           </a:fontRef>
         </p:style>
         <p:txBody>
-          <a:bodyPr rtlCol="0" anchor="ctr" wrap="square"/>
+          <a:bodyPr wrap="square" rtlCol="0" anchor="ctr"/>
           <a:lstStyle/>
           <a:p>
             <a:pPr algn="ctr"/>
+            <a:endParaRPr/>
           </a:p>
         </p:txBody>
       </p:sp>
@@ -6717,10 +6772,11 @@
           </a:fontRef>
         </p:style>
         <p:txBody>
-          <a:bodyPr rtlCol="0" anchor="ctr" wrap="square"/>
+          <a:bodyPr wrap="square" rtlCol="0" anchor="ctr"/>
           <a:lstStyle/>
           <a:p>
             <a:pPr algn="ctr"/>
+            <a:endParaRPr/>
           </a:p>
         </p:txBody>
       </p:sp>
@@ -6761,10 +6817,11 @@
           </a:fontRef>
         </p:style>
         <p:txBody>
-          <a:bodyPr rtlCol="0" anchor="ctr" wrap="square"/>
+          <a:bodyPr wrap="square" rtlCol="0" anchor="ctr"/>
           <a:lstStyle/>
           <a:p>
             <a:pPr algn="ctr"/>
+            <a:endParaRPr/>
           </a:p>
         </p:txBody>
       </p:sp>
@@ -6805,10 +6862,11 @@
           </a:fontRef>
         </p:style>
         <p:txBody>
-          <a:bodyPr rtlCol="0" anchor="ctr" wrap="square"/>
+          <a:bodyPr wrap="square" rtlCol="0" anchor="ctr"/>
           <a:lstStyle/>
           <a:p>
             <a:pPr algn="ctr"/>
+            <a:endParaRPr/>
           </a:p>
         </p:txBody>
       </p:sp>
@@ -6849,10 +6907,11 @@
           </a:fontRef>
         </p:style>
         <p:txBody>
-          <a:bodyPr rtlCol="0" anchor="ctr" wrap="square"/>
+          <a:bodyPr wrap="square" rtlCol="0" anchor="ctr"/>
           <a:lstStyle/>
           <a:p>
             <a:pPr algn="ctr"/>
+            <a:endParaRPr/>
           </a:p>
         </p:txBody>
       </p:sp>
@@ -6893,10 +6952,11 @@
           </a:fontRef>
         </p:style>
         <p:txBody>
-          <a:bodyPr rtlCol="0" anchor="ctr" wrap="square"/>
+          <a:bodyPr wrap="square" rtlCol="0" anchor="ctr"/>
           <a:lstStyle/>
           <a:p>
             <a:pPr algn="ctr"/>
+            <a:endParaRPr/>
           </a:p>
         </p:txBody>
       </p:sp>
@@ -6937,10 +6997,11 @@
           </a:fontRef>
         </p:style>
         <p:txBody>
-          <a:bodyPr rtlCol="0" anchor="ctr" wrap="square"/>
+          <a:bodyPr wrap="square" rtlCol="0" anchor="ctr"/>
           <a:lstStyle/>
           <a:p>
             <a:pPr algn="ctr"/>
+            <a:endParaRPr/>
           </a:p>
         </p:txBody>
       </p:sp>
@@ -6981,10 +7042,11 @@
           </a:fontRef>
         </p:style>
         <p:txBody>
-          <a:bodyPr rtlCol="0" anchor="ctr" wrap="square"/>
+          <a:bodyPr wrap="square" rtlCol="0" anchor="ctr"/>
           <a:lstStyle/>
           <a:p>
             <a:pPr algn="ctr"/>
+            <a:endParaRPr/>
           </a:p>
         </p:txBody>
       </p:sp>
@@ -7025,10 +7087,11 @@
           </a:fontRef>
         </p:style>
         <p:txBody>
-          <a:bodyPr rtlCol="0" anchor="ctr" wrap="square"/>
+          <a:bodyPr wrap="square" rtlCol="0" anchor="ctr"/>
           <a:lstStyle/>
           <a:p>
             <a:pPr algn="ctr"/>
+            <a:endParaRPr/>
           </a:p>
         </p:txBody>
       </p:sp>
@@ -7069,10 +7132,11 @@
           </a:fontRef>
         </p:style>
         <p:txBody>
-          <a:bodyPr rtlCol="0" anchor="ctr" wrap="square"/>
+          <a:bodyPr wrap="square" rtlCol="0" anchor="ctr"/>
           <a:lstStyle/>
           <a:p>
             <a:pPr algn="ctr"/>
+            <a:endParaRPr/>
           </a:p>
         </p:txBody>
       </p:sp>
@@ -7113,10 +7177,11 @@
           </a:fontRef>
         </p:style>
         <p:txBody>
-          <a:bodyPr rtlCol="0" anchor="ctr" wrap="square"/>
+          <a:bodyPr wrap="square" rtlCol="0" anchor="ctr"/>
           <a:lstStyle/>
           <a:p>
             <a:pPr algn="ctr"/>
+            <a:endParaRPr/>
           </a:p>
         </p:txBody>
       </p:sp>
@@ -7193,7 +7258,7 @@
           </a:fontRef>
         </p:style>
         <p:txBody>
-          <a:bodyPr rtlCol="0" anchor="ctr" wrap="square" lIns="25400" rIns="25400" tIns="12700" bIns="12700"/>
+          <a:bodyPr wrap="square" lIns="25400" tIns="12700" rIns="25400" bIns="12700" rtlCol="0" anchor="ctr"/>
           <a:lstStyle/>
           <a:p>
             <a:pPr algn="ctr">
@@ -7254,7 +7319,7 @@
           </a:fontRef>
         </p:style>
         <p:txBody>
-          <a:bodyPr rtlCol="0" anchor="ctr" wrap="square" lIns="25400" rIns="25400" tIns="12700" bIns="12700"/>
+          <a:bodyPr wrap="square" lIns="25400" tIns="12700" rIns="25400" bIns="12700" rtlCol="0" anchor="ctr"/>
           <a:lstStyle/>
           <a:p>
             <a:pPr algn="ctr">
@@ -7315,7 +7380,7 @@
           </a:fontRef>
         </p:style>
         <p:txBody>
-          <a:bodyPr rtlCol="0" anchor="ctr" wrap="square" lIns="25400" rIns="25400" tIns="12700" bIns="12700"/>
+          <a:bodyPr wrap="square" lIns="25400" tIns="12700" rIns="25400" bIns="12700" rtlCol="0" anchor="ctr"/>
           <a:lstStyle/>
           <a:p>
             <a:pPr algn="ctr">
@@ -7376,7 +7441,7 @@
           </a:fontRef>
         </p:style>
         <p:txBody>
-          <a:bodyPr rtlCol="0" anchor="ctr" wrap="square" lIns="25400" rIns="25400" tIns="12700" bIns="12700"/>
+          <a:bodyPr wrap="square" lIns="25400" tIns="12700" rIns="25400" bIns="12700" rtlCol="0" anchor="ctr"/>
           <a:lstStyle/>
           <a:p>
             <a:pPr algn="ctr">
@@ -7437,7 +7502,7 @@
           </a:fontRef>
         </p:style>
         <p:txBody>
-          <a:bodyPr rtlCol="0" anchor="ctr" wrap="square" lIns="25400" rIns="25400" tIns="12700" bIns="12700"/>
+          <a:bodyPr wrap="square" lIns="25400" tIns="12700" rIns="25400" bIns="12700" rtlCol="0" anchor="ctr"/>
           <a:lstStyle/>
           <a:p>
             <a:pPr algn="ctr">
@@ -7498,7 +7563,7 @@
           </a:fontRef>
         </p:style>
         <p:txBody>
-          <a:bodyPr rtlCol="0" anchor="ctr" wrap="square" lIns="25400" rIns="25400" tIns="12700" bIns="12700"/>
+          <a:bodyPr wrap="square" lIns="25400" tIns="12700" rIns="25400" bIns="12700" rtlCol="0" anchor="ctr"/>
           <a:lstStyle/>
           <a:p>
             <a:pPr algn="ctr">
@@ -7574,7 +7639,7 @@
 </file>
 
 <file path=ppt/slides/slide10.xml><?xml version="1.0" encoding="utf-8"?>
-<p:sld xmlns:a="http://schemas.openxmlformats.org/drawingml/2006/main" xmlns:p="http://schemas.openxmlformats.org/presentationml/2006/main" xmlns:r="http://schemas.openxmlformats.org/officeDocument/2006/relationships">
+<p:sld xmlns:a="http://schemas.openxmlformats.org/drawingml/2006/main" xmlns:r="http://schemas.openxmlformats.org/officeDocument/2006/relationships" xmlns:p="http://schemas.openxmlformats.org/presentationml/2006/main">
   <p:cSld>
     <p:spTree>
       <p:nvGrpSpPr>
@@ -7582,7 +7647,14 @@
         <p:cNvGrpSpPr/>
         <p:nvPr/>
       </p:nvGrpSpPr>
-      <p:grpSpPr/>
+      <p:grpSpPr>
+        <a:xfrm>
+          <a:off x="0" y="0"/>
+          <a:ext cx="0" cy="0"/>
+          <a:chOff x="0" y="0"/>
+          <a:chExt cx="0" cy="0"/>
+        </a:xfrm>
+      </p:grpSpPr>
       <p:sp>
         <p:nvSpPr>
           <p:cNvPr id="2" name="Rectangle 1"/>
@@ -7620,10 +7692,11 @@
           </a:fontRef>
         </p:style>
         <p:txBody>
-          <a:bodyPr rtlCol="0" anchor="ctr" wrap="square"/>
+          <a:bodyPr wrap="square" rtlCol="0" anchor="ctr"/>
           <a:lstStyle/>
           <a:p>
             <a:pPr algn="ctr"/>
+            <a:endParaRPr/>
           </a:p>
         </p:txBody>
       </p:sp>
@@ -7752,10 +7825,11 @@
           </a:fontRef>
         </p:style>
         <p:txBody>
-          <a:bodyPr rtlCol="0" anchor="ctr" wrap="square"/>
+          <a:bodyPr wrap="square" rtlCol="0" anchor="ctr"/>
           <a:lstStyle/>
           <a:p>
             <a:pPr algn="ctr"/>
+            <a:endParaRPr/>
           </a:p>
         </p:txBody>
       </p:sp>
@@ -8148,10 +8222,11 @@
           </a:fontRef>
         </p:style>
         <p:txBody>
-          <a:bodyPr rtlCol="0" anchor="ctr" wrap="square"/>
+          <a:bodyPr wrap="square" rtlCol="0" anchor="ctr"/>
           <a:lstStyle/>
           <a:p>
             <a:pPr algn="ctr"/>
+            <a:endParaRPr/>
           </a:p>
         </p:txBody>
       </p:sp>
@@ -8517,7 +8592,7 @@
           </a:fontRef>
         </p:style>
         <p:txBody>
-          <a:bodyPr rtlCol="0" anchor="t" wrap="square" lIns="177800" rIns="177800" tIns="127000" bIns="101600"/>
+          <a:bodyPr wrap="square" lIns="177800" tIns="127000" rIns="177800" bIns="101600" rtlCol="0" anchor="t"/>
           <a:lstStyle/>
           <a:p>
             <a:pPr algn="l">
@@ -8656,7 +8731,7 @@
           </a:fontRef>
         </p:style>
         <p:txBody>
-          <a:bodyPr rtlCol="0" anchor="t" wrap="square" lIns="177800" rIns="177800" tIns="127000" bIns="101600"/>
+          <a:bodyPr wrap="square" lIns="177800" tIns="127000" rIns="177800" bIns="101600" rtlCol="0" anchor="t"/>
           <a:lstStyle/>
           <a:p>
             <a:pPr algn="l">
@@ -8775,7 +8850,7 @@
           </a:fontRef>
         </p:style>
         <p:txBody>
-          <a:bodyPr rtlCol="0" anchor="t" wrap="square" lIns="177800" rIns="177800" tIns="127000" bIns="101600"/>
+          <a:bodyPr wrap="square" lIns="177800" tIns="127000" rIns="177800" bIns="101600" rtlCol="0" anchor="t"/>
           <a:lstStyle/>
           <a:p>
             <a:pPr algn="l">
@@ -8928,7 +9003,7 @@
           </a:fontRef>
         </p:style>
         <p:txBody>
-          <a:bodyPr rtlCol="0" anchor="ctr" wrap="square" lIns="25400" rIns="25400" tIns="12700" bIns="12700"/>
+          <a:bodyPr wrap="square" lIns="25400" tIns="12700" rIns="25400" bIns="12700" rtlCol="0" anchor="ctr"/>
           <a:lstStyle/>
           <a:p>
             <a:pPr algn="ctr">
@@ -8989,7 +9064,7 @@
           </a:fontRef>
         </p:style>
         <p:txBody>
-          <a:bodyPr rtlCol="0" anchor="ctr" wrap="square" lIns="25400" rIns="25400" tIns="12700" bIns="12700"/>
+          <a:bodyPr wrap="square" lIns="25400" tIns="12700" rIns="25400" bIns="12700" rtlCol="0" anchor="ctr"/>
           <a:lstStyle/>
           <a:p>
             <a:pPr algn="ctr">
@@ -9050,7 +9125,7 @@
           </a:fontRef>
         </p:style>
         <p:txBody>
-          <a:bodyPr rtlCol="0" anchor="ctr" wrap="square" lIns="25400" rIns="25400" tIns="12700" bIns="12700"/>
+          <a:bodyPr wrap="square" lIns="25400" tIns="12700" rIns="25400" bIns="12700" rtlCol="0" anchor="ctr"/>
           <a:lstStyle/>
           <a:p>
             <a:pPr algn="ctr">
@@ -9111,7 +9186,7 @@
           </a:fontRef>
         </p:style>
         <p:txBody>
-          <a:bodyPr rtlCol="0" anchor="ctr" wrap="square" lIns="25400" rIns="25400" tIns="12700" bIns="12700"/>
+          <a:bodyPr wrap="square" lIns="25400" tIns="12700" rIns="25400" bIns="12700" rtlCol="0" anchor="ctr"/>
           <a:lstStyle/>
           <a:p>
             <a:pPr algn="ctr">
@@ -9172,7 +9247,7 @@
           </a:fontRef>
         </p:style>
         <p:txBody>
-          <a:bodyPr rtlCol="0" anchor="ctr" wrap="square" lIns="25400" rIns="25400" tIns="12700" bIns="12700"/>
+          <a:bodyPr wrap="square" lIns="25400" tIns="12700" rIns="25400" bIns="12700" rtlCol="0" anchor="ctr"/>
           <a:lstStyle/>
           <a:p>
             <a:pPr algn="ctr">
@@ -9233,7 +9308,7 @@
           </a:fontRef>
         </p:style>
         <p:txBody>
-          <a:bodyPr rtlCol="0" anchor="ctr" wrap="square" lIns="25400" rIns="25400" tIns="12700" bIns="12700"/>
+          <a:bodyPr wrap="square" lIns="25400" tIns="12700" rIns="25400" bIns="12700" rtlCol="0" anchor="ctr"/>
           <a:lstStyle/>
           <a:p>
             <a:pPr algn="ctr">
@@ -9309,7 +9384,7 @@
 </file>
 
 <file path=ppt/slides/slide11.xml><?xml version="1.0" encoding="utf-8"?>
-<p:sld xmlns:a="http://schemas.openxmlformats.org/drawingml/2006/main" xmlns:p="http://schemas.openxmlformats.org/presentationml/2006/main" xmlns:r="http://schemas.openxmlformats.org/officeDocument/2006/relationships">
+<p:sld xmlns:a="http://schemas.openxmlformats.org/drawingml/2006/main" xmlns:r="http://schemas.openxmlformats.org/officeDocument/2006/relationships" xmlns:p="http://schemas.openxmlformats.org/presentationml/2006/main">
   <p:cSld>
     <p:spTree>
       <p:nvGrpSpPr>
@@ -9317,7 +9392,14 @@
         <p:cNvGrpSpPr/>
         <p:nvPr/>
       </p:nvGrpSpPr>
-      <p:grpSpPr/>
+      <p:grpSpPr>
+        <a:xfrm>
+          <a:off x="0" y="0"/>
+          <a:ext cx="0" cy="0"/>
+          <a:chOff x="0" y="0"/>
+          <a:chExt cx="0" cy="0"/>
+        </a:xfrm>
+      </p:grpSpPr>
       <p:sp>
         <p:nvSpPr>
           <p:cNvPr id="2" name="Rectangle 1"/>
@@ -9355,10 +9437,11 @@
           </a:fontRef>
         </p:style>
         <p:txBody>
-          <a:bodyPr rtlCol="0" anchor="ctr" wrap="square"/>
+          <a:bodyPr wrap="square" rtlCol="0" anchor="ctr"/>
           <a:lstStyle/>
           <a:p>
             <a:pPr algn="ctr"/>
+            <a:endParaRPr/>
           </a:p>
         </p:txBody>
       </p:sp>
@@ -9550,7 +9633,7 @@
           </a:fontRef>
         </p:style>
         <p:txBody>
-          <a:bodyPr rtlCol="0" anchor="t" wrap="square" lIns="177800" rIns="177800" tIns="127000" bIns="101600"/>
+          <a:bodyPr wrap="square" lIns="177800" tIns="127000" rIns="177800" bIns="101600" rtlCol="0" anchor="t"/>
           <a:lstStyle/>
           <a:p>
             <a:pPr algn="l">
@@ -9636,7 +9719,7 @@
           </a:fontRef>
         </p:style>
         <p:txBody>
-          <a:bodyPr rtlCol="0" anchor="t" wrap="square" lIns="177800" rIns="177800" tIns="127000" bIns="101600"/>
+          <a:bodyPr wrap="square" lIns="177800" tIns="127000" rIns="177800" bIns="101600" rtlCol="0" anchor="t"/>
           <a:lstStyle/>
           <a:p>
             <a:pPr algn="l">
@@ -9722,7 +9805,7 @@
           </a:fontRef>
         </p:style>
         <p:txBody>
-          <a:bodyPr rtlCol="0" anchor="t" wrap="square" lIns="177800" rIns="177800" tIns="127000" bIns="101600"/>
+          <a:bodyPr wrap="square" lIns="177800" tIns="127000" rIns="177800" bIns="101600" rtlCol="0" anchor="t"/>
           <a:lstStyle/>
           <a:p>
             <a:pPr algn="l">
@@ -9842,7 +9925,7 @@
           </a:fontRef>
         </p:style>
         <p:txBody>
-          <a:bodyPr rtlCol="0" anchor="ctr" wrap="square" lIns="25400" rIns="25400" tIns="12700" bIns="12700"/>
+          <a:bodyPr wrap="square" lIns="25400" tIns="12700" rIns="25400" bIns="12700" rtlCol="0" anchor="ctr"/>
           <a:lstStyle/>
           <a:p>
             <a:pPr algn="ctr">
@@ -9903,7 +9986,7 @@
           </a:fontRef>
         </p:style>
         <p:txBody>
-          <a:bodyPr rtlCol="0" anchor="ctr" wrap="square" lIns="25400" rIns="25400" tIns="12700" bIns="12700"/>
+          <a:bodyPr wrap="square" lIns="25400" tIns="12700" rIns="25400" bIns="12700" rtlCol="0" anchor="ctr"/>
           <a:lstStyle/>
           <a:p>
             <a:pPr algn="ctr">
@@ -9964,7 +10047,7 @@
           </a:fontRef>
         </p:style>
         <p:txBody>
-          <a:bodyPr rtlCol="0" anchor="ctr" wrap="square" lIns="25400" rIns="25400" tIns="12700" bIns="12700"/>
+          <a:bodyPr wrap="square" lIns="25400" tIns="12700" rIns="25400" bIns="12700" rtlCol="0" anchor="ctr"/>
           <a:lstStyle/>
           <a:p>
             <a:pPr algn="ctr">
@@ -10025,7 +10108,7 @@
           </a:fontRef>
         </p:style>
         <p:txBody>
-          <a:bodyPr rtlCol="0" anchor="ctr" wrap="square" lIns="25400" rIns="25400" tIns="12700" bIns="12700"/>
+          <a:bodyPr wrap="square" lIns="25400" tIns="12700" rIns="25400" bIns="12700" rtlCol="0" anchor="ctr"/>
           <a:lstStyle/>
           <a:p>
             <a:pPr algn="ctr">
@@ -10086,7 +10169,7 @@
           </a:fontRef>
         </p:style>
         <p:txBody>
-          <a:bodyPr rtlCol="0" anchor="ctr" wrap="square" lIns="25400" rIns="25400" tIns="12700" bIns="12700"/>
+          <a:bodyPr wrap="square" lIns="25400" tIns="12700" rIns="25400" bIns="12700" rtlCol="0" anchor="ctr"/>
           <a:lstStyle/>
           <a:p>
             <a:pPr algn="ctr">
@@ -10147,7 +10230,7 @@
           </a:fontRef>
         </p:style>
         <p:txBody>
-          <a:bodyPr rtlCol="0" anchor="ctr" wrap="square" lIns="25400" rIns="25400" tIns="12700" bIns="12700"/>
+          <a:bodyPr wrap="square" lIns="25400" tIns="12700" rIns="25400" bIns="12700" rtlCol="0" anchor="ctr"/>
           <a:lstStyle/>
           <a:p>
             <a:pPr algn="ctr">
@@ -10223,7 +10306,7 @@
 </file>
 
 <file path=ppt/slides/slide12.xml><?xml version="1.0" encoding="utf-8"?>
-<p:sld xmlns:a="http://schemas.openxmlformats.org/drawingml/2006/main" xmlns:p="http://schemas.openxmlformats.org/presentationml/2006/main" xmlns:r="http://schemas.openxmlformats.org/officeDocument/2006/relationships">
+<p:sld xmlns:a="http://schemas.openxmlformats.org/drawingml/2006/main" xmlns:r="http://schemas.openxmlformats.org/officeDocument/2006/relationships" xmlns:p="http://schemas.openxmlformats.org/presentationml/2006/main">
   <p:cSld>
     <p:spTree>
       <p:nvGrpSpPr>
@@ -10231,7 +10314,14 @@
         <p:cNvGrpSpPr/>
         <p:nvPr/>
       </p:nvGrpSpPr>
-      <p:grpSpPr/>
+      <p:grpSpPr>
+        <a:xfrm>
+          <a:off x="0" y="0"/>
+          <a:ext cx="0" cy="0"/>
+          <a:chOff x="0" y="0"/>
+          <a:chExt cx="0" cy="0"/>
+        </a:xfrm>
+      </p:grpSpPr>
       <p:sp>
         <p:nvSpPr>
           <p:cNvPr id="2" name="Rectangle 1"/>
@@ -10269,10 +10359,11 @@
           </a:fontRef>
         </p:style>
         <p:txBody>
-          <a:bodyPr rtlCol="0" anchor="ctr" wrap="square"/>
+          <a:bodyPr wrap="square" rtlCol="0" anchor="ctr"/>
           <a:lstStyle/>
           <a:p>
             <a:pPr algn="ctr"/>
+            <a:endParaRPr/>
           </a:p>
         </p:txBody>
       </p:sp>
@@ -10401,7 +10492,7 @@
           </a:fontRef>
         </p:style>
         <p:txBody>
-          <a:bodyPr rtlCol="0" anchor="ctr" wrap="square" lIns="177800" tIns="431800"/>
+          <a:bodyPr wrap="square" lIns="177800" tIns="431800" rtlCol="0" anchor="ctr"/>
           <a:lstStyle/>
           <a:p>
             <a:pPr algn="l">
@@ -10465,7 +10556,7 @@
           </a:fontRef>
         </p:style>
         <p:txBody>
-          <a:bodyPr rtlCol="0" anchor="ctr" wrap="square" lIns="38100" rIns="38100" tIns="0" bIns="0"/>
+          <a:bodyPr wrap="square" lIns="38100" tIns="0" rIns="38100" bIns="0" rtlCol="0" anchor="ctr"/>
           <a:lstStyle/>
           <a:p>
             <a:pPr algn="ctr">
@@ -10528,7 +10619,7 @@
           </a:fontRef>
         </p:style>
         <p:txBody>
-          <a:bodyPr rtlCol="0" anchor="ctr" wrap="square" lIns="177800" tIns="431800"/>
+          <a:bodyPr wrap="square" lIns="177800" tIns="431800" rtlCol="0" anchor="ctr"/>
           <a:lstStyle/>
           <a:p>
             <a:pPr algn="l">
@@ -10592,7 +10683,7 @@
           </a:fontRef>
         </p:style>
         <p:txBody>
-          <a:bodyPr rtlCol="0" anchor="ctr" wrap="square" lIns="38100" rIns="38100" tIns="0" bIns="0"/>
+          <a:bodyPr wrap="square" lIns="38100" tIns="0" rIns="38100" bIns="0" rtlCol="0" anchor="ctr"/>
           <a:lstStyle/>
           <a:p>
             <a:pPr algn="ctr">
@@ -10655,7 +10746,7 @@
           </a:fontRef>
         </p:style>
         <p:txBody>
-          <a:bodyPr rtlCol="0" anchor="ctr" wrap="square" lIns="177800" tIns="431800"/>
+          <a:bodyPr wrap="square" lIns="177800" tIns="431800" rtlCol="0" anchor="ctr"/>
           <a:lstStyle/>
           <a:p>
             <a:pPr algn="l">
@@ -10719,7 +10810,7 @@
           </a:fontRef>
         </p:style>
         <p:txBody>
-          <a:bodyPr rtlCol="0" anchor="ctr" wrap="square" lIns="38100" rIns="38100" tIns="0" bIns="0"/>
+          <a:bodyPr wrap="square" lIns="38100" tIns="0" rIns="38100" bIns="0" rtlCol="0" anchor="ctr"/>
           <a:lstStyle/>
           <a:p>
             <a:pPr algn="ctr">
@@ -10889,10 +10980,11 @@
           </a:fontRef>
         </p:style>
         <p:txBody>
-          <a:bodyPr rtlCol="0" anchor="ctr" wrap="square"/>
+          <a:bodyPr wrap="square" rtlCol="0" anchor="ctr"/>
           <a:lstStyle/>
           <a:p>
             <a:pPr algn="ctr"/>
+            <a:endParaRPr/>
           </a:p>
         </p:txBody>
       </p:sp>
@@ -10935,7 +11027,7 @@
           </a:fontRef>
         </p:style>
         <p:txBody>
-          <a:bodyPr rtlCol="0" anchor="ctr" wrap="square" lIns="203200" tIns="101600"/>
+          <a:bodyPr wrap="square" lIns="203200" tIns="101600" rtlCol="0" anchor="ctr"/>
           <a:lstStyle/>
           <a:p>
             <a:pPr algn="l">
@@ -11065,7 +11157,7 @@
           </a:fontRef>
         </p:style>
         <p:txBody>
-          <a:bodyPr rtlCol="0" anchor="ctr" wrap="square" lIns="25400" rIns="25400" tIns="12700" bIns="12700"/>
+          <a:bodyPr wrap="square" lIns="25400" tIns="12700" rIns="25400" bIns="12700" rtlCol="0" anchor="ctr"/>
           <a:lstStyle/>
           <a:p>
             <a:pPr algn="ctr">
@@ -11126,7 +11218,7 @@
           </a:fontRef>
         </p:style>
         <p:txBody>
-          <a:bodyPr rtlCol="0" anchor="ctr" wrap="square" lIns="25400" rIns="25400" tIns="12700" bIns="12700"/>
+          <a:bodyPr wrap="square" lIns="25400" tIns="12700" rIns="25400" bIns="12700" rtlCol="0" anchor="ctr"/>
           <a:lstStyle/>
           <a:p>
             <a:pPr algn="ctr">
@@ -11187,7 +11279,7 @@
           </a:fontRef>
         </p:style>
         <p:txBody>
-          <a:bodyPr rtlCol="0" anchor="ctr" wrap="square" lIns="25400" rIns="25400" tIns="12700" bIns="12700"/>
+          <a:bodyPr wrap="square" lIns="25400" tIns="12700" rIns="25400" bIns="12700" rtlCol="0" anchor="ctr"/>
           <a:lstStyle/>
           <a:p>
             <a:pPr algn="ctr">
@@ -11248,7 +11340,7 @@
           </a:fontRef>
         </p:style>
         <p:txBody>
-          <a:bodyPr rtlCol="0" anchor="ctr" wrap="square" lIns="25400" rIns="25400" tIns="12700" bIns="12700"/>
+          <a:bodyPr wrap="square" lIns="25400" tIns="12700" rIns="25400" bIns="12700" rtlCol="0" anchor="ctr"/>
           <a:lstStyle/>
           <a:p>
             <a:pPr algn="ctr">
@@ -11309,7 +11401,7 @@
           </a:fontRef>
         </p:style>
         <p:txBody>
-          <a:bodyPr rtlCol="0" anchor="ctr" wrap="square" lIns="25400" rIns="25400" tIns="12700" bIns="12700"/>
+          <a:bodyPr wrap="square" lIns="25400" tIns="12700" rIns="25400" bIns="12700" rtlCol="0" anchor="ctr"/>
           <a:lstStyle/>
           <a:p>
             <a:pPr algn="ctr">
@@ -11370,7 +11462,7 @@
           </a:fontRef>
         </p:style>
         <p:txBody>
-          <a:bodyPr rtlCol="0" anchor="ctr" wrap="square" lIns="25400" rIns="25400" tIns="12700" bIns="12700"/>
+          <a:bodyPr wrap="square" lIns="25400" tIns="12700" rIns="25400" bIns="12700" rtlCol="0" anchor="ctr"/>
           <a:lstStyle/>
           <a:p>
             <a:pPr algn="ctr">
@@ -11446,7 +11538,7 @@
 </file>
 
 <file path=ppt/slides/slide13.xml><?xml version="1.0" encoding="utf-8"?>
-<p:sld xmlns:a="http://schemas.openxmlformats.org/drawingml/2006/main" xmlns:p="http://schemas.openxmlformats.org/presentationml/2006/main" xmlns:r="http://schemas.openxmlformats.org/officeDocument/2006/relationships">
+<p:sld xmlns:a="http://schemas.openxmlformats.org/drawingml/2006/main" xmlns:r="http://schemas.openxmlformats.org/officeDocument/2006/relationships" xmlns:p="http://schemas.openxmlformats.org/presentationml/2006/main">
   <p:cSld>
     <p:spTree>
       <p:nvGrpSpPr>
@@ -11454,7 +11546,14 @@
         <p:cNvGrpSpPr/>
         <p:nvPr/>
       </p:nvGrpSpPr>
-      <p:grpSpPr/>
+      <p:grpSpPr>
+        <a:xfrm>
+          <a:off x="0" y="0"/>
+          <a:ext cx="0" cy="0"/>
+          <a:chOff x="0" y="0"/>
+          <a:chExt cx="0" cy="0"/>
+        </a:xfrm>
+      </p:grpSpPr>
       <p:sp>
         <p:nvSpPr>
           <p:cNvPr id="2" name="Rectangle 1"/>
@@ -11492,10 +11591,11 @@
           </a:fontRef>
         </p:style>
         <p:txBody>
-          <a:bodyPr rtlCol="0" anchor="ctr" wrap="square"/>
+          <a:bodyPr wrap="square" rtlCol="0" anchor="ctr"/>
           <a:lstStyle/>
           <a:p>
             <a:pPr algn="ctr"/>
+            <a:endParaRPr/>
           </a:p>
         </p:txBody>
       </p:sp>
@@ -11622,7 +11722,7 @@
           </a:fontRef>
         </p:style>
         <p:txBody>
-          <a:bodyPr rtlCol="0" anchor="ctr" wrap="square" lIns="38100" rIns="38100" tIns="0" bIns="0"/>
+          <a:bodyPr wrap="square" lIns="38100" tIns="0" rIns="38100" bIns="0" rtlCol="0" anchor="ctr"/>
           <a:lstStyle/>
           <a:p>
             <a:pPr algn="ctr">
@@ -11729,7 +11829,7 @@
           </a:fontRef>
         </p:style>
         <p:txBody>
-          <a:bodyPr rtlCol="0" anchor="ctr" wrap="square" lIns="38100" rIns="38100" tIns="0" bIns="0"/>
+          <a:bodyPr wrap="square" lIns="38100" tIns="0" rIns="38100" bIns="0" rtlCol="0" anchor="ctr"/>
           <a:lstStyle/>
           <a:p>
             <a:pPr algn="ctr">
@@ -11836,7 +11936,7 @@
           </a:fontRef>
         </p:style>
         <p:txBody>
-          <a:bodyPr rtlCol="0" anchor="ctr" wrap="square" lIns="38100" rIns="38100" tIns="0" bIns="0"/>
+          <a:bodyPr wrap="square" lIns="38100" tIns="0" rIns="38100" bIns="0" rtlCol="0" anchor="ctr"/>
           <a:lstStyle/>
           <a:p>
             <a:pPr algn="ctr">
@@ -11943,7 +12043,7 @@
           </a:fontRef>
         </p:style>
         <p:txBody>
-          <a:bodyPr rtlCol="0" anchor="ctr" wrap="square" lIns="38100" rIns="38100" tIns="0" bIns="0"/>
+          <a:bodyPr wrap="square" lIns="38100" tIns="0" rIns="38100" bIns="0" rtlCol="0" anchor="ctr"/>
           <a:lstStyle/>
           <a:p>
             <a:pPr algn="ctr">
@@ -12050,7 +12150,7 @@
           </a:fontRef>
         </p:style>
         <p:txBody>
-          <a:bodyPr rtlCol="0" anchor="ctr" wrap="square" lIns="38100" rIns="38100" tIns="0" bIns="0"/>
+          <a:bodyPr wrap="square" lIns="38100" tIns="0" rIns="38100" bIns="0" rtlCol="0" anchor="ctr"/>
           <a:lstStyle/>
           <a:p>
             <a:pPr algn="ctr">
@@ -12236,7 +12336,7 @@
           </a:fontRef>
         </p:style>
         <p:txBody>
-          <a:bodyPr rtlCol="0" anchor="ctr" wrap="square" lIns="25400" rIns="25400" tIns="12700" bIns="12700"/>
+          <a:bodyPr wrap="square" lIns="25400" tIns="12700" rIns="25400" bIns="12700" rtlCol="0" anchor="ctr"/>
           <a:lstStyle/>
           <a:p>
             <a:pPr algn="ctr">
@@ -12297,7 +12397,7 @@
           </a:fontRef>
         </p:style>
         <p:txBody>
-          <a:bodyPr rtlCol="0" anchor="ctr" wrap="square" lIns="25400" rIns="25400" tIns="12700" bIns="12700"/>
+          <a:bodyPr wrap="square" lIns="25400" tIns="12700" rIns="25400" bIns="12700" rtlCol="0" anchor="ctr"/>
           <a:lstStyle/>
           <a:p>
             <a:pPr algn="ctr">
@@ -12358,7 +12458,7 @@
           </a:fontRef>
         </p:style>
         <p:txBody>
-          <a:bodyPr rtlCol="0" anchor="ctr" wrap="square" lIns="25400" rIns="25400" tIns="12700" bIns="12700"/>
+          <a:bodyPr wrap="square" lIns="25400" tIns="12700" rIns="25400" bIns="12700" rtlCol="0" anchor="ctr"/>
           <a:lstStyle/>
           <a:p>
             <a:pPr algn="ctr">
@@ -12419,7 +12519,7 @@
           </a:fontRef>
         </p:style>
         <p:txBody>
-          <a:bodyPr rtlCol="0" anchor="ctr" wrap="square" lIns="25400" rIns="25400" tIns="12700" bIns="12700"/>
+          <a:bodyPr wrap="square" lIns="25400" tIns="12700" rIns="25400" bIns="12700" rtlCol="0" anchor="ctr"/>
           <a:lstStyle/>
           <a:p>
             <a:pPr algn="ctr">
@@ -12480,7 +12580,7 @@
           </a:fontRef>
         </p:style>
         <p:txBody>
-          <a:bodyPr rtlCol="0" anchor="ctr" wrap="square" lIns="25400" rIns="25400" tIns="12700" bIns="12700"/>
+          <a:bodyPr wrap="square" lIns="25400" tIns="12700" rIns="25400" bIns="12700" rtlCol="0" anchor="ctr"/>
           <a:lstStyle/>
           <a:p>
             <a:pPr algn="ctr">
@@ -12541,7 +12641,7 @@
           </a:fontRef>
         </p:style>
         <p:txBody>
-          <a:bodyPr rtlCol="0" anchor="ctr" wrap="square" lIns="25400" rIns="25400" tIns="12700" bIns="12700"/>
+          <a:bodyPr wrap="square" lIns="25400" tIns="12700" rIns="25400" bIns="12700" rtlCol="0" anchor="ctr"/>
           <a:lstStyle/>
           <a:p>
             <a:pPr algn="ctr">
@@ -12617,7 +12717,7 @@
 </file>
 
 <file path=ppt/slides/slide14.xml><?xml version="1.0" encoding="utf-8"?>
-<p:sld xmlns:a="http://schemas.openxmlformats.org/drawingml/2006/main" xmlns:p="http://schemas.openxmlformats.org/presentationml/2006/main" xmlns:r="http://schemas.openxmlformats.org/officeDocument/2006/relationships">
+<p:sld xmlns:a="http://schemas.openxmlformats.org/drawingml/2006/main" xmlns:r="http://schemas.openxmlformats.org/officeDocument/2006/relationships" xmlns:p="http://schemas.openxmlformats.org/presentationml/2006/main">
   <p:cSld>
     <p:spTree>
       <p:nvGrpSpPr>
@@ -12625,7 +12725,14 @@
         <p:cNvGrpSpPr/>
         <p:nvPr/>
       </p:nvGrpSpPr>
-      <p:grpSpPr/>
+      <p:grpSpPr>
+        <a:xfrm>
+          <a:off x="0" y="0"/>
+          <a:ext cx="0" cy="0"/>
+          <a:chOff x="0" y="0"/>
+          <a:chExt cx="0" cy="0"/>
+        </a:xfrm>
+      </p:grpSpPr>
       <p:sp>
         <p:nvSpPr>
           <p:cNvPr id="2" name="Rectangle 1"/>
@@ -12663,10 +12770,11 @@
           </a:fontRef>
         </p:style>
         <p:txBody>
-          <a:bodyPr rtlCol="0" anchor="ctr" wrap="square"/>
+          <a:bodyPr wrap="square" rtlCol="0" anchor="ctr"/>
           <a:lstStyle/>
           <a:p>
             <a:pPr algn="ctr"/>
+            <a:endParaRPr/>
           </a:p>
         </p:txBody>
       </p:sp>
@@ -13118,10 +13226,11 @@
           </a:fontRef>
         </p:style>
         <p:txBody>
-          <a:bodyPr rtlCol="0" anchor="ctr" wrap="square"/>
+          <a:bodyPr wrap="square" rtlCol="0" anchor="ctr"/>
           <a:lstStyle/>
           <a:p>
             <a:pPr algn="ctr"/>
+            <a:endParaRPr/>
           </a:p>
         </p:txBody>
       </p:sp>
@@ -13162,10 +13271,11 @@
           </a:fontRef>
         </p:style>
         <p:txBody>
-          <a:bodyPr rtlCol="0" anchor="ctr" wrap="square"/>
+          <a:bodyPr wrap="square" rtlCol="0" anchor="ctr"/>
           <a:lstStyle/>
           <a:p>
             <a:pPr algn="ctr"/>
+            <a:endParaRPr/>
           </a:p>
         </p:txBody>
       </p:sp>
@@ -13206,10 +13316,11 @@
           </a:fontRef>
         </p:style>
         <p:txBody>
-          <a:bodyPr rtlCol="0" anchor="ctr" wrap="square"/>
+          <a:bodyPr wrap="square" rtlCol="0" anchor="ctr"/>
           <a:lstStyle/>
           <a:p>
             <a:pPr algn="ctr"/>
+            <a:endParaRPr/>
           </a:p>
         </p:txBody>
       </p:sp>
@@ -13250,10 +13361,11 @@
           </a:fontRef>
         </p:style>
         <p:txBody>
-          <a:bodyPr rtlCol="0" anchor="ctr" wrap="square"/>
+          <a:bodyPr wrap="square" rtlCol="0" anchor="ctr"/>
           <a:lstStyle/>
           <a:p>
             <a:pPr algn="ctr"/>
+            <a:endParaRPr/>
           </a:p>
         </p:txBody>
       </p:sp>
@@ -13294,10 +13406,11 @@
           </a:fontRef>
         </p:style>
         <p:txBody>
-          <a:bodyPr rtlCol="0" anchor="ctr" wrap="square"/>
+          <a:bodyPr wrap="square" rtlCol="0" anchor="ctr"/>
           <a:lstStyle/>
           <a:p>
             <a:pPr algn="ctr"/>
+            <a:endParaRPr/>
           </a:p>
         </p:txBody>
       </p:sp>
@@ -13338,10 +13451,11 @@
           </a:fontRef>
         </p:style>
         <p:txBody>
-          <a:bodyPr rtlCol="0" anchor="ctr" wrap="square"/>
+          <a:bodyPr wrap="square" rtlCol="0" anchor="ctr"/>
           <a:lstStyle/>
           <a:p>
             <a:pPr algn="ctr"/>
+            <a:endParaRPr/>
           </a:p>
         </p:txBody>
       </p:sp>
@@ -13382,10 +13496,11 @@
           </a:fontRef>
         </p:style>
         <p:txBody>
-          <a:bodyPr rtlCol="0" anchor="ctr" wrap="square"/>
+          <a:bodyPr wrap="square" rtlCol="0" anchor="ctr"/>
           <a:lstStyle/>
           <a:p>
             <a:pPr algn="ctr"/>
+            <a:endParaRPr/>
           </a:p>
         </p:txBody>
       </p:sp>
@@ -13426,10 +13541,11 @@
           </a:fontRef>
         </p:style>
         <p:txBody>
-          <a:bodyPr rtlCol="0" anchor="ctr" wrap="square"/>
+          <a:bodyPr wrap="square" rtlCol="0" anchor="ctr"/>
           <a:lstStyle/>
           <a:p>
             <a:pPr algn="ctr"/>
+            <a:endParaRPr/>
           </a:p>
         </p:txBody>
       </p:sp>
@@ -13470,10 +13586,11 @@
           </a:fontRef>
         </p:style>
         <p:txBody>
-          <a:bodyPr rtlCol="0" anchor="ctr" wrap="square"/>
+          <a:bodyPr wrap="square" rtlCol="0" anchor="ctr"/>
           <a:lstStyle/>
           <a:p>
             <a:pPr algn="ctr"/>
+            <a:endParaRPr/>
           </a:p>
         </p:txBody>
       </p:sp>
@@ -13514,10 +13631,11 @@
           </a:fontRef>
         </p:style>
         <p:txBody>
-          <a:bodyPr rtlCol="0" anchor="ctr" wrap="square"/>
+          <a:bodyPr wrap="square" rtlCol="0" anchor="ctr"/>
           <a:lstStyle/>
           <a:p>
             <a:pPr algn="ctr"/>
+            <a:endParaRPr/>
           </a:p>
         </p:txBody>
       </p:sp>
@@ -13558,10 +13676,11 @@
           </a:fontRef>
         </p:style>
         <p:txBody>
-          <a:bodyPr rtlCol="0" anchor="ctr" wrap="square"/>
+          <a:bodyPr wrap="square" rtlCol="0" anchor="ctr"/>
           <a:lstStyle/>
           <a:p>
             <a:pPr algn="ctr"/>
+            <a:endParaRPr/>
           </a:p>
         </p:txBody>
       </p:sp>
@@ -13602,10 +13721,11 @@
           </a:fontRef>
         </p:style>
         <p:txBody>
-          <a:bodyPr rtlCol="0" anchor="ctr" wrap="square"/>
+          <a:bodyPr wrap="square" rtlCol="0" anchor="ctr"/>
           <a:lstStyle/>
           <a:p>
             <a:pPr algn="ctr"/>
+            <a:endParaRPr/>
           </a:p>
         </p:txBody>
       </p:sp>
@@ -13646,10 +13766,11 @@
           </a:fontRef>
         </p:style>
         <p:txBody>
-          <a:bodyPr rtlCol="0" anchor="ctr" wrap="square"/>
+          <a:bodyPr wrap="square" rtlCol="0" anchor="ctr"/>
           <a:lstStyle/>
           <a:p>
             <a:pPr algn="ctr"/>
+            <a:endParaRPr/>
           </a:p>
         </p:txBody>
       </p:sp>
@@ -13690,10 +13811,11 @@
           </a:fontRef>
         </p:style>
         <p:txBody>
-          <a:bodyPr rtlCol="0" anchor="ctr" wrap="square"/>
+          <a:bodyPr wrap="square" rtlCol="0" anchor="ctr"/>
           <a:lstStyle/>
           <a:p>
             <a:pPr algn="ctr"/>
+            <a:endParaRPr/>
           </a:p>
         </p:txBody>
       </p:sp>
@@ -13734,10 +13856,11 @@
           </a:fontRef>
         </p:style>
         <p:txBody>
-          <a:bodyPr rtlCol="0" anchor="ctr" wrap="square"/>
+          <a:bodyPr wrap="square" rtlCol="0" anchor="ctr"/>
           <a:lstStyle/>
           <a:p>
             <a:pPr algn="ctr"/>
+            <a:endParaRPr/>
           </a:p>
         </p:txBody>
       </p:sp>
@@ -13778,10 +13901,11 @@
           </a:fontRef>
         </p:style>
         <p:txBody>
-          <a:bodyPr rtlCol="0" anchor="ctr" wrap="square"/>
+          <a:bodyPr wrap="square" rtlCol="0" anchor="ctr"/>
           <a:lstStyle/>
           <a:p>
             <a:pPr algn="ctr"/>
+            <a:endParaRPr/>
           </a:p>
         </p:txBody>
       </p:sp>
@@ -13822,10 +13946,11 @@
           </a:fontRef>
         </p:style>
         <p:txBody>
-          <a:bodyPr rtlCol="0" anchor="ctr" wrap="square"/>
+          <a:bodyPr wrap="square" rtlCol="0" anchor="ctr"/>
           <a:lstStyle/>
           <a:p>
             <a:pPr algn="ctr"/>
+            <a:endParaRPr/>
           </a:p>
         </p:txBody>
       </p:sp>
@@ -13866,10 +13991,11 @@
           </a:fontRef>
         </p:style>
         <p:txBody>
-          <a:bodyPr rtlCol="0" anchor="ctr" wrap="square"/>
+          <a:bodyPr wrap="square" rtlCol="0" anchor="ctr"/>
           <a:lstStyle/>
           <a:p>
             <a:pPr algn="ctr"/>
+            <a:endParaRPr/>
           </a:p>
         </p:txBody>
       </p:sp>
@@ -13910,10 +14036,11 @@
           </a:fontRef>
         </p:style>
         <p:txBody>
-          <a:bodyPr rtlCol="0" anchor="ctr" wrap="square"/>
+          <a:bodyPr wrap="square" rtlCol="0" anchor="ctr"/>
           <a:lstStyle/>
           <a:p>
             <a:pPr algn="ctr"/>
+            <a:endParaRPr/>
           </a:p>
         </p:txBody>
       </p:sp>
@@ -13954,10 +14081,11 @@
           </a:fontRef>
         </p:style>
         <p:txBody>
-          <a:bodyPr rtlCol="0" anchor="ctr" wrap="square"/>
+          <a:bodyPr wrap="square" rtlCol="0" anchor="ctr"/>
           <a:lstStyle/>
           <a:p>
             <a:pPr algn="ctr"/>
+            <a:endParaRPr/>
           </a:p>
         </p:txBody>
       </p:sp>
@@ -13998,10 +14126,11 @@
           </a:fontRef>
         </p:style>
         <p:txBody>
-          <a:bodyPr rtlCol="0" anchor="ctr" wrap="square"/>
+          <a:bodyPr wrap="square" rtlCol="0" anchor="ctr"/>
           <a:lstStyle/>
           <a:p>
             <a:pPr algn="ctr"/>
+            <a:endParaRPr/>
           </a:p>
         </p:txBody>
       </p:sp>
@@ -14042,10 +14171,11 @@
           </a:fontRef>
         </p:style>
         <p:txBody>
-          <a:bodyPr rtlCol="0" anchor="ctr" wrap="square"/>
+          <a:bodyPr wrap="square" rtlCol="0" anchor="ctr"/>
           <a:lstStyle/>
           <a:p>
             <a:pPr algn="ctr"/>
+            <a:endParaRPr/>
           </a:p>
         </p:txBody>
       </p:sp>
@@ -14086,10 +14216,11 @@
           </a:fontRef>
         </p:style>
         <p:txBody>
-          <a:bodyPr rtlCol="0" anchor="ctr" wrap="square"/>
+          <a:bodyPr wrap="square" rtlCol="0" anchor="ctr"/>
           <a:lstStyle/>
           <a:p>
             <a:pPr algn="ctr"/>
+            <a:endParaRPr/>
           </a:p>
         </p:txBody>
       </p:sp>
@@ -14130,10 +14261,11 @@
           </a:fontRef>
         </p:style>
         <p:txBody>
-          <a:bodyPr rtlCol="0" anchor="ctr" wrap="square"/>
+          <a:bodyPr wrap="square" rtlCol="0" anchor="ctr"/>
           <a:lstStyle/>
           <a:p>
             <a:pPr algn="ctr"/>
+            <a:endParaRPr/>
           </a:p>
         </p:txBody>
       </p:sp>
@@ -14174,10 +14306,11 @@
           </a:fontRef>
         </p:style>
         <p:txBody>
-          <a:bodyPr rtlCol="0" anchor="ctr" wrap="square"/>
+          <a:bodyPr wrap="square" rtlCol="0" anchor="ctr"/>
           <a:lstStyle/>
           <a:p>
             <a:pPr algn="ctr"/>
+            <a:endParaRPr/>
           </a:p>
         </p:txBody>
       </p:sp>
@@ -14218,10 +14351,11 @@
           </a:fontRef>
         </p:style>
         <p:txBody>
-          <a:bodyPr rtlCol="0" anchor="ctr" wrap="square"/>
+          <a:bodyPr wrap="square" rtlCol="0" anchor="ctr"/>
           <a:lstStyle/>
           <a:p>
             <a:pPr algn="ctr"/>
+            <a:endParaRPr/>
           </a:p>
         </p:txBody>
       </p:sp>
@@ -14262,10 +14396,11 @@
           </a:fontRef>
         </p:style>
         <p:txBody>
-          <a:bodyPr rtlCol="0" anchor="ctr" wrap="square"/>
+          <a:bodyPr wrap="square" rtlCol="0" anchor="ctr"/>
           <a:lstStyle/>
           <a:p>
             <a:pPr algn="ctr"/>
+            <a:endParaRPr/>
           </a:p>
         </p:txBody>
       </p:sp>
@@ -14306,10 +14441,11 @@
           </a:fontRef>
         </p:style>
         <p:txBody>
-          <a:bodyPr rtlCol="0" anchor="ctr" wrap="square"/>
+          <a:bodyPr wrap="square" rtlCol="0" anchor="ctr"/>
           <a:lstStyle/>
           <a:p>
             <a:pPr algn="ctr"/>
+            <a:endParaRPr/>
           </a:p>
         </p:txBody>
       </p:sp>
@@ -14350,10 +14486,11 @@
           </a:fontRef>
         </p:style>
         <p:txBody>
-          <a:bodyPr rtlCol="0" anchor="ctr" wrap="square"/>
+          <a:bodyPr wrap="square" rtlCol="0" anchor="ctr"/>
           <a:lstStyle/>
           <a:p>
             <a:pPr algn="ctr"/>
+            <a:endParaRPr/>
           </a:p>
         </p:txBody>
       </p:sp>
@@ -14394,10 +14531,11 @@
           </a:fontRef>
         </p:style>
         <p:txBody>
-          <a:bodyPr rtlCol="0" anchor="ctr" wrap="square"/>
+          <a:bodyPr wrap="square" rtlCol="0" anchor="ctr"/>
           <a:lstStyle/>
           <a:p>
             <a:pPr algn="ctr"/>
+            <a:endParaRPr/>
           </a:p>
         </p:txBody>
       </p:sp>
@@ -14438,10 +14576,11 @@
           </a:fontRef>
         </p:style>
         <p:txBody>
-          <a:bodyPr rtlCol="0" anchor="ctr" wrap="square"/>
+          <a:bodyPr wrap="square" rtlCol="0" anchor="ctr"/>
           <a:lstStyle/>
           <a:p>
             <a:pPr algn="ctr"/>
+            <a:endParaRPr/>
           </a:p>
         </p:txBody>
       </p:sp>
@@ -14482,10 +14621,11 @@
           </a:fontRef>
         </p:style>
         <p:txBody>
-          <a:bodyPr rtlCol="0" anchor="ctr" wrap="square"/>
+          <a:bodyPr wrap="square" rtlCol="0" anchor="ctr"/>
           <a:lstStyle/>
           <a:p>
             <a:pPr algn="ctr"/>
+            <a:endParaRPr/>
           </a:p>
         </p:txBody>
       </p:sp>
@@ -14526,10 +14666,11 @@
           </a:fontRef>
         </p:style>
         <p:txBody>
-          <a:bodyPr rtlCol="0" anchor="ctr" wrap="square"/>
+          <a:bodyPr wrap="square" rtlCol="0" anchor="ctr"/>
           <a:lstStyle/>
           <a:p>
             <a:pPr algn="ctr"/>
+            <a:endParaRPr/>
           </a:p>
         </p:txBody>
       </p:sp>
@@ -14570,10 +14711,11 @@
           </a:fontRef>
         </p:style>
         <p:txBody>
-          <a:bodyPr rtlCol="0" anchor="ctr" wrap="square"/>
+          <a:bodyPr wrap="square" rtlCol="0" anchor="ctr"/>
           <a:lstStyle/>
           <a:p>
             <a:pPr algn="ctr"/>
+            <a:endParaRPr/>
           </a:p>
         </p:txBody>
       </p:sp>
@@ -14614,10 +14756,11 @@
           </a:fontRef>
         </p:style>
         <p:txBody>
-          <a:bodyPr rtlCol="0" anchor="ctr" wrap="square"/>
+          <a:bodyPr wrap="square" rtlCol="0" anchor="ctr"/>
           <a:lstStyle/>
           <a:p>
             <a:pPr algn="ctr"/>
+            <a:endParaRPr/>
           </a:p>
         </p:txBody>
       </p:sp>
@@ -14658,10 +14801,11 @@
           </a:fontRef>
         </p:style>
         <p:txBody>
-          <a:bodyPr rtlCol="0" anchor="ctr" wrap="square"/>
+          <a:bodyPr wrap="square" rtlCol="0" anchor="ctr"/>
           <a:lstStyle/>
           <a:p>
             <a:pPr algn="ctr"/>
+            <a:endParaRPr/>
           </a:p>
         </p:txBody>
       </p:sp>
@@ -14702,10 +14846,11 @@
           </a:fontRef>
         </p:style>
         <p:txBody>
-          <a:bodyPr rtlCol="0" anchor="ctr" wrap="square"/>
+          <a:bodyPr wrap="square" rtlCol="0" anchor="ctr"/>
           <a:lstStyle/>
           <a:p>
             <a:pPr algn="ctr"/>
+            <a:endParaRPr/>
           </a:p>
         </p:txBody>
       </p:sp>
@@ -14746,10 +14891,11 @@
           </a:fontRef>
         </p:style>
         <p:txBody>
-          <a:bodyPr rtlCol="0" anchor="ctr" wrap="square"/>
+          <a:bodyPr wrap="square" rtlCol="0" anchor="ctr"/>
           <a:lstStyle/>
           <a:p>
             <a:pPr algn="ctr"/>
+            <a:endParaRPr/>
           </a:p>
         </p:txBody>
       </p:sp>
@@ -14790,10 +14936,11 @@
           </a:fontRef>
         </p:style>
         <p:txBody>
-          <a:bodyPr rtlCol="0" anchor="ctr" wrap="square"/>
+          <a:bodyPr wrap="square" rtlCol="0" anchor="ctr"/>
           <a:lstStyle/>
           <a:p>
             <a:pPr algn="ctr"/>
+            <a:endParaRPr/>
           </a:p>
         </p:txBody>
       </p:sp>
@@ -14834,10 +14981,11 @@
           </a:fontRef>
         </p:style>
         <p:txBody>
-          <a:bodyPr rtlCol="0" anchor="ctr" wrap="square"/>
+          <a:bodyPr wrap="square" rtlCol="0" anchor="ctr"/>
           <a:lstStyle/>
           <a:p>
             <a:pPr algn="ctr"/>
+            <a:endParaRPr/>
           </a:p>
         </p:txBody>
       </p:sp>
@@ -14878,10 +15026,11 @@
           </a:fontRef>
         </p:style>
         <p:txBody>
-          <a:bodyPr rtlCol="0" anchor="ctr" wrap="square"/>
+          <a:bodyPr wrap="square" rtlCol="0" anchor="ctr"/>
           <a:lstStyle/>
           <a:p>
             <a:pPr algn="ctr"/>
+            <a:endParaRPr/>
           </a:p>
         </p:txBody>
       </p:sp>
@@ -14922,10 +15071,11 @@
           </a:fontRef>
         </p:style>
         <p:txBody>
-          <a:bodyPr rtlCol="0" anchor="ctr" wrap="square"/>
+          <a:bodyPr wrap="square" rtlCol="0" anchor="ctr"/>
           <a:lstStyle/>
           <a:p>
             <a:pPr algn="ctr"/>
+            <a:endParaRPr/>
           </a:p>
         </p:txBody>
       </p:sp>
@@ -14966,10 +15116,11 @@
           </a:fontRef>
         </p:style>
         <p:txBody>
-          <a:bodyPr rtlCol="0" anchor="ctr" wrap="square"/>
+          <a:bodyPr wrap="square" rtlCol="0" anchor="ctr"/>
           <a:lstStyle/>
           <a:p>
             <a:pPr algn="ctr"/>
+            <a:endParaRPr/>
           </a:p>
         </p:txBody>
       </p:sp>
@@ -15010,10 +15161,11 @@
           </a:fontRef>
         </p:style>
         <p:txBody>
-          <a:bodyPr rtlCol="0" anchor="ctr" wrap="square"/>
+          <a:bodyPr wrap="square" rtlCol="0" anchor="ctr"/>
           <a:lstStyle/>
           <a:p>
             <a:pPr algn="ctr"/>
+            <a:endParaRPr/>
           </a:p>
         </p:txBody>
       </p:sp>
@@ -15054,10 +15206,11 @@
           </a:fontRef>
         </p:style>
         <p:txBody>
-          <a:bodyPr rtlCol="0" anchor="ctr" wrap="square"/>
+          <a:bodyPr wrap="square" rtlCol="0" anchor="ctr"/>
           <a:lstStyle/>
           <a:p>
             <a:pPr algn="ctr"/>
+            <a:endParaRPr/>
           </a:p>
         </p:txBody>
       </p:sp>
@@ -15098,10 +15251,11 @@
           </a:fontRef>
         </p:style>
         <p:txBody>
-          <a:bodyPr rtlCol="0" anchor="ctr" wrap="square"/>
+          <a:bodyPr wrap="square" rtlCol="0" anchor="ctr"/>
           <a:lstStyle/>
           <a:p>
             <a:pPr algn="ctr"/>
+            <a:endParaRPr/>
           </a:p>
         </p:txBody>
       </p:sp>
@@ -15142,10 +15296,11 @@
           </a:fontRef>
         </p:style>
         <p:txBody>
-          <a:bodyPr rtlCol="0" anchor="ctr" wrap="square"/>
+          <a:bodyPr wrap="square" rtlCol="0" anchor="ctr"/>
           <a:lstStyle/>
           <a:p>
             <a:pPr algn="ctr"/>
+            <a:endParaRPr/>
           </a:p>
         </p:txBody>
       </p:sp>
@@ -15186,10 +15341,11 @@
           </a:fontRef>
         </p:style>
         <p:txBody>
-          <a:bodyPr rtlCol="0" anchor="ctr" wrap="square"/>
+          <a:bodyPr wrap="square" rtlCol="0" anchor="ctr"/>
           <a:lstStyle/>
           <a:p>
             <a:pPr algn="ctr"/>
+            <a:endParaRPr/>
           </a:p>
         </p:txBody>
       </p:sp>
@@ -15230,10 +15386,11 @@
           </a:fontRef>
         </p:style>
         <p:txBody>
-          <a:bodyPr rtlCol="0" anchor="ctr" wrap="square"/>
+          <a:bodyPr wrap="square" rtlCol="0" anchor="ctr"/>
           <a:lstStyle/>
           <a:p>
             <a:pPr algn="ctr"/>
+            <a:endParaRPr/>
           </a:p>
         </p:txBody>
       </p:sp>
@@ -15274,10 +15431,11 @@
           </a:fontRef>
         </p:style>
         <p:txBody>
-          <a:bodyPr rtlCol="0" anchor="ctr" wrap="square"/>
+          <a:bodyPr wrap="square" rtlCol="0" anchor="ctr"/>
           <a:lstStyle/>
           <a:p>
             <a:pPr algn="ctr"/>
+            <a:endParaRPr/>
           </a:p>
         </p:txBody>
       </p:sp>
@@ -15318,10 +15476,11 @@
           </a:fontRef>
         </p:style>
         <p:txBody>
-          <a:bodyPr rtlCol="0" anchor="ctr" wrap="square"/>
+          <a:bodyPr wrap="square" rtlCol="0" anchor="ctr"/>
           <a:lstStyle/>
           <a:p>
             <a:pPr algn="ctr"/>
+            <a:endParaRPr/>
           </a:p>
         </p:txBody>
       </p:sp>
@@ -15362,10 +15521,11 @@
           </a:fontRef>
         </p:style>
         <p:txBody>
-          <a:bodyPr rtlCol="0" anchor="ctr" wrap="square"/>
+          <a:bodyPr wrap="square" rtlCol="0" anchor="ctr"/>
           <a:lstStyle/>
           <a:p>
             <a:pPr algn="ctr"/>
+            <a:endParaRPr/>
           </a:p>
         </p:txBody>
       </p:sp>
@@ -15406,10 +15566,11 @@
           </a:fontRef>
         </p:style>
         <p:txBody>
-          <a:bodyPr rtlCol="0" anchor="ctr" wrap="square"/>
+          <a:bodyPr wrap="square" rtlCol="0" anchor="ctr"/>
           <a:lstStyle/>
           <a:p>
             <a:pPr algn="ctr"/>
+            <a:endParaRPr/>
           </a:p>
         </p:txBody>
       </p:sp>
@@ -15450,10 +15611,11 @@
           </a:fontRef>
         </p:style>
         <p:txBody>
-          <a:bodyPr rtlCol="0" anchor="ctr" wrap="square"/>
+          <a:bodyPr wrap="square" rtlCol="0" anchor="ctr"/>
           <a:lstStyle/>
           <a:p>
             <a:pPr algn="ctr"/>
+            <a:endParaRPr/>
           </a:p>
         </p:txBody>
       </p:sp>
@@ -15494,10 +15656,11 @@
           </a:fontRef>
         </p:style>
         <p:txBody>
-          <a:bodyPr rtlCol="0" anchor="ctr" wrap="square"/>
+          <a:bodyPr wrap="square" rtlCol="0" anchor="ctr"/>
           <a:lstStyle/>
           <a:p>
             <a:pPr algn="ctr"/>
+            <a:endParaRPr/>
           </a:p>
         </p:txBody>
       </p:sp>
@@ -15538,10 +15701,11 @@
           </a:fontRef>
         </p:style>
         <p:txBody>
-          <a:bodyPr rtlCol="0" anchor="ctr" wrap="square"/>
+          <a:bodyPr wrap="square" rtlCol="0" anchor="ctr"/>
           <a:lstStyle/>
           <a:p>
             <a:pPr algn="ctr"/>
+            <a:endParaRPr/>
           </a:p>
         </p:txBody>
       </p:sp>
@@ -15582,10 +15746,11 @@
           </a:fontRef>
         </p:style>
         <p:txBody>
-          <a:bodyPr rtlCol="0" anchor="ctr" wrap="square"/>
+          <a:bodyPr wrap="square" rtlCol="0" anchor="ctr"/>
           <a:lstStyle/>
           <a:p>
             <a:pPr algn="ctr"/>
+            <a:endParaRPr/>
           </a:p>
         </p:txBody>
       </p:sp>
@@ -15626,10 +15791,11 @@
           </a:fontRef>
         </p:style>
         <p:txBody>
-          <a:bodyPr rtlCol="0" anchor="ctr" wrap="square"/>
+          <a:bodyPr wrap="square" rtlCol="0" anchor="ctr"/>
           <a:lstStyle/>
           <a:p>
             <a:pPr algn="ctr"/>
+            <a:endParaRPr/>
           </a:p>
         </p:txBody>
       </p:sp>
@@ -15670,10 +15836,11 @@
           </a:fontRef>
         </p:style>
         <p:txBody>
-          <a:bodyPr rtlCol="0" anchor="ctr" wrap="square"/>
+          <a:bodyPr wrap="square" rtlCol="0" anchor="ctr"/>
           <a:lstStyle/>
           <a:p>
             <a:pPr algn="ctr"/>
+            <a:endParaRPr/>
           </a:p>
         </p:txBody>
       </p:sp>
@@ -15714,10 +15881,11 @@
           </a:fontRef>
         </p:style>
         <p:txBody>
-          <a:bodyPr rtlCol="0" anchor="ctr" wrap="square"/>
+          <a:bodyPr wrap="square" rtlCol="0" anchor="ctr"/>
           <a:lstStyle/>
           <a:p>
             <a:pPr algn="ctr"/>
+            <a:endParaRPr/>
           </a:p>
         </p:txBody>
       </p:sp>
@@ -15758,10 +15926,11 @@
           </a:fontRef>
         </p:style>
         <p:txBody>
-          <a:bodyPr rtlCol="0" anchor="ctr" wrap="square"/>
+          <a:bodyPr wrap="square" rtlCol="0" anchor="ctr"/>
           <a:lstStyle/>
           <a:p>
             <a:pPr algn="ctr"/>
+            <a:endParaRPr/>
           </a:p>
         </p:txBody>
       </p:sp>
@@ -15802,10 +15971,11 @@
           </a:fontRef>
         </p:style>
         <p:txBody>
-          <a:bodyPr rtlCol="0" anchor="ctr" wrap="square"/>
+          <a:bodyPr wrap="square" rtlCol="0" anchor="ctr"/>
           <a:lstStyle/>
           <a:p>
             <a:pPr algn="ctr"/>
+            <a:endParaRPr/>
           </a:p>
         </p:txBody>
       </p:sp>
@@ -15846,10 +16016,11 @@
           </a:fontRef>
         </p:style>
         <p:txBody>
-          <a:bodyPr rtlCol="0" anchor="ctr" wrap="square"/>
+          <a:bodyPr wrap="square" rtlCol="0" anchor="ctr"/>
           <a:lstStyle/>
           <a:p>
             <a:pPr algn="ctr"/>
+            <a:endParaRPr/>
           </a:p>
         </p:txBody>
       </p:sp>
@@ -15890,10 +16061,11 @@
           </a:fontRef>
         </p:style>
         <p:txBody>
-          <a:bodyPr rtlCol="0" anchor="ctr" wrap="square"/>
+          <a:bodyPr wrap="square" rtlCol="0" anchor="ctr"/>
           <a:lstStyle/>
           <a:p>
             <a:pPr algn="ctr"/>
+            <a:endParaRPr/>
           </a:p>
         </p:txBody>
       </p:sp>
@@ -15934,10 +16106,11 @@
           </a:fontRef>
         </p:style>
         <p:txBody>
-          <a:bodyPr rtlCol="0" anchor="ctr" wrap="square"/>
+          <a:bodyPr wrap="square" rtlCol="0" anchor="ctr"/>
           <a:lstStyle/>
           <a:p>
             <a:pPr algn="ctr"/>
+            <a:endParaRPr/>
           </a:p>
         </p:txBody>
       </p:sp>
@@ -15978,10 +16151,11 @@
           </a:fontRef>
         </p:style>
         <p:txBody>
-          <a:bodyPr rtlCol="0" anchor="ctr" wrap="square"/>
+          <a:bodyPr wrap="square" rtlCol="0" anchor="ctr"/>
           <a:lstStyle/>
           <a:p>
             <a:pPr algn="ctr"/>
+            <a:endParaRPr/>
           </a:p>
         </p:txBody>
       </p:sp>
@@ -16022,10 +16196,11 @@
           </a:fontRef>
         </p:style>
         <p:txBody>
-          <a:bodyPr rtlCol="0" anchor="ctr" wrap="square"/>
+          <a:bodyPr wrap="square" rtlCol="0" anchor="ctr"/>
           <a:lstStyle/>
           <a:p>
             <a:pPr algn="ctr"/>
+            <a:endParaRPr/>
           </a:p>
         </p:txBody>
       </p:sp>
@@ -16066,10 +16241,11 @@
           </a:fontRef>
         </p:style>
         <p:txBody>
-          <a:bodyPr rtlCol="0" anchor="ctr" wrap="square"/>
+          <a:bodyPr wrap="square" rtlCol="0" anchor="ctr"/>
           <a:lstStyle/>
           <a:p>
             <a:pPr algn="ctr"/>
+            <a:endParaRPr/>
           </a:p>
         </p:txBody>
       </p:sp>
@@ -16110,10 +16286,11 @@
           </a:fontRef>
         </p:style>
         <p:txBody>
-          <a:bodyPr rtlCol="0" anchor="ctr" wrap="square"/>
+          <a:bodyPr wrap="square" rtlCol="0" anchor="ctr"/>
           <a:lstStyle/>
           <a:p>
             <a:pPr algn="ctr"/>
+            <a:endParaRPr/>
           </a:p>
         </p:txBody>
       </p:sp>
@@ -16154,10 +16331,11 @@
           </a:fontRef>
         </p:style>
         <p:txBody>
-          <a:bodyPr rtlCol="0" anchor="ctr" wrap="square"/>
+          <a:bodyPr wrap="square" rtlCol="0" anchor="ctr"/>
           <a:lstStyle/>
           <a:p>
             <a:pPr algn="ctr"/>
+            <a:endParaRPr/>
           </a:p>
         </p:txBody>
       </p:sp>
@@ -16198,10 +16376,11 @@
           </a:fontRef>
         </p:style>
         <p:txBody>
-          <a:bodyPr rtlCol="0" anchor="ctr" wrap="square"/>
+          <a:bodyPr wrap="square" rtlCol="0" anchor="ctr"/>
           <a:lstStyle/>
           <a:p>
             <a:pPr algn="ctr"/>
+            <a:endParaRPr/>
           </a:p>
         </p:txBody>
       </p:sp>
@@ -16242,10 +16421,11 @@
           </a:fontRef>
         </p:style>
         <p:txBody>
-          <a:bodyPr rtlCol="0" anchor="ctr" wrap="square"/>
+          <a:bodyPr wrap="square" rtlCol="0" anchor="ctr"/>
           <a:lstStyle/>
           <a:p>
             <a:pPr algn="ctr"/>
+            <a:endParaRPr/>
           </a:p>
         </p:txBody>
       </p:sp>
@@ -16286,10 +16466,11 @@
           </a:fontRef>
         </p:style>
         <p:txBody>
-          <a:bodyPr rtlCol="0" anchor="ctr" wrap="square"/>
+          <a:bodyPr wrap="square" rtlCol="0" anchor="ctr"/>
           <a:lstStyle/>
           <a:p>
             <a:pPr algn="ctr"/>
+            <a:endParaRPr/>
           </a:p>
         </p:txBody>
       </p:sp>
@@ -16330,10 +16511,11 @@
           </a:fontRef>
         </p:style>
         <p:txBody>
-          <a:bodyPr rtlCol="0" anchor="ctr" wrap="square"/>
+          <a:bodyPr wrap="square" rtlCol="0" anchor="ctr"/>
           <a:lstStyle/>
           <a:p>
             <a:pPr algn="ctr"/>
+            <a:endParaRPr/>
           </a:p>
         </p:txBody>
       </p:sp>
@@ -16374,10 +16556,11 @@
           </a:fontRef>
         </p:style>
         <p:txBody>
-          <a:bodyPr rtlCol="0" anchor="ctr" wrap="square"/>
+          <a:bodyPr wrap="square" rtlCol="0" anchor="ctr"/>
           <a:lstStyle/>
           <a:p>
             <a:pPr algn="ctr"/>
+            <a:endParaRPr/>
           </a:p>
         </p:txBody>
       </p:sp>
@@ -16418,10 +16601,11 @@
           </a:fontRef>
         </p:style>
         <p:txBody>
-          <a:bodyPr rtlCol="0" anchor="ctr" wrap="square"/>
+          <a:bodyPr wrap="square" rtlCol="0" anchor="ctr"/>
           <a:lstStyle/>
           <a:p>
             <a:pPr algn="ctr"/>
+            <a:endParaRPr/>
           </a:p>
         </p:txBody>
       </p:sp>
@@ -16462,10 +16646,11 @@
           </a:fontRef>
         </p:style>
         <p:txBody>
-          <a:bodyPr rtlCol="0" anchor="ctr" wrap="square"/>
+          <a:bodyPr wrap="square" rtlCol="0" anchor="ctr"/>
           <a:lstStyle/>
           <a:p>
             <a:pPr algn="ctr"/>
+            <a:endParaRPr/>
           </a:p>
         </p:txBody>
       </p:sp>
@@ -16506,10 +16691,11 @@
           </a:fontRef>
         </p:style>
         <p:txBody>
-          <a:bodyPr rtlCol="0" anchor="ctr" wrap="square"/>
+          <a:bodyPr wrap="square" rtlCol="0" anchor="ctr"/>
           <a:lstStyle/>
           <a:p>
             <a:pPr algn="ctr"/>
+            <a:endParaRPr/>
           </a:p>
         </p:txBody>
       </p:sp>
@@ -16550,10 +16736,11 @@
           </a:fontRef>
         </p:style>
         <p:txBody>
-          <a:bodyPr rtlCol="0" anchor="ctr" wrap="square"/>
+          <a:bodyPr wrap="square" rtlCol="0" anchor="ctr"/>
           <a:lstStyle/>
           <a:p>
             <a:pPr algn="ctr"/>
+            <a:endParaRPr/>
           </a:p>
         </p:txBody>
       </p:sp>
@@ -16594,10 +16781,11 @@
           </a:fontRef>
         </p:style>
         <p:txBody>
-          <a:bodyPr rtlCol="0" anchor="ctr" wrap="square"/>
+          <a:bodyPr wrap="square" rtlCol="0" anchor="ctr"/>
           <a:lstStyle/>
           <a:p>
             <a:pPr algn="ctr"/>
+            <a:endParaRPr/>
           </a:p>
         </p:txBody>
       </p:sp>
@@ -16674,7 +16862,7 @@
           </a:fontRef>
         </p:style>
         <p:txBody>
-          <a:bodyPr rtlCol="0" anchor="ctr" wrap="square" lIns="25400" rIns="25400" tIns="12700" bIns="12700"/>
+          <a:bodyPr wrap="square" lIns="25400" tIns="12700" rIns="25400" bIns="12700" rtlCol="0" anchor="ctr"/>
           <a:lstStyle/>
           <a:p>
             <a:pPr algn="ctr">
@@ -16735,7 +16923,7 @@
           </a:fontRef>
         </p:style>
         <p:txBody>
-          <a:bodyPr rtlCol="0" anchor="ctr" wrap="square" lIns="25400" rIns="25400" tIns="12700" bIns="12700"/>
+          <a:bodyPr wrap="square" lIns="25400" tIns="12700" rIns="25400" bIns="12700" rtlCol="0" anchor="ctr"/>
           <a:lstStyle/>
           <a:p>
             <a:pPr algn="ctr">
@@ -16796,7 +16984,7 @@
           </a:fontRef>
         </p:style>
         <p:txBody>
-          <a:bodyPr rtlCol="0" anchor="ctr" wrap="square" lIns="25400" rIns="25400" tIns="12700" bIns="12700"/>
+          <a:bodyPr wrap="square" lIns="25400" tIns="12700" rIns="25400" bIns="12700" rtlCol="0" anchor="ctr"/>
           <a:lstStyle/>
           <a:p>
             <a:pPr algn="ctr">
@@ -16857,7 +17045,7 @@
           </a:fontRef>
         </p:style>
         <p:txBody>
-          <a:bodyPr rtlCol="0" anchor="ctr" wrap="square" lIns="25400" rIns="25400" tIns="12700" bIns="12700"/>
+          <a:bodyPr wrap="square" lIns="25400" tIns="12700" rIns="25400" bIns="12700" rtlCol="0" anchor="ctr"/>
           <a:lstStyle/>
           <a:p>
             <a:pPr algn="ctr">
@@ -16918,7 +17106,7 @@
           </a:fontRef>
         </p:style>
         <p:txBody>
-          <a:bodyPr rtlCol="0" anchor="ctr" wrap="square" lIns="25400" rIns="25400" tIns="12700" bIns="12700"/>
+          <a:bodyPr wrap="square" lIns="25400" tIns="12700" rIns="25400" bIns="12700" rtlCol="0" anchor="ctr"/>
           <a:lstStyle/>
           <a:p>
             <a:pPr algn="ctr">
@@ -16979,7 +17167,7 @@
           </a:fontRef>
         </p:style>
         <p:txBody>
-          <a:bodyPr rtlCol="0" anchor="ctr" wrap="square" lIns="25400" rIns="25400" tIns="12700" bIns="12700"/>
+          <a:bodyPr wrap="square" lIns="25400" tIns="12700" rIns="25400" bIns="12700" rtlCol="0" anchor="ctr"/>
           <a:lstStyle/>
           <a:p>
             <a:pPr algn="ctr">
@@ -17055,7 +17243,7 @@
 </file>
 
 <file path=ppt/slides/slide15.xml><?xml version="1.0" encoding="utf-8"?>
-<p:sld xmlns:a="http://schemas.openxmlformats.org/drawingml/2006/main" xmlns:p="http://schemas.openxmlformats.org/presentationml/2006/main" xmlns:r="http://schemas.openxmlformats.org/officeDocument/2006/relationships">
+<p:sld xmlns:a="http://schemas.openxmlformats.org/drawingml/2006/main" xmlns:r="http://schemas.openxmlformats.org/officeDocument/2006/relationships" xmlns:p="http://schemas.openxmlformats.org/presentationml/2006/main">
   <p:cSld>
     <p:spTree>
       <p:nvGrpSpPr>
@@ -17063,7 +17251,14 @@
         <p:cNvGrpSpPr/>
         <p:nvPr/>
       </p:nvGrpSpPr>
-      <p:grpSpPr/>
+      <p:grpSpPr>
+        <a:xfrm>
+          <a:off x="0" y="0"/>
+          <a:ext cx="0" cy="0"/>
+          <a:chOff x="0" y="0"/>
+          <a:chExt cx="0" cy="0"/>
+        </a:xfrm>
+      </p:grpSpPr>
       <p:sp>
         <p:nvSpPr>
           <p:cNvPr id="2" name="Rectangle 1"/>
@@ -17101,10 +17296,11 @@
           </a:fontRef>
         </p:style>
         <p:txBody>
-          <a:bodyPr rtlCol="0" anchor="ctr" wrap="square"/>
+          <a:bodyPr wrap="square" rtlCol="0" anchor="ctr"/>
           <a:lstStyle/>
           <a:p>
             <a:pPr algn="ctr"/>
+            <a:endParaRPr/>
           </a:p>
         </p:txBody>
       </p:sp>
@@ -17428,7 +17624,7 @@
           </a:fontRef>
         </p:style>
         <p:txBody>
-          <a:bodyPr rtlCol="0" anchor="ctr" wrap="square" lIns="25400" rIns="25400" tIns="12700" bIns="12700"/>
+          <a:bodyPr wrap="square" lIns="25400" tIns="12700" rIns="25400" bIns="12700" rtlCol="0" anchor="ctr"/>
           <a:lstStyle/>
           <a:p>
             <a:pPr algn="ctr">
@@ -17489,7 +17685,7 @@
           </a:fontRef>
         </p:style>
         <p:txBody>
-          <a:bodyPr rtlCol="0" anchor="ctr" wrap="square" lIns="25400" rIns="25400" tIns="12700" bIns="12700"/>
+          <a:bodyPr wrap="square" lIns="25400" tIns="12700" rIns="25400" bIns="12700" rtlCol="0" anchor="ctr"/>
           <a:lstStyle/>
           <a:p>
             <a:pPr algn="ctr">
@@ -17550,7 +17746,7 @@
           </a:fontRef>
         </p:style>
         <p:txBody>
-          <a:bodyPr rtlCol="0" anchor="ctr" wrap="square" lIns="25400" rIns="25400" tIns="12700" bIns="12700"/>
+          <a:bodyPr wrap="square" lIns="25400" tIns="12700" rIns="25400" bIns="12700" rtlCol="0" anchor="ctr"/>
           <a:lstStyle/>
           <a:p>
             <a:pPr algn="ctr">
@@ -17611,7 +17807,7 @@
           </a:fontRef>
         </p:style>
         <p:txBody>
-          <a:bodyPr rtlCol="0" anchor="ctr" wrap="square" lIns="25400" rIns="25400" tIns="12700" bIns="12700"/>
+          <a:bodyPr wrap="square" lIns="25400" tIns="12700" rIns="25400" bIns="12700" rtlCol="0" anchor="ctr"/>
           <a:lstStyle/>
           <a:p>
             <a:pPr algn="ctr">
@@ -17672,7 +17868,7 @@
           </a:fontRef>
         </p:style>
         <p:txBody>
-          <a:bodyPr rtlCol="0" anchor="ctr" wrap="square" lIns="25400" rIns="25400" tIns="12700" bIns="12700"/>
+          <a:bodyPr wrap="square" lIns="25400" tIns="12700" rIns="25400" bIns="12700" rtlCol="0" anchor="ctr"/>
           <a:lstStyle/>
           <a:p>
             <a:pPr algn="ctr">
@@ -17733,7 +17929,7 @@
           </a:fontRef>
         </p:style>
         <p:txBody>
-          <a:bodyPr rtlCol="0" anchor="ctr" wrap="square" lIns="25400" rIns="25400" tIns="12700" bIns="12700"/>
+          <a:bodyPr wrap="square" lIns="25400" tIns="12700" rIns="25400" bIns="12700" rtlCol="0" anchor="ctr"/>
           <a:lstStyle/>
           <a:p>
             <a:pPr algn="ctr">
@@ -17809,7 +18005,7 @@
 </file>
 
 <file path=ppt/slides/slide16.xml><?xml version="1.0" encoding="utf-8"?>
-<p:sld xmlns:a="http://schemas.openxmlformats.org/drawingml/2006/main" xmlns:p="http://schemas.openxmlformats.org/presentationml/2006/main" xmlns:r="http://schemas.openxmlformats.org/officeDocument/2006/relationships">
+<p:sld xmlns:a="http://schemas.openxmlformats.org/drawingml/2006/main" xmlns:r="http://schemas.openxmlformats.org/officeDocument/2006/relationships" xmlns:p="http://schemas.openxmlformats.org/presentationml/2006/main">
   <p:cSld>
     <p:spTree>
       <p:nvGrpSpPr>
@@ -17817,7 +18013,14 @@
         <p:cNvGrpSpPr/>
         <p:nvPr/>
       </p:nvGrpSpPr>
-      <p:grpSpPr/>
+      <p:grpSpPr>
+        <a:xfrm>
+          <a:off x="0" y="0"/>
+          <a:ext cx="0" cy="0"/>
+          <a:chOff x="0" y="0"/>
+          <a:chExt cx="0" cy="0"/>
+        </a:xfrm>
+      </p:grpSpPr>
       <p:sp>
         <p:nvSpPr>
           <p:cNvPr id="2" name="Rectangle 1"/>
@@ -17855,10 +18058,11 @@
           </a:fontRef>
         </p:style>
         <p:txBody>
-          <a:bodyPr rtlCol="0" anchor="ctr" wrap="square"/>
+          <a:bodyPr wrap="square" rtlCol="0" anchor="ctr"/>
           <a:lstStyle/>
           <a:p>
             <a:pPr algn="ctr"/>
+            <a:endParaRPr/>
           </a:p>
         </p:txBody>
       </p:sp>
@@ -17967,13 +18171,25 @@
                 <a:tableStyleId>{5C22544A-7EE6-4342-B048-85BDC9FD1C3A}</a:tableStyleId>
               </a:tblPr>
               <a:tblGrid>
-                <a:gridCol w="2286000"/>
-                <a:gridCol w="8534400"/>
+                <a:gridCol w="2286000">
+                  <a:extLst>
+                    <a:ext uri="{9D8B030D-6E8A-4147-A177-3AD203B41FA5}">
+                      <a16:colId xmlns:a16="http://schemas.microsoft.com/office/drawing/2014/main" val="20000"/>
+                    </a:ext>
+                  </a:extLst>
+                </a:gridCol>
+                <a:gridCol w="8534400">
+                  <a:extLst>
+                    <a:ext uri="{9D8B030D-6E8A-4147-A177-3AD203B41FA5}">
+                      <a16:colId xmlns:a16="http://schemas.microsoft.com/office/drawing/2014/main" val="20001"/>
+                    </a:ext>
+                  </a:extLst>
+                </a:gridCol>
               </a:tblGrid>
               <a:tr h="592666">
                 <a:tc>
                   <a:txBody>
-                    <a:bodyPr wrap="square"/>
+                    <a:bodyPr/>
                     <a:lstStyle/>
                     <a:p>
                       <a:pPr algn="l">
@@ -18004,7 +18220,7 @@
                 </a:tc>
                 <a:tc>
                   <a:txBody>
-                    <a:bodyPr wrap="square"/>
+                    <a:bodyPr/>
                     <a:lstStyle/>
                     <a:p>
                       <a:pPr algn="l">
@@ -18033,11 +18249,16 @@
                     </a:solidFill>
                   </a:tcPr>
                 </a:tc>
+                <a:extLst>
+                  <a:ext uri="{0D108BD9-81ED-4DB2-BD59-A6C34878D82A}">
+                    <a16:rowId xmlns:a16="http://schemas.microsoft.com/office/drawing/2014/main" val="10000"/>
+                  </a:ext>
+                </a:extLst>
               </a:tr>
               <a:tr h="592666">
                 <a:tc>
                   <a:txBody>
-                    <a:bodyPr wrap="square"/>
+                    <a:bodyPr/>
                     <a:lstStyle/>
                     <a:p>
                       <a:pPr algn="l">
@@ -18068,7 +18289,7 @@
                 </a:tc>
                 <a:tc>
                   <a:txBody>
-                    <a:bodyPr wrap="square"/>
+                    <a:bodyPr/>
                     <a:lstStyle/>
                     <a:p>
                       <a:pPr algn="l">
@@ -18097,11 +18318,16 @@
                     </a:solidFill>
                   </a:tcPr>
                 </a:tc>
+                <a:extLst>
+                  <a:ext uri="{0D108BD9-81ED-4DB2-BD59-A6C34878D82A}">
+                    <a16:rowId xmlns:a16="http://schemas.microsoft.com/office/drawing/2014/main" val="10001"/>
+                  </a:ext>
+                </a:extLst>
               </a:tr>
               <a:tr h="592666">
                 <a:tc>
                   <a:txBody>
-                    <a:bodyPr wrap="square"/>
+                    <a:bodyPr/>
                     <a:lstStyle/>
                     <a:p>
                       <a:pPr algn="l">
@@ -18132,7 +18358,7 @@
                 </a:tc>
                 <a:tc>
                   <a:txBody>
-                    <a:bodyPr wrap="square"/>
+                    <a:bodyPr/>
                     <a:lstStyle/>
                     <a:p>
                       <a:pPr algn="l">
@@ -18161,11 +18387,16 @@
                     </a:solidFill>
                   </a:tcPr>
                 </a:tc>
+                <a:extLst>
+                  <a:ext uri="{0D108BD9-81ED-4DB2-BD59-A6C34878D82A}">
+                    <a16:rowId xmlns:a16="http://schemas.microsoft.com/office/drawing/2014/main" val="10002"/>
+                  </a:ext>
+                </a:extLst>
               </a:tr>
               <a:tr h="592666">
                 <a:tc>
                   <a:txBody>
-                    <a:bodyPr wrap="square"/>
+                    <a:bodyPr/>
                     <a:lstStyle/>
                     <a:p>
                       <a:pPr algn="l">
@@ -18196,7 +18427,7 @@
                 </a:tc>
                 <a:tc>
                   <a:txBody>
-                    <a:bodyPr wrap="square"/>
+                    <a:bodyPr/>
                     <a:lstStyle/>
                     <a:p>
                       <a:pPr algn="l">
@@ -18225,11 +18456,16 @@
                     </a:solidFill>
                   </a:tcPr>
                 </a:tc>
+                <a:extLst>
+                  <a:ext uri="{0D108BD9-81ED-4DB2-BD59-A6C34878D82A}">
+                    <a16:rowId xmlns:a16="http://schemas.microsoft.com/office/drawing/2014/main" val="10003"/>
+                  </a:ext>
+                </a:extLst>
               </a:tr>
               <a:tr h="592666">
                 <a:tc>
                   <a:txBody>
-                    <a:bodyPr wrap="square"/>
+                    <a:bodyPr/>
                     <a:lstStyle/>
                     <a:p>
                       <a:pPr algn="l">
@@ -18260,7 +18496,7 @@
                 </a:tc>
                 <a:tc>
                   <a:txBody>
-                    <a:bodyPr wrap="square"/>
+                    <a:bodyPr/>
                     <a:lstStyle/>
                     <a:p>
                       <a:pPr algn="l">
@@ -18289,11 +18525,16 @@
                     </a:solidFill>
                   </a:tcPr>
                 </a:tc>
+                <a:extLst>
+                  <a:ext uri="{0D108BD9-81ED-4DB2-BD59-A6C34878D82A}">
+                    <a16:rowId xmlns:a16="http://schemas.microsoft.com/office/drawing/2014/main" val="10004"/>
+                  </a:ext>
+                </a:extLst>
               </a:tr>
               <a:tr h="592670">
                 <a:tc>
                   <a:txBody>
-                    <a:bodyPr wrap="square"/>
+                    <a:bodyPr/>
                     <a:lstStyle/>
                     <a:p>
                       <a:pPr algn="l">
@@ -18324,7 +18565,7 @@
                 </a:tc>
                 <a:tc>
                   <a:txBody>
-                    <a:bodyPr wrap="square"/>
+                    <a:bodyPr/>
                     <a:lstStyle/>
                     <a:p>
                       <a:pPr algn="l">
@@ -18353,6 +18594,11 @@
                     </a:solidFill>
                   </a:tcPr>
                 </a:tc>
+                <a:extLst>
+                  <a:ext uri="{0D108BD9-81ED-4DB2-BD59-A6C34878D82A}">
+                    <a16:rowId xmlns:a16="http://schemas.microsoft.com/office/drawing/2014/main" val="10005"/>
+                  </a:ext>
+                </a:extLst>
               </a:tr>
             </a:tbl>
           </a:graphicData>
@@ -18474,7 +18720,7 @@
           </a:fontRef>
         </p:style>
         <p:txBody>
-          <a:bodyPr rtlCol="0" anchor="ctr" wrap="square" lIns="25400" rIns="25400" tIns="12700" bIns="12700"/>
+          <a:bodyPr wrap="square" lIns="25400" tIns="12700" rIns="25400" bIns="12700" rtlCol="0" anchor="ctr"/>
           <a:lstStyle/>
           <a:p>
             <a:pPr algn="ctr">
@@ -18535,7 +18781,7 @@
           </a:fontRef>
         </p:style>
         <p:txBody>
-          <a:bodyPr rtlCol="0" anchor="ctr" wrap="square" lIns="25400" rIns="25400" tIns="12700" bIns="12700"/>
+          <a:bodyPr wrap="square" lIns="25400" tIns="12700" rIns="25400" bIns="12700" rtlCol="0" anchor="ctr"/>
           <a:lstStyle/>
           <a:p>
             <a:pPr algn="ctr">
@@ -18596,7 +18842,7 @@
           </a:fontRef>
         </p:style>
         <p:txBody>
-          <a:bodyPr rtlCol="0" anchor="ctr" wrap="square" lIns="25400" rIns="25400" tIns="12700" bIns="12700"/>
+          <a:bodyPr wrap="square" lIns="25400" tIns="12700" rIns="25400" bIns="12700" rtlCol="0" anchor="ctr"/>
           <a:lstStyle/>
           <a:p>
             <a:pPr algn="ctr">
@@ -18657,7 +18903,7 @@
           </a:fontRef>
         </p:style>
         <p:txBody>
-          <a:bodyPr rtlCol="0" anchor="ctr" wrap="square" lIns="25400" rIns="25400" tIns="12700" bIns="12700"/>
+          <a:bodyPr wrap="square" lIns="25400" tIns="12700" rIns="25400" bIns="12700" rtlCol="0" anchor="ctr"/>
           <a:lstStyle/>
           <a:p>
             <a:pPr algn="ctr">
@@ -18718,7 +18964,7 @@
           </a:fontRef>
         </p:style>
         <p:txBody>
-          <a:bodyPr rtlCol="0" anchor="ctr" wrap="square" lIns="25400" rIns="25400" tIns="12700" bIns="12700"/>
+          <a:bodyPr wrap="square" lIns="25400" tIns="12700" rIns="25400" bIns="12700" rtlCol="0" anchor="ctr"/>
           <a:lstStyle/>
           <a:p>
             <a:pPr algn="ctr">
@@ -18779,7 +19025,7 @@
           </a:fontRef>
         </p:style>
         <p:txBody>
-          <a:bodyPr rtlCol="0" anchor="ctr" wrap="square" lIns="25400" rIns="25400" tIns="12700" bIns="12700"/>
+          <a:bodyPr wrap="square" lIns="25400" tIns="12700" rIns="25400" bIns="12700" rtlCol="0" anchor="ctr"/>
           <a:lstStyle/>
           <a:p>
             <a:pPr algn="ctr">
@@ -18855,7 +19101,7 @@
 </file>
 
 <file path=ppt/slides/slide17.xml><?xml version="1.0" encoding="utf-8"?>
-<p:sld xmlns:a="http://schemas.openxmlformats.org/drawingml/2006/main" xmlns:p="http://schemas.openxmlformats.org/presentationml/2006/main" xmlns:r="http://schemas.openxmlformats.org/officeDocument/2006/relationships">
+<p:sld xmlns:a="http://schemas.openxmlformats.org/drawingml/2006/main" xmlns:r="http://schemas.openxmlformats.org/officeDocument/2006/relationships" xmlns:p="http://schemas.openxmlformats.org/presentationml/2006/main">
   <p:cSld>
     <p:spTree>
       <p:nvGrpSpPr>
@@ -18863,7 +19109,14 @@
         <p:cNvGrpSpPr/>
         <p:nvPr/>
       </p:nvGrpSpPr>
-      <p:grpSpPr/>
+      <p:grpSpPr>
+        <a:xfrm>
+          <a:off x="0" y="0"/>
+          <a:ext cx="0" cy="0"/>
+          <a:chOff x="0" y="0"/>
+          <a:chExt cx="0" cy="0"/>
+        </a:xfrm>
+      </p:grpSpPr>
       <p:sp>
         <p:nvSpPr>
           <p:cNvPr id="2" name="Rectangle 1"/>
@@ -18901,10 +19154,11 @@
           </a:fontRef>
         </p:style>
         <p:txBody>
-          <a:bodyPr rtlCol="0" anchor="ctr" wrap="square"/>
+          <a:bodyPr wrap="square" rtlCol="0" anchor="ctr"/>
           <a:lstStyle/>
           <a:p>
             <a:pPr algn="ctr"/>
+            <a:endParaRPr/>
           </a:p>
         </p:txBody>
       </p:sp>
@@ -19035,17 +19289,7 @@
                 <a:latin typeface="Meiryo"/>
                 <a:ea typeface="メイリオ"/>
               </a:rPr>
-              <a:t>■ </a:t>
-            </a:r>
-            <a:r>
-              <a:rPr sz="1450" b="1">
-                <a:solidFill>
-                  <a:srgbClr val="16233A"/>
-                </a:solidFill>
-                <a:latin typeface="Meiryo"/>
-                <a:ea typeface="メイリオ"/>
-              </a:rPr>
-              <a:t>確定評価セット</a:t>
+              <a:t>■ 確定評価セット</a:t>
             </a:r>
             <a:r>
               <a:rPr sz="1450" b="0">
@@ -19131,17 +19375,7 @@
                 <a:latin typeface="Meiryo"/>
                 <a:ea typeface="メイリオ"/>
               </a:rPr>
-              <a:t>■ </a:t>
-            </a:r>
-            <a:r>
-              <a:rPr sz="1450" b="1">
-                <a:solidFill>
-                  <a:srgbClr val="16233A"/>
-                </a:solidFill>
-                <a:latin typeface="Meiryo"/>
-                <a:ea typeface="メイリオ"/>
-              </a:rPr>
-              <a:t>AI外部監査</a:t>
+              <a:t>■ AI外部監査</a:t>
             </a:r>
             <a:r>
               <a:rPr sz="1450" b="0">
@@ -19282,7 +19516,7 @@
           </a:fontRef>
         </p:style>
         <p:txBody>
-          <a:bodyPr rtlCol="0" anchor="ctr" wrap="square" lIns="25400" rIns="25400" tIns="12700" bIns="12700"/>
+          <a:bodyPr wrap="square" lIns="25400" tIns="12700" rIns="25400" bIns="12700" rtlCol="0" anchor="ctr"/>
           <a:lstStyle/>
           <a:p>
             <a:pPr algn="ctr">
@@ -19343,7 +19577,7 @@
           </a:fontRef>
         </p:style>
         <p:txBody>
-          <a:bodyPr rtlCol="0" anchor="ctr" wrap="square" lIns="25400" rIns="25400" tIns="12700" bIns="12700"/>
+          <a:bodyPr wrap="square" lIns="25400" tIns="12700" rIns="25400" bIns="12700" rtlCol="0" anchor="ctr"/>
           <a:lstStyle/>
           <a:p>
             <a:pPr algn="ctr">
@@ -19404,7 +19638,7 @@
           </a:fontRef>
         </p:style>
         <p:txBody>
-          <a:bodyPr rtlCol="0" anchor="ctr" wrap="square" lIns="25400" rIns="25400" tIns="12700" bIns="12700"/>
+          <a:bodyPr wrap="square" lIns="25400" tIns="12700" rIns="25400" bIns="12700" rtlCol="0" anchor="ctr"/>
           <a:lstStyle/>
           <a:p>
             <a:pPr algn="ctr">
@@ -19465,7 +19699,7 @@
           </a:fontRef>
         </p:style>
         <p:txBody>
-          <a:bodyPr rtlCol="0" anchor="ctr" wrap="square" lIns="25400" rIns="25400" tIns="12700" bIns="12700"/>
+          <a:bodyPr wrap="square" lIns="25400" tIns="12700" rIns="25400" bIns="12700" rtlCol="0" anchor="ctr"/>
           <a:lstStyle/>
           <a:p>
             <a:pPr algn="ctr">
@@ -19526,7 +19760,7 @@
           </a:fontRef>
         </p:style>
         <p:txBody>
-          <a:bodyPr rtlCol="0" anchor="ctr" wrap="square" lIns="25400" rIns="25400" tIns="12700" bIns="12700"/>
+          <a:bodyPr wrap="square" lIns="25400" tIns="12700" rIns="25400" bIns="12700" rtlCol="0" anchor="ctr"/>
           <a:lstStyle/>
           <a:p>
             <a:pPr algn="ctr">
@@ -19587,7 +19821,7 @@
           </a:fontRef>
         </p:style>
         <p:txBody>
-          <a:bodyPr rtlCol="0" anchor="ctr" wrap="square" lIns="25400" rIns="25400" tIns="12700" bIns="12700"/>
+          <a:bodyPr wrap="square" lIns="25400" tIns="12700" rIns="25400" bIns="12700" rtlCol="0" anchor="ctr"/>
           <a:lstStyle/>
           <a:p>
             <a:pPr algn="ctr">
@@ -19663,7 +19897,7 @@
 </file>
 
 <file path=ppt/slides/slide2.xml><?xml version="1.0" encoding="utf-8"?>
-<p:sld xmlns:a="http://schemas.openxmlformats.org/drawingml/2006/main" xmlns:p="http://schemas.openxmlformats.org/presentationml/2006/main" xmlns:r="http://schemas.openxmlformats.org/officeDocument/2006/relationships">
+<p:sld xmlns:a="http://schemas.openxmlformats.org/drawingml/2006/main" xmlns:r="http://schemas.openxmlformats.org/officeDocument/2006/relationships" xmlns:p="http://schemas.openxmlformats.org/presentationml/2006/main">
   <p:cSld>
     <p:spTree>
       <p:nvGrpSpPr>
@@ -19671,7 +19905,14 @@
         <p:cNvGrpSpPr/>
         <p:nvPr/>
       </p:nvGrpSpPr>
-      <p:grpSpPr/>
+      <p:grpSpPr>
+        <a:xfrm>
+          <a:off x="0" y="0"/>
+          <a:ext cx="0" cy="0"/>
+          <a:chOff x="0" y="0"/>
+          <a:chExt cx="0" cy="0"/>
+        </a:xfrm>
+      </p:grpSpPr>
       <p:sp>
         <p:nvSpPr>
           <p:cNvPr id="2" name="Rectangle 1"/>
@@ -19709,10 +19950,11 @@
           </a:fontRef>
         </p:style>
         <p:txBody>
-          <a:bodyPr rtlCol="0" anchor="ctr" wrap="square"/>
+          <a:bodyPr wrap="square" rtlCol="0" anchor="ctr"/>
           <a:lstStyle/>
           <a:p>
             <a:pPr algn="ctr"/>
+            <a:endParaRPr/>
           </a:p>
         </p:txBody>
       </p:sp>
@@ -19836,7 +20078,7 @@
               </a:spcAft>
             </a:pPr>
             <a:r>
-              <a:rPr sz="1500" b="1">
+              <a:rPr sz="1500" b="1" dirty="0">
                 <a:solidFill>
                   <a:srgbClr val="16233A"/>
                 </a:solidFill>
@@ -19846,7 +20088,7 @@
               <a:t>■ </a:t>
             </a:r>
             <a:r>
-              <a:rPr sz="1500" b="0">
+              <a:rPr sz="1500" b="0" dirty="0" err="1">
                 <a:solidFill>
                   <a:srgbClr val="3A4658"/>
                 </a:solidFill>
@@ -19856,7 +20098,7 @@
               <a:t>歩行者は接近車・サイレン・踏切などの</a:t>
             </a:r>
             <a:r>
-              <a:rPr sz="1500" b="1">
+              <a:rPr sz="1500" b="1" dirty="0" err="1">
                 <a:solidFill>
                   <a:srgbClr val="16233A"/>
                 </a:solidFill>
@@ -19866,7 +20108,7 @@
               <a:t>危険察知を聴覚に依存</a:t>
             </a:r>
             <a:r>
-              <a:rPr sz="1500" b="0">
+              <a:rPr sz="1500" b="0" dirty="0" err="1">
                 <a:solidFill>
                   <a:srgbClr val="3A4658"/>
                 </a:solidFill>
@@ -19875,6 +20117,13 @@
               </a:rPr>
               <a:t>している</a:t>
             </a:r>
+            <a:endParaRPr sz="1500" b="0" dirty="0">
+              <a:solidFill>
+                <a:srgbClr val="3A4658"/>
+              </a:solidFill>
+              <a:latin typeface="Meiryo"/>
+              <a:ea typeface="メイリオ"/>
+            </a:endParaRPr>
           </a:p>
           <a:p>
             <a:pPr algn="l">
@@ -19889,7 +20138,7 @@
               </a:spcAft>
             </a:pPr>
             <a:r>
-              <a:rPr sz="1500" b="1">
+              <a:rPr sz="1500" b="1" dirty="0">
                 <a:solidFill>
                   <a:srgbClr val="16233A"/>
                 </a:solidFill>
@@ -19899,7 +20148,7 @@
               <a:t>■ </a:t>
             </a:r>
             <a:r>
-              <a:rPr sz="1500" b="0">
+              <a:rPr sz="1500" b="0" dirty="0" err="1">
                 <a:solidFill>
                   <a:srgbClr val="3A4658"/>
                 </a:solidFill>
@@ -19908,6 +20157,13 @@
               </a:rPr>
               <a:t>難聴者はその情報が欠落し、屋外歩行の事故リスクが高い</a:t>
             </a:r>
+            <a:endParaRPr sz="1500" b="0" dirty="0">
+              <a:solidFill>
+                <a:srgbClr val="3A4658"/>
+              </a:solidFill>
+              <a:latin typeface="Meiryo"/>
+              <a:ea typeface="メイリオ"/>
+            </a:endParaRPr>
           </a:p>
           <a:p>
             <a:pPr algn="l">
@@ -19922,7 +20178,7 @@
               </a:spcAft>
             </a:pPr>
             <a:r>
-              <a:rPr sz="1300" b="1">
+              <a:rPr sz="1300" b="1" dirty="0">
                 <a:solidFill>
                   <a:srgbClr val="66707F"/>
                 </a:solidFill>
@@ -19932,7 +20188,7 @@
               <a:t>・</a:t>
             </a:r>
             <a:r>
-              <a:rPr sz="1300" b="0">
+              <a:rPr sz="1300" b="0" dirty="0" err="1">
                 <a:solidFill>
                   <a:srgbClr val="66707F"/>
                 </a:solidFill>
@@ -19941,6 +20197,13 @@
               </a:rPr>
               <a:t>イヤホン歩行者・高齢者にも共通する課題</a:t>
             </a:r>
+            <a:endParaRPr sz="1300" b="0" dirty="0">
+              <a:solidFill>
+                <a:srgbClr val="66707F"/>
+              </a:solidFill>
+              <a:latin typeface="Meiryo"/>
+              <a:ea typeface="メイリオ"/>
+            </a:endParaRPr>
           </a:p>
           <a:p>
             <a:pPr algn="l">
@@ -19955,7 +20218,7 @@
               </a:spcAft>
             </a:pPr>
             <a:r>
-              <a:rPr sz="1500" b="1">
+              <a:rPr sz="1500" b="1" dirty="0">
                 <a:solidFill>
                   <a:srgbClr val="E8A200"/>
                 </a:solidFill>
@@ -19965,18 +20228,38 @@
               <a:t>■ </a:t>
             </a:r>
             <a:r>
-              <a:rPr sz="1500" b="0">
+              <a:rPr sz="1500" b="0" dirty="0" err="1">
                 <a:solidFill>
                   <a:srgbClr val="3A4658"/>
                 </a:solidFill>
                 <a:latin typeface="Meiryo"/>
                 <a:ea typeface="メイリオ"/>
               </a:rPr>
-              <a:t>機械の耳は人間の耳の限界（可聴域・可聴距離）に縛られない
-→「耳の代わり」を超えて</a:t>
-            </a:r>
-            <a:r>
-              <a:rPr sz="1500" b="1">
+              <a:t>機械の耳は人間の耳の限界（可聴域・可聴距離）に縛られない</a:t>
+            </a:r>
+            <a:r>
+              <a:rPr sz="1500" b="0" dirty="0">
+                <a:solidFill>
+                  <a:srgbClr val="3A4658"/>
+                </a:solidFill>
+                <a:latin typeface="Meiryo"/>
+                <a:ea typeface="メイリオ"/>
+              </a:rPr>
+              <a:t>
+→「</a:t>
+            </a:r>
+            <a:r>
+              <a:rPr sz="1500" b="0" dirty="0" err="1">
+                <a:solidFill>
+                  <a:srgbClr val="3A4658"/>
+                </a:solidFill>
+                <a:latin typeface="Meiryo"/>
+                <a:ea typeface="メイリオ"/>
+              </a:rPr>
+              <a:t>耳の代わり」を超えて</a:t>
+            </a:r>
+            <a:r>
+              <a:rPr sz="1500" b="1" dirty="0" err="1">
                 <a:solidFill>
                   <a:srgbClr val="B37E00"/>
                 </a:solidFill>
@@ -19986,7 +20269,7 @@
               <a:t>人の耳を超える支援</a:t>
             </a:r>
             <a:r>
-              <a:rPr sz="1500" b="0">
+              <a:rPr sz="1500" b="0" dirty="0" err="1">
                 <a:solidFill>
                   <a:srgbClr val="3A4658"/>
                 </a:solidFill>
@@ -19995,6 +20278,13 @@
               </a:rPr>
               <a:t>まで狙える</a:t>
             </a:r>
+            <a:endParaRPr sz="1500" b="0" dirty="0">
+              <a:solidFill>
+                <a:srgbClr val="3A4658"/>
+              </a:solidFill>
+              <a:latin typeface="Meiryo"/>
+              <a:ea typeface="メイリオ"/>
+            </a:endParaRPr>
           </a:p>
         </p:txBody>
       </p:sp>
@@ -20037,10 +20327,11 @@
           </a:fontRef>
         </p:style>
         <p:txBody>
-          <a:bodyPr rtlCol="0" anchor="ctr" wrap="square"/>
+          <a:bodyPr wrap="square" rtlCol="0" anchor="ctr"/>
           <a:lstStyle/>
           <a:p>
             <a:pPr algn="ctr"/>
+            <a:endParaRPr/>
           </a:p>
         </p:txBody>
       </p:sp>
@@ -20081,10 +20372,11 @@
           </a:fontRef>
         </p:style>
         <p:txBody>
-          <a:bodyPr rtlCol="0" anchor="ctr" wrap="square"/>
+          <a:bodyPr wrap="square" rtlCol="0" anchor="ctr"/>
           <a:lstStyle/>
           <a:p>
             <a:pPr algn="ctr"/>
+            <a:endParaRPr/>
           </a:p>
         </p:txBody>
       </p:sp>
@@ -20168,10 +20460,11 @@
           </a:fontRef>
         </p:style>
         <p:txBody>
-          <a:bodyPr rtlCol="0" anchor="ctr" wrap="square"/>
+          <a:bodyPr wrap="square" rtlCol="0" anchor="ctr"/>
           <a:lstStyle/>
           <a:p>
             <a:pPr algn="ctr"/>
+            <a:endParaRPr/>
           </a:p>
         </p:txBody>
       </p:sp>
@@ -20531,7 +20824,7 @@
           </a:fontRef>
         </p:style>
         <p:txBody>
-          <a:bodyPr rtlCol="0" anchor="ctr" wrap="square" lIns="25400" rIns="25400" tIns="12700" bIns="12700"/>
+          <a:bodyPr wrap="square" lIns="25400" tIns="12700" rIns="25400" bIns="12700" rtlCol="0" anchor="ctr"/>
           <a:lstStyle/>
           <a:p>
             <a:pPr algn="ctr">
@@ -20592,7 +20885,7 @@
           </a:fontRef>
         </p:style>
         <p:txBody>
-          <a:bodyPr rtlCol="0" anchor="ctr" wrap="square" lIns="25400" rIns="25400" tIns="12700" bIns="12700"/>
+          <a:bodyPr wrap="square" lIns="25400" tIns="12700" rIns="25400" bIns="12700" rtlCol="0" anchor="ctr"/>
           <a:lstStyle/>
           <a:p>
             <a:pPr algn="ctr">
@@ -20653,7 +20946,7 @@
           </a:fontRef>
         </p:style>
         <p:txBody>
-          <a:bodyPr rtlCol="0" anchor="ctr" wrap="square" lIns="25400" rIns="25400" tIns="12700" bIns="12700"/>
+          <a:bodyPr wrap="square" lIns="25400" tIns="12700" rIns="25400" bIns="12700" rtlCol="0" anchor="ctr"/>
           <a:lstStyle/>
           <a:p>
             <a:pPr algn="ctr">
@@ -20714,7 +21007,7 @@
           </a:fontRef>
         </p:style>
         <p:txBody>
-          <a:bodyPr rtlCol="0" anchor="ctr" wrap="square" lIns="25400" rIns="25400" tIns="12700" bIns="12700"/>
+          <a:bodyPr wrap="square" lIns="25400" tIns="12700" rIns="25400" bIns="12700" rtlCol="0" anchor="ctr"/>
           <a:lstStyle/>
           <a:p>
             <a:pPr algn="ctr">
@@ -20775,7 +21068,7 @@
           </a:fontRef>
         </p:style>
         <p:txBody>
-          <a:bodyPr rtlCol="0" anchor="ctr" wrap="square" lIns="25400" rIns="25400" tIns="12700" bIns="12700"/>
+          <a:bodyPr wrap="square" lIns="25400" tIns="12700" rIns="25400" bIns="12700" rtlCol="0" anchor="ctr"/>
           <a:lstStyle/>
           <a:p>
             <a:pPr algn="ctr">
@@ -20836,7 +21129,7 @@
           </a:fontRef>
         </p:style>
         <p:txBody>
-          <a:bodyPr rtlCol="0" anchor="ctr" wrap="square" lIns="25400" rIns="25400" tIns="12700" bIns="12700"/>
+          <a:bodyPr wrap="square" lIns="25400" tIns="12700" rIns="25400" bIns="12700" rtlCol="0" anchor="ctr"/>
           <a:lstStyle/>
           <a:p>
             <a:pPr algn="ctr">
@@ -20912,7 +21205,7 @@
 </file>
 
 <file path=ppt/slides/slide3.xml><?xml version="1.0" encoding="utf-8"?>
-<p:sld xmlns:a="http://schemas.openxmlformats.org/drawingml/2006/main" xmlns:p="http://schemas.openxmlformats.org/presentationml/2006/main" xmlns:r="http://schemas.openxmlformats.org/officeDocument/2006/relationships">
+<p:sld xmlns:a="http://schemas.openxmlformats.org/drawingml/2006/main" xmlns:r="http://schemas.openxmlformats.org/officeDocument/2006/relationships" xmlns:p="http://schemas.openxmlformats.org/presentationml/2006/main">
   <p:cSld>
     <p:spTree>
       <p:nvGrpSpPr>
@@ -20920,7 +21213,14 @@
         <p:cNvGrpSpPr/>
         <p:nvPr/>
       </p:nvGrpSpPr>
-      <p:grpSpPr/>
+      <p:grpSpPr>
+        <a:xfrm>
+          <a:off x="0" y="0"/>
+          <a:ext cx="0" cy="0"/>
+          <a:chOff x="0" y="0"/>
+          <a:chExt cx="0" cy="0"/>
+        </a:xfrm>
+      </p:grpSpPr>
       <p:sp>
         <p:nvSpPr>
           <p:cNvPr id="2" name="Rectangle 1"/>
@@ -20958,10 +21258,11 @@
           </a:fontRef>
         </p:style>
         <p:txBody>
-          <a:bodyPr rtlCol="0" anchor="ctr" wrap="square"/>
+          <a:bodyPr wrap="square" rtlCol="0" anchor="ctr"/>
           <a:lstStyle/>
           <a:p>
             <a:pPr algn="ctr"/>
+            <a:endParaRPr/>
           </a:p>
         </p:txBody>
       </p:sp>
@@ -21090,7 +21391,7 @@
           </a:fontRef>
         </p:style>
         <p:txBody>
-          <a:bodyPr rtlCol="0" anchor="t" wrap="square" lIns="177800" rIns="177800" tIns="127000" bIns="101600"/>
+          <a:bodyPr wrap="square" lIns="177800" tIns="127000" rIns="177800" bIns="101600" rtlCol="0" anchor="t"/>
           <a:lstStyle/>
           <a:p>
             <a:pPr algn="l">
@@ -21176,7 +21477,7 @@
           </a:fontRef>
         </p:style>
         <p:txBody>
-          <a:bodyPr rtlCol="0" anchor="t" wrap="square" lIns="177800" rIns="177800" tIns="127000" bIns="101600"/>
+          <a:bodyPr wrap="square" lIns="177800" tIns="127000" rIns="177800" bIns="101600" rtlCol="0" anchor="t"/>
           <a:lstStyle/>
           <a:p>
             <a:pPr algn="l">
@@ -21262,7 +21563,7 @@
           </a:fontRef>
         </p:style>
         <p:txBody>
-          <a:bodyPr rtlCol="0" anchor="t" wrap="square" lIns="177800" rIns="177800" tIns="127000" bIns="101600"/>
+          <a:bodyPr wrap="square" lIns="177800" tIns="127000" rIns="177800" bIns="101600" rtlCol="0" anchor="t"/>
           <a:lstStyle/>
           <a:p>
             <a:pPr algn="l">
@@ -21346,10 +21647,11 @@
           </a:fontRef>
         </p:style>
         <p:txBody>
-          <a:bodyPr rtlCol="0" anchor="ctr" wrap="square"/>
+          <a:bodyPr wrap="square" rtlCol="0" anchor="ctr"/>
           <a:lstStyle/>
           <a:p>
             <a:pPr algn="ctr"/>
+            <a:endParaRPr/>
           </a:p>
         </p:txBody>
       </p:sp>
@@ -21392,7 +21694,7 @@
           </a:fontRef>
         </p:style>
         <p:txBody>
-          <a:bodyPr rtlCol="0" anchor="ctr" wrap="square" lIns="203200" tIns="127000"/>
+          <a:bodyPr wrap="square" lIns="203200" tIns="127000" rtlCol="0" anchor="ctr"/>
           <a:lstStyle/>
           <a:p>
             <a:pPr algn="l">
@@ -21562,7 +21864,7 @@
           </a:fontRef>
         </p:style>
         <p:txBody>
-          <a:bodyPr rtlCol="0" anchor="ctr" wrap="square" lIns="25400" rIns="25400" tIns="12700" bIns="12700"/>
+          <a:bodyPr wrap="square" lIns="25400" tIns="12700" rIns="25400" bIns="12700" rtlCol="0" anchor="ctr"/>
           <a:lstStyle/>
           <a:p>
             <a:pPr algn="ctr">
@@ -21623,7 +21925,7 @@
           </a:fontRef>
         </p:style>
         <p:txBody>
-          <a:bodyPr rtlCol="0" anchor="ctr" wrap="square" lIns="25400" rIns="25400" tIns="12700" bIns="12700"/>
+          <a:bodyPr wrap="square" lIns="25400" tIns="12700" rIns="25400" bIns="12700" rtlCol="0" anchor="ctr"/>
           <a:lstStyle/>
           <a:p>
             <a:pPr algn="ctr">
@@ -21684,7 +21986,7 @@
           </a:fontRef>
         </p:style>
         <p:txBody>
-          <a:bodyPr rtlCol="0" anchor="ctr" wrap="square" lIns="25400" rIns="25400" tIns="12700" bIns="12700"/>
+          <a:bodyPr wrap="square" lIns="25400" tIns="12700" rIns="25400" bIns="12700" rtlCol="0" anchor="ctr"/>
           <a:lstStyle/>
           <a:p>
             <a:pPr algn="ctr">
@@ -21745,7 +22047,7 @@
           </a:fontRef>
         </p:style>
         <p:txBody>
-          <a:bodyPr rtlCol="0" anchor="ctr" wrap="square" lIns="25400" rIns="25400" tIns="12700" bIns="12700"/>
+          <a:bodyPr wrap="square" lIns="25400" tIns="12700" rIns="25400" bIns="12700" rtlCol="0" anchor="ctr"/>
           <a:lstStyle/>
           <a:p>
             <a:pPr algn="ctr">
@@ -21806,7 +22108,7 @@
           </a:fontRef>
         </p:style>
         <p:txBody>
-          <a:bodyPr rtlCol="0" anchor="ctr" wrap="square" lIns="25400" rIns="25400" tIns="12700" bIns="12700"/>
+          <a:bodyPr wrap="square" lIns="25400" tIns="12700" rIns="25400" bIns="12700" rtlCol="0" anchor="ctr"/>
           <a:lstStyle/>
           <a:p>
             <a:pPr algn="ctr">
@@ -21867,7 +22169,7 @@
           </a:fontRef>
         </p:style>
         <p:txBody>
-          <a:bodyPr rtlCol="0" anchor="ctr" wrap="square" lIns="25400" rIns="25400" tIns="12700" bIns="12700"/>
+          <a:bodyPr wrap="square" lIns="25400" tIns="12700" rIns="25400" bIns="12700" rtlCol="0" anchor="ctr"/>
           <a:lstStyle/>
           <a:p>
             <a:pPr algn="ctr">
@@ -21943,7 +22245,7 @@
 </file>
 
 <file path=ppt/slides/slide4.xml><?xml version="1.0" encoding="utf-8"?>
-<p:sld xmlns:a="http://schemas.openxmlformats.org/drawingml/2006/main" xmlns:p="http://schemas.openxmlformats.org/presentationml/2006/main" xmlns:r="http://schemas.openxmlformats.org/officeDocument/2006/relationships">
+<p:sld xmlns:a="http://schemas.openxmlformats.org/drawingml/2006/main" xmlns:r="http://schemas.openxmlformats.org/officeDocument/2006/relationships" xmlns:p="http://schemas.openxmlformats.org/presentationml/2006/main">
   <p:cSld>
     <p:spTree>
       <p:nvGrpSpPr>
@@ -21951,7 +22253,14 @@
         <p:cNvGrpSpPr/>
         <p:nvPr/>
       </p:nvGrpSpPr>
-      <p:grpSpPr/>
+      <p:grpSpPr>
+        <a:xfrm>
+          <a:off x="0" y="0"/>
+          <a:ext cx="0" cy="0"/>
+          <a:chOff x="0" y="0"/>
+          <a:chExt cx="0" cy="0"/>
+        </a:xfrm>
+      </p:grpSpPr>
       <p:sp>
         <p:nvSpPr>
           <p:cNvPr id="2" name="Rectangle 1"/>
@@ -21989,10 +22298,11 @@
           </a:fontRef>
         </p:style>
         <p:txBody>
-          <a:bodyPr rtlCol="0" anchor="ctr" wrap="square"/>
+          <a:bodyPr wrap="square" rtlCol="0" anchor="ctr"/>
           <a:lstStyle/>
           <a:p>
             <a:pPr algn="ctr"/>
+            <a:endParaRPr/>
           </a:p>
         </p:txBody>
       </p:sp>
@@ -22234,10 +22544,11 @@
           </a:fontRef>
         </p:style>
         <p:txBody>
-          <a:bodyPr rtlCol="0" anchor="ctr" wrap="square"/>
+          <a:bodyPr wrap="square" rtlCol="0" anchor="ctr"/>
           <a:lstStyle/>
           <a:p>
             <a:pPr algn="ctr"/>
+            <a:endParaRPr/>
           </a:p>
         </p:txBody>
       </p:sp>
@@ -22357,7 +22668,7 @@
           </a:fontRef>
         </p:style>
         <p:txBody>
-          <a:bodyPr rtlCol="0" anchor="ctr" wrap="square" lIns="76200" tIns="12700"/>
+          <a:bodyPr wrap="square" lIns="76200" tIns="12700" rtlCol="0" anchor="ctr"/>
           <a:lstStyle/>
           <a:p>
             <a:pPr algn="l">
@@ -22418,7 +22729,7 @@
           </a:fontRef>
         </p:style>
         <p:txBody>
-          <a:bodyPr rtlCol="0" anchor="ctr" wrap="square" lIns="76200" tIns="12700"/>
+          <a:bodyPr wrap="square" lIns="76200" tIns="12700" rtlCol="0" anchor="ctr"/>
           <a:lstStyle/>
           <a:p>
             <a:pPr algn="l">
@@ -22479,7 +22790,7 @@
           </a:fontRef>
         </p:style>
         <p:txBody>
-          <a:bodyPr rtlCol="0" anchor="ctr" wrap="square" lIns="76200" tIns="12700"/>
+          <a:bodyPr wrap="square" lIns="76200" tIns="12700" rtlCol="0" anchor="ctr"/>
           <a:lstStyle/>
           <a:p>
             <a:pPr algn="l">
@@ -22585,10 +22896,11 @@
           </a:fontRef>
         </p:style>
         <p:txBody>
-          <a:bodyPr rtlCol="0" anchor="ctr" wrap="square"/>
+          <a:bodyPr wrap="square" rtlCol="0" anchor="ctr"/>
           <a:lstStyle/>
           <a:p>
             <a:pPr algn="ctr"/>
+            <a:endParaRPr/>
           </a:p>
         </p:txBody>
       </p:sp>
@@ -22629,10 +22941,11 @@
           </a:fontRef>
         </p:style>
         <p:txBody>
-          <a:bodyPr rtlCol="0" anchor="ctr" wrap="square"/>
+          <a:bodyPr wrap="square" rtlCol="0" anchor="ctr"/>
           <a:lstStyle/>
           <a:p>
             <a:pPr algn="ctr"/>
+            <a:endParaRPr/>
           </a:p>
         </p:txBody>
       </p:sp>
@@ -22673,10 +22986,11 @@
           </a:fontRef>
         </p:style>
         <p:txBody>
-          <a:bodyPr rtlCol="0" anchor="ctr" wrap="square"/>
+          <a:bodyPr wrap="square" rtlCol="0" anchor="ctr"/>
           <a:lstStyle/>
           <a:p>
             <a:pPr algn="ctr"/>
+            <a:endParaRPr/>
           </a:p>
         </p:txBody>
       </p:sp>
@@ -23002,7 +23316,7 @@
           </a:fontRef>
         </p:style>
         <p:txBody>
-          <a:bodyPr rtlCol="0" anchor="ctr" wrap="square" lIns="25400" rIns="25400" tIns="12700" bIns="12700"/>
+          <a:bodyPr wrap="square" lIns="25400" tIns="12700" rIns="25400" bIns="12700" rtlCol="0" anchor="ctr"/>
           <a:lstStyle/>
           <a:p>
             <a:pPr algn="ctr">
@@ -23063,7 +23377,7 @@
           </a:fontRef>
         </p:style>
         <p:txBody>
-          <a:bodyPr rtlCol="0" anchor="ctr" wrap="square" lIns="25400" rIns="25400" tIns="12700" bIns="12700"/>
+          <a:bodyPr wrap="square" lIns="25400" tIns="12700" rIns="25400" bIns="12700" rtlCol="0" anchor="ctr"/>
           <a:lstStyle/>
           <a:p>
             <a:pPr algn="ctr">
@@ -23124,7 +23438,7 @@
           </a:fontRef>
         </p:style>
         <p:txBody>
-          <a:bodyPr rtlCol="0" anchor="ctr" wrap="square" lIns="25400" rIns="25400" tIns="12700" bIns="12700"/>
+          <a:bodyPr wrap="square" lIns="25400" tIns="12700" rIns="25400" bIns="12700" rtlCol="0" anchor="ctr"/>
           <a:lstStyle/>
           <a:p>
             <a:pPr algn="ctr">
@@ -23185,7 +23499,7 @@
           </a:fontRef>
         </p:style>
         <p:txBody>
-          <a:bodyPr rtlCol="0" anchor="ctr" wrap="square" lIns="25400" rIns="25400" tIns="12700" bIns="12700"/>
+          <a:bodyPr wrap="square" lIns="25400" tIns="12700" rIns="25400" bIns="12700" rtlCol="0" anchor="ctr"/>
           <a:lstStyle/>
           <a:p>
             <a:pPr algn="ctr">
@@ -23246,7 +23560,7 @@
           </a:fontRef>
         </p:style>
         <p:txBody>
-          <a:bodyPr rtlCol="0" anchor="ctr" wrap="square" lIns="25400" rIns="25400" tIns="12700" bIns="12700"/>
+          <a:bodyPr wrap="square" lIns="25400" tIns="12700" rIns="25400" bIns="12700" rtlCol="0" anchor="ctr"/>
           <a:lstStyle/>
           <a:p>
             <a:pPr algn="ctr">
@@ -23307,7 +23621,7 @@
           </a:fontRef>
         </p:style>
         <p:txBody>
-          <a:bodyPr rtlCol="0" anchor="ctr" wrap="square" lIns="25400" rIns="25400" tIns="12700" bIns="12700"/>
+          <a:bodyPr wrap="square" lIns="25400" tIns="12700" rIns="25400" bIns="12700" rtlCol="0" anchor="ctr"/>
           <a:lstStyle/>
           <a:p>
             <a:pPr algn="ctr">
@@ -23383,7 +23697,7 @@
 </file>
 
 <file path=ppt/slides/slide5.xml><?xml version="1.0" encoding="utf-8"?>
-<p:sld xmlns:a="http://schemas.openxmlformats.org/drawingml/2006/main" xmlns:p="http://schemas.openxmlformats.org/presentationml/2006/main" xmlns:r="http://schemas.openxmlformats.org/officeDocument/2006/relationships">
+<p:sld xmlns:a="http://schemas.openxmlformats.org/drawingml/2006/main" xmlns:r="http://schemas.openxmlformats.org/officeDocument/2006/relationships" xmlns:p="http://schemas.openxmlformats.org/presentationml/2006/main">
   <p:cSld>
     <p:spTree>
       <p:nvGrpSpPr>
@@ -23391,7 +23705,14 @@
         <p:cNvGrpSpPr/>
         <p:nvPr/>
       </p:nvGrpSpPr>
-      <p:grpSpPr/>
+      <p:grpSpPr>
+        <a:xfrm>
+          <a:off x="0" y="0"/>
+          <a:ext cx="0" cy="0"/>
+          <a:chOff x="0" y="0"/>
+          <a:chExt cx="0" cy="0"/>
+        </a:xfrm>
+      </p:grpSpPr>
       <p:sp>
         <p:nvSpPr>
           <p:cNvPr id="2" name="Rectangle 1"/>
@@ -23429,10 +23750,11 @@
           </a:fontRef>
         </p:style>
         <p:txBody>
-          <a:bodyPr rtlCol="0" anchor="ctr" wrap="square"/>
+          <a:bodyPr wrap="square" rtlCol="0" anchor="ctr"/>
           <a:lstStyle/>
           <a:p>
             <a:pPr algn="ctr"/>
+            <a:endParaRPr/>
           </a:p>
         </p:txBody>
       </p:sp>
@@ -23756,10 +24078,11 @@
           </a:fontRef>
         </p:style>
         <p:txBody>
-          <a:bodyPr rtlCol="0" anchor="ctr" wrap="square"/>
+          <a:bodyPr wrap="square" rtlCol="0" anchor="ctr"/>
           <a:lstStyle/>
           <a:p>
             <a:pPr algn="ctr"/>
+            <a:endParaRPr/>
           </a:p>
         </p:txBody>
       </p:sp>
@@ -23802,10 +24125,11 @@
           </a:fontRef>
         </p:style>
         <p:txBody>
-          <a:bodyPr rtlCol="0" anchor="ctr" wrap="square"/>
+          <a:bodyPr wrap="square" rtlCol="0" anchor="ctr"/>
           <a:lstStyle/>
           <a:p>
             <a:pPr algn="ctr"/>
+            <a:endParaRPr/>
           </a:p>
         </p:txBody>
       </p:sp>
@@ -23848,7 +24172,7 @@
           </a:fontRef>
         </p:style>
         <p:txBody>
-          <a:bodyPr rtlCol="0" anchor="ctr" wrap="square" tIns="76200"/>
+          <a:bodyPr wrap="square" tIns="76200" rtlCol="0" anchor="ctr"/>
           <a:lstStyle/>
           <a:p>
             <a:pPr algn="ctr">
@@ -24010,7 +24334,7 @@
           </a:fontRef>
         </p:style>
         <p:txBody>
-          <a:bodyPr rtlCol="0" anchor="ctr" wrap="square" tIns="101600"/>
+          <a:bodyPr wrap="square" tIns="101600" rtlCol="0" anchor="ctr"/>
           <a:lstStyle/>
           <a:p>
             <a:pPr algn="ctr">
@@ -24197,7 +24521,7 @@
           </a:fontRef>
         </p:style>
         <p:txBody>
-          <a:bodyPr rtlCol="0" anchor="ctr" wrap="square" tIns="50800"/>
+          <a:bodyPr wrap="square" tIns="50800" rtlCol="0" anchor="ctr"/>
           <a:lstStyle/>
           <a:p>
             <a:pPr algn="ctr">
@@ -24339,10 +24663,11 @@
           </a:fontRef>
         </p:style>
         <p:txBody>
-          <a:bodyPr rtlCol="0" anchor="ctr" wrap="square"/>
+          <a:bodyPr wrap="square" rtlCol="0" anchor="ctr"/>
           <a:lstStyle/>
           <a:p>
             <a:pPr algn="ctr"/>
+            <a:endParaRPr/>
           </a:p>
         </p:txBody>
       </p:sp>
@@ -24428,7 +24753,7 @@
           </a:fontRef>
         </p:style>
         <p:txBody>
-          <a:bodyPr rtlCol="0" anchor="ctr" wrap="square"/>
+          <a:bodyPr wrap="square" rtlCol="0" anchor="ctr"/>
           <a:lstStyle/>
           <a:p>
             <a:pPr algn="ctr">
@@ -24491,7 +24816,7 @@
           </a:fontRef>
         </p:style>
         <p:txBody>
-          <a:bodyPr rtlCol="0" anchor="ctr" wrap="square"/>
+          <a:bodyPr wrap="square" rtlCol="0" anchor="ctr"/>
           <a:lstStyle/>
           <a:p>
             <a:pPr algn="ctr">
@@ -24554,7 +24879,7 @@
           </a:fontRef>
         </p:style>
         <p:txBody>
-          <a:bodyPr rtlCol="0" anchor="ctr" wrap="square"/>
+          <a:bodyPr wrap="square" rtlCol="0" anchor="ctr"/>
           <a:lstStyle/>
           <a:p>
             <a:pPr algn="ctr">
@@ -24617,7 +24942,7 @@
           </a:fontRef>
         </p:style>
         <p:txBody>
-          <a:bodyPr rtlCol="0" anchor="ctr" wrap="square"/>
+          <a:bodyPr wrap="square" rtlCol="0" anchor="ctr"/>
           <a:lstStyle/>
           <a:p>
             <a:pPr algn="ctr">
@@ -24804,7 +25129,7 @@
           </a:fontRef>
         </p:style>
         <p:txBody>
-          <a:bodyPr rtlCol="0" anchor="ctr" wrap="square" lIns="25400" rIns="25400" tIns="12700" bIns="12700"/>
+          <a:bodyPr wrap="square" lIns="25400" tIns="12700" rIns="25400" bIns="12700" rtlCol="0" anchor="ctr"/>
           <a:lstStyle/>
           <a:p>
             <a:pPr algn="ctr">
@@ -24865,7 +25190,7 @@
           </a:fontRef>
         </p:style>
         <p:txBody>
-          <a:bodyPr rtlCol="0" anchor="ctr" wrap="square" lIns="25400" rIns="25400" tIns="12700" bIns="12700"/>
+          <a:bodyPr wrap="square" lIns="25400" tIns="12700" rIns="25400" bIns="12700" rtlCol="0" anchor="ctr"/>
           <a:lstStyle/>
           <a:p>
             <a:pPr algn="ctr">
@@ -24926,7 +25251,7 @@
           </a:fontRef>
         </p:style>
         <p:txBody>
-          <a:bodyPr rtlCol="0" anchor="ctr" wrap="square" lIns="25400" rIns="25400" tIns="12700" bIns="12700"/>
+          <a:bodyPr wrap="square" lIns="25400" tIns="12700" rIns="25400" bIns="12700" rtlCol="0" anchor="ctr"/>
           <a:lstStyle/>
           <a:p>
             <a:pPr algn="ctr">
@@ -24987,7 +25312,7 @@
           </a:fontRef>
         </p:style>
         <p:txBody>
-          <a:bodyPr rtlCol="0" anchor="ctr" wrap="square" lIns="25400" rIns="25400" tIns="12700" bIns="12700"/>
+          <a:bodyPr wrap="square" lIns="25400" tIns="12700" rIns="25400" bIns="12700" rtlCol="0" anchor="ctr"/>
           <a:lstStyle/>
           <a:p>
             <a:pPr algn="ctr">
@@ -25048,7 +25373,7 @@
           </a:fontRef>
         </p:style>
         <p:txBody>
-          <a:bodyPr rtlCol="0" anchor="ctr" wrap="square" lIns="25400" rIns="25400" tIns="12700" bIns="12700"/>
+          <a:bodyPr wrap="square" lIns="25400" tIns="12700" rIns="25400" bIns="12700" rtlCol="0" anchor="ctr"/>
           <a:lstStyle/>
           <a:p>
             <a:pPr algn="ctr">
@@ -25109,7 +25434,7 @@
           </a:fontRef>
         </p:style>
         <p:txBody>
-          <a:bodyPr rtlCol="0" anchor="ctr" wrap="square" lIns="25400" rIns="25400" tIns="12700" bIns="12700"/>
+          <a:bodyPr wrap="square" lIns="25400" tIns="12700" rIns="25400" bIns="12700" rtlCol="0" anchor="ctr"/>
           <a:lstStyle/>
           <a:p>
             <a:pPr algn="ctr">
@@ -25185,7 +25510,7 @@
 </file>
 
 <file path=ppt/slides/slide6.xml><?xml version="1.0" encoding="utf-8"?>
-<p:sld xmlns:a="http://schemas.openxmlformats.org/drawingml/2006/main" xmlns:p="http://schemas.openxmlformats.org/presentationml/2006/main" xmlns:r="http://schemas.openxmlformats.org/officeDocument/2006/relationships">
+<p:sld xmlns:a="http://schemas.openxmlformats.org/drawingml/2006/main" xmlns:r="http://schemas.openxmlformats.org/officeDocument/2006/relationships" xmlns:p="http://schemas.openxmlformats.org/presentationml/2006/main">
   <p:cSld>
     <p:spTree>
       <p:nvGrpSpPr>
@@ -25193,7 +25518,14 @@
         <p:cNvGrpSpPr/>
         <p:nvPr/>
       </p:nvGrpSpPr>
-      <p:grpSpPr/>
+      <p:grpSpPr>
+        <a:xfrm>
+          <a:off x="0" y="0"/>
+          <a:ext cx="0" cy="0"/>
+          <a:chOff x="0" y="0"/>
+          <a:chExt cx="0" cy="0"/>
+        </a:xfrm>
+      </p:grpSpPr>
       <p:sp>
         <p:nvSpPr>
           <p:cNvPr id="2" name="Rectangle 1"/>
@@ -25231,10 +25563,11 @@
           </a:fontRef>
         </p:style>
         <p:txBody>
-          <a:bodyPr rtlCol="0" anchor="ctr" wrap="square"/>
+          <a:bodyPr wrap="square" rtlCol="0" anchor="ctr"/>
           <a:lstStyle/>
           <a:p>
             <a:pPr algn="ctr"/>
+            <a:endParaRPr/>
           </a:p>
         </p:txBody>
       </p:sp>
@@ -25485,10 +25818,11 @@
           </a:fontRef>
         </p:style>
         <p:txBody>
-          <a:bodyPr rtlCol="0" anchor="ctr" wrap="square"/>
+          <a:bodyPr wrap="square" rtlCol="0" anchor="ctr"/>
           <a:lstStyle/>
           <a:p>
             <a:pPr algn="ctr"/>
+            <a:endParaRPr/>
           </a:p>
         </p:txBody>
       </p:sp>
@@ -25529,10 +25863,11 @@
           </a:fontRef>
         </p:style>
         <p:txBody>
-          <a:bodyPr rtlCol="0" anchor="ctr" wrap="square"/>
+          <a:bodyPr wrap="square" rtlCol="0" anchor="ctr"/>
           <a:lstStyle/>
           <a:p>
             <a:pPr algn="ctr"/>
+            <a:endParaRPr/>
           </a:p>
         </p:txBody>
       </p:sp>
@@ -25573,10 +25908,11 @@
           </a:fontRef>
         </p:style>
         <p:txBody>
-          <a:bodyPr rtlCol="0" anchor="ctr" wrap="square"/>
+          <a:bodyPr wrap="square" rtlCol="0" anchor="ctr"/>
           <a:lstStyle/>
           <a:p>
             <a:pPr algn="ctr"/>
+            <a:endParaRPr/>
           </a:p>
         </p:txBody>
       </p:sp>
@@ -25617,10 +25953,11 @@
           </a:fontRef>
         </p:style>
         <p:txBody>
-          <a:bodyPr rtlCol="0" anchor="ctr" wrap="square"/>
+          <a:bodyPr wrap="square" rtlCol="0" anchor="ctr"/>
           <a:lstStyle/>
           <a:p>
             <a:pPr algn="ctr"/>
+            <a:endParaRPr/>
           </a:p>
         </p:txBody>
       </p:sp>
@@ -25661,10 +25998,11 @@
           </a:fontRef>
         </p:style>
         <p:txBody>
-          <a:bodyPr rtlCol="0" anchor="ctr" wrap="square"/>
+          <a:bodyPr wrap="square" rtlCol="0" anchor="ctr"/>
           <a:lstStyle/>
           <a:p>
             <a:pPr algn="ctr"/>
+            <a:endParaRPr/>
           </a:p>
         </p:txBody>
       </p:sp>
@@ -25824,7 +26162,7 @@
           </a:fontRef>
         </p:style>
         <p:txBody>
-          <a:bodyPr rtlCol="0" anchor="ctr" wrap="square"/>
+          <a:bodyPr wrap="square" rtlCol="0" anchor="ctr"/>
           <a:lstStyle/>
           <a:p>
             <a:pPr algn="ctr">
@@ -25887,7 +26225,7 @@
           </a:fontRef>
         </p:style>
         <p:txBody>
-          <a:bodyPr rtlCol="0" anchor="ctr" wrap="square"/>
+          <a:bodyPr wrap="square" rtlCol="0" anchor="ctr"/>
           <a:lstStyle/>
           <a:p>
             <a:pPr algn="ctr">
@@ -25950,7 +26288,7 @@
           </a:fontRef>
         </p:style>
         <p:txBody>
-          <a:bodyPr rtlCol="0" anchor="ctr" wrap="square"/>
+          <a:bodyPr wrap="square" rtlCol="0" anchor="ctr"/>
           <a:lstStyle/>
           <a:p>
             <a:pPr algn="ctr">
@@ -26013,7 +26351,7 @@
           </a:fontRef>
         </p:style>
         <p:txBody>
-          <a:bodyPr rtlCol="0" anchor="ctr" wrap="square"/>
+          <a:bodyPr wrap="square" rtlCol="0" anchor="ctr"/>
           <a:lstStyle/>
           <a:p>
             <a:pPr algn="ctr">
@@ -26271,10 +26609,11 @@
           </a:fontRef>
         </p:style>
         <p:txBody>
-          <a:bodyPr rtlCol="0" anchor="ctr" wrap="square"/>
+          <a:bodyPr wrap="square" rtlCol="0" anchor="ctr"/>
           <a:lstStyle/>
           <a:p>
             <a:pPr algn="ctr"/>
+            <a:endParaRPr/>
           </a:p>
         </p:txBody>
       </p:sp>
@@ -26315,10 +26654,11 @@
           </a:fontRef>
         </p:style>
         <p:txBody>
-          <a:bodyPr rtlCol="0" anchor="ctr" wrap="square"/>
+          <a:bodyPr wrap="square" rtlCol="0" anchor="ctr"/>
           <a:lstStyle/>
           <a:p>
             <a:pPr algn="ctr"/>
+            <a:endParaRPr/>
           </a:p>
         </p:txBody>
       </p:sp>
@@ -26359,10 +26699,11 @@
           </a:fontRef>
         </p:style>
         <p:txBody>
-          <a:bodyPr rtlCol="0" anchor="ctr" wrap="square"/>
+          <a:bodyPr wrap="square" rtlCol="0" anchor="ctr"/>
           <a:lstStyle/>
           <a:p>
             <a:pPr algn="ctr"/>
+            <a:endParaRPr/>
           </a:p>
         </p:txBody>
       </p:sp>
@@ -26403,10 +26744,11 @@
           </a:fontRef>
         </p:style>
         <p:txBody>
-          <a:bodyPr rtlCol="0" anchor="ctr" wrap="square"/>
+          <a:bodyPr wrap="square" rtlCol="0" anchor="ctr"/>
           <a:lstStyle/>
           <a:p>
             <a:pPr algn="ctr"/>
+            <a:endParaRPr/>
           </a:p>
         </p:txBody>
       </p:sp>
@@ -26447,10 +26789,11 @@
           </a:fontRef>
         </p:style>
         <p:txBody>
-          <a:bodyPr rtlCol="0" anchor="ctr" wrap="square"/>
+          <a:bodyPr wrap="square" rtlCol="0" anchor="ctr"/>
           <a:lstStyle/>
           <a:p>
             <a:pPr algn="ctr"/>
+            <a:endParaRPr/>
           </a:p>
         </p:txBody>
       </p:sp>
@@ -26534,10 +26877,11 @@
           </a:fontRef>
         </p:style>
         <p:txBody>
-          <a:bodyPr rtlCol="0" anchor="ctr" wrap="square"/>
+          <a:bodyPr wrap="square" rtlCol="0" anchor="ctr"/>
           <a:lstStyle/>
           <a:p>
             <a:pPr algn="ctr"/>
+            <a:endParaRPr/>
           </a:p>
         </p:txBody>
       </p:sp>
@@ -26580,7 +26924,7 @@
           </a:fontRef>
         </p:style>
         <p:txBody>
-          <a:bodyPr rtlCol="0" anchor="ctr" wrap="square" lIns="203200" tIns="101600"/>
+          <a:bodyPr wrap="square" lIns="203200" tIns="101600" rtlCol="0" anchor="ctr"/>
           <a:lstStyle/>
           <a:p>
             <a:pPr algn="l">
@@ -26710,7 +27054,7 @@
           </a:fontRef>
         </p:style>
         <p:txBody>
-          <a:bodyPr rtlCol="0" anchor="ctr" wrap="square" lIns="25400" rIns="25400" tIns="12700" bIns="12700"/>
+          <a:bodyPr wrap="square" lIns="25400" tIns="12700" rIns="25400" bIns="12700" rtlCol="0" anchor="ctr"/>
           <a:lstStyle/>
           <a:p>
             <a:pPr algn="ctr">
@@ -26771,7 +27115,7 @@
           </a:fontRef>
         </p:style>
         <p:txBody>
-          <a:bodyPr rtlCol="0" anchor="ctr" wrap="square" lIns="25400" rIns="25400" tIns="12700" bIns="12700"/>
+          <a:bodyPr wrap="square" lIns="25400" tIns="12700" rIns="25400" bIns="12700" rtlCol="0" anchor="ctr"/>
           <a:lstStyle/>
           <a:p>
             <a:pPr algn="ctr">
@@ -26832,7 +27176,7 @@
           </a:fontRef>
         </p:style>
         <p:txBody>
-          <a:bodyPr rtlCol="0" anchor="ctr" wrap="square" lIns="25400" rIns="25400" tIns="12700" bIns="12700"/>
+          <a:bodyPr wrap="square" lIns="25400" tIns="12700" rIns="25400" bIns="12700" rtlCol="0" anchor="ctr"/>
           <a:lstStyle/>
           <a:p>
             <a:pPr algn="ctr">
@@ -26893,7 +27237,7 @@
           </a:fontRef>
         </p:style>
         <p:txBody>
-          <a:bodyPr rtlCol="0" anchor="ctr" wrap="square" lIns="25400" rIns="25400" tIns="12700" bIns="12700"/>
+          <a:bodyPr wrap="square" lIns="25400" tIns="12700" rIns="25400" bIns="12700" rtlCol="0" anchor="ctr"/>
           <a:lstStyle/>
           <a:p>
             <a:pPr algn="ctr">
@@ -26954,7 +27298,7 @@
           </a:fontRef>
         </p:style>
         <p:txBody>
-          <a:bodyPr rtlCol="0" anchor="ctr" wrap="square" lIns="25400" rIns="25400" tIns="12700" bIns="12700"/>
+          <a:bodyPr wrap="square" lIns="25400" tIns="12700" rIns="25400" bIns="12700" rtlCol="0" anchor="ctr"/>
           <a:lstStyle/>
           <a:p>
             <a:pPr algn="ctr">
@@ -27015,7 +27359,7 @@
           </a:fontRef>
         </p:style>
         <p:txBody>
-          <a:bodyPr rtlCol="0" anchor="ctr" wrap="square" lIns="25400" rIns="25400" tIns="12700" bIns="12700"/>
+          <a:bodyPr wrap="square" lIns="25400" tIns="12700" rIns="25400" bIns="12700" rtlCol="0" anchor="ctr"/>
           <a:lstStyle/>
           <a:p>
             <a:pPr algn="ctr">
@@ -27091,7 +27435,7 @@
 </file>
 
 <file path=ppt/slides/slide7.xml><?xml version="1.0" encoding="utf-8"?>
-<p:sld xmlns:a="http://schemas.openxmlformats.org/drawingml/2006/main" xmlns:p="http://schemas.openxmlformats.org/presentationml/2006/main" xmlns:r="http://schemas.openxmlformats.org/officeDocument/2006/relationships">
+<p:sld xmlns:a="http://schemas.openxmlformats.org/drawingml/2006/main" xmlns:r="http://schemas.openxmlformats.org/officeDocument/2006/relationships" xmlns:p="http://schemas.openxmlformats.org/presentationml/2006/main">
   <p:cSld>
     <p:spTree>
       <p:nvGrpSpPr>
@@ -27099,7 +27443,14 @@
         <p:cNvGrpSpPr/>
         <p:nvPr/>
       </p:nvGrpSpPr>
-      <p:grpSpPr/>
+      <p:grpSpPr>
+        <a:xfrm>
+          <a:off x="0" y="0"/>
+          <a:ext cx="0" cy="0"/>
+          <a:chOff x="0" y="0"/>
+          <a:chExt cx="0" cy="0"/>
+        </a:xfrm>
+      </p:grpSpPr>
       <p:sp>
         <p:nvSpPr>
           <p:cNvPr id="2" name="Rectangle 1"/>
@@ -27137,10 +27488,11 @@
           </a:fontRef>
         </p:style>
         <p:txBody>
-          <a:bodyPr rtlCol="0" anchor="ctr" wrap="square"/>
+          <a:bodyPr wrap="square" rtlCol="0" anchor="ctr"/>
           <a:lstStyle/>
           <a:p>
             <a:pPr algn="ctr"/>
+            <a:endParaRPr/>
           </a:p>
         </p:txBody>
       </p:sp>
@@ -27269,7 +27621,7 @@
           </a:fontRef>
         </p:style>
         <p:txBody>
-          <a:bodyPr rtlCol="0" anchor="t" wrap="square" lIns="177800" rIns="177800" tIns="127000" bIns="101600"/>
+          <a:bodyPr wrap="square" lIns="177800" tIns="127000" rIns="177800" bIns="101600" rtlCol="0" anchor="t"/>
           <a:lstStyle/>
           <a:p>
             <a:pPr algn="l">
@@ -27392,7 +27744,7 @@
           </a:fontRef>
         </p:style>
         <p:txBody>
-          <a:bodyPr rtlCol="0" anchor="t" wrap="square" lIns="177800" rIns="177800" tIns="127000" bIns="101600"/>
+          <a:bodyPr wrap="square" lIns="177800" tIns="127000" rIns="177800" bIns="101600" rtlCol="0" anchor="t"/>
           <a:lstStyle/>
           <a:p>
             <a:pPr algn="l">
@@ -27515,7 +27867,7 @@
           </a:fontRef>
         </p:style>
         <p:txBody>
-          <a:bodyPr rtlCol="0" anchor="t" wrap="square" lIns="177800" rIns="177800" tIns="127000" bIns="101600"/>
+          <a:bodyPr wrap="square" lIns="177800" tIns="127000" rIns="177800" bIns="101600" rtlCol="0" anchor="t"/>
           <a:lstStyle/>
           <a:p>
             <a:pPr algn="l">
@@ -27817,7 +28169,7 @@
           </a:fontRef>
         </p:style>
         <p:txBody>
-          <a:bodyPr rtlCol="0" anchor="ctr" wrap="square" lIns="25400" rIns="25400" tIns="12700" bIns="12700"/>
+          <a:bodyPr wrap="square" lIns="25400" tIns="12700" rIns="25400" bIns="12700" rtlCol="0" anchor="ctr"/>
           <a:lstStyle/>
           <a:p>
             <a:pPr algn="ctr">
@@ -27878,7 +28230,7 @@
           </a:fontRef>
         </p:style>
         <p:txBody>
-          <a:bodyPr rtlCol="0" anchor="ctr" wrap="square" lIns="25400" rIns="25400" tIns="12700" bIns="12700"/>
+          <a:bodyPr wrap="square" lIns="25400" tIns="12700" rIns="25400" bIns="12700" rtlCol="0" anchor="ctr"/>
           <a:lstStyle/>
           <a:p>
             <a:pPr algn="ctr">
@@ -27939,7 +28291,7 @@
           </a:fontRef>
         </p:style>
         <p:txBody>
-          <a:bodyPr rtlCol="0" anchor="ctr" wrap="square" lIns="25400" rIns="25400" tIns="12700" bIns="12700"/>
+          <a:bodyPr wrap="square" lIns="25400" tIns="12700" rIns="25400" bIns="12700" rtlCol="0" anchor="ctr"/>
           <a:lstStyle/>
           <a:p>
             <a:pPr algn="ctr">
@@ -28000,7 +28352,7 @@
           </a:fontRef>
         </p:style>
         <p:txBody>
-          <a:bodyPr rtlCol="0" anchor="ctr" wrap="square" lIns="25400" rIns="25400" tIns="12700" bIns="12700"/>
+          <a:bodyPr wrap="square" lIns="25400" tIns="12700" rIns="25400" bIns="12700" rtlCol="0" anchor="ctr"/>
           <a:lstStyle/>
           <a:p>
             <a:pPr algn="ctr">
@@ -28061,7 +28413,7 @@
           </a:fontRef>
         </p:style>
         <p:txBody>
-          <a:bodyPr rtlCol="0" anchor="ctr" wrap="square" lIns="25400" rIns="25400" tIns="12700" bIns="12700"/>
+          <a:bodyPr wrap="square" lIns="25400" tIns="12700" rIns="25400" bIns="12700" rtlCol="0" anchor="ctr"/>
           <a:lstStyle/>
           <a:p>
             <a:pPr algn="ctr">
@@ -28122,7 +28474,7 @@
           </a:fontRef>
         </p:style>
         <p:txBody>
-          <a:bodyPr rtlCol="0" anchor="ctr" wrap="square" lIns="25400" rIns="25400" tIns="12700" bIns="12700"/>
+          <a:bodyPr wrap="square" lIns="25400" tIns="12700" rIns="25400" bIns="12700" rtlCol="0" anchor="ctr"/>
           <a:lstStyle/>
           <a:p>
             <a:pPr algn="ctr">
@@ -28198,7 +28550,7 @@
 </file>
 
 <file path=ppt/slides/slide8.xml><?xml version="1.0" encoding="utf-8"?>
-<p:sld xmlns:a="http://schemas.openxmlformats.org/drawingml/2006/main" xmlns:p="http://schemas.openxmlformats.org/presentationml/2006/main" xmlns:r="http://schemas.openxmlformats.org/officeDocument/2006/relationships">
+<p:sld xmlns:a="http://schemas.openxmlformats.org/drawingml/2006/main" xmlns:r="http://schemas.openxmlformats.org/officeDocument/2006/relationships" xmlns:p="http://schemas.openxmlformats.org/presentationml/2006/main">
   <p:cSld>
     <p:spTree>
       <p:nvGrpSpPr>
@@ -28206,7 +28558,14 @@
         <p:cNvGrpSpPr/>
         <p:nvPr/>
       </p:nvGrpSpPr>
-      <p:grpSpPr/>
+      <p:grpSpPr>
+        <a:xfrm>
+          <a:off x="0" y="0"/>
+          <a:ext cx="0" cy="0"/>
+          <a:chOff x="0" y="0"/>
+          <a:chExt cx="0" cy="0"/>
+        </a:xfrm>
+      </p:grpSpPr>
       <p:sp>
         <p:nvSpPr>
           <p:cNvPr id="2" name="Rectangle 1"/>
@@ -28244,10 +28603,11 @@
           </a:fontRef>
         </p:style>
         <p:txBody>
-          <a:bodyPr rtlCol="0" anchor="ctr" wrap="square"/>
+          <a:bodyPr wrap="square" rtlCol="0" anchor="ctr"/>
           <a:lstStyle/>
           <a:p>
             <a:pPr algn="ctr"/>
+            <a:endParaRPr/>
           </a:p>
         </p:txBody>
       </p:sp>
@@ -28376,7 +28736,7 @@
           </a:fontRef>
         </p:style>
         <p:txBody>
-          <a:bodyPr rtlCol="0" anchor="t" wrap="square" lIns="177800" rIns="177800" tIns="127000" bIns="101600"/>
+          <a:bodyPr wrap="square" lIns="177800" tIns="127000" rIns="177800" bIns="101600" rtlCol="0" anchor="t"/>
           <a:lstStyle/>
           <a:p>
             <a:pPr algn="l">
@@ -28502,7 +28862,7 @@
           </a:fontRef>
         </p:style>
         <p:txBody>
-          <a:bodyPr rtlCol="0" anchor="t" wrap="square" lIns="177800" rIns="177800" tIns="127000" bIns="101600"/>
+          <a:bodyPr wrap="square" lIns="177800" tIns="127000" rIns="177800" bIns="101600" rtlCol="0" anchor="t"/>
           <a:lstStyle/>
           <a:p>
             <a:pPr algn="l">
@@ -28694,7 +29054,7 @@
           </a:fontRef>
         </p:style>
         <p:txBody>
-          <a:bodyPr rtlCol="0" anchor="t" wrap="square" lIns="177800" rIns="177800" tIns="127000" bIns="101600"/>
+          <a:bodyPr wrap="square" lIns="177800" tIns="127000" rIns="177800" bIns="101600" rtlCol="0" anchor="t"/>
           <a:lstStyle/>
           <a:p>
             <a:pPr algn="l">
@@ -28824,10 +29184,11 @@
           </a:fontRef>
         </p:style>
         <p:txBody>
-          <a:bodyPr rtlCol="0" anchor="ctr" wrap="square"/>
+          <a:bodyPr wrap="square" rtlCol="0" anchor="ctr"/>
           <a:lstStyle/>
           <a:p>
             <a:pPr algn="ctr"/>
+            <a:endParaRPr/>
           </a:p>
         </p:txBody>
       </p:sp>
@@ -28870,10 +29231,11 @@
           </a:fontRef>
         </p:style>
         <p:txBody>
-          <a:bodyPr rtlCol="0" anchor="ctr" wrap="square"/>
+          <a:bodyPr wrap="square" rtlCol="0" anchor="ctr"/>
           <a:lstStyle/>
           <a:p>
             <a:pPr algn="ctr"/>
+            <a:endParaRPr/>
           </a:p>
         </p:txBody>
       </p:sp>
@@ -28916,10 +29278,11 @@
           </a:fontRef>
         </p:style>
         <p:txBody>
-          <a:bodyPr rtlCol="0" anchor="ctr" wrap="square"/>
+          <a:bodyPr wrap="square" rtlCol="0" anchor="ctr"/>
           <a:lstStyle/>
           <a:p>
             <a:pPr algn="ctr"/>
+            <a:endParaRPr/>
           </a:p>
         </p:txBody>
       </p:sp>
@@ -28960,10 +29323,11 @@
           </a:fontRef>
         </p:style>
         <p:txBody>
-          <a:bodyPr rtlCol="0" anchor="ctr" wrap="square"/>
+          <a:bodyPr wrap="square" rtlCol="0" anchor="ctr"/>
           <a:lstStyle/>
           <a:p>
             <a:pPr algn="ctr"/>
+            <a:endParaRPr/>
           </a:p>
         </p:txBody>
       </p:sp>
@@ -29212,7 +29576,7 @@
           </a:fontRef>
         </p:style>
         <p:txBody>
-          <a:bodyPr rtlCol="0" anchor="ctr" wrap="square" lIns="25400" rIns="25400" tIns="12700" bIns="12700"/>
+          <a:bodyPr wrap="square" lIns="25400" tIns="12700" rIns="25400" bIns="12700" rtlCol="0" anchor="ctr"/>
           <a:lstStyle/>
           <a:p>
             <a:pPr algn="ctr">
@@ -29273,7 +29637,7 @@
           </a:fontRef>
         </p:style>
         <p:txBody>
-          <a:bodyPr rtlCol="0" anchor="ctr" wrap="square" lIns="25400" rIns="25400" tIns="12700" bIns="12700"/>
+          <a:bodyPr wrap="square" lIns="25400" tIns="12700" rIns="25400" bIns="12700" rtlCol="0" anchor="ctr"/>
           <a:lstStyle/>
           <a:p>
             <a:pPr algn="ctr">
@@ -29334,7 +29698,7 @@
           </a:fontRef>
         </p:style>
         <p:txBody>
-          <a:bodyPr rtlCol="0" anchor="ctr" wrap="square" lIns="25400" rIns="25400" tIns="12700" bIns="12700"/>
+          <a:bodyPr wrap="square" lIns="25400" tIns="12700" rIns="25400" bIns="12700" rtlCol="0" anchor="ctr"/>
           <a:lstStyle/>
           <a:p>
             <a:pPr algn="ctr">
@@ -29395,7 +29759,7 @@
           </a:fontRef>
         </p:style>
         <p:txBody>
-          <a:bodyPr rtlCol="0" anchor="ctr" wrap="square" lIns="25400" rIns="25400" tIns="12700" bIns="12700"/>
+          <a:bodyPr wrap="square" lIns="25400" tIns="12700" rIns="25400" bIns="12700" rtlCol="0" anchor="ctr"/>
           <a:lstStyle/>
           <a:p>
             <a:pPr algn="ctr">
@@ -29456,7 +29820,7 @@
           </a:fontRef>
         </p:style>
         <p:txBody>
-          <a:bodyPr rtlCol="0" anchor="ctr" wrap="square" lIns="25400" rIns="25400" tIns="12700" bIns="12700"/>
+          <a:bodyPr wrap="square" lIns="25400" tIns="12700" rIns="25400" bIns="12700" rtlCol="0" anchor="ctr"/>
           <a:lstStyle/>
           <a:p>
             <a:pPr algn="ctr">
@@ -29517,7 +29881,7 @@
           </a:fontRef>
         </p:style>
         <p:txBody>
-          <a:bodyPr rtlCol="0" anchor="ctr" wrap="square" lIns="25400" rIns="25400" tIns="12700" bIns="12700"/>
+          <a:bodyPr wrap="square" lIns="25400" tIns="12700" rIns="25400" bIns="12700" rtlCol="0" anchor="ctr"/>
           <a:lstStyle/>
           <a:p>
             <a:pPr algn="ctr">
@@ -29593,7 +29957,7 @@
 </file>
 
 <file path=ppt/slides/slide9.xml><?xml version="1.0" encoding="utf-8"?>
-<p:sld xmlns:a="http://schemas.openxmlformats.org/drawingml/2006/main" xmlns:p="http://schemas.openxmlformats.org/presentationml/2006/main" xmlns:r="http://schemas.openxmlformats.org/officeDocument/2006/relationships">
+<p:sld xmlns:a="http://schemas.openxmlformats.org/drawingml/2006/main" xmlns:r="http://schemas.openxmlformats.org/officeDocument/2006/relationships" xmlns:p="http://schemas.openxmlformats.org/presentationml/2006/main">
   <p:cSld>
     <p:spTree>
       <p:nvGrpSpPr>
@@ -29601,7 +29965,14 @@
         <p:cNvGrpSpPr/>
         <p:nvPr/>
       </p:nvGrpSpPr>
-      <p:grpSpPr/>
+      <p:grpSpPr>
+        <a:xfrm>
+          <a:off x="0" y="0"/>
+          <a:ext cx="0" cy="0"/>
+          <a:chOff x="0" y="0"/>
+          <a:chExt cx="0" cy="0"/>
+        </a:xfrm>
+      </p:grpSpPr>
       <p:sp>
         <p:nvSpPr>
           <p:cNvPr id="2" name="Rectangle 1"/>
@@ -29639,10 +30010,11 @@
           </a:fontRef>
         </p:style>
         <p:txBody>
-          <a:bodyPr rtlCol="0" anchor="ctr" wrap="square"/>
+          <a:bodyPr wrap="square" rtlCol="0" anchor="ctr"/>
           <a:lstStyle/>
           <a:p>
             <a:pPr algn="ctr"/>
+            <a:endParaRPr/>
           </a:p>
         </p:txBody>
       </p:sp>
@@ -29867,15 +30239,39 @@
                 <a:tableStyleId>{5C22544A-7EE6-4342-B048-85BDC9FD1C3A}</a:tableStyleId>
               </a:tblPr>
               <a:tblGrid>
-                <a:gridCol w="1397000"/>
-                <a:gridCol w="4064000"/>
-                <a:gridCol w="4064000"/>
-                <a:gridCol w="1295400"/>
+                <a:gridCol w="1397000">
+                  <a:extLst>
+                    <a:ext uri="{9D8B030D-6E8A-4147-A177-3AD203B41FA5}">
+                      <a16:colId xmlns:a16="http://schemas.microsoft.com/office/drawing/2014/main" val="20000"/>
+                    </a:ext>
+                  </a:extLst>
+                </a:gridCol>
+                <a:gridCol w="4064000">
+                  <a:extLst>
+                    <a:ext uri="{9D8B030D-6E8A-4147-A177-3AD203B41FA5}">
+                      <a16:colId xmlns:a16="http://schemas.microsoft.com/office/drawing/2014/main" val="20001"/>
+                    </a:ext>
+                  </a:extLst>
+                </a:gridCol>
+                <a:gridCol w="4064000">
+                  <a:extLst>
+                    <a:ext uri="{9D8B030D-6E8A-4147-A177-3AD203B41FA5}">
+                      <a16:colId xmlns:a16="http://schemas.microsoft.com/office/drawing/2014/main" val="20002"/>
+                    </a:ext>
+                  </a:extLst>
+                </a:gridCol>
+                <a:gridCol w="1295400">
+                  <a:extLst>
+                    <a:ext uri="{9D8B030D-6E8A-4147-A177-3AD203B41FA5}">
+                      <a16:colId xmlns:a16="http://schemas.microsoft.com/office/drawing/2014/main" val="20003"/>
+                    </a:ext>
+                  </a:extLst>
+                </a:gridCol>
               </a:tblGrid>
               <a:tr h="571500">
                 <a:tc>
                   <a:txBody>
-                    <a:bodyPr wrap="square"/>
+                    <a:bodyPr/>
                     <a:lstStyle/>
                     <a:p>
                       <a:pPr algn="l">
@@ -29906,7 +30302,7 @@
                 </a:tc>
                 <a:tc>
                   <a:txBody>
-                    <a:bodyPr wrap="square"/>
+                    <a:bodyPr/>
                     <a:lstStyle/>
                     <a:p>
                       <a:pPr algn="l">
@@ -29937,7 +30333,7 @@
                 </a:tc>
                 <a:tc>
                   <a:txBody>
-                    <a:bodyPr wrap="square"/>
+                    <a:bodyPr/>
                     <a:lstStyle/>
                     <a:p>
                       <a:pPr algn="l">
@@ -29968,7 +30364,7 @@
                 </a:tc>
                 <a:tc>
                   <a:txBody>
-                    <a:bodyPr wrap="square"/>
+                    <a:bodyPr/>
                     <a:lstStyle/>
                     <a:p>
                       <a:pPr algn="l">
@@ -29997,11 +30393,16 @@
                     </a:solidFill>
                   </a:tcPr>
                 </a:tc>
+                <a:extLst>
+                  <a:ext uri="{0D108BD9-81ED-4DB2-BD59-A6C34878D82A}">
+                    <a16:rowId xmlns:a16="http://schemas.microsoft.com/office/drawing/2014/main" val="10000"/>
+                  </a:ext>
+                </a:extLst>
               </a:tr>
               <a:tr h="571500">
                 <a:tc>
                   <a:txBody>
-                    <a:bodyPr wrap="square"/>
+                    <a:bodyPr/>
                     <a:lstStyle/>
                     <a:p>
                       <a:pPr algn="l">
@@ -30032,7 +30433,7 @@
                 </a:tc>
                 <a:tc>
                   <a:txBody>
-                    <a:bodyPr wrap="square"/>
+                    <a:bodyPr/>
                     <a:lstStyle/>
                     <a:p>
                       <a:pPr algn="l">
@@ -30063,7 +30464,7 @@
                 </a:tc>
                 <a:tc>
                   <a:txBody>
-                    <a:bodyPr wrap="square"/>
+                    <a:bodyPr/>
                     <a:lstStyle/>
                     <a:p>
                       <a:pPr algn="l">
@@ -30094,7 +30495,7 @@
                 </a:tc>
                 <a:tc>
                   <a:txBody>
-                    <a:bodyPr wrap="square"/>
+                    <a:bodyPr/>
                     <a:lstStyle/>
                     <a:p>
                       <a:pPr algn="ctr">
@@ -30123,11 +30524,16 @@
                     </a:solidFill>
                   </a:tcPr>
                 </a:tc>
+                <a:extLst>
+                  <a:ext uri="{0D108BD9-81ED-4DB2-BD59-A6C34878D82A}">
+                    <a16:rowId xmlns:a16="http://schemas.microsoft.com/office/drawing/2014/main" val="10001"/>
+                  </a:ext>
+                </a:extLst>
               </a:tr>
               <a:tr h="571500">
                 <a:tc>
                   <a:txBody>
-                    <a:bodyPr wrap="square"/>
+                    <a:bodyPr/>
                     <a:lstStyle/>
                     <a:p>
                       <a:pPr algn="l">
@@ -30158,7 +30564,7 @@
                 </a:tc>
                 <a:tc>
                   <a:txBody>
-                    <a:bodyPr wrap="square"/>
+                    <a:bodyPr/>
                     <a:lstStyle/>
                     <a:p>
                       <a:pPr algn="l">
@@ -30189,7 +30595,7 @@
                 </a:tc>
                 <a:tc>
                   <a:txBody>
-                    <a:bodyPr wrap="square"/>
+                    <a:bodyPr/>
                     <a:lstStyle/>
                     <a:p>
                       <a:pPr algn="l">
@@ -30220,7 +30626,7 @@
                 </a:tc>
                 <a:tc>
                   <a:txBody>
-                    <a:bodyPr wrap="square"/>
+                    <a:bodyPr/>
                     <a:lstStyle/>
                     <a:p>
                       <a:pPr algn="ctr">
@@ -30249,11 +30655,16 @@
                     </a:solidFill>
                   </a:tcPr>
                 </a:tc>
+                <a:extLst>
+                  <a:ext uri="{0D108BD9-81ED-4DB2-BD59-A6C34878D82A}">
+                    <a16:rowId xmlns:a16="http://schemas.microsoft.com/office/drawing/2014/main" val="10002"/>
+                  </a:ext>
+                </a:extLst>
               </a:tr>
               <a:tr h="571500">
                 <a:tc>
                   <a:txBody>
-                    <a:bodyPr wrap="square"/>
+                    <a:bodyPr/>
                     <a:lstStyle/>
                     <a:p>
                       <a:pPr algn="l">
@@ -30284,7 +30695,7 @@
                 </a:tc>
                 <a:tc>
                   <a:txBody>
-                    <a:bodyPr wrap="square"/>
+                    <a:bodyPr/>
                     <a:lstStyle/>
                     <a:p>
                       <a:pPr algn="l">
@@ -30315,7 +30726,7 @@
                 </a:tc>
                 <a:tc>
                   <a:txBody>
-                    <a:bodyPr wrap="square"/>
+                    <a:bodyPr/>
                     <a:lstStyle/>
                     <a:p>
                       <a:pPr algn="l">
@@ -30346,7 +30757,7 @@
                 </a:tc>
                 <a:tc>
                   <a:txBody>
-                    <a:bodyPr wrap="square"/>
+                    <a:bodyPr/>
                     <a:lstStyle/>
                     <a:p>
                       <a:pPr algn="ctr">
@@ -30375,11 +30786,16 @@
                     </a:solidFill>
                   </a:tcPr>
                 </a:tc>
+                <a:extLst>
+                  <a:ext uri="{0D108BD9-81ED-4DB2-BD59-A6C34878D82A}">
+                    <a16:rowId xmlns:a16="http://schemas.microsoft.com/office/drawing/2014/main" val="10003"/>
+                  </a:ext>
+                </a:extLst>
               </a:tr>
               <a:tr h="571500">
                 <a:tc>
                   <a:txBody>
-                    <a:bodyPr wrap="square"/>
+                    <a:bodyPr/>
                     <a:lstStyle/>
                     <a:p>
                       <a:pPr algn="l">
@@ -30410,7 +30826,7 @@
                 </a:tc>
                 <a:tc>
                   <a:txBody>
-                    <a:bodyPr wrap="square"/>
+                    <a:bodyPr/>
                     <a:lstStyle/>
                     <a:p>
                       <a:pPr algn="l">
@@ -30441,7 +30857,7 @@
                 </a:tc>
                 <a:tc>
                   <a:txBody>
-                    <a:bodyPr wrap="square"/>
+                    <a:bodyPr/>
                     <a:lstStyle/>
                     <a:p>
                       <a:pPr algn="l">
@@ -30472,7 +30888,7 @@
                 </a:tc>
                 <a:tc>
                   <a:txBody>
-                    <a:bodyPr wrap="square"/>
+                    <a:bodyPr/>
                     <a:lstStyle/>
                     <a:p>
                       <a:pPr algn="ctr">
@@ -30501,11 +30917,16 @@
                     </a:solidFill>
                   </a:tcPr>
                 </a:tc>
+                <a:extLst>
+                  <a:ext uri="{0D108BD9-81ED-4DB2-BD59-A6C34878D82A}">
+                    <a16:rowId xmlns:a16="http://schemas.microsoft.com/office/drawing/2014/main" val="10004"/>
+                  </a:ext>
+                </a:extLst>
               </a:tr>
               <a:tr h="571500">
                 <a:tc>
                   <a:txBody>
-                    <a:bodyPr wrap="square"/>
+                    <a:bodyPr/>
                     <a:lstStyle/>
                     <a:p>
                       <a:pPr algn="l">
@@ -30536,7 +30957,7 @@
                 </a:tc>
                 <a:tc>
                   <a:txBody>
-                    <a:bodyPr wrap="square"/>
+                    <a:bodyPr/>
                     <a:lstStyle/>
                     <a:p>
                       <a:pPr algn="l">
@@ -30567,7 +30988,7 @@
                 </a:tc>
                 <a:tc>
                   <a:txBody>
-                    <a:bodyPr wrap="square"/>
+                    <a:bodyPr/>
                     <a:lstStyle/>
                     <a:p>
                       <a:pPr algn="l">
@@ -30598,7 +31019,7 @@
                 </a:tc>
                 <a:tc>
                   <a:txBody>
-                    <a:bodyPr wrap="square"/>
+                    <a:bodyPr/>
                     <a:lstStyle/>
                     <a:p>
                       <a:pPr algn="ctr">
@@ -30627,6 +31048,11 @@
                     </a:solidFill>
                   </a:tcPr>
                 </a:tc>
+                <a:extLst>
+                  <a:ext uri="{0D108BD9-81ED-4DB2-BD59-A6C34878D82A}">
+                    <a16:rowId xmlns:a16="http://schemas.microsoft.com/office/drawing/2014/main" val="10005"/>
+                  </a:ext>
+                </a:extLst>
               </a:tr>
             </a:tbl>
           </a:graphicData>
@@ -30748,7 +31174,7 @@
           </a:fontRef>
         </p:style>
         <p:txBody>
-          <a:bodyPr rtlCol="0" anchor="ctr" wrap="square" lIns="25400" rIns="25400" tIns="12700" bIns="12700"/>
+          <a:bodyPr wrap="square" lIns="25400" tIns="12700" rIns="25400" bIns="12700" rtlCol="0" anchor="ctr"/>
           <a:lstStyle/>
           <a:p>
             <a:pPr algn="ctr">
@@ -30809,7 +31235,7 @@
           </a:fontRef>
         </p:style>
         <p:txBody>
-          <a:bodyPr rtlCol="0" anchor="ctr" wrap="square" lIns="25400" rIns="25400" tIns="12700" bIns="12700"/>
+          <a:bodyPr wrap="square" lIns="25400" tIns="12700" rIns="25400" bIns="12700" rtlCol="0" anchor="ctr"/>
           <a:lstStyle/>
           <a:p>
             <a:pPr algn="ctr">
@@ -30870,7 +31296,7 @@
           </a:fontRef>
         </p:style>
         <p:txBody>
-          <a:bodyPr rtlCol="0" anchor="ctr" wrap="square" lIns="25400" rIns="25400" tIns="12700" bIns="12700"/>
+          <a:bodyPr wrap="square" lIns="25400" tIns="12700" rIns="25400" bIns="12700" rtlCol="0" anchor="ctr"/>
           <a:lstStyle/>
           <a:p>
             <a:pPr algn="ctr">
@@ -30931,7 +31357,7 @@
           </a:fontRef>
         </p:style>
         <p:txBody>
-          <a:bodyPr rtlCol="0" anchor="ctr" wrap="square" lIns="25400" rIns="25400" tIns="12700" bIns="12700"/>
+          <a:bodyPr wrap="square" lIns="25400" tIns="12700" rIns="25400" bIns="12700" rtlCol="0" anchor="ctr"/>
           <a:lstStyle/>
           <a:p>
             <a:pPr algn="ctr">
@@ -30992,7 +31418,7 @@
           </a:fontRef>
         </p:style>
         <p:txBody>
-          <a:bodyPr rtlCol="0" anchor="ctr" wrap="square" lIns="25400" rIns="25400" tIns="12700" bIns="12700"/>
+          <a:bodyPr wrap="square" lIns="25400" tIns="12700" rIns="25400" bIns="12700" rtlCol="0" anchor="ctr"/>
           <a:lstStyle/>
           <a:p>
             <a:pPr algn="ctr">
@@ -31053,7 +31479,7 @@
           </a:fontRef>
         </p:style>
         <p:txBody>
-          <a:bodyPr rtlCol="0" anchor="ctr" wrap="square" lIns="25400" rIns="25400" tIns="12700" bIns="12700"/>
+          <a:bodyPr wrap="square" lIns="25400" tIns="12700" rIns="25400" bIns="12700" rtlCol="0" anchor="ctr"/>
           <a:lstStyle/>
           <a:p>
             <a:pPr algn="ctr">

--- a/md/seminar/中間発表スライド_2026-08-10.pptx
+++ b/md/seminar/中間発表スライド_2026-08-10.pptx
@@ -5,25 +5,25 @@
     <p:sldMasterId id="2147483648" r:id="rId1"/>
   </p:sldMasterIdLst>
   <p:sldIdLst>
-    <p:sldId id="256" r:id="rId2"/>
-    <p:sldId id="257" r:id="rId3"/>
-    <p:sldId id="258" r:id="rId4"/>
-    <p:sldId id="259" r:id="rId5"/>
-    <p:sldId id="260" r:id="rId6"/>
-    <p:sldId id="261" r:id="rId7"/>
-    <p:sldId id="262" r:id="rId8"/>
-    <p:sldId id="263" r:id="rId9"/>
-    <p:sldId id="264" r:id="rId10"/>
-    <p:sldId id="265" r:id="rId11"/>
-    <p:sldId id="266" r:id="rId12"/>
-    <p:sldId id="267" r:id="rId13"/>
-    <p:sldId id="268" r:id="rId14"/>
-    <p:sldId id="269" r:id="rId15"/>
-    <p:sldId id="270" r:id="rId16"/>
-    <p:sldId id="271" r:id="rId17"/>
-    <p:sldId id="272" r:id="rId18"/>
+    <p:sldId id="256" r:id="rId7"/>
+    <p:sldId id="257" r:id="rId8"/>
+    <p:sldId id="258" r:id="rId9"/>
+    <p:sldId id="259" r:id="rId10"/>
+    <p:sldId id="260" r:id="rId11"/>
+    <p:sldId id="261" r:id="rId12"/>
+    <p:sldId id="262" r:id="rId13"/>
+    <p:sldId id="263" r:id="rId14"/>
+    <p:sldId id="264" r:id="rId15"/>
+    <p:sldId id="265" r:id="rId16"/>
+    <p:sldId id="266" r:id="rId17"/>
+    <p:sldId id="267" r:id="rId18"/>
+    <p:sldId id="268" r:id="rId19"/>
+    <p:sldId id="269" r:id="rId20"/>
+    <p:sldId id="270" r:id="rId21"/>
+    <p:sldId id="271" r:id="rId22"/>
+    <p:sldId id="272" r:id="rId23"/>
   </p:sldIdLst>
-  <p:sldSz cx="12192000" cy="6858000"/>
+  <p:sldSz cx="12192000" cy="6858000" type="screen4x3"/>
   <p:notesSz cx="6858000" cy="9144000"/>
   <p:defaultTextStyle>
     <a:defPPr>
@@ -120,22 +120,6 @@
       </a:defRPr>
     </a:lvl9pPr>
   </p:defaultTextStyle>
-  <p:extLst>
-    <p:ext uri="{EFAFB233-063F-42B5-8137-9DF3F51BA10A}">
-      <p15:sldGuideLst xmlns:p15="http://schemas.microsoft.com/office/powerpoint/2012/main">
-        <p15:guide id="1" orient="horz" pos="2160">
-          <p15:clr>
-            <a:srgbClr val="A4A3A4"/>
-          </p15:clr>
-        </p15:guide>
-        <p15:guide id="2" pos="2880">
-          <p15:clr>
-            <a:srgbClr val="A4A3A4"/>
-          </p15:clr>
-        </p15:guide>
-      </p15:sldGuideLst>
-    </p:ext>
-  </p:extLst>
 </p:presentation>
 </file>
 
@@ -177,9 +161,10 @@
           <a:lstStyle/>
           <a:p>
             <a:r>
-              <a:rPr lang="en-US"/>
+              <a:rPr lang="en-US" smtClean="0"/>
               <a:t>Click to edit Master title style</a:t>
             </a:r>
+            <a:endParaRPr lang="en-US"/>
           </a:p>
         </p:txBody>
       </p:sp>
@@ -295,9 +280,10 @@
           </a:lstStyle>
           <a:p>
             <a:r>
-              <a:rPr lang="en-US"/>
+              <a:rPr lang="en-US" smtClean="0"/>
               <a:t>Click to edit Master subtitle style</a:t>
             </a:r>
+            <a:endParaRPr lang="en-US"/>
           </a:p>
         </p:txBody>
       </p:sp>
@@ -318,7 +304,7 @@
           <a:p>
             <a:fld id="{5BCAD085-E8A6-8845-BD4E-CB4CCA059FC4}" type="datetimeFigureOut">
               <a:rPr lang="en-US" smtClean="0"/>
-              <a:t>8/10/2026</a:t>
+              <a:t>1/27/13</a:t>
             </a:fld>
             <a:endParaRPr lang="en-US"/>
           </a:p>
@@ -412,9 +398,10 @@
           <a:lstStyle/>
           <a:p>
             <a:r>
-              <a:rPr lang="en-US"/>
+              <a:rPr lang="en-US" smtClean="0"/>
               <a:t>Click to edit Master title style</a:t>
             </a:r>
+            <a:endParaRPr lang="en-US"/>
           </a:p>
         </p:txBody>
       </p:sp>
@@ -435,37 +422,38 @@
           <a:p>
             <a:pPr lvl="0"/>
             <a:r>
-              <a:rPr lang="en-US"/>
+              <a:rPr lang="en-US" smtClean="0"/>
               <a:t>Click to edit Master text styles</a:t>
             </a:r>
           </a:p>
           <a:p>
             <a:pPr lvl="1"/>
             <a:r>
-              <a:rPr lang="en-US"/>
+              <a:rPr lang="en-US" smtClean="0"/>
               <a:t>Second level</a:t>
             </a:r>
           </a:p>
           <a:p>
             <a:pPr lvl="2"/>
             <a:r>
-              <a:rPr lang="en-US"/>
+              <a:rPr lang="en-US" smtClean="0"/>
               <a:t>Third level</a:t>
             </a:r>
           </a:p>
           <a:p>
             <a:pPr lvl="3"/>
             <a:r>
-              <a:rPr lang="en-US"/>
+              <a:rPr lang="en-US" smtClean="0"/>
               <a:t>Fourth level</a:t>
             </a:r>
           </a:p>
           <a:p>
             <a:pPr lvl="4"/>
             <a:r>
-              <a:rPr lang="en-US"/>
+              <a:rPr lang="en-US" smtClean="0"/>
               <a:t>Fifth level</a:t>
             </a:r>
+            <a:endParaRPr lang="en-US"/>
           </a:p>
         </p:txBody>
       </p:sp>
@@ -486,7 +474,7 @@
           <a:p>
             <a:fld id="{5BCAD085-E8A6-8845-BD4E-CB4CCA059FC4}" type="datetimeFigureOut">
               <a:rPr lang="en-US" smtClean="0"/>
-              <a:t>8/10/2026</a:t>
+              <a:t>1/27/13</a:t>
             </a:fld>
             <a:endParaRPr lang="en-US"/>
           </a:p>
@@ -585,9 +573,10 @@
           <a:lstStyle/>
           <a:p>
             <a:r>
-              <a:rPr lang="en-US"/>
+              <a:rPr lang="en-US" smtClean="0"/>
               <a:t>Click to edit Master title style</a:t>
             </a:r>
+            <a:endParaRPr lang="en-US"/>
           </a:p>
         </p:txBody>
       </p:sp>
@@ -613,37 +602,38 @@
           <a:p>
             <a:pPr lvl="0"/>
             <a:r>
-              <a:rPr lang="en-US"/>
+              <a:rPr lang="en-US" smtClean="0"/>
               <a:t>Click to edit Master text styles</a:t>
             </a:r>
           </a:p>
           <a:p>
             <a:pPr lvl="1"/>
             <a:r>
-              <a:rPr lang="en-US"/>
+              <a:rPr lang="en-US" smtClean="0"/>
               <a:t>Second level</a:t>
             </a:r>
           </a:p>
           <a:p>
             <a:pPr lvl="2"/>
             <a:r>
-              <a:rPr lang="en-US"/>
+              <a:rPr lang="en-US" smtClean="0"/>
               <a:t>Third level</a:t>
             </a:r>
           </a:p>
           <a:p>
             <a:pPr lvl="3"/>
             <a:r>
-              <a:rPr lang="en-US"/>
+              <a:rPr lang="en-US" smtClean="0"/>
               <a:t>Fourth level</a:t>
             </a:r>
           </a:p>
           <a:p>
             <a:pPr lvl="4"/>
             <a:r>
-              <a:rPr lang="en-US"/>
+              <a:rPr lang="en-US" smtClean="0"/>
               <a:t>Fifth level</a:t>
             </a:r>
+            <a:endParaRPr lang="en-US"/>
           </a:p>
         </p:txBody>
       </p:sp>
@@ -664,7 +654,7 @@
           <a:p>
             <a:fld id="{5BCAD085-E8A6-8845-BD4E-CB4CCA059FC4}" type="datetimeFigureOut">
               <a:rPr lang="en-US" smtClean="0"/>
-              <a:t>8/10/2026</a:t>
+              <a:t>1/27/13</a:t>
             </a:fld>
             <a:endParaRPr lang="en-US"/>
           </a:p>
@@ -758,9 +748,10 @@
           <a:lstStyle/>
           <a:p>
             <a:r>
-              <a:rPr lang="en-US"/>
+              <a:rPr lang="en-US" smtClean="0"/>
               <a:t>Click to edit Master title style</a:t>
             </a:r>
+            <a:endParaRPr lang="en-US"/>
           </a:p>
         </p:txBody>
       </p:sp>
@@ -781,37 +772,38 @@
           <a:p>
             <a:pPr lvl="0"/>
             <a:r>
-              <a:rPr lang="en-US"/>
+              <a:rPr lang="en-US" smtClean="0"/>
               <a:t>Click to edit Master text styles</a:t>
             </a:r>
           </a:p>
           <a:p>
             <a:pPr lvl="1"/>
             <a:r>
-              <a:rPr lang="en-US"/>
+              <a:rPr lang="en-US" smtClean="0"/>
               <a:t>Second level</a:t>
             </a:r>
           </a:p>
           <a:p>
             <a:pPr lvl="2"/>
             <a:r>
-              <a:rPr lang="en-US"/>
+              <a:rPr lang="en-US" smtClean="0"/>
               <a:t>Third level</a:t>
             </a:r>
           </a:p>
           <a:p>
             <a:pPr lvl="3"/>
             <a:r>
-              <a:rPr lang="en-US"/>
+              <a:rPr lang="en-US" smtClean="0"/>
               <a:t>Fourth level</a:t>
             </a:r>
           </a:p>
           <a:p>
             <a:pPr lvl="4"/>
             <a:r>
-              <a:rPr lang="en-US"/>
+              <a:rPr lang="en-US" smtClean="0"/>
               <a:t>Fifth level</a:t>
             </a:r>
+            <a:endParaRPr lang="en-US"/>
           </a:p>
         </p:txBody>
       </p:sp>
@@ -832,7 +824,7 @@
           <a:p>
             <a:fld id="{5BCAD085-E8A6-8845-BD4E-CB4CCA059FC4}" type="datetimeFigureOut">
               <a:rPr lang="en-US" smtClean="0"/>
-              <a:t>8/10/2026</a:t>
+              <a:t>1/27/13</a:t>
             </a:fld>
             <a:endParaRPr lang="en-US"/>
           </a:p>
@@ -935,9 +927,10 @@
           </a:lstStyle>
           <a:p>
             <a:r>
-              <a:rPr lang="en-US"/>
+              <a:rPr lang="en-US" smtClean="0"/>
               <a:t>Click to edit Master title style</a:t>
             </a:r>
+            <a:endParaRPr lang="en-US"/>
           </a:p>
         </p:txBody>
       </p:sp>
@@ -1054,7 +1047,7 @@
           <a:p>
             <a:pPr lvl="0"/>
             <a:r>
-              <a:rPr lang="en-US"/>
+              <a:rPr lang="en-US" smtClean="0"/>
               <a:t>Click to edit Master text styles</a:t>
             </a:r>
           </a:p>
@@ -1077,7 +1070,7 @@
           <a:p>
             <a:fld id="{5BCAD085-E8A6-8845-BD4E-CB4CCA059FC4}" type="datetimeFigureOut">
               <a:rPr lang="en-US" smtClean="0"/>
-              <a:t>8/10/2026</a:t>
+              <a:t>1/27/13</a:t>
             </a:fld>
             <a:endParaRPr lang="en-US"/>
           </a:p>
@@ -1171,9 +1164,10 @@
           <a:lstStyle/>
           <a:p>
             <a:r>
-              <a:rPr lang="en-US"/>
+              <a:rPr lang="en-US" smtClean="0"/>
               <a:t>Click to edit Master title style</a:t>
             </a:r>
+            <a:endParaRPr lang="en-US"/>
           </a:p>
         </p:txBody>
       </p:sp>
@@ -1227,37 +1221,38 @@
           <a:p>
             <a:pPr lvl="0"/>
             <a:r>
-              <a:rPr lang="en-US"/>
+              <a:rPr lang="en-US" smtClean="0"/>
               <a:t>Click to edit Master text styles</a:t>
             </a:r>
           </a:p>
           <a:p>
             <a:pPr lvl="1"/>
             <a:r>
-              <a:rPr lang="en-US"/>
+              <a:rPr lang="en-US" smtClean="0"/>
               <a:t>Second level</a:t>
             </a:r>
           </a:p>
           <a:p>
             <a:pPr lvl="2"/>
             <a:r>
-              <a:rPr lang="en-US"/>
+              <a:rPr lang="en-US" smtClean="0"/>
               <a:t>Third level</a:t>
             </a:r>
           </a:p>
           <a:p>
             <a:pPr lvl="3"/>
             <a:r>
-              <a:rPr lang="en-US"/>
+              <a:rPr lang="en-US" smtClean="0"/>
               <a:t>Fourth level</a:t>
             </a:r>
           </a:p>
           <a:p>
             <a:pPr lvl="4"/>
             <a:r>
-              <a:rPr lang="en-US"/>
+              <a:rPr lang="en-US" smtClean="0"/>
               <a:t>Fifth level</a:t>
             </a:r>
+            <a:endParaRPr lang="en-US"/>
           </a:p>
         </p:txBody>
       </p:sp>
@@ -1311,37 +1306,38 @@
           <a:p>
             <a:pPr lvl="0"/>
             <a:r>
-              <a:rPr lang="en-US"/>
+              <a:rPr lang="en-US" smtClean="0"/>
               <a:t>Click to edit Master text styles</a:t>
             </a:r>
           </a:p>
           <a:p>
             <a:pPr lvl="1"/>
             <a:r>
-              <a:rPr lang="en-US"/>
+              <a:rPr lang="en-US" smtClean="0"/>
               <a:t>Second level</a:t>
             </a:r>
           </a:p>
           <a:p>
             <a:pPr lvl="2"/>
             <a:r>
-              <a:rPr lang="en-US"/>
+              <a:rPr lang="en-US" smtClean="0"/>
               <a:t>Third level</a:t>
             </a:r>
           </a:p>
           <a:p>
             <a:pPr lvl="3"/>
             <a:r>
-              <a:rPr lang="en-US"/>
+              <a:rPr lang="en-US" smtClean="0"/>
               <a:t>Fourth level</a:t>
             </a:r>
           </a:p>
           <a:p>
             <a:pPr lvl="4"/>
             <a:r>
-              <a:rPr lang="en-US"/>
+              <a:rPr lang="en-US" smtClean="0"/>
               <a:t>Fifth level</a:t>
             </a:r>
+            <a:endParaRPr lang="en-US"/>
           </a:p>
         </p:txBody>
       </p:sp>
@@ -1362,7 +1358,7 @@
           <a:p>
             <a:fld id="{5BCAD085-E8A6-8845-BD4E-CB4CCA059FC4}" type="datetimeFigureOut">
               <a:rPr lang="en-US" smtClean="0"/>
-              <a:t>8/10/2026</a:t>
+              <a:t>1/27/13</a:t>
             </a:fld>
             <a:endParaRPr lang="en-US"/>
           </a:p>
@@ -1460,9 +1456,10 @@
           </a:lstStyle>
           <a:p>
             <a:r>
-              <a:rPr lang="en-US"/>
+              <a:rPr lang="en-US" smtClean="0"/>
               <a:t>Click to edit Master title style</a:t>
             </a:r>
+            <a:endParaRPr lang="en-US"/>
           </a:p>
         </p:txBody>
       </p:sp>
@@ -1525,7 +1522,7 @@
           <a:p>
             <a:pPr lvl="0"/>
             <a:r>
-              <a:rPr lang="en-US"/>
+              <a:rPr lang="en-US" smtClean="0"/>
               <a:t>Click to edit Master text styles</a:t>
             </a:r>
           </a:p>
@@ -1581,37 +1578,38 @@
           <a:p>
             <a:pPr lvl="0"/>
             <a:r>
-              <a:rPr lang="en-US"/>
+              <a:rPr lang="en-US" smtClean="0"/>
               <a:t>Click to edit Master text styles</a:t>
             </a:r>
           </a:p>
           <a:p>
             <a:pPr lvl="1"/>
             <a:r>
-              <a:rPr lang="en-US"/>
+              <a:rPr lang="en-US" smtClean="0"/>
               <a:t>Second level</a:t>
             </a:r>
           </a:p>
           <a:p>
             <a:pPr lvl="2"/>
             <a:r>
-              <a:rPr lang="en-US"/>
+              <a:rPr lang="en-US" smtClean="0"/>
               <a:t>Third level</a:t>
             </a:r>
           </a:p>
           <a:p>
             <a:pPr lvl="3"/>
             <a:r>
-              <a:rPr lang="en-US"/>
+              <a:rPr lang="en-US" smtClean="0"/>
               <a:t>Fourth level</a:t>
             </a:r>
           </a:p>
           <a:p>
             <a:pPr lvl="4"/>
             <a:r>
-              <a:rPr lang="en-US"/>
+              <a:rPr lang="en-US" smtClean="0"/>
               <a:t>Fifth level</a:t>
             </a:r>
+            <a:endParaRPr lang="en-US"/>
           </a:p>
         </p:txBody>
       </p:sp>
@@ -1674,7 +1672,7 @@
           <a:p>
             <a:pPr lvl="0"/>
             <a:r>
-              <a:rPr lang="en-US"/>
+              <a:rPr lang="en-US" smtClean="0"/>
               <a:t>Click to edit Master text styles</a:t>
             </a:r>
           </a:p>
@@ -1730,37 +1728,38 @@
           <a:p>
             <a:pPr lvl="0"/>
             <a:r>
-              <a:rPr lang="en-US"/>
+              <a:rPr lang="en-US" smtClean="0"/>
               <a:t>Click to edit Master text styles</a:t>
             </a:r>
           </a:p>
           <a:p>
             <a:pPr lvl="1"/>
             <a:r>
-              <a:rPr lang="en-US"/>
+              <a:rPr lang="en-US" smtClean="0"/>
               <a:t>Second level</a:t>
             </a:r>
           </a:p>
           <a:p>
             <a:pPr lvl="2"/>
             <a:r>
-              <a:rPr lang="en-US"/>
+              <a:rPr lang="en-US" smtClean="0"/>
               <a:t>Third level</a:t>
             </a:r>
           </a:p>
           <a:p>
             <a:pPr lvl="3"/>
             <a:r>
-              <a:rPr lang="en-US"/>
+              <a:rPr lang="en-US" smtClean="0"/>
               <a:t>Fourth level</a:t>
             </a:r>
           </a:p>
           <a:p>
             <a:pPr lvl="4"/>
             <a:r>
-              <a:rPr lang="en-US"/>
+              <a:rPr lang="en-US" smtClean="0"/>
               <a:t>Fifth level</a:t>
             </a:r>
+            <a:endParaRPr lang="en-US"/>
           </a:p>
         </p:txBody>
       </p:sp>
@@ -1781,7 +1780,7 @@
           <a:p>
             <a:fld id="{5BCAD085-E8A6-8845-BD4E-CB4CCA059FC4}" type="datetimeFigureOut">
               <a:rPr lang="en-US" smtClean="0"/>
-              <a:t>8/10/2026</a:t>
+              <a:t>1/27/13</a:t>
             </a:fld>
             <a:endParaRPr lang="en-US"/>
           </a:p>
@@ -1875,9 +1874,10 @@
           <a:lstStyle/>
           <a:p>
             <a:r>
-              <a:rPr lang="en-US"/>
+              <a:rPr lang="en-US" smtClean="0"/>
               <a:t>Click to edit Master title style</a:t>
             </a:r>
+            <a:endParaRPr lang="en-US"/>
           </a:p>
         </p:txBody>
       </p:sp>
@@ -1898,7 +1898,7 @@
           <a:p>
             <a:fld id="{5BCAD085-E8A6-8845-BD4E-CB4CCA059FC4}" type="datetimeFigureOut">
               <a:rPr lang="en-US" smtClean="0"/>
-              <a:t>8/10/2026</a:t>
+              <a:t>1/27/13</a:t>
             </a:fld>
             <a:endParaRPr lang="en-US"/>
           </a:p>
@@ -1993,7 +1993,7 @@
           <a:p>
             <a:fld id="{5BCAD085-E8A6-8845-BD4E-CB4CCA059FC4}" type="datetimeFigureOut">
               <a:rPr lang="en-US" smtClean="0"/>
-              <a:t>8/10/2026</a:t>
+              <a:t>1/27/13</a:t>
             </a:fld>
             <a:endParaRPr lang="en-US"/>
           </a:p>
@@ -2096,9 +2096,10 @@
           </a:lstStyle>
           <a:p>
             <a:r>
-              <a:rPr lang="en-US"/>
+              <a:rPr lang="en-US" smtClean="0"/>
               <a:t>Click to edit Master title style</a:t>
             </a:r>
+            <a:endParaRPr lang="en-US"/>
           </a:p>
         </p:txBody>
       </p:sp>
@@ -2152,37 +2153,38 @@
           <a:p>
             <a:pPr lvl="0"/>
             <a:r>
-              <a:rPr lang="en-US"/>
+              <a:rPr lang="en-US" smtClean="0"/>
               <a:t>Click to edit Master text styles</a:t>
             </a:r>
           </a:p>
           <a:p>
             <a:pPr lvl="1"/>
             <a:r>
-              <a:rPr lang="en-US"/>
+              <a:rPr lang="en-US" smtClean="0"/>
               <a:t>Second level</a:t>
             </a:r>
           </a:p>
           <a:p>
             <a:pPr lvl="2"/>
             <a:r>
-              <a:rPr lang="en-US"/>
+              <a:rPr lang="en-US" smtClean="0"/>
               <a:t>Third level</a:t>
             </a:r>
           </a:p>
           <a:p>
             <a:pPr lvl="3"/>
             <a:r>
-              <a:rPr lang="en-US"/>
+              <a:rPr lang="en-US" smtClean="0"/>
               <a:t>Fourth level</a:t>
             </a:r>
           </a:p>
           <a:p>
             <a:pPr lvl="4"/>
             <a:r>
-              <a:rPr lang="en-US"/>
+              <a:rPr lang="en-US" smtClean="0"/>
               <a:t>Fifth level</a:t>
             </a:r>
+            <a:endParaRPr lang="en-US"/>
           </a:p>
         </p:txBody>
       </p:sp>
@@ -2245,7 +2247,7 @@
           <a:p>
             <a:pPr lvl="0"/>
             <a:r>
-              <a:rPr lang="en-US"/>
+              <a:rPr lang="en-US" smtClean="0"/>
               <a:t>Click to edit Master text styles</a:t>
             </a:r>
           </a:p>
@@ -2268,7 +2270,7 @@
           <a:p>
             <a:fld id="{5BCAD085-E8A6-8845-BD4E-CB4CCA059FC4}" type="datetimeFigureOut">
               <a:rPr lang="en-US" smtClean="0"/>
-              <a:t>8/10/2026</a:t>
+              <a:t>1/27/13</a:t>
             </a:fld>
             <a:endParaRPr lang="en-US"/>
           </a:p>
@@ -2371,9 +2373,10 @@
           </a:lstStyle>
           <a:p>
             <a:r>
-              <a:rPr lang="en-US"/>
+              <a:rPr lang="en-US" smtClean="0"/>
               <a:t>Click to edit Master title style</a:t>
             </a:r>
+            <a:endParaRPr lang="en-US"/>
           </a:p>
         </p:txBody>
       </p:sp>
@@ -2497,7 +2500,7 @@
           <a:p>
             <a:pPr lvl="0"/>
             <a:r>
-              <a:rPr lang="en-US"/>
+              <a:rPr lang="en-US" smtClean="0"/>
               <a:t>Click to edit Master text styles</a:t>
             </a:r>
           </a:p>
@@ -2520,7 +2523,7 @@
           <a:p>
             <a:fld id="{5BCAD085-E8A6-8845-BD4E-CB4CCA059FC4}" type="datetimeFigureOut">
               <a:rPr lang="en-US" smtClean="0"/>
-              <a:t>8/10/2026</a:t>
+              <a:t>1/27/13</a:t>
             </a:fld>
             <a:endParaRPr lang="en-US"/>
           </a:p>
@@ -2629,9 +2632,10 @@
           <a:lstStyle/>
           <a:p>
             <a:r>
-              <a:rPr lang="en-US"/>
+              <a:rPr lang="en-US" smtClean="0"/>
               <a:t>Click to edit Master title style</a:t>
             </a:r>
+            <a:endParaRPr lang="en-US"/>
           </a:p>
         </p:txBody>
       </p:sp>
@@ -2662,37 +2666,38 @@
           <a:p>
             <a:pPr lvl="0"/>
             <a:r>
-              <a:rPr lang="en-US"/>
+              <a:rPr lang="en-US" smtClean="0"/>
               <a:t>Click to edit Master text styles</a:t>
             </a:r>
           </a:p>
           <a:p>
             <a:pPr lvl="1"/>
             <a:r>
-              <a:rPr lang="en-US"/>
+              <a:rPr lang="en-US" smtClean="0"/>
               <a:t>Second level</a:t>
             </a:r>
           </a:p>
           <a:p>
             <a:pPr lvl="2"/>
             <a:r>
-              <a:rPr lang="en-US"/>
+              <a:rPr lang="en-US" smtClean="0"/>
               <a:t>Third level</a:t>
             </a:r>
           </a:p>
           <a:p>
             <a:pPr lvl="3"/>
             <a:r>
-              <a:rPr lang="en-US"/>
+              <a:rPr lang="en-US" smtClean="0"/>
               <a:t>Fourth level</a:t>
             </a:r>
           </a:p>
           <a:p>
             <a:pPr lvl="4"/>
             <a:r>
-              <a:rPr lang="en-US"/>
+              <a:rPr lang="en-US" smtClean="0"/>
               <a:t>Fifth level</a:t>
             </a:r>
+            <a:endParaRPr lang="en-US"/>
           </a:p>
         </p:txBody>
       </p:sp>
@@ -2731,7 +2736,7 @@
           <a:p>
             <a:fld id="{5BCAD085-E8A6-8845-BD4E-CB4CCA059FC4}" type="datetimeFigureOut">
               <a:rPr lang="en-US" smtClean="0"/>
-              <a:t>8/10/2026</a:t>
+              <a:t>1/27/13</a:t>
             </a:fld>
             <a:endParaRPr lang="en-US"/>
           </a:p>
@@ -3090,7 +3095,7 @@
 </file>
 
 <file path=ppt/slides/slide1.xml><?xml version="1.0" encoding="utf-8"?>
-<p:sld xmlns:a="http://schemas.openxmlformats.org/drawingml/2006/main" xmlns:r="http://schemas.openxmlformats.org/officeDocument/2006/relationships" xmlns:p="http://schemas.openxmlformats.org/presentationml/2006/main">
+<p:sld xmlns:a="http://schemas.openxmlformats.org/drawingml/2006/main" xmlns:p="http://schemas.openxmlformats.org/presentationml/2006/main" xmlns:r="http://schemas.openxmlformats.org/officeDocument/2006/relationships">
   <p:cSld>
     <p:spTree>
       <p:nvGrpSpPr>
@@ -3098,14 +3103,51 @@
         <p:cNvGrpSpPr/>
         <p:nvPr/>
       </p:nvGrpSpPr>
-      <p:grpSpPr>
-        <a:xfrm>
-          <a:off x="0" y="0"/>
-          <a:ext cx="0" cy="0"/>
-          <a:chOff x="0" y="0"/>
-          <a:chExt cx="0" cy="0"/>
-        </a:xfrm>
-      </p:grpSpPr>
+      <p:grpSpPr/>
+      <p:sp>
+        <p:nvSpPr>
+          <p:cNvPr id="2" name="Rectangle 1"/>
+          <p:cNvSpPr/>
+          <p:nvPr/>
+        </p:nvSpPr>
+        <p:spPr>
+          <a:xfrm>
+            <a:off x="-25400" y="-25400"/>
+            <a:ext cx="12242800" cy="6908800"/>
+          </a:xfrm>
+          <a:prstGeom prst="rect">
+            <a:avLst/>
+          </a:prstGeom>
+          <a:solidFill>
+            <a:srgbClr val="F7F7F3"/>
+          </a:solidFill>
+          <a:ln>
+            <a:noFill/>
+          </a:ln>
+          <a:effectLst/>
+        </p:spPr>
+        <p:style>
+          <a:lnRef idx="1">
+            <a:schemeClr val="accent1"/>
+          </a:lnRef>
+          <a:fillRef idx="3">
+            <a:schemeClr val="accent1"/>
+          </a:fillRef>
+          <a:effectRef idx="2">
+            <a:schemeClr val="accent1"/>
+          </a:effectRef>
+          <a:fontRef idx="minor">
+            <a:schemeClr val="lt1"/>
+          </a:fontRef>
+        </p:style>
+        <p:txBody>
+          <a:bodyPr rtlCol="0" anchor="ctr" wrap="square"/>
+          <a:lstStyle/>
+          <a:p>
+            <a:pPr algn="ctr"/>
+          </a:p>
+        </p:txBody>
+      </p:sp>
       <p:sp>
         <p:nvSpPr>
           <p:cNvPr id="3" name="Rectangle 2"/>
@@ -3143,11 +3185,10 @@
           </a:fontRef>
         </p:style>
         <p:txBody>
-          <a:bodyPr wrap="square" rtlCol="0" anchor="ctr"/>
+          <a:bodyPr rtlCol="0" anchor="ctr" wrap="square"/>
           <a:lstStyle/>
           <a:p>
             <a:pPr algn="ctr"/>
-            <a:endParaRPr/>
           </a:p>
         </p:txBody>
       </p:sp>
@@ -3231,11 +3272,10 @@
           </a:fontRef>
         </p:style>
         <p:txBody>
-          <a:bodyPr wrap="square" rtlCol="0" anchor="ctr"/>
+          <a:bodyPr rtlCol="0" anchor="ctr" wrap="square"/>
           <a:lstStyle/>
           <a:p>
             <a:pPr algn="ctr"/>
-            <a:endParaRPr/>
           </a:p>
         </p:txBody>
       </p:sp>
@@ -3276,11 +3316,10 @@
           </a:fontRef>
         </p:style>
         <p:txBody>
-          <a:bodyPr wrap="square" rtlCol="0" anchor="ctr"/>
+          <a:bodyPr rtlCol="0" anchor="ctr" wrap="square"/>
           <a:lstStyle/>
           <a:p>
             <a:pPr algn="ctr"/>
-            <a:endParaRPr/>
           </a:p>
         </p:txBody>
       </p:sp>
@@ -3321,11 +3360,10 @@
           </a:fontRef>
         </p:style>
         <p:txBody>
-          <a:bodyPr wrap="square" rtlCol="0" anchor="ctr"/>
+          <a:bodyPr rtlCol="0" anchor="ctr" wrap="square"/>
           <a:lstStyle/>
           <a:p>
             <a:pPr algn="ctr"/>
-            <a:endParaRPr/>
           </a:p>
         </p:txBody>
       </p:sp>
@@ -3366,11 +3404,10 @@
           </a:fontRef>
         </p:style>
         <p:txBody>
-          <a:bodyPr wrap="square" rtlCol="0" anchor="ctr"/>
+          <a:bodyPr rtlCol="0" anchor="ctr" wrap="square"/>
           <a:lstStyle/>
           <a:p>
             <a:pPr algn="ctr"/>
-            <a:endParaRPr/>
           </a:p>
         </p:txBody>
       </p:sp>
@@ -3411,11 +3448,10 @@
           </a:fontRef>
         </p:style>
         <p:txBody>
-          <a:bodyPr wrap="square" rtlCol="0" anchor="ctr"/>
+          <a:bodyPr rtlCol="0" anchor="ctr" wrap="square"/>
           <a:lstStyle/>
           <a:p>
             <a:pPr algn="ctr"/>
-            <a:endParaRPr/>
           </a:p>
         </p:txBody>
       </p:sp>
@@ -3453,7 +3489,7 @@
               </a:spcAft>
             </a:pPr>
             <a:r>
-              <a:rPr sz="4000" b="1" dirty="0" err="1">
+              <a:rPr sz="4000" b="1">
                 <a:solidFill>
                   <a:srgbClr val="16233A"/>
                 </a:solidFill>
@@ -3462,13 +3498,6 @@
               </a:rPr>
               <a:t>SELDモデルを用いた</a:t>
             </a:r>
-            <a:endParaRPr sz="4000" b="1" dirty="0">
-              <a:solidFill>
-                <a:srgbClr val="16233A"/>
-              </a:solidFill>
-              <a:latin typeface="Meiryo"/>
-              <a:ea typeface="メイリオ"/>
-            </a:endParaRPr>
           </a:p>
           <a:p>
             <a:pPr algn="l">
@@ -3483,7 +3512,7 @@
               </a:spcAft>
             </a:pPr>
             <a:r>
-              <a:rPr sz="4000" b="1" dirty="0" err="1">
+              <a:rPr sz="4000" b="1">
                 <a:solidFill>
                   <a:srgbClr val="16233A"/>
                 </a:solidFill>
@@ -3492,13 +3521,6 @@
               </a:rPr>
               <a:t>難聴歩行者向け屋外危険音</a:t>
             </a:r>
-            <a:endParaRPr sz="4000" b="1" dirty="0">
-              <a:solidFill>
-                <a:srgbClr val="16233A"/>
-              </a:solidFill>
-              <a:latin typeface="Meiryo"/>
-              <a:ea typeface="メイリオ"/>
-            </a:endParaRPr>
           </a:p>
           <a:p>
             <a:pPr algn="l">
@@ -3513,7 +3535,7 @@
               </a:spcAft>
             </a:pPr>
             <a:r>
-              <a:rPr sz="4000" b="1" dirty="0" err="1">
+              <a:rPr sz="4000" b="1">
                 <a:solidFill>
                   <a:srgbClr val="16233A"/>
                 </a:solidFill>
@@ -3522,13 +3544,6 @@
               </a:rPr>
               <a:t>通知システムの構築</a:t>
             </a:r>
-            <a:endParaRPr sz="4000" b="1" dirty="0">
-              <a:solidFill>
-                <a:srgbClr val="16233A"/>
-              </a:solidFill>
-              <a:latin typeface="Meiryo"/>
-              <a:ea typeface="メイリオ"/>
-            </a:endParaRPr>
           </a:p>
         </p:txBody>
       </p:sp>
@@ -3622,11 +3637,10 @@
           </a:fontRef>
         </p:style>
         <p:txBody>
-          <a:bodyPr wrap="square" rtlCol="0" anchor="ctr"/>
+          <a:bodyPr rtlCol="0" anchor="ctr" wrap="square"/>
           <a:lstStyle/>
           <a:p>
             <a:pPr algn="ctr"/>
-            <a:endParaRPr/>
           </a:p>
         </p:txBody>
       </p:sp>
@@ -3667,11 +3681,10 @@
           </a:fontRef>
         </p:style>
         <p:txBody>
-          <a:bodyPr wrap="square" rtlCol="0" anchor="ctr"/>
+          <a:bodyPr rtlCol="0" anchor="ctr" wrap="square"/>
           <a:lstStyle/>
           <a:p>
             <a:pPr algn="ctr"/>
-            <a:endParaRPr/>
           </a:p>
         </p:txBody>
       </p:sp>
@@ -3712,11 +3725,10 @@
           </a:fontRef>
         </p:style>
         <p:txBody>
-          <a:bodyPr wrap="square" rtlCol="0" anchor="ctr"/>
+          <a:bodyPr rtlCol="0" anchor="ctr" wrap="square"/>
           <a:lstStyle/>
           <a:p>
             <a:pPr algn="ctr"/>
-            <a:endParaRPr/>
           </a:p>
         </p:txBody>
       </p:sp>
@@ -3757,11 +3769,10 @@
           </a:fontRef>
         </p:style>
         <p:txBody>
-          <a:bodyPr wrap="square" rtlCol="0" anchor="ctr"/>
+          <a:bodyPr rtlCol="0" anchor="ctr" wrap="square"/>
           <a:lstStyle/>
           <a:p>
             <a:pPr algn="ctr"/>
-            <a:endParaRPr/>
           </a:p>
         </p:txBody>
       </p:sp>
@@ -3802,11 +3813,10 @@
           </a:fontRef>
         </p:style>
         <p:txBody>
-          <a:bodyPr wrap="square" rtlCol="0" anchor="ctr"/>
+          <a:bodyPr rtlCol="0" anchor="ctr" wrap="square"/>
           <a:lstStyle/>
           <a:p>
             <a:pPr algn="ctr"/>
-            <a:endParaRPr/>
           </a:p>
         </p:txBody>
       </p:sp>
@@ -3847,11 +3857,10 @@
           </a:fontRef>
         </p:style>
         <p:txBody>
-          <a:bodyPr wrap="square" rtlCol="0" anchor="ctr"/>
+          <a:bodyPr rtlCol="0" anchor="ctr" wrap="square"/>
           <a:lstStyle/>
           <a:p>
             <a:pPr algn="ctr"/>
-            <a:endParaRPr/>
           </a:p>
         </p:txBody>
       </p:sp>
@@ -3892,11 +3901,10 @@
           </a:fontRef>
         </p:style>
         <p:txBody>
-          <a:bodyPr wrap="square" rtlCol="0" anchor="ctr"/>
+          <a:bodyPr rtlCol="0" anchor="ctr" wrap="square"/>
           <a:lstStyle/>
           <a:p>
             <a:pPr algn="ctr"/>
-            <a:endParaRPr/>
           </a:p>
         </p:txBody>
       </p:sp>
@@ -3937,11 +3945,10 @@
           </a:fontRef>
         </p:style>
         <p:txBody>
-          <a:bodyPr wrap="square" rtlCol="0" anchor="ctr"/>
+          <a:bodyPr rtlCol="0" anchor="ctr" wrap="square"/>
           <a:lstStyle/>
           <a:p>
             <a:pPr algn="ctr"/>
-            <a:endParaRPr/>
           </a:p>
         </p:txBody>
       </p:sp>
@@ -3982,11 +3989,10 @@
           </a:fontRef>
         </p:style>
         <p:txBody>
-          <a:bodyPr wrap="square" rtlCol="0" anchor="ctr"/>
+          <a:bodyPr rtlCol="0" anchor="ctr" wrap="square"/>
           <a:lstStyle/>
           <a:p>
             <a:pPr algn="ctr"/>
-            <a:endParaRPr/>
           </a:p>
         </p:txBody>
       </p:sp>
@@ -4027,11 +4033,10 @@
           </a:fontRef>
         </p:style>
         <p:txBody>
-          <a:bodyPr wrap="square" rtlCol="0" anchor="ctr"/>
+          <a:bodyPr rtlCol="0" anchor="ctr" wrap="square"/>
           <a:lstStyle/>
           <a:p>
             <a:pPr algn="ctr"/>
-            <a:endParaRPr/>
           </a:p>
         </p:txBody>
       </p:sp>
@@ -4072,11 +4077,10 @@
           </a:fontRef>
         </p:style>
         <p:txBody>
-          <a:bodyPr wrap="square" rtlCol="0" anchor="ctr"/>
+          <a:bodyPr rtlCol="0" anchor="ctr" wrap="square"/>
           <a:lstStyle/>
           <a:p>
             <a:pPr algn="ctr"/>
-            <a:endParaRPr/>
           </a:p>
         </p:txBody>
       </p:sp>
@@ -4117,11 +4121,10 @@
           </a:fontRef>
         </p:style>
         <p:txBody>
-          <a:bodyPr wrap="square" rtlCol="0" anchor="ctr"/>
+          <a:bodyPr rtlCol="0" anchor="ctr" wrap="square"/>
           <a:lstStyle/>
           <a:p>
             <a:pPr algn="ctr"/>
-            <a:endParaRPr/>
           </a:p>
         </p:txBody>
       </p:sp>
@@ -4162,11 +4165,10 @@
           </a:fontRef>
         </p:style>
         <p:txBody>
-          <a:bodyPr wrap="square" rtlCol="0" anchor="ctr"/>
+          <a:bodyPr rtlCol="0" anchor="ctr" wrap="square"/>
           <a:lstStyle/>
           <a:p>
             <a:pPr algn="ctr"/>
-            <a:endParaRPr/>
           </a:p>
         </p:txBody>
       </p:sp>
@@ -4207,11 +4209,10 @@
           </a:fontRef>
         </p:style>
         <p:txBody>
-          <a:bodyPr wrap="square" rtlCol="0" anchor="ctr"/>
+          <a:bodyPr rtlCol="0" anchor="ctr" wrap="square"/>
           <a:lstStyle/>
           <a:p>
             <a:pPr algn="ctr"/>
-            <a:endParaRPr/>
           </a:p>
         </p:txBody>
       </p:sp>
@@ -4252,11 +4253,10 @@
           </a:fontRef>
         </p:style>
         <p:txBody>
-          <a:bodyPr wrap="square" rtlCol="0" anchor="ctr"/>
+          <a:bodyPr rtlCol="0" anchor="ctr" wrap="square"/>
           <a:lstStyle/>
           <a:p>
             <a:pPr algn="ctr"/>
-            <a:endParaRPr/>
           </a:p>
         </p:txBody>
       </p:sp>
@@ -4297,11 +4297,10 @@
           </a:fontRef>
         </p:style>
         <p:txBody>
-          <a:bodyPr wrap="square" rtlCol="0" anchor="ctr"/>
+          <a:bodyPr rtlCol="0" anchor="ctr" wrap="square"/>
           <a:lstStyle/>
           <a:p>
             <a:pPr algn="ctr"/>
-            <a:endParaRPr/>
           </a:p>
         </p:txBody>
       </p:sp>
@@ -4342,11 +4341,10 @@
           </a:fontRef>
         </p:style>
         <p:txBody>
-          <a:bodyPr wrap="square" rtlCol="0" anchor="ctr"/>
+          <a:bodyPr rtlCol="0" anchor="ctr" wrap="square"/>
           <a:lstStyle/>
           <a:p>
             <a:pPr algn="ctr"/>
-            <a:endParaRPr/>
           </a:p>
         </p:txBody>
       </p:sp>
@@ -4387,11 +4385,10 @@
           </a:fontRef>
         </p:style>
         <p:txBody>
-          <a:bodyPr wrap="square" rtlCol="0" anchor="ctr"/>
+          <a:bodyPr rtlCol="0" anchor="ctr" wrap="square"/>
           <a:lstStyle/>
           <a:p>
             <a:pPr algn="ctr"/>
-            <a:endParaRPr/>
           </a:p>
         </p:txBody>
       </p:sp>
@@ -4432,11 +4429,10 @@
           </a:fontRef>
         </p:style>
         <p:txBody>
-          <a:bodyPr wrap="square" rtlCol="0" anchor="ctr"/>
+          <a:bodyPr rtlCol="0" anchor="ctr" wrap="square"/>
           <a:lstStyle/>
           <a:p>
             <a:pPr algn="ctr"/>
-            <a:endParaRPr/>
           </a:p>
         </p:txBody>
       </p:sp>
@@ -4477,11 +4473,10 @@
           </a:fontRef>
         </p:style>
         <p:txBody>
-          <a:bodyPr wrap="square" rtlCol="0" anchor="ctr"/>
+          <a:bodyPr rtlCol="0" anchor="ctr" wrap="square"/>
           <a:lstStyle/>
           <a:p>
             <a:pPr algn="ctr"/>
-            <a:endParaRPr/>
           </a:p>
         </p:txBody>
       </p:sp>
@@ -4522,11 +4517,10 @@
           </a:fontRef>
         </p:style>
         <p:txBody>
-          <a:bodyPr wrap="square" rtlCol="0" anchor="ctr"/>
+          <a:bodyPr rtlCol="0" anchor="ctr" wrap="square"/>
           <a:lstStyle/>
           <a:p>
             <a:pPr algn="ctr"/>
-            <a:endParaRPr/>
           </a:p>
         </p:txBody>
       </p:sp>
@@ -4567,11 +4561,10 @@
           </a:fontRef>
         </p:style>
         <p:txBody>
-          <a:bodyPr wrap="square" rtlCol="0" anchor="ctr"/>
+          <a:bodyPr rtlCol="0" anchor="ctr" wrap="square"/>
           <a:lstStyle/>
           <a:p>
             <a:pPr algn="ctr"/>
-            <a:endParaRPr/>
           </a:p>
         </p:txBody>
       </p:sp>
@@ -4612,11 +4605,10 @@
           </a:fontRef>
         </p:style>
         <p:txBody>
-          <a:bodyPr wrap="square" rtlCol="0" anchor="ctr"/>
+          <a:bodyPr rtlCol="0" anchor="ctr" wrap="square"/>
           <a:lstStyle/>
           <a:p>
             <a:pPr algn="ctr"/>
-            <a:endParaRPr/>
           </a:p>
         </p:txBody>
       </p:sp>
@@ -4657,11 +4649,10 @@
           </a:fontRef>
         </p:style>
         <p:txBody>
-          <a:bodyPr wrap="square" rtlCol="0" anchor="ctr"/>
+          <a:bodyPr rtlCol="0" anchor="ctr" wrap="square"/>
           <a:lstStyle/>
           <a:p>
             <a:pPr algn="ctr"/>
-            <a:endParaRPr/>
           </a:p>
         </p:txBody>
       </p:sp>
@@ -4702,11 +4693,10 @@
           </a:fontRef>
         </p:style>
         <p:txBody>
-          <a:bodyPr wrap="square" rtlCol="0" anchor="ctr"/>
+          <a:bodyPr rtlCol="0" anchor="ctr" wrap="square"/>
           <a:lstStyle/>
           <a:p>
             <a:pPr algn="ctr"/>
-            <a:endParaRPr/>
           </a:p>
         </p:txBody>
       </p:sp>
@@ -4747,11 +4737,10 @@
           </a:fontRef>
         </p:style>
         <p:txBody>
-          <a:bodyPr wrap="square" rtlCol="0" anchor="ctr"/>
+          <a:bodyPr rtlCol="0" anchor="ctr" wrap="square"/>
           <a:lstStyle/>
           <a:p>
             <a:pPr algn="ctr"/>
-            <a:endParaRPr/>
           </a:p>
         </p:txBody>
       </p:sp>
@@ -4792,11 +4781,10 @@
           </a:fontRef>
         </p:style>
         <p:txBody>
-          <a:bodyPr wrap="square" rtlCol="0" anchor="ctr"/>
+          <a:bodyPr rtlCol="0" anchor="ctr" wrap="square"/>
           <a:lstStyle/>
           <a:p>
             <a:pPr algn="ctr"/>
-            <a:endParaRPr/>
           </a:p>
         </p:txBody>
       </p:sp>
@@ -4837,11 +4825,10 @@
           </a:fontRef>
         </p:style>
         <p:txBody>
-          <a:bodyPr wrap="square" rtlCol="0" anchor="ctr"/>
+          <a:bodyPr rtlCol="0" anchor="ctr" wrap="square"/>
           <a:lstStyle/>
           <a:p>
             <a:pPr algn="ctr"/>
-            <a:endParaRPr/>
           </a:p>
         </p:txBody>
       </p:sp>
@@ -4882,11 +4869,10 @@
           </a:fontRef>
         </p:style>
         <p:txBody>
-          <a:bodyPr wrap="square" rtlCol="0" anchor="ctr"/>
+          <a:bodyPr rtlCol="0" anchor="ctr" wrap="square"/>
           <a:lstStyle/>
           <a:p>
             <a:pPr algn="ctr"/>
-            <a:endParaRPr/>
           </a:p>
         </p:txBody>
       </p:sp>
@@ -4927,11 +4913,10 @@
           </a:fontRef>
         </p:style>
         <p:txBody>
-          <a:bodyPr wrap="square" rtlCol="0" anchor="ctr"/>
+          <a:bodyPr rtlCol="0" anchor="ctr" wrap="square"/>
           <a:lstStyle/>
           <a:p>
             <a:pPr algn="ctr"/>
-            <a:endParaRPr/>
           </a:p>
         </p:txBody>
       </p:sp>
@@ -4972,11 +4957,10 @@
           </a:fontRef>
         </p:style>
         <p:txBody>
-          <a:bodyPr wrap="square" rtlCol="0" anchor="ctr"/>
+          <a:bodyPr rtlCol="0" anchor="ctr" wrap="square"/>
           <a:lstStyle/>
           <a:p>
             <a:pPr algn="ctr"/>
-            <a:endParaRPr/>
           </a:p>
         </p:txBody>
       </p:sp>
@@ -5017,11 +5001,10 @@
           </a:fontRef>
         </p:style>
         <p:txBody>
-          <a:bodyPr wrap="square" rtlCol="0" anchor="ctr"/>
+          <a:bodyPr rtlCol="0" anchor="ctr" wrap="square"/>
           <a:lstStyle/>
           <a:p>
             <a:pPr algn="ctr"/>
-            <a:endParaRPr/>
           </a:p>
         </p:txBody>
       </p:sp>
@@ -5062,11 +5045,10 @@
           </a:fontRef>
         </p:style>
         <p:txBody>
-          <a:bodyPr wrap="square" rtlCol="0" anchor="ctr"/>
+          <a:bodyPr rtlCol="0" anchor="ctr" wrap="square"/>
           <a:lstStyle/>
           <a:p>
             <a:pPr algn="ctr"/>
-            <a:endParaRPr/>
           </a:p>
         </p:txBody>
       </p:sp>
@@ -5107,11 +5089,10 @@
           </a:fontRef>
         </p:style>
         <p:txBody>
-          <a:bodyPr wrap="square" rtlCol="0" anchor="ctr"/>
+          <a:bodyPr rtlCol="0" anchor="ctr" wrap="square"/>
           <a:lstStyle/>
           <a:p>
             <a:pPr algn="ctr"/>
-            <a:endParaRPr/>
           </a:p>
         </p:txBody>
       </p:sp>
@@ -5152,11 +5133,10 @@
           </a:fontRef>
         </p:style>
         <p:txBody>
-          <a:bodyPr wrap="square" rtlCol="0" anchor="ctr"/>
+          <a:bodyPr rtlCol="0" anchor="ctr" wrap="square"/>
           <a:lstStyle/>
           <a:p>
             <a:pPr algn="ctr"/>
-            <a:endParaRPr/>
           </a:p>
         </p:txBody>
       </p:sp>
@@ -5197,11 +5177,10 @@
           </a:fontRef>
         </p:style>
         <p:txBody>
-          <a:bodyPr wrap="square" rtlCol="0" anchor="ctr"/>
+          <a:bodyPr rtlCol="0" anchor="ctr" wrap="square"/>
           <a:lstStyle/>
           <a:p>
             <a:pPr algn="ctr"/>
-            <a:endParaRPr/>
           </a:p>
         </p:txBody>
       </p:sp>
@@ -5242,11 +5221,10 @@
           </a:fontRef>
         </p:style>
         <p:txBody>
-          <a:bodyPr wrap="square" rtlCol="0" anchor="ctr"/>
+          <a:bodyPr rtlCol="0" anchor="ctr" wrap="square"/>
           <a:lstStyle/>
           <a:p>
             <a:pPr algn="ctr"/>
-            <a:endParaRPr/>
           </a:p>
         </p:txBody>
       </p:sp>
@@ -5287,11 +5265,10 @@
           </a:fontRef>
         </p:style>
         <p:txBody>
-          <a:bodyPr wrap="square" rtlCol="0" anchor="ctr"/>
+          <a:bodyPr rtlCol="0" anchor="ctr" wrap="square"/>
           <a:lstStyle/>
           <a:p>
             <a:pPr algn="ctr"/>
-            <a:endParaRPr/>
           </a:p>
         </p:txBody>
       </p:sp>
@@ -5332,11 +5309,10 @@
           </a:fontRef>
         </p:style>
         <p:txBody>
-          <a:bodyPr wrap="square" rtlCol="0" anchor="ctr"/>
+          <a:bodyPr rtlCol="0" anchor="ctr" wrap="square"/>
           <a:lstStyle/>
           <a:p>
             <a:pPr algn="ctr"/>
-            <a:endParaRPr/>
           </a:p>
         </p:txBody>
       </p:sp>
@@ -5377,11 +5353,10 @@
           </a:fontRef>
         </p:style>
         <p:txBody>
-          <a:bodyPr wrap="square" rtlCol="0" anchor="ctr"/>
+          <a:bodyPr rtlCol="0" anchor="ctr" wrap="square"/>
           <a:lstStyle/>
           <a:p>
             <a:pPr algn="ctr"/>
-            <a:endParaRPr/>
           </a:p>
         </p:txBody>
       </p:sp>
@@ -5422,11 +5397,10 @@
           </a:fontRef>
         </p:style>
         <p:txBody>
-          <a:bodyPr wrap="square" rtlCol="0" anchor="ctr"/>
+          <a:bodyPr rtlCol="0" anchor="ctr" wrap="square"/>
           <a:lstStyle/>
           <a:p>
             <a:pPr algn="ctr"/>
-            <a:endParaRPr/>
           </a:p>
         </p:txBody>
       </p:sp>
@@ -5467,11 +5441,10 @@
           </a:fontRef>
         </p:style>
         <p:txBody>
-          <a:bodyPr wrap="square" rtlCol="0" anchor="ctr"/>
+          <a:bodyPr rtlCol="0" anchor="ctr" wrap="square"/>
           <a:lstStyle/>
           <a:p>
             <a:pPr algn="ctr"/>
-            <a:endParaRPr/>
           </a:p>
         </p:txBody>
       </p:sp>
@@ -5512,11 +5485,10 @@
           </a:fontRef>
         </p:style>
         <p:txBody>
-          <a:bodyPr wrap="square" rtlCol="0" anchor="ctr"/>
+          <a:bodyPr rtlCol="0" anchor="ctr" wrap="square"/>
           <a:lstStyle/>
           <a:p>
             <a:pPr algn="ctr"/>
-            <a:endParaRPr/>
           </a:p>
         </p:txBody>
       </p:sp>
@@ -5557,11 +5529,10 @@
           </a:fontRef>
         </p:style>
         <p:txBody>
-          <a:bodyPr wrap="square" rtlCol="0" anchor="ctr"/>
+          <a:bodyPr rtlCol="0" anchor="ctr" wrap="square"/>
           <a:lstStyle/>
           <a:p>
             <a:pPr algn="ctr"/>
-            <a:endParaRPr/>
           </a:p>
         </p:txBody>
       </p:sp>
@@ -5602,11 +5573,10 @@
           </a:fontRef>
         </p:style>
         <p:txBody>
-          <a:bodyPr wrap="square" rtlCol="0" anchor="ctr"/>
+          <a:bodyPr rtlCol="0" anchor="ctr" wrap="square"/>
           <a:lstStyle/>
           <a:p>
             <a:pPr algn="ctr"/>
-            <a:endParaRPr/>
           </a:p>
         </p:txBody>
       </p:sp>
@@ -5647,11 +5617,10 @@
           </a:fontRef>
         </p:style>
         <p:txBody>
-          <a:bodyPr wrap="square" rtlCol="0" anchor="ctr"/>
+          <a:bodyPr rtlCol="0" anchor="ctr" wrap="square"/>
           <a:lstStyle/>
           <a:p>
             <a:pPr algn="ctr"/>
-            <a:endParaRPr/>
           </a:p>
         </p:txBody>
       </p:sp>
@@ -5692,11 +5661,10 @@
           </a:fontRef>
         </p:style>
         <p:txBody>
-          <a:bodyPr wrap="square" rtlCol="0" anchor="ctr"/>
+          <a:bodyPr rtlCol="0" anchor="ctr" wrap="square"/>
           <a:lstStyle/>
           <a:p>
             <a:pPr algn="ctr"/>
-            <a:endParaRPr/>
           </a:p>
         </p:txBody>
       </p:sp>
@@ -5737,11 +5705,10 @@
           </a:fontRef>
         </p:style>
         <p:txBody>
-          <a:bodyPr wrap="square" rtlCol="0" anchor="ctr"/>
+          <a:bodyPr rtlCol="0" anchor="ctr" wrap="square"/>
           <a:lstStyle/>
           <a:p>
             <a:pPr algn="ctr"/>
-            <a:endParaRPr/>
           </a:p>
         </p:txBody>
       </p:sp>
@@ -5782,11 +5749,10 @@
           </a:fontRef>
         </p:style>
         <p:txBody>
-          <a:bodyPr wrap="square" rtlCol="0" anchor="ctr"/>
+          <a:bodyPr rtlCol="0" anchor="ctr" wrap="square"/>
           <a:lstStyle/>
           <a:p>
             <a:pPr algn="ctr"/>
-            <a:endParaRPr/>
           </a:p>
         </p:txBody>
       </p:sp>
@@ -5827,11 +5793,10 @@
           </a:fontRef>
         </p:style>
         <p:txBody>
-          <a:bodyPr wrap="square" rtlCol="0" anchor="ctr"/>
+          <a:bodyPr rtlCol="0" anchor="ctr" wrap="square"/>
           <a:lstStyle/>
           <a:p>
             <a:pPr algn="ctr"/>
-            <a:endParaRPr/>
           </a:p>
         </p:txBody>
       </p:sp>
@@ -5872,11 +5837,10 @@
           </a:fontRef>
         </p:style>
         <p:txBody>
-          <a:bodyPr wrap="square" rtlCol="0" anchor="ctr"/>
+          <a:bodyPr rtlCol="0" anchor="ctr" wrap="square"/>
           <a:lstStyle/>
           <a:p>
             <a:pPr algn="ctr"/>
-            <a:endParaRPr/>
           </a:p>
         </p:txBody>
       </p:sp>
@@ -5917,11 +5881,10 @@
           </a:fontRef>
         </p:style>
         <p:txBody>
-          <a:bodyPr wrap="square" rtlCol="0" anchor="ctr"/>
+          <a:bodyPr rtlCol="0" anchor="ctr" wrap="square"/>
           <a:lstStyle/>
           <a:p>
             <a:pPr algn="ctr"/>
-            <a:endParaRPr/>
           </a:p>
         </p:txBody>
       </p:sp>
@@ -5962,11 +5925,10 @@
           </a:fontRef>
         </p:style>
         <p:txBody>
-          <a:bodyPr wrap="square" rtlCol="0" anchor="ctr"/>
+          <a:bodyPr rtlCol="0" anchor="ctr" wrap="square"/>
           <a:lstStyle/>
           <a:p>
             <a:pPr algn="ctr"/>
-            <a:endParaRPr/>
           </a:p>
         </p:txBody>
       </p:sp>
@@ -6007,11 +5969,10 @@
           </a:fontRef>
         </p:style>
         <p:txBody>
-          <a:bodyPr wrap="square" rtlCol="0" anchor="ctr"/>
+          <a:bodyPr rtlCol="0" anchor="ctr" wrap="square"/>
           <a:lstStyle/>
           <a:p>
             <a:pPr algn="ctr"/>
-            <a:endParaRPr/>
           </a:p>
         </p:txBody>
       </p:sp>
@@ -6052,11 +6013,10 @@
           </a:fontRef>
         </p:style>
         <p:txBody>
-          <a:bodyPr wrap="square" rtlCol="0" anchor="ctr"/>
+          <a:bodyPr rtlCol="0" anchor="ctr" wrap="square"/>
           <a:lstStyle/>
           <a:p>
             <a:pPr algn="ctr"/>
-            <a:endParaRPr/>
           </a:p>
         </p:txBody>
       </p:sp>
@@ -6097,11 +6057,10 @@
           </a:fontRef>
         </p:style>
         <p:txBody>
-          <a:bodyPr wrap="square" rtlCol="0" anchor="ctr"/>
+          <a:bodyPr rtlCol="0" anchor="ctr" wrap="square"/>
           <a:lstStyle/>
           <a:p>
             <a:pPr algn="ctr"/>
-            <a:endParaRPr/>
           </a:p>
         </p:txBody>
       </p:sp>
@@ -6142,11 +6101,10 @@
           </a:fontRef>
         </p:style>
         <p:txBody>
-          <a:bodyPr wrap="square" rtlCol="0" anchor="ctr"/>
+          <a:bodyPr rtlCol="0" anchor="ctr" wrap="square"/>
           <a:lstStyle/>
           <a:p>
             <a:pPr algn="ctr"/>
-            <a:endParaRPr/>
           </a:p>
         </p:txBody>
       </p:sp>
@@ -6187,11 +6145,10 @@
           </a:fontRef>
         </p:style>
         <p:txBody>
-          <a:bodyPr wrap="square" rtlCol="0" anchor="ctr"/>
+          <a:bodyPr rtlCol="0" anchor="ctr" wrap="square"/>
           <a:lstStyle/>
           <a:p>
             <a:pPr algn="ctr"/>
-            <a:endParaRPr/>
           </a:p>
         </p:txBody>
       </p:sp>
@@ -6232,11 +6189,10 @@
           </a:fontRef>
         </p:style>
         <p:txBody>
-          <a:bodyPr wrap="square" rtlCol="0" anchor="ctr"/>
+          <a:bodyPr rtlCol="0" anchor="ctr" wrap="square"/>
           <a:lstStyle/>
           <a:p>
             <a:pPr algn="ctr"/>
-            <a:endParaRPr/>
           </a:p>
         </p:txBody>
       </p:sp>
@@ -6277,11 +6233,10 @@
           </a:fontRef>
         </p:style>
         <p:txBody>
-          <a:bodyPr wrap="square" rtlCol="0" anchor="ctr"/>
+          <a:bodyPr rtlCol="0" anchor="ctr" wrap="square"/>
           <a:lstStyle/>
           <a:p>
             <a:pPr algn="ctr"/>
-            <a:endParaRPr/>
           </a:p>
         </p:txBody>
       </p:sp>
@@ -6322,11 +6277,10 @@
           </a:fontRef>
         </p:style>
         <p:txBody>
-          <a:bodyPr wrap="square" rtlCol="0" anchor="ctr"/>
+          <a:bodyPr rtlCol="0" anchor="ctr" wrap="square"/>
           <a:lstStyle/>
           <a:p>
             <a:pPr algn="ctr"/>
-            <a:endParaRPr/>
           </a:p>
         </p:txBody>
       </p:sp>
@@ -6367,11 +6321,10 @@
           </a:fontRef>
         </p:style>
         <p:txBody>
-          <a:bodyPr wrap="square" rtlCol="0" anchor="ctr"/>
+          <a:bodyPr rtlCol="0" anchor="ctr" wrap="square"/>
           <a:lstStyle/>
           <a:p>
             <a:pPr algn="ctr"/>
-            <a:endParaRPr/>
           </a:p>
         </p:txBody>
       </p:sp>
@@ -6412,11 +6365,10 @@
           </a:fontRef>
         </p:style>
         <p:txBody>
-          <a:bodyPr wrap="square" rtlCol="0" anchor="ctr"/>
+          <a:bodyPr rtlCol="0" anchor="ctr" wrap="square"/>
           <a:lstStyle/>
           <a:p>
             <a:pPr algn="ctr"/>
-            <a:endParaRPr/>
           </a:p>
         </p:txBody>
       </p:sp>
@@ -6457,11 +6409,10 @@
           </a:fontRef>
         </p:style>
         <p:txBody>
-          <a:bodyPr wrap="square" rtlCol="0" anchor="ctr"/>
+          <a:bodyPr rtlCol="0" anchor="ctr" wrap="square"/>
           <a:lstStyle/>
           <a:p>
             <a:pPr algn="ctr"/>
-            <a:endParaRPr/>
           </a:p>
         </p:txBody>
       </p:sp>
@@ -6502,11 +6453,10 @@
           </a:fontRef>
         </p:style>
         <p:txBody>
-          <a:bodyPr wrap="square" rtlCol="0" anchor="ctr"/>
+          <a:bodyPr rtlCol="0" anchor="ctr" wrap="square"/>
           <a:lstStyle/>
           <a:p>
             <a:pPr algn="ctr"/>
-            <a:endParaRPr/>
           </a:p>
         </p:txBody>
       </p:sp>
@@ -6547,11 +6497,10 @@
           </a:fontRef>
         </p:style>
         <p:txBody>
-          <a:bodyPr wrap="square" rtlCol="0" anchor="ctr"/>
+          <a:bodyPr rtlCol="0" anchor="ctr" wrap="square"/>
           <a:lstStyle/>
           <a:p>
             <a:pPr algn="ctr"/>
-            <a:endParaRPr/>
           </a:p>
         </p:txBody>
       </p:sp>
@@ -6592,11 +6541,10 @@
           </a:fontRef>
         </p:style>
         <p:txBody>
-          <a:bodyPr wrap="square" rtlCol="0" anchor="ctr"/>
+          <a:bodyPr rtlCol="0" anchor="ctr" wrap="square"/>
           <a:lstStyle/>
           <a:p>
             <a:pPr algn="ctr"/>
-            <a:endParaRPr/>
           </a:p>
         </p:txBody>
       </p:sp>
@@ -6637,11 +6585,10 @@
           </a:fontRef>
         </p:style>
         <p:txBody>
-          <a:bodyPr wrap="square" rtlCol="0" anchor="ctr"/>
+          <a:bodyPr rtlCol="0" anchor="ctr" wrap="square"/>
           <a:lstStyle/>
           <a:p>
             <a:pPr algn="ctr"/>
-            <a:endParaRPr/>
           </a:p>
         </p:txBody>
       </p:sp>
@@ -6682,11 +6629,10 @@
           </a:fontRef>
         </p:style>
         <p:txBody>
-          <a:bodyPr wrap="square" rtlCol="0" anchor="ctr"/>
+          <a:bodyPr rtlCol="0" anchor="ctr" wrap="square"/>
           <a:lstStyle/>
           <a:p>
             <a:pPr algn="ctr"/>
-            <a:endParaRPr/>
           </a:p>
         </p:txBody>
       </p:sp>
@@ -6727,11 +6673,10 @@
           </a:fontRef>
         </p:style>
         <p:txBody>
-          <a:bodyPr wrap="square" rtlCol="0" anchor="ctr"/>
+          <a:bodyPr rtlCol="0" anchor="ctr" wrap="square"/>
           <a:lstStyle/>
           <a:p>
             <a:pPr algn="ctr"/>
-            <a:endParaRPr/>
           </a:p>
         </p:txBody>
       </p:sp>
@@ -6772,11 +6717,10 @@
           </a:fontRef>
         </p:style>
         <p:txBody>
-          <a:bodyPr wrap="square" rtlCol="0" anchor="ctr"/>
+          <a:bodyPr rtlCol="0" anchor="ctr" wrap="square"/>
           <a:lstStyle/>
           <a:p>
             <a:pPr algn="ctr"/>
-            <a:endParaRPr/>
           </a:p>
         </p:txBody>
       </p:sp>
@@ -6817,11 +6761,10 @@
           </a:fontRef>
         </p:style>
         <p:txBody>
-          <a:bodyPr wrap="square" rtlCol="0" anchor="ctr"/>
+          <a:bodyPr rtlCol="0" anchor="ctr" wrap="square"/>
           <a:lstStyle/>
           <a:p>
             <a:pPr algn="ctr"/>
-            <a:endParaRPr/>
           </a:p>
         </p:txBody>
       </p:sp>
@@ -6862,11 +6805,10 @@
           </a:fontRef>
         </p:style>
         <p:txBody>
-          <a:bodyPr wrap="square" rtlCol="0" anchor="ctr"/>
+          <a:bodyPr rtlCol="0" anchor="ctr" wrap="square"/>
           <a:lstStyle/>
           <a:p>
             <a:pPr algn="ctr"/>
-            <a:endParaRPr/>
           </a:p>
         </p:txBody>
       </p:sp>
@@ -6907,11 +6849,10 @@
           </a:fontRef>
         </p:style>
         <p:txBody>
-          <a:bodyPr wrap="square" rtlCol="0" anchor="ctr"/>
+          <a:bodyPr rtlCol="0" anchor="ctr" wrap="square"/>
           <a:lstStyle/>
           <a:p>
             <a:pPr algn="ctr"/>
-            <a:endParaRPr/>
           </a:p>
         </p:txBody>
       </p:sp>
@@ -6952,11 +6893,10 @@
           </a:fontRef>
         </p:style>
         <p:txBody>
-          <a:bodyPr wrap="square" rtlCol="0" anchor="ctr"/>
+          <a:bodyPr rtlCol="0" anchor="ctr" wrap="square"/>
           <a:lstStyle/>
           <a:p>
             <a:pPr algn="ctr"/>
-            <a:endParaRPr/>
           </a:p>
         </p:txBody>
       </p:sp>
@@ -6997,11 +6937,10 @@
           </a:fontRef>
         </p:style>
         <p:txBody>
-          <a:bodyPr wrap="square" rtlCol="0" anchor="ctr"/>
+          <a:bodyPr rtlCol="0" anchor="ctr" wrap="square"/>
           <a:lstStyle/>
           <a:p>
             <a:pPr algn="ctr"/>
-            <a:endParaRPr/>
           </a:p>
         </p:txBody>
       </p:sp>
@@ -7042,11 +6981,10 @@
           </a:fontRef>
         </p:style>
         <p:txBody>
-          <a:bodyPr wrap="square" rtlCol="0" anchor="ctr"/>
+          <a:bodyPr rtlCol="0" anchor="ctr" wrap="square"/>
           <a:lstStyle/>
           <a:p>
             <a:pPr algn="ctr"/>
-            <a:endParaRPr/>
           </a:p>
         </p:txBody>
       </p:sp>
@@ -7087,11 +7025,10 @@
           </a:fontRef>
         </p:style>
         <p:txBody>
-          <a:bodyPr wrap="square" rtlCol="0" anchor="ctr"/>
+          <a:bodyPr rtlCol="0" anchor="ctr" wrap="square"/>
           <a:lstStyle/>
           <a:p>
             <a:pPr algn="ctr"/>
-            <a:endParaRPr/>
           </a:p>
         </p:txBody>
       </p:sp>
@@ -7132,11 +7069,10 @@
           </a:fontRef>
         </p:style>
         <p:txBody>
-          <a:bodyPr wrap="square" rtlCol="0" anchor="ctr"/>
+          <a:bodyPr rtlCol="0" anchor="ctr" wrap="square"/>
           <a:lstStyle/>
           <a:p>
             <a:pPr algn="ctr"/>
-            <a:endParaRPr/>
           </a:p>
         </p:txBody>
       </p:sp>
@@ -7177,11 +7113,10 @@
           </a:fontRef>
         </p:style>
         <p:txBody>
-          <a:bodyPr wrap="square" rtlCol="0" anchor="ctr"/>
+          <a:bodyPr rtlCol="0" anchor="ctr" wrap="square"/>
           <a:lstStyle/>
           <a:p>
             <a:pPr algn="ctr"/>
-            <a:endParaRPr/>
           </a:p>
         </p:txBody>
       </p:sp>
@@ -7258,7 +7193,7 @@
           </a:fontRef>
         </p:style>
         <p:txBody>
-          <a:bodyPr wrap="square" lIns="25400" tIns="12700" rIns="25400" bIns="12700" rtlCol="0" anchor="ctr"/>
+          <a:bodyPr rtlCol="0" anchor="ctr" wrap="square" lIns="25400" rIns="25400" tIns="12700" bIns="12700"/>
           <a:lstStyle/>
           <a:p>
             <a:pPr algn="ctr">
@@ -7319,7 +7254,7 @@
           </a:fontRef>
         </p:style>
         <p:txBody>
-          <a:bodyPr wrap="square" lIns="25400" tIns="12700" rIns="25400" bIns="12700" rtlCol="0" anchor="ctr"/>
+          <a:bodyPr rtlCol="0" anchor="ctr" wrap="square" lIns="25400" rIns="25400" tIns="12700" bIns="12700"/>
           <a:lstStyle/>
           <a:p>
             <a:pPr algn="ctr">
@@ -7380,7 +7315,7 @@
           </a:fontRef>
         </p:style>
         <p:txBody>
-          <a:bodyPr wrap="square" lIns="25400" tIns="12700" rIns="25400" bIns="12700" rtlCol="0" anchor="ctr"/>
+          <a:bodyPr rtlCol="0" anchor="ctr" wrap="square" lIns="25400" rIns="25400" tIns="12700" bIns="12700"/>
           <a:lstStyle/>
           <a:p>
             <a:pPr algn="ctr">
@@ -7441,7 +7376,7 @@
           </a:fontRef>
         </p:style>
         <p:txBody>
-          <a:bodyPr wrap="square" lIns="25400" tIns="12700" rIns="25400" bIns="12700" rtlCol="0" anchor="ctr"/>
+          <a:bodyPr rtlCol="0" anchor="ctr" wrap="square" lIns="25400" rIns="25400" tIns="12700" bIns="12700"/>
           <a:lstStyle/>
           <a:p>
             <a:pPr algn="ctr">
@@ -7502,7 +7437,7 @@
           </a:fontRef>
         </p:style>
         <p:txBody>
-          <a:bodyPr wrap="square" lIns="25400" tIns="12700" rIns="25400" bIns="12700" rtlCol="0" anchor="ctr"/>
+          <a:bodyPr rtlCol="0" anchor="ctr" wrap="square" lIns="25400" rIns="25400" tIns="12700" bIns="12700"/>
           <a:lstStyle/>
           <a:p>
             <a:pPr algn="ctr">
@@ -7563,7 +7498,7 @@
           </a:fontRef>
         </p:style>
         <p:txBody>
-          <a:bodyPr wrap="square" lIns="25400" tIns="12700" rIns="25400" bIns="12700" rtlCol="0" anchor="ctr"/>
+          <a:bodyPr rtlCol="0" anchor="ctr" wrap="square" lIns="25400" rIns="25400" tIns="12700" bIns="12700"/>
           <a:lstStyle/>
           <a:p>
             <a:pPr algn="ctr">
@@ -7639,7 +7574,7 @@
 </file>
 
 <file path=ppt/slides/slide10.xml><?xml version="1.0" encoding="utf-8"?>
-<p:sld xmlns:a="http://schemas.openxmlformats.org/drawingml/2006/main" xmlns:r="http://schemas.openxmlformats.org/officeDocument/2006/relationships" xmlns:p="http://schemas.openxmlformats.org/presentationml/2006/main">
+<p:sld xmlns:a="http://schemas.openxmlformats.org/drawingml/2006/main" xmlns:p="http://schemas.openxmlformats.org/presentationml/2006/main" xmlns:r="http://schemas.openxmlformats.org/officeDocument/2006/relationships">
   <p:cSld>
     <p:spTree>
       <p:nvGrpSpPr>
@@ -7647,14 +7582,7 @@
         <p:cNvGrpSpPr/>
         <p:nvPr/>
       </p:nvGrpSpPr>
-      <p:grpSpPr>
-        <a:xfrm>
-          <a:off x="0" y="0"/>
-          <a:ext cx="0" cy="0"/>
-          <a:chOff x="0" y="0"/>
-          <a:chExt cx="0" cy="0"/>
-        </a:xfrm>
-      </p:grpSpPr>
+      <p:grpSpPr/>
       <p:sp>
         <p:nvSpPr>
           <p:cNvPr id="2" name="Rectangle 1"/>
@@ -7692,11 +7620,10 @@
           </a:fontRef>
         </p:style>
         <p:txBody>
-          <a:bodyPr wrap="square" rtlCol="0" anchor="ctr"/>
+          <a:bodyPr rtlCol="0" anchor="ctr" wrap="square"/>
           <a:lstStyle/>
           <a:p>
             <a:pPr algn="ctr"/>
-            <a:endParaRPr/>
           </a:p>
         </p:txBody>
       </p:sp>
@@ -7738,7 +7665,7 @@
                 <a:latin typeface="Meiryo"/>
                 <a:ea typeface="メイリオ"/>
               </a:rPr>
-              <a:t>RESULTS 2/2 — 聞こえる前</a:t>
+              <a:t>RESULTS 2/2</a:t>
             </a:r>
           </a:p>
         </p:txBody>
@@ -7825,11 +7752,10 @@
           </a:fontRef>
         </p:style>
         <p:txBody>
-          <a:bodyPr wrap="square" rtlCol="0" anchor="ctr"/>
+          <a:bodyPr rtlCol="0" anchor="ctr" wrap="square"/>
           <a:lstStyle/>
           <a:p>
             <a:pPr algn="ctr"/>
-            <a:endParaRPr/>
           </a:p>
         </p:txBody>
       </p:sp>
@@ -8222,11 +8148,10 @@
           </a:fontRef>
         </p:style>
         <p:txBody>
-          <a:bodyPr wrap="square" rtlCol="0" anchor="ctr"/>
+          <a:bodyPr rtlCol="0" anchor="ctr" wrap="square"/>
           <a:lstStyle/>
           <a:p>
             <a:pPr algn="ctr"/>
-            <a:endParaRPr/>
           </a:p>
         </p:txBody>
       </p:sp>
@@ -8548,7 +8473,7 @@
                 <a:latin typeface="Meiryo"/>
                 <a:ea typeface="メイリオ"/>
               </a:rPr>
-              <a:t>サイレン初検知距離（100〜300m遠方配置・未検知ゼロ・確定評価）—「人が気づく前から機械の耳は聞いている」を距離で定量化</a:t>
+              <a:t>サイレン初検知距離（100〜300mの遠方配置・未検知ゼロ）—「人が気づく前から機械の耳は聞いている」を距離で定量化</a:t>
             </a:r>
           </a:p>
         </p:txBody>
@@ -8592,7 +8517,7 @@
           </a:fontRef>
         </p:style>
         <p:txBody>
-          <a:bodyPr wrap="square" lIns="177800" tIns="127000" rIns="177800" bIns="101600" rtlCol="0" anchor="t"/>
+          <a:bodyPr rtlCol="0" anchor="t" wrap="square" lIns="177800" rIns="177800" tIns="127000" bIns="101600"/>
           <a:lstStyle/>
           <a:p>
             <a:pPr algn="l">
@@ -8611,7 +8536,7 @@
                 <a:latin typeface="Meiryo"/>
                 <a:ea typeface="メイリオ"/>
               </a:rPr>
-              <a:t>通知層（確定評価）</a:t>
+              <a:t>通知層</a:t>
             </a:r>
           </a:p>
           <a:p>
@@ -8731,7 +8656,7 @@
           </a:fontRef>
         </p:style>
         <p:txBody>
-          <a:bodyPr wrap="square" lIns="177800" tIns="127000" rIns="177800" bIns="101600" rtlCol="0" anchor="t"/>
+          <a:bodyPr rtlCol="0" anchor="t" wrap="square" lIns="177800" rIns="177800" tIns="127000" bIns="101600"/>
           <a:lstStyle/>
           <a:p>
             <a:pPr algn="l">
@@ -8850,7 +8775,7 @@
           </a:fontRef>
         </p:style>
         <p:txBody>
-          <a:bodyPr wrap="square" lIns="177800" tIns="127000" rIns="177800" bIns="101600" rtlCol="0" anchor="t"/>
+          <a:bodyPr rtlCol="0" anchor="t" wrap="square" lIns="177800" rIns="177800" tIns="127000" bIns="101600"/>
           <a:lstStyle/>
           <a:p>
             <a:pPr algn="l">
@@ -9003,7 +8928,7 @@
           </a:fontRef>
         </p:style>
         <p:txBody>
-          <a:bodyPr wrap="square" lIns="25400" tIns="12700" rIns="25400" bIns="12700" rtlCol="0" anchor="ctr"/>
+          <a:bodyPr rtlCol="0" anchor="ctr" wrap="square" lIns="25400" rIns="25400" tIns="12700" bIns="12700"/>
           <a:lstStyle/>
           <a:p>
             <a:pPr algn="ctr">
@@ -9064,7 +8989,7 @@
           </a:fontRef>
         </p:style>
         <p:txBody>
-          <a:bodyPr wrap="square" lIns="25400" tIns="12700" rIns="25400" bIns="12700" rtlCol="0" anchor="ctr"/>
+          <a:bodyPr rtlCol="0" anchor="ctr" wrap="square" lIns="25400" rIns="25400" tIns="12700" bIns="12700"/>
           <a:lstStyle/>
           <a:p>
             <a:pPr algn="ctr">
@@ -9125,7 +9050,7 @@
           </a:fontRef>
         </p:style>
         <p:txBody>
-          <a:bodyPr wrap="square" lIns="25400" tIns="12700" rIns="25400" bIns="12700" rtlCol="0" anchor="ctr"/>
+          <a:bodyPr rtlCol="0" anchor="ctr" wrap="square" lIns="25400" rIns="25400" tIns="12700" bIns="12700"/>
           <a:lstStyle/>
           <a:p>
             <a:pPr algn="ctr">
@@ -9186,7 +9111,7 @@
           </a:fontRef>
         </p:style>
         <p:txBody>
-          <a:bodyPr wrap="square" lIns="25400" tIns="12700" rIns="25400" bIns="12700" rtlCol="0" anchor="ctr"/>
+          <a:bodyPr rtlCol="0" anchor="ctr" wrap="square" lIns="25400" rIns="25400" tIns="12700" bIns="12700"/>
           <a:lstStyle/>
           <a:p>
             <a:pPr algn="ctr">
@@ -9247,7 +9172,7 @@
           </a:fontRef>
         </p:style>
         <p:txBody>
-          <a:bodyPr wrap="square" lIns="25400" tIns="12700" rIns="25400" bIns="12700" rtlCol="0" anchor="ctr"/>
+          <a:bodyPr rtlCol="0" anchor="ctr" wrap="square" lIns="25400" rIns="25400" tIns="12700" bIns="12700"/>
           <a:lstStyle/>
           <a:p>
             <a:pPr algn="ctr">
@@ -9308,7 +9233,7 @@
           </a:fontRef>
         </p:style>
         <p:txBody>
-          <a:bodyPr wrap="square" lIns="25400" tIns="12700" rIns="25400" bIns="12700" rtlCol="0" anchor="ctr"/>
+          <a:bodyPr rtlCol="0" anchor="ctr" wrap="square" lIns="25400" rIns="25400" tIns="12700" bIns="12700"/>
           <a:lstStyle/>
           <a:p>
             <a:pPr algn="ctr">
@@ -9384,7 +9309,7 @@
 </file>
 
 <file path=ppt/slides/slide11.xml><?xml version="1.0" encoding="utf-8"?>
-<p:sld xmlns:a="http://schemas.openxmlformats.org/drawingml/2006/main" xmlns:r="http://schemas.openxmlformats.org/officeDocument/2006/relationships" xmlns:p="http://schemas.openxmlformats.org/presentationml/2006/main">
+<p:sld xmlns:a="http://schemas.openxmlformats.org/drawingml/2006/main" xmlns:p="http://schemas.openxmlformats.org/presentationml/2006/main" xmlns:r="http://schemas.openxmlformats.org/officeDocument/2006/relationships">
   <p:cSld>
     <p:spTree>
       <p:nvGrpSpPr>
@@ -9392,14 +9317,7 @@
         <p:cNvGrpSpPr/>
         <p:nvPr/>
       </p:nvGrpSpPr>
-      <p:grpSpPr>
-        <a:xfrm>
-          <a:off x="0" y="0"/>
-          <a:ext cx="0" cy="0"/>
-          <a:chOff x="0" y="0"/>
-          <a:chExt cx="0" cy="0"/>
-        </a:xfrm>
-      </p:grpSpPr>
+      <p:grpSpPr/>
       <p:sp>
         <p:nvSpPr>
           <p:cNvPr id="2" name="Rectangle 1"/>
@@ -9437,11 +9355,10 @@
           </a:fontRef>
         </p:style>
         <p:txBody>
-          <a:bodyPr wrap="square" rtlCol="0" anchor="ctr"/>
+          <a:bodyPr rtlCol="0" anchor="ctr" wrap="square"/>
           <a:lstStyle/>
           <a:p>
             <a:pPr algn="ctr"/>
-            <a:endParaRPr/>
           </a:p>
         </p:txBody>
       </p:sp>
@@ -9633,7 +9550,7 @@
           </a:fontRef>
         </p:style>
         <p:txBody>
-          <a:bodyPr wrap="square" lIns="177800" tIns="127000" rIns="177800" bIns="101600" rtlCol="0" anchor="t"/>
+          <a:bodyPr rtlCol="0" anchor="t" wrap="square" lIns="177800" rIns="177800" tIns="127000" bIns="101600"/>
           <a:lstStyle/>
           <a:p>
             <a:pPr algn="l">
@@ -9719,7 +9636,7 @@
           </a:fontRef>
         </p:style>
         <p:txBody>
-          <a:bodyPr wrap="square" lIns="177800" tIns="127000" rIns="177800" bIns="101600" rtlCol="0" anchor="t"/>
+          <a:bodyPr rtlCol="0" anchor="t" wrap="square" lIns="177800" rIns="177800" tIns="127000" bIns="101600"/>
           <a:lstStyle/>
           <a:p>
             <a:pPr algn="l">
@@ -9761,7 +9678,7 @@
                 <a:latin typeface="Meiryo"/>
                 <a:ea typeface="メイリオ"/>
               </a:rPr>
-              <a:t>各版を全物理の確定評価セット＋実録60本の共通土俵で採点 → 落ちた分＝その物理の大事さ</a:t>
+              <a:t>各版を同一の評価セット＋実環境録音の共通土俵で採点 → 落ちた分＝その物理の大事さ</a:t>
             </a:r>
           </a:p>
         </p:txBody>
@@ -9805,7 +9722,7 @@
           </a:fontRef>
         </p:style>
         <p:txBody>
-          <a:bodyPr wrap="square" lIns="177800" tIns="127000" rIns="177800" bIns="101600" rtlCol="0" anchor="t"/>
+          <a:bodyPr rtlCol="0" anchor="t" wrap="square" lIns="177800" rIns="177800" tIns="127000" bIns="101600"/>
           <a:lstStyle/>
           <a:p>
             <a:pPr algn="l">
@@ -9824,7 +9741,7 @@
                 <a:latin typeface="Meiryo"/>
                 <a:ea typeface="メイリオ"/>
               </a:rPr>
-              <a:t>準備状況</a:t>
+              <a:t>位置づけ</a:t>
             </a:r>
           </a:p>
           <a:p>
@@ -9847,7 +9764,7 @@
                 <a:latin typeface="Meiryo"/>
                 <a:ea typeface="メイリオ"/>
               </a:rPr>
-              <a:t>学習レシピ・採点系・評価セットは確定済み（計画第5版）。9月に実録と同じ土俵で実施</a:t>
+              <a:t>「合成データのどの物理が実環境性能に必要か」という問いに、切り分け実験で直接答える</a:t>
             </a:r>
           </a:p>
         </p:txBody>
@@ -9925,7 +9842,7 @@
           </a:fontRef>
         </p:style>
         <p:txBody>
-          <a:bodyPr wrap="square" lIns="25400" tIns="12700" rIns="25400" bIns="12700" rtlCol="0" anchor="ctr"/>
+          <a:bodyPr rtlCol="0" anchor="ctr" wrap="square" lIns="25400" rIns="25400" tIns="12700" bIns="12700"/>
           <a:lstStyle/>
           <a:p>
             <a:pPr algn="ctr">
@@ -9986,7 +9903,7 @@
           </a:fontRef>
         </p:style>
         <p:txBody>
-          <a:bodyPr wrap="square" lIns="25400" tIns="12700" rIns="25400" bIns="12700" rtlCol="0" anchor="ctr"/>
+          <a:bodyPr rtlCol="0" anchor="ctr" wrap="square" lIns="25400" rIns="25400" tIns="12700" bIns="12700"/>
           <a:lstStyle/>
           <a:p>
             <a:pPr algn="ctr">
@@ -10047,7 +9964,7 @@
           </a:fontRef>
         </p:style>
         <p:txBody>
-          <a:bodyPr wrap="square" lIns="25400" tIns="12700" rIns="25400" bIns="12700" rtlCol="0" anchor="ctr"/>
+          <a:bodyPr rtlCol="0" anchor="ctr" wrap="square" lIns="25400" rIns="25400" tIns="12700" bIns="12700"/>
           <a:lstStyle/>
           <a:p>
             <a:pPr algn="ctr">
@@ -10108,7 +10025,7 @@
           </a:fontRef>
         </p:style>
         <p:txBody>
-          <a:bodyPr wrap="square" lIns="25400" tIns="12700" rIns="25400" bIns="12700" rtlCol="0" anchor="ctr"/>
+          <a:bodyPr rtlCol="0" anchor="ctr" wrap="square" lIns="25400" rIns="25400" tIns="12700" bIns="12700"/>
           <a:lstStyle/>
           <a:p>
             <a:pPr algn="ctr">
@@ -10169,7 +10086,7 @@
           </a:fontRef>
         </p:style>
         <p:txBody>
-          <a:bodyPr wrap="square" lIns="25400" tIns="12700" rIns="25400" bIns="12700" rtlCol="0" anchor="ctr"/>
+          <a:bodyPr rtlCol="0" anchor="ctr" wrap="square" lIns="25400" rIns="25400" tIns="12700" bIns="12700"/>
           <a:lstStyle/>
           <a:p>
             <a:pPr algn="ctr">
@@ -10230,7 +10147,7 @@
           </a:fontRef>
         </p:style>
         <p:txBody>
-          <a:bodyPr wrap="square" lIns="25400" tIns="12700" rIns="25400" bIns="12700" rtlCol="0" anchor="ctr"/>
+          <a:bodyPr rtlCol="0" anchor="ctr" wrap="square" lIns="25400" rIns="25400" tIns="12700" bIns="12700"/>
           <a:lstStyle/>
           <a:p>
             <a:pPr algn="ctr">
@@ -10306,7 +10223,7 @@
 </file>
 
 <file path=ppt/slides/slide12.xml><?xml version="1.0" encoding="utf-8"?>
-<p:sld xmlns:a="http://schemas.openxmlformats.org/drawingml/2006/main" xmlns:r="http://schemas.openxmlformats.org/officeDocument/2006/relationships" xmlns:p="http://schemas.openxmlformats.org/presentationml/2006/main">
+<p:sld xmlns:a="http://schemas.openxmlformats.org/drawingml/2006/main" xmlns:p="http://schemas.openxmlformats.org/presentationml/2006/main" xmlns:r="http://schemas.openxmlformats.org/officeDocument/2006/relationships">
   <p:cSld>
     <p:spTree>
       <p:nvGrpSpPr>
@@ -10314,14 +10231,7 @@
         <p:cNvGrpSpPr/>
         <p:nvPr/>
       </p:nvGrpSpPr>
-      <p:grpSpPr>
-        <a:xfrm>
-          <a:off x="0" y="0"/>
-          <a:ext cx="0" cy="0"/>
-          <a:chOff x="0" y="0"/>
-          <a:chExt cx="0" cy="0"/>
-        </a:xfrm>
-      </p:grpSpPr>
+      <p:grpSpPr/>
       <p:sp>
         <p:nvSpPr>
           <p:cNvPr id="2" name="Rectangle 1"/>
@@ -10359,11 +10269,10 @@
           </a:fontRef>
         </p:style>
         <p:txBody>
-          <a:bodyPr wrap="square" rtlCol="0" anchor="ctr"/>
+          <a:bodyPr rtlCol="0" anchor="ctr" wrap="square"/>
           <a:lstStyle/>
           <a:p>
             <a:pPr algn="ctr"/>
-            <a:endParaRPr/>
           </a:p>
         </p:txBody>
       </p:sp>
@@ -10492,7 +10401,7 @@
           </a:fontRef>
         </p:style>
         <p:txBody>
-          <a:bodyPr wrap="square" lIns="177800" tIns="431800" rtlCol="0" anchor="ctr"/>
+          <a:bodyPr rtlCol="0" anchor="ctr" wrap="square" lIns="177800" tIns="431800"/>
           <a:lstStyle/>
           <a:p>
             <a:pPr algn="l">
@@ -10556,7 +10465,7 @@
           </a:fontRef>
         </p:style>
         <p:txBody>
-          <a:bodyPr wrap="square" lIns="38100" tIns="0" rIns="38100" bIns="0" rtlCol="0" anchor="ctr"/>
+          <a:bodyPr rtlCol="0" anchor="ctr" wrap="square" lIns="38100" rIns="38100" tIns="0" bIns="0"/>
           <a:lstStyle/>
           <a:p>
             <a:pPr algn="ctr">
@@ -10619,7 +10528,7 @@
           </a:fontRef>
         </p:style>
         <p:txBody>
-          <a:bodyPr wrap="square" lIns="177800" tIns="431800" rtlCol="0" anchor="ctr"/>
+          <a:bodyPr rtlCol="0" anchor="ctr" wrap="square" lIns="177800" tIns="431800"/>
           <a:lstStyle/>
           <a:p>
             <a:pPr algn="l">
@@ -10683,7 +10592,7 @@
           </a:fontRef>
         </p:style>
         <p:txBody>
-          <a:bodyPr wrap="square" lIns="38100" tIns="0" rIns="38100" bIns="0" rtlCol="0" anchor="ctr"/>
+          <a:bodyPr rtlCol="0" anchor="ctr" wrap="square" lIns="38100" rIns="38100" tIns="0" bIns="0"/>
           <a:lstStyle/>
           <a:p>
             <a:pPr algn="ctr">
@@ -10746,7 +10655,7 @@
           </a:fontRef>
         </p:style>
         <p:txBody>
-          <a:bodyPr wrap="square" lIns="177800" tIns="431800" rtlCol="0" anchor="ctr"/>
+          <a:bodyPr rtlCol="0" anchor="ctr" wrap="square" lIns="177800" tIns="431800"/>
           <a:lstStyle/>
           <a:p>
             <a:pPr algn="l">
@@ -10810,7 +10719,7 @@
           </a:fontRef>
         </p:style>
         <p:txBody>
-          <a:bodyPr wrap="square" lIns="38100" tIns="0" rIns="38100" bIns="0" rtlCol="0" anchor="ctr"/>
+          <a:bodyPr rtlCol="0" anchor="ctr" wrap="square" lIns="38100" rIns="38100" tIns="0" bIns="0"/>
           <a:lstStyle/>
           <a:p>
             <a:pPr algn="ctr">
@@ -10980,11 +10889,10 @@
           </a:fontRef>
         </p:style>
         <p:txBody>
-          <a:bodyPr wrap="square" rtlCol="0" anchor="ctr"/>
+          <a:bodyPr rtlCol="0" anchor="ctr" wrap="square"/>
           <a:lstStyle/>
           <a:p>
             <a:pPr algn="ctr"/>
-            <a:endParaRPr/>
           </a:p>
         </p:txBody>
       </p:sp>
@@ -11027,7 +10935,7 @@
           </a:fontRef>
         </p:style>
         <p:txBody>
-          <a:bodyPr wrap="square" lIns="203200" tIns="101600" rtlCol="0" anchor="ctr"/>
+          <a:bodyPr rtlCol="0" anchor="ctr" wrap="square" lIns="203200" tIns="101600"/>
           <a:lstStyle/>
           <a:p>
             <a:pPr algn="l">
@@ -11157,7 +11065,7 @@
           </a:fontRef>
         </p:style>
         <p:txBody>
-          <a:bodyPr wrap="square" lIns="25400" tIns="12700" rIns="25400" bIns="12700" rtlCol="0" anchor="ctr"/>
+          <a:bodyPr rtlCol="0" anchor="ctr" wrap="square" lIns="25400" rIns="25400" tIns="12700" bIns="12700"/>
           <a:lstStyle/>
           <a:p>
             <a:pPr algn="ctr">
@@ -11218,7 +11126,7 @@
           </a:fontRef>
         </p:style>
         <p:txBody>
-          <a:bodyPr wrap="square" lIns="25400" tIns="12700" rIns="25400" bIns="12700" rtlCol="0" anchor="ctr"/>
+          <a:bodyPr rtlCol="0" anchor="ctr" wrap="square" lIns="25400" rIns="25400" tIns="12700" bIns="12700"/>
           <a:lstStyle/>
           <a:p>
             <a:pPr algn="ctr">
@@ -11279,7 +11187,7 @@
           </a:fontRef>
         </p:style>
         <p:txBody>
-          <a:bodyPr wrap="square" lIns="25400" tIns="12700" rIns="25400" bIns="12700" rtlCol="0" anchor="ctr"/>
+          <a:bodyPr rtlCol="0" anchor="ctr" wrap="square" lIns="25400" rIns="25400" tIns="12700" bIns="12700"/>
           <a:lstStyle/>
           <a:p>
             <a:pPr algn="ctr">
@@ -11340,7 +11248,7 @@
           </a:fontRef>
         </p:style>
         <p:txBody>
-          <a:bodyPr wrap="square" lIns="25400" tIns="12700" rIns="25400" bIns="12700" rtlCol="0" anchor="ctr"/>
+          <a:bodyPr rtlCol="0" anchor="ctr" wrap="square" lIns="25400" rIns="25400" tIns="12700" bIns="12700"/>
           <a:lstStyle/>
           <a:p>
             <a:pPr algn="ctr">
@@ -11401,7 +11309,7 @@
           </a:fontRef>
         </p:style>
         <p:txBody>
-          <a:bodyPr wrap="square" lIns="25400" tIns="12700" rIns="25400" bIns="12700" rtlCol="0" anchor="ctr"/>
+          <a:bodyPr rtlCol="0" anchor="ctr" wrap="square" lIns="25400" rIns="25400" tIns="12700" bIns="12700"/>
           <a:lstStyle/>
           <a:p>
             <a:pPr algn="ctr">
@@ -11462,7 +11370,7 @@
           </a:fontRef>
         </p:style>
         <p:txBody>
-          <a:bodyPr wrap="square" lIns="25400" tIns="12700" rIns="25400" bIns="12700" rtlCol="0" anchor="ctr"/>
+          <a:bodyPr rtlCol="0" anchor="ctr" wrap="square" lIns="25400" rIns="25400" tIns="12700" bIns="12700"/>
           <a:lstStyle/>
           <a:p>
             <a:pPr algn="ctr">
@@ -11538,7 +11446,7 @@
 </file>
 
 <file path=ppt/slides/slide13.xml><?xml version="1.0" encoding="utf-8"?>
-<p:sld xmlns:a="http://schemas.openxmlformats.org/drawingml/2006/main" xmlns:r="http://schemas.openxmlformats.org/officeDocument/2006/relationships" xmlns:p="http://schemas.openxmlformats.org/presentationml/2006/main">
+<p:sld xmlns:a="http://schemas.openxmlformats.org/drawingml/2006/main" xmlns:p="http://schemas.openxmlformats.org/presentationml/2006/main" xmlns:r="http://schemas.openxmlformats.org/officeDocument/2006/relationships">
   <p:cSld>
     <p:spTree>
       <p:nvGrpSpPr>
@@ -11546,14 +11454,7 @@
         <p:cNvGrpSpPr/>
         <p:nvPr/>
       </p:nvGrpSpPr>
-      <p:grpSpPr>
-        <a:xfrm>
-          <a:off x="0" y="0"/>
-          <a:ext cx="0" cy="0"/>
-          <a:chOff x="0" y="0"/>
-          <a:chExt cx="0" cy="0"/>
-        </a:xfrm>
-      </p:grpSpPr>
+      <p:grpSpPr/>
       <p:sp>
         <p:nvSpPr>
           <p:cNvPr id="2" name="Rectangle 1"/>
@@ -11591,11 +11492,10 @@
           </a:fontRef>
         </p:style>
         <p:txBody>
-          <a:bodyPr wrap="square" rtlCol="0" anchor="ctr"/>
+          <a:bodyPr rtlCol="0" anchor="ctr" wrap="square"/>
           <a:lstStyle/>
           <a:p>
             <a:pPr algn="ctr"/>
-            <a:endParaRPr/>
           </a:p>
         </p:txBody>
       </p:sp>
@@ -11722,7 +11622,7 @@
           </a:fontRef>
         </p:style>
         <p:txBody>
-          <a:bodyPr wrap="square" lIns="38100" tIns="0" rIns="38100" bIns="0" rtlCol="0" anchor="ctr"/>
+          <a:bodyPr rtlCol="0" anchor="ctr" wrap="square" lIns="38100" rIns="38100" tIns="0" bIns="0"/>
           <a:lstStyle/>
           <a:p>
             <a:pPr algn="ctr">
@@ -11829,7 +11729,7 @@
           </a:fontRef>
         </p:style>
         <p:txBody>
-          <a:bodyPr wrap="square" lIns="38100" tIns="0" rIns="38100" bIns="0" rtlCol="0" anchor="ctr"/>
+          <a:bodyPr rtlCol="0" anchor="ctr" wrap="square" lIns="38100" rIns="38100" tIns="0" bIns="0"/>
           <a:lstStyle/>
           <a:p>
             <a:pPr algn="ctr">
@@ -11936,7 +11836,7 @@
           </a:fontRef>
         </p:style>
         <p:txBody>
-          <a:bodyPr wrap="square" lIns="38100" tIns="0" rIns="38100" bIns="0" rtlCol="0" anchor="ctr"/>
+          <a:bodyPr rtlCol="0" anchor="ctr" wrap="square" lIns="38100" rIns="38100" tIns="0" bIns="0"/>
           <a:lstStyle/>
           <a:p>
             <a:pPr algn="ctr">
@@ -12001,7 +11901,7 @@
                 <a:latin typeface="Meiryo"/>
                 <a:ea typeface="メイリオ"/>
               </a:rPr>
-              <a:t>至近警告の到達は約7割。未達の主因は距離推定が2フレーム連続で1.5mに届かないケース（個票監査で全数分類済み・安全車への誤帰属はほぼ無し）</a:t>
+              <a:t>至近警告の到達は約7割。未達の主因は距離推定が2フレーム連続で1.5mに届かないケース（失敗例は全数分類済み・安全な車への誤帰属はほぼ無し）</a:t>
             </a:r>
           </a:p>
         </p:txBody>
@@ -12043,7 +11943,7 @@
           </a:fontRef>
         </p:style>
         <p:txBody>
-          <a:bodyPr wrap="square" lIns="38100" tIns="0" rIns="38100" bIns="0" rtlCol="0" anchor="ctr"/>
+          <a:bodyPr rtlCol="0" anchor="ctr" wrap="square" lIns="38100" rIns="38100" tIns="0" bIns="0"/>
           <a:lstStyle/>
           <a:p>
             <a:pPr algn="ctr">
@@ -12150,7 +12050,7 @@
           </a:fontRef>
         </p:style>
         <p:txBody>
-          <a:bodyPr wrap="square" lIns="38100" tIns="0" rIns="38100" bIns="0" rtlCol="0" anchor="ctr"/>
+          <a:bodyPr rtlCol="0" anchor="ctr" wrap="square" lIns="38100" rIns="38100" tIns="0" bIns="0"/>
           <a:lstStyle/>
           <a:p>
             <a:pPr algn="ctr">
@@ -12336,7 +12236,7 @@
           </a:fontRef>
         </p:style>
         <p:txBody>
-          <a:bodyPr wrap="square" lIns="25400" tIns="12700" rIns="25400" bIns="12700" rtlCol="0" anchor="ctr"/>
+          <a:bodyPr rtlCol="0" anchor="ctr" wrap="square" lIns="25400" rIns="25400" tIns="12700" bIns="12700"/>
           <a:lstStyle/>
           <a:p>
             <a:pPr algn="ctr">
@@ -12397,7 +12297,7 @@
           </a:fontRef>
         </p:style>
         <p:txBody>
-          <a:bodyPr wrap="square" lIns="25400" tIns="12700" rIns="25400" bIns="12700" rtlCol="0" anchor="ctr"/>
+          <a:bodyPr rtlCol="0" anchor="ctr" wrap="square" lIns="25400" rIns="25400" tIns="12700" bIns="12700"/>
           <a:lstStyle/>
           <a:p>
             <a:pPr algn="ctr">
@@ -12458,7 +12358,7 @@
           </a:fontRef>
         </p:style>
         <p:txBody>
-          <a:bodyPr wrap="square" lIns="25400" tIns="12700" rIns="25400" bIns="12700" rtlCol="0" anchor="ctr"/>
+          <a:bodyPr rtlCol="0" anchor="ctr" wrap="square" lIns="25400" rIns="25400" tIns="12700" bIns="12700"/>
           <a:lstStyle/>
           <a:p>
             <a:pPr algn="ctr">
@@ -12519,7 +12419,7 @@
           </a:fontRef>
         </p:style>
         <p:txBody>
-          <a:bodyPr wrap="square" lIns="25400" tIns="12700" rIns="25400" bIns="12700" rtlCol="0" anchor="ctr"/>
+          <a:bodyPr rtlCol="0" anchor="ctr" wrap="square" lIns="25400" rIns="25400" tIns="12700" bIns="12700"/>
           <a:lstStyle/>
           <a:p>
             <a:pPr algn="ctr">
@@ -12580,7 +12480,7 @@
           </a:fontRef>
         </p:style>
         <p:txBody>
-          <a:bodyPr wrap="square" lIns="25400" tIns="12700" rIns="25400" bIns="12700" rtlCol="0" anchor="ctr"/>
+          <a:bodyPr rtlCol="0" anchor="ctr" wrap="square" lIns="25400" rIns="25400" tIns="12700" bIns="12700"/>
           <a:lstStyle/>
           <a:p>
             <a:pPr algn="ctr">
@@ -12641,7 +12541,7 @@
           </a:fontRef>
         </p:style>
         <p:txBody>
-          <a:bodyPr wrap="square" lIns="25400" tIns="12700" rIns="25400" bIns="12700" rtlCol="0" anchor="ctr"/>
+          <a:bodyPr rtlCol="0" anchor="ctr" wrap="square" lIns="25400" rIns="25400" tIns="12700" bIns="12700"/>
           <a:lstStyle/>
           <a:p>
             <a:pPr algn="ctr">
@@ -12717,7 +12617,7 @@
 </file>
 
 <file path=ppt/slides/slide14.xml><?xml version="1.0" encoding="utf-8"?>
-<p:sld xmlns:a="http://schemas.openxmlformats.org/drawingml/2006/main" xmlns:r="http://schemas.openxmlformats.org/officeDocument/2006/relationships" xmlns:p="http://schemas.openxmlformats.org/presentationml/2006/main">
+<p:sld xmlns:a="http://schemas.openxmlformats.org/drawingml/2006/main" xmlns:p="http://schemas.openxmlformats.org/presentationml/2006/main" xmlns:r="http://schemas.openxmlformats.org/officeDocument/2006/relationships">
   <p:cSld>
     <p:spTree>
       <p:nvGrpSpPr>
@@ -12725,14 +12625,7 @@
         <p:cNvGrpSpPr/>
         <p:nvPr/>
       </p:nvGrpSpPr>
-      <p:grpSpPr>
-        <a:xfrm>
-          <a:off x="0" y="0"/>
-          <a:ext cx="0" cy="0"/>
-          <a:chOff x="0" y="0"/>
-          <a:chExt cx="0" cy="0"/>
-        </a:xfrm>
-      </p:grpSpPr>
+      <p:grpSpPr/>
       <p:sp>
         <p:nvSpPr>
           <p:cNvPr id="2" name="Rectangle 1"/>
@@ -12770,11 +12663,10 @@
           </a:fontRef>
         </p:style>
         <p:txBody>
-          <a:bodyPr wrap="square" rtlCol="0" anchor="ctr"/>
+          <a:bodyPr rtlCol="0" anchor="ctr" wrap="square"/>
           <a:lstStyle/>
           <a:p>
             <a:pPr algn="ctr"/>
-            <a:endParaRPr/>
           </a:p>
         </p:txBody>
       </p:sp>
@@ -12945,7 +12837,7 @@
                 <a:latin typeface="Meiryo"/>
                 <a:ea typeface="メイリオ"/>
               </a:rPr>
-              <a:t>事前固定の未使用セットで確定評価</a:t>
+              <a:t>学習に未使用の評価データで性能を確認</a:t>
             </a:r>
             <a:r>
               <a:rPr sz="1600" b="0">
@@ -12955,7 +12847,7 @@
                 <a:latin typeface="Meiryo"/>
                 <a:ea typeface="メイリオ"/>
               </a:rPr>
-              <a:t>（ゲート4/5達成・AI外部監査 完全合格）</a:t>
+              <a:t>（事前設定の目標5項目中4項目を達成）</a:t>
             </a:r>
           </a:p>
           <a:p>
@@ -13154,7 +13046,7 @@
                 <a:latin typeface="Meiryo"/>
                 <a:ea typeface="メイリオ"/>
               </a:rPr>
-              <a:t>9月の実録評価</a:t>
+              <a:t>実環境録音での評価</a:t>
             </a:r>
             <a:r>
               <a:rPr sz="1600" b="0">
@@ -13164,7 +13056,7 @@
                 <a:latin typeface="Meiryo"/>
                 <a:ea typeface="メイリオ"/>
               </a:rPr>
-              <a:t>（測定方法確定済み）と</a:t>
+              <a:t>と</a:t>
             </a:r>
             <a:r>
               <a:rPr sz="1600" b="1">
@@ -13174,7 +13066,7 @@
                 <a:latin typeface="Meiryo"/>
                 <a:ea typeface="メイリオ"/>
               </a:rPr>
-              <a:t>物理ablation</a:t>
+              <a:t>物理要素の切り分け実験</a:t>
             </a:r>
             <a:r>
               <a:rPr sz="1600" b="0">
@@ -13226,11 +13118,10 @@
           </a:fontRef>
         </p:style>
         <p:txBody>
-          <a:bodyPr wrap="square" rtlCol="0" anchor="ctr"/>
+          <a:bodyPr rtlCol="0" anchor="ctr" wrap="square"/>
           <a:lstStyle/>
           <a:p>
             <a:pPr algn="ctr"/>
-            <a:endParaRPr/>
           </a:p>
         </p:txBody>
       </p:sp>
@@ -13271,11 +13162,10 @@
           </a:fontRef>
         </p:style>
         <p:txBody>
-          <a:bodyPr wrap="square" rtlCol="0" anchor="ctr"/>
+          <a:bodyPr rtlCol="0" anchor="ctr" wrap="square"/>
           <a:lstStyle/>
           <a:p>
             <a:pPr algn="ctr"/>
-            <a:endParaRPr/>
           </a:p>
         </p:txBody>
       </p:sp>
@@ -13316,11 +13206,10 @@
           </a:fontRef>
         </p:style>
         <p:txBody>
-          <a:bodyPr wrap="square" rtlCol="0" anchor="ctr"/>
+          <a:bodyPr rtlCol="0" anchor="ctr" wrap="square"/>
           <a:lstStyle/>
           <a:p>
             <a:pPr algn="ctr"/>
-            <a:endParaRPr/>
           </a:p>
         </p:txBody>
       </p:sp>
@@ -13361,11 +13250,10 @@
           </a:fontRef>
         </p:style>
         <p:txBody>
-          <a:bodyPr wrap="square" rtlCol="0" anchor="ctr"/>
+          <a:bodyPr rtlCol="0" anchor="ctr" wrap="square"/>
           <a:lstStyle/>
           <a:p>
             <a:pPr algn="ctr"/>
-            <a:endParaRPr/>
           </a:p>
         </p:txBody>
       </p:sp>
@@ -13406,11 +13294,10 @@
           </a:fontRef>
         </p:style>
         <p:txBody>
-          <a:bodyPr wrap="square" rtlCol="0" anchor="ctr"/>
+          <a:bodyPr rtlCol="0" anchor="ctr" wrap="square"/>
           <a:lstStyle/>
           <a:p>
             <a:pPr algn="ctr"/>
-            <a:endParaRPr/>
           </a:p>
         </p:txBody>
       </p:sp>
@@ -13451,11 +13338,10 @@
           </a:fontRef>
         </p:style>
         <p:txBody>
-          <a:bodyPr wrap="square" rtlCol="0" anchor="ctr"/>
+          <a:bodyPr rtlCol="0" anchor="ctr" wrap="square"/>
           <a:lstStyle/>
           <a:p>
             <a:pPr algn="ctr"/>
-            <a:endParaRPr/>
           </a:p>
         </p:txBody>
       </p:sp>
@@ -13496,11 +13382,10 @@
           </a:fontRef>
         </p:style>
         <p:txBody>
-          <a:bodyPr wrap="square" rtlCol="0" anchor="ctr"/>
+          <a:bodyPr rtlCol="0" anchor="ctr" wrap="square"/>
           <a:lstStyle/>
           <a:p>
             <a:pPr algn="ctr"/>
-            <a:endParaRPr/>
           </a:p>
         </p:txBody>
       </p:sp>
@@ -13541,11 +13426,10 @@
           </a:fontRef>
         </p:style>
         <p:txBody>
-          <a:bodyPr wrap="square" rtlCol="0" anchor="ctr"/>
+          <a:bodyPr rtlCol="0" anchor="ctr" wrap="square"/>
           <a:lstStyle/>
           <a:p>
             <a:pPr algn="ctr"/>
-            <a:endParaRPr/>
           </a:p>
         </p:txBody>
       </p:sp>
@@ -13586,11 +13470,10 @@
           </a:fontRef>
         </p:style>
         <p:txBody>
-          <a:bodyPr wrap="square" rtlCol="0" anchor="ctr"/>
+          <a:bodyPr rtlCol="0" anchor="ctr" wrap="square"/>
           <a:lstStyle/>
           <a:p>
             <a:pPr algn="ctr"/>
-            <a:endParaRPr/>
           </a:p>
         </p:txBody>
       </p:sp>
@@ -13631,11 +13514,10 @@
           </a:fontRef>
         </p:style>
         <p:txBody>
-          <a:bodyPr wrap="square" rtlCol="0" anchor="ctr"/>
+          <a:bodyPr rtlCol="0" anchor="ctr" wrap="square"/>
           <a:lstStyle/>
           <a:p>
             <a:pPr algn="ctr"/>
-            <a:endParaRPr/>
           </a:p>
         </p:txBody>
       </p:sp>
@@ -13676,11 +13558,10 @@
           </a:fontRef>
         </p:style>
         <p:txBody>
-          <a:bodyPr wrap="square" rtlCol="0" anchor="ctr"/>
+          <a:bodyPr rtlCol="0" anchor="ctr" wrap="square"/>
           <a:lstStyle/>
           <a:p>
             <a:pPr algn="ctr"/>
-            <a:endParaRPr/>
           </a:p>
         </p:txBody>
       </p:sp>
@@ -13721,11 +13602,10 @@
           </a:fontRef>
         </p:style>
         <p:txBody>
-          <a:bodyPr wrap="square" rtlCol="0" anchor="ctr"/>
+          <a:bodyPr rtlCol="0" anchor="ctr" wrap="square"/>
           <a:lstStyle/>
           <a:p>
             <a:pPr algn="ctr"/>
-            <a:endParaRPr/>
           </a:p>
         </p:txBody>
       </p:sp>
@@ -13766,11 +13646,10 @@
           </a:fontRef>
         </p:style>
         <p:txBody>
-          <a:bodyPr wrap="square" rtlCol="0" anchor="ctr"/>
+          <a:bodyPr rtlCol="0" anchor="ctr" wrap="square"/>
           <a:lstStyle/>
           <a:p>
             <a:pPr algn="ctr"/>
-            <a:endParaRPr/>
           </a:p>
         </p:txBody>
       </p:sp>
@@ -13811,11 +13690,10 @@
           </a:fontRef>
         </p:style>
         <p:txBody>
-          <a:bodyPr wrap="square" rtlCol="0" anchor="ctr"/>
+          <a:bodyPr rtlCol="0" anchor="ctr" wrap="square"/>
           <a:lstStyle/>
           <a:p>
             <a:pPr algn="ctr"/>
-            <a:endParaRPr/>
           </a:p>
         </p:txBody>
       </p:sp>
@@ -13856,11 +13734,10 @@
           </a:fontRef>
         </p:style>
         <p:txBody>
-          <a:bodyPr wrap="square" rtlCol="0" anchor="ctr"/>
+          <a:bodyPr rtlCol="0" anchor="ctr" wrap="square"/>
           <a:lstStyle/>
           <a:p>
             <a:pPr algn="ctr"/>
-            <a:endParaRPr/>
           </a:p>
         </p:txBody>
       </p:sp>
@@ -13901,11 +13778,10 @@
           </a:fontRef>
         </p:style>
         <p:txBody>
-          <a:bodyPr wrap="square" rtlCol="0" anchor="ctr"/>
+          <a:bodyPr rtlCol="0" anchor="ctr" wrap="square"/>
           <a:lstStyle/>
           <a:p>
             <a:pPr algn="ctr"/>
-            <a:endParaRPr/>
           </a:p>
         </p:txBody>
       </p:sp>
@@ -13946,11 +13822,10 @@
           </a:fontRef>
         </p:style>
         <p:txBody>
-          <a:bodyPr wrap="square" rtlCol="0" anchor="ctr"/>
+          <a:bodyPr rtlCol="0" anchor="ctr" wrap="square"/>
           <a:lstStyle/>
           <a:p>
             <a:pPr algn="ctr"/>
-            <a:endParaRPr/>
           </a:p>
         </p:txBody>
       </p:sp>
@@ -13991,11 +13866,10 @@
           </a:fontRef>
         </p:style>
         <p:txBody>
-          <a:bodyPr wrap="square" rtlCol="0" anchor="ctr"/>
+          <a:bodyPr rtlCol="0" anchor="ctr" wrap="square"/>
           <a:lstStyle/>
           <a:p>
             <a:pPr algn="ctr"/>
-            <a:endParaRPr/>
           </a:p>
         </p:txBody>
       </p:sp>
@@ -14036,11 +13910,10 @@
           </a:fontRef>
         </p:style>
         <p:txBody>
-          <a:bodyPr wrap="square" rtlCol="0" anchor="ctr"/>
+          <a:bodyPr rtlCol="0" anchor="ctr" wrap="square"/>
           <a:lstStyle/>
           <a:p>
             <a:pPr algn="ctr"/>
-            <a:endParaRPr/>
           </a:p>
         </p:txBody>
       </p:sp>
@@ -14081,11 +13954,10 @@
           </a:fontRef>
         </p:style>
         <p:txBody>
-          <a:bodyPr wrap="square" rtlCol="0" anchor="ctr"/>
+          <a:bodyPr rtlCol="0" anchor="ctr" wrap="square"/>
           <a:lstStyle/>
           <a:p>
             <a:pPr algn="ctr"/>
-            <a:endParaRPr/>
           </a:p>
         </p:txBody>
       </p:sp>
@@ -14126,11 +13998,10 @@
           </a:fontRef>
         </p:style>
         <p:txBody>
-          <a:bodyPr wrap="square" rtlCol="0" anchor="ctr"/>
+          <a:bodyPr rtlCol="0" anchor="ctr" wrap="square"/>
           <a:lstStyle/>
           <a:p>
             <a:pPr algn="ctr"/>
-            <a:endParaRPr/>
           </a:p>
         </p:txBody>
       </p:sp>
@@ -14171,11 +14042,10 @@
           </a:fontRef>
         </p:style>
         <p:txBody>
-          <a:bodyPr wrap="square" rtlCol="0" anchor="ctr"/>
+          <a:bodyPr rtlCol="0" anchor="ctr" wrap="square"/>
           <a:lstStyle/>
           <a:p>
             <a:pPr algn="ctr"/>
-            <a:endParaRPr/>
           </a:p>
         </p:txBody>
       </p:sp>
@@ -14216,11 +14086,10 @@
           </a:fontRef>
         </p:style>
         <p:txBody>
-          <a:bodyPr wrap="square" rtlCol="0" anchor="ctr"/>
+          <a:bodyPr rtlCol="0" anchor="ctr" wrap="square"/>
           <a:lstStyle/>
           <a:p>
             <a:pPr algn="ctr"/>
-            <a:endParaRPr/>
           </a:p>
         </p:txBody>
       </p:sp>
@@ -14261,11 +14130,10 @@
           </a:fontRef>
         </p:style>
         <p:txBody>
-          <a:bodyPr wrap="square" rtlCol="0" anchor="ctr"/>
+          <a:bodyPr rtlCol="0" anchor="ctr" wrap="square"/>
           <a:lstStyle/>
           <a:p>
             <a:pPr algn="ctr"/>
-            <a:endParaRPr/>
           </a:p>
         </p:txBody>
       </p:sp>
@@ -14306,11 +14174,10 @@
           </a:fontRef>
         </p:style>
         <p:txBody>
-          <a:bodyPr wrap="square" rtlCol="0" anchor="ctr"/>
+          <a:bodyPr rtlCol="0" anchor="ctr" wrap="square"/>
           <a:lstStyle/>
           <a:p>
             <a:pPr algn="ctr"/>
-            <a:endParaRPr/>
           </a:p>
         </p:txBody>
       </p:sp>
@@ -14351,11 +14218,10 @@
           </a:fontRef>
         </p:style>
         <p:txBody>
-          <a:bodyPr wrap="square" rtlCol="0" anchor="ctr"/>
+          <a:bodyPr rtlCol="0" anchor="ctr" wrap="square"/>
           <a:lstStyle/>
           <a:p>
             <a:pPr algn="ctr"/>
-            <a:endParaRPr/>
           </a:p>
         </p:txBody>
       </p:sp>
@@ -14396,11 +14262,10 @@
           </a:fontRef>
         </p:style>
         <p:txBody>
-          <a:bodyPr wrap="square" rtlCol="0" anchor="ctr"/>
+          <a:bodyPr rtlCol="0" anchor="ctr" wrap="square"/>
           <a:lstStyle/>
           <a:p>
             <a:pPr algn="ctr"/>
-            <a:endParaRPr/>
           </a:p>
         </p:txBody>
       </p:sp>
@@ -14441,11 +14306,10 @@
           </a:fontRef>
         </p:style>
         <p:txBody>
-          <a:bodyPr wrap="square" rtlCol="0" anchor="ctr"/>
+          <a:bodyPr rtlCol="0" anchor="ctr" wrap="square"/>
           <a:lstStyle/>
           <a:p>
             <a:pPr algn="ctr"/>
-            <a:endParaRPr/>
           </a:p>
         </p:txBody>
       </p:sp>
@@ -14486,11 +14350,10 @@
           </a:fontRef>
         </p:style>
         <p:txBody>
-          <a:bodyPr wrap="square" rtlCol="0" anchor="ctr"/>
+          <a:bodyPr rtlCol="0" anchor="ctr" wrap="square"/>
           <a:lstStyle/>
           <a:p>
             <a:pPr algn="ctr"/>
-            <a:endParaRPr/>
           </a:p>
         </p:txBody>
       </p:sp>
@@ -14531,11 +14394,10 @@
           </a:fontRef>
         </p:style>
         <p:txBody>
-          <a:bodyPr wrap="square" rtlCol="0" anchor="ctr"/>
+          <a:bodyPr rtlCol="0" anchor="ctr" wrap="square"/>
           <a:lstStyle/>
           <a:p>
             <a:pPr algn="ctr"/>
-            <a:endParaRPr/>
           </a:p>
         </p:txBody>
       </p:sp>
@@ -14576,11 +14438,10 @@
           </a:fontRef>
         </p:style>
         <p:txBody>
-          <a:bodyPr wrap="square" rtlCol="0" anchor="ctr"/>
+          <a:bodyPr rtlCol="0" anchor="ctr" wrap="square"/>
           <a:lstStyle/>
           <a:p>
             <a:pPr algn="ctr"/>
-            <a:endParaRPr/>
           </a:p>
         </p:txBody>
       </p:sp>
@@ -14621,11 +14482,10 @@
           </a:fontRef>
         </p:style>
         <p:txBody>
-          <a:bodyPr wrap="square" rtlCol="0" anchor="ctr"/>
+          <a:bodyPr rtlCol="0" anchor="ctr" wrap="square"/>
           <a:lstStyle/>
           <a:p>
             <a:pPr algn="ctr"/>
-            <a:endParaRPr/>
           </a:p>
         </p:txBody>
       </p:sp>
@@ -14666,11 +14526,10 @@
           </a:fontRef>
         </p:style>
         <p:txBody>
-          <a:bodyPr wrap="square" rtlCol="0" anchor="ctr"/>
+          <a:bodyPr rtlCol="0" anchor="ctr" wrap="square"/>
           <a:lstStyle/>
           <a:p>
             <a:pPr algn="ctr"/>
-            <a:endParaRPr/>
           </a:p>
         </p:txBody>
       </p:sp>
@@ -14711,11 +14570,10 @@
           </a:fontRef>
         </p:style>
         <p:txBody>
-          <a:bodyPr wrap="square" rtlCol="0" anchor="ctr"/>
+          <a:bodyPr rtlCol="0" anchor="ctr" wrap="square"/>
           <a:lstStyle/>
           <a:p>
             <a:pPr algn="ctr"/>
-            <a:endParaRPr/>
           </a:p>
         </p:txBody>
       </p:sp>
@@ -14756,11 +14614,10 @@
           </a:fontRef>
         </p:style>
         <p:txBody>
-          <a:bodyPr wrap="square" rtlCol="0" anchor="ctr"/>
+          <a:bodyPr rtlCol="0" anchor="ctr" wrap="square"/>
           <a:lstStyle/>
           <a:p>
             <a:pPr algn="ctr"/>
-            <a:endParaRPr/>
           </a:p>
         </p:txBody>
       </p:sp>
@@ -14801,11 +14658,10 @@
           </a:fontRef>
         </p:style>
         <p:txBody>
-          <a:bodyPr wrap="square" rtlCol="0" anchor="ctr"/>
+          <a:bodyPr rtlCol="0" anchor="ctr" wrap="square"/>
           <a:lstStyle/>
           <a:p>
             <a:pPr algn="ctr"/>
-            <a:endParaRPr/>
           </a:p>
         </p:txBody>
       </p:sp>
@@ -14846,11 +14702,10 @@
           </a:fontRef>
         </p:style>
         <p:txBody>
-          <a:bodyPr wrap="square" rtlCol="0" anchor="ctr"/>
+          <a:bodyPr rtlCol="0" anchor="ctr" wrap="square"/>
           <a:lstStyle/>
           <a:p>
             <a:pPr algn="ctr"/>
-            <a:endParaRPr/>
           </a:p>
         </p:txBody>
       </p:sp>
@@ -14891,11 +14746,10 @@
           </a:fontRef>
         </p:style>
         <p:txBody>
-          <a:bodyPr wrap="square" rtlCol="0" anchor="ctr"/>
+          <a:bodyPr rtlCol="0" anchor="ctr" wrap="square"/>
           <a:lstStyle/>
           <a:p>
             <a:pPr algn="ctr"/>
-            <a:endParaRPr/>
           </a:p>
         </p:txBody>
       </p:sp>
@@ -14936,11 +14790,10 @@
           </a:fontRef>
         </p:style>
         <p:txBody>
-          <a:bodyPr wrap="square" rtlCol="0" anchor="ctr"/>
+          <a:bodyPr rtlCol="0" anchor="ctr" wrap="square"/>
           <a:lstStyle/>
           <a:p>
             <a:pPr algn="ctr"/>
-            <a:endParaRPr/>
           </a:p>
         </p:txBody>
       </p:sp>
@@ -14981,11 +14834,10 @@
           </a:fontRef>
         </p:style>
         <p:txBody>
-          <a:bodyPr wrap="square" rtlCol="0" anchor="ctr"/>
+          <a:bodyPr rtlCol="0" anchor="ctr" wrap="square"/>
           <a:lstStyle/>
           <a:p>
             <a:pPr algn="ctr"/>
-            <a:endParaRPr/>
           </a:p>
         </p:txBody>
       </p:sp>
@@ -15026,11 +14878,10 @@
           </a:fontRef>
         </p:style>
         <p:txBody>
-          <a:bodyPr wrap="square" rtlCol="0" anchor="ctr"/>
+          <a:bodyPr rtlCol="0" anchor="ctr" wrap="square"/>
           <a:lstStyle/>
           <a:p>
             <a:pPr algn="ctr"/>
-            <a:endParaRPr/>
           </a:p>
         </p:txBody>
       </p:sp>
@@ -15071,11 +14922,10 @@
           </a:fontRef>
         </p:style>
         <p:txBody>
-          <a:bodyPr wrap="square" rtlCol="0" anchor="ctr"/>
+          <a:bodyPr rtlCol="0" anchor="ctr" wrap="square"/>
           <a:lstStyle/>
           <a:p>
             <a:pPr algn="ctr"/>
-            <a:endParaRPr/>
           </a:p>
         </p:txBody>
       </p:sp>
@@ -15116,11 +14966,10 @@
           </a:fontRef>
         </p:style>
         <p:txBody>
-          <a:bodyPr wrap="square" rtlCol="0" anchor="ctr"/>
+          <a:bodyPr rtlCol="0" anchor="ctr" wrap="square"/>
           <a:lstStyle/>
           <a:p>
             <a:pPr algn="ctr"/>
-            <a:endParaRPr/>
           </a:p>
         </p:txBody>
       </p:sp>
@@ -15161,11 +15010,10 @@
           </a:fontRef>
         </p:style>
         <p:txBody>
-          <a:bodyPr wrap="square" rtlCol="0" anchor="ctr"/>
+          <a:bodyPr rtlCol="0" anchor="ctr" wrap="square"/>
           <a:lstStyle/>
           <a:p>
             <a:pPr algn="ctr"/>
-            <a:endParaRPr/>
           </a:p>
         </p:txBody>
       </p:sp>
@@ -15206,11 +15054,10 @@
           </a:fontRef>
         </p:style>
         <p:txBody>
-          <a:bodyPr wrap="square" rtlCol="0" anchor="ctr"/>
+          <a:bodyPr rtlCol="0" anchor="ctr" wrap="square"/>
           <a:lstStyle/>
           <a:p>
             <a:pPr algn="ctr"/>
-            <a:endParaRPr/>
           </a:p>
         </p:txBody>
       </p:sp>
@@ -15251,11 +15098,10 @@
           </a:fontRef>
         </p:style>
         <p:txBody>
-          <a:bodyPr wrap="square" rtlCol="0" anchor="ctr"/>
+          <a:bodyPr rtlCol="0" anchor="ctr" wrap="square"/>
           <a:lstStyle/>
           <a:p>
             <a:pPr algn="ctr"/>
-            <a:endParaRPr/>
           </a:p>
         </p:txBody>
       </p:sp>
@@ -15296,11 +15142,10 @@
           </a:fontRef>
         </p:style>
         <p:txBody>
-          <a:bodyPr wrap="square" rtlCol="0" anchor="ctr"/>
+          <a:bodyPr rtlCol="0" anchor="ctr" wrap="square"/>
           <a:lstStyle/>
           <a:p>
             <a:pPr algn="ctr"/>
-            <a:endParaRPr/>
           </a:p>
         </p:txBody>
       </p:sp>
@@ -15341,11 +15186,10 @@
           </a:fontRef>
         </p:style>
         <p:txBody>
-          <a:bodyPr wrap="square" rtlCol="0" anchor="ctr"/>
+          <a:bodyPr rtlCol="0" anchor="ctr" wrap="square"/>
           <a:lstStyle/>
           <a:p>
             <a:pPr algn="ctr"/>
-            <a:endParaRPr/>
           </a:p>
         </p:txBody>
       </p:sp>
@@ -15386,11 +15230,10 @@
           </a:fontRef>
         </p:style>
         <p:txBody>
-          <a:bodyPr wrap="square" rtlCol="0" anchor="ctr"/>
+          <a:bodyPr rtlCol="0" anchor="ctr" wrap="square"/>
           <a:lstStyle/>
           <a:p>
             <a:pPr algn="ctr"/>
-            <a:endParaRPr/>
           </a:p>
         </p:txBody>
       </p:sp>
@@ -15431,11 +15274,10 @@
           </a:fontRef>
         </p:style>
         <p:txBody>
-          <a:bodyPr wrap="square" rtlCol="0" anchor="ctr"/>
+          <a:bodyPr rtlCol="0" anchor="ctr" wrap="square"/>
           <a:lstStyle/>
           <a:p>
             <a:pPr algn="ctr"/>
-            <a:endParaRPr/>
           </a:p>
         </p:txBody>
       </p:sp>
@@ -15476,11 +15318,10 @@
           </a:fontRef>
         </p:style>
         <p:txBody>
-          <a:bodyPr wrap="square" rtlCol="0" anchor="ctr"/>
+          <a:bodyPr rtlCol="0" anchor="ctr" wrap="square"/>
           <a:lstStyle/>
           <a:p>
             <a:pPr algn="ctr"/>
-            <a:endParaRPr/>
           </a:p>
         </p:txBody>
       </p:sp>
@@ -15521,11 +15362,10 @@
           </a:fontRef>
         </p:style>
         <p:txBody>
-          <a:bodyPr wrap="square" rtlCol="0" anchor="ctr"/>
+          <a:bodyPr rtlCol="0" anchor="ctr" wrap="square"/>
           <a:lstStyle/>
           <a:p>
             <a:pPr algn="ctr"/>
-            <a:endParaRPr/>
           </a:p>
         </p:txBody>
       </p:sp>
@@ -15566,11 +15406,10 @@
           </a:fontRef>
         </p:style>
         <p:txBody>
-          <a:bodyPr wrap="square" rtlCol="0" anchor="ctr"/>
+          <a:bodyPr rtlCol="0" anchor="ctr" wrap="square"/>
           <a:lstStyle/>
           <a:p>
             <a:pPr algn="ctr"/>
-            <a:endParaRPr/>
           </a:p>
         </p:txBody>
       </p:sp>
@@ -15611,11 +15450,10 @@
           </a:fontRef>
         </p:style>
         <p:txBody>
-          <a:bodyPr wrap="square" rtlCol="0" anchor="ctr"/>
+          <a:bodyPr rtlCol="0" anchor="ctr" wrap="square"/>
           <a:lstStyle/>
           <a:p>
             <a:pPr algn="ctr"/>
-            <a:endParaRPr/>
           </a:p>
         </p:txBody>
       </p:sp>
@@ -15656,11 +15494,10 @@
           </a:fontRef>
         </p:style>
         <p:txBody>
-          <a:bodyPr wrap="square" rtlCol="0" anchor="ctr"/>
+          <a:bodyPr rtlCol="0" anchor="ctr" wrap="square"/>
           <a:lstStyle/>
           <a:p>
             <a:pPr algn="ctr"/>
-            <a:endParaRPr/>
           </a:p>
         </p:txBody>
       </p:sp>
@@ -15701,11 +15538,10 @@
           </a:fontRef>
         </p:style>
         <p:txBody>
-          <a:bodyPr wrap="square" rtlCol="0" anchor="ctr"/>
+          <a:bodyPr rtlCol="0" anchor="ctr" wrap="square"/>
           <a:lstStyle/>
           <a:p>
             <a:pPr algn="ctr"/>
-            <a:endParaRPr/>
           </a:p>
         </p:txBody>
       </p:sp>
@@ -15746,11 +15582,10 @@
           </a:fontRef>
         </p:style>
         <p:txBody>
-          <a:bodyPr wrap="square" rtlCol="0" anchor="ctr"/>
+          <a:bodyPr rtlCol="0" anchor="ctr" wrap="square"/>
           <a:lstStyle/>
           <a:p>
             <a:pPr algn="ctr"/>
-            <a:endParaRPr/>
           </a:p>
         </p:txBody>
       </p:sp>
@@ -15791,11 +15626,10 @@
           </a:fontRef>
         </p:style>
         <p:txBody>
-          <a:bodyPr wrap="square" rtlCol="0" anchor="ctr"/>
+          <a:bodyPr rtlCol="0" anchor="ctr" wrap="square"/>
           <a:lstStyle/>
           <a:p>
             <a:pPr algn="ctr"/>
-            <a:endParaRPr/>
           </a:p>
         </p:txBody>
       </p:sp>
@@ -15836,11 +15670,10 @@
           </a:fontRef>
         </p:style>
         <p:txBody>
-          <a:bodyPr wrap="square" rtlCol="0" anchor="ctr"/>
+          <a:bodyPr rtlCol="0" anchor="ctr" wrap="square"/>
           <a:lstStyle/>
           <a:p>
             <a:pPr algn="ctr"/>
-            <a:endParaRPr/>
           </a:p>
         </p:txBody>
       </p:sp>
@@ -15881,11 +15714,10 @@
           </a:fontRef>
         </p:style>
         <p:txBody>
-          <a:bodyPr wrap="square" rtlCol="0" anchor="ctr"/>
+          <a:bodyPr rtlCol="0" anchor="ctr" wrap="square"/>
           <a:lstStyle/>
           <a:p>
             <a:pPr algn="ctr"/>
-            <a:endParaRPr/>
           </a:p>
         </p:txBody>
       </p:sp>
@@ -15926,11 +15758,10 @@
           </a:fontRef>
         </p:style>
         <p:txBody>
-          <a:bodyPr wrap="square" rtlCol="0" anchor="ctr"/>
+          <a:bodyPr rtlCol="0" anchor="ctr" wrap="square"/>
           <a:lstStyle/>
           <a:p>
             <a:pPr algn="ctr"/>
-            <a:endParaRPr/>
           </a:p>
         </p:txBody>
       </p:sp>
@@ -15971,11 +15802,10 @@
           </a:fontRef>
         </p:style>
         <p:txBody>
-          <a:bodyPr wrap="square" rtlCol="0" anchor="ctr"/>
+          <a:bodyPr rtlCol="0" anchor="ctr" wrap="square"/>
           <a:lstStyle/>
           <a:p>
             <a:pPr algn="ctr"/>
-            <a:endParaRPr/>
           </a:p>
         </p:txBody>
       </p:sp>
@@ -16016,11 +15846,10 @@
           </a:fontRef>
         </p:style>
         <p:txBody>
-          <a:bodyPr wrap="square" rtlCol="0" anchor="ctr"/>
+          <a:bodyPr rtlCol="0" anchor="ctr" wrap="square"/>
           <a:lstStyle/>
           <a:p>
             <a:pPr algn="ctr"/>
-            <a:endParaRPr/>
           </a:p>
         </p:txBody>
       </p:sp>
@@ -16061,11 +15890,10 @@
           </a:fontRef>
         </p:style>
         <p:txBody>
-          <a:bodyPr wrap="square" rtlCol="0" anchor="ctr"/>
+          <a:bodyPr rtlCol="0" anchor="ctr" wrap="square"/>
           <a:lstStyle/>
           <a:p>
             <a:pPr algn="ctr"/>
-            <a:endParaRPr/>
           </a:p>
         </p:txBody>
       </p:sp>
@@ -16106,11 +15934,10 @@
           </a:fontRef>
         </p:style>
         <p:txBody>
-          <a:bodyPr wrap="square" rtlCol="0" anchor="ctr"/>
+          <a:bodyPr rtlCol="0" anchor="ctr" wrap="square"/>
           <a:lstStyle/>
           <a:p>
             <a:pPr algn="ctr"/>
-            <a:endParaRPr/>
           </a:p>
         </p:txBody>
       </p:sp>
@@ -16151,11 +15978,10 @@
           </a:fontRef>
         </p:style>
         <p:txBody>
-          <a:bodyPr wrap="square" rtlCol="0" anchor="ctr"/>
+          <a:bodyPr rtlCol="0" anchor="ctr" wrap="square"/>
           <a:lstStyle/>
           <a:p>
             <a:pPr algn="ctr"/>
-            <a:endParaRPr/>
           </a:p>
         </p:txBody>
       </p:sp>
@@ -16196,11 +16022,10 @@
           </a:fontRef>
         </p:style>
         <p:txBody>
-          <a:bodyPr wrap="square" rtlCol="0" anchor="ctr"/>
+          <a:bodyPr rtlCol="0" anchor="ctr" wrap="square"/>
           <a:lstStyle/>
           <a:p>
             <a:pPr algn="ctr"/>
-            <a:endParaRPr/>
           </a:p>
         </p:txBody>
       </p:sp>
@@ -16241,11 +16066,10 @@
           </a:fontRef>
         </p:style>
         <p:txBody>
-          <a:bodyPr wrap="square" rtlCol="0" anchor="ctr"/>
+          <a:bodyPr rtlCol="0" anchor="ctr" wrap="square"/>
           <a:lstStyle/>
           <a:p>
             <a:pPr algn="ctr"/>
-            <a:endParaRPr/>
           </a:p>
         </p:txBody>
       </p:sp>
@@ -16286,11 +16110,10 @@
           </a:fontRef>
         </p:style>
         <p:txBody>
-          <a:bodyPr wrap="square" rtlCol="0" anchor="ctr"/>
+          <a:bodyPr rtlCol="0" anchor="ctr" wrap="square"/>
           <a:lstStyle/>
           <a:p>
             <a:pPr algn="ctr"/>
-            <a:endParaRPr/>
           </a:p>
         </p:txBody>
       </p:sp>
@@ -16331,11 +16154,10 @@
           </a:fontRef>
         </p:style>
         <p:txBody>
-          <a:bodyPr wrap="square" rtlCol="0" anchor="ctr"/>
+          <a:bodyPr rtlCol="0" anchor="ctr" wrap="square"/>
           <a:lstStyle/>
           <a:p>
             <a:pPr algn="ctr"/>
-            <a:endParaRPr/>
           </a:p>
         </p:txBody>
       </p:sp>
@@ -16376,11 +16198,10 @@
           </a:fontRef>
         </p:style>
         <p:txBody>
-          <a:bodyPr wrap="square" rtlCol="0" anchor="ctr"/>
+          <a:bodyPr rtlCol="0" anchor="ctr" wrap="square"/>
           <a:lstStyle/>
           <a:p>
             <a:pPr algn="ctr"/>
-            <a:endParaRPr/>
           </a:p>
         </p:txBody>
       </p:sp>
@@ -16421,11 +16242,10 @@
           </a:fontRef>
         </p:style>
         <p:txBody>
-          <a:bodyPr wrap="square" rtlCol="0" anchor="ctr"/>
+          <a:bodyPr rtlCol="0" anchor="ctr" wrap="square"/>
           <a:lstStyle/>
           <a:p>
             <a:pPr algn="ctr"/>
-            <a:endParaRPr/>
           </a:p>
         </p:txBody>
       </p:sp>
@@ -16466,11 +16286,10 @@
           </a:fontRef>
         </p:style>
         <p:txBody>
-          <a:bodyPr wrap="square" rtlCol="0" anchor="ctr"/>
+          <a:bodyPr rtlCol="0" anchor="ctr" wrap="square"/>
           <a:lstStyle/>
           <a:p>
             <a:pPr algn="ctr"/>
-            <a:endParaRPr/>
           </a:p>
         </p:txBody>
       </p:sp>
@@ -16511,11 +16330,10 @@
           </a:fontRef>
         </p:style>
         <p:txBody>
-          <a:bodyPr wrap="square" rtlCol="0" anchor="ctr"/>
+          <a:bodyPr rtlCol="0" anchor="ctr" wrap="square"/>
           <a:lstStyle/>
           <a:p>
             <a:pPr algn="ctr"/>
-            <a:endParaRPr/>
           </a:p>
         </p:txBody>
       </p:sp>
@@ -16556,11 +16374,10 @@
           </a:fontRef>
         </p:style>
         <p:txBody>
-          <a:bodyPr wrap="square" rtlCol="0" anchor="ctr"/>
+          <a:bodyPr rtlCol="0" anchor="ctr" wrap="square"/>
           <a:lstStyle/>
           <a:p>
             <a:pPr algn="ctr"/>
-            <a:endParaRPr/>
           </a:p>
         </p:txBody>
       </p:sp>
@@ -16601,11 +16418,10 @@
           </a:fontRef>
         </p:style>
         <p:txBody>
-          <a:bodyPr wrap="square" rtlCol="0" anchor="ctr"/>
+          <a:bodyPr rtlCol="0" anchor="ctr" wrap="square"/>
           <a:lstStyle/>
           <a:p>
             <a:pPr algn="ctr"/>
-            <a:endParaRPr/>
           </a:p>
         </p:txBody>
       </p:sp>
@@ -16646,11 +16462,10 @@
           </a:fontRef>
         </p:style>
         <p:txBody>
-          <a:bodyPr wrap="square" rtlCol="0" anchor="ctr"/>
+          <a:bodyPr rtlCol="0" anchor="ctr" wrap="square"/>
           <a:lstStyle/>
           <a:p>
             <a:pPr algn="ctr"/>
-            <a:endParaRPr/>
           </a:p>
         </p:txBody>
       </p:sp>
@@ -16691,11 +16506,10 @@
           </a:fontRef>
         </p:style>
         <p:txBody>
-          <a:bodyPr wrap="square" rtlCol="0" anchor="ctr"/>
+          <a:bodyPr rtlCol="0" anchor="ctr" wrap="square"/>
           <a:lstStyle/>
           <a:p>
             <a:pPr algn="ctr"/>
-            <a:endParaRPr/>
           </a:p>
         </p:txBody>
       </p:sp>
@@ -16736,11 +16550,10 @@
           </a:fontRef>
         </p:style>
         <p:txBody>
-          <a:bodyPr wrap="square" rtlCol="0" anchor="ctr"/>
+          <a:bodyPr rtlCol="0" anchor="ctr" wrap="square"/>
           <a:lstStyle/>
           <a:p>
             <a:pPr algn="ctr"/>
-            <a:endParaRPr/>
           </a:p>
         </p:txBody>
       </p:sp>
@@ -16781,11 +16594,10 @@
           </a:fontRef>
         </p:style>
         <p:txBody>
-          <a:bodyPr wrap="square" rtlCol="0" anchor="ctr"/>
+          <a:bodyPr rtlCol="0" anchor="ctr" wrap="square"/>
           <a:lstStyle/>
           <a:p>
             <a:pPr algn="ctr"/>
-            <a:endParaRPr/>
           </a:p>
         </p:txBody>
       </p:sp>
@@ -16862,7 +16674,7 @@
           </a:fontRef>
         </p:style>
         <p:txBody>
-          <a:bodyPr wrap="square" lIns="25400" tIns="12700" rIns="25400" bIns="12700" rtlCol="0" anchor="ctr"/>
+          <a:bodyPr rtlCol="0" anchor="ctr" wrap="square" lIns="25400" rIns="25400" tIns="12700" bIns="12700"/>
           <a:lstStyle/>
           <a:p>
             <a:pPr algn="ctr">
@@ -16923,7 +16735,7 @@
           </a:fontRef>
         </p:style>
         <p:txBody>
-          <a:bodyPr wrap="square" lIns="25400" tIns="12700" rIns="25400" bIns="12700" rtlCol="0" anchor="ctr"/>
+          <a:bodyPr rtlCol="0" anchor="ctr" wrap="square" lIns="25400" rIns="25400" tIns="12700" bIns="12700"/>
           <a:lstStyle/>
           <a:p>
             <a:pPr algn="ctr">
@@ -16984,7 +16796,7 @@
           </a:fontRef>
         </p:style>
         <p:txBody>
-          <a:bodyPr wrap="square" lIns="25400" tIns="12700" rIns="25400" bIns="12700" rtlCol="0" anchor="ctr"/>
+          <a:bodyPr rtlCol="0" anchor="ctr" wrap="square" lIns="25400" rIns="25400" tIns="12700" bIns="12700"/>
           <a:lstStyle/>
           <a:p>
             <a:pPr algn="ctr">
@@ -17045,7 +16857,7 @@
           </a:fontRef>
         </p:style>
         <p:txBody>
-          <a:bodyPr wrap="square" lIns="25400" tIns="12700" rIns="25400" bIns="12700" rtlCol="0" anchor="ctr"/>
+          <a:bodyPr rtlCol="0" anchor="ctr" wrap="square" lIns="25400" rIns="25400" tIns="12700" bIns="12700"/>
           <a:lstStyle/>
           <a:p>
             <a:pPr algn="ctr">
@@ -17106,7 +16918,7 @@
           </a:fontRef>
         </p:style>
         <p:txBody>
-          <a:bodyPr wrap="square" lIns="25400" tIns="12700" rIns="25400" bIns="12700" rtlCol="0" anchor="ctr"/>
+          <a:bodyPr rtlCol="0" anchor="ctr" wrap="square" lIns="25400" rIns="25400" tIns="12700" bIns="12700"/>
           <a:lstStyle/>
           <a:p>
             <a:pPr algn="ctr">
@@ -17167,7 +16979,7 @@
           </a:fontRef>
         </p:style>
         <p:txBody>
-          <a:bodyPr wrap="square" lIns="25400" tIns="12700" rIns="25400" bIns="12700" rtlCol="0" anchor="ctr"/>
+          <a:bodyPr rtlCol="0" anchor="ctr" wrap="square" lIns="25400" rIns="25400" tIns="12700" bIns="12700"/>
           <a:lstStyle/>
           <a:p>
             <a:pPr algn="ctr">
@@ -17243,7 +17055,7 @@
 </file>
 
 <file path=ppt/slides/slide15.xml><?xml version="1.0" encoding="utf-8"?>
-<p:sld xmlns:a="http://schemas.openxmlformats.org/drawingml/2006/main" xmlns:r="http://schemas.openxmlformats.org/officeDocument/2006/relationships" xmlns:p="http://schemas.openxmlformats.org/presentationml/2006/main">
+<p:sld xmlns:a="http://schemas.openxmlformats.org/drawingml/2006/main" xmlns:p="http://schemas.openxmlformats.org/presentationml/2006/main" xmlns:r="http://schemas.openxmlformats.org/officeDocument/2006/relationships">
   <p:cSld>
     <p:spTree>
       <p:nvGrpSpPr>
@@ -17251,14 +17063,7 @@
         <p:cNvGrpSpPr/>
         <p:nvPr/>
       </p:nvGrpSpPr>
-      <p:grpSpPr>
-        <a:xfrm>
-          <a:off x="0" y="0"/>
-          <a:ext cx="0" cy="0"/>
-          <a:chOff x="0" y="0"/>
-          <a:chExt cx="0" cy="0"/>
-        </a:xfrm>
-      </p:grpSpPr>
+      <p:grpSpPr/>
       <p:sp>
         <p:nvSpPr>
           <p:cNvPr id="2" name="Rectangle 1"/>
@@ -17296,11 +17101,10 @@
           </a:fontRef>
         </p:style>
         <p:txBody>
-          <a:bodyPr wrap="square" rtlCol="0" anchor="ctr"/>
+          <a:bodyPr rtlCol="0" anchor="ctr" wrap="square"/>
           <a:lstStyle/>
           <a:p>
             <a:pPr algn="ctr"/>
-            <a:endParaRPr/>
           </a:p>
         </p:txBody>
       </p:sp>
@@ -17624,7 +17428,7 @@
           </a:fontRef>
         </p:style>
         <p:txBody>
-          <a:bodyPr wrap="square" lIns="25400" tIns="12700" rIns="25400" bIns="12700" rtlCol="0" anchor="ctr"/>
+          <a:bodyPr rtlCol="0" anchor="ctr" wrap="square" lIns="25400" rIns="25400" tIns="12700" bIns="12700"/>
           <a:lstStyle/>
           <a:p>
             <a:pPr algn="ctr">
@@ -17685,7 +17489,7 @@
           </a:fontRef>
         </p:style>
         <p:txBody>
-          <a:bodyPr wrap="square" lIns="25400" tIns="12700" rIns="25400" bIns="12700" rtlCol="0" anchor="ctr"/>
+          <a:bodyPr rtlCol="0" anchor="ctr" wrap="square" lIns="25400" rIns="25400" tIns="12700" bIns="12700"/>
           <a:lstStyle/>
           <a:p>
             <a:pPr algn="ctr">
@@ -17746,7 +17550,7 @@
           </a:fontRef>
         </p:style>
         <p:txBody>
-          <a:bodyPr wrap="square" lIns="25400" tIns="12700" rIns="25400" bIns="12700" rtlCol="0" anchor="ctr"/>
+          <a:bodyPr rtlCol="0" anchor="ctr" wrap="square" lIns="25400" rIns="25400" tIns="12700" bIns="12700"/>
           <a:lstStyle/>
           <a:p>
             <a:pPr algn="ctr">
@@ -17807,7 +17611,7 @@
           </a:fontRef>
         </p:style>
         <p:txBody>
-          <a:bodyPr wrap="square" lIns="25400" tIns="12700" rIns="25400" bIns="12700" rtlCol="0" anchor="ctr"/>
+          <a:bodyPr rtlCol="0" anchor="ctr" wrap="square" lIns="25400" rIns="25400" tIns="12700" bIns="12700"/>
           <a:lstStyle/>
           <a:p>
             <a:pPr algn="ctr">
@@ -17868,7 +17672,7 @@
           </a:fontRef>
         </p:style>
         <p:txBody>
-          <a:bodyPr wrap="square" lIns="25400" tIns="12700" rIns="25400" bIns="12700" rtlCol="0" anchor="ctr"/>
+          <a:bodyPr rtlCol="0" anchor="ctr" wrap="square" lIns="25400" rIns="25400" tIns="12700" bIns="12700"/>
           <a:lstStyle/>
           <a:p>
             <a:pPr algn="ctr">
@@ -17929,7 +17733,7 @@
           </a:fontRef>
         </p:style>
         <p:txBody>
-          <a:bodyPr wrap="square" lIns="25400" tIns="12700" rIns="25400" bIns="12700" rtlCol="0" anchor="ctr"/>
+          <a:bodyPr rtlCol="0" anchor="ctr" wrap="square" lIns="25400" rIns="25400" tIns="12700" bIns="12700"/>
           <a:lstStyle/>
           <a:p>
             <a:pPr algn="ctr">
@@ -18005,7 +17809,7 @@
 </file>
 
 <file path=ppt/slides/slide16.xml><?xml version="1.0" encoding="utf-8"?>
-<p:sld xmlns:a="http://schemas.openxmlformats.org/drawingml/2006/main" xmlns:r="http://schemas.openxmlformats.org/officeDocument/2006/relationships" xmlns:p="http://schemas.openxmlformats.org/presentationml/2006/main">
+<p:sld xmlns:a="http://schemas.openxmlformats.org/drawingml/2006/main" xmlns:p="http://schemas.openxmlformats.org/presentationml/2006/main" xmlns:r="http://schemas.openxmlformats.org/officeDocument/2006/relationships">
   <p:cSld>
     <p:spTree>
       <p:nvGrpSpPr>
@@ -18013,14 +17817,7 @@
         <p:cNvGrpSpPr/>
         <p:nvPr/>
       </p:nvGrpSpPr>
-      <p:grpSpPr>
-        <a:xfrm>
-          <a:off x="0" y="0"/>
-          <a:ext cx="0" cy="0"/>
-          <a:chOff x="0" y="0"/>
-          <a:chExt cx="0" cy="0"/>
-        </a:xfrm>
-      </p:grpSpPr>
+      <p:grpSpPr/>
       <p:sp>
         <p:nvSpPr>
           <p:cNvPr id="2" name="Rectangle 1"/>
@@ -18058,11 +17855,10 @@
           </a:fontRef>
         </p:style>
         <p:txBody>
-          <a:bodyPr wrap="square" rtlCol="0" anchor="ctr"/>
+          <a:bodyPr rtlCol="0" anchor="ctr" wrap="square"/>
           <a:lstStyle/>
           <a:p>
             <a:pPr algn="ctr"/>
-            <a:endParaRPr/>
           </a:p>
         </p:txBody>
       </p:sp>
@@ -18171,25 +17967,13 @@
                 <a:tableStyleId>{5C22544A-7EE6-4342-B048-85BDC9FD1C3A}</a:tableStyleId>
               </a:tblPr>
               <a:tblGrid>
-                <a:gridCol w="2286000">
-                  <a:extLst>
-                    <a:ext uri="{9D8B030D-6E8A-4147-A177-3AD203B41FA5}">
-                      <a16:colId xmlns:a16="http://schemas.microsoft.com/office/drawing/2014/main" val="20000"/>
-                    </a:ext>
-                  </a:extLst>
-                </a:gridCol>
-                <a:gridCol w="8534400">
-                  <a:extLst>
-                    <a:ext uri="{9D8B030D-6E8A-4147-A177-3AD203B41FA5}">
-                      <a16:colId xmlns:a16="http://schemas.microsoft.com/office/drawing/2014/main" val="20001"/>
-                    </a:ext>
-                  </a:extLst>
-                </a:gridCol>
+                <a:gridCol w="2286000"/>
+                <a:gridCol w="8534400"/>
               </a:tblGrid>
               <a:tr h="592666">
                 <a:tc>
                   <a:txBody>
-                    <a:bodyPr/>
+                    <a:bodyPr wrap="square"/>
                     <a:lstStyle/>
                     <a:p>
                       <a:pPr algn="l">
@@ -18220,7 +18004,7 @@
                 </a:tc>
                 <a:tc>
                   <a:txBody>
-                    <a:bodyPr/>
+                    <a:bodyPr wrap="square"/>
                     <a:lstStyle/>
                     <a:p>
                       <a:pPr algn="l">
@@ -18249,16 +18033,11 @@
                     </a:solidFill>
                   </a:tcPr>
                 </a:tc>
-                <a:extLst>
-                  <a:ext uri="{0D108BD9-81ED-4DB2-BD59-A6C34878D82A}">
-                    <a16:rowId xmlns:a16="http://schemas.microsoft.com/office/drawing/2014/main" val="10000"/>
-                  </a:ext>
-                </a:extLst>
               </a:tr>
               <a:tr h="592666">
                 <a:tc>
                   <a:txBody>
-                    <a:bodyPr/>
+                    <a:bodyPr wrap="square"/>
                     <a:lstStyle/>
                     <a:p>
                       <a:pPr algn="l">
@@ -18289,7 +18068,7 @@
                 </a:tc>
                 <a:tc>
                   <a:txBody>
-                    <a:bodyPr/>
+                    <a:bodyPr wrap="square"/>
                     <a:lstStyle/>
                     <a:p>
                       <a:pPr algn="l">
@@ -18318,16 +18097,11 @@
                     </a:solidFill>
                   </a:tcPr>
                 </a:tc>
-                <a:extLst>
-                  <a:ext uri="{0D108BD9-81ED-4DB2-BD59-A6C34878D82A}">
-                    <a16:rowId xmlns:a16="http://schemas.microsoft.com/office/drawing/2014/main" val="10001"/>
-                  </a:ext>
-                </a:extLst>
               </a:tr>
               <a:tr h="592666">
                 <a:tc>
                   <a:txBody>
-                    <a:bodyPr/>
+                    <a:bodyPr wrap="square"/>
                     <a:lstStyle/>
                     <a:p>
                       <a:pPr algn="l">
@@ -18358,7 +18132,7 @@
                 </a:tc>
                 <a:tc>
                   <a:txBody>
-                    <a:bodyPr/>
+                    <a:bodyPr wrap="square"/>
                     <a:lstStyle/>
                     <a:p>
                       <a:pPr algn="l">
@@ -18387,16 +18161,11 @@
                     </a:solidFill>
                   </a:tcPr>
                 </a:tc>
-                <a:extLst>
-                  <a:ext uri="{0D108BD9-81ED-4DB2-BD59-A6C34878D82A}">
-                    <a16:rowId xmlns:a16="http://schemas.microsoft.com/office/drawing/2014/main" val="10002"/>
-                  </a:ext>
-                </a:extLst>
               </a:tr>
               <a:tr h="592666">
                 <a:tc>
                   <a:txBody>
-                    <a:bodyPr/>
+                    <a:bodyPr wrap="square"/>
                     <a:lstStyle/>
                     <a:p>
                       <a:pPr algn="l">
@@ -18427,7 +18196,7 @@
                 </a:tc>
                 <a:tc>
                   <a:txBody>
-                    <a:bodyPr/>
+                    <a:bodyPr wrap="square"/>
                     <a:lstStyle/>
                     <a:p>
                       <a:pPr algn="l">
@@ -18456,16 +18225,11 @@
                     </a:solidFill>
                   </a:tcPr>
                 </a:tc>
-                <a:extLst>
-                  <a:ext uri="{0D108BD9-81ED-4DB2-BD59-A6C34878D82A}">
-                    <a16:rowId xmlns:a16="http://schemas.microsoft.com/office/drawing/2014/main" val="10003"/>
-                  </a:ext>
-                </a:extLst>
               </a:tr>
               <a:tr h="592666">
                 <a:tc>
                   <a:txBody>
-                    <a:bodyPr/>
+                    <a:bodyPr wrap="square"/>
                     <a:lstStyle/>
                     <a:p>
                       <a:pPr algn="l">
@@ -18496,7 +18260,7 @@
                 </a:tc>
                 <a:tc>
                   <a:txBody>
-                    <a:bodyPr/>
+                    <a:bodyPr wrap="square"/>
                     <a:lstStyle/>
                     <a:p>
                       <a:pPr algn="l">
@@ -18525,16 +18289,11 @@
                     </a:solidFill>
                   </a:tcPr>
                 </a:tc>
-                <a:extLst>
-                  <a:ext uri="{0D108BD9-81ED-4DB2-BD59-A6C34878D82A}">
-                    <a16:rowId xmlns:a16="http://schemas.microsoft.com/office/drawing/2014/main" val="10004"/>
-                  </a:ext>
-                </a:extLst>
               </a:tr>
               <a:tr h="592670">
                 <a:tc>
                   <a:txBody>
-                    <a:bodyPr/>
+                    <a:bodyPr wrap="square"/>
                     <a:lstStyle/>
                     <a:p>
                       <a:pPr algn="l">
@@ -18565,7 +18324,7 @@
                 </a:tc>
                 <a:tc>
                   <a:txBody>
-                    <a:bodyPr/>
+                    <a:bodyPr wrap="square"/>
                     <a:lstStyle/>
                     <a:p>
                       <a:pPr algn="l">
@@ -18594,11 +18353,6 @@
                     </a:solidFill>
                   </a:tcPr>
                 </a:tc>
-                <a:extLst>
-                  <a:ext uri="{0D108BD9-81ED-4DB2-BD59-A6C34878D82A}">
-                    <a16:rowId xmlns:a16="http://schemas.microsoft.com/office/drawing/2014/main" val="10005"/>
-                  </a:ext>
-                </a:extLst>
               </a:tr>
             </a:tbl>
           </a:graphicData>
@@ -18720,7 +18474,7 @@
           </a:fontRef>
         </p:style>
         <p:txBody>
-          <a:bodyPr wrap="square" lIns="25400" tIns="12700" rIns="25400" bIns="12700" rtlCol="0" anchor="ctr"/>
+          <a:bodyPr rtlCol="0" anchor="ctr" wrap="square" lIns="25400" rIns="25400" tIns="12700" bIns="12700"/>
           <a:lstStyle/>
           <a:p>
             <a:pPr algn="ctr">
@@ -18781,7 +18535,7 @@
           </a:fontRef>
         </p:style>
         <p:txBody>
-          <a:bodyPr wrap="square" lIns="25400" tIns="12700" rIns="25400" bIns="12700" rtlCol="0" anchor="ctr"/>
+          <a:bodyPr rtlCol="0" anchor="ctr" wrap="square" lIns="25400" rIns="25400" tIns="12700" bIns="12700"/>
           <a:lstStyle/>
           <a:p>
             <a:pPr algn="ctr">
@@ -18842,7 +18596,7 @@
           </a:fontRef>
         </p:style>
         <p:txBody>
-          <a:bodyPr wrap="square" lIns="25400" tIns="12700" rIns="25400" bIns="12700" rtlCol="0" anchor="ctr"/>
+          <a:bodyPr rtlCol="0" anchor="ctr" wrap="square" lIns="25400" rIns="25400" tIns="12700" bIns="12700"/>
           <a:lstStyle/>
           <a:p>
             <a:pPr algn="ctr">
@@ -18903,7 +18657,7 @@
           </a:fontRef>
         </p:style>
         <p:txBody>
-          <a:bodyPr wrap="square" lIns="25400" tIns="12700" rIns="25400" bIns="12700" rtlCol="0" anchor="ctr"/>
+          <a:bodyPr rtlCol="0" anchor="ctr" wrap="square" lIns="25400" rIns="25400" tIns="12700" bIns="12700"/>
           <a:lstStyle/>
           <a:p>
             <a:pPr algn="ctr">
@@ -18964,7 +18718,7 @@
           </a:fontRef>
         </p:style>
         <p:txBody>
-          <a:bodyPr wrap="square" lIns="25400" tIns="12700" rIns="25400" bIns="12700" rtlCol="0" anchor="ctr"/>
+          <a:bodyPr rtlCol="0" anchor="ctr" wrap="square" lIns="25400" rIns="25400" tIns="12700" bIns="12700"/>
           <a:lstStyle/>
           <a:p>
             <a:pPr algn="ctr">
@@ -19025,7 +18779,7 @@
           </a:fontRef>
         </p:style>
         <p:txBody>
-          <a:bodyPr wrap="square" lIns="25400" tIns="12700" rIns="25400" bIns="12700" rtlCol="0" anchor="ctr"/>
+          <a:bodyPr rtlCol="0" anchor="ctr" wrap="square" lIns="25400" rIns="25400" tIns="12700" bIns="12700"/>
           <a:lstStyle/>
           <a:p>
             <a:pPr algn="ctr">
@@ -19101,7 +18855,7 @@
 </file>
 
 <file path=ppt/slides/slide17.xml><?xml version="1.0" encoding="utf-8"?>
-<p:sld xmlns:a="http://schemas.openxmlformats.org/drawingml/2006/main" xmlns:r="http://schemas.openxmlformats.org/officeDocument/2006/relationships" xmlns:p="http://schemas.openxmlformats.org/presentationml/2006/main">
+<p:sld xmlns:a="http://schemas.openxmlformats.org/drawingml/2006/main" xmlns:p="http://schemas.openxmlformats.org/presentationml/2006/main" xmlns:r="http://schemas.openxmlformats.org/officeDocument/2006/relationships">
   <p:cSld>
     <p:spTree>
       <p:nvGrpSpPr>
@@ -19109,14 +18863,7 @@
         <p:cNvGrpSpPr/>
         <p:nvPr/>
       </p:nvGrpSpPr>
-      <p:grpSpPr>
-        <a:xfrm>
-          <a:off x="0" y="0"/>
-          <a:ext cx="0" cy="0"/>
-          <a:chOff x="0" y="0"/>
-          <a:chExt cx="0" cy="0"/>
-        </a:xfrm>
-      </p:grpSpPr>
+      <p:grpSpPr/>
       <p:sp>
         <p:nvSpPr>
           <p:cNvPr id="2" name="Rectangle 1"/>
@@ -19154,11 +18901,10 @@
           </a:fontRef>
         </p:style>
         <p:txBody>
-          <a:bodyPr wrap="square" rtlCol="0" anchor="ctr"/>
+          <a:bodyPr rtlCol="0" anchor="ctr" wrap="square"/>
           <a:lstStyle/>
           <a:p>
             <a:pPr algn="ctr"/>
-            <a:endParaRPr/>
           </a:p>
         </p:txBody>
       </p:sp>
@@ -19289,7 +19035,17 @@
                 <a:latin typeface="Meiryo"/>
                 <a:ea typeface="メイリオ"/>
               </a:rPr>
-              <a:t>■ 確定評価セット</a:t>
+              <a:t>■ </a:t>
+            </a:r>
+            <a:r>
+              <a:rPr sz="1450" b="1">
+                <a:solidFill>
+                  <a:srgbClr val="16233A"/>
+                </a:solidFill>
+                <a:latin typeface="Meiryo"/>
+                <a:ea typeface="メイリオ"/>
+              </a:rPr>
+              <a:t>確定評価セット</a:t>
             </a:r>
             <a:r>
               <a:rPr sz="1450" b="0">
@@ -19375,7 +19131,17 @@
                 <a:latin typeface="Meiryo"/>
                 <a:ea typeface="メイリオ"/>
               </a:rPr>
-              <a:t>■ AI外部監査</a:t>
+              <a:t>■ </a:t>
+            </a:r>
+            <a:r>
+              <a:rPr sz="1450" b="1">
+                <a:solidFill>
+                  <a:srgbClr val="16233A"/>
+                </a:solidFill>
+                <a:latin typeface="Meiryo"/>
+                <a:ea typeface="メイリオ"/>
+              </a:rPr>
+              <a:t>AI外部監査</a:t>
             </a:r>
             <a:r>
               <a:rPr sz="1450" b="0">
@@ -19516,7 +19282,7 @@
           </a:fontRef>
         </p:style>
         <p:txBody>
-          <a:bodyPr wrap="square" lIns="25400" tIns="12700" rIns="25400" bIns="12700" rtlCol="0" anchor="ctr"/>
+          <a:bodyPr rtlCol="0" anchor="ctr" wrap="square" lIns="25400" rIns="25400" tIns="12700" bIns="12700"/>
           <a:lstStyle/>
           <a:p>
             <a:pPr algn="ctr">
@@ -19577,7 +19343,7 @@
           </a:fontRef>
         </p:style>
         <p:txBody>
-          <a:bodyPr wrap="square" lIns="25400" tIns="12700" rIns="25400" bIns="12700" rtlCol="0" anchor="ctr"/>
+          <a:bodyPr rtlCol="0" anchor="ctr" wrap="square" lIns="25400" rIns="25400" tIns="12700" bIns="12700"/>
           <a:lstStyle/>
           <a:p>
             <a:pPr algn="ctr">
@@ -19638,7 +19404,7 @@
           </a:fontRef>
         </p:style>
         <p:txBody>
-          <a:bodyPr wrap="square" lIns="25400" tIns="12700" rIns="25400" bIns="12700" rtlCol="0" anchor="ctr"/>
+          <a:bodyPr rtlCol="0" anchor="ctr" wrap="square" lIns="25400" rIns="25400" tIns="12700" bIns="12700"/>
           <a:lstStyle/>
           <a:p>
             <a:pPr algn="ctr">
@@ -19699,7 +19465,7 @@
           </a:fontRef>
         </p:style>
         <p:txBody>
-          <a:bodyPr wrap="square" lIns="25400" tIns="12700" rIns="25400" bIns="12700" rtlCol="0" anchor="ctr"/>
+          <a:bodyPr rtlCol="0" anchor="ctr" wrap="square" lIns="25400" rIns="25400" tIns="12700" bIns="12700"/>
           <a:lstStyle/>
           <a:p>
             <a:pPr algn="ctr">
@@ -19760,7 +19526,7 @@
           </a:fontRef>
         </p:style>
         <p:txBody>
-          <a:bodyPr wrap="square" lIns="25400" tIns="12700" rIns="25400" bIns="12700" rtlCol="0" anchor="ctr"/>
+          <a:bodyPr rtlCol="0" anchor="ctr" wrap="square" lIns="25400" rIns="25400" tIns="12700" bIns="12700"/>
           <a:lstStyle/>
           <a:p>
             <a:pPr algn="ctr">
@@ -19821,7 +19587,7 @@
           </a:fontRef>
         </p:style>
         <p:txBody>
-          <a:bodyPr wrap="square" lIns="25400" tIns="12700" rIns="25400" bIns="12700" rtlCol="0" anchor="ctr"/>
+          <a:bodyPr rtlCol="0" anchor="ctr" wrap="square" lIns="25400" rIns="25400" tIns="12700" bIns="12700"/>
           <a:lstStyle/>
           <a:p>
             <a:pPr algn="ctr">
@@ -19897,7 +19663,7 @@
 </file>
 
 <file path=ppt/slides/slide2.xml><?xml version="1.0" encoding="utf-8"?>
-<p:sld xmlns:a="http://schemas.openxmlformats.org/drawingml/2006/main" xmlns:r="http://schemas.openxmlformats.org/officeDocument/2006/relationships" xmlns:p="http://schemas.openxmlformats.org/presentationml/2006/main">
+<p:sld xmlns:a="http://schemas.openxmlformats.org/drawingml/2006/main" xmlns:p="http://schemas.openxmlformats.org/presentationml/2006/main" xmlns:r="http://schemas.openxmlformats.org/officeDocument/2006/relationships">
   <p:cSld>
     <p:spTree>
       <p:nvGrpSpPr>
@@ -19905,14 +19671,7 @@
         <p:cNvGrpSpPr/>
         <p:nvPr/>
       </p:nvGrpSpPr>
-      <p:grpSpPr>
-        <a:xfrm>
-          <a:off x="0" y="0"/>
-          <a:ext cx="0" cy="0"/>
-          <a:chOff x="0" y="0"/>
-          <a:chExt cx="0" cy="0"/>
-        </a:xfrm>
-      </p:grpSpPr>
+      <p:grpSpPr/>
       <p:sp>
         <p:nvSpPr>
           <p:cNvPr id="2" name="Rectangle 1"/>
@@ -19950,11 +19709,10 @@
           </a:fontRef>
         </p:style>
         <p:txBody>
-          <a:bodyPr wrap="square" rtlCol="0" anchor="ctr"/>
+          <a:bodyPr rtlCol="0" anchor="ctr" wrap="square"/>
           <a:lstStyle/>
           <a:p>
             <a:pPr algn="ctr"/>
-            <a:endParaRPr/>
           </a:p>
         </p:txBody>
       </p:sp>
@@ -20078,7 +19836,7 @@
               </a:spcAft>
             </a:pPr>
             <a:r>
-              <a:rPr sz="1500" b="1" dirty="0">
+              <a:rPr sz="1500" b="1">
                 <a:solidFill>
                   <a:srgbClr val="16233A"/>
                 </a:solidFill>
@@ -20088,7 +19846,7 @@
               <a:t>■ </a:t>
             </a:r>
             <a:r>
-              <a:rPr sz="1500" b="0" dirty="0" err="1">
+              <a:rPr sz="1500" b="0">
                 <a:solidFill>
                   <a:srgbClr val="3A4658"/>
                 </a:solidFill>
@@ -20098,7 +19856,7 @@
               <a:t>歩行者は接近車・サイレン・踏切などの</a:t>
             </a:r>
             <a:r>
-              <a:rPr sz="1500" b="1" dirty="0" err="1">
+              <a:rPr sz="1500" b="1">
                 <a:solidFill>
                   <a:srgbClr val="16233A"/>
                 </a:solidFill>
@@ -20108,7 +19866,7 @@
               <a:t>危険察知を聴覚に依存</a:t>
             </a:r>
             <a:r>
-              <a:rPr sz="1500" b="0" dirty="0" err="1">
+              <a:rPr sz="1500" b="0">
                 <a:solidFill>
                   <a:srgbClr val="3A4658"/>
                 </a:solidFill>
@@ -20117,13 +19875,6 @@
               </a:rPr>
               <a:t>している</a:t>
             </a:r>
-            <a:endParaRPr sz="1500" b="0" dirty="0">
-              <a:solidFill>
-                <a:srgbClr val="3A4658"/>
-              </a:solidFill>
-              <a:latin typeface="Meiryo"/>
-              <a:ea typeface="メイリオ"/>
-            </a:endParaRPr>
           </a:p>
           <a:p>
             <a:pPr algn="l">
@@ -20138,7 +19889,7 @@
               </a:spcAft>
             </a:pPr>
             <a:r>
-              <a:rPr sz="1500" b="1" dirty="0">
+              <a:rPr sz="1500" b="1">
                 <a:solidFill>
                   <a:srgbClr val="16233A"/>
                 </a:solidFill>
@@ -20148,7 +19899,7 @@
               <a:t>■ </a:t>
             </a:r>
             <a:r>
-              <a:rPr sz="1500" b="0" dirty="0" err="1">
+              <a:rPr sz="1500" b="0">
                 <a:solidFill>
                   <a:srgbClr val="3A4658"/>
                 </a:solidFill>
@@ -20157,13 +19908,6 @@
               </a:rPr>
               <a:t>難聴者はその情報が欠落し、屋外歩行の事故リスクが高い</a:t>
             </a:r>
-            <a:endParaRPr sz="1500" b="0" dirty="0">
-              <a:solidFill>
-                <a:srgbClr val="3A4658"/>
-              </a:solidFill>
-              <a:latin typeface="Meiryo"/>
-              <a:ea typeface="メイリオ"/>
-            </a:endParaRPr>
           </a:p>
           <a:p>
             <a:pPr algn="l">
@@ -20178,7 +19922,7 @@
               </a:spcAft>
             </a:pPr>
             <a:r>
-              <a:rPr sz="1300" b="1" dirty="0">
+              <a:rPr sz="1300" b="1">
                 <a:solidFill>
                   <a:srgbClr val="66707F"/>
                 </a:solidFill>
@@ -20188,7 +19932,7 @@
               <a:t>・</a:t>
             </a:r>
             <a:r>
-              <a:rPr sz="1300" b="0" dirty="0" err="1">
+              <a:rPr sz="1300" b="0">
                 <a:solidFill>
                   <a:srgbClr val="66707F"/>
                 </a:solidFill>
@@ -20197,13 +19941,6 @@
               </a:rPr>
               <a:t>イヤホン歩行者・高齢者にも共通する課題</a:t>
             </a:r>
-            <a:endParaRPr sz="1300" b="0" dirty="0">
-              <a:solidFill>
-                <a:srgbClr val="66707F"/>
-              </a:solidFill>
-              <a:latin typeface="Meiryo"/>
-              <a:ea typeface="メイリオ"/>
-            </a:endParaRPr>
           </a:p>
           <a:p>
             <a:pPr algn="l">
@@ -20218,7 +19955,7 @@
               </a:spcAft>
             </a:pPr>
             <a:r>
-              <a:rPr sz="1500" b="1" dirty="0">
+              <a:rPr sz="1500" b="1">
                 <a:solidFill>
                   <a:srgbClr val="E8A200"/>
                 </a:solidFill>
@@ -20228,63 +19965,36 @@
               <a:t>■ </a:t>
             </a:r>
             <a:r>
-              <a:rPr sz="1500" b="0" dirty="0" err="1">
+              <a:rPr sz="1500" b="0">
                 <a:solidFill>
                   <a:srgbClr val="3A4658"/>
                 </a:solidFill>
                 <a:latin typeface="Meiryo"/>
                 <a:ea typeface="メイリオ"/>
               </a:rPr>
-              <a:t>機械の耳は人間の耳の限界（可聴域・可聴距離）に縛られない</a:t>
-            </a:r>
-            <a:r>
-              <a:rPr sz="1500" b="0" dirty="0">
+              <a:t>機械の耳は人間の耳の限界（可聴域・可聴距離）に縛られない
+→「耳の代わり」を超えて</a:t>
+            </a:r>
+            <a:r>
+              <a:rPr sz="1500" b="1">
+                <a:solidFill>
+                  <a:srgbClr val="B37E00"/>
+                </a:solidFill>
+                <a:latin typeface="Meiryo"/>
+                <a:ea typeface="メイリオ"/>
+              </a:rPr>
+              <a:t>人の耳を超える支援</a:t>
+            </a:r>
+            <a:r>
+              <a:rPr sz="1500" b="0">
                 <a:solidFill>
                   <a:srgbClr val="3A4658"/>
                 </a:solidFill>
                 <a:latin typeface="Meiryo"/>
                 <a:ea typeface="メイリオ"/>
               </a:rPr>
-              <a:t>
-→「</a:t>
-            </a:r>
-            <a:r>
-              <a:rPr sz="1500" b="0" dirty="0" err="1">
-                <a:solidFill>
-                  <a:srgbClr val="3A4658"/>
-                </a:solidFill>
-                <a:latin typeface="Meiryo"/>
-                <a:ea typeface="メイリオ"/>
-              </a:rPr>
-              <a:t>耳の代わり」を超えて</a:t>
-            </a:r>
-            <a:r>
-              <a:rPr sz="1500" b="1" dirty="0" err="1">
-                <a:solidFill>
-                  <a:srgbClr val="B37E00"/>
-                </a:solidFill>
-                <a:latin typeface="Meiryo"/>
-                <a:ea typeface="メイリオ"/>
-              </a:rPr>
-              <a:t>人の耳を超える支援</a:t>
-            </a:r>
-            <a:r>
-              <a:rPr sz="1500" b="0" dirty="0" err="1">
-                <a:solidFill>
-                  <a:srgbClr val="3A4658"/>
-                </a:solidFill>
-                <a:latin typeface="Meiryo"/>
-                <a:ea typeface="メイリオ"/>
-              </a:rPr>
               <a:t>まで狙える</a:t>
             </a:r>
-            <a:endParaRPr sz="1500" b="0" dirty="0">
-              <a:solidFill>
-                <a:srgbClr val="3A4658"/>
-              </a:solidFill>
-              <a:latin typeface="Meiryo"/>
-              <a:ea typeface="メイリオ"/>
-            </a:endParaRPr>
           </a:p>
         </p:txBody>
       </p:sp>
@@ -20327,11 +20037,10 @@
           </a:fontRef>
         </p:style>
         <p:txBody>
-          <a:bodyPr wrap="square" rtlCol="0" anchor="ctr"/>
+          <a:bodyPr rtlCol="0" anchor="ctr" wrap="square"/>
           <a:lstStyle/>
           <a:p>
             <a:pPr algn="ctr"/>
-            <a:endParaRPr/>
           </a:p>
         </p:txBody>
       </p:sp>
@@ -20372,11 +20081,10 @@
           </a:fontRef>
         </p:style>
         <p:txBody>
-          <a:bodyPr wrap="square" rtlCol="0" anchor="ctr"/>
+          <a:bodyPr rtlCol="0" anchor="ctr" wrap="square"/>
           <a:lstStyle/>
           <a:p>
             <a:pPr algn="ctr"/>
-            <a:endParaRPr/>
           </a:p>
         </p:txBody>
       </p:sp>
@@ -20460,11 +20168,10 @@
           </a:fontRef>
         </p:style>
         <p:txBody>
-          <a:bodyPr wrap="square" rtlCol="0" anchor="ctr"/>
+          <a:bodyPr rtlCol="0" anchor="ctr" wrap="square"/>
           <a:lstStyle/>
           <a:p>
             <a:pPr algn="ctr"/>
-            <a:endParaRPr/>
           </a:p>
         </p:txBody>
       </p:sp>
@@ -20622,16 +20329,53 @@
           </a:fontRef>
         </p:style>
       </p:cxnSp>
-      <p:sp>
-        <p:nvSpPr>
-          <p:cNvPr id="14" name="TextBox 13"/>
+      <p:cxnSp>
+        <p:nvCxnSpPr>
+          <p:cNvPr id="14" name="Connector 13"/>
+          <p:cNvCxnSpPr/>
+          <p:nvPr/>
+        </p:nvCxnSpPr>
+        <p:spPr>
+          <a:xfrm>
+            <a:off x="8636000" y="1727200"/>
+            <a:ext cx="508000" cy="1117600"/>
+          </a:xfrm>
+          <a:prstGeom prst="line">
+            <a:avLst/>
+          </a:prstGeom>
+          <a:ln w="31750">
+            <a:solidFill>
+              <a:srgbClr val="E8A200"/>
+            </a:solidFill>
+            <a:tailEnd type="triangle" w="med" len="med"/>
+          </a:ln>
+          <a:effectLst/>
+        </p:spPr>
+        <p:style>
+          <a:lnRef idx="2">
+            <a:schemeClr val="accent1"/>
+          </a:lnRef>
+          <a:fillRef idx="0">
+            <a:schemeClr val="accent1"/>
+          </a:fillRef>
+          <a:effectRef idx="1">
+            <a:schemeClr val="accent1"/>
+          </a:effectRef>
+          <a:fontRef idx="minor">
+            <a:schemeClr val="tx1"/>
+          </a:fontRef>
+        </p:style>
+      </p:cxnSp>
+      <p:sp>
+        <p:nvSpPr>
+          <p:cNvPr id="15" name="TextBox 14"/>
           <p:cNvSpPr txBox="1"/>
           <p:nvPr/>
         </p:nvSpPr>
         <p:spPr>
           <a:xfrm>
-            <a:off x="7162800" y="5308600"/>
-            <a:ext cx="1143000" cy="228600"/>
+            <a:off x="7213600" y="1498600"/>
+            <a:ext cx="2286000" cy="228600"/>
           </a:xfrm>
           <a:prstGeom prst="rect">
             <a:avLst/>
@@ -20644,7 +20388,7 @@
           </a:bodyPr>
           <a:lstStyle/>
           <a:p>
-            <a:pPr algn="ctr">
+            <a:pPr algn="l">
               <a:spcBef>
                 <a:spcPts val="0"/>
               </a:spcBef>
@@ -20653,27 +20397,27 @@
               </a:spcAft>
             </a:pPr>
             <a:r>
-              <a:rPr sz="1050" b="1">
-                <a:solidFill>
-                  <a:srgbClr val="16233A"/>
-                </a:solidFill>
-                <a:latin typeface="Meiryo"/>
-                <a:ea typeface="メイリオ"/>
-              </a:rPr>
-              <a:t>緊急車両</a:t>
-            </a:r>
-          </a:p>
-        </p:txBody>
-      </p:sp>
-      <p:sp>
-        <p:nvSpPr>
-          <p:cNvPr id="15" name="TextBox 14"/>
+              <a:rPr sz="1000" b="1">
+                <a:solidFill>
+                  <a:srgbClr val="B37E00"/>
+                </a:solidFill>
+                <a:latin typeface="Meiryo"/>
+                <a:ea typeface="メイリオ"/>
+              </a:rPr>
+              <a:t>サイレン（前方も対象）</a:t>
+            </a:r>
+          </a:p>
+        </p:txBody>
+      </p:sp>
+      <p:sp>
+        <p:nvSpPr>
+          <p:cNvPr id="16" name="TextBox 15"/>
           <p:cNvSpPr txBox="1"/>
           <p:nvPr/>
         </p:nvSpPr>
         <p:spPr>
           <a:xfrm>
-            <a:off x="8712200" y="5486400"/>
+            <a:off x="7162800" y="5308600"/>
             <a:ext cx="1143000" cy="228600"/>
           </a:xfrm>
           <a:prstGeom prst="rect">
@@ -20703,21 +20447,21 @@
                 <a:latin typeface="Meiryo"/>
                 <a:ea typeface="メイリオ"/>
               </a:rPr>
-              <a:t>車・バイク</a:t>
-            </a:r>
-          </a:p>
-        </p:txBody>
-      </p:sp>
-      <p:sp>
-        <p:nvSpPr>
-          <p:cNvPr id="16" name="TextBox 15"/>
+              <a:t>緊急車両</a:t>
+            </a:r>
+          </a:p>
+        </p:txBody>
+      </p:sp>
+      <p:sp>
+        <p:nvSpPr>
+          <p:cNvPr id="17" name="TextBox 16"/>
           <p:cNvSpPr txBox="1"/>
           <p:nvPr/>
         </p:nvSpPr>
         <p:spPr>
           <a:xfrm>
-            <a:off x="10236200" y="5308600"/>
-            <a:ext cx="1397000" cy="228600"/>
+            <a:off x="8712200" y="5486400"/>
+            <a:ext cx="1143000" cy="228600"/>
           </a:xfrm>
           <a:prstGeom prst="rect">
             <a:avLst/>
@@ -20746,6 +20490,49 @@
                 <a:latin typeface="Meiryo"/>
                 <a:ea typeface="メイリオ"/>
               </a:rPr>
+              <a:t>車・バイク</a:t>
+            </a:r>
+          </a:p>
+        </p:txBody>
+      </p:sp>
+      <p:sp>
+        <p:nvSpPr>
+          <p:cNvPr id="18" name="TextBox 17"/>
+          <p:cNvSpPr txBox="1"/>
+          <p:nvPr/>
+        </p:nvSpPr>
+        <p:spPr>
+          <a:xfrm>
+            <a:off x="10236200" y="5308600"/>
+            <a:ext cx="1397000" cy="228600"/>
+          </a:xfrm>
+          <a:prstGeom prst="rect">
+            <a:avLst/>
+          </a:prstGeom>
+          <a:noFill/>
+        </p:spPr>
+        <p:txBody>
+          <a:bodyPr wrap="none">
+            <a:spAutoFit/>
+          </a:bodyPr>
+          <a:lstStyle/>
+          <a:p>
+            <a:pPr algn="ctr">
+              <a:spcBef>
+                <a:spcPts val="0"/>
+              </a:spcBef>
+              <a:spcAft>
+                <a:spcPts val="0"/>
+              </a:spcAft>
+            </a:pPr>
+            <a:r>
+              <a:rPr sz="1050" b="1">
+                <a:solidFill>
+                  <a:srgbClr val="16233A"/>
+                </a:solidFill>
+                <a:latin typeface="Meiryo"/>
+                <a:ea typeface="メイリオ"/>
+              </a:rPr>
               <a:t>キックボード</a:t>
             </a:r>
           </a:p>
@@ -20753,7 +20540,7 @@
       </p:sp>
       <p:cxnSp>
         <p:nvCxnSpPr>
-          <p:cNvPr id="17" name="Connector 16"/>
+          <p:cNvPr id="19" name="Connector 18"/>
           <p:cNvCxnSpPr/>
           <p:nvPr/>
         </p:nvCxnSpPr>
@@ -20789,7 +20576,7 @@
       </p:cxnSp>
       <p:sp>
         <p:nvSpPr>
-          <p:cNvPr id="18" name="Rounded Rectangle 17"/>
+          <p:cNvPr id="20" name="Rounded Rectangle 19"/>
           <p:cNvSpPr/>
           <p:nvPr/>
         </p:nvSpPr>
@@ -20824,7 +20611,7 @@
           </a:fontRef>
         </p:style>
         <p:txBody>
-          <a:bodyPr wrap="square" lIns="25400" tIns="12700" rIns="25400" bIns="12700" rtlCol="0" anchor="ctr"/>
+          <a:bodyPr rtlCol="0" anchor="ctr" wrap="square" lIns="25400" rIns="25400" tIns="12700" bIns="12700"/>
           <a:lstStyle/>
           <a:p>
             <a:pPr algn="ctr">
@@ -20850,7 +20637,7 @@
       </p:sp>
       <p:sp>
         <p:nvSpPr>
-          <p:cNvPr id="19" name="Rounded Rectangle 18"/>
+          <p:cNvPr id="21" name="Rounded Rectangle 20"/>
           <p:cNvSpPr/>
           <p:nvPr/>
         </p:nvSpPr>
@@ -20885,7 +20672,7 @@
           </a:fontRef>
         </p:style>
         <p:txBody>
-          <a:bodyPr wrap="square" lIns="25400" tIns="12700" rIns="25400" bIns="12700" rtlCol="0" anchor="ctr"/>
+          <a:bodyPr rtlCol="0" anchor="ctr" wrap="square" lIns="25400" rIns="25400" tIns="12700" bIns="12700"/>
           <a:lstStyle/>
           <a:p>
             <a:pPr algn="ctr">
@@ -20911,7 +20698,7 @@
       </p:sp>
       <p:sp>
         <p:nvSpPr>
-          <p:cNvPr id="20" name="Rounded Rectangle 19"/>
+          <p:cNvPr id="22" name="Rounded Rectangle 21"/>
           <p:cNvSpPr/>
           <p:nvPr/>
         </p:nvSpPr>
@@ -20946,7 +20733,7 @@
           </a:fontRef>
         </p:style>
         <p:txBody>
-          <a:bodyPr wrap="square" lIns="25400" tIns="12700" rIns="25400" bIns="12700" rtlCol="0" anchor="ctr"/>
+          <a:bodyPr rtlCol="0" anchor="ctr" wrap="square" lIns="25400" rIns="25400" tIns="12700" bIns="12700"/>
           <a:lstStyle/>
           <a:p>
             <a:pPr algn="ctr">
@@ -20972,7 +20759,7 @@
       </p:sp>
       <p:sp>
         <p:nvSpPr>
-          <p:cNvPr id="21" name="Rounded Rectangle 20"/>
+          <p:cNvPr id="23" name="Rounded Rectangle 22"/>
           <p:cNvSpPr/>
           <p:nvPr/>
         </p:nvSpPr>
@@ -21007,7 +20794,7 @@
           </a:fontRef>
         </p:style>
         <p:txBody>
-          <a:bodyPr wrap="square" lIns="25400" tIns="12700" rIns="25400" bIns="12700" rtlCol="0" anchor="ctr"/>
+          <a:bodyPr rtlCol="0" anchor="ctr" wrap="square" lIns="25400" rIns="25400" tIns="12700" bIns="12700"/>
           <a:lstStyle/>
           <a:p>
             <a:pPr algn="ctr">
@@ -21033,7 +20820,7 @@
       </p:sp>
       <p:sp>
         <p:nvSpPr>
-          <p:cNvPr id="22" name="Rounded Rectangle 21"/>
+          <p:cNvPr id="24" name="Rounded Rectangle 23"/>
           <p:cNvSpPr/>
           <p:nvPr/>
         </p:nvSpPr>
@@ -21068,7 +20855,7 @@
           </a:fontRef>
         </p:style>
         <p:txBody>
-          <a:bodyPr wrap="square" lIns="25400" tIns="12700" rIns="25400" bIns="12700" rtlCol="0" anchor="ctr"/>
+          <a:bodyPr rtlCol="0" anchor="ctr" wrap="square" lIns="25400" rIns="25400" tIns="12700" bIns="12700"/>
           <a:lstStyle/>
           <a:p>
             <a:pPr algn="ctr">
@@ -21094,7 +20881,7 @@
       </p:sp>
       <p:sp>
         <p:nvSpPr>
-          <p:cNvPr id="23" name="Rounded Rectangle 22"/>
+          <p:cNvPr id="25" name="Rounded Rectangle 24"/>
           <p:cNvSpPr/>
           <p:nvPr/>
         </p:nvSpPr>
@@ -21129,7 +20916,7 @@
           </a:fontRef>
         </p:style>
         <p:txBody>
-          <a:bodyPr wrap="square" lIns="25400" tIns="12700" rIns="25400" bIns="12700" rtlCol="0" anchor="ctr"/>
+          <a:bodyPr rtlCol="0" anchor="ctr" wrap="square" lIns="25400" rIns="25400" tIns="12700" bIns="12700"/>
           <a:lstStyle/>
           <a:p>
             <a:pPr algn="ctr">
@@ -21155,7 +20942,7 @@
       </p:sp>
       <p:sp>
         <p:nvSpPr>
-          <p:cNvPr id="24" name="TextBox 23"/>
+          <p:cNvPr id="26" name="TextBox 25"/>
           <p:cNvSpPr txBox="1"/>
           <p:nvPr/>
         </p:nvSpPr>
@@ -21205,7 +20992,7 @@
 </file>
 
 <file path=ppt/slides/slide3.xml><?xml version="1.0" encoding="utf-8"?>
-<p:sld xmlns:a="http://schemas.openxmlformats.org/drawingml/2006/main" xmlns:r="http://schemas.openxmlformats.org/officeDocument/2006/relationships" xmlns:p="http://schemas.openxmlformats.org/presentationml/2006/main">
+<p:sld xmlns:a="http://schemas.openxmlformats.org/drawingml/2006/main" xmlns:p="http://schemas.openxmlformats.org/presentationml/2006/main" xmlns:r="http://schemas.openxmlformats.org/officeDocument/2006/relationships">
   <p:cSld>
     <p:spTree>
       <p:nvGrpSpPr>
@@ -21213,14 +21000,7 @@
         <p:cNvGrpSpPr/>
         <p:nvPr/>
       </p:nvGrpSpPr>
-      <p:grpSpPr>
-        <a:xfrm>
-          <a:off x="0" y="0"/>
-          <a:ext cx="0" cy="0"/>
-          <a:chOff x="0" y="0"/>
-          <a:chExt cx="0" cy="0"/>
-        </a:xfrm>
-      </p:grpSpPr>
+      <p:grpSpPr/>
       <p:sp>
         <p:nvSpPr>
           <p:cNvPr id="2" name="Rectangle 1"/>
@@ -21258,11 +21038,10 @@
           </a:fontRef>
         </p:style>
         <p:txBody>
-          <a:bodyPr wrap="square" rtlCol="0" anchor="ctr"/>
+          <a:bodyPr rtlCol="0" anchor="ctr" wrap="square"/>
           <a:lstStyle/>
           <a:p>
             <a:pPr algn="ctr"/>
-            <a:endParaRPr/>
           </a:p>
         </p:txBody>
       </p:sp>
@@ -21391,7 +21170,7 @@
           </a:fontRef>
         </p:style>
         <p:txBody>
-          <a:bodyPr wrap="square" lIns="177800" tIns="127000" rIns="177800" bIns="101600" rtlCol="0" anchor="t"/>
+          <a:bodyPr rtlCol="0" anchor="t" wrap="square" lIns="177800" rIns="177800" tIns="127000" bIns="101600"/>
           <a:lstStyle/>
           <a:p>
             <a:pPr algn="l">
@@ -21477,7 +21256,7 @@
           </a:fontRef>
         </p:style>
         <p:txBody>
-          <a:bodyPr wrap="square" lIns="177800" tIns="127000" rIns="177800" bIns="101600" rtlCol="0" anchor="t"/>
+          <a:bodyPr rtlCol="0" anchor="t" wrap="square" lIns="177800" rIns="177800" tIns="127000" bIns="101600"/>
           <a:lstStyle/>
           <a:p>
             <a:pPr algn="l">
@@ -21563,7 +21342,7 @@
           </a:fontRef>
         </p:style>
         <p:txBody>
-          <a:bodyPr wrap="square" lIns="177800" tIns="127000" rIns="177800" bIns="101600" rtlCol="0" anchor="t"/>
+          <a:bodyPr rtlCol="0" anchor="t" wrap="square" lIns="177800" rIns="177800" tIns="127000" bIns="101600"/>
           <a:lstStyle/>
           <a:p>
             <a:pPr algn="l">
@@ -21605,7 +21384,7 @@
                 <a:latin typeface="Meiryo"/>
                 <a:ea typeface="メイリオ"/>
               </a:rPr>
-              <a:t>視覚は健常と仮定。前方視野内の対象はスコープ外。第1対象は難聴者（イヤホン歩行者・高齢者へ拡張可能）</a:t>
+              <a:t>視覚は健常と仮定。検出・通知は全方位——絞るのは方向でなく「視覚で代替できる情報」。前方でも音でしか得られない情報（サイレン・踏切警報・EV）は対象。第1対象は難聴者</a:t>
             </a:r>
           </a:p>
         </p:txBody>
@@ -21647,11 +21426,10 @@
           </a:fontRef>
         </p:style>
         <p:txBody>
-          <a:bodyPr wrap="square" rtlCol="0" anchor="ctr"/>
+          <a:bodyPr rtlCol="0" anchor="ctr" wrap="square"/>
           <a:lstStyle/>
           <a:p>
             <a:pPr algn="ctr"/>
-            <a:endParaRPr/>
           </a:p>
         </p:txBody>
       </p:sp>
@@ -21694,7 +21472,7 @@
           </a:fontRef>
         </p:style>
         <p:txBody>
-          <a:bodyPr wrap="square" lIns="203200" tIns="127000" rtlCol="0" anchor="ctr"/>
+          <a:bodyPr rtlCol="0" anchor="ctr" wrap="square" lIns="203200" tIns="127000"/>
           <a:lstStyle/>
           <a:p>
             <a:pPr algn="l">
@@ -21713,7 +21491,7 @@
                 <a:latin typeface="Meiryo"/>
                 <a:ea typeface="メイリオ"/>
               </a:rPr>
-              <a:t>8/4からの拡張</a:t>
+              <a:t>このシステムができること</a:t>
             </a:r>
           </a:p>
           <a:p>
@@ -21736,7 +21514,7 @@
                 <a:latin typeface="Meiryo"/>
                 <a:ea typeface="メイリオ"/>
               </a:rPr>
-              <a:t>クラス：6 → </a:t>
+              <a:t>危険音の</a:t>
             </a:r>
             <a:r>
               <a:rPr sz="1400" b="1">
@@ -21746,7 +21524,7 @@
                 <a:latin typeface="Meiryo"/>
                 <a:ea typeface="メイリオ"/>
               </a:rPr>
-              <a:t>8</a:t>
+              <a:t>種類・方向・距離</a:t>
             </a:r>
             <a:r>
               <a:rPr sz="1400" b="0">
@@ -21756,7 +21534,7 @@
                 <a:latin typeface="Meiryo"/>
                 <a:ea typeface="メイリオ"/>
               </a:rPr>
-              <a:t>（キックボード・バイク・列車を追加）　／　推定量：種類＋方向 → </a:t>
+              <a:t>を同時に推定し、安全な車は鳴らさず、</a:t>
             </a:r>
             <a:r>
               <a:rPr sz="1400" b="1">
@@ -21766,7 +21544,7 @@
                 <a:latin typeface="Meiryo"/>
                 <a:ea typeface="メイリオ"/>
               </a:rPr>
-              <a:t>＋距離</a:t>
+              <a:t>危険な接近だけを3段階の振動で伝える</a:t>
             </a:r>
             <a:r>
               <a:rPr sz="1400" b="0">
@@ -21776,17 +21554,7 @@
                 <a:latin typeface="Meiryo"/>
                 <a:ea typeface="メイリオ"/>
               </a:rPr>
-              <a:t>　／　音源仕様：</a:t>
-            </a:r>
-            <a:r>
-              <a:rPr sz="1400" b="1">
-                <a:solidFill>
-                  <a:srgbClr val="16233A"/>
-                </a:solidFill>
-                <a:latin typeface="Meiryo"/>
-                <a:ea typeface="メイリオ"/>
-              </a:rPr>
-              <a:t>日本の法規・省令・実測研究で出典を層別管理</a:t>
+              <a:t>。音源仕様は日本の法規・省令・実測研究に根拠を持たせている</a:t>
             </a:r>
           </a:p>
         </p:txBody>
@@ -21864,7 +21632,7 @@
           </a:fontRef>
         </p:style>
         <p:txBody>
-          <a:bodyPr wrap="square" lIns="25400" tIns="12700" rIns="25400" bIns="12700" rtlCol="0" anchor="ctr"/>
+          <a:bodyPr rtlCol="0" anchor="ctr" wrap="square" lIns="25400" rIns="25400" tIns="12700" bIns="12700"/>
           <a:lstStyle/>
           <a:p>
             <a:pPr algn="ctr">
@@ -21925,7 +21693,7 @@
           </a:fontRef>
         </p:style>
         <p:txBody>
-          <a:bodyPr wrap="square" lIns="25400" tIns="12700" rIns="25400" bIns="12700" rtlCol="0" anchor="ctr"/>
+          <a:bodyPr rtlCol="0" anchor="ctr" wrap="square" lIns="25400" rIns="25400" tIns="12700" bIns="12700"/>
           <a:lstStyle/>
           <a:p>
             <a:pPr algn="ctr">
@@ -21986,7 +21754,7 @@
           </a:fontRef>
         </p:style>
         <p:txBody>
-          <a:bodyPr wrap="square" lIns="25400" tIns="12700" rIns="25400" bIns="12700" rtlCol="0" anchor="ctr"/>
+          <a:bodyPr rtlCol="0" anchor="ctr" wrap="square" lIns="25400" rIns="25400" tIns="12700" bIns="12700"/>
           <a:lstStyle/>
           <a:p>
             <a:pPr algn="ctr">
@@ -22047,7 +21815,7 @@
           </a:fontRef>
         </p:style>
         <p:txBody>
-          <a:bodyPr wrap="square" lIns="25400" tIns="12700" rIns="25400" bIns="12700" rtlCol="0" anchor="ctr"/>
+          <a:bodyPr rtlCol="0" anchor="ctr" wrap="square" lIns="25400" rIns="25400" tIns="12700" bIns="12700"/>
           <a:lstStyle/>
           <a:p>
             <a:pPr algn="ctr">
@@ -22108,7 +21876,7 @@
           </a:fontRef>
         </p:style>
         <p:txBody>
-          <a:bodyPr wrap="square" lIns="25400" tIns="12700" rIns="25400" bIns="12700" rtlCol="0" anchor="ctr"/>
+          <a:bodyPr rtlCol="0" anchor="ctr" wrap="square" lIns="25400" rIns="25400" tIns="12700" bIns="12700"/>
           <a:lstStyle/>
           <a:p>
             <a:pPr algn="ctr">
@@ -22169,7 +21937,7 @@
           </a:fontRef>
         </p:style>
         <p:txBody>
-          <a:bodyPr wrap="square" lIns="25400" tIns="12700" rIns="25400" bIns="12700" rtlCol="0" anchor="ctr"/>
+          <a:bodyPr rtlCol="0" anchor="ctr" wrap="square" lIns="25400" rIns="25400" tIns="12700" bIns="12700"/>
           <a:lstStyle/>
           <a:p>
             <a:pPr algn="ctr">
@@ -22245,7 +22013,7 @@
 </file>
 
 <file path=ppt/slides/slide4.xml><?xml version="1.0" encoding="utf-8"?>
-<p:sld xmlns:a="http://schemas.openxmlformats.org/drawingml/2006/main" xmlns:r="http://schemas.openxmlformats.org/officeDocument/2006/relationships" xmlns:p="http://schemas.openxmlformats.org/presentationml/2006/main">
+<p:sld xmlns:a="http://schemas.openxmlformats.org/drawingml/2006/main" xmlns:p="http://schemas.openxmlformats.org/presentationml/2006/main" xmlns:r="http://schemas.openxmlformats.org/officeDocument/2006/relationships">
   <p:cSld>
     <p:spTree>
       <p:nvGrpSpPr>
@@ -22253,14 +22021,7 @@
         <p:cNvGrpSpPr/>
         <p:nvPr/>
       </p:nvGrpSpPr>
-      <p:grpSpPr>
-        <a:xfrm>
-          <a:off x="0" y="0"/>
-          <a:ext cx="0" cy="0"/>
-          <a:chOff x="0" y="0"/>
-          <a:chExt cx="0" cy="0"/>
-        </a:xfrm>
-      </p:grpSpPr>
+      <p:grpSpPr/>
       <p:sp>
         <p:nvSpPr>
           <p:cNvPr id="2" name="Rectangle 1"/>
@@ -22298,11 +22059,10 @@
           </a:fontRef>
         </p:style>
         <p:txBody>
-          <a:bodyPr wrap="square" rtlCol="0" anchor="ctr"/>
+          <a:bodyPr rtlCol="0" anchor="ctr" wrap="square"/>
           <a:lstStyle/>
           <a:p>
             <a:pPr algn="ctr"/>
-            <a:endParaRPr/>
           </a:p>
         </p:txBody>
       </p:sp>
@@ -22544,11 +22304,10 @@
           </a:fontRef>
         </p:style>
         <p:txBody>
-          <a:bodyPr wrap="square" rtlCol="0" anchor="ctr"/>
+          <a:bodyPr rtlCol="0" anchor="ctr" wrap="square"/>
           <a:lstStyle/>
           <a:p>
             <a:pPr algn="ctr"/>
-            <a:endParaRPr/>
           </a:p>
         </p:txBody>
       </p:sp>
@@ -22668,7 +22427,7 @@
           </a:fontRef>
         </p:style>
         <p:txBody>
-          <a:bodyPr wrap="square" lIns="76200" tIns="12700" rtlCol="0" anchor="ctr"/>
+          <a:bodyPr rtlCol="0" anchor="ctr" wrap="square" lIns="76200" tIns="12700"/>
           <a:lstStyle/>
           <a:p>
             <a:pPr algn="l">
@@ -22729,7 +22488,7 @@
           </a:fontRef>
         </p:style>
         <p:txBody>
-          <a:bodyPr wrap="square" lIns="76200" tIns="12700" rtlCol="0" anchor="ctr"/>
+          <a:bodyPr rtlCol="0" anchor="ctr" wrap="square" lIns="76200" tIns="12700"/>
           <a:lstStyle/>
           <a:p>
             <a:pPr algn="l">
@@ -22790,7 +22549,7 @@
           </a:fontRef>
         </p:style>
         <p:txBody>
-          <a:bodyPr wrap="square" lIns="76200" tIns="12700" rtlCol="0" anchor="ctr"/>
+          <a:bodyPr rtlCol="0" anchor="ctr" wrap="square" lIns="76200" tIns="12700"/>
           <a:lstStyle/>
           <a:p>
             <a:pPr algn="l">
@@ -22896,11 +22655,10 @@
           </a:fontRef>
         </p:style>
         <p:txBody>
-          <a:bodyPr wrap="square" rtlCol="0" anchor="ctr"/>
+          <a:bodyPr rtlCol="0" anchor="ctr" wrap="square"/>
           <a:lstStyle/>
           <a:p>
             <a:pPr algn="ctr"/>
-            <a:endParaRPr/>
           </a:p>
         </p:txBody>
       </p:sp>
@@ -22941,11 +22699,10 @@
           </a:fontRef>
         </p:style>
         <p:txBody>
-          <a:bodyPr wrap="square" rtlCol="0" anchor="ctr"/>
+          <a:bodyPr rtlCol="0" anchor="ctr" wrap="square"/>
           <a:lstStyle/>
           <a:p>
             <a:pPr algn="ctr"/>
-            <a:endParaRPr/>
           </a:p>
         </p:txBody>
       </p:sp>
@@ -22986,11 +22743,10 @@
           </a:fontRef>
         </p:style>
         <p:txBody>
-          <a:bodyPr wrap="square" rtlCol="0" anchor="ctr"/>
+          <a:bodyPr rtlCol="0" anchor="ctr" wrap="square"/>
           <a:lstStyle/>
           <a:p>
             <a:pPr algn="ctr"/>
-            <a:endParaRPr/>
           </a:p>
         </p:txBody>
       </p:sp>
@@ -23316,7 +23072,7 @@
           </a:fontRef>
         </p:style>
         <p:txBody>
-          <a:bodyPr wrap="square" lIns="25400" tIns="12700" rIns="25400" bIns="12700" rtlCol="0" anchor="ctr"/>
+          <a:bodyPr rtlCol="0" anchor="ctr" wrap="square" lIns="25400" rIns="25400" tIns="12700" bIns="12700"/>
           <a:lstStyle/>
           <a:p>
             <a:pPr algn="ctr">
@@ -23377,7 +23133,7 @@
           </a:fontRef>
         </p:style>
         <p:txBody>
-          <a:bodyPr wrap="square" lIns="25400" tIns="12700" rIns="25400" bIns="12700" rtlCol="0" anchor="ctr"/>
+          <a:bodyPr rtlCol="0" anchor="ctr" wrap="square" lIns="25400" rIns="25400" tIns="12700" bIns="12700"/>
           <a:lstStyle/>
           <a:p>
             <a:pPr algn="ctr">
@@ -23438,7 +23194,7 @@
           </a:fontRef>
         </p:style>
         <p:txBody>
-          <a:bodyPr wrap="square" lIns="25400" tIns="12700" rIns="25400" bIns="12700" rtlCol="0" anchor="ctr"/>
+          <a:bodyPr rtlCol="0" anchor="ctr" wrap="square" lIns="25400" rIns="25400" tIns="12700" bIns="12700"/>
           <a:lstStyle/>
           <a:p>
             <a:pPr algn="ctr">
@@ -23499,7 +23255,7 @@
           </a:fontRef>
         </p:style>
         <p:txBody>
-          <a:bodyPr wrap="square" lIns="25400" tIns="12700" rIns="25400" bIns="12700" rtlCol="0" anchor="ctr"/>
+          <a:bodyPr rtlCol="0" anchor="ctr" wrap="square" lIns="25400" rIns="25400" tIns="12700" bIns="12700"/>
           <a:lstStyle/>
           <a:p>
             <a:pPr algn="ctr">
@@ -23560,7 +23316,7 @@
           </a:fontRef>
         </p:style>
         <p:txBody>
-          <a:bodyPr wrap="square" lIns="25400" tIns="12700" rIns="25400" bIns="12700" rtlCol="0" anchor="ctr"/>
+          <a:bodyPr rtlCol="0" anchor="ctr" wrap="square" lIns="25400" rIns="25400" tIns="12700" bIns="12700"/>
           <a:lstStyle/>
           <a:p>
             <a:pPr algn="ctr">
@@ -23621,7 +23377,7 @@
           </a:fontRef>
         </p:style>
         <p:txBody>
-          <a:bodyPr wrap="square" lIns="25400" tIns="12700" rIns="25400" bIns="12700" rtlCol="0" anchor="ctr"/>
+          <a:bodyPr rtlCol="0" anchor="ctr" wrap="square" lIns="25400" rIns="25400" tIns="12700" bIns="12700"/>
           <a:lstStyle/>
           <a:p>
             <a:pPr algn="ctr">
@@ -23697,7 +23453,7 @@
 </file>
 
 <file path=ppt/slides/slide5.xml><?xml version="1.0" encoding="utf-8"?>
-<p:sld xmlns:a="http://schemas.openxmlformats.org/drawingml/2006/main" xmlns:r="http://schemas.openxmlformats.org/officeDocument/2006/relationships" xmlns:p="http://schemas.openxmlformats.org/presentationml/2006/main">
+<p:sld xmlns:a="http://schemas.openxmlformats.org/drawingml/2006/main" xmlns:p="http://schemas.openxmlformats.org/presentationml/2006/main" xmlns:r="http://schemas.openxmlformats.org/officeDocument/2006/relationships">
   <p:cSld>
     <p:spTree>
       <p:nvGrpSpPr>
@@ -23705,14 +23461,7 @@
         <p:cNvGrpSpPr/>
         <p:nvPr/>
       </p:nvGrpSpPr>
-      <p:grpSpPr>
-        <a:xfrm>
-          <a:off x="0" y="0"/>
-          <a:ext cx="0" cy="0"/>
-          <a:chOff x="0" y="0"/>
-          <a:chExt cx="0" cy="0"/>
-        </a:xfrm>
-      </p:grpSpPr>
+      <p:grpSpPr/>
       <p:sp>
         <p:nvSpPr>
           <p:cNvPr id="2" name="Rectangle 1"/>
@@ -23750,11 +23499,10 @@
           </a:fontRef>
         </p:style>
         <p:txBody>
-          <a:bodyPr wrap="square" rtlCol="0" anchor="ctr"/>
+          <a:bodyPr rtlCol="0" anchor="ctr" wrap="square"/>
           <a:lstStyle/>
           <a:p>
             <a:pPr algn="ctr"/>
-            <a:endParaRPr/>
           </a:p>
         </p:txBody>
       </p:sp>
@@ -24078,11 +23826,10 @@
           </a:fontRef>
         </p:style>
         <p:txBody>
-          <a:bodyPr wrap="square" rtlCol="0" anchor="ctr"/>
+          <a:bodyPr rtlCol="0" anchor="ctr" wrap="square"/>
           <a:lstStyle/>
           <a:p>
             <a:pPr algn="ctr"/>
-            <a:endParaRPr/>
           </a:p>
         </p:txBody>
       </p:sp>
@@ -24125,11 +23872,10 @@
           </a:fontRef>
         </p:style>
         <p:txBody>
-          <a:bodyPr wrap="square" rtlCol="0" anchor="ctr"/>
+          <a:bodyPr rtlCol="0" anchor="ctr" wrap="square"/>
           <a:lstStyle/>
           <a:p>
             <a:pPr algn="ctr"/>
-            <a:endParaRPr/>
           </a:p>
         </p:txBody>
       </p:sp>
@@ -24172,7 +23918,7 @@
           </a:fontRef>
         </p:style>
         <p:txBody>
-          <a:bodyPr wrap="square" tIns="76200" rtlCol="0" anchor="ctr"/>
+          <a:bodyPr rtlCol="0" anchor="ctr" wrap="square" tIns="76200"/>
           <a:lstStyle/>
           <a:p>
             <a:pPr algn="ctr">
@@ -24334,7 +24080,7 @@
           </a:fontRef>
         </p:style>
         <p:txBody>
-          <a:bodyPr wrap="square" tIns="101600" rtlCol="0" anchor="ctr"/>
+          <a:bodyPr rtlCol="0" anchor="ctr" wrap="square" tIns="101600"/>
           <a:lstStyle/>
           <a:p>
             <a:pPr algn="ctr">
@@ -24521,7 +24267,7 @@
           </a:fontRef>
         </p:style>
         <p:txBody>
-          <a:bodyPr wrap="square" tIns="50800" rtlCol="0" anchor="ctr"/>
+          <a:bodyPr rtlCol="0" anchor="ctr" wrap="square" tIns="50800"/>
           <a:lstStyle/>
           <a:p>
             <a:pPr algn="ctr">
@@ -24663,11 +24409,10 @@
           </a:fontRef>
         </p:style>
         <p:txBody>
-          <a:bodyPr wrap="square" rtlCol="0" anchor="ctr"/>
+          <a:bodyPr rtlCol="0" anchor="ctr" wrap="square"/>
           <a:lstStyle/>
           <a:p>
             <a:pPr algn="ctr"/>
-            <a:endParaRPr/>
           </a:p>
         </p:txBody>
       </p:sp>
@@ -24753,7 +24498,7 @@
           </a:fontRef>
         </p:style>
         <p:txBody>
-          <a:bodyPr wrap="square" rtlCol="0" anchor="ctr"/>
+          <a:bodyPr rtlCol="0" anchor="ctr" wrap="square"/>
           <a:lstStyle/>
           <a:p>
             <a:pPr algn="ctr">
@@ -24816,7 +24561,7 @@
           </a:fontRef>
         </p:style>
         <p:txBody>
-          <a:bodyPr wrap="square" rtlCol="0" anchor="ctr"/>
+          <a:bodyPr rtlCol="0" anchor="ctr" wrap="square"/>
           <a:lstStyle/>
           <a:p>
             <a:pPr algn="ctr">
@@ -24879,7 +24624,7 @@
           </a:fontRef>
         </p:style>
         <p:txBody>
-          <a:bodyPr wrap="square" rtlCol="0" anchor="ctr"/>
+          <a:bodyPr rtlCol="0" anchor="ctr" wrap="square"/>
           <a:lstStyle/>
           <a:p>
             <a:pPr algn="ctr">
@@ -24942,7 +24687,7 @@
           </a:fontRef>
         </p:style>
         <p:txBody>
-          <a:bodyPr wrap="square" rtlCol="0" anchor="ctr"/>
+          <a:bodyPr rtlCol="0" anchor="ctr" wrap="square"/>
           <a:lstStyle/>
           <a:p>
             <a:pPr algn="ctr">
@@ -25129,7 +24874,7 @@
           </a:fontRef>
         </p:style>
         <p:txBody>
-          <a:bodyPr wrap="square" lIns="25400" tIns="12700" rIns="25400" bIns="12700" rtlCol="0" anchor="ctr"/>
+          <a:bodyPr rtlCol="0" anchor="ctr" wrap="square" lIns="25400" rIns="25400" tIns="12700" bIns="12700"/>
           <a:lstStyle/>
           <a:p>
             <a:pPr algn="ctr">
@@ -25190,7 +24935,7 @@
           </a:fontRef>
         </p:style>
         <p:txBody>
-          <a:bodyPr wrap="square" lIns="25400" tIns="12700" rIns="25400" bIns="12700" rtlCol="0" anchor="ctr"/>
+          <a:bodyPr rtlCol="0" anchor="ctr" wrap="square" lIns="25400" rIns="25400" tIns="12700" bIns="12700"/>
           <a:lstStyle/>
           <a:p>
             <a:pPr algn="ctr">
@@ -25251,7 +24996,7 @@
           </a:fontRef>
         </p:style>
         <p:txBody>
-          <a:bodyPr wrap="square" lIns="25400" tIns="12700" rIns="25400" bIns="12700" rtlCol="0" anchor="ctr"/>
+          <a:bodyPr rtlCol="0" anchor="ctr" wrap="square" lIns="25400" rIns="25400" tIns="12700" bIns="12700"/>
           <a:lstStyle/>
           <a:p>
             <a:pPr algn="ctr">
@@ -25312,7 +25057,7 @@
           </a:fontRef>
         </p:style>
         <p:txBody>
-          <a:bodyPr wrap="square" lIns="25400" tIns="12700" rIns="25400" bIns="12700" rtlCol="0" anchor="ctr"/>
+          <a:bodyPr rtlCol="0" anchor="ctr" wrap="square" lIns="25400" rIns="25400" tIns="12700" bIns="12700"/>
           <a:lstStyle/>
           <a:p>
             <a:pPr algn="ctr">
@@ -25373,7 +25118,7 @@
           </a:fontRef>
         </p:style>
         <p:txBody>
-          <a:bodyPr wrap="square" lIns="25400" tIns="12700" rIns="25400" bIns="12700" rtlCol="0" anchor="ctr"/>
+          <a:bodyPr rtlCol="0" anchor="ctr" wrap="square" lIns="25400" rIns="25400" tIns="12700" bIns="12700"/>
           <a:lstStyle/>
           <a:p>
             <a:pPr algn="ctr">
@@ -25434,7 +25179,7 @@
           </a:fontRef>
         </p:style>
         <p:txBody>
-          <a:bodyPr wrap="square" lIns="25400" tIns="12700" rIns="25400" bIns="12700" rtlCol="0" anchor="ctr"/>
+          <a:bodyPr rtlCol="0" anchor="ctr" wrap="square" lIns="25400" rIns="25400" tIns="12700" bIns="12700"/>
           <a:lstStyle/>
           <a:p>
             <a:pPr algn="ctr">
@@ -25510,7 +25255,7 @@
 </file>
 
 <file path=ppt/slides/slide6.xml><?xml version="1.0" encoding="utf-8"?>
-<p:sld xmlns:a="http://schemas.openxmlformats.org/drawingml/2006/main" xmlns:r="http://schemas.openxmlformats.org/officeDocument/2006/relationships" xmlns:p="http://schemas.openxmlformats.org/presentationml/2006/main">
+<p:sld xmlns:a="http://schemas.openxmlformats.org/drawingml/2006/main" xmlns:p="http://schemas.openxmlformats.org/presentationml/2006/main" xmlns:r="http://schemas.openxmlformats.org/officeDocument/2006/relationships">
   <p:cSld>
     <p:spTree>
       <p:nvGrpSpPr>
@@ -25518,14 +25263,7 @@
         <p:cNvGrpSpPr/>
         <p:nvPr/>
       </p:nvGrpSpPr>
-      <p:grpSpPr>
-        <a:xfrm>
-          <a:off x="0" y="0"/>
-          <a:ext cx="0" cy="0"/>
-          <a:chOff x="0" y="0"/>
-          <a:chExt cx="0" cy="0"/>
-        </a:xfrm>
-      </p:grpSpPr>
+      <p:grpSpPr/>
       <p:sp>
         <p:nvSpPr>
           <p:cNvPr id="2" name="Rectangle 1"/>
@@ -25563,11 +25301,10 @@
           </a:fontRef>
         </p:style>
         <p:txBody>
-          <a:bodyPr wrap="square" rtlCol="0" anchor="ctr"/>
+          <a:bodyPr rtlCol="0" anchor="ctr" wrap="square"/>
           <a:lstStyle/>
           <a:p>
             <a:pPr algn="ctr"/>
-            <a:endParaRPr/>
           </a:p>
         </p:txBody>
       </p:sp>
@@ -25818,11 +25555,10 @@
           </a:fontRef>
         </p:style>
         <p:txBody>
-          <a:bodyPr wrap="square" rtlCol="0" anchor="ctr"/>
+          <a:bodyPr rtlCol="0" anchor="ctr" wrap="square"/>
           <a:lstStyle/>
           <a:p>
             <a:pPr algn="ctr"/>
-            <a:endParaRPr/>
           </a:p>
         </p:txBody>
       </p:sp>
@@ -25863,11 +25599,10 @@
           </a:fontRef>
         </p:style>
         <p:txBody>
-          <a:bodyPr wrap="square" rtlCol="0" anchor="ctr"/>
+          <a:bodyPr rtlCol="0" anchor="ctr" wrap="square"/>
           <a:lstStyle/>
           <a:p>
             <a:pPr algn="ctr"/>
-            <a:endParaRPr/>
           </a:p>
         </p:txBody>
       </p:sp>
@@ -25908,11 +25643,10 @@
           </a:fontRef>
         </p:style>
         <p:txBody>
-          <a:bodyPr wrap="square" rtlCol="0" anchor="ctr"/>
+          <a:bodyPr rtlCol="0" anchor="ctr" wrap="square"/>
           <a:lstStyle/>
           <a:p>
             <a:pPr algn="ctr"/>
-            <a:endParaRPr/>
           </a:p>
         </p:txBody>
       </p:sp>
@@ -25953,11 +25687,10 @@
           </a:fontRef>
         </p:style>
         <p:txBody>
-          <a:bodyPr wrap="square" rtlCol="0" anchor="ctr"/>
+          <a:bodyPr rtlCol="0" anchor="ctr" wrap="square"/>
           <a:lstStyle/>
           <a:p>
             <a:pPr algn="ctr"/>
-            <a:endParaRPr/>
           </a:p>
         </p:txBody>
       </p:sp>
@@ -25998,11 +25731,10 @@
           </a:fontRef>
         </p:style>
         <p:txBody>
-          <a:bodyPr wrap="square" rtlCol="0" anchor="ctr"/>
+          <a:bodyPr rtlCol="0" anchor="ctr" wrap="square"/>
           <a:lstStyle/>
           <a:p>
             <a:pPr algn="ctr"/>
-            <a:endParaRPr/>
           </a:p>
         </p:txBody>
       </p:sp>
@@ -26162,7 +25894,7 @@
           </a:fontRef>
         </p:style>
         <p:txBody>
-          <a:bodyPr wrap="square" rtlCol="0" anchor="ctr"/>
+          <a:bodyPr rtlCol="0" anchor="ctr" wrap="square"/>
           <a:lstStyle/>
           <a:p>
             <a:pPr algn="ctr">
@@ -26225,7 +25957,7 @@
           </a:fontRef>
         </p:style>
         <p:txBody>
-          <a:bodyPr wrap="square" rtlCol="0" anchor="ctr"/>
+          <a:bodyPr rtlCol="0" anchor="ctr" wrap="square"/>
           <a:lstStyle/>
           <a:p>
             <a:pPr algn="ctr">
@@ -26288,7 +26020,7 @@
           </a:fontRef>
         </p:style>
         <p:txBody>
-          <a:bodyPr wrap="square" rtlCol="0" anchor="ctr"/>
+          <a:bodyPr rtlCol="0" anchor="ctr" wrap="square"/>
           <a:lstStyle/>
           <a:p>
             <a:pPr algn="ctr">
@@ -26351,7 +26083,7 @@
           </a:fontRef>
         </p:style>
         <p:txBody>
-          <a:bodyPr wrap="square" rtlCol="0" anchor="ctr"/>
+          <a:bodyPr rtlCol="0" anchor="ctr" wrap="square"/>
           <a:lstStyle/>
           <a:p>
             <a:pPr algn="ctr">
@@ -26609,11 +26341,10 @@
           </a:fontRef>
         </p:style>
         <p:txBody>
-          <a:bodyPr wrap="square" rtlCol="0" anchor="ctr"/>
+          <a:bodyPr rtlCol="0" anchor="ctr" wrap="square"/>
           <a:lstStyle/>
           <a:p>
             <a:pPr algn="ctr"/>
-            <a:endParaRPr/>
           </a:p>
         </p:txBody>
       </p:sp>
@@ -26654,11 +26385,10 @@
           </a:fontRef>
         </p:style>
         <p:txBody>
-          <a:bodyPr wrap="square" rtlCol="0" anchor="ctr"/>
+          <a:bodyPr rtlCol="0" anchor="ctr" wrap="square"/>
           <a:lstStyle/>
           <a:p>
             <a:pPr algn="ctr"/>
-            <a:endParaRPr/>
           </a:p>
         </p:txBody>
       </p:sp>
@@ -26699,11 +26429,10 @@
           </a:fontRef>
         </p:style>
         <p:txBody>
-          <a:bodyPr wrap="square" rtlCol="0" anchor="ctr"/>
+          <a:bodyPr rtlCol="0" anchor="ctr" wrap="square"/>
           <a:lstStyle/>
           <a:p>
             <a:pPr algn="ctr"/>
-            <a:endParaRPr/>
           </a:p>
         </p:txBody>
       </p:sp>
@@ -26744,11 +26473,10 @@
           </a:fontRef>
         </p:style>
         <p:txBody>
-          <a:bodyPr wrap="square" rtlCol="0" anchor="ctr"/>
+          <a:bodyPr rtlCol="0" anchor="ctr" wrap="square"/>
           <a:lstStyle/>
           <a:p>
             <a:pPr algn="ctr"/>
-            <a:endParaRPr/>
           </a:p>
         </p:txBody>
       </p:sp>
@@ -26789,11 +26517,10 @@
           </a:fontRef>
         </p:style>
         <p:txBody>
-          <a:bodyPr wrap="square" rtlCol="0" anchor="ctr"/>
+          <a:bodyPr rtlCol="0" anchor="ctr" wrap="square"/>
           <a:lstStyle/>
           <a:p>
             <a:pPr algn="ctr"/>
-            <a:endParaRPr/>
           </a:p>
         </p:txBody>
       </p:sp>
@@ -26877,11 +26604,10 @@
           </a:fontRef>
         </p:style>
         <p:txBody>
-          <a:bodyPr wrap="square" rtlCol="0" anchor="ctr"/>
+          <a:bodyPr rtlCol="0" anchor="ctr" wrap="square"/>
           <a:lstStyle/>
           <a:p>
             <a:pPr algn="ctr"/>
-            <a:endParaRPr/>
           </a:p>
         </p:txBody>
       </p:sp>
@@ -26924,7 +26650,7 @@
           </a:fontRef>
         </p:style>
         <p:txBody>
-          <a:bodyPr wrap="square" lIns="203200" tIns="101600" rtlCol="0" anchor="ctr"/>
+          <a:bodyPr rtlCol="0" anchor="ctr" wrap="square" lIns="203200" tIns="101600"/>
           <a:lstStyle/>
           <a:p>
             <a:pPr algn="l">
@@ -27054,7 +26780,7 @@
           </a:fontRef>
         </p:style>
         <p:txBody>
-          <a:bodyPr wrap="square" lIns="25400" tIns="12700" rIns="25400" bIns="12700" rtlCol="0" anchor="ctr"/>
+          <a:bodyPr rtlCol="0" anchor="ctr" wrap="square" lIns="25400" rIns="25400" tIns="12700" bIns="12700"/>
           <a:lstStyle/>
           <a:p>
             <a:pPr algn="ctr">
@@ -27115,7 +26841,7 @@
           </a:fontRef>
         </p:style>
         <p:txBody>
-          <a:bodyPr wrap="square" lIns="25400" tIns="12700" rIns="25400" bIns="12700" rtlCol="0" anchor="ctr"/>
+          <a:bodyPr rtlCol="0" anchor="ctr" wrap="square" lIns="25400" rIns="25400" tIns="12700" bIns="12700"/>
           <a:lstStyle/>
           <a:p>
             <a:pPr algn="ctr">
@@ -27176,7 +26902,7 @@
           </a:fontRef>
         </p:style>
         <p:txBody>
-          <a:bodyPr wrap="square" lIns="25400" tIns="12700" rIns="25400" bIns="12700" rtlCol="0" anchor="ctr"/>
+          <a:bodyPr rtlCol="0" anchor="ctr" wrap="square" lIns="25400" rIns="25400" tIns="12700" bIns="12700"/>
           <a:lstStyle/>
           <a:p>
             <a:pPr algn="ctr">
@@ -27237,7 +26963,7 @@
           </a:fontRef>
         </p:style>
         <p:txBody>
-          <a:bodyPr wrap="square" lIns="25400" tIns="12700" rIns="25400" bIns="12700" rtlCol="0" anchor="ctr"/>
+          <a:bodyPr rtlCol="0" anchor="ctr" wrap="square" lIns="25400" rIns="25400" tIns="12700" bIns="12700"/>
           <a:lstStyle/>
           <a:p>
             <a:pPr algn="ctr">
@@ -27298,7 +27024,7 @@
           </a:fontRef>
         </p:style>
         <p:txBody>
-          <a:bodyPr wrap="square" lIns="25400" tIns="12700" rIns="25400" bIns="12700" rtlCol="0" anchor="ctr"/>
+          <a:bodyPr rtlCol="0" anchor="ctr" wrap="square" lIns="25400" rIns="25400" tIns="12700" bIns="12700"/>
           <a:lstStyle/>
           <a:p>
             <a:pPr algn="ctr">
@@ -27359,7 +27085,7 @@
           </a:fontRef>
         </p:style>
         <p:txBody>
-          <a:bodyPr wrap="square" lIns="25400" tIns="12700" rIns="25400" bIns="12700" rtlCol="0" anchor="ctr"/>
+          <a:bodyPr rtlCol="0" anchor="ctr" wrap="square" lIns="25400" rIns="25400" tIns="12700" bIns="12700"/>
           <a:lstStyle/>
           <a:p>
             <a:pPr algn="ctr">
@@ -27435,7 +27161,7 @@
 </file>
 
 <file path=ppt/slides/slide7.xml><?xml version="1.0" encoding="utf-8"?>
-<p:sld xmlns:a="http://schemas.openxmlformats.org/drawingml/2006/main" xmlns:r="http://schemas.openxmlformats.org/officeDocument/2006/relationships" xmlns:p="http://schemas.openxmlformats.org/presentationml/2006/main">
+<p:sld xmlns:a="http://schemas.openxmlformats.org/drawingml/2006/main" xmlns:p="http://schemas.openxmlformats.org/presentationml/2006/main" xmlns:r="http://schemas.openxmlformats.org/officeDocument/2006/relationships">
   <p:cSld>
     <p:spTree>
       <p:nvGrpSpPr>
@@ -27443,14 +27169,7 @@
         <p:cNvGrpSpPr/>
         <p:nvPr/>
       </p:nvGrpSpPr>
-      <p:grpSpPr>
-        <a:xfrm>
-          <a:off x="0" y="0"/>
-          <a:ext cx="0" cy="0"/>
-          <a:chOff x="0" y="0"/>
-          <a:chExt cx="0" cy="0"/>
-        </a:xfrm>
-      </p:grpSpPr>
+      <p:grpSpPr/>
       <p:sp>
         <p:nvSpPr>
           <p:cNvPr id="2" name="Rectangle 1"/>
@@ -27488,11 +27207,10 @@
           </a:fontRef>
         </p:style>
         <p:txBody>
-          <a:bodyPr wrap="square" rtlCol="0" anchor="ctr"/>
+          <a:bodyPr rtlCol="0" anchor="ctr" wrap="square"/>
           <a:lstStyle/>
           <a:p>
             <a:pPr algn="ctr"/>
-            <a:endParaRPr/>
           </a:p>
         </p:txBody>
       </p:sp>
@@ -27621,7 +27339,7 @@
           </a:fontRef>
         </p:style>
         <p:txBody>
-          <a:bodyPr wrap="square" lIns="177800" tIns="127000" rIns="177800" bIns="101600" rtlCol="0" anchor="t"/>
+          <a:bodyPr rtlCol="0" anchor="t" wrap="square" lIns="177800" rIns="177800" tIns="127000" bIns="101600"/>
           <a:lstStyle/>
           <a:p>
             <a:pPr algn="l">
@@ -27744,7 +27462,7 @@
           </a:fontRef>
         </p:style>
         <p:txBody>
-          <a:bodyPr wrap="square" lIns="177800" tIns="127000" rIns="177800" bIns="101600" rtlCol="0" anchor="t"/>
+          <a:bodyPr rtlCol="0" anchor="t" wrap="square" lIns="177800" rIns="177800" tIns="127000" bIns="101600"/>
           <a:lstStyle/>
           <a:p>
             <a:pPr algn="l">
@@ -27867,7 +27585,7 @@
           </a:fontRef>
         </p:style>
         <p:txBody>
-          <a:bodyPr wrap="square" lIns="177800" tIns="127000" rIns="177800" bIns="101600" rtlCol="0" anchor="t"/>
+          <a:bodyPr rtlCol="0" anchor="t" wrap="square" lIns="177800" rIns="177800" tIns="127000" bIns="101600"/>
           <a:lstStyle/>
           <a:p>
             <a:pPr algn="l">
@@ -27909,7 +27627,7 @@
                 <a:latin typeface="Meiryo"/>
                 <a:ea typeface="メイリオ"/>
               </a:rPr>
-              <a:t>PSELDNetsをファインチューニング。学習10,200＋確定評価1,800クリップ</a:t>
+              <a:t>PSELDNetsをファインチューニング。学習10,200＋評価1,800クリップ</a:t>
             </a:r>
           </a:p>
         </p:txBody>
@@ -28169,7 +27887,7 @@
           </a:fontRef>
         </p:style>
         <p:txBody>
-          <a:bodyPr wrap="square" lIns="25400" tIns="12700" rIns="25400" bIns="12700" rtlCol="0" anchor="ctr"/>
+          <a:bodyPr rtlCol="0" anchor="ctr" wrap="square" lIns="25400" rIns="25400" tIns="12700" bIns="12700"/>
           <a:lstStyle/>
           <a:p>
             <a:pPr algn="ctr">
@@ -28230,7 +27948,7 @@
           </a:fontRef>
         </p:style>
         <p:txBody>
-          <a:bodyPr wrap="square" lIns="25400" tIns="12700" rIns="25400" bIns="12700" rtlCol="0" anchor="ctr"/>
+          <a:bodyPr rtlCol="0" anchor="ctr" wrap="square" lIns="25400" rIns="25400" tIns="12700" bIns="12700"/>
           <a:lstStyle/>
           <a:p>
             <a:pPr algn="ctr">
@@ -28291,7 +28009,7 @@
           </a:fontRef>
         </p:style>
         <p:txBody>
-          <a:bodyPr wrap="square" lIns="25400" tIns="12700" rIns="25400" bIns="12700" rtlCol="0" anchor="ctr"/>
+          <a:bodyPr rtlCol="0" anchor="ctr" wrap="square" lIns="25400" rIns="25400" tIns="12700" bIns="12700"/>
           <a:lstStyle/>
           <a:p>
             <a:pPr algn="ctr">
@@ -28352,7 +28070,7 @@
           </a:fontRef>
         </p:style>
         <p:txBody>
-          <a:bodyPr wrap="square" lIns="25400" tIns="12700" rIns="25400" bIns="12700" rtlCol="0" anchor="ctr"/>
+          <a:bodyPr rtlCol="0" anchor="ctr" wrap="square" lIns="25400" rIns="25400" tIns="12700" bIns="12700"/>
           <a:lstStyle/>
           <a:p>
             <a:pPr algn="ctr">
@@ -28413,7 +28131,7 @@
           </a:fontRef>
         </p:style>
         <p:txBody>
-          <a:bodyPr wrap="square" lIns="25400" tIns="12700" rIns="25400" bIns="12700" rtlCol="0" anchor="ctr"/>
+          <a:bodyPr rtlCol="0" anchor="ctr" wrap="square" lIns="25400" rIns="25400" tIns="12700" bIns="12700"/>
           <a:lstStyle/>
           <a:p>
             <a:pPr algn="ctr">
@@ -28474,7 +28192,7 @@
           </a:fontRef>
         </p:style>
         <p:txBody>
-          <a:bodyPr wrap="square" lIns="25400" tIns="12700" rIns="25400" bIns="12700" rtlCol="0" anchor="ctr"/>
+          <a:bodyPr rtlCol="0" anchor="ctr" wrap="square" lIns="25400" rIns="25400" tIns="12700" bIns="12700"/>
           <a:lstStyle/>
           <a:p>
             <a:pPr algn="ctr">
@@ -28550,7 +28268,7 @@
 </file>
 
 <file path=ppt/slides/slide8.xml><?xml version="1.0" encoding="utf-8"?>
-<p:sld xmlns:a="http://schemas.openxmlformats.org/drawingml/2006/main" xmlns:r="http://schemas.openxmlformats.org/officeDocument/2006/relationships" xmlns:p="http://schemas.openxmlformats.org/presentationml/2006/main">
+<p:sld xmlns:a="http://schemas.openxmlformats.org/drawingml/2006/main" xmlns:p="http://schemas.openxmlformats.org/presentationml/2006/main" xmlns:r="http://schemas.openxmlformats.org/officeDocument/2006/relationships">
   <p:cSld>
     <p:spTree>
       <p:nvGrpSpPr>
@@ -28558,14 +28276,7 @@
         <p:cNvGrpSpPr/>
         <p:nvPr/>
       </p:nvGrpSpPr>
-      <p:grpSpPr>
-        <a:xfrm>
-          <a:off x="0" y="0"/>
-          <a:ext cx="0" cy="0"/>
-          <a:chOff x="0" y="0"/>
-          <a:chExt cx="0" cy="0"/>
-        </a:xfrm>
-      </p:grpSpPr>
+      <p:grpSpPr/>
       <p:sp>
         <p:nvSpPr>
           <p:cNvPr id="2" name="Rectangle 1"/>
@@ -28603,11 +28314,10 @@
           </a:fontRef>
         </p:style>
         <p:txBody>
-          <a:bodyPr wrap="square" rtlCol="0" anchor="ctr"/>
+          <a:bodyPr rtlCol="0" anchor="ctr" wrap="square"/>
           <a:lstStyle/>
           <a:p>
             <a:pPr algn="ctr"/>
-            <a:endParaRPr/>
           </a:p>
         </p:txBody>
       </p:sp>
@@ -28736,7 +28446,7 @@
           </a:fontRef>
         </p:style>
         <p:txBody>
-          <a:bodyPr wrap="square" lIns="177800" tIns="127000" rIns="177800" bIns="101600" rtlCol="0" anchor="t"/>
+          <a:bodyPr rtlCol="0" anchor="t" wrap="square" lIns="177800" rIns="177800" tIns="127000" bIns="101600"/>
           <a:lstStyle/>
           <a:p>
             <a:pPr algn="l">
@@ -28862,7 +28572,7 @@
           </a:fontRef>
         </p:style>
         <p:txBody>
-          <a:bodyPr wrap="square" lIns="177800" tIns="127000" rIns="177800" bIns="101600" rtlCol="0" anchor="t"/>
+          <a:bodyPr rtlCol="0" anchor="t" wrap="square" lIns="177800" rIns="177800" tIns="127000" bIns="101600"/>
           <a:lstStyle/>
           <a:p>
             <a:pPr algn="l">
@@ -29054,7 +28764,7 @@
           </a:fontRef>
         </p:style>
         <p:txBody>
-          <a:bodyPr wrap="square" lIns="177800" tIns="127000" rIns="177800" bIns="101600" rtlCol="0" anchor="t"/>
+          <a:bodyPr rtlCol="0" anchor="t" wrap="square" lIns="177800" rIns="177800" tIns="127000" bIns="101600"/>
           <a:lstStyle/>
           <a:p>
             <a:pPr algn="l">
@@ -29139,7 +28849,7 @@
                 <a:latin typeface="Meiryo"/>
                 <a:ea typeface="メイリオ"/>
               </a:rPr>
-              <a:t>8/4時点は危険度を区別できなかった → 距離推定の統合で3段階が機能（今回の最大の進捗）</a:t>
+              <a:t>知覚層が「何が・どこから・どれだけ近くに」を推定し、通知層が「いつ・どの強さで」伝えるかを決める</a:t>
             </a:r>
           </a:p>
         </p:txBody>
@@ -29184,11 +28894,10 @@
           </a:fontRef>
         </p:style>
         <p:txBody>
-          <a:bodyPr wrap="square" rtlCol="0" anchor="ctr"/>
+          <a:bodyPr rtlCol="0" anchor="ctr" wrap="square"/>
           <a:lstStyle/>
           <a:p>
             <a:pPr algn="ctr"/>
-            <a:endParaRPr/>
           </a:p>
         </p:txBody>
       </p:sp>
@@ -29231,11 +28940,10 @@
           </a:fontRef>
         </p:style>
         <p:txBody>
-          <a:bodyPr wrap="square" rtlCol="0" anchor="ctr"/>
+          <a:bodyPr rtlCol="0" anchor="ctr" wrap="square"/>
           <a:lstStyle/>
           <a:p>
             <a:pPr algn="ctr"/>
-            <a:endParaRPr/>
           </a:p>
         </p:txBody>
       </p:sp>
@@ -29278,11 +28986,10 @@
           </a:fontRef>
         </p:style>
         <p:txBody>
-          <a:bodyPr wrap="square" rtlCol="0" anchor="ctr"/>
+          <a:bodyPr rtlCol="0" anchor="ctr" wrap="square"/>
           <a:lstStyle/>
           <a:p>
             <a:pPr algn="ctr"/>
-            <a:endParaRPr/>
           </a:p>
         </p:txBody>
       </p:sp>
@@ -29323,11 +29030,10 @@
           </a:fontRef>
         </p:style>
         <p:txBody>
-          <a:bodyPr wrap="square" rtlCol="0" anchor="ctr"/>
+          <a:bodyPr rtlCol="0" anchor="ctr" wrap="square"/>
           <a:lstStyle/>
           <a:p>
             <a:pPr algn="ctr"/>
-            <a:endParaRPr/>
           </a:p>
         </p:txBody>
       </p:sp>
@@ -29576,7 +29282,7 @@
           </a:fontRef>
         </p:style>
         <p:txBody>
-          <a:bodyPr wrap="square" lIns="25400" tIns="12700" rIns="25400" bIns="12700" rtlCol="0" anchor="ctr"/>
+          <a:bodyPr rtlCol="0" anchor="ctr" wrap="square" lIns="25400" rIns="25400" tIns="12700" bIns="12700"/>
           <a:lstStyle/>
           <a:p>
             <a:pPr algn="ctr">
@@ -29637,7 +29343,7 @@
           </a:fontRef>
         </p:style>
         <p:txBody>
-          <a:bodyPr wrap="square" lIns="25400" tIns="12700" rIns="25400" bIns="12700" rtlCol="0" anchor="ctr"/>
+          <a:bodyPr rtlCol="0" anchor="ctr" wrap="square" lIns="25400" rIns="25400" tIns="12700" bIns="12700"/>
           <a:lstStyle/>
           <a:p>
             <a:pPr algn="ctr">
@@ -29698,7 +29404,7 @@
           </a:fontRef>
         </p:style>
         <p:txBody>
-          <a:bodyPr wrap="square" lIns="25400" tIns="12700" rIns="25400" bIns="12700" rtlCol="0" anchor="ctr"/>
+          <a:bodyPr rtlCol="0" anchor="ctr" wrap="square" lIns="25400" rIns="25400" tIns="12700" bIns="12700"/>
           <a:lstStyle/>
           <a:p>
             <a:pPr algn="ctr">
@@ -29759,7 +29465,7 @@
           </a:fontRef>
         </p:style>
         <p:txBody>
-          <a:bodyPr wrap="square" lIns="25400" tIns="12700" rIns="25400" bIns="12700" rtlCol="0" anchor="ctr"/>
+          <a:bodyPr rtlCol="0" anchor="ctr" wrap="square" lIns="25400" rIns="25400" tIns="12700" bIns="12700"/>
           <a:lstStyle/>
           <a:p>
             <a:pPr algn="ctr">
@@ -29820,7 +29526,7 @@
           </a:fontRef>
         </p:style>
         <p:txBody>
-          <a:bodyPr wrap="square" lIns="25400" tIns="12700" rIns="25400" bIns="12700" rtlCol="0" anchor="ctr"/>
+          <a:bodyPr rtlCol="0" anchor="ctr" wrap="square" lIns="25400" rIns="25400" tIns="12700" bIns="12700"/>
           <a:lstStyle/>
           <a:p>
             <a:pPr algn="ctr">
@@ -29881,7 +29587,7 @@
           </a:fontRef>
         </p:style>
         <p:txBody>
-          <a:bodyPr wrap="square" lIns="25400" tIns="12700" rIns="25400" bIns="12700" rtlCol="0" anchor="ctr"/>
+          <a:bodyPr rtlCol="0" anchor="ctr" wrap="square" lIns="25400" rIns="25400" tIns="12700" bIns="12700"/>
           <a:lstStyle/>
           <a:p>
             <a:pPr algn="ctr">
@@ -29957,7 +29663,7 @@
 </file>
 
 <file path=ppt/slides/slide9.xml><?xml version="1.0" encoding="utf-8"?>
-<p:sld xmlns:a="http://schemas.openxmlformats.org/drawingml/2006/main" xmlns:r="http://schemas.openxmlformats.org/officeDocument/2006/relationships" xmlns:p="http://schemas.openxmlformats.org/presentationml/2006/main">
+<p:sld xmlns:a="http://schemas.openxmlformats.org/drawingml/2006/main" xmlns:p="http://schemas.openxmlformats.org/presentationml/2006/main" xmlns:r="http://schemas.openxmlformats.org/officeDocument/2006/relationships">
   <p:cSld>
     <p:spTree>
       <p:nvGrpSpPr>
@@ -29965,14 +29671,7 @@
         <p:cNvGrpSpPr/>
         <p:nvPr/>
       </p:nvGrpSpPr>
-      <p:grpSpPr>
-        <a:xfrm>
-          <a:off x="0" y="0"/>
-          <a:ext cx="0" cy="0"/>
-          <a:chOff x="0" y="0"/>
-          <a:chExt cx="0" cy="0"/>
-        </a:xfrm>
-      </p:grpSpPr>
+      <p:grpSpPr/>
       <p:sp>
         <p:nvSpPr>
           <p:cNvPr id="2" name="Rectangle 1"/>
@@ -30010,11 +29709,10 @@
           </a:fontRef>
         </p:style>
         <p:txBody>
-          <a:bodyPr wrap="square" rtlCol="0" anchor="ctr"/>
+          <a:bodyPr rtlCol="0" anchor="ctr" wrap="square"/>
           <a:lstStyle/>
           <a:p>
             <a:pPr algn="ctr"/>
-            <a:endParaRPr/>
           </a:p>
         </p:txBody>
       </p:sp>
@@ -30056,7 +29754,7 @@
                 <a:latin typeface="Meiryo"/>
                 <a:ea typeface="メイリオ"/>
               </a:rPr>
-              <a:t>RESULTS 1/2 — 確定評価</a:t>
+              <a:t>RESULTS 1/2</a:t>
             </a:r>
           </a:p>
         </p:txBody>
@@ -30099,7 +29797,7 @@
                 <a:latin typeface="Meiryo"/>
                 <a:ea typeface="メイリオ"/>
               </a:rPr>
-              <a:t>検証 — 事前固定した未使用セットでの一発評価</a:t>
+              <a:t>検証 — 学習に使っていないデータでの評価</a:t>
             </a:r>
           </a:p>
         </p:txBody>
@@ -30145,7 +29843,7 @@
                 <a:latin typeface="Meiryo"/>
                 <a:ea typeface="メイリオ"/>
               </a:rPr>
-              <a:t>作法：合格基準を</a:t>
+              <a:t>評価の作法：合格基準を</a:t>
             </a:r>
             <a:r>
               <a:rPr sz="1350" b="1">
@@ -30155,7 +29853,7 @@
                 <a:latin typeface="Meiryo"/>
                 <a:ea typeface="メイリオ"/>
               </a:rPr>
-              <a:t>先に宣言</a:t>
+              <a:t>先に決め</a:t>
             </a:r>
             <a:r>
               <a:rPr sz="1350" b="0">
@@ -30165,7 +29863,7 @@
                 <a:latin typeface="Meiryo"/>
                 <a:ea typeface="メイリオ"/>
               </a:rPr>
-              <a:t> → </a:t>
+              <a:t>、学習に未使用の評価セット</a:t>
             </a:r>
             <a:r>
               <a:rPr sz="1350" b="1">
@@ -30175,7 +29873,7 @@
                 <a:latin typeface="Meiryo"/>
                 <a:ea typeface="メイリオ"/>
               </a:rPr>
-              <a:t>未使用の評価セット1,800本</a:t>
+              <a:t>1,800クリップ</a:t>
             </a:r>
             <a:r>
               <a:rPr sz="1350" b="0">
@@ -30185,7 +29883,7 @@
                 <a:latin typeface="Meiryo"/>
                 <a:ea typeface="メイリオ"/>
               </a:rPr>
-              <a:t>を新規生成 → </a:t>
+              <a:t>で</a:t>
             </a:r>
             <a:r>
               <a:rPr sz="1350" b="1">
@@ -30205,17 +29903,7 @@
                 <a:latin typeface="Meiryo"/>
                 <a:ea typeface="メイリオ"/>
               </a:rPr>
-              <a:t>推論・採点。AI外部監査（敵対的レビュー3巡）で</a:t>
-            </a:r>
-            <a:r>
-              <a:rPr sz="1350" b="1">
-                <a:solidFill>
-                  <a:srgbClr val="B37E00"/>
-                </a:solidFill>
-                <a:latin typeface="Meiryo"/>
-                <a:ea typeface="メイリオ"/>
-              </a:rPr>
-              <a:t>完全合格</a:t>
+              <a:t>評価（結果を見てから基準や評価を変えない）</a:t>
             </a:r>
           </a:p>
         </p:txBody>
@@ -30239,39 +29927,15 @@
                 <a:tableStyleId>{5C22544A-7EE6-4342-B048-85BDC9FD1C3A}</a:tableStyleId>
               </a:tblPr>
               <a:tblGrid>
-                <a:gridCol w="1397000">
-                  <a:extLst>
-                    <a:ext uri="{9D8B030D-6E8A-4147-A177-3AD203B41FA5}">
-                      <a16:colId xmlns:a16="http://schemas.microsoft.com/office/drawing/2014/main" val="20000"/>
-                    </a:ext>
-                  </a:extLst>
-                </a:gridCol>
-                <a:gridCol w="4064000">
-                  <a:extLst>
-                    <a:ext uri="{9D8B030D-6E8A-4147-A177-3AD203B41FA5}">
-                      <a16:colId xmlns:a16="http://schemas.microsoft.com/office/drawing/2014/main" val="20001"/>
-                    </a:ext>
-                  </a:extLst>
-                </a:gridCol>
-                <a:gridCol w="4064000">
-                  <a:extLst>
-                    <a:ext uri="{9D8B030D-6E8A-4147-A177-3AD203B41FA5}">
-                      <a16:colId xmlns:a16="http://schemas.microsoft.com/office/drawing/2014/main" val="20002"/>
-                    </a:ext>
-                  </a:extLst>
-                </a:gridCol>
-                <a:gridCol w="1295400">
-                  <a:extLst>
-                    <a:ext uri="{9D8B030D-6E8A-4147-A177-3AD203B41FA5}">
-                      <a16:colId xmlns:a16="http://schemas.microsoft.com/office/drawing/2014/main" val="20003"/>
-                    </a:ext>
-                  </a:extLst>
-                </a:gridCol>
+                <a:gridCol w="1397000"/>
+                <a:gridCol w="4064000"/>
+                <a:gridCol w="4064000"/>
+                <a:gridCol w="1295400"/>
               </a:tblGrid>
               <a:tr h="571500">
                 <a:tc>
                   <a:txBody>
-                    <a:bodyPr/>
+                    <a:bodyPr wrap="square"/>
                     <a:lstStyle/>
                     <a:p>
                       <a:pPr algn="l">
@@ -30290,7 +29954,7 @@
                           <a:latin typeface="Meiryo"/>
                           <a:ea typeface="メイリオ"/>
                         </a:rPr>
-                        <a:t>ゲート</a:t>
+                        <a:t>項目</a:t>
                       </a:r>
                     </a:p>
                   </a:txBody>
@@ -30302,7 +29966,7 @@
                 </a:tc>
                 <a:tc>
                   <a:txBody>
-                    <a:bodyPr/>
+                    <a:bodyPr wrap="square"/>
                     <a:lstStyle/>
                     <a:p>
                       <a:pPr algn="l">
@@ -30321,7 +29985,7 @@
                           <a:latin typeface="Meiryo"/>
                           <a:ea typeface="メイリオ"/>
                         </a:rPr>
-                        <a:t>事前宣言した基準</a:t>
+                        <a:t>目標（事前に設定）</a:t>
                       </a:r>
                     </a:p>
                   </a:txBody>
@@ -30333,7 +29997,7 @@
                 </a:tc>
                 <a:tc>
                   <a:txBody>
-                    <a:bodyPr/>
+                    <a:bodyPr wrap="square"/>
                     <a:lstStyle/>
                     <a:p>
                       <a:pPr algn="l">
@@ -30352,7 +30016,7 @@
                           <a:latin typeface="Meiryo"/>
                           <a:ea typeface="メイリオ"/>
                         </a:rPr>
-                        <a:t>確定値</a:t>
+                        <a:t>結果</a:t>
                       </a:r>
                     </a:p>
                   </a:txBody>
@@ -30364,7 +30028,7 @@
                 </a:tc>
                 <a:tc>
                   <a:txBody>
-                    <a:bodyPr/>
+                    <a:bodyPr wrap="square"/>
                     <a:lstStyle/>
                     <a:p>
                       <a:pPr algn="l">
@@ -30393,16 +30057,11 @@
                     </a:solidFill>
                   </a:tcPr>
                 </a:tc>
-                <a:extLst>
-                  <a:ext uri="{0D108BD9-81ED-4DB2-BD59-A6C34878D82A}">
-                    <a16:rowId xmlns:a16="http://schemas.microsoft.com/office/drawing/2014/main" val="10000"/>
-                  </a:ext>
-                </a:extLst>
               </a:tr>
               <a:tr h="571500">
                 <a:tc>
                   <a:txBody>
-                    <a:bodyPr/>
+                    <a:bodyPr wrap="square"/>
                     <a:lstStyle/>
                     <a:p>
                       <a:pPr algn="l">
@@ -30421,7 +30080,7 @@
                           <a:latin typeface="Meiryo"/>
                           <a:ea typeface="メイリオ"/>
                         </a:rPr>
-                        <a:t>G1 基本</a:t>
+                        <a:t>車の検出</a:t>
                       </a:r>
                     </a:p>
                   </a:txBody>
@@ -30433,7 +30092,7 @@
                 </a:tc>
                 <a:tc>
                   <a:txBody>
-                    <a:bodyPr/>
+                    <a:bodyPr wrap="square"/>
                     <a:lstStyle/>
                     <a:p>
                       <a:pPr algn="l">
@@ -30452,7 +30111,7 @@
                           <a:latin typeface="Meiryo"/>
                           <a:ea typeface="メイリオ"/>
                         </a:rPr>
-                        <a:t>車 ≥99%・方向 ≤3.0°</a:t>
+                        <a:t>検出率 ≥99%・方向誤差 ≤3.0°</a:t>
                       </a:r>
                     </a:p>
                   </a:txBody>
@@ -30464,7 +30123,7 @@
                 </a:tc>
                 <a:tc>
                   <a:txBody>
-                    <a:bodyPr/>
+                    <a:bodyPr wrap="square"/>
                     <a:lstStyle/>
                     <a:p>
                       <a:pPr algn="l">
@@ -30495,7 +30154,7 @@
                 </a:tc>
                 <a:tc>
                   <a:txBody>
-                    <a:bodyPr/>
+                    <a:bodyPr wrap="square"/>
                     <a:lstStyle/>
                     <a:p>
                       <a:pPr algn="ctr">
@@ -30524,16 +30183,11 @@
                     </a:solidFill>
                   </a:tcPr>
                 </a:tc>
-                <a:extLst>
-                  <a:ext uri="{0D108BD9-81ED-4DB2-BD59-A6C34878D82A}">
-                    <a16:rowId xmlns:a16="http://schemas.microsoft.com/office/drawing/2014/main" val="10001"/>
-                  </a:ext>
-                </a:extLst>
               </a:tr>
               <a:tr h="571500">
                 <a:tc>
                   <a:txBody>
-                    <a:bodyPr/>
+                    <a:bodyPr wrap="square"/>
                     <a:lstStyle/>
                     <a:p>
                       <a:pPr algn="l">
@@ -30552,7 +30206,7 @@
                           <a:latin typeface="Meiryo"/>
                           <a:ea typeface="メイリオ"/>
                         </a:rPr>
-                        <a:t>G2 静音EV</a:t>
+                        <a:t>静音EV</a:t>
                       </a:r>
                     </a:p>
                   </a:txBody>
@@ -30564,7 +30218,7 @@
                 </a:tc>
                 <a:tc>
                   <a:txBody>
-                    <a:bodyPr/>
+                    <a:bodyPr wrap="square"/>
                     <a:lstStyle/>
                     <a:p>
                       <a:pPr algn="l">
@@ -30583,7 +30237,7 @@
                           <a:latin typeface="Meiryo"/>
                           <a:ea typeface="メイリオ"/>
                         </a:rPr>
-                        <a:t>単独EV ≥95%</a:t>
+                        <a:t>単独EVの検出率 ≥95%</a:t>
                       </a:r>
                     </a:p>
                   </a:txBody>
@@ -30595,7 +30249,7 @@
                 </a:tc>
                 <a:tc>
                   <a:txBody>
-                    <a:bodyPr/>
+                    <a:bodyPr wrap="square"/>
                     <a:lstStyle/>
                     <a:p>
                       <a:pPr algn="l">
@@ -30614,7 +30268,7 @@
                           <a:latin typeface="Meiryo"/>
                           <a:ea typeface="メイリオ"/>
                         </a:rPr>
-                        <a:t>99.0%（前世代80.2%から+19pt）</a:t>
+                        <a:t>99.0%</a:t>
                       </a:r>
                     </a:p>
                   </a:txBody>
@@ -30626,7 +30280,7 @@
                 </a:tc>
                 <a:tc>
                   <a:txBody>
-                    <a:bodyPr/>
+                    <a:bodyPr wrap="square"/>
                     <a:lstStyle/>
                     <a:p>
                       <a:pPr algn="ctr">
@@ -30655,16 +30309,11 @@
                     </a:solidFill>
                   </a:tcPr>
                 </a:tc>
-                <a:extLst>
-                  <a:ext uri="{0D108BD9-81ED-4DB2-BD59-A6C34878D82A}">
-                    <a16:rowId xmlns:a16="http://schemas.microsoft.com/office/drawing/2014/main" val="10002"/>
-                  </a:ext>
-                </a:extLst>
               </a:tr>
               <a:tr h="571500">
                 <a:tc>
                   <a:txBody>
-                    <a:bodyPr/>
+                    <a:bodyPr wrap="square"/>
                     <a:lstStyle/>
                     <a:p>
                       <a:pPr algn="l">
@@ -30683,7 +30332,7 @@
                           <a:latin typeface="Meiryo"/>
                           <a:ea typeface="メイリオ"/>
                         </a:rPr>
-                        <a:t>G3 新クラス</a:t>
+                        <a:t>新クラス</a:t>
                       </a:r>
                     </a:p>
                   </a:txBody>
@@ -30695,7 +30344,7 @@
                 </a:tc>
                 <a:tc>
                   <a:txBody>
-                    <a:bodyPr/>
+                    <a:bodyPr wrap="square"/>
                     <a:lstStyle/>
                     <a:p>
                       <a:pPr algn="l">
@@ -30726,7 +30375,7 @@
                 </a:tc>
                 <a:tc>
                   <a:txBody>
-                    <a:bodyPr/>
+                    <a:bodyPr wrap="square"/>
                     <a:lstStyle/>
                     <a:p>
                       <a:pPr algn="l">
@@ -30757,7 +30406,7 @@
                 </a:tc>
                 <a:tc>
                   <a:txBody>
-                    <a:bodyPr/>
+                    <a:bodyPr wrap="square"/>
                     <a:lstStyle/>
                     <a:p>
                       <a:pPr algn="ctr">
@@ -30786,16 +30435,11 @@
                     </a:solidFill>
                   </a:tcPr>
                 </a:tc>
-                <a:extLst>
-                  <a:ext uri="{0D108BD9-81ED-4DB2-BD59-A6C34878D82A}">
-                    <a16:rowId xmlns:a16="http://schemas.microsoft.com/office/drawing/2014/main" val="10003"/>
-                  </a:ext>
-                </a:extLst>
               </a:tr>
               <a:tr h="571500">
                 <a:tc>
                   <a:txBody>
-                    <a:bodyPr/>
+                    <a:bodyPr wrap="square"/>
                     <a:lstStyle/>
                     <a:p>
                       <a:pPr algn="l">
@@ -30814,7 +30458,7 @@
                           <a:latin typeface="Meiryo"/>
                           <a:ea typeface="メイリオ"/>
                         </a:rPr>
-                        <a:t>G4 距離</a:t>
+                        <a:t>距離推定</a:t>
                       </a:r>
                     </a:p>
                   </a:txBody>
@@ -30826,7 +30470,7 @@
                 </a:tc>
                 <a:tc>
                   <a:txBody>
-                    <a:bodyPr/>
+                    <a:bodyPr wrap="square"/>
                     <a:lstStyle/>
                     <a:p>
                       <a:pPr algn="l">
@@ -30845,7 +30489,7 @@
                           <a:latin typeface="Meiryo"/>
                           <a:ea typeface="メイリオ"/>
                         </a:rPr>
-                        <a:t>至近中央 ≤0.30m・重大判定 ≥68%</a:t>
+                        <a:t>至近の中央誤差 ≤0.30m・重大判定 ≥68%</a:t>
                       </a:r>
                     </a:p>
                   </a:txBody>
@@ -30857,7 +30501,7 @@
                 </a:tc>
                 <a:tc>
                   <a:txBody>
-                    <a:bodyPr/>
+                    <a:bodyPr wrap="square"/>
                     <a:lstStyle/>
                     <a:p>
                       <a:pPr algn="l">
@@ -30888,7 +30532,7 @@
                 </a:tc>
                 <a:tc>
                   <a:txBody>
-                    <a:bodyPr/>
+                    <a:bodyPr wrap="square"/>
                     <a:lstStyle/>
                     <a:p>
                       <a:pPr algn="ctr">
@@ -30917,16 +30561,11 @@
                     </a:solidFill>
                   </a:tcPr>
                 </a:tc>
-                <a:extLst>
-                  <a:ext uri="{0D108BD9-81ED-4DB2-BD59-A6C34878D82A}">
-                    <a16:rowId xmlns:a16="http://schemas.microsoft.com/office/drawing/2014/main" val="10004"/>
-                  </a:ext>
-                </a:extLst>
               </a:tr>
               <a:tr h="571500">
                 <a:tc>
                   <a:txBody>
-                    <a:bodyPr/>
+                    <a:bodyPr wrap="square"/>
                     <a:lstStyle/>
                     <a:p>
                       <a:pPr algn="l">
@@ -30945,7 +30584,7 @@
                           <a:latin typeface="Meiryo"/>
                           <a:ea typeface="メイリオ"/>
                         </a:rPr>
-                        <a:t>G5 総合</a:t>
+                        <a:t>総合スコア</a:t>
                       </a:r>
                     </a:p>
                   </a:txBody>
@@ -30957,7 +30596,7 @@
                 </a:tc>
                 <a:tc>
                   <a:txBody>
-                    <a:bodyPr/>
+                    <a:bodyPr wrap="square"/>
                     <a:lstStyle/>
                     <a:p>
                       <a:pPr algn="l">
@@ -30988,7 +30627,7 @@
                 </a:tc>
                 <a:tc>
                   <a:txBody>
-                    <a:bodyPr/>
+                    <a:bodyPr wrap="square"/>
                     <a:lstStyle/>
                     <a:p>
                       <a:pPr algn="l">
@@ -31007,7 +30646,7 @@
                           <a:latin typeface="Meiryo"/>
                           <a:ea typeface="メイリオ"/>
                         </a:rPr>
-                        <a:t>0.087（学習時指標）</a:t>
+                        <a:t>0.087</a:t>
                       </a:r>
                     </a:p>
                   </a:txBody>
@@ -31019,7 +30658,7 @@
                 </a:tc>
                 <a:tc>
                   <a:txBody>
-                    <a:bodyPr/>
+                    <a:bodyPr wrap="square"/>
                     <a:lstStyle/>
                     <a:p>
                       <a:pPr algn="ctr">
@@ -31048,11 +30687,6 @@
                     </a:solidFill>
                   </a:tcPr>
                 </a:tc>
-                <a:extLst>
-                  <a:ext uri="{0D108BD9-81ED-4DB2-BD59-A6C34878D82A}">
-                    <a16:rowId xmlns:a16="http://schemas.microsoft.com/office/drawing/2014/main" val="10005"/>
-                  </a:ext>
-                </a:extLst>
               </a:tr>
             </a:tbl>
           </a:graphicData>
@@ -31096,7 +30730,7 @@
                 <a:latin typeface="Meiryo"/>
                 <a:ea typeface="メイリオ"/>
               </a:rPr>
-              <a:t>8クラス可聴検出率 97.2〜100%。未達も隠さず記載するのが本研究の検証の作法。</a:t>
+              <a:t>8クラスの可聴検出率は 97.2〜100%（未達の項目も含めてそのまま報告している）</a:t>
             </a:r>
           </a:p>
         </p:txBody>
@@ -31174,7 +30808,7 @@
           </a:fontRef>
         </p:style>
         <p:txBody>
-          <a:bodyPr wrap="square" lIns="25400" tIns="12700" rIns="25400" bIns="12700" rtlCol="0" anchor="ctr"/>
+          <a:bodyPr rtlCol="0" anchor="ctr" wrap="square" lIns="25400" rIns="25400" tIns="12700" bIns="12700"/>
           <a:lstStyle/>
           <a:p>
             <a:pPr algn="ctr">
@@ -31235,7 +30869,7 @@
           </a:fontRef>
         </p:style>
         <p:txBody>
-          <a:bodyPr wrap="square" lIns="25400" tIns="12700" rIns="25400" bIns="12700" rtlCol="0" anchor="ctr"/>
+          <a:bodyPr rtlCol="0" anchor="ctr" wrap="square" lIns="25400" rIns="25400" tIns="12700" bIns="12700"/>
           <a:lstStyle/>
           <a:p>
             <a:pPr algn="ctr">
@@ -31296,7 +30930,7 @@
           </a:fontRef>
         </p:style>
         <p:txBody>
-          <a:bodyPr wrap="square" lIns="25400" tIns="12700" rIns="25400" bIns="12700" rtlCol="0" anchor="ctr"/>
+          <a:bodyPr rtlCol="0" anchor="ctr" wrap="square" lIns="25400" rIns="25400" tIns="12700" bIns="12700"/>
           <a:lstStyle/>
           <a:p>
             <a:pPr algn="ctr">
@@ -31357,7 +30991,7 @@
           </a:fontRef>
         </p:style>
         <p:txBody>
-          <a:bodyPr wrap="square" lIns="25400" tIns="12700" rIns="25400" bIns="12700" rtlCol="0" anchor="ctr"/>
+          <a:bodyPr rtlCol="0" anchor="ctr" wrap="square" lIns="25400" rIns="25400" tIns="12700" bIns="12700"/>
           <a:lstStyle/>
           <a:p>
             <a:pPr algn="ctr">
@@ -31418,7 +31052,7 @@
           </a:fontRef>
         </p:style>
         <p:txBody>
-          <a:bodyPr wrap="square" lIns="25400" tIns="12700" rIns="25400" bIns="12700" rtlCol="0" anchor="ctr"/>
+          <a:bodyPr rtlCol="0" anchor="ctr" wrap="square" lIns="25400" rIns="25400" tIns="12700" bIns="12700"/>
           <a:lstStyle/>
           <a:p>
             <a:pPr algn="ctr">
@@ -31479,7 +31113,7 @@
           </a:fontRef>
         </p:style>
         <p:txBody>
-          <a:bodyPr wrap="square" lIns="25400" tIns="12700" rIns="25400" bIns="12700" rtlCol="0" anchor="ctr"/>
+          <a:bodyPr rtlCol="0" anchor="ctr" wrap="square" lIns="25400" rIns="25400" tIns="12700" bIns="12700"/>
           <a:lstStyle/>
           <a:p>
             <a:pPr algn="ctr">

--- a/md/seminar/中間発表スライド_2026-08-10.pptx
+++ b/md/seminar/中間発表スライド_2026-08-10.pptx
@@ -8536,7 +8536,7 @@
                 <a:latin typeface="Meiryo"/>
                 <a:ea typeface="メイリオ"/>
               </a:rPr>
-              <a:t>通知層</a:t>
+              <a:t>通知層（車）</a:t>
             </a:r>
           </a:p>
           <a:p>
@@ -8559,7 +8559,7 @@
                 <a:latin typeface="Meiryo"/>
                 <a:ea typeface="メイリオ"/>
               </a:rPr>
-              <a:t>重大車への至近警告到達 </a:t>
+              <a:t>1.5m以内まで近づく車に至近警告が出た割合 </a:t>
             </a:r>
             <a:r>
               <a:rPr sz="1500" b="1">
@@ -8592,7 +8592,7 @@
                 <a:latin typeface="Meiryo"/>
                 <a:ea typeface="メイリオ"/>
               </a:rPr>
-              <a:t>安全車の抑制 </a:t>
+              <a:t>3.2mより遠い車を鳴らさなかった割合 </a:t>
             </a:r>
             <a:r>
               <a:rPr sz="1500" b="1">
@@ -8604,6 +8604,19 @@
               </a:rPr>
               <a:t>90.4%</a:t>
             </a:r>
+          </a:p>
+          <a:p>
+            <a:pPr algn="l">
+              <a:lnSpc>
+                <a:spcPct val="130000"/>
+              </a:lnSpc>
+              <a:spcBef>
+                <a:spcPts val="0"/>
+              </a:spcBef>
+              <a:spcAft>
+                <a:spcPts val="600"/>
+              </a:spcAft>
+            </a:pPr>
             <a:r>
               <a:rPr sz="1250" b="0">
                 <a:solidFill>
@@ -8612,7 +8625,7 @@
                 <a:latin typeface="Meiryo"/>
                 <a:ea typeface="メイリオ"/>
               </a:rPr>
-              <a:t>・誤警告 1.3%</a:t>
+              <a:t>安全な車への誤った至近警告 1.3%</a:t>
             </a:r>
           </a:p>
         </p:txBody>
@@ -8698,6 +8711,16 @@
                 <a:latin typeface="Meiryo"/>
                 <a:ea typeface="メイリオ"/>
               </a:rPr>
+              <a:t>1.5m以内まで近づく</a:t>
+            </a:r>
+            <a:r>
+              <a:rPr sz="1250" b="1">
+                <a:solidFill>
+                  <a:srgbClr val="16233A"/>
+                </a:solidFill>
+                <a:latin typeface="Meiryo"/>
+                <a:ea typeface="メイリオ"/>
+              </a:rPr>
               <a:t>キックボード</a:t>
             </a:r>
           </a:p>
@@ -8721,7 +8744,7 @@
                 <a:latin typeface="Meiryo"/>
                 <a:ea typeface="メイリオ"/>
               </a:rPr>
-              <a:t>至近警告到達 </a:t>
+              <a:t>への至近警告 </a:t>
             </a:r>
             <a:r>
               <a:rPr sz="1500" b="1">
@@ -8827,7 +8850,7 @@
                 <a:latin typeface="Meiryo"/>
                 <a:ea typeface="メイリオ"/>
               </a:rPr>
-              <a:t>の検出系を初実装</a:t>
+              <a:t>の検出系を実装</a:t>
             </a:r>
           </a:p>
           <a:p>
@@ -29797,7 +29820,7 @@
                 <a:latin typeface="Meiryo"/>
                 <a:ea typeface="メイリオ"/>
               </a:rPr>
-              <a:t>検証 — 学習に使っていないデータでの評価</a:t>
+              <a:t>検証 — 8クラスの検出・方向・距離</a:t>
             </a:r>
           </a:p>
         </p:txBody>
@@ -29810,8 +29833,8 @@
         </p:nvSpPr>
         <p:spPr>
           <a:xfrm>
-            <a:off x="685800" y="1270000"/>
-            <a:ext cx="10820400" cy="558800"/>
+            <a:off x="685800" y="1244600"/>
+            <a:ext cx="10820400" cy="381000"/>
           </a:xfrm>
           <a:prstGeom prst="rect">
             <a:avLst/>
@@ -29843,7 +29866,7 @@
                 <a:latin typeface="Meiryo"/>
                 <a:ea typeface="メイリオ"/>
               </a:rPr>
-              <a:t>評価の作法：合格基準を</a:t>
+              <a:t>評価データ：</a:t>
             </a:r>
             <a:r>
               <a:rPr sz="1350" b="1">
@@ -29853,7 +29876,7 @@
                 <a:latin typeface="Meiryo"/>
                 <a:ea typeface="メイリオ"/>
               </a:rPr>
-              <a:t>先に決め</a:t>
+              <a:t>学習に未使用の1,800クリップ</a:t>
             </a:r>
             <a:r>
               <a:rPr sz="1350" b="0">
@@ -29863,7 +29886,7 @@
                 <a:latin typeface="Meiryo"/>
                 <a:ea typeface="メイリオ"/>
               </a:rPr>
-              <a:t>、学習に未使用の評価セット</a:t>
+              <a:t>（合成・種類/方向/距離の正解つき）で</a:t>
             </a:r>
             <a:r>
               <a:rPr sz="1350" b="1">
@@ -29873,7 +29896,7 @@
                 <a:latin typeface="Meiryo"/>
                 <a:ea typeface="メイリオ"/>
               </a:rPr>
-              <a:t>1,800クリップ</a:t>
+              <a:t>1回だけ</a:t>
             </a:r>
             <a:r>
               <a:rPr sz="1350" b="0">
@@ -29883,27 +29906,7 @@
                 <a:latin typeface="Meiryo"/>
                 <a:ea typeface="メイリオ"/>
               </a:rPr>
-              <a:t>で</a:t>
-            </a:r>
-            <a:r>
-              <a:rPr sz="1350" b="1">
-                <a:solidFill>
-                  <a:srgbClr val="16233A"/>
-                </a:solidFill>
-                <a:latin typeface="Meiryo"/>
-                <a:ea typeface="メイリオ"/>
-              </a:rPr>
-              <a:t>1回だけ</a:t>
-            </a:r>
-            <a:r>
-              <a:rPr sz="1350" b="0">
-                <a:solidFill>
-                  <a:srgbClr val="3A4658"/>
-                </a:solidFill>
-                <a:latin typeface="Meiryo"/>
-                <a:ea typeface="メイリオ"/>
-              </a:rPr>
-              <a:t>評価（結果を見てから基準や評価を変えない）</a:t>
+              <a:t>評価</a:t>
             </a:r>
           </a:p>
         </p:txBody>
@@ -29917,8 +29920,8 @@
           <p:nvPr/>
         </p:nvGraphicFramePr>
         <p:xfrm>
-          <a:off x="685800" y="1905000"/>
-          <a:ext cx="10820400" cy="3429000"/>
+          <a:off x="685800" y="1676400"/>
+          <a:ext cx="7874000" cy="3708400"/>
         </p:xfrm>
         <a:graphic>
           <a:graphicData uri="http://schemas.openxmlformats.org/drawingml/2006/table">
@@ -29927,12 +29930,11 @@
                 <a:tableStyleId>{5C22544A-7EE6-4342-B048-85BDC9FD1C3A}</a:tableStyleId>
               </a:tblPr>
               <a:tblGrid>
-                <a:gridCol w="1397000"/>
-                <a:gridCol w="4064000"/>
-                <a:gridCol w="4064000"/>
-                <a:gridCol w="1295400"/>
+                <a:gridCol w="3556000"/>
+                <a:gridCol w="2286000"/>
+                <a:gridCol w="2032000"/>
               </a:tblGrid>
-              <a:tr h="571500">
+              <a:tr h="412044">
                 <a:tc>
                   <a:txBody>
                     <a:bodyPr wrap="square"/>
@@ -29947,23 +29949,87 @@
                         </a:spcAft>
                       </a:pPr>
                       <a:r>
-                        <a:rPr sz="1150" b="1">
+                        <a:rPr sz="1100" b="1">
                           <a:solidFill>
                             <a:srgbClr val="3A4658"/>
                           </a:solidFill>
                           <a:latin typeface="Meiryo"/>
                           <a:ea typeface="メイリオ"/>
                         </a:rPr>
-                        <a:t>項目</a:t>
+                        <a:t>クラス</a:t>
                       </a:r>
                     </a:p>
                   </a:txBody>
-                  <a:tcPr marT="50800" marB="50800">
+                  <a:tcPr marT="25400" marB="25400">
                     <a:solidFill>
                       <a:srgbClr val="EFEFEA"/>
                     </a:solidFill>
                   </a:tcPr>
                 </a:tc>
+                <a:tc>
+                  <a:txBody>
+                    <a:bodyPr wrap="square"/>
+                    <a:lstStyle/>
+                    <a:p>
+                      <a:pPr algn="r">
+                        <a:spcBef>
+                          <a:spcPts val="0"/>
+                        </a:spcBef>
+                        <a:spcAft>
+                          <a:spcPts val="0"/>
+                        </a:spcAft>
+                      </a:pPr>
+                      <a:r>
+                        <a:rPr sz="1100" b="1">
+                          <a:solidFill>
+                            <a:srgbClr val="3A4658"/>
+                          </a:solidFill>
+                          <a:latin typeface="Meiryo"/>
+                          <a:ea typeface="メイリオ"/>
+                        </a:rPr>
+                        <a:t>検出率（可聴フレーム）</a:t>
+                      </a:r>
+                    </a:p>
+                  </a:txBody>
+                  <a:tcPr marT="25400" marB="25400">
+                    <a:solidFill>
+                      <a:srgbClr val="EFEFEA"/>
+                    </a:solidFill>
+                  </a:tcPr>
+                </a:tc>
+                <a:tc>
+                  <a:txBody>
+                    <a:bodyPr wrap="square"/>
+                    <a:lstStyle/>
+                    <a:p>
+                      <a:pPr algn="r">
+                        <a:spcBef>
+                          <a:spcPts val="0"/>
+                        </a:spcBef>
+                        <a:spcAft>
+                          <a:spcPts val="0"/>
+                        </a:spcAft>
+                      </a:pPr>
+                      <a:r>
+                        <a:rPr sz="1100" b="1">
+                          <a:solidFill>
+                            <a:srgbClr val="3A4658"/>
+                          </a:solidFill>
+                          <a:latin typeface="Meiryo"/>
+                          <a:ea typeface="メイリオ"/>
+                        </a:rPr>
+                        <a:t>方向誤差（中央値）</a:t>
+                      </a:r>
+                    </a:p>
+                  </a:txBody>
+                  <a:tcPr marT="25400" marB="25400">
+                    <a:solidFill>
+                      <a:srgbClr val="EFEFEA"/>
+                    </a:solidFill>
+                  </a:tcPr>
+                </a:tc>
+              </a:tr>
+              <a:tr h="412044">
                 <a:tc>
                   <a:txBody>
                     <a:bodyPr wrap="square"/>
@@ -29978,23 +30044,87 @@
                         </a:spcAft>
                       </a:pPr>
                       <a:r>
-                        <a:rPr sz="1150" b="1">
+                        <a:rPr sz="1200" b="1">
+                          <a:solidFill>
+                            <a:srgbClr val="16233A"/>
+                          </a:solidFill>
+                          <a:latin typeface="Meiryo"/>
+                          <a:ea typeface="メイリオ"/>
+                        </a:rPr>
+                        <a:t>サイレン（救急・パト・消防）</a:t>
+                      </a:r>
+                    </a:p>
+                  </a:txBody>
+                  <a:tcPr marT="25400" marB="25400">
+                    <a:solidFill>
+                      <a:srgbClr val="FFFFFF"/>
+                    </a:solidFill>
+                  </a:tcPr>
+                </a:tc>
+                <a:tc>
+                  <a:txBody>
+                    <a:bodyPr wrap="square"/>
+                    <a:lstStyle/>
+                    <a:p>
+                      <a:pPr algn="r">
+                        <a:spcBef>
+                          <a:spcPts val="0"/>
+                        </a:spcBef>
+                        <a:spcAft>
+                          <a:spcPts val="0"/>
+                        </a:spcAft>
+                      </a:pPr>
+                      <a:r>
+                        <a:rPr sz="1200" b="0">
                           <a:solidFill>
                             <a:srgbClr val="3A4658"/>
                           </a:solidFill>
                           <a:latin typeface="Meiryo"/>
                           <a:ea typeface="メイリオ"/>
                         </a:rPr>
-                        <a:t>目標（事前に設定）</a:t>
+                        <a:t>99.5%</a:t>
                       </a:r>
                     </a:p>
                   </a:txBody>
-                  <a:tcPr marT="50800" marB="50800">
+                  <a:tcPr marT="25400" marB="25400">
                     <a:solidFill>
-                      <a:srgbClr val="EFEFEA"/>
+                      <a:srgbClr val="FFFFFF"/>
                     </a:solidFill>
                   </a:tcPr>
                 </a:tc>
+                <a:tc>
+                  <a:txBody>
+                    <a:bodyPr wrap="square"/>
+                    <a:lstStyle/>
+                    <a:p>
+                      <a:pPr algn="r">
+                        <a:spcBef>
+                          <a:spcPts val="0"/>
+                        </a:spcBef>
+                        <a:spcAft>
+                          <a:spcPts val="0"/>
+                        </a:spcAft>
+                      </a:pPr>
+                      <a:r>
+                        <a:rPr sz="1200" b="0">
+                          <a:solidFill>
+                            <a:srgbClr val="3A4658"/>
+                          </a:solidFill>
+                          <a:latin typeface="Meiryo"/>
+                          <a:ea typeface="メイリオ"/>
+                        </a:rPr>
+                        <a:t>3.2°</a:t>
+                      </a:r>
+                    </a:p>
+                  </a:txBody>
+                  <a:tcPr marT="25400" marB="25400">
+                    <a:solidFill>
+                      <a:srgbClr val="FFFFFF"/>
+                    </a:solidFill>
+                  </a:tcPr>
+                </a:tc>
+              </a:tr>
+              <a:tr h="412044">
                 <a:tc>
                   <a:txBody>
                     <a:bodyPr wrap="square"/>
@@ -30009,23 +30139,87 @@
                         </a:spcAft>
                       </a:pPr>
                       <a:r>
-                        <a:rPr sz="1150" b="1">
+                        <a:rPr sz="1200" b="1">
+                          <a:solidFill>
+                            <a:srgbClr val="16233A"/>
+                          </a:solidFill>
+                          <a:latin typeface="Meiryo"/>
+                          <a:ea typeface="メイリオ"/>
+                        </a:rPr>
+                        <a:t>クラクション</a:t>
+                      </a:r>
+                    </a:p>
+                  </a:txBody>
+                  <a:tcPr marT="25400" marB="25400">
+                    <a:solidFill>
+                      <a:srgbClr val="FFFFFF"/>
+                    </a:solidFill>
+                  </a:tcPr>
+                </a:tc>
+                <a:tc>
+                  <a:txBody>
+                    <a:bodyPr wrap="square"/>
+                    <a:lstStyle/>
+                    <a:p>
+                      <a:pPr algn="r">
+                        <a:spcBef>
+                          <a:spcPts val="0"/>
+                        </a:spcBef>
+                        <a:spcAft>
+                          <a:spcPts val="0"/>
+                        </a:spcAft>
+                      </a:pPr>
+                      <a:r>
+                        <a:rPr sz="1200" b="0">
                           <a:solidFill>
                             <a:srgbClr val="3A4658"/>
                           </a:solidFill>
                           <a:latin typeface="Meiryo"/>
                           <a:ea typeface="メイリオ"/>
                         </a:rPr>
-                        <a:t>結果</a:t>
+                        <a:t>99.2%</a:t>
                       </a:r>
                     </a:p>
                   </a:txBody>
-                  <a:tcPr marT="50800" marB="50800">
+                  <a:tcPr marT="25400" marB="25400">
                     <a:solidFill>
-                      <a:srgbClr val="EFEFEA"/>
+                      <a:srgbClr val="FFFFFF"/>
                     </a:solidFill>
                   </a:tcPr>
                 </a:tc>
+                <a:tc>
+                  <a:txBody>
+                    <a:bodyPr wrap="square"/>
+                    <a:lstStyle/>
+                    <a:p>
+                      <a:pPr algn="r">
+                        <a:spcBef>
+                          <a:spcPts val="0"/>
+                        </a:spcBef>
+                        <a:spcAft>
+                          <a:spcPts val="0"/>
+                        </a:spcAft>
+                      </a:pPr>
+                      <a:r>
+                        <a:rPr sz="1200" b="0">
+                          <a:solidFill>
+                            <a:srgbClr val="3A4658"/>
+                          </a:solidFill>
+                          <a:latin typeface="Meiryo"/>
+                          <a:ea typeface="メイリオ"/>
+                        </a:rPr>
+                        <a:t>2.2°</a:t>
+                      </a:r>
+                    </a:p>
+                  </a:txBody>
+                  <a:tcPr marT="25400" marB="25400">
+                    <a:solidFill>
+                      <a:srgbClr val="FFFFFF"/>
+                    </a:solidFill>
+                  </a:tcPr>
+                </a:tc>
+              </a:tr>
+              <a:tr h="412044">
                 <a:tc>
                   <a:txBody>
                     <a:bodyPr wrap="square"/>
@@ -30040,25 +30234,87 @@
                         </a:spcAft>
                       </a:pPr>
                       <a:r>
-                        <a:rPr sz="1150" b="1">
+                        <a:rPr sz="1200" b="1">
+                          <a:solidFill>
+                            <a:srgbClr val="16233A"/>
+                          </a:solidFill>
+                          <a:latin typeface="Meiryo"/>
+                          <a:ea typeface="メイリオ"/>
+                        </a:rPr>
+                        <a:t>バック音</a:t>
+                      </a:r>
+                    </a:p>
+                  </a:txBody>
+                  <a:tcPr marT="25400" marB="25400">
+                    <a:solidFill>
+                      <a:srgbClr val="FFFFFF"/>
+                    </a:solidFill>
+                  </a:tcPr>
+                </a:tc>
+                <a:tc>
+                  <a:txBody>
+                    <a:bodyPr wrap="square"/>
+                    <a:lstStyle/>
+                    <a:p>
+                      <a:pPr algn="r">
+                        <a:spcBef>
+                          <a:spcPts val="0"/>
+                        </a:spcBef>
+                        <a:spcAft>
+                          <a:spcPts val="0"/>
+                        </a:spcAft>
+                      </a:pPr>
+                      <a:r>
+                        <a:rPr sz="1200" b="0">
                           <a:solidFill>
                             <a:srgbClr val="3A4658"/>
                           </a:solidFill>
                           <a:latin typeface="Meiryo"/>
                           <a:ea typeface="メイリオ"/>
                         </a:rPr>
-                        <a:t>判定</a:t>
+                        <a:t>97.2%</a:t>
                       </a:r>
                     </a:p>
                   </a:txBody>
-                  <a:tcPr marT="50800" marB="50800">
+                  <a:tcPr marT="25400" marB="25400">
                     <a:solidFill>
-                      <a:srgbClr val="EFEFEA"/>
+                      <a:srgbClr val="FFFFFF"/>
+                    </a:solidFill>
+                  </a:tcPr>
+                </a:tc>
+                <a:tc>
+                  <a:txBody>
+                    <a:bodyPr wrap="square"/>
+                    <a:lstStyle/>
+                    <a:p>
+                      <a:pPr algn="r">
+                        <a:spcBef>
+                          <a:spcPts val="0"/>
+                        </a:spcBef>
+                        <a:spcAft>
+                          <a:spcPts val="0"/>
+                        </a:spcAft>
+                      </a:pPr>
+                      <a:r>
+                        <a:rPr sz="1200" b="0">
+                          <a:solidFill>
+                            <a:srgbClr val="3A4658"/>
+                          </a:solidFill>
+                          <a:latin typeface="Meiryo"/>
+                          <a:ea typeface="メイリオ"/>
+                        </a:rPr>
+                        <a:t>5.1°</a:t>
+                      </a:r>
+                    </a:p>
+                  </a:txBody>
+                  <a:tcPr marT="25400" marB="25400">
+                    <a:solidFill>
+                      <a:srgbClr val="FFFFFF"/>
                     </a:solidFill>
                   </a:tcPr>
                 </a:tc>
               </a:tr>
-              <a:tr h="571500">
+              <a:tr h="412044">
                 <a:tc>
                   <a:txBody>
                     <a:bodyPr wrap="square"/>
@@ -30073,23 +30329,87 @@
                         </a:spcAft>
                       </a:pPr>
                       <a:r>
-                        <a:rPr sz="1250" b="1">
+                        <a:rPr sz="1200" b="1">
                           <a:solidFill>
                             <a:srgbClr val="16233A"/>
                           </a:solidFill>
                           <a:latin typeface="Meiryo"/>
                           <a:ea typeface="メイリオ"/>
                         </a:rPr>
-                        <a:t>車の検出</a:t>
+                        <a:t>自転車ベル</a:t>
                       </a:r>
                     </a:p>
                   </a:txBody>
-                  <a:tcPr marT="50800" marB="50800">
+                  <a:tcPr marT="25400" marB="25400">
                     <a:solidFill>
                       <a:srgbClr val="FFFFFF"/>
                     </a:solidFill>
                   </a:tcPr>
                 </a:tc>
+                <a:tc>
+                  <a:txBody>
+                    <a:bodyPr wrap="square"/>
+                    <a:lstStyle/>
+                    <a:p>
+                      <a:pPr algn="r">
+                        <a:spcBef>
+                          <a:spcPts val="0"/>
+                        </a:spcBef>
+                        <a:spcAft>
+                          <a:spcPts val="0"/>
+                        </a:spcAft>
+                      </a:pPr>
+                      <a:r>
+                        <a:rPr sz="1200" b="0">
+                          <a:solidFill>
+                            <a:srgbClr val="3A4658"/>
+                          </a:solidFill>
+                          <a:latin typeface="Meiryo"/>
+                          <a:ea typeface="メイリオ"/>
+                        </a:rPr>
+                        <a:t>97.6%</a:t>
+                      </a:r>
+                    </a:p>
+                  </a:txBody>
+                  <a:tcPr marT="25400" marB="25400">
+                    <a:solidFill>
+                      <a:srgbClr val="FFFFFF"/>
+                    </a:solidFill>
+                  </a:tcPr>
+                </a:tc>
+                <a:tc>
+                  <a:txBody>
+                    <a:bodyPr wrap="square"/>
+                    <a:lstStyle/>
+                    <a:p>
+                      <a:pPr algn="r">
+                        <a:spcBef>
+                          <a:spcPts val="0"/>
+                        </a:spcBef>
+                        <a:spcAft>
+                          <a:spcPts val="0"/>
+                        </a:spcAft>
+                      </a:pPr>
+                      <a:r>
+                        <a:rPr sz="1200" b="0">
+                          <a:solidFill>
+                            <a:srgbClr val="3A4658"/>
+                          </a:solidFill>
+                          <a:latin typeface="Meiryo"/>
+                          <a:ea typeface="メイリオ"/>
+                        </a:rPr>
+                        <a:t>4.1°</a:t>
+                      </a:r>
+                    </a:p>
+                  </a:txBody>
+                  <a:tcPr marT="25400" marB="25400">
+                    <a:solidFill>
+                      <a:srgbClr val="FFFFFF"/>
+                    </a:solidFill>
+                  </a:tcPr>
+                </a:tc>
+              </a:tr>
+              <a:tr h="412044">
                 <a:tc>
                   <a:txBody>
                     <a:bodyPr wrap="square"/>
@@ -30104,23 +30424,87 @@
                         </a:spcAft>
                       </a:pPr>
                       <a:r>
-                        <a:rPr sz="1250" b="0">
+                        <a:rPr sz="1200" b="1">
+                          <a:solidFill>
+                            <a:srgbClr val="16233A"/>
+                          </a:solidFill>
+                          <a:latin typeface="Meiryo"/>
+                          <a:ea typeface="メイリオ"/>
+                        </a:rPr>
+                        <a:t>車（EV・大型含む）</a:t>
+                      </a:r>
+                    </a:p>
+                  </a:txBody>
+                  <a:tcPr marT="25400" marB="25400">
+                    <a:solidFill>
+                      <a:srgbClr val="FFFFFF"/>
+                    </a:solidFill>
+                  </a:tcPr>
+                </a:tc>
+                <a:tc>
+                  <a:txBody>
+                    <a:bodyPr wrap="square"/>
+                    <a:lstStyle/>
+                    <a:p>
+                      <a:pPr algn="r">
+                        <a:spcBef>
+                          <a:spcPts val="0"/>
+                        </a:spcBef>
+                        <a:spcAft>
+                          <a:spcPts val="0"/>
+                        </a:spcAft>
+                      </a:pPr>
+                      <a:r>
+                        <a:rPr sz="1200" b="0">
                           <a:solidFill>
                             <a:srgbClr val="3A4658"/>
                           </a:solidFill>
                           <a:latin typeface="Meiryo"/>
                           <a:ea typeface="メイリオ"/>
                         </a:rPr>
-                        <a:t>検出率 ≥99%・方向誤差 ≤3.0°</a:t>
+                        <a:t>99.4%</a:t>
                       </a:r>
                     </a:p>
                   </a:txBody>
-                  <a:tcPr marT="50800" marB="50800">
+                  <a:tcPr marT="25400" marB="25400">
                     <a:solidFill>
                       <a:srgbClr val="FFFFFF"/>
                     </a:solidFill>
                   </a:tcPr>
                 </a:tc>
+                <a:tc>
+                  <a:txBody>
+                    <a:bodyPr wrap="square"/>
+                    <a:lstStyle/>
+                    <a:p>
+                      <a:pPr algn="r">
+                        <a:spcBef>
+                          <a:spcPts val="0"/>
+                        </a:spcBef>
+                        <a:spcAft>
+                          <a:spcPts val="0"/>
+                        </a:spcAft>
+                      </a:pPr>
+                      <a:r>
+                        <a:rPr sz="1200" b="0">
+                          <a:solidFill>
+                            <a:srgbClr val="3A4658"/>
+                          </a:solidFill>
+                          <a:latin typeface="Meiryo"/>
+                          <a:ea typeface="メイリオ"/>
+                        </a:rPr>
+                        <a:t>2.0°</a:t>
+                      </a:r>
+                    </a:p>
+                  </a:txBody>
+                  <a:tcPr marT="25400" marB="25400">
+                    <a:solidFill>
+                      <a:srgbClr val="FFFFFF"/>
+                    </a:solidFill>
+                  </a:tcPr>
+                </a:tc>
+              </a:tr>
+              <a:tr h="412044">
                 <a:tc>
                   <a:txBody>
                     <a:bodyPr wrap="square"/>
@@ -30135,18 +30519,18 @@
                         </a:spcAft>
                       </a:pPr>
                       <a:r>
-                        <a:rPr sz="1250" b="0">
+                        <a:rPr sz="1200" b="1">
                           <a:solidFill>
-                            <a:srgbClr val="3A4658"/>
+                            <a:srgbClr val="16233A"/>
                           </a:solidFill>
                           <a:latin typeface="Meiryo"/>
                           <a:ea typeface="メイリオ"/>
                         </a:rPr>
-                        <a:t>99.4% ／ 2.0°</a:t>
+                        <a:t>踏切・列車</a:t>
                       </a:r>
                     </a:p>
                   </a:txBody>
-                  <a:tcPr marT="50800" marB="50800">
+                  <a:tcPr marT="25400" marB="25400">
                     <a:solidFill>
                       <a:srgbClr val="FFFFFF"/>
                     </a:solidFill>
@@ -30157,7 +30541,7 @@
                     <a:bodyPr wrap="square"/>
                     <a:lstStyle/>
                     <a:p>
-                      <a:pPr algn="ctr">
+                      <a:pPr algn="r">
                         <a:spcBef>
                           <a:spcPts val="0"/>
                         </a:spcBef>
@@ -30166,25 +30550,56 @@
                         </a:spcAft>
                       </a:pPr>
                       <a:r>
-                        <a:rPr sz="1250" b="1">
+                        <a:rPr sz="1200" b="0">
                           <a:solidFill>
-                            <a:srgbClr val="2F7D6D"/>
+                            <a:srgbClr val="3A4658"/>
                           </a:solidFill>
                           <a:latin typeface="Meiryo"/>
                           <a:ea typeface="メイリオ"/>
                         </a:rPr>
-                        <a:t>達成</a:t>
+                        <a:t>100.0%</a:t>
                       </a:r>
                     </a:p>
                   </a:txBody>
-                  <a:tcPr marT="50800" marB="50800">
+                  <a:tcPr marT="25400" marB="25400">
+                    <a:solidFill>
+                      <a:srgbClr val="FFFFFF"/>
+                    </a:solidFill>
+                  </a:tcPr>
+                </a:tc>
+                <a:tc>
+                  <a:txBody>
+                    <a:bodyPr wrap="square"/>
+                    <a:lstStyle/>
+                    <a:p>
+                      <a:pPr algn="r">
+                        <a:spcBef>
+                          <a:spcPts val="0"/>
+                        </a:spcBef>
+                        <a:spcAft>
+                          <a:spcPts val="0"/>
+                        </a:spcAft>
+                      </a:pPr>
+                      <a:r>
+                        <a:rPr sz="1200" b="0">
+                          <a:solidFill>
+                            <a:srgbClr val="3A4658"/>
+                          </a:solidFill>
+                          <a:latin typeface="Meiryo"/>
+                          <a:ea typeface="メイリオ"/>
+                        </a:rPr>
+                        <a:t>3.5°</a:t>
+                      </a:r>
+                    </a:p>
+                  </a:txBody>
+                  <a:tcPr marT="25400" marB="25400">
                     <a:solidFill>
                       <a:srgbClr val="FFFFFF"/>
                     </a:solidFill>
                   </a:tcPr>
                 </a:tc>
               </a:tr>
-              <a:tr h="571500">
+              <a:tr h="412044">
                 <a:tc>
                   <a:txBody>
                     <a:bodyPr wrap="square"/>
@@ -30199,23 +30614,87 @@
                         </a:spcAft>
                       </a:pPr>
                       <a:r>
-                        <a:rPr sz="1250" b="1">
+                        <a:rPr sz="1200" b="1">
                           <a:solidFill>
                             <a:srgbClr val="16233A"/>
                           </a:solidFill>
                           <a:latin typeface="Meiryo"/>
                           <a:ea typeface="メイリオ"/>
                         </a:rPr>
-                        <a:t>静音EV</a:t>
+                        <a:t>キックボード</a:t>
                       </a:r>
                     </a:p>
                   </a:txBody>
-                  <a:tcPr marT="50800" marB="50800">
+                  <a:tcPr marT="25400" marB="25400">
                     <a:solidFill>
                       <a:srgbClr val="FFFFFF"/>
                     </a:solidFill>
                   </a:tcPr>
                 </a:tc>
+                <a:tc>
+                  <a:txBody>
+                    <a:bodyPr wrap="square"/>
+                    <a:lstStyle/>
+                    <a:p>
+                      <a:pPr algn="r">
+                        <a:spcBef>
+                          <a:spcPts val="0"/>
+                        </a:spcBef>
+                        <a:spcAft>
+                          <a:spcPts val="0"/>
+                        </a:spcAft>
+                      </a:pPr>
+                      <a:r>
+                        <a:rPr sz="1200" b="0">
+                          <a:solidFill>
+                            <a:srgbClr val="3A4658"/>
+                          </a:solidFill>
+                          <a:latin typeface="Meiryo"/>
+                          <a:ea typeface="メイリオ"/>
+                        </a:rPr>
+                        <a:t>97.3%</a:t>
+                      </a:r>
+                    </a:p>
+                  </a:txBody>
+                  <a:tcPr marT="25400" marB="25400">
+                    <a:solidFill>
+                      <a:srgbClr val="FFFFFF"/>
+                    </a:solidFill>
+                  </a:tcPr>
+                </a:tc>
+                <a:tc>
+                  <a:txBody>
+                    <a:bodyPr wrap="square"/>
+                    <a:lstStyle/>
+                    <a:p>
+                      <a:pPr algn="r">
+                        <a:spcBef>
+                          <a:spcPts val="0"/>
+                        </a:spcBef>
+                        <a:spcAft>
+                          <a:spcPts val="0"/>
+                        </a:spcAft>
+                      </a:pPr>
+                      <a:r>
+                        <a:rPr sz="1200" b="0">
+                          <a:solidFill>
+                            <a:srgbClr val="3A4658"/>
+                          </a:solidFill>
+                          <a:latin typeface="Meiryo"/>
+                          <a:ea typeface="メイリオ"/>
+                        </a:rPr>
+                        <a:t>1.0°</a:t>
+                      </a:r>
+                    </a:p>
+                  </a:txBody>
+                  <a:tcPr marT="25400" marB="25400">
+                    <a:solidFill>
+                      <a:srgbClr val="FFFFFF"/>
+                    </a:solidFill>
+                  </a:tcPr>
+                </a:tc>
+              </a:tr>
+              <a:tr h="412048">
                 <a:tc>
                   <a:txBody>
                     <a:bodyPr wrap="square"/>
@@ -30230,18 +30709,18 @@
                         </a:spcAft>
                       </a:pPr>
                       <a:r>
-                        <a:rPr sz="1250" b="0">
+                        <a:rPr sz="1200" b="1">
                           <a:solidFill>
-                            <a:srgbClr val="3A4658"/>
+                            <a:srgbClr val="16233A"/>
                           </a:solidFill>
                           <a:latin typeface="Meiryo"/>
                           <a:ea typeface="メイリオ"/>
                         </a:rPr>
-                        <a:t>単独EVの検出率 ≥95%</a:t>
+                        <a:t>バイク</a:t>
                       </a:r>
                     </a:p>
                   </a:txBody>
-                  <a:tcPr marT="50800" marB="50800">
+                  <a:tcPr marT="25400" marB="25400">
                     <a:solidFill>
                       <a:srgbClr val="FFFFFF"/>
                     </a:solidFill>
@@ -30252,7 +30731,7 @@
                     <a:bodyPr wrap="square"/>
                     <a:lstStyle/>
                     <a:p>
-                      <a:pPr algn="l">
+                      <a:pPr algn="r">
                         <a:spcBef>
                           <a:spcPts val="0"/>
                         </a:spcBef>
@@ -30261,18 +30740,18 @@
                         </a:spcAft>
                       </a:pPr>
                       <a:r>
-                        <a:rPr sz="1250" b="0">
+                        <a:rPr sz="1200" b="0">
                           <a:solidFill>
                             <a:srgbClr val="3A4658"/>
                           </a:solidFill>
                           <a:latin typeface="Meiryo"/>
                           <a:ea typeface="メイリオ"/>
                         </a:rPr>
-                        <a:t>99.0%</a:t>
+                        <a:t>99.8%</a:t>
                       </a:r>
                     </a:p>
                   </a:txBody>
-                  <a:tcPr marT="50800" marB="50800">
+                  <a:tcPr marT="25400" marB="25400">
                     <a:solidFill>
                       <a:srgbClr val="FFFFFF"/>
                     </a:solidFill>
@@ -30283,7 +30762,7 @@
                     <a:bodyPr wrap="square"/>
                     <a:lstStyle/>
                     <a:p>
-                      <a:pPr algn="ctr">
+                      <a:pPr algn="r">
                         <a:spcBef>
                           <a:spcPts val="0"/>
                         </a:spcBef>
@@ -30292,396 +30771,18 @@
                         </a:spcAft>
                       </a:pPr>
                       <a:r>
-                        <a:rPr sz="1250" b="1">
-                          <a:solidFill>
-                            <a:srgbClr val="2F7D6D"/>
-                          </a:solidFill>
-                          <a:latin typeface="Meiryo"/>
-                          <a:ea typeface="メイリオ"/>
-                        </a:rPr>
-                        <a:t>達成</a:t>
-                      </a:r>
-                    </a:p>
-                  </a:txBody>
-                  <a:tcPr marT="50800" marB="50800">
-                    <a:solidFill>
-                      <a:srgbClr val="FFFFFF"/>
-                    </a:solidFill>
-                  </a:tcPr>
-                </a:tc>
-              </a:tr>
-              <a:tr h="571500">
-                <a:tc>
-                  <a:txBody>
-                    <a:bodyPr wrap="square"/>
-                    <a:lstStyle/>
-                    <a:p>
-                      <a:pPr algn="l">
-                        <a:spcBef>
-                          <a:spcPts val="0"/>
-                        </a:spcBef>
-                        <a:spcAft>
-                          <a:spcPts val="0"/>
-                        </a:spcAft>
-                      </a:pPr>
-                      <a:r>
-                        <a:rPr sz="1250" b="1">
-                          <a:solidFill>
-                            <a:srgbClr val="16233A"/>
-                          </a:solidFill>
-                          <a:latin typeface="Meiryo"/>
-                          <a:ea typeface="メイリオ"/>
-                        </a:rPr>
-                        <a:t>新クラス</a:t>
-                      </a:r>
-                    </a:p>
-                  </a:txBody>
-                  <a:tcPr marT="50800" marB="50800">
-                    <a:solidFill>
-                      <a:srgbClr val="FFFFFF"/>
-                    </a:solidFill>
-                  </a:tcPr>
-                </a:tc>
-                <a:tc>
-                  <a:txBody>
-                    <a:bodyPr wrap="square"/>
-                    <a:lstStyle/>
-                    <a:p>
-                      <a:pPr algn="l">
-                        <a:spcBef>
-                          <a:spcPts val="0"/>
-                        </a:spcBef>
-                        <a:spcAft>
-                          <a:spcPts val="0"/>
-                        </a:spcAft>
-                      </a:pPr>
-                      <a:r>
-                        <a:rPr sz="1250" b="0">
+                        <a:rPr sz="1200" b="0">
                           <a:solidFill>
                             <a:srgbClr val="3A4658"/>
                           </a:solidFill>
                           <a:latin typeface="Meiryo"/>
                           <a:ea typeface="メイリオ"/>
                         </a:rPr>
-                        <a:t>バイク≥90／踏切列車≥99／キック≥60</a:t>
+                        <a:t>1.0°</a:t>
                       </a:r>
                     </a:p>
                   </a:txBody>
-                  <a:tcPr marT="50800" marB="50800">
-                    <a:solidFill>
-                      <a:srgbClr val="FFFFFF"/>
-                    </a:solidFill>
-                  </a:tcPr>
-                </a:tc>
-                <a:tc>
-                  <a:txBody>
-                    <a:bodyPr wrap="square"/>
-                    <a:lstStyle/>
-                    <a:p>
-                      <a:pPr algn="l">
-                        <a:spcBef>
-                          <a:spcPts val="0"/>
-                        </a:spcBef>
-                        <a:spcAft>
-                          <a:spcPts val="0"/>
-                        </a:spcAft>
-                      </a:pPr>
-                      <a:r>
-                        <a:rPr sz="1250" b="0">
-                          <a:solidFill>
-                            <a:srgbClr val="3A4658"/>
-                          </a:solidFill>
-                          <a:latin typeface="Meiryo"/>
-                          <a:ea typeface="メイリオ"/>
-                        </a:rPr>
-                        <a:t>99.8 ／ 100.0 ／ 97.3%</a:t>
-                      </a:r>
-                    </a:p>
-                  </a:txBody>
-                  <a:tcPr marT="50800" marB="50800">
-                    <a:solidFill>
-                      <a:srgbClr val="FFFFFF"/>
-                    </a:solidFill>
-                  </a:tcPr>
-                </a:tc>
-                <a:tc>
-                  <a:txBody>
-                    <a:bodyPr wrap="square"/>
-                    <a:lstStyle/>
-                    <a:p>
-                      <a:pPr algn="ctr">
-                        <a:spcBef>
-                          <a:spcPts val="0"/>
-                        </a:spcBef>
-                        <a:spcAft>
-                          <a:spcPts val="0"/>
-                        </a:spcAft>
-                      </a:pPr>
-                      <a:r>
-                        <a:rPr sz="1250" b="1">
-                          <a:solidFill>
-                            <a:srgbClr val="2F7D6D"/>
-                          </a:solidFill>
-                          <a:latin typeface="Meiryo"/>
-                          <a:ea typeface="メイリオ"/>
-                        </a:rPr>
-                        <a:t>達成</a:t>
-                      </a:r>
-                    </a:p>
-                  </a:txBody>
-                  <a:tcPr marT="50800" marB="50800">
-                    <a:solidFill>
-                      <a:srgbClr val="FFFFFF"/>
-                    </a:solidFill>
-                  </a:tcPr>
-                </a:tc>
-              </a:tr>
-              <a:tr h="571500">
-                <a:tc>
-                  <a:txBody>
-                    <a:bodyPr wrap="square"/>
-                    <a:lstStyle/>
-                    <a:p>
-                      <a:pPr algn="l">
-                        <a:spcBef>
-                          <a:spcPts val="0"/>
-                        </a:spcBef>
-                        <a:spcAft>
-                          <a:spcPts val="0"/>
-                        </a:spcAft>
-                      </a:pPr>
-                      <a:r>
-                        <a:rPr sz="1250" b="1">
-                          <a:solidFill>
-                            <a:srgbClr val="16233A"/>
-                          </a:solidFill>
-                          <a:latin typeface="Meiryo"/>
-                          <a:ea typeface="メイリオ"/>
-                        </a:rPr>
-                        <a:t>距離推定</a:t>
-                      </a:r>
-                    </a:p>
-                  </a:txBody>
-                  <a:tcPr marT="50800" marB="50800">
-                    <a:solidFill>
-                      <a:srgbClr val="FFFFFF"/>
-                    </a:solidFill>
-                  </a:tcPr>
-                </a:tc>
-                <a:tc>
-                  <a:txBody>
-                    <a:bodyPr wrap="square"/>
-                    <a:lstStyle/>
-                    <a:p>
-                      <a:pPr algn="l">
-                        <a:spcBef>
-                          <a:spcPts val="0"/>
-                        </a:spcBef>
-                        <a:spcAft>
-                          <a:spcPts val="0"/>
-                        </a:spcAft>
-                      </a:pPr>
-                      <a:r>
-                        <a:rPr sz="1250" b="0">
-                          <a:solidFill>
-                            <a:srgbClr val="3A4658"/>
-                          </a:solidFill>
-                          <a:latin typeface="Meiryo"/>
-                          <a:ea typeface="メイリオ"/>
-                        </a:rPr>
-                        <a:t>至近の中央誤差 ≤0.30m・重大判定 ≥68%</a:t>
-                      </a:r>
-                    </a:p>
-                  </a:txBody>
-                  <a:tcPr marT="50800" marB="50800">
-                    <a:solidFill>
-                      <a:srgbClr val="FFFFFF"/>
-                    </a:solidFill>
-                  </a:tcPr>
-                </a:tc>
-                <a:tc>
-                  <a:txBody>
-                    <a:bodyPr wrap="square"/>
-                    <a:lstStyle/>
-                    <a:p>
-                      <a:pPr algn="l">
-                        <a:spcBef>
-                          <a:spcPts val="0"/>
-                        </a:spcBef>
-                        <a:spcAft>
-                          <a:spcPts val="0"/>
-                        </a:spcAft>
-                      </a:pPr>
-                      <a:r>
-                        <a:rPr sz="1250" b="0">
-                          <a:solidFill>
-                            <a:srgbClr val="3A4658"/>
-                          </a:solidFill>
-                          <a:latin typeface="Meiryo"/>
-                          <a:ea typeface="メイリオ"/>
-                        </a:rPr>
-                        <a:t>0.21m ／ 69.0%</a:t>
-                      </a:r>
-                    </a:p>
-                  </a:txBody>
-                  <a:tcPr marT="50800" marB="50800">
-                    <a:solidFill>
-                      <a:srgbClr val="FFFFFF"/>
-                    </a:solidFill>
-                  </a:tcPr>
-                </a:tc>
-                <a:tc>
-                  <a:txBody>
-                    <a:bodyPr wrap="square"/>
-                    <a:lstStyle/>
-                    <a:p>
-                      <a:pPr algn="ctr">
-                        <a:spcBef>
-                          <a:spcPts val="0"/>
-                        </a:spcBef>
-                        <a:spcAft>
-                          <a:spcPts val="0"/>
-                        </a:spcAft>
-                      </a:pPr>
-                      <a:r>
-                        <a:rPr sz="1250" b="1">
-                          <a:solidFill>
-                            <a:srgbClr val="2F7D6D"/>
-                          </a:solidFill>
-                          <a:latin typeface="Meiryo"/>
-                          <a:ea typeface="メイリオ"/>
-                        </a:rPr>
-                        <a:t>達成</a:t>
-                      </a:r>
-                    </a:p>
-                  </a:txBody>
-                  <a:tcPr marT="50800" marB="50800">
-                    <a:solidFill>
-                      <a:srgbClr val="FFFFFF"/>
-                    </a:solidFill>
-                  </a:tcPr>
-                </a:tc>
-              </a:tr>
-              <a:tr h="571500">
-                <a:tc>
-                  <a:txBody>
-                    <a:bodyPr wrap="square"/>
-                    <a:lstStyle/>
-                    <a:p>
-                      <a:pPr algn="l">
-                        <a:spcBef>
-                          <a:spcPts val="0"/>
-                        </a:spcBef>
-                        <a:spcAft>
-                          <a:spcPts val="0"/>
-                        </a:spcAft>
-                      </a:pPr>
-                      <a:r>
-                        <a:rPr sz="1250" b="1">
-                          <a:solidFill>
-                            <a:srgbClr val="16233A"/>
-                          </a:solidFill>
-                          <a:latin typeface="Meiryo"/>
-                          <a:ea typeface="メイリオ"/>
-                        </a:rPr>
-                        <a:t>総合スコア</a:t>
-                      </a:r>
-                    </a:p>
-                  </a:txBody>
-                  <a:tcPr marT="50800" marB="50800">
-                    <a:solidFill>
-                      <a:srgbClr val="FFFFFF"/>
-                    </a:solidFill>
-                  </a:tcPr>
-                </a:tc>
-                <a:tc>
-                  <a:txBody>
-                    <a:bodyPr wrap="square"/>
-                    <a:lstStyle/>
-                    <a:p>
-                      <a:pPr algn="l">
-                        <a:spcBef>
-                          <a:spcPts val="0"/>
-                        </a:spcBef>
-                        <a:spcAft>
-                          <a:spcPts val="0"/>
-                        </a:spcAft>
-                      </a:pPr>
-                      <a:r>
-                        <a:rPr sz="1250" b="0">
-                          <a:solidFill>
-                            <a:srgbClr val="3A4658"/>
-                          </a:solidFill>
-                          <a:latin typeface="Meiryo"/>
-                          <a:ea typeface="メイリオ"/>
-                        </a:rPr>
-                        <a:t>SELDスコア ≤0.085</a:t>
-                      </a:r>
-                    </a:p>
-                  </a:txBody>
-                  <a:tcPr marT="50800" marB="50800">
-                    <a:solidFill>
-                      <a:srgbClr val="FFFFFF"/>
-                    </a:solidFill>
-                  </a:tcPr>
-                </a:tc>
-                <a:tc>
-                  <a:txBody>
-                    <a:bodyPr wrap="square"/>
-                    <a:lstStyle/>
-                    <a:p>
-                      <a:pPr algn="l">
-                        <a:spcBef>
-                          <a:spcPts val="0"/>
-                        </a:spcBef>
-                        <a:spcAft>
-                          <a:spcPts val="0"/>
-                        </a:spcAft>
-                      </a:pPr>
-                      <a:r>
-                        <a:rPr sz="1250" b="0">
-                          <a:solidFill>
-                            <a:srgbClr val="3A4658"/>
-                          </a:solidFill>
-                          <a:latin typeface="Meiryo"/>
-                          <a:ea typeface="メイリオ"/>
-                        </a:rPr>
-                        <a:t>0.087</a:t>
-                      </a:r>
-                    </a:p>
-                  </a:txBody>
-                  <a:tcPr marT="50800" marB="50800">
-                    <a:solidFill>
-                      <a:srgbClr val="FFFFFF"/>
-                    </a:solidFill>
-                  </a:tcPr>
-                </a:tc>
-                <a:tc>
-                  <a:txBody>
-                    <a:bodyPr wrap="square"/>
-                    <a:lstStyle/>
-                    <a:p>
-                      <a:pPr algn="ctr">
-                        <a:spcBef>
-                          <a:spcPts val="0"/>
-                        </a:spcBef>
-                        <a:spcAft>
-                          <a:spcPts val="0"/>
-                        </a:spcAft>
-                      </a:pPr>
-                      <a:r>
-                        <a:rPr sz="1250" b="1">
-                          <a:solidFill>
-                            <a:srgbClr val="C4432B"/>
-                          </a:solidFill>
-                          <a:latin typeface="Meiryo"/>
-                          <a:ea typeface="メイリオ"/>
-                        </a:rPr>
-                        <a:t>未達</a:t>
-                      </a:r>
-                    </a:p>
-                  </a:txBody>
-                  <a:tcPr marT="50800" marB="50800">
+                  <a:tcPr marT="25400" marB="25400">
                     <a:solidFill>
                       <a:srgbClr val="FFFFFF"/>
                     </a:solidFill>
@@ -30694,61 +30795,21 @@
       </p:graphicFrame>
       <p:sp>
         <p:nvSpPr>
-          <p:cNvPr id="7" name="TextBox 6"/>
-          <p:cNvSpPr txBox="1"/>
-          <p:nvPr/>
-        </p:nvSpPr>
-        <p:spPr>
-          <a:xfrm>
-            <a:off x="685800" y="5511800"/>
-            <a:ext cx="10820400" cy="381000"/>
+          <p:cNvPr id="7" name="Rectangle 6"/>
+          <p:cNvSpPr/>
+          <p:nvPr/>
+        </p:nvSpPr>
+        <p:spPr>
+          <a:xfrm>
+            <a:off x="8890000" y="1676400"/>
+            <a:ext cx="2616200" cy="3708400"/>
           </a:xfrm>
           <a:prstGeom prst="rect">
             <a:avLst/>
           </a:prstGeom>
-          <a:noFill/>
-        </p:spPr>
-        <p:txBody>
-          <a:bodyPr wrap="square">
-            <a:spAutoFit/>
-          </a:bodyPr>
-          <a:lstStyle/>
-          <a:p>
-            <a:pPr algn="l">
-              <a:spcBef>
-                <a:spcPts val="0"/>
-              </a:spcBef>
-              <a:spcAft>
-                <a:spcPts val="0"/>
-              </a:spcAft>
-            </a:pPr>
-            <a:r>
-              <a:rPr sz="1200" b="0">
-                <a:solidFill>
-                  <a:srgbClr val="66707F"/>
-                </a:solidFill>
-                <a:latin typeface="Meiryo"/>
-                <a:ea typeface="メイリオ"/>
-              </a:rPr>
-              <a:t>8クラスの可聴検出率は 97.2〜100%（未達の項目も含めてそのまま報告している）</a:t>
-            </a:r>
-          </a:p>
-        </p:txBody>
-      </p:sp>
-      <p:cxnSp>
-        <p:nvCxnSpPr>
-          <p:cNvPr id="8" name="Connector 7"/>
-          <p:cNvCxnSpPr/>
-          <p:nvPr/>
-        </p:nvCxnSpPr>
-        <p:spPr>
-          <a:xfrm>
-            <a:off x="0" y="6248400"/>
-            <a:ext cx="12192000" cy="0"/>
-          </a:xfrm>
-          <a:prstGeom prst="line">
-            <a:avLst/>
-          </a:prstGeom>
+          <a:solidFill>
+            <a:srgbClr val="FFFFFF"/>
+          </a:solidFill>
           <a:ln w="12700">
             <a:solidFill>
               <a:srgbClr val="D9DAD2"/>
@@ -30757,6 +30818,176 @@
           <a:effectLst/>
         </p:spPr>
         <p:style>
+          <a:lnRef idx="1">
+            <a:schemeClr val="accent1"/>
+          </a:lnRef>
+          <a:fillRef idx="3">
+            <a:schemeClr val="accent1"/>
+          </a:fillRef>
+          <a:effectRef idx="2">
+            <a:schemeClr val="accent1"/>
+          </a:effectRef>
+          <a:fontRef idx="minor">
+            <a:schemeClr val="lt1"/>
+          </a:fontRef>
+        </p:style>
+        <p:txBody>
+          <a:bodyPr rtlCol="0" anchor="t" wrap="square" lIns="177800" rIns="177800" tIns="127000" bIns="101600"/>
+          <a:lstStyle/>
+          <a:p>
+            <a:pPr algn="l">
+              <a:spcBef>
+                <a:spcPts val="0"/>
+              </a:spcBef>
+              <a:spcAft>
+                <a:spcPts val="400"/>
+              </a:spcAft>
+            </a:pPr>
+            <a:r>
+              <a:rPr sz="1400" b="1">
+                <a:solidFill>
+                  <a:srgbClr val="16233A"/>
+                </a:solidFill>
+                <a:latin typeface="Meiryo"/>
+                <a:ea typeface="メイリオ"/>
+              </a:rPr>
+              <a:t>距離推定（車）</a:t>
+            </a:r>
+          </a:p>
+          <a:p>
+            <a:pPr algn="l">
+              <a:lnSpc>
+                <a:spcPct val="130000"/>
+              </a:lnSpc>
+              <a:spcBef>
+                <a:spcPts val="0"/>
+              </a:spcBef>
+              <a:spcAft>
+                <a:spcPts val="600"/>
+              </a:spcAft>
+            </a:pPr>
+            <a:r>
+              <a:rPr sz="1200" b="0">
+                <a:solidFill>
+                  <a:srgbClr val="3A4658"/>
+                </a:solidFill>
+                <a:latin typeface="Meiryo"/>
+                <a:ea typeface="メイリオ"/>
+              </a:rPr>
+              <a:t>至近（≤5m）の
+中央絶対誤差</a:t>
+            </a:r>
+          </a:p>
+          <a:p>
+            <a:pPr algn="l">
+              <a:spcBef>
+                <a:spcPts val="0"/>
+              </a:spcBef>
+              <a:spcAft>
+                <a:spcPts val="800"/>
+              </a:spcAft>
+            </a:pPr>
+            <a:r>
+              <a:rPr sz="2600" b="1">
+                <a:solidFill>
+                  <a:srgbClr val="16233A"/>
+                </a:solidFill>
+                <a:latin typeface="Meiryo"/>
+                <a:ea typeface="メイリオ"/>
+              </a:rPr>
+              <a:t>0.21m</a:t>
+            </a:r>
+          </a:p>
+          <a:p>
+            <a:pPr algn="l">
+              <a:lnSpc>
+                <a:spcPct val="130000"/>
+              </a:lnSpc>
+              <a:spcBef>
+                <a:spcPts val="0"/>
+              </a:spcBef>
+              <a:spcAft>
+                <a:spcPts val="600"/>
+              </a:spcAft>
+            </a:pPr>
+            <a:r>
+              <a:rPr sz="1150" b="0">
+                <a:solidFill>
+                  <a:srgbClr val="3A4658"/>
+                </a:solidFill>
+                <a:latin typeface="Meiryo"/>
+                <a:ea typeface="メイリオ"/>
+              </a:rPr>
+              <a:t>静音EVだけの場面でも検出率 99.0%</a:t>
+            </a:r>
+          </a:p>
+        </p:txBody>
+      </p:sp>
+      <p:sp>
+        <p:nvSpPr>
+          <p:cNvPr id="8" name="TextBox 7"/>
+          <p:cNvSpPr txBox="1"/>
+          <p:nvPr/>
+        </p:nvSpPr>
+        <p:spPr>
+          <a:xfrm>
+            <a:off x="685800" y="5511800"/>
+            <a:ext cx="10820400" cy="381000"/>
+          </a:xfrm>
+          <a:prstGeom prst="rect">
+            <a:avLst/>
+          </a:prstGeom>
+          <a:noFill/>
+        </p:spPr>
+        <p:txBody>
+          <a:bodyPr wrap="square">
+            <a:spAutoFit/>
+          </a:bodyPr>
+          <a:lstStyle/>
+          <a:p>
+            <a:pPr algn="l">
+              <a:spcBef>
+                <a:spcPts val="0"/>
+              </a:spcBef>
+              <a:spcAft>
+                <a:spcPts val="0"/>
+              </a:spcAft>
+            </a:pPr>
+            <a:r>
+              <a:rPr sz="1150" b="0">
+                <a:solidFill>
+                  <a:srgbClr val="66707F"/>
+                </a:solidFill>
+                <a:latin typeface="Meiryo"/>
+                <a:ea typeface="メイリオ"/>
+              </a:rPr>
+              <a:t>可聴フレーム＝背景騒音に対してSNR≥0dBの区間。検出率はその全フレームに対する割合、方向誤差は全検出の中央値</a:t>
+            </a:r>
+          </a:p>
+        </p:txBody>
+      </p:sp>
+      <p:cxnSp>
+        <p:nvCxnSpPr>
+          <p:cNvPr id="9" name="Connector 8"/>
+          <p:cNvCxnSpPr/>
+          <p:nvPr/>
+        </p:nvCxnSpPr>
+        <p:spPr>
+          <a:xfrm>
+            <a:off x="0" y="6248400"/>
+            <a:ext cx="12192000" cy="0"/>
+          </a:xfrm>
+          <a:prstGeom prst="line">
+            <a:avLst/>
+          </a:prstGeom>
+          <a:ln w="12700">
+            <a:solidFill>
+              <a:srgbClr val="D9DAD2"/>
+            </a:solidFill>
+          </a:ln>
+          <a:effectLst/>
+        </p:spPr>
+        <p:style>
           <a:lnRef idx="2">
             <a:schemeClr val="accent1"/>
           </a:lnRef>
@@ -30773,7 +31004,7 @@
       </p:cxnSp>
       <p:sp>
         <p:nvSpPr>
-          <p:cNvPr id="9" name="Rounded Rectangle 8"/>
+          <p:cNvPr id="10" name="Rounded Rectangle 9"/>
           <p:cNvSpPr/>
           <p:nvPr/>
         </p:nvSpPr>
@@ -30834,7 +31065,7 @@
       </p:sp>
       <p:sp>
         <p:nvSpPr>
-          <p:cNvPr id="10" name="Rounded Rectangle 9"/>
+          <p:cNvPr id="11" name="Rounded Rectangle 10"/>
           <p:cNvSpPr/>
           <p:nvPr/>
         </p:nvSpPr>
@@ -30895,7 +31126,7 @@
       </p:sp>
       <p:sp>
         <p:nvSpPr>
-          <p:cNvPr id="11" name="Rounded Rectangle 10"/>
+          <p:cNvPr id="12" name="Rounded Rectangle 11"/>
           <p:cNvSpPr/>
           <p:nvPr/>
         </p:nvSpPr>
@@ -30956,7 +31187,7 @@
       </p:sp>
       <p:sp>
         <p:nvSpPr>
-          <p:cNvPr id="12" name="Rounded Rectangle 11"/>
+          <p:cNvPr id="13" name="Rounded Rectangle 12"/>
           <p:cNvSpPr/>
           <p:nvPr/>
         </p:nvSpPr>
@@ -31017,7 +31248,7 @@
       </p:sp>
       <p:sp>
         <p:nvSpPr>
-          <p:cNvPr id="13" name="Rounded Rectangle 12"/>
+          <p:cNvPr id="14" name="Rounded Rectangle 13"/>
           <p:cNvSpPr/>
           <p:nvPr/>
         </p:nvSpPr>
@@ -31078,7 +31309,7 @@
       </p:sp>
       <p:sp>
         <p:nvSpPr>
-          <p:cNvPr id="14" name="Rounded Rectangle 13"/>
+          <p:cNvPr id="15" name="Rounded Rectangle 14"/>
           <p:cNvSpPr/>
           <p:nvPr/>
         </p:nvSpPr>
@@ -31139,7 +31370,7 @@
       </p:sp>
       <p:sp>
         <p:nvSpPr>
-          <p:cNvPr id="15" name="TextBox 14"/>
+          <p:cNvPr id="16" name="TextBox 15"/>
           <p:cNvSpPr txBox="1"/>
           <p:nvPr/>
         </p:nvSpPr>

--- a/md/seminar/中間発表スライド_2026-08-10.pptx
+++ b/md/seminar/中間発表スライド_2026-08-10.pptx
@@ -5,25 +5,25 @@
     <p:sldMasterId id="2147483648" r:id="rId1"/>
   </p:sldMasterIdLst>
   <p:sldIdLst>
-    <p:sldId id="256" r:id="rId7"/>
-    <p:sldId id="257" r:id="rId8"/>
-    <p:sldId id="258" r:id="rId9"/>
-    <p:sldId id="259" r:id="rId10"/>
-    <p:sldId id="260" r:id="rId11"/>
-    <p:sldId id="261" r:id="rId12"/>
-    <p:sldId id="262" r:id="rId13"/>
-    <p:sldId id="263" r:id="rId14"/>
-    <p:sldId id="264" r:id="rId15"/>
-    <p:sldId id="265" r:id="rId16"/>
-    <p:sldId id="266" r:id="rId17"/>
-    <p:sldId id="267" r:id="rId18"/>
-    <p:sldId id="268" r:id="rId19"/>
-    <p:sldId id="269" r:id="rId20"/>
-    <p:sldId id="270" r:id="rId21"/>
-    <p:sldId id="271" r:id="rId22"/>
-    <p:sldId id="272" r:id="rId23"/>
+    <p:sldId id="256" r:id="rId2"/>
+    <p:sldId id="257" r:id="rId3"/>
+    <p:sldId id="258" r:id="rId4"/>
+    <p:sldId id="259" r:id="rId5"/>
+    <p:sldId id="260" r:id="rId6"/>
+    <p:sldId id="261" r:id="rId7"/>
+    <p:sldId id="262" r:id="rId8"/>
+    <p:sldId id="263" r:id="rId9"/>
+    <p:sldId id="264" r:id="rId10"/>
+    <p:sldId id="265" r:id="rId11"/>
+    <p:sldId id="266" r:id="rId12"/>
+    <p:sldId id="267" r:id="rId13"/>
+    <p:sldId id="268" r:id="rId14"/>
+    <p:sldId id="269" r:id="rId15"/>
+    <p:sldId id="270" r:id="rId16"/>
+    <p:sldId id="271" r:id="rId17"/>
+    <p:sldId id="272" r:id="rId18"/>
   </p:sldIdLst>
-  <p:sldSz cx="12192000" cy="6858000" type="screen4x3"/>
+  <p:sldSz cx="12192000" cy="6858000"/>
   <p:notesSz cx="6858000" cy="9144000"/>
   <p:defaultTextStyle>
     <a:defPPr>
@@ -120,6 +120,22 @@
       </a:defRPr>
     </a:lvl9pPr>
   </p:defaultTextStyle>
+  <p:extLst>
+    <p:ext uri="{EFAFB233-063F-42B5-8137-9DF3F51BA10A}">
+      <p15:sldGuideLst xmlns:p15="http://schemas.microsoft.com/office/powerpoint/2012/main">
+        <p15:guide id="1" orient="horz" pos="2160">
+          <p15:clr>
+            <a:srgbClr val="A4A3A4"/>
+          </p15:clr>
+        </p15:guide>
+        <p15:guide id="2" pos="2880">
+          <p15:clr>
+            <a:srgbClr val="A4A3A4"/>
+          </p15:clr>
+        </p15:guide>
+      </p15:sldGuideLst>
+    </p:ext>
+  </p:extLst>
 </p:presentation>
 </file>
 
@@ -161,10 +177,9 @@
           <a:lstStyle/>
           <a:p>
             <a:r>
-              <a:rPr lang="en-US" smtClean="0"/>
+              <a:rPr lang="en-US"/>
               <a:t>Click to edit Master title style</a:t>
             </a:r>
-            <a:endParaRPr lang="en-US"/>
           </a:p>
         </p:txBody>
       </p:sp>
@@ -280,10 +295,9 @@
           </a:lstStyle>
           <a:p>
             <a:r>
-              <a:rPr lang="en-US" smtClean="0"/>
+              <a:rPr lang="en-US"/>
               <a:t>Click to edit Master subtitle style</a:t>
             </a:r>
-            <a:endParaRPr lang="en-US"/>
           </a:p>
         </p:txBody>
       </p:sp>
@@ -304,7 +318,7 @@
           <a:p>
             <a:fld id="{5BCAD085-E8A6-8845-BD4E-CB4CCA059FC4}" type="datetimeFigureOut">
               <a:rPr lang="en-US" smtClean="0"/>
-              <a:t>1/27/13</a:t>
+              <a:t>8/12/2026</a:t>
             </a:fld>
             <a:endParaRPr lang="en-US"/>
           </a:p>
@@ -398,10 +412,9 @@
           <a:lstStyle/>
           <a:p>
             <a:r>
-              <a:rPr lang="en-US" smtClean="0"/>
+              <a:rPr lang="en-US"/>
               <a:t>Click to edit Master title style</a:t>
             </a:r>
-            <a:endParaRPr lang="en-US"/>
           </a:p>
         </p:txBody>
       </p:sp>
@@ -422,38 +435,37 @@
           <a:p>
             <a:pPr lvl="0"/>
             <a:r>
-              <a:rPr lang="en-US" smtClean="0"/>
+              <a:rPr lang="en-US"/>
               <a:t>Click to edit Master text styles</a:t>
             </a:r>
           </a:p>
           <a:p>
             <a:pPr lvl="1"/>
             <a:r>
-              <a:rPr lang="en-US" smtClean="0"/>
+              <a:rPr lang="en-US"/>
               <a:t>Second level</a:t>
             </a:r>
           </a:p>
           <a:p>
             <a:pPr lvl="2"/>
             <a:r>
-              <a:rPr lang="en-US" smtClean="0"/>
+              <a:rPr lang="en-US"/>
               <a:t>Third level</a:t>
             </a:r>
           </a:p>
           <a:p>
             <a:pPr lvl="3"/>
             <a:r>
-              <a:rPr lang="en-US" smtClean="0"/>
+              <a:rPr lang="en-US"/>
               <a:t>Fourth level</a:t>
             </a:r>
           </a:p>
           <a:p>
             <a:pPr lvl="4"/>
             <a:r>
-              <a:rPr lang="en-US" smtClean="0"/>
+              <a:rPr lang="en-US"/>
               <a:t>Fifth level</a:t>
             </a:r>
-            <a:endParaRPr lang="en-US"/>
           </a:p>
         </p:txBody>
       </p:sp>
@@ -474,7 +486,7 @@
           <a:p>
             <a:fld id="{5BCAD085-E8A6-8845-BD4E-CB4CCA059FC4}" type="datetimeFigureOut">
               <a:rPr lang="en-US" smtClean="0"/>
-              <a:t>1/27/13</a:t>
+              <a:t>8/12/2026</a:t>
             </a:fld>
             <a:endParaRPr lang="en-US"/>
           </a:p>
@@ -573,10 +585,9 @@
           <a:lstStyle/>
           <a:p>
             <a:r>
-              <a:rPr lang="en-US" smtClean="0"/>
+              <a:rPr lang="en-US"/>
               <a:t>Click to edit Master title style</a:t>
             </a:r>
-            <a:endParaRPr lang="en-US"/>
           </a:p>
         </p:txBody>
       </p:sp>
@@ -602,38 +613,37 @@
           <a:p>
             <a:pPr lvl="0"/>
             <a:r>
-              <a:rPr lang="en-US" smtClean="0"/>
+              <a:rPr lang="en-US"/>
               <a:t>Click to edit Master text styles</a:t>
             </a:r>
           </a:p>
           <a:p>
             <a:pPr lvl="1"/>
             <a:r>
-              <a:rPr lang="en-US" smtClean="0"/>
+              <a:rPr lang="en-US"/>
               <a:t>Second level</a:t>
             </a:r>
           </a:p>
           <a:p>
             <a:pPr lvl="2"/>
             <a:r>
-              <a:rPr lang="en-US" smtClean="0"/>
+              <a:rPr lang="en-US"/>
               <a:t>Third level</a:t>
             </a:r>
           </a:p>
           <a:p>
             <a:pPr lvl="3"/>
             <a:r>
-              <a:rPr lang="en-US" smtClean="0"/>
+              <a:rPr lang="en-US"/>
               <a:t>Fourth level</a:t>
             </a:r>
           </a:p>
           <a:p>
             <a:pPr lvl="4"/>
             <a:r>
-              <a:rPr lang="en-US" smtClean="0"/>
+              <a:rPr lang="en-US"/>
               <a:t>Fifth level</a:t>
             </a:r>
-            <a:endParaRPr lang="en-US"/>
           </a:p>
         </p:txBody>
       </p:sp>
@@ -654,7 +664,7 @@
           <a:p>
             <a:fld id="{5BCAD085-E8A6-8845-BD4E-CB4CCA059FC4}" type="datetimeFigureOut">
               <a:rPr lang="en-US" smtClean="0"/>
-              <a:t>1/27/13</a:t>
+              <a:t>8/12/2026</a:t>
             </a:fld>
             <a:endParaRPr lang="en-US"/>
           </a:p>
@@ -748,10 +758,9 @@
           <a:lstStyle/>
           <a:p>
             <a:r>
-              <a:rPr lang="en-US" smtClean="0"/>
+              <a:rPr lang="en-US"/>
               <a:t>Click to edit Master title style</a:t>
             </a:r>
-            <a:endParaRPr lang="en-US"/>
           </a:p>
         </p:txBody>
       </p:sp>
@@ -772,38 +781,37 @@
           <a:p>
             <a:pPr lvl="0"/>
             <a:r>
-              <a:rPr lang="en-US" smtClean="0"/>
+              <a:rPr lang="en-US"/>
               <a:t>Click to edit Master text styles</a:t>
             </a:r>
           </a:p>
           <a:p>
             <a:pPr lvl="1"/>
             <a:r>
-              <a:rPr lang="en-US" smtClean="0"/>
+              <a:rPr lang="en-US"/>
               <a:t>Second level</a:t>
             </a:r>
           </a:p>
           <a:p>
             <a:pPr lvl="2"/>
             <a:r>
-              <a:rPr lang="en-US" smtClean="0"/>
+              <a:rPr lang="en-US"/>
               <a:t>Third level</a:t>
             </a:r>
           </a:p>
           <a:p>
             <a:pPr lvl="3"/>
             <a:r>
-              <a:rPr lang="en-US" smtClean="0"/>
+              <a:rPr lang="en-US"/>
               <a:t>Fourth level</a:t>
             </a:r>
           </a:p>
           <a:p>
             <a:pPr lvl="4"/>
             <a:r>
-              <a:rPr lang="en-US" smtClean="0"/>
+              <a:rPr lang="en-US"/>
               <a:t>Fifth level</a:t>
             </a:r>
-            <a:endParaRPr lang="en-US"/>
           </a:p>
         </p:txBody>
       </p:sp>
@@ -824,7 +832,7 @@
           <a:p>
             <a:fld id="{5BCAD085-E8A6-8845-BD4E-CB4CCA059FC4}" type="datetimeFigureOut">
               <a:rPr lang="en-US" smtClean="0"/>
-              <a:t>1/27/13</a:t>
+              <a:t>8/12/2026</a:t>
             </a:fld>
             <a:endParaRPr lang="en-US"/>
           </a:p>
@@ -927,10 +935,9 @@
           </a:lstStyle>
           <a:p>
             <a:r>
-              <a:rPr lang="en-US" smtClean="0"/>
+              <a:rPr lang="en-US"/>
               <a:t>Click to edit Master title style</a:t>
             </a:r>
-            <a:endParaRPr lang="en-US"/>
           </a:p>
         </p:txBody>
       </p:sp>
@@ -1047,7 +1054,7 @@
           <a:p>
             <a:pPr lvl="0"/>
             <a:r>
-              <a:rPr lang="en-US" smtClean="0"/>
+              <a:rPr lang="en-US"/>
               <a:t>Click to edit Master text styles</a:t>
             </a:r>
           </a:p>
@@ -1070,7 +1077,7 @@
           <a:p>
             <a:fld id="{5BCAD085-E8A6-8845-BD4E-CB4CCA059FC4}" type="datetimeFigureOut">
               <a:rPr lang="en-US" smtClean="0"/>
-              <a:t>1/27/13</a:t>
+              <a:t>8/12/2026</a:t>
             </a:fld>
             <a:endParaRPr lang="en-US"/>
           </a:p>
@@ -1164,10 +1171,9 @@
           <a:lstStyle/>
           <a:p>
             <a:r>
-              <a:rPr lang="en-US" smtClean="0"/>
+              <a:rPr lang="en-US"/>
               <a:t>Click to edit Master title style</a:t>
             </a:r>
-            <a:endParaRPr lang="en-US"/>
           </a:p>
         </p:txBody>
       </p:sp>
@@ -1221,38 +1227,37 @@
           <a:p>
             <a:pPr lvl="0"/>
             <a:r>
-              <a:rPr lang="en-US" smtClean="0"/>
+              <a:rPr lang="en-US"/>
               <a:t>Click to edit Master text styles</a:t>
             </a:r>
           </a:p>
           <a:p>
             <a:pPr lvl="1"/>
             <a:r>
-              <a:rPr lang="en-US" smtClean="0"/>
+              <a:rPr lang="en-US"/>
               <a:t>Second level</a:t>
             </a:r>
           </a:p>
           <a:p>
             <a:pPr lvl="2"/>
             <a:r>
-              <a:rPr lang="en-US" smtClean="0"/>
+              <a:rPr lang="en-US"/>
               <a:t>Third level</a:t>
             </a:r>
           </a:p>
           <a:p>
             <a:pPr lvl="3"/>
             <a:r>
-              <a:rPr lang="en-US" smtClean="0"/>
+              <a:rPr lang="en-US"/>
               <a:t>Fourth level</a:t>
             </a:r>
           </a:p>
           <a:p>
             <a:pPr lvl="4"/>
             <a:r>
-              <a:rPr lang="en-US" smtClean="0"/>
+              <a:rPr lang="en-US"/>
               <a:t>Fifth level</a:t>
             </a:r>
-            <a:endParaRPr lang="en-US"/>
           </a:p>
         </p:txBody>
       </p:sp>
@@ -1306,38 +1311,37 @@
           <a:p>
             <a:pPr lvl="0"/>
             <a:r>
-              <a:rPr lang="en-US" smtClean="0"/>
+              <a:rPr lang="en-US"/>
               <a:t>Click to edit Master text styles</a:t>
             </a:r>
           </a:p>
           <a:p>
             <a:pPr lvl="1"/>
             <a:r>
-              <a:rPr lang="en-US" smtClean="0"/>
+              <a:rPr lang="en-US"/>
               <a:t>Second level</a:t>
             </a:r>
           </a:p>
           <a:p>
             <a:pPr lvl="2"/>
             <a:r>
-              <a:rPr lang="en-US" smtClean="0"/>
+              <a:rPr lang="en-US"/>
               <a:t>Third level</a:t>
             </a:r>
           </a:p>
           <a:p>
             <a:pPr lvl="3"/>
             <a:r>
-              <a:rPr lang="en-US" smtClean="0"/>
+              <a:rPr lang="en-US"/>
               <a:t>Fourth level</a:t>
             </a:r>
           </a:p>
           <a:p>
             <a:pPr lvl="4"/>
             <a:r>
-              <a:rPr lang="en-US" smtClean="0"/>
+              <a:rPr lang="en-US"/>
               <a:t>Fifth level</a:t>
             </a:r>
-            <a:endParaRPr lang="en-US"/>
           </a:p>
         </p:txBody>
       </p:sp>
@@ -1358,7 +1362,7 @@
           <a:p>
             <a:fld id="{5BCAD085-E8A6-8845-BD4E-CB4CCA059FC4}" type="datetimeFigureOut">
               <a:rPr lang="en-US" smtClean="0"/>
-              <a:t>1/27/13</a:t>
+              <a:t>8/12/2026</a:t>
             </a:fld>
             <a:endParaRPr lang="en-US"/>
           </a:p>
@@ -1456,10 +1460,9 @@
           </a:lstStyle>
           <a:p>
             <a:r>
-              <a:rPr lang="en-US" smtClean="0"/>
+              <a:rPr lang="en-US"/>
               <a:t>Click to edit Master title style</a:t>
             </a:r>
-            <a:endParaRPr lang="en-US"/>
           </a:p>
         </p:txBody>
       </p:sp>
@@ -1522,7 +1525,7 @@
           <a:p>
             <a:pPr lvl="0"/>
             <a:r>
-              <a:rPr lang="en-US" smtClean="0"/>
+              <a:rPr lang="en-US"/>
               <a:t>Click to edit Master text styles</a:t>
             </a:r>
           </a:p>
@@ -1578,38 +1581,37 @@
           <a:p>
             <a:pPr lvl="0"/>
             <a:r>
-              <a:rPr lang="en-US" smtClean="0"/>
+              <a:rPr lang="en-US"/>
               <a:t>Click to edit Master text styles</a:t>
             </a:r>
           </a:p>
           <a:p>
             <a:pPr lvl="1"/>
             <a:r>
-              <a:rPr lang="en-US" smtClean="0"/>
+              <a:rPr lang="en-US"/>
               <a:t>Second level</a:t>
             </a:r>
           </a:p>
           <a:p>
             <a:pPr lvl="2"/>
             <a:r>
-              <a:rPr lang="en-US" smtClean="0"/>
+              <a:rPr lang="en-US"/>
               <a:t>Third level</a:t>
             </a:r>
           </a:p>
           <a:p>
             <a:pPr lvl="3"/>
             <a:r>
-              <a:rPr lang="en-US" smtClean="0"/>
+              <a:rPr lang="en-US"/>
               <a:t>Fourth level</a:t>
             </a:r>
           </a:p>
           <a:p>
             <a:pPr lvl="4"/>
             <a:r>
-              <a:rPr lang="en-US" smtClean="0"/>
+              <a:rPr lang="en-US"/>
               <a:t>Fifth level</a:t>
             </a:r>
-            <a:endParaRPr lang="en-US"/>
           </a:p>
         </p:txBody>
       </p:sp>
@@ -1672,7 +1674,7 @@
           <a:p>
             <a:pPr lvl="0"/>
             <a:r>
-              <a:rPr lang="en-US" smtClean="0"/>
+              <a:rPr lang="en-US"/>
               <a:t>Click to edit Master text styles</a:t>
             </a:r>
           </a:p>
@@ -1728,38 +1730,37 @@
           <a:p>
             <a:pPr lvl="0"/>
             <a:r>
-              <a:rPr lang="en-US" smtClean="0"/>
+              <a:rPr lang="en-US"/>
               <a:t>Click to edit Master text styles</a:t>
             </a:r>
           </a:p>
           <a:p>
             <a:pPr lvl="1"/>
             <a:r>
-              <a:rPr lang="en-US" smtClean="0"/>
+              <a:rPr lang="en-US"/>
               <a:t>Second level</a:t>
             </a:r>
           </a:p>
           <a:p>
             <a:pPr lvl="2"/>
             <a:r>
-              <a:rPr lang="en-US" smtClean="0"/>
+              <a:rPr lang="en-US"/>
               <a:t>Third level</a:t>
             </a:r>
           </a:p>
           <a:p>
             <a:pPr lvl="3"/>
             <a:r>
-              <a:rPr lang="en-US" smtClean="0"/>
+              <a:rPr lang="en-US"/>
               <a:t>Fourth level</a:t>
             </a:r>
           </a:p>
           <a:p>
             <a:pPr lvl="4"/>
             <a:r>
-              <a:rPr lang="en-US" smtClean="0"/>
+              <a:rPr lang="en-US"/>
               <a:t>Fifth level</a:t>
             </a:r>
-            <a:endParaRPr lang="en-US"/>
           </a:p>
         </p:txBody>
       </p:sp>
@@ -1780,7 +1781,7 @@
           <a:p>
             <a:fld id="{5BCAD085-E8A6-8845-BD4E-CB4CCA059FC4}" type="datetimeFigureOut">
               <a:rPr lang="en-US" smtClean="0"/>
-              <a:t>1/27/13</a:t>
+              <a:t>8/12/2026</a:t>
             </a:fld>
             <a:endParaRPr lang="en-US"/>
           </a:p>
@@ -1874,10 +1875,9 @@
           <a:lstStyle/>
           <a:p>
             <a:r>
-              <a:rPr lang="en-US" smtClean="0"/>
+              <a:rPr lang="en-US"/>
               <a:t>Click to edit Master title style</a:t>
             </a:r>
-            <a:endParaRPr lang="en-US"/>
           </a:p>
         </p:txBody>
       </p:sp>
@@ -1898,7 +1898,7 @@
           <a:p>
             <a:fld id="{5BCAD085-E8A6-8845-BD4E-CB4CCA059FC4}" type="datetimeFigureOut">
               <a:rPr lang="en-US" smtClean="0"/>
-              <a:t>1/27/13</a:t>
+              <a:t>8/12/2026</a:t>
             </a:fld>
             <a:endParaRPr lang="en-US"/>
           </a:p>
@@ -1993,7 +1993,7 @@
           <a:p>
             <a:fld id="{5BCAD085-E8A6-8845-BD4E-CB4CCA059FC4}" type="datetimeFigureOut">
               <a:rPr lang="en-US" smtClean="0"/>
-              <a:t>1/27/13</a:t>
+              <a:t>8/12/2026</a:t>
             </a:fld>
             <a:endParaRPr lang="en-US"/>
           </a:p>
@@ -2096,10 +2096,9 @@
           </a:lstStyle>
           <a:p>
             <a:r>
-              <a:rPr lang="en-US" smtClean="0"/>
+              <a:rPr lang="en-US"/>
               <a:t>Click to edit Master title style</a:t>
             </a:r>
-            <a:endParaRPr lang="en-US"/>
           </a:p>
         </p:txBody>
       </p:sp>
@@ -2153,38 +2152,37 @@
           <a:p>
             <a:pPr lvl="0"/>
             <a:r>
-              <a:rPr lang="en-US" smtClean="0"/>
+              <a:rPr lang="en-US"/>
               <a:t>Click to edit Master text styles</a:t>
             </a:r>
           </a:p>
           <a:p>
             <a:pPr lvl="1"/>
             <a:r>
-              <a:rPr lang="en-US" smtClean="0"/>
+              <a:rPr lang="en-US"/>
               <a:t>Second level</a:t>
             </a:r>
           </a:p>
           <a:p>
             <a:pPr lvl="2"/>
             <a:r>
-              <a:rPr lang="en-US" smtClean="0"/>
+              <a:rPr lang="en-US"/>
               <a:t>Third level</a:t>
             </a:r>
           </a:p>
           <a:p>
             <a:pPr lvl="3"/>
             <a:r>
-              <a:rPr lang="en-US" smtClean="0"/>
+              <a:rPr lang="en-US"/>
               <a:t>Fourth level</a:t>
             </a:r>
           </a:p>
           <a:p>
             <a:pPr lvl="4"/>
             <a:r>
-              <a:rPr lang="en-US" smtClean="0"/>
+              <a:rPr lang="en-US"/>
               <a:t>Fifth level</a:t>
             </a:r>
-            <a:endParaRPr lang="en-US"/>
           </a:p>
         </p:txBody>
       </p:sp>
@@ -2247,7 +2245,7 @@
           <a:p>
             <a:pPr lvl="0"/>
             <a:r>
-              <a:rPr lang="en-US" smtClean="0"/>
+              <a:rPr lang="en-US"/>
               <a:t>Click to edit Master text styles</a:t>
             </a:r>
           </a:p>
@@ -2270,7 +2268,7 @@
           <a:p>
             <a:fld id="{5BCAD085-E8A6-8845-BD4E-CB4CCA059FC4}" type="datetimeFigureOut">
               <a:rPr lang="en-US" smtClean="0"/>
-              <a:t>1/27/13</a:t>
+              <a:t>8/12/2026</a:t>
             </a:fld>
             <a:endParaRPr lang="en-US"/>
           </a:p>
@@ -2373,10 +2371,9 @@
           </a:lstStyle>
           <a:p>
             <a:r>
-              <a:rPr lang="en-US" smtClean="0"/>
+              <a:rPr lang="en-US"/>
               <a:t>Click to edit Master title style</a:t>
             </a:r>
-            <a:endParaRPr lang="en-US"/>
           </a:p>
         </p:txBody>
       </p:sp>
@@ -2500,7 +2497,7 @@
           <a:p>
             <a:pPr lvl="0"/>
             <a:r>
-              <a:rPr lang="en-US" smtClean="0"/>
+              <a:rPr lang="en-US"/>
               <a:t>Click to edit Master text styles</a:t>
             </a:r>
           </a:p>
@@ -2523,7 +2520,7 @@
           <a:p>
             <a:fld id="{5BCAD085-E8A6-8845-BD4E-CB4CCA059FC4}" type="datetimeFigureOut">
               <a:rPr lang="en-US" smtClean="0"/>
-              <a:t>1/27/13</a:t>
+              <a:t>8/12/2026</a:t>
             </a:fld>
             <a:endParaRPr lang="en-US"/>
           </a:p>
@@ -2632,10 +2629,9 @@
           <a:lstStyle/>
           <a:p>
             <a:r>
-              <a:rPr lang="en-US" smtClean="0"/>
+              <a:rPr lang="en-US"/>
               <a:t>Click to edit Master title style</a:t>
             </a:r>
-            <a:endParaRPr lang="en-US"/>
           </a:p>
         </p:txBody>
       </p:sp>
@@ -2666,38 +2662,37 @@
           <a:p>
             <a:pPr lvl="0"/>
             <a:r>
-              <a:rPr lang="en-US" smtClean="0"/>
+              <a:rPr lang="en-US"/>
               <a:t>Click to edit Master text styles</a:t>
             </a:r>
           </a:p>
           <a:p>
             <a:pPr lvl="1"/>
             <a:r>
-              <a:rPr lang="en-US" smtClean="0"/>
+              <a:rPr lang="en-US"/>
               <a:t>Second level</a:t>
             </a:r>
           </a:p>
           <a:p>
             <a:pPr lvl="2"/>
             <a:r>
-              <a:rPr lang="en-US" smtClean="0"/>
+              <a:rPr lang="en-US"/>
               <a:t>Third level</a:t>
             </a:r>
           </a:p>
           <a:p>
             <a:pPr lvl="3"/>
             <a:r>
-              <a:rPr lang="en-US" smtClean="0"/>
+              <a:rPr lang="en-US"/>
               <a:t>Fourth level</a:t>
             </a:r>
           </a:p>
           <a:p>
             <a:pPr lvl="4"/>
             <a:r>
-              <a:rPr lang="en-US" smtClean="0"/>
+              <a:rPr lang="en-US"/>
               <a:t>Fifth level</a:t>
             </a:r>
-            <a:endParaRPr lang="en-US"/>
           </a:p>
         </p:txBody>
       </p:sp>
@@ -2736,7 +2731,7 @@
           <a:p>
             <a:fld id="{5BCAD085-E8A6-8845-BD4E-CB4CCA059FC4}" type="datetimeFigureOut">
               <a:rPr lang="en-US" smtClean="0"/>
-              <a:t>1/27/13</a:t>
+              <a:t>8/12/2026</a:t>
             </a:fld>
             <a:endParaRPr lang="en-US"/>
           </a:p>
@@ -3095,7 +3090,7 @@
 </file>
 
 <file path=ppt/slides/slide1.xml><?xml version="1.0" encoding="utf-8"?>
-<p:sld xmlns:a="http://schemas.openxmlformats.org/drawingml/2006/main" xmlns:p="http://schemas.openxmlformats.org/presentationml/2006/main" xmlns:r="http://schemas.openxmlformats.org/officeDocument/2006/relationships">
+<p:sld xmlns:a="http://schemas.openxmlformats.org/drawingml/2006/main" xmlns:r="http://schemas.openxmlformats.org/officeDocument/2006/relationships" xmlns:p="http://schemas.openxmlformats.org/presentationml/2006/main">
   <p:cSld>
     <p:spTree>
       <p:nvGrpSpPr>
@@ -3103,7 +3098,14 @@
         <p:cNvGrpSpPr/>
         <p:nvPr/>
       </p:nvGrpSpPr>
-      <p:grpSpPr/>
+      <p:grpSpPr>
+        <a:xfrm>
+          <a:off x="0" y="0"/>
+          <a:ext cx="0" cy="0"/>
+          <a:chOff x="0" y="0"/>
+          <a:chExt cx="0" cy="0"/>
+        </a:xfrm>
+      </p:grpSpPr>
       <p:sp>
         <p:nvSpPr>
           <p:cNvPr id="2" name="Rectangle 1"/>
@@ -3112,7 +3114,7 @@
         </p:nvSpPr>
         <p:spPr>
           <a:xfrm>
-            <a:off x="-25400" y="-25400"/>
+            <a:off x="-25400" y="3175"/>
             <a:ext cx="12242800" cy="6908800"/>
           </a:xfrm>
           <a:prstGeom prst="rect">
@@ -3141,10 +3143,11 @@
           </a:fontRef>
         </p:style>
         <p:txBody>
-          <a:bodyPr rtlCol="0" anchor="ctr" wrap="square"/>
+          <a:bodyPr wrap="square" rtlCol="0" anchor="ctr"/>
           <a:lstStyle/>
           <a:p>
             <a:pPr algn="ctr"/>
+            <a:endParaRPr/>
           </a:p>
         </p:txBody>
       </p:sp>
@@ -3185,10 +3188,11 @@
           </a:fontRef>
         </p:style>
         <p:txBody>
-          <a:bodyPr rtlCol="0" anchor="ctr" wrap="square"/>
+          <a:bodyPr wrap="square" rtlCol="0" anchor="ctr"/>
           <a:lstStyle/>
           <a:p>
             <a:pPr algn="ctr"/>
+            <a:endParaRPr/>
           </a:p>
         </p:txBody>
       </p:sp>
@@ -3272,10 +3276,11 @@
           </a:fontRef>
         </p:style>
         <p:txBody>
-          <a:bodyPr rtlCol="0" anchor="ctr" wrap="square"/>
+          <a:bodyPr wrap="square" rtlCol="0" anchor="ctr"/>
           <a:lstStyle/>
           <a:p>
             <a:pPr algn="ctr"/>
+            <a:endParaRPr/>
           </a:p>
         </p:txBody>
       </p:sp>
@@ -3316,10 +3321,11 @@
           </a:fontRef>
         </p:style>
         <p:txBody>
-          <a:bodyPr rtlCol="0" anchor="ctr" wrap="square"/>
+          <a:bodyPr wrap="square" rtlCol="0" anchor="ctr"/>
           <a:lstStyle/>
           <a:p>
             <a:pPr algn="ctr"/>
+            <a:endParaRPr/>
           </a:p>
         </p:txBody>
       </p:sp>
@@ -3360,10 +3366,11 @@
           </a:fontRef>
         </p:style>
         <p:txBody>
-          <a:bodyPr rtlCol="0" anchor="ctr" wrap="square"/>
+          <a:bodyPr wrap="square" rtlCol="0" anchor="ctr"/>
           <a:lstStyle/>
           <a:p>
             <a:pPr algn="ctr"/>
+            <a:endParaRPr/>
           </a:p>
         </p:txBody>
       </p:sp>
@@ -3404,10 +3411,11 @@
           </a:fontRef>
         </p:style>
         <p:txBody>
-          <a:bodyPr rtlCol="0" anchor="ctr" wrap="square"/>
+          <a:bodyPr wrap="square" rtlCol="0" anchor="ctr"/>
           <a:lstStyle/>
           <a:p>
             <a:pPr algn="ctr"/>
+            <a:endParaRPr/>
           </a:p>
         </p:txBody>
       </p:sp>
@@ -3448,10 +3456,11 @@
           </a:fontRef>
         </p:style>
         <p:txBody>
-          <a:bodyPr rtlCol="0" anchor="ctr" wrap="square"/>
+          <a:bodyPr wrap="square" rtlCol="0" anchor="ctr"/>
           <a:lstStyle/>
           <a:p>
             <a:pPr algn="ctr"/>
+            <a:endParaRPr/>
           </a:p>
         </p:txBody>
       </p:sp>
@@ -3637,10 +3646,11 @@
           </a:fontRef>
         </p:style>
         <p:txBody>
-          <a:bodyPr rtlCol="0" anchor="ctr" wrap="square"/>
+          <a:bodyPr wrap="square" rtlCol="0" anchor="ctr"/>
           <a:lstStyle/>
           <a:p>
             <a:pPr algn="ctr"/>
+            <a:endParaRPr/>
           </a:p>
         </p:txBody>
       </p:sp>
@@ -3681,10 +3691,11 @@
           </a:fontRef>
         </p:style>
         <p:txBody>
-          <a:bodyPr rtlCol="0" anchor="ctr" wrap="square"/>
+          <a:bodyPr wrap="square" rtlCol="0" anchor="ctr"/>
           <a:lstStyle/>
           <a:p>
             <a:pPr algn="ctr"/>
+            <a:endParaRPr/>
           </a:p>
         </p:txBody>
       </p:sp>
@@ -3725,10 +3736,11 @@
           </a:fontRef>
         </p:style>
         <p:txBody>
-          <a:bodyPr rtlCol="0" anchor="ctr" wrap="square"/>
+          <a:bodyPr wrap="square" rtlCol="0" anchor="ctr"/>
           <a:lstStyle/>
           <a:p>
             <a:pPr algn="ctr"/>
+            <a:endParaRPr/>
           </a:p>
         </p:txBody>
       </p:sp>
@@ -3769,10 +3781,11 @@
           </a:fontRef>
         </p:style>
         <p:txBody>
-          <a:bodyPr rtlCol="0" anchor="ctr" wrap="square"/>
+          <a:bodyPr wrap="square" rtlCol="0" anchor="ctr"/>
           <a:lstStyle/>
           <a:p>
             <a:pPr algn="ctr"/>
+            <a:endParaRPr/>
           </a:p>
         </p:txBody>
       </p:sp>
@@ -3813,10 +3826,11 @@
           </a:fontRef>
         </p:style>
         <p:txBody>
-          <a:bodyPr rtlCol="0" anchor="ctr" wrap="square"/>
+          <a:bodyPr wrap="square" rtlCol="0" anchor="ctr"/>
           <a:lstStyle/>
           <a:p>
             <a:pPr algn="ctr"/>
+            <a:endParaRPr/>
           </a:p>
         </p:txBody>
       </p:sp>
@@ -3857,10 +3871,11 @@
           </a:fontRef>
         </p:style>
         <p:txBody>
-          <a:bodyPr rtlCol="0" anchor="ctr" wrap="square"/>
+          <a:bodyPr wrap="square" rtlCol="0" anchor="ctr"/>
           <a:lstStyle/>
           <a:p>
             <a:pPr algn="ctr"/>
+            <a:endParaRPr/>
           </a:p>
         </p:txBody>
       </p:sp>
@@ -3901,10 +3916,11 @@
           </a:fontRef>
         </p:style>
         <p:txBody>
-          <a:bodyPr rtlCol="0" anchor="ctr" wrap="square"/>
+          <a:bodyPr wrap="square" rtlCol="0" anchor="ctr"/>
           <a:lstStyle/>
           <a:p>
             <a:pPr algn="ctr"/>
+            <a:endParaRPr/>
           </a:p>
         </p:txBody>
       </p:sp>
@@ -3945,10 +3961,11 @@
           </a:fontRef>
         </p:style>
         <p:txBody>
-          <a:bodyPr rtlCol="0" anchor="ctr" wrap="square"/>
+          <a:bodyPr wrap="square" rtlCol="0" anchor="ctr"/>
           <a:lstStyle/>
           <a:p>
             <a:pPr algn="ctr"/>
+            <a:endParaRPr/>
           </a:p>
         </p:txBody>
       </p:sp>
@@ -3989,10 +4006,11 @@
           </a:fontRef>
         </p:style>
         <p:txBody>
-          <a:bodyPr rtlCol="0" anchor="ctr" wrap="square"/>
+          <a:bodyPr wrap="square" rtlCol="0" anchor="ctr"/>
           <a:lstStyle/>
           <a:p>
             <a:pPr algn="ctr"/>
+            <a:endParaRPr/>
           </a:p>
         </p:txBody>
       </p:sp>
@@ -4033,10 +4051,11 @@
           </a:fontRef>
         </p:style>
         <p:txBody>
-          <a:bodyPr rtlCol="0" anchor="ctr" wrap="square"/>
+          <a:bodyPr wrap="square" rtlCol="0" anchor="ctr"/>
           <a:lstStyle/>
           <a:p>
             <a:pPr algn="ctr"/>
+            <a:endParaRPr/>
           </a:p>
         </p:txBody>
       </p:sp>
@@ -4077,10 +4096,11 @@
           </a:fontRef>
         </p:style>
         <p:txBody>
-          <a:bodyPr rtlCol="0" anchor="ctr" wrap="square"/>
+          <a:bodyPr wrap="square" rtlCol="0" anchor="ctr"/>
           <a:lstStyle/>
           <a:p>
             <a:pPr algn="ctr"/>
+            <a:endParaRPr/>
           </a:p>
         </p:txBody>
       </p:sp>
@@ -4121,10 +4141,11 @@
           </a:fontRef>
         </p:style>
         <p:txBody>
-          <a:bodyPr rtlCol="0" anchor="ctr" wrap="square"/>
+          <a:bodyPr wrap="square" rtlCol="0" anchor="ctr"/>
           <a:lstStyle/>
           <a:p>
             <a:pPr algn="ctr"/>
+            <a:endParaRPr/>
           </a:p>
         </p:txBody>
       </p:sp>
@@ -4165,10 +4186,11 @@
           </a:fontRef>
         </p:style>
         <p:txBody>
-          <a:bodyPr rtlCol="0" anchor="ctr" wrap="square"/>
+          <a:bodyPr wrap="square" rtlCol="0" anchor="ctr"/>
           <a:lstStyle/>
           <a:p>
             <a:pPr algn="ctr"/>
+            <a:endParaRPr/>
           </a:p>
         </p:txBody>
       </p:sp>
@@ -4209,10 +4231,11 @@
           </a:fontRef>
         </p:style>
         <p:txBody>
-          <a:bodyPr rtlCol="0" anchor="ctr" wrap="square"/>
+          <a:bodyPr wrap="square" rtlCol="0" anchor="ctr"/>
           <a:lstStyle/>
           <a:p>
             <a:pPr algn="ctr"/>
+            <a:endParaRPr/>
           </a:p>
         </p:txBody>
       </p:sp>
@@ -4253,10 +4276,11 @@
           </a:fontRef>
         </p:style>
         <p:txBody>
-          <a:bodyPr rtlCol="0" anchor="ctr" wrap="square"/>
+          <a:bodyPr wrap="square" rtlCol="0" anchor="ctr"/>
           <a:lstStyle/>
           <a:p>
             <a:pPr algn="ctr"/>
+            <a:endParaRPr/>
           </a:p>
         </p:txBody>
       </p:sp>
@@ -4297,10 +4321,11 @@
           </a:fontRef>
         </p:style>
         <p:txBody>
-          <a:bodyPr rtlCol="0" anchor="ctr" wrap="square"/>
+          <a:bodyPr wrap="square" rtlCol="0" anchor="ctr"/>
           <a:lstStyle/>
           <a:p>
             <a:pPr algn="ctr"/>
+            <a:endParaRPr/>
           </a:p>
         </p:txBody>
       </p:sp>
@@ -4341,10 +4366,11 @@
           </a:fontRef>
         </p:style>
         <p:txBody>
-          <a:bodyPr rtlCol="0" anchor="ctr" wrap="square"/>
+          <a:bodyPr wrap="square" rtlCol="0" anchor="ctr"/>
           <a:lstStyle/>
           <a:p>
             <a:pPr algn="ctr"/>
+            <a:endParaRPr/>
           </a:p>
         </p:txBody>
       </p:sp>
@@ -4385,10 +4411,11 @@
           </a:fontRef>
         </p:style>
         <p:txBody>
-          <a:bodyPr rtlCol="0" anchor="ctr" wrap="square"/>
+          <a:bodyPr wrap="square" rtlCol="0" anchor="ctr"/>
           <a:lstStyle/>
           <a:p>
             <a:pPr algn="ctr"/>
+            <a:endParaRPr/>
           </a:p>
         </p:txBody>
       </p:sp>
@@ -4429,10 +4456,11 @@
           </a:fontRef>
         </p:style>
         <p:txBody>
-          <a:bodyPr rtlCol="0" anchor="ctr" wrap="square"/>
+          <a:bodyPr wrap="square" rtlCol="0" anchor="ctr"/>
           <a:lstStyle/>
           <a:p>
             <a:pPr algn="ctr"/>
+            <a:endParaRPr/>
           </a:p>
         </p:txBody>
       </p:sp>
@@ -4473,10 +4501,11 @@
           </a:fontRef>
         </p:style>
         <p:txBody>
-          <a:bodyPr rtlCol="0" anchor="ctr" wrap="square"/>
+          <a:bodyPr wrap="square" rtlCol="0" anchor="ctr"/>
           <a:lstStyle/>
           <a:p>
             <a:pPr algn="ctr"/>
+            <a:endParaRPr/>
           </a:p>
         </p:txBody>
       </p:sp>
@@ -4517,10 +4546,11 @@
           </a:fontRef>
         </p:style>
         <p:txBody>
-          <a:bodyPr rtlCol="0" anchor="ctr" wrap="square"/>
+          <a:bodyPr wrap="square" rtlCol="0" anchor="ctr"/>
           <a:lstStyle/>
           <a:p>
             <a:pPr algn="ctr"/>
+            <a:endParaRPr/>
           </a:p>
         </p:txBody>
       </p:sp>
@@ -4561,10 +4591,11 @@
           </a:fontRef>
         </p:style>
         <p:txBody>
-          <a:bodyPr rtlCol="0" anchor="ctr" wrap="square"/>
+          <a:bodyPr wrap="square" rtlCol="0" anchor="ctr"/>
           <a:lstStyle/>
           <a:p>
             <a:pPr algn="ctr"/>
+            <a:endParaRPr/>
           </a:p>
         </p:txBody>
       </p:sp>
@@ -4605,10 +4636,11 @@
           </a:fontRef>
         </p:style>
         <p:txBody>
-          <a:bodyPr rtlCol="0" anchor="ctr" wrap="square"/>
+          <a:bodyPr wrap="square" rtlCol="0" anchor="ctr"/>
           <a:lstStyle/>
           <a:p>
             <a:pPr algn="ctr"/>
+            <a:endParaRPr/>
           </a:p>
         </p:txBody>
       </p:sp>
@@ -4649,10 +4681,11 @@
           </a:fontRef>
         </p:style>
         <p:txBody>
-          <a:bodyPr rtlCol="0" anchor="ctr" wrap="square"/>
+          <a:bodyPr wrap="square" rtlCol="0" anchor="ctr"/>
           <a:lstStyle/>
           <a:p>
             <a:pPr algn="ctr"/>
+            <a:endParaRPr/>
           </a:p>
         </p:txBody>
       </p:sp>
@@ -4693,10 +4726,11 @@
           </a:fontRef>
         </p:style>
         <p:txBody>
-          <a:bodyPr rtlCol="0" anchor="ctr" wrap="square"/>
+          <a:bodyPr wrap="square" rtlCol="0" anchor="ctr"/>
           <a:lstStyle/>
           <a:p>
             <a:pPr algn="ctr"/>
+            <a:endParaRPr/>
           </a:p>
         </p:txBody>
       </p:sp>
@@ -4737,10 +4771,11 @@
           </a:fontRef>
         </p:style>
         <p:txBody>
-          <a:bodyPr rtlCol="0" anchor="ctr" wrap="square"/>
+          <a:bodyPr wrap="square" rtlCol="0" anchor="ctr"/>
           <a:lstStyle/>
           <a:p>
             <a:pPr algn="ctr"/>
+            <a:endParaRPr/>
           </a:p>
         </p:txBody>
       </p:sp>
@@ -4781,10 +4816,11 @@
           </a:fontRef>
         </p:style>
         <p:txBody>
-          <a:bodyPr rtlCol="0" anchor="ctr" wrap="square"/>
+          <a:bodyPr wrap="square" rtlCol="0" anchor="ctr"/>
           <a:lstStyle/>
           <a:p>
             <a:pPr algn="ctr"/>
+            <a:endParaRPr/>
           </a:p>
         </p:txBody>
       </p:sp>
@@ -4825,10 +4861,11 @@
           </a:fontRef>
         </p:style>
         <p:txBody>
-          <a:bodyPr rtlCol="0" anchor="ctr" wrap="square"/>
+          <a:bodyPr wrap="square" rtlCol="0" anchor="ctr"/>
           <a:lstStyle/>
           <a:p>
             <a:pPr algn="ctr"/>
+            <a:endParaRPr/>
           </a:p>
         </p:txBody>
       </p:sp>
@@ -4869,10 +4906,11 @@
           </a:fontRef>
         </p:style>
         <p:txBody>
-          <a:bodyPr rtlCol="0" anchor="ctr" wrap="square"/>
+          <a:bodyPr wrap="square" rtlCol="0" anchor="ctr"/>
           <a:lstStyle/>
           <a:p>
             <a:pPr algn="ctr"/>
+            <a:endParaRPr/>
           </a:p>
         </p:txBody>
       </p:sp>
@@ -4913,10 +4951,11 @@
           </a:fontRef>
         </p:style>
         <p:txBody>
-          <a:bodyPr rtlCol="0" anchor="ctr" wrap="square"/>
+          <a:bodyPr wrap="square" rtlCol="0" anchor="ctr"/>
           <a:lstStyle/>
           <a:p>
             <a:pPr algn="ctr"/>
+            <a:endParaRPr/>
           </a:p>
         </p:txBody>
       </p:sp>
@@ -4957,10 +4996,11 @@
           </a:fontRef>
         </p:style>
         <p:txBody>
-          <a:bodyPr rtlCol="0" anchor="ctr" wrap="square"/>
+          <a:bodyPr wrap="square" rtlCol="0" anchor="ctr"/>
           <a:lstStyle/>
           <a:p>
             <a:pPr algn="ctr"/>
+            <a:endParaRPr/>
           </a:p>
         </p:txBody>
       </p:sp>
@@ -5001,10 +5041,11 @@
           </a:fontRef>
         </p:style>
         <p:txBody>
-          <a:bodyPr rtlCol="0" anchor="ctr" wrap="square"/>
+          <a:bodyPr wrap="square" rtlCol="0" anchor="ctr"/>
           <a:lstStyle/>
           <a:p>
             <a:pPr algn="ctr"/>
+            <a:endParaRPr/>
           </a:p>
         </p:txBody>
       </p:sp>
@@ -5045,10 +5086,11 @@
           </a:fontRef>
         </p:style>
         <p:txBody>
-          <a:bodyPr rtlCol="0" anchor="ctr" wrap="square"/>
+          <a:bodyPr wrap="square" rtlCol="0" anchor="ctr"/>
           <a:lstStyle/>
           <a:p>
             <a:pPr algn="ctr"/>
+            <a:endParaRPr/>
           </a:p>
         </p:txBody>
       </p:sp>
@@ -5089,10 +5131,11 @@
           </a:fontRef>
         </p:style>
         <p:txBody>
-          <a:bodyPr rtlCol="0" anchor="ctr" wrap="square"/>
+          <a:bodyPr wrap="square" rtlCol="0" anchor="ctr"/>
           <a:lstStyle/>
           <a:p>
             <a:pPr algn="ctr"/>
+            <a:endParaRPr/>
           </a:p>
         </p:txBody>
       </p:sp>
@@ -5133,10 +5176,11 @@
           </a:fontRef>
         </p:style>
         <p:txBody>
-          <a:bodyPr rtlCol="0" anchor="ctr" wrap="square"/>
+          <a:bodyPr wrap="square" rtlCol="0" anchor="ctr"/>
           <a:lstStyle/>
           <a:p>
             <a:pPr algn="ctr"/>
+            <a:endParaRPr/>
           </a:p>
         </p:txBody>
       </p:sp>
@@ -5177,10 +5221,11 @@
           </a:fontRef>
         </p:style>
         <p:txBody>
-          <a:bodyPr rtlCol="0" anchor="ctr" wrap="square"/>
+          <a:bodyPr wrap="square" rtlCol="0" anchor="ctr"/>
           <a:lstStyle/>
           <a:p>
             <a:pPr algn="ctr"/>
+            <a:endParaRPr/>
           </a:p>
         </p:txBody>
       </p:sp>
@@ -5221,10 +5266,11 @@
           </a:fontRef>
         </p:style>
         <p:txBody>
-          <a:bodyPr rtlCol="0" anchor="ctr" wrap="square"/>
+          <a:bodyPr wrap="square" rtlCol="0" anchor="ctr"/>
           <a:lstStyle/>
           <a:p>
             <a:pPr algn="ctr"/>
+            <a:endParaRPr/>
           </a:p>
         </p:txBody>
       </p:sp>
@@ -5265,10 +5311,11 @@
           </a:fontRef>
         </p:style>
         <p:txBody>
-          <a:bodyPr rtlCol="0" anchor="ctr" wrap="square"/>
+          <a:bodyPr wrap="square" rtlCol="0" anchor="ctr"/>
           <a:lstStyle/>
           <a:p>
             <a:pPr algn="ctr"/>
+            <a:endParaRPr/>
           </a:p>
         </p:txBody>
       </p:sp>
@@ -5309,10 +5356,11 @@
           </a:fontRef>
         </p:style>
         <p:txBody>
-          <a:bodyPr rtlCol="0" anchor="ctr" wrap="square"/>
+          <a:bodyPr wrap="square" rtlCol="0" anchor="ctr"/>
           <a:lstStyle/>
           <a:p>
             <a:pPr algn="ctr"/>
+            <a:endParaRPr/>
           </a:p>
         </p:txBody>
       </p:sp>
@@ -5353,10 +5401,11 @@
           </a:fontRef>
         </p:style>
         <p:txBody>
-          <a:bodyPr rtlCol="0" anchor="ctr" wrap="square"/>
+          <a:bodyPr wrap="square" rtlCol="0" anchor="ctr"/>
           <a:lstStyle/>
           <a:p>
             <a:pPr algn="ctr"/>
+            <a:endParaRPr/>
           </a:p>
         </p:txBody>
       </p:sp>
@@ -5397,10 +5446,11 @@
           </a:fontRef>
         </p:style>
         <p:txBody>
-          <a:bodyPr rtlCol="0" anchor="ctr" wrap="square"/>
+          <a:bodyPr wrap="square" rtlCol="0" anchor="ctr"/>
           <a:lstStyle/>
           <a:p>
             <a:pPr algn="ctr"/>
+            <a:endParaRPr/>
           </a:p>
         </p:txBody>
       </p:sp>
@@ -5441,10 +5491,11 @@
           </a:fontRef>
         </p:style>
         <p:txBody>
-          <a:bodyPr rtlCol="0" anchor="ctr" wrap="square"/>
+          <a:bodyPr wrap="square" rtlCol="0" anchor="ctr"/>
           <a:lstStyle/>
           <a:p>
             <a:pPr algn="ctr"/>
+            <a:endParaRPr/>
           </a:p>
         </p:txBody>
       </p:sp>
@@ -5485,10 +5536,11 @@
           </a:fontRef>
         </p:style>
         <p:txBody>
-          <a:bodyPr rtlCol="0" anchor="ctr" wrap="square"/>
+          <a:bodyPr wrap="square" rtlCol="0" anchor="ctr"/>
           <a:lstStyle/>
           <a:p>
             <a:pPr algn="ctr"/>
+            <a:endParaRPr/>
           </a:p>
         </p:txBody>
       </p:sp>
@@ -5529,10 +5581,11 @@
           </a:fontRef>
         </p:style>
         <p:txBody>
-          <a:bodyPr rtlCol="0" anchor="ctr" wrap="square"/>
+          <a:bodyPr wrap="square" rtlCol="0" anchor="ctr"/>
           <a:lstStyle/>
           <a:p>
             <a:pPr algn="ctr"/>
+            <a:endParaRPr/>
           </a:p>
         </p:txBody>
       </p:sp>
@@ -5573,10 +5626,11 @@
           </a:fontRef>
         </p:style>
         <p:txBody>
-          <a:bodyPr rtlCol="0" anchor="ctr" wrap="square"/>
+          <a:bodyPr wrap="square" rtlCol="0" anchor="ctr"/>
           <a:lstStyle/>
           <a:p>
             <a:pPr algn="ctr"/>
+            <a:endParaRPr/>
           </a:p>
         </p:txBody>
       </p:sp>
@@ -5617,10 +5671,11 @@
           </a:fontRef>
         </p:style>
         <p:txBody>
-          <a:bodyPr rtlCol="0" anchor="ctr" wrap="square"/>
+          <a:bodyPr wrap="square" rtlCol="0" anchor="ctr"/>
           <a:lstStyle/>
           <a:p>
             <a:pPr algn="ctr"/>
+            <a:endParaRPr/>
           </a:p>
         </p:txBody>
       </p:sp>
@@ -5661,10 +5716,11 @@
           </a:fontRef>
         </p:style>
         <p:txBody>
-          <a:bodyPr rtlCol="0" anchor="ctr" wrap="square"/>
+          <a:bodyPr wrap="square" rtlCol="0" anchor="ctr"/>
           <a:lstStyle/>
           <a:p>
             <a:pPr algn="ctr"/>
+            <a:endParaRPr/>
           </a:p>
         </p:txBody>
       </p:sp>
@@ -5705,10 +5761,11 @@
           </a:fontRef>
         </p:style>
         <p:txBody>
-          <a:bodyPr rtlCol="0" anchor="ctr" wrap="square"/>
+          <a:bodyPr wrap="square" rtlCol="0" anchor="ctr"/>
           <a:lstStyle/>
           <a:p>
             <a:pPr algn="ctr"/>
+            <a:endParaRPr/>
           </a:p>
         </p:txBody>
       </p:sp>
@@ -5749,10 +5806,11 @@
           </a:fontRef>
         </p:style>
         <p:txBody>
-          <a:bodyPr rtlCol="0" anchor="ctr" wrap="square"/>
+          <a:bodyPr wrap="square" rtlCol="0" anchor="ctr"/>
           <a:lstStyle/>
           <a:p>
             <a:pPr algn="ctr"/>
+            <a:endParaRPr/>
           </a:p>
         </p:txBody>
       </p:sp>
@@ -5793,10 +5851,11 @@
           </a:fontRef>
         </p:style>
         <p:txBody>
-          <a:bodyPr rtlCol="0" anchor="ctr" wrap="square"/>
+          <a:bodyPr wrap="square" rtlCol="0" anchor="ctr"/>
           <a:lstStyle/>
           <a:p>
             <a:pPr algn="ctr"/>
+            <a:endParaRPr/>
           </a:p>
         </p:txBody>
       </p:sp>
@@ -5837,10 +5896,11 @@
           </a:fontRef>
         </p:style>
         <p:txBody>
-          <a:bodyPr rtlCol="0" anchor="ctr" wrap="square"/>
+          <a:bodyPr wrap="square" rtlCol="0" anchor="ctr"/>
           <a:lstStyle/>
           <a:p>
             <a:pPr algn="ctr"/>
+            <a:endParaRPr/>
           </a:p>
         </p:txBody>
       </p:sp>
@@ -5881,10 +5941,11 @@
           </a:fontRef>
         </p:style>
         <p:txBody>
-          <a:bodyPr rtlCol="0" anchor="ctr" wrap="square"/>
+          <a:bodyPr wrap="square" rtlCol="0" anchor="ctr"/>
           <a:lstStyle/>
           <a:p>
             <a:pPr algn="ctr"/>
+            <a:endParaRPr/>
           </a:p>
         </p:txBody>
       </p:sp>
@@ -5925,10 +5986,11 @@
           </a:fontRef>
         </p:style>
         <p:txBody>
-          <a:bodyPr rtlCol="0" anchor="ctr" wrap="square"/>
+          <a:bodyPr wrap="square" rtlCol="0" anchor="ctr"/>
           <a:lstStyle/>
           <a:p>
             <a:pPr algn="ctr"/>
+            <a:endParaRPr/>
           </a:p>
         </p:txBody>
       </p:sp>
@@ -5969,10 +6031,11 @@
           </a:fontRef>
         </p:style>
         <p:txBody>
-          <a:bodyPr rtlCol="0" anchor="ctr" wrap="square"/>
+          <a:bodyPr wrap="square" rtlCol="0" anchor="ctr"/>
           <a:lstStyle/>
           <a:p>
             <a:pPr algn="ctr"/>
+            <a:endParaRPr/>
           </a:p>
         </p:txBody>
       </p:sp>
@@ -6013,10 +6076,11 @@
           </a:fontRef>
         </p:style>
         <p:txBody>
-          <a:bodyPr rtlCol="0" anchor="ctr" wrap="square"/>
+          <a:bodyPr wrap="square" rtlCol="0" anchor="ctr"/>
           <a:lstStyle/>
           <a:p>
             <a:pPr algn="ctr"/>
+            <a:endParaRPr/>
           </a:p>
         </p:txBody>
       </p:sp>
@@ -6057,10 +6121,11 @@
           </a:fontRef>
         </p:style>
         <p:txBody>
-          <a:bodyPr rtlCol="0" anchor="ctr" wrap="square"/>
+          <a:bodyPr wrap="square" rtlCol="0" anchor="ctr"/>
           <a:lstStyle/>
           <a:p>
             <a:pPr algn="ctr"/>
+            <a:endParaRPr/>
           </a:p>
         </p:txBody>
       </p:sp>
@@ -6101,10 +6166,11 @@
           </a:fontRef>
         </p:style>
         <p:txBody>
-          <a:bodyPr rtlCol="0" anchor="ctr" wrap="square"/>
+          <a:bodyPr wrap="square" rtlCol="0" anchor="ctr"/>
           <a:lstStyle/>
           <a:p>
             <a:pPr algn="ctr"/>
+            <a:endParaRPr/>
           </a:p>
         </p:txBody>
       </p:sp>
@@ -6145,10 +6211,11 @@
           </a:fontRef>
         </p:style>
         <p:txBody>
-          <a:bodyPr rtlCol="0" anchor="ctr" wrap="square"/>
+          <a:bodyPr wrap="square" rtlCol="0" anchor="ctr"/>
           <a:lstStyle/>
           <a:p>
             <a:pPr algn="ctr"/>
+            <a:endParaRPr/>
           </a:p>
         </p:txBody>
       </p:sp>
@@ -6189,10 +6256,11 @@
           </a:fontRef>
         </p:style>
         <p:txBody>
-          <a:bodyPr rtlCol="0" anchor="ctr" wrap="square"/>
+          <a:bodyPr wrap="square" rtlCol="0" anchor="ctr"/>
           <a:lstStyle/>
           <a:p>
             <a:pPr algn="ctr"/>
+            <a:endParaRPr/>
           </a:p>
         </p:txBody>
       </p:sp>
@@ -6233,10 +6301,11 @@
           </a:fontRef>
         </p:style>
         <p:txBody>
-          <a:bodyPr rtlCol="0" anchor="ctr" wrap="square"/>
+          <a:bodyPr wrap="square" rtlCol="0" anchor="ctr"/>
           <a:lstStyle/>
           <a:p>
             <a:pPr algn="ctr"/>
+            <a:endParaRPr/>
           </a:p>
         </p:txBody>
       </p:sp>
@@ -6277,10 +6346,11 @@
           </a:fontRef>
         </p:style>
         <p:txBody>
-          <a:bodyPr rtlCol="0" anchor="ctr" wrap="square"/>
+          <a:bodyPr wrap="square" rtlCol="0" anchor="ctr"/>
           <a:lstStyle/>
           <a:p>
             <a:pPr algn="ctr"/>
+            <a:endParaRPr/>
           </a:p>
         </p:txBody>
       </p:sp>
@@ -6321,10 +6391,11 @@
           </a:fontRef>
         </p:style>
         <p:txBody>
-          <a:bodyPr rtlCol="0" anchor="ctr" wrap="square"/>
+          <a:bodyPr wrap="square" rtlCol="0" anchor="ctr"/>
           <a:lstStyle/>
           <a:p>
             <a:pPr algn="ctr"/>
+            <a:endParaRPr/>
           </a:p>
         </p:txBody>
       </p:sp>
@@ -6365,10 +6436,11 @@
           </a:fontRef>
         </p:style>
         <p:txBody>
-          <a:bodyPr rtlCol="0" anchor="ctr" wrap="square"/>
+          <a:bodyPr wrap="square" rtlCol="0" anchor="ctr"/>
           <a:lstStyle/>
           <a:p>
             <a:pPr algn="ctr"/>
+            <a:endParaRPr/>
           </a:p>
         </p:txBody>
       </p:sp>
@@ -6409,10 +6481,11 @@
           </a:fontRef>
         </p:style>
         <p:txBody>
-          <a:bodyPr rtlCol="0" anchor="ctr" wrap="square"/>
+          <a:bodyPr wrap="square" rtlCol="0" anchor="ctr"/>
           <a:lstStyle/>
           <a:p>
             <a:pPr algn="ctr"/>
+            <a:endParaRPr/>
           </a:p>
         </p:txBody>
       </p:sp>
@@ -6453,10 +6526,11 @@
           </a:fontRef>
         </p:style>
         <p:txBody>
-          <a:bodyPr rtlCol="0" anchor="ctr" wrap="square"/>
+          <a:bodyPr wrap="square" rtlCol="0" anchor="ctr"/>
           <a:lstStyle/>
           <a:p>
             <a:pPr algn="ctr"/>
+            <a:endParaRPr/>
           </a:p>
         </p:txBody>
       </p:sp>
@@ -6497,10 +6571,11 @@
           </a:fontRef>
         </p:style>
         <p:txBody>
-          <a:bodyPr rtlCol="0" anchor="ctr" wrap="square"/>
+          <a:bodyPr wrap="square" rtlCol="0" anchor="ctr"/>
           <a:lstStyle/>
           <a:p>
             <a:pPr algn="ctr"/>
+            <a:endParaRPr/>
           </a:p>
         </p:txBody>
       </p:sp>
@@ -6541,10 +6616,11 @@
           </a:fontRef>
         </p:style>
         <p:txBody>
-          <a:bodyPr rtlCol="0" anchor="ctr" wrap="square"/>
+          <a:bodyPr wrap="square" rtlCol="0" anchor="ctr"/>
           <a:lstStyle/>
           <a:p>
             <a:pPr algn="ctr"/>
+            <a:endParaRPr/>
           </a:p>
         </p:txBody>
       </p:sp>
@@ -6585,10 +6661,11 @@
           </a:fontRef>
         </p:style>
         <p:txBody>
-          <a:bodyPr rtlCol="0" anchor="ctr" wrap="square"/>
+          <a:bodyPr wrap="square" rtlCol="0" anchor="ctr"/>
           <a:lstStyle/>
           <a:p>
             <a:pPr algn="ctr"/>
+            <a:endParaRPr/>
           </a:p>
         </p:txBody>
       </p:sp>
@@ -6629,10 +6706,11 @@
           </a:fontRef>
         </p:style>
         <p:txBody>
-          <a:bodyPr rtlCol="0" anchor="ctr" wrap="square"/>
+          <a:bodyPr wrap="square" rtlCol="0" anchor="ctr"/>
           <a:lstStyle/>
           <a:p>
             <a:pPr algn="ctr"/>
+            <a:endParaRPr/>
           </a:p>
         </p:txBody>
       </p:sp>
@@ -6673,10 +6751,11 @@
           </a:fontRef>
         </p:style>
         <p:txBody>
-          <a:bodyPr rtlCol="0" anchor="ctr" wrap="square"/>
+          <a:bodyPr wrap="square" rtlCol="0" anchor="ctr"/>
           <a:lstStyle/>
           <a:p>
             <a:pPr algn="ctr"/>
+            <a:endParaRPr/>
           </a:p>
         </p:txBody>
       </p:sp>
@@ -6717,10 +6796,11 @@
           </a:fontRef>
         </p:style>
         <p:txBody>
-          <a:bodyPr rtlCol="0" anchor="ctr" wrap="square"/>
+          <a:bodyPr wrap="square" rtlCol="0" anchor="ctr"/>
           <a:lstStyle/>
           <a:p>
             <a:pPr algn="ctr"/>
+            <a:endParaRPr/>
           </a:p>
         </p:txBody>
       </p:sp>
@@ -6761,10 +6841,11 @@
           </a:fontRef>
         </p:style>
         <p:txBody>
-          <a:bodyPr rtlCol="0" anchor="ctr" wrap="square"/>
+          <a:bodyPr wrap="square" rtlCol="0" anchor="ctr"/>
           <a:lstStyle/>
           <a:p>
             <a:pPr algn="ctr"/>
+            <a:endParaRPr/>
           </a:p>
         </p:txBody>
       </p:sp>
@@ -6805,10 +6886,11 @@
           </a:fontRef>
         </p:style>
         <p:txBody>
-          <a:bodyPr rtlCol="0" anchor="ctr" wrap="square"/>
+          <a:bodyPr wrap="square" rtlCol="0" anchor="ctr"/>
           <a:lstStyle/>
           <a:p>
             <a:pPr algn="ctr"/>
+            <a:endParaRPr/>
           </a:p>
         </p:txBody>
       </p:sp>
@@ -6849,10 +6931,11 @@
           </a:fontRef>
         </p:style>
         <p:txBody>
-          <a:bodyPr rtlCol="0" anchor="ctr" wrap="square"/>
+          <a:bodyPr wrap="square" rtlCol="0" anchor="ctr"/>
           <a:lstStyle/>
           <a:p>
             <a:pPr algn="ctr"/>
+            <a:endParaRPr/>
           </a:p>
         </p:txBody>
       </p:sp>
@@ -6893,10 +6976,11 @@
           </a:fontRef>
         </p:style>
         <p:txBody>
-          <a:bodyPr rtlCol="0" anchor="ctr" wrap="square"/>
+          <a:bodyPr wrap="square" rtlCol="0" anchor="ctr"/>
           <a:lstStyle/>
           <a:p>
             <a:pPr algn="ctr"/>
+            <a:endParaRPr/>
           </a:p>
         </p:txBody>
       </p:sp>
@@ -6937,10 +7021,11 @@
           </a:fontRef>
         </p:style>
         <p:txBody>
-          <a:bodyPr rtlCol="0" anchor="ctr" wrap="square"/>
+          <a:bodyPr wrap="square" rtlCol="0" anchor="ctr"/>
           <a:lstStyle/>
           <a:p>
             <a:pPr algn="ctr"/>
+            <a:endParaRPr/>
           </a:p>
         </p:txBody>
       </p:sp>
@@ -6981,10 +7066,11 @@
           </a:fontRef>
         </p:style>
         <p:txBody>
-          <a:bodyPr rtlCol="0" anchor="ctr" wrap="square"/>
+          <a:bodyPr wrap="square" rtlCol="0" anchor="ctr"/>
           <a:lstStyle/>
           <a:p>
             <a:pPr algn="ctr"/>
+            <a:endParaRPr/>
           </a:p>
         </p:txBody>
       </p:sp>
@@ -7025,10 +7111,11 @@
           </a:fontRef>
         </p:style>
         <p:txBody>
-          <a:bodyPr rtlCol="0" anchor="ctr" wrap="square"/>
+          <a:bodyPr wrap="square" rtlCol="0" anchor="ctr"/>
           <a:lstStyle/>
           <a:p>
             <a:pPr algn="ctr"/>
+            <a:endParaRPr/>
           </a:p>
         </p:txBody>
       </p:sp>
@@ -7069,10 +7156,11 @@
           </a:fontRef>
         </p:style>
         <p:txBody>
-          <a:bodyPr rtlCol="0" anchor="ctr" wrap="square"/>
+          <a:bodyPr wrap="square" rtlCol="0" anchor="ctr"/>
           <a:lstStyle/>
           <a:p>
             <a:pPr algn="ctr"/>
+            <a:endParaRPr/>
           </a:p>
         </p:txBody>
       </p:sp>
@@ -7113,10 +7201,11 @@
           </a:fontRef>
         </p:style>
         <p:txBody>
-          <a:bodyPr rtlCol="0" anchor="ctr" wrap="square"/>
+          <a:bodyPr wrap="square" rtlCol="0" anchor="ctr"/>
           <a:lstStyle/>
           <a:p>
             <a:pPr algn="ctr"/>
+            <a:endParaRPr/>
           </a:p>
         </p:txBody>
       </p:sp>
@@ -7193,7 +7282,7 @@
           </a:fontRef>
         </p:style>
         <p:txBody>
-          <a:bodyPr rtlCol="0" anchor="ctr" wrap="square" lIns="25400" rIns="25400" tIns="12700" bIns="12700"/>
+          <a:bodyPr wrap="square" lIns="25400" tIns="12700" rIns="25400" bIns="12700" rtlCol="0" anchor="ctr"/>
           <a:lstStyle/>
           <a:p>
             <a:pPr algn="ctr">
@@ -7254,7 +7343,7 @@
           </a:fontRef>
         </p:style>
         <p:txBody>
-          <a:bodyPr rtlCol="0" anchor="ctr" wrap="square" lIns="25400" rIns="25400" tIns="12700" bIns="12700"/>
+          <a:bodyPr wrap="square" lIns="25400" tIns="12700" rIns="25400" bIns="12700" rtlCol="0" anchor="ctr"/>
           <a:lstStyle/>
           <a:p>
             <a:pPr algn="ctr">
@@ -7315,7 +7404,7 @@
           </a:fontRef>
         </p:style>
         <p:txBody>
-          <a:bodyPr rtlCol="0" anchor="ctr" wrap="square" lIns="25400" rIns="25400" tIns="12700" bIns="12700"/>
+          <a:bodyPr wrap="square" lIns="25400" tIns="12700" rIns="25400" bIns="12700" rtlCol="0" anchor="ctr"/>
           <a:lstStyle/>
           <a:p>
             <a:pPr algn="ctr">
@@ -7376,7 +7465,7 @@
           </a:fontRef>
         </p:style>
         <p:txBody>
-          <a:bodyPr rtlCol="0" anchor="ctr" wrap="square" lIns="25400" rIns="25400" tIns="12700" bIns="12700"/>
+          <a:bodyPr wrap="square" lIns="25400" tIns="12700" rIns="25400" bIns="12700" rtlCol="0" anchor="ctr"/>
           <a:lstStyle/>
           <a:p>
             <a:pPr algn="ctr">
@@ -7437,7 +7526,7 @@
           </a:fontRef>
         </p:style>
         <p:txBody>
-          <a:bodyPr rtlCol="0" anchor="ctr" wrap="square" lIns="25400" rIns="25400" tIns="12700" bIns="12700"/>
+          <a:bodyPr wrap="square" lIns="25400" tIns="12700" rIns="25400" bIns="12700" rtlCol="0" anchor="ctr"/>
           <a:lstStyle/>
           <a:p>
             <a:pPr algn="ctr">
@@ -7498,7 +7587,7 @@
           </a:fontRef>
         </p:style>
         <p:txBody>
-          <a:bodyPr rtlCol="0" anchor="ctr" wrap="square" lIns="25400" rIns="25400" tIns="12700" bIns="12700"/>
+          <a:bodyPr wrap="square" lIns="25400" tIns="12700" rIns="25400" bIns="12700" rtlCol="0" anchor="ctr"/>
           <a:lstStyle/>
           <a:p>
             <a:pPr algn="ctr">
@@ -7574,7 +7663,7 @@
 </file>
 
 <file path=ppt/slides/slide10.xml><?xml version="1.0" encoding="utf-8"?>
-<p:sld xmlns:a="http://schemas.openxmlformats.org/drawingml/2006/main" xmlns:p="http://schemas.openxmlformats.org/presentationml/2006/main" xmlns:r="http://schemas.openxmlformats.org/officeDocument/2006/relationships">
+<p:sld xmlns:a="http://schemas.openxmlformats.org/drawingml/2006/main" xmlns:r="http://schemas.openxmlformats.org/officeDocument/2006/relationships" xmlns:p="http://schemas.openxmlformats.org/presentationml/2006/main">
   <p:cSld>
     <p:spTree>
       <p:nvGrpSpPr>
@@ -7582,51 +7671,14 @@
         <p:cNvGrpSpPr/>
         <p:nvPr/>
       </p:nvGrpSpPr>
-      <p:grpSpPr/>
-      <p:sp>
-        <p:nvSpPr>
-          <p:cNvPr id="2" name="Rectangle 1"/>
-          <p:cNvSpPr/>
-          <p:nvPr/>
-        </p:nvSpPr>
-        <p:spPr>
-          <a:xfrm>
-            <a:off x="-25400" y="-25400"/>
-            <a:ext cx="12242800" cy="6908800"/>
-          </a:xfrm>
-          <a:prstGeom prst="rect">
-            <a:avLst/>
-          </a:prstGeom>
-          <a:solidFill>
-            <a:srgbClr val="F7F7F3"/>
-          </a:solidFill>
-          <a:ln>
-            <a:noFill/>
-          </a:ln>
-          <a:effectLst/>
-        </p:spPr>
-        <p:style>
-          <a:lnRef idx="1">
-            <a:schemeClr val="accent1"/>
-          </a:lnRef>
-          <a:fillRef idx="3">
-            <a:schemeClr val="accent1"/>
-          </a:fillRef>
-          <a:effectRef idx="2">
-            <a:schemeClr val="accent1"/>
-          </a:effectRef>
-          <a:fontRef idx="minor">
-            <a:schemeClr val="lt1"/>
-          </a:fontRef>
-        </p:style>
-        <p:txBody>
-          <a:bodyPr rtlCol="0" anchor="ctr" wrap="square"/>
-          <a:lstStyle/>
-          <a:p>
-            <a:pPr algn="ctr"/>
-          </a:p>
-        </p:txBody>
-      </p:sp>
+      <p:grpSpPr>
+        <a:xfrm>
+          <a:off x="0" y="0"/>
+          <a:ext cx="0" cy="0"/>
+          <a:chOff x="0" y="0"/>
+          <a:chExt cx="0" cy="0"/>
+        </a:xfrm>
+      </p:grpSpPr>
       <p:sp>
         <p:nvSpPr>
           <p:cNvPr id="3" name="TextBox 2"/>
@@ -7701,15 +7753,42 @@
               </a:spcAft>
             </a:pPr>
             <a:r>
-              <a:rPr sz="2700" b="1">
+              <a:rPr sz="2700" b="1" dirty="0" err="1">
                 <a:solidFill>
                   <a:srgbClr val="16233A"/>
                 </a:solidFill>
                 <a:latin typeface="Meiryo"/>
                 <a:ea typeface="メイリオ"/>
               </a:rPr>
-              <a:t>検証 — 人の耳より先に気づけるか</a:t>
-            </a:r>
+              <a:t>検証</a:t>
+            </a:r>
+            <a:r>
+              <a:rPr sz="2700" b="1" dirty="0">
+                <a:solidFill>
+                  <a:srgbClr val="16233A"/>
+                </a:solidFill>
+                <a:latin typeface="Meiryo"/>
+                <a:ea typeface="メイリオ"/>
+              </a:rPr>
+              <a:t> — </a:t>
+            </a:r>
+            <a:r>
+              <a:rPr sz="2700" b="1" dirty="0" err="1">
+                <a:solidFill>
+                  <a:srgbClr val="16233A"/>
+                </a:solidFill>
+                <a:latin typeface="Meiryo"/>
+                <a:ea typeface="メイリオ"/>
+              </a:rPr>
+              <a:t>人の耳より先に気づけるか</a:t>
+            </a:r>
+            <a:endParaRPr sz="2700" b="1" dirty="0">
+              <a:solidFill>
+                <a:srgbClr val="16233A"/>
+              </a:solidFill>
+              <a:latin typeface="Meiryo"/>
+              <a:ea typeface="メイリオ"/>
+            </a:endParaRPr>
           </a:p>
         </p:txBody>
       </p:sp>
@@ -7752,10 +7831,11 @@
           </a:fontRef>
         </p:style>
         <p:txBody>
-          <a:bodyPr rtlCol="0" anchor="ctr" wrap="square"/>
+          <a:bodyPr wrap="square" rtlCol="0" anchor="ctr"/>
           <a:lstStyle/>
           <a:p>
             <a:pPr algn="ctr"/>
+            <a:endParaRPr/>
           </a:p>
         </p:txBody>
       </p:sp>
@@ -8148,10 +8228,11 @@
           </a:fontRef>
         </p:style>
         <p:txBody>
-          <a:bodyPr rtlCol="0" anchor="ctr" wrap="square"/>
+          <a:bodyPr wrap="square" rtlCol="0" anchor="ctr"/>
           <a:lstStyle/>
           <a:p>
             <a:pPr algn="ctr"/>
+            <a:endParaRPr/>
           </a:p>
         </p:txBody>
       </p:sp>
@@ -8517,7 +8598,7 @@
           </a:fontRef>
         </p:style>
         <p:txBody>
-          <a:bodyPr rtlCol="0" anchor="t" wrap="square" lIns="177800" rIns="177800" tIns="127000" bIns="101600"/>
+          <a:bodyPr wrap="square" lIns="177800" tIns="127000" rIns="177800" bIns="101600" rtlCol="0" anchor="t"/>
           <a:lstStyle/>
           <a:p>
             <a:pPr algn="l">
@@ -8529,14 +8610,24 @@
               </a:spcAft>
             </a:pPr>
             <a:r>
-              <a:rPr sz="1400" b="1">
+              <a:rPr sz="1400" b="1" dirty="0" err="1">
                 <a:solidFill>
                   <a:srgbClr val="16233A"/>
                 </a:solidFill>
                 <a:latin typeface="Meiryo"/>
                 <a:ea typeface="メイリオ"/>
               </a:rPr>
-              <a:t>通知層（車）</a:t>
+              <a:t>通知層（車</a:t>
+            </a:r>
+            <a:r>
+              <a:rPr sz="1400" b="1" dirty="0">
+                <a:solidFill>
+                  <a:srgbClr val="16233A"/>
+                </a:solidFill>
+                <a:latin typeface="Meiryo"/>
+                <a:ea typeface="メイリオ"/>
+              </a:rPr>
+              <a:t>）</a:t>
             </a:r>
           </a:p>
           <a:p>
@@ -8552,7 +8643,7 @@
               </a:spcAft>
             </a:pPr>
             <a:r>
-              <a:rPr sz="1250" b="0">
+              <a:rPr sz="1250" b="0" dirty="0">
                 <a:solidFill>
                   <a:srgbClr val="3A4658"/>
                 </a:solidFill>
@@ -8562,7 +8653,7 @@
               <a:t>1.5m以内まで近づく車に至近警告が出た割合 </a:t>
             </a:r>
             <a:r>
-              <a:rPr sz="1500" b="1">
+              <a:rPr sz="1500" b="1" dirty="0">
                 <a:solidFill>
                   <a:srgbClr val="16233A"/>
                 </a:solidFill>
@@ -8585,7 +8676,7 @@
               </a:spcAft>
             </a:pPr>
             <a:r>
-              <a:rPr sz="1250" b="0">
+              <a:rPr sz="1250" b="0" dirty="0">
                 <a:solidFill>
                   <a:srgbClr val="3A4658"/>
                 </a:solidFill>
@@ -8595,7 +8686,7 @@
               <a:t>3.2mより遠い車を鳴らさなかった割合 </a:t>
             </a:r>
             <a:r>
-              <a:rPr sz="1500" b="1">
+              <a:rPr sz="1500" b="1" dirty="0">
                 <a:solidFill>
                   <a:srgbClr val="16233A"/>
                 </a:solidFill>
@@ -8618,14 +8709,24 @@
               </a:spcAft>
             </a:pPr>
             <a:r>
-              <a:rPr sz="1250" b="0">
+              <a:rPr sz="1250" b="0" dirty="0" err="1">
                 <a:solidFill>
                   <a:srgbClr val="3A4658"/>
                 </a:solidFill>
                 <a:latin typeface="Meiryo"/>
                 <a:ea typeface="メイリオ"/>
               </a:rPr>
-              <a:t>安全な車への誤った至近警告 1.3%</a:t>
+              <a:t>安全な車への誤った至近警告</a:t>
+            </a:r>
+            <a:r>
+              <a:rPr sz="1250" b="0" dirty="0">
+                <a:solidFill>
+                  <a:srgbClr val="3A4658"/>
+                </a:solidFill>
+                <a:latin typeface="Meiryo"/>
+                <a:ea typeface="メイリオ"/>
+              </a:rPr>
+              <a:t> 1.3%</a:t>
             </a:r>
           </a:p>
         </p:txBody>
@@ -8669,7 +8770,7 @@
           </a:fontRef>
         </p:style>
         <p:txBody>
-          <a:bodyPr rtlCol="0" anchor="t" wrap="square" lIns="177800" rIns="177800" tIns="127000" bIns="101600"/>
+          <a:bodyPr wrap="square" lIns="177800" tIns="127000" rIns="177800" bIns="101600" rtlCol="0" anchor="t"/>
           <a:lstStyle/>
           <a:p>
             <a:pPr algn="l">
@@ -8798,7 +8899,7 @@
           </a:fontRef>
         </p:style>
         <p:txBody>
-          <a:bodyPr rtlCol="0" anchor="t" wrap="square" lIns="177800" rIns="177800" tIns="127000" bIns="101600"/>
+          <a:bodyPr wrap="square" lIns="177800" tIns="127000" rIns="177800" bIns="101600" rtlCol="0" anchor="t"/>
           <a:lstStyle/>
           <a:p>
             <a:pPr algn="l">
@@ -8951,7 +9052,7 @@
           </a:fontRef>
         </p:style>
         <p:txBody>
-          <a:bodyPr rtlCol="0" anchor="ctr" wrap="square" lIns="25400" rIns="25400" tIns="12700" bIns="12700"/>
+          <a:bodyPr wrap="square" lIns="25400" tIns="12700" rIns="25400" bIns="12700" rtlCol="0" anchor="ctr"/>
           <a:lstStyle/>
           <a:p>
             <a:pPr algn="ctr">
@@ -9012,7 +9113,7 @@
           </a:fontRef>
         </p:style>
         <p:txBody>
-          <a:bodyPr rtlCol="0" anchor="ctr" wrap="square" lIns="25400" rIns="25400" tIns="12700" bIns="12700"/>
+          <a:bodyPr wrap="square" lIns="25400" tIns="12700" rIns="25400" bIns="12700" rtlCol="0" anchor="ctr"/>
           <a:lstStyle/>
           <a:p>
             <a:pPr algn="ctr">
@@ -9073,7 +9174,7 @@
           </a:fontRef>
         </p:style>
         <p:txBody>
-          <a:bodyPr rtlCol="0" anchor="ctr" wrap="square" lIns="25400" rIns="25400" tIns="12700" bIns="12700"/>
+          <a:bodyPr wrap="square" lIns="25400" tIns="12700" rIns="25400" bIns="12700" rtlCol="0" anchor="ctr"/>
           <a:lstStyle/>
           <a:p>
             <a:pPr algn="ctr">
@@ -9134,7 +9235,7 @@
           </a:fontRef>
         </p:style>
         <p:txBody>
-          <a:bodyPr rtlCol="0" anchor="ctr" wrap="square" lIns="25400" rIns="25400" tIns="12700" bIns="12700"/>
+          <a:bodyPr wrap="square" lIns="25400" tIns="12700" rIns="25400" bIns="12700" rtlCol="0" anchor="ctr"/>
           <a:lstStyle/>
           <a:p>
             <a:pPr algn="ctr">
@@ -9195,7 +9296,7 @@
           </a:fontRef>
         </p:style>
         <p:txBody>
-          <a:bodyPr rtlCol="0" anchor="ctr" wrap="square" lIns="25400" rIns="25400" tIns="12700" bIns="12700"/>
+          <a:bodyPr wrap="square" lIns="25400" tIns="12700" rIns="25400" bIns="12700" rtlCol="0" anchor="ctr"/>
           <a:lstStyle/>
           <a:p>
             <a:pPr algn="ctr">
@@ -9256,7 +9357,7 @@
           </a:fontRef>
         </p:style>
         <p:txBody>
-          <a:bodyPr rtlCol="0" anchor="ctr" wrap="square" lIns="25400" rIns="25400" tIns="12700" bIns="12700"/>
+          <a:bodyPr wrap="square" lIns="25400" tIns="12700" rIns="25400" bIns="12700" rtlCol="0" anchor="ctr"/>
           <a:lstStyle/>
           <a:p>
             <a:pPr algn="ctr">
@@ -9332,7 +9433,7 @@
 </file>
 
 <file path=ppt/slides/slide11.xml><?xml version="1.0" encoding="utf-8"?>
-<p:sld xmlns:a="http://schemas.openxmlformats.org/drawingml/2006/main" xmlns:p="http://schemas.openxmlformats.org/presentationml/2006/main" xmlns:r="http://schemas.openxmlformats.org/officeDocument/2006/relationships">
+<p:sld xmlns:a="http://schemas.openxmlformats.org/drawingml/2006/main" xmlns:r="http://schemas.openxmlformats.org/officeDocument/2006/relationships" xmlns:p="http://schemas.openxmlformats.org/presentationml/2006/main">
   <p:cSld>
     <p:spTree>
       <p:nvGrpSpPr>
@@ -9340,7 +9441,14 @@
         <p:cNvGrpSpPr/>
         <p:nvPr/>
       </p:nvGrpSpPr>
-      <p:grpSpPr/>
+      <p:grpSpPr>
+        <a:xfrm>
+          <a:off x="0" y="0"/>
+          <a:ext cx="0" cy="0"/>
+          <a:chOff x="0" y="0"/>
+          <a:chExt cx="0" cy="0"/>
+        </a:xfrm>
+      </p:grpSpPr>
       <p:sp>
         <p:nvSpPr>
           <p:cNvPr id="2" name="Rectangle 1"/>
@@ -9378,10 +9486,11 @@
           </a:fontRef>
         </p:style>
         <p:txBody>
-          <a:bodyPr rtlCol="0" anchor="ctr" wrap="square"/>
+          <a:bodyPr wrap="square" rtlCol="0" anchor="ctr"/>
           <a:lstStyle/>
           <a:p>
             <a:pPr algn="ctr"/>
+            <a:endParaRPr/>
           </a:p>
         </p:txBody>
       </p:sp>
@@ -9573,7 +9682,7 @@
           </a:fontRef>
         </p:style>
         <p:txBody>
-          <a:bodyPr rtlCol="0" anchor="t" wrap="square" lIns="177800" rIns="177800" tIns="127000" bIns="101600"/>
+          <a:bodyPr wrap="square" lIns="177800" tIns="127000" rIns="177800" bIns="101600" rtlCol="0" anchor="t"/>
           <a:lstStyle/>
           <a:p>
             <a:pPr algn="l">
@@ -9659,7 +9768,7 @@
           </a:fontRef>
         </p:style>
         <p:txBody>
-          <a:bodyPr rtlCol="0" anchor="t" wrap="square" lIns="177800" rIns="177800" tIns="127000" bIns="101600"/>
+          <a:bodyPr wrap="square" lIns="177800" tIns="127000" rIns="177800" bIns="101600" rtlCol="0" anchor="t"/>
           <a:lstStyle/>
           <a:p>
             <a:pPr algn="l">
@@ -9671,7 +9780,7 @@
               </a:spcAft>
             </a:pPr>
             <a:r>
-              <a:rPr sz="1400" b="1">
+              <a:rPr sz="1400" b="1" dirty="0" err="1">
                 <a:solidFill>
                   <a:srgbClr val="16233A"/>
                 </a:solidFill>
@@ -9680,6 +9789,13 @@
               </a:rPr>
               <a:t>測り方</a:t>
             </a:r>
+            <a:endParaRPr sz="1400" b="1" dirty="0">
+              <a:solidFill>
+                <a:srgbClr val="16233A"/>
+              </a:solidFill>
+              <a:latin typeface="Meiryo"/>
+              <a:ea typeface="メイリオ"/>
+            </a:endParaRPr>
           </a:p>
           <a:p>
             <a:pPr algn="l">
@@ -9694,15 +9810,42 @@
               </a:spcAft>
             </a:pPr>
             <a:r>
-              <a:rPr sz="1300" b="0">
+              <a:rPr sz="1300" b="0" dirty="0" err="1">
                 <a:solidFill>
                   <a:srgbClr val="3A4658"/>
                 </a:solidFill>
                 <a:latin typeface="Meiryo"/>
                 <a:ea typeface="メイリオ"/>
               </a:rPr>
-              <a:t>各版を同一の評価セット＋実環境録音の共通土俵で採点 → 落ちた分＝その物理の大事さ</a:t>
-            </a:r>
+              <a:t>各版を同一の評価セット＋実環境録音の共通土俵で採点</a:t>
+            </a:r>
+            <a:r>
+              <a:rPr sz="1300" b="0" dirty="0">
+                <a:solidFill>
+                  <a:srgbClr val="3A4658"/>
+                </a:solidFill>
+                <a:latin typeface="Meiryo"/>
+                <a:ea typeface="メイリオ"/>
+              </a:rPr>
+              <a:t> → </a:t>
+            </a:r>
+            <a:r>
+              <a:rPr sz="1300" b="0" dirty="0" err="1">
+                <a:solidFill>
+                  <a:srgbClr val="3A4658"/>
+                </a:solidFill>
+                <a:latin typeface="Meiryo"/>
+                <a:ea typeface="メイリオ"/>
+              </a:rPr>
+              <a:t>落ちた分＝その物理の大事さ</a:t>
+            </a:r>
+            <a:endParaRPr sz="1300" b="0" dirty="0">
+              <a:solidFill>
+                <a:srgbClr val="3A4658"/>
+              </a:solidFill>
+              <a:latin typeface="Meiryo"/>
+              <a:ea typeface="メイリオ"/>
+            </a:endParaRPr>
           </a:p>
         </p:txBody>
       </p:sp>
@@ -9745,7 +9888,7 @@
           </a:fontRef>
         </p:style>
         <p:txBody>
-          <a:bodyPr rtlCol="0" anchor="t" wrap="square" lIns="177800" rIns="177800" tIns="127000" bIns="101600"/>
+          <a:bodyPr wrap="square" lIns="177800" tIns="127000" rIns="177800" bIns="101600" rtlCol="0" anchor="t"/>
           <a:lstStyle/>
           <a:p>
             <a:pPr algn="l">
@@ -9757,7 +9900,7 @@
               </a:spcAft>
             </a:pPr>
             <a:r>
-              <a:rPr sz="1400" b="1">
+              <a:rPr sz="1400" b="1" dirty="0" err="1">
                 <a:solidFill>
                   <a:srgbClr val="16233A"/>
                 </a:solidFill>
@@ -9766,6 +9909,13 @@
               </a:rPr>
               <a:t>位置づけ</a:t>
             </a:r>
+            <a:endParaRPr sz="1400" b="1" dirty="0">
+              <a:solidFill>
+                <a:srgbClr val="16233A"/>
+              </a:solidFill>
+              <a:latin typeface="Meiryo"/>
+              <a:ea typeface="メイリオ"/>
+            </a:endParaRPr>
           </a:p>
           <a:p>
             <a:pPr algn="l">
@@ -9780,15 +9930,32 @@
               </a:spcAft>
             </a:pPr>
             <a:r>
-              <a:rPr sz="1300" b="0">
+              <a:rPr sz="1300" b="0" dirty="0">
                 <a:solidFill>
                   <a:srgbClr val="3A4658"/>
                 </a:solidFill>
                 <a:latin typeface="Meiryo"/>
                 <a:ea typeface="メイリオ"/>
               </a:rPr>
-              <a:t>「合成データのどの物理が実環境性能に必要か」という問いに、切り分け実験で直接答える</a:t>
-            </a:r>
+              <a:t>「</a:t>
+            </a:r>
+            <a:r>
+              <a:rPr sz="1300" b="0" dirty="0" err="1">
+                <a:solidFill>
+                  <a:srgbClr val="3A4658"/>
+                </a:solidFill>
+                <a:latin typeface="Meiryo"/>
+                <a:ea typeface="メイリオ"/>
+              </a:rPr>
+              <a:t>合成データのどの物理が実環境性能に必要か」という問いに、切り分け実験で直接答える</a:t>
+            </a:r>
+            <a:endParaRPr sz="1300" b="0" dirty="0">
+              <a:solidFill>
+                <a:srgbClr val="3A4658"/>
+              </a:solidFill>
+              <a:latin typeface="Meiryo"/>
+              <a:ea typeface="メイリオ"/>
+            </a:endParaRPr>
           </a:p>
         </p:txBody>
       </p:sp>
@@ -9865,7 +10032,7 @@
           </a:fontRef>
         </p:style>
         <p:txBody>
-          <a:bodyPr rtlCol="0" anchor="ctr" wrap="square" lIns="25400" rIns="25400" tIns="12700" bIns="12700"/>
+          <a:bodyPr wrap="square" lIns="25400" tIns="12700" rIns="25400" bIns="12700" rtlCol="0" anchor="ctr"/>
           <a:lstStyle/>
           <a:p>
             <a:pPr algn="ctr">
@@ -9926,7 +10093,7 @@
           </a:fontRef>
         </p:style>
         <p:txBody>
-          <a:bodyPr rtlCol="0" anchor="ctr" wrap="square" lIns="25400" rIns="25400" tIns="12700" bIns="12700"/>
+          <a:bodyPr wrap="square" lIns="25400" tIns="12700" rIns="25400" bIns="12700" rtlCol="0" anchor="ctr"/>
           <a:lstStyle/>
           <a:p>
             <a:pPr algn="ctr">
@@ -9987,7 +10154,7 @@
           </a:fontRef>
         </p:style>
         <p:txBody>
-          <a:bodyPr rtlCol="0" anchor="ctr" wrap="square" lIns="25400" rIns="25400" tIns="12700" bIns="12700"/>
+          <a:bodyPr wrap="square" lIns="25400" tIns="12700" rIns="25400" bIns="12700" rtlCol="0" anchor="ctr"/>
           <a:lstStyle/>
           <a:p>
             <a:pPr algn="ctr">
@@ -10048,7 +10215,7 @@
           </a:fontRef>
         </p:style>
         <p:txBody>
-          <a:bodyPr rtlCol="0" anchor="ctr" wrap="square" lIns="25400" rIns="25400" tIns="12700" bIns="12700"/>
+          <a:bodyPr wrap="square" lIns="25400" tIns="12700" rIns="25400" bIns="12700" rtlCol="0" anchor="ctr"/>
           <a:lstStyle/>
           <a:p>
             <a:pPr algn="ctr">
@@ -10109,7 +10276,7 @@
           </a:fontRef>
         </p:style>
         <p:txBody>
-          <a:bodyPr rtlCol="0" anchor="ctr" wrap="square" lIns="25400" rIns="25400" tIns="12700" bIns="12700"/>
+          <a:bodyPr wrap="square" lIns="25400" tIns="12700" rIns="25400" bIns="12700" rtlCol="0" anchor="ctr"/>
           <a:lstStyle/>
           <a:p>
             <a:pPr algn="ctr">
@@ -10170,7 +10337,7 @@
           </a:fontRef>
         </p:style>
         <p:txBody>
-          <a:bodyPr rtlCol="0" anchor="ctr" wrap="square" lIns="25400" rIns="25400" tIns="12700" bIns="12700"/>
+          <a:bodyPr wrap="square" lIns="25400" tIns="12700" rIns="25400" bIns="12700" rtlCol="0" anchor="ctr"/>
           <a:lstStyle/>
           <a:p>
             <a:pPr algn="ctr">
@@ -10246,7 +10413,7 @@
 </file>
 
 <file path=ppt/slides/slide12.xml><?xml version="1.0" encoding="utf-8"?>
-<p:sld xmlns:a="http://schemas.openxmlformats.org/drawingml/2006/main" xmlns:p="http://schemas.openxmlformats.org/presentationml/2006/main" xmlns:r="http://schemas.openxmlformats.org/officeDocument/2006/relationships">
+<p:sld xmlns:a="http://schemas.openxmlformats.org/drawingml/2006/main" xmlns:r="http://schemas.openxmlformats.org/officeDocument/2006/relationships" xmlns:p="http://schemas.openxmlformats.org/presentationml/2006/main">
   <p:cSld>
     <p:spTree>
       <p:nvGrpSpPr>
@@ -10254,7 +10421,14 @@
         <p:cNvGrpSpPr/>
         <p:nvPr/>
       </p:nvGrpSpPr>
-      <p:grpSpPr/>
+      <p:grpSpPr>
+        <a:xfrm>
+          <a:off x="0" y="0"/>
+          <a:ext cx="0" cy="0"/>
+          <a:chOff x="0" y="0"/>
+          <a:chExt cx="0" cy="0"/>
+        </a:xfrm>
+      </p:grpSpPr>
       <p:sp>
         <p:nvSpPr>
           <p:cNvPr id="2" name="Rectangle 1"/>
@@ -10292,10 +10466,11 @@
           </a:fontRef>
         </p:style>
         <p:txBody>
-          <a:bodyPr rtlCol="0" anchor="ctr" wrap="square"/>
+          <a:bodyPr wrap="square" rtlCol="0" anchor="ctr"/>
           <a:lstStyle/>
           <a:p>
             <a:pPr algn="ctr"/>
+            <a:endParaRPr/>
           </a:p>
         </p:txBody>
       </p:sp>
@@ -10424,7 +10599,7 @@
           </a:fontRef>
         </p:style>
         <p:txBody>
-          <a:bodyPr rtlCol="0" anchor="ctr" wrap="square" lIns="177800" tIns="431800"/>
+          <a:bodyPr wrap="square" lIns="177800" tIns="431800" rtlCol="0" anchor="ctr"/>
           <a:lstStyle/>
           <a:p>
             <a:pPr algn="l">
@@ -10488,7 +10663,7 @@
           </a:fontRef>
         </p:style>
         <p:txBody>
-          <a:bodyPr rtlCol="0" anchor="ctr" wrap="square" lIns="38100" rIns="38100" tIns="0" bIns="0"/>
+          <a:bodyPr wrap="square" lIns="38100" tIns="0" rIns="38100" bIns="0" rtlCol="0" anchor="ctr"/>
           <a:lstStyle/>
           <a:p>
             <a:pPr algn="ctr">
@@ -10551,7 +10726,7 @@
           </a:fontRef>
         </p:style>
         <p:txBody>
-          <a:bodyPr rtlCol="0" anchor="ctr" wrap="square" lIns="177800" tIns="431800"/>
+          <a:bodyPr wrap="square" lIns="177800" tIns="431800" rtlCol="0" anchor="ctr"/>
           <a:lstStyle/>
           <a:p>
             <a:pPr algn="l">
@@ -10615,7 +10790,7 @@
           </a:fontRef>
         </p:style>
         <p:txBody>
-          <a:bodyPr rtlCol="0" anchor="ctr" wrap="square" lIns="38100" rIns="38100" tIns="0" bIns="0"/>
+          <a:bodyPr wrap="square" lIns="38100" tIns="0" rIns="38100" bIns="0" rtlCol="0" anchor="ctr"/>
           <a:lstStyle/>
           <a:p>
             <a:pPr algn="ctr">
@@ -10678,7 +10853,7 @@
           </a:fontRef>
         </p:style>
         <p:txBody>
-          <a:bodyPr rtlCol="0" anchor="ctr" wrap="square" lIns="177800" tIns="431800"/>
+          <a:bodyPr wrap="square" lIns="177800" tIns="431800" rtlCol="0" anchor="ctr"/>
           <a:lstStyle/>
           <a:p>
             <a:pPr algn="l">
@@ -10742,7 +10917,7 @@
           </a:fontRef>
         </p:style>
         <p:txBody>
-          <a:bodyPr rtlCol="0" anchor="ctr" wrap="square" lIns="38100" rIns="38100" tIns="0" bIns="0"/>
+          <a:bodyPr wrap="square" lIns="38100" tIns="0" rIns="38100" bIns="0" rtlCol="0" anchor="ctr"/>
           <a:lstStyle/>
           <a:p>
             <a:pPr algn="ctr">
@@ -10807,17 +10982,7 @@
                 <a:latin typeface="Meiryo"/>
                 <a:ea typeface="メイリオ"/>
               </a:rPr>
-              <a:t>■ </a:t>
-            </a:r>
-            <a:r>
-              <a:rPr sz="1350" b="0">
-                <a:solidFill>
-                  <a:srgbClr val="3A4658"/>
-                </a:solidFill>
-                <a:latin typeface="Meiryo"/>
-                <a:ea typeface="メイリオ"/>
-              </a:rPr>
-              <a:t>機材：4ch FOAマイク（Zoom H3-VR）・96kHz・風防。テイク前に方位校正音＋騒音計LAeqを記録</a:t>
+              <a:t>■ 機材：4ch FOAマイク（Zoom H3-VR・レンタル）・96kHz・風防。テイク前に方位校正音＋騒音計LAeqを記録</a:t>
             </a:r>
           </a:p>
           <a:p>
@@ -10912,10 +11077,11 @@
           </a:fontRef>
         </p:style>
         <p:txBody>
-          <a:bodyPr rtlCol="0" anchor="ctr" wrap="square"/>
+          <a:bodyPr wrap="square" rtlCol="0" anchor="ctr"/>
           <a:lstStyle/>
           <a:p>
             <a:pPr algn="ctr"/>
+            <a:endParaRPr/>
           </a:p>
         </p:txBody>
       </p:sp>
@@ -10958,7 +11124,7 @@
           </a:fontRef>
         </p:style>
         <p:txBody>
-          <a:bodyPr rtlCol="0" anchor="ctr" wrap="square" lIns="203200" tIns="101600"/>
+          <a:bodyPr wrap="square" lIns="203200" tIns="101600" rtlCol="0" anchor="ctr"/>
           <a:lstStyle/>
           <a:p>
             <a:pPr algn="l">
@@ -11088,7 +11254,7 @@
           </a:fontRef>
         </p:style>
         <p:txBody>
-          <a:bodyPr rtlCol="0" anchor="ctr" wrap="square" lIns="25400" rIns="25400" tIns="12700" bIns="12700"/>
+          <a:bodyPr wrap="square" lIns="25400" tIns="12700" rIns="25400" bIns="12700" rtlCol="0" anchor="ctr"/>
           <a:lstStyle/>
           <a:p>
             <a:pPr algn="ctr">
@@ -11149,7 +11315,7 @@
           </a:fontRef>
         </p:style>
         <p:txBody>
-          <a:bodyPr rtlCol="0" anchor="ctr" wrap="square" lIns="25400" rIns="25400" tIns="12700" bIns="12700"/>
+          <a:bodyPr wrap="square" lIns="25400" tIns="12700" rIns="25400" bIns="12700" rtlCol="0" anchor="ctr"/>
           <a:lstStyle/>
           <a:p>
             <a:pPr algn="ctr">
@@ -11210,7 +11376,7 @@
           </a:fontRef>
         </p:style>
         <p:txBody>
-          <a:bodyPr rtlCol="0" anchor="ctr" wrap="square" lIns="25400" rIns="25400" tIns="12700" bIns="12700"/>
+          <a:bodyPr wrap="square" lIns="25400" tIns="12700" rIns="25400" bIns="12700" rtlCol="0" anchor="ctr"/>
           <a:lstStyle/>
           <a:p>
             <a:pPr algn="ctr">
@@ -11271,7 +11437,7 @@
           </a:fontRef>
         </p:style>
         <p:txBody>
-          <a:bodyPr rtlCol="0" anchor="ctr" wrap="square" lIns="25400" rIns="25400" tIns="12700" bIns="12700"/>
+          <a:bodyPr wrap="square" lIns="25400" tIns="12700" rIns="25400" bIns="12700" rtlCol="0" anchor="ctr"/>
           <a:lstStyle/>
           <a:p>
             <a:pPr algn="ctr">
@@ -11332,7 +11498,7 @@
           </a:fontRef>
         </p:style>
         <p:txBody>
-          <a:bodyPr rtlCol="0" anchor="ctr" wrap="square" lIns="25400" rIns="25400" tIns="12700" bIns="12700"/>
+          <a:bodyPr wrap="square" lIns="25400" tIns="12700" rIns="25400" bIns="12700" rtlCol="0" anchor="ctr"/>
           <a:lstStyle/>
           <a:p>
             <a:pPr algn="ctr">
@@ -11393,7 +11559,7 @@
           </a:fontRef>
         </p:style>
         <p:txBody>
-          <a:bodyPr rtlCol="0" anchor="ctr" wrap="square" lIns="25400" rIns="25400" tIns="12700" bIns="12700"/>
+          <a:bodyPr wrap="square" lIns="25400" tIns="12700" rIns="25400" bIns="12700" rtlCol="0" anchor="ctr"/>
           <a:lstStyle/>
           <a:p>
             <a:pPr algn="ctr">
@@ -11469,7 +11635,7 @@
 </file>
 
 <file path=ppt/slides/slide13.xml><?xml version="1.0" encoding="utf-8"?>
-<p:sld xmlns:a="http://schemas.openxmlformats.org/drawingml/2006/main" xmlns:p="http://schemas.openxmlformats.org/presentationml/2006/main" xmlns:r="http://schemas.openxmlformats.org/officeDocument/2006/relationships">
+<p:sld xmlns:a="http://schemas.openxmlformats.org/drawingml/2006/main" xmlns:r="http://schemas.openxmlformats.org/officeDocument/2006/relationships" xmlns:p="http://schemas.openxmlformats.org/presentationml/2006/main">
   <p:cSld>
     <p:spTree>
       <p:nvGrpSpPr>
@@ -11477,7 +11643,14 @@
         <p:cNvGrpSpPr/>
         <p:nvPr/>
       </p:nvGrpSpPr>
-      <p:grpSpPr/>
+      <p:grpSpPr>
+        <a:xfrm>
+          <a:off x="0" y="0"/>
+          <a:ext cx="0" cy="0"/>
+          <a:chOff x="0" y="0"/>
+          <a:chExt cx="0" cy="0"/>
+        </a:xfrm>
+      </p:grpSpPr>
       <p:sp>
         <p:nvSpPr>
           <p:cNvPr id="2" name="Rectangle 1"/>
@@ -11515,10 +11688,11 @@
           </a:fontRef>
         </p:style>
         <p:txBody>
-          <a:bodyPr rtlCol="0" anchor="ctr" wrap="square"/>
+          <a:bodyPr wrap="square" rtlCol="0" anchor="ctr"/>
           <a:lstStyle/>
           <a:p>
             <a:pPr algn="ctr"/>
+            <a:endParaRPr/>
           </a:p>
         </p:txBody>
       </p:sp>
@@ -11645,7 +11819,7 @@
           </a:fontRef>
         </p:style>
         <p:txBody>
-          <a:bodyPr rtlCol="0" anchor="ctr" wrap="square" lIns="38100" rIns="38100" tIns="0" bIns="0"/>
+          <a:bodyPr wrap="square" lIns="38100" tIns="0" rIns="38100" bIns="0" rtlCol="0" anchor="ctr"/>
           <a:lstStyle/>
           <a:p>
             <a:pPr algn="ctr">
@@ -11752,7 +11926,7 @@
           </a:fontRef>
         </p:style>
         <p:txBody>
-          <a:bodyPr rtlCol="0" anchor="ctr" wrap="square" lIns="38100" rIns="38100" tIns="0" bIns="0"/>
+          <a:bodyPr wrap="square" lIns="38100" tIns="0" rIns="38100" bIns="0" rtlCol="0" anchor="ctr"/>
           <a:lstStyle/>
           <a:p>
             <a:pPr algn="ctr">
@@ -11859,7 +12033,7 @@
           </a:fontRef>
         </p:style>
         <p:txBody>
-          <a:bodyPr rtlCol="0" anchor="ctr" wrap="square" lIns="38100" rIns="38100" tIns="0" bIns="0"/>
+          <a:bodyPr wrap="square" lIns="38100" tIns="0" rIns="38100" bIns="0" rtlCol="0" anchor="ctr"/>
           <a:lstStyle/>
           <a:p>
             <a:pPr algn="ctr">
@@ -11917,7 +12091,7 @@
               </a:spcAft>
             </a:pPr>
             <a:r>
-              <a:rPr sz="1350" b="0">
+              <a:rPr sz="1350" b="0" dirty="0">
                 <a:solidFill>
                   <a:srgbClr val="3A4658"/>
                 </a:solidFill>
@@ -11966,7 +12140,7 @@
           </a:fontRef>
         </p:style>
         <p:txBody>
-          <a:bodyPr rtlCol="0" anchor="ctr" wrap="square" lIns="38100" rIns="38100" tIns="0" bIns="0"/>
+          <a:bodyPr wrap="square" lIns="38100" tIns="0" rIns="38100" bIns="0" rtlCol="0" anchor="ctr"/>
           <a:lstStyle/>
           <a:p>
             <a:pPr algn="ctr">
@@ -12073,7 +12247,7 @@
           </a:fontRef>
         </p:style>
         <p:txBody>
-          <a:bodyPr rtlCol="0" anchor="ctr" wrap="square" lIns="38100" rIns="38100" tIns="0" bIns="0"/>
+          <a:bodyPr wrap="square" lIns="38100" tIns="0" rIns="38100" bIns="0" rtlCol="0" anchor="ctr"/>
           <a:lstStyle/>
           <a:p>
             <a:pPr algn="ctr">
@@ -12259,7 +12433,7 @@
           </a:fontRef>
         </p:style>
         <p:txBody>
-          <a:bodyPr rtlCol="0" anchor="ctr" wrap="square" lIns="25400" rIns="25400" tIns="12700" bIns="12700"/>
+          <a:bodyPr wrap="square" lIns="25400" tIns="12700" rIns="25400" bIns="12700" rtlCol="0" anchor="ctr"/>
           <a:lstStyle/>
           <a:p>
             <a:pPr algn="ctr">
@@ -12320,7 +12494,7 @@
           </a:fontRef>
         </p:style>
         <p:txBody>
-          <a:bodyPr rtlCol="0" anchor="ctr" wrap="square" lIns="25400" rIns="25400" tIns="12700" bIns="12700"/>
+          <a:bodyPr wrap="square" lIns="25400" tIns="12700" rIns="25400" bIns="12700" rtlCol="0" anchor="ctr"/>
           <a:lstStyle/>
           <a:p>
             <a:pPr algn="ctr">
@@ -12381,7 +12555,7 @@
           </a:fontRef>
         </p:style>
         <p:txBody>
-          <a:bodyPr rtlCol="0" anchor="ctr" wrap="square" lIns="25400" rIns="25400" tIns="12700" bIns="12700"/>
+          <a:bodyPr wrap="square" lIns="25400" tIns="12700" rIns="25400" bIns="12700" rtlCol="0" anchor="ctr"/>
           <a:lstStyle/>
           <a:p>
             <a:pPr algn="ctr">
@@ -12442,7 +12616,7 @@
           </a:fontRef>
         </p:style>
         <p:txBody>
-          <a:bodyPr rtlCol="0" anchor="ctr" wrap="square" lIns="25400" rIns="25400" tIns="12700" bIns="12700"/>
+          <a:bodyPr wrap="square" lIns="25400" tIns="12700" rIns="25400" bIns="12700" rtlCol="0" anchor="ctr"/>
           <a:lstStyle/>
           <a:p>
             <a:pPr algn="ctr">
@@ -12503,7 +12677,7 @@
           </a:fontRef>
         </p:style>
         <p:txBody>
-          <a:bodyPr rtlCol="0" anchor="ctr" wrap="square" lIns="25400" rIns="25400" tIns="12700" bIns="12700"/>
+          <a:bodyPr wrap="square" lIns="25400" tIns="12700" rIns="25400" bIns="12700" rtlCol="0" anchor="ctr"/>
           <a:lstStyle/>
           <a:p>
             <a:pPr algn="ctr">
@@ -12564,7 +12738,7 @@
           </a:fontRef>
         </p:style>
         <p:txBody>
-          <a:bodyPr rtlCol="0" anchor="ctr" wrap="square" lIns="25400" rIns="25400" tIns="12700" bIns="12700"/>
+          <a:bodyPr wrap="square" lIns="25400" tIns="12700" rIns="25400" bIns="12700" rtlCol="0" anchor="ctr"/>
           <a:lstStyle/>
           <a:p>
             <a:pPr algn="ctr">
@@ -12640,7 +12814,7 @@
 </file>
 
 <file path=ppt/slides/slide14.xml><?xml version="1.0" encoding="utf-8"?>
-<p:sld xmlns:a="http://schemas.openxmlformats.org/drawingml/2006/main" xmlns:p="http://schemas.openxmlformats.org/presentationml/2006/main" xmlns:r="http://schemas.openxmlformats.org/officeDocument/2006/relationships">
+<p:sld xmlns:a="http://schemas.openxmlformats.org/drawingml/2006/main" xmlns:r="http://schemas.openxmlformats.org/officeDocument/2006/relationships" xmlns:p="http://schemas.openxmlformats.org/presentationml/2006/main">
   <p:cSld>
     <p:spTree>
       <p:nvGrpSpPr>
@@ -12648,7 +12822,14 @@
         <p:cNvGrpSpPr/>
         <p:nvPr/>
       </p:nvGrpSpPr>
-      <p:grpSpPr/>
+      <p:grpSpPr>
+        <a:xfrm>
+          <a:off x="0" y="0"/>
+          <a:ext cx="0" cy="0"/>
+          <a:chOff x="0" y="0"/>
+          <a:chExt cx="0" cy="0"/>
+        </a:xfrm>
+      </p:grpSpPr>
       <p:sp>
         <p:nvSpPr>
           <p:cNvPr id="2" name="Rectangle 1"/>
@@ -12686,10 +12867,11 @@
           </a:fontRef>
         </p:style>
         <p:txBody>
-          <a:bodyPr rtlCol="0" anchor="ctr" wrap="square"/>
+          <a:bodyPr wrap="square" rtlCol="0" anchor="ctr"/>
           <a:lstStyle/>
           <a:p>
             <a:pPr algn="ctr"/>
+            <a:endParaRPr/>
           </a:p>
         </p:txBody>
       </p:sp>
@@ -12813,7 +12995,7 @@
               </a:spcAft>
             </a:pPr>
             <a:r>
-              <a:rPr sz="1600" b="1">
+              <a:rPr sz="1600" b="1" dirty="0">
                 <a:solidFill>
                   <a:srgbClr val="16233A"/>
                 </a:solidFill>
@@ -12823,7 +13005,7 @@
               <a:t>■ </a:t>
             </a:r>
             <a:r>
-              <a:rPr sz="1600" b="0">
+              <a:rPr sz="1600" b="0" dirty="0">
                 <a:solidFill>
                   <a:srgbClr val="3A4658"/>
                 </a:solidFill>
@@ -12833,7 +13015,7 @@
               <a:t>8クラス・</a:t>
             </a:r>
             <a:r>
-              <a:rPr sz="1600" b="1">
+              <a:rPr sz="1600" b="1" dirty="0">
                 <a:solidFill>
                   <a:srgbClr val="16233A"/>
                 </a:solidFill>
@@ -12843,7 +13025,7 @@
               <a:t>距離つき</a:t>
             </a:r>
             <a:r>
-              <a:rPr sz="1600" b="0">
+              <a:rPr sz="1600" b="0" dirty="0">
                 <a:solidFill>
                   <a:srgbClr val="3A4658"/>
                 </a:solidFill>
@@ -12853,7 +13035,7 @@
               <a:t>屋外SELDを日本準拠の合成データで構築し、</a:t>
             </a:r>
             <a:r>
-              <a:rPr sz="1600" b="1">
+              <a:rPr sz="1600" b="1" dirty="0">
                 <a:solidFill>
                   <a:srgbClr val="16233A"/>
                 </a:solidFill>
@@ -12863,7 +13045,7 @@
               <a:t>学習に未使用の評価データで性能を確認</a:t>
             </a:r>
             <a:r>
-              <a:rPr sz="1600" b="0">
+              <a:rPr sz="1600" b="0" dirty="0">
                 <a:solidFill>
                   <a:srgbClr val="3A4658"/>
                 </a:solidFill>
@@ -12886,7 +13068,7 @@
               </a:spcAft>
             </a:pPr>
             <a:r>
-              <a:rPr sz="1600" b="1">
+              <a:rPr sz="1600" b="1" dirty="0">
                 <a:solidFill>
                   <a:srgbClr val="16233A"/>
                 </a:solidFill>
@@ -12896,7 +13078,7 @@
               <a:t>■ </a:t>
             </a:r>
             <a:r>
-              <a:rPr sz="1600" b="0">
+              <a:rPr sz="1600" b="0" dirty="0">
                 <a:solidFill>
                   <a:srgbClr val="3A4658"/>
                 </a:solidFill>
@@ -12906,7 +13088,7 @@
               <a:t>通知層が</a:t>
             </a:r>
             <a:r>
-              <a:rPr sz="1600" b="1">
+              <a:rPr sz="1600" b="1" dirty="0">
                 <a:solidFill>
                   <a:srgbClr val="16233A"/>
                 </a:solidFill>
@@ -12916,17 +13098,37 @@
               <a:t>推定距離で3段階</a:t>
             </a:r>
             <a:r>
-              <a:rPr sz="1600" b="0">
+              <a:rPr sz="1600" b="0" dirty="0">
                 <a:solidFill>
                   <a:srgbClr val="3A4658"/>
                 </a:solidFill>
                 <a:latin typeface="Meiryo"/>
                 <a:ea typeface="メイリオ"/>
               </a:rPr>
-              <a:t>に出し分け — 至近警告到達 </a:t>
-            </a:r>
-            <a:r>
-              <a:rPr sz="1700" b="1">
+              <a:t>に出し分け — </a:t>
+            </a:r>
+            <a:r>
+              <a:rPr sz="1600" b="0" dirty="0" err="1">
+                <a:solidFill>
+                  <a:srgbClr val="3A4658"/>
+                </a:solidFill>
+                <a:latin typeface="Meiryo"/>
+                <a:ea typeface="メイリオ"/>
+              </a:rPr>
+              <a:t>至近警告到達</a:t>
+            </a:r>
+            <a:r>
+              <a:rPr sz="1600" b="0" dirty="0">
+                <a:solidFill>
+                  <a:srgbClr val="3A4658"/>
+                </a:solidFill>
+                <a:latin typeface="Meiryo"/>
+                <a:ea typeface="メイリオ"/>
+              </a:rPr>
+              <a:t> </a:t>
+            </a:r>
+            <a:r>
+              <a:rPr sz="1700" b="1" dirty="0">
                 <a:solidFill>
                   <a:srgbClr val="16233A"/>
                 </a:solidFill>
@@ -12936,17 +13138,37 @@
               <a:t>69.9%</a:t>
             </a:r>
             <a:r>
-              <a:rPr sz="1600" b="0">
+              <a:rPr sz="1600" b="0" dirty="0">
                 <a:solidFill>
                   <a:srgbClr val="3A4658"/>
                 </a:solidFill>
                 <a:latin typeface="Meiryo"/>
                 <a:ea typeface="メイリオ"/>
               </a:rPr>
-              <a:t>・安全車の抑制 </a:t>
-            </a:r>
-            <a:r>
-              <a:rPr sz="1700" b="1">
+              <a:t>・</a:t>
+            </a:r>
+            <a:r>
+              <a:rPr sz="1600" b="0" dirty="0" err="1">
+                <a:solidFill>
+                  <a:srgbClr val="3A4658"/>
+                </a:solidFill>
+                <a:latin typeface="Meiryo"/>
+                <a:ea typeface="メイリオ"/>
+              </a:rPr>
+              <a:t>安全車の抑制</a:t>
+            </a:r>
+            <a:r>
+              <a:rPr sz="1600" b="0" dirty="0">
+                <a:solidFill>
+                  <a:srgbClr val="3A4658"/>
+                </a:solidFill>
+                <a:latin typeface="Meiryo"/>
+                <a:ea typeface="メイリオ"/>
+              </a:rPr>
+              <a:t> </a:t>
+            </a:r>
+            <a:r>
+              <a:rPr sz="1700" b="1" dirty="0">
                 <a:solidFill>
                   <a:srgbClr val="16233A"/>
                 </a:solidFill>
@@ -12956,17 +13178,37 @@
               <a:t>90.4%</a:t>
             </a:r>
             <a:r>
-              <a:rPr sz="1600" b="0">
+              <a:rPr sz="1600" b="0" dirty="0">
                 <a:solidFill>
                   <a:srgbClr val="3A4658"/>
                 </a:solidFill>
                 <a:latin typeface="Meiryo"/>
                 <a:ea typeface="メイリオ"/>
               </a:rPr>
-              <a:t>・キックボード </a:t>
-            </a:r>
-            <a:r>
-              <a:rPr sz="1700" b="1">
+              <a:t>・</a:t>
+            </a:r>
+            <a:r>
+              <a:rPr sz="1600" b="0" dirty="0" err="1">
+                <a:solidFill>
+                  <a:srgbClr val="3A4658"/>
+                </a:solidFill>
+                <a:latin typeface="Meiryo"/>
+                <a:ea typeface="メイリオ"/>
+              </a:rPr>
+              <a:t>キックボード</a:t>
+            </a:r>
+            <a:r>
+              <a:rPr sz="1600" b="0" dirty="0">
+                <a:solidFill>
+                  <a:srgbClr val="3A4658"/>
+                </a:solidFill>
+                <a:latin typeface="Meiryo"/>
+                <a:ea typeface="メイリオ"/>
+              </a:rPr>
+              <a:t> </a:t>
+            </a:r>
+            <a:r>
+              <a:rPr sz="1700" b="1" dirty="0">
                 <a:solidFill>
                   <a:srgbClr val="16233A"/>
                 </a:solidFill>
@@ -12989,7 +13231,7 @@
               </a:spcAft>
             </a:pPr>
             <a:r>
-              <a:rPr sz="1600" b="1">
+              <a:rPr sz="1600" b="1" dirty="0">
                 <a:solidFill>
                   <a:srgbClr val="16233A"/>
                 </a:solidFill>
@@ -12999,17 +13241,57 @@
               <a:t>■ </a:t>
             </a:r>
             <a:r>
-              <a:rPr sz="1600" b="0">
+              <a:rPr sz="1600" b="0" dirty="0">
                 <a:solidFill>
                   <a:srgbClr val="3A4658"/>
                 </a:solidFill>
                 <a:latin typeface="Meiryo"/>
                 <a:ea typeface="メイリオ"/>
               </a:rPr>
-              <a:t>「聞こえる前」を定量化 — サイレン初検知 </a:t>
-            </a:r>
-            <a:r>
-              <a:rPr sz="3000" b="1">
+              <a:t>「</a:t>
+            </a:r>
+            <a:r>
+              <a:rPr sz="1600" b="0" dirty="0" err="1">
+                <a:solidFill>
+                  <a:srgbClr val="3A4658"/>
+                </a:solidFill>
+                <a:latin typeface="Meiryo"/>
+                <a:ea typeface="メイリオ"/>
+              </a:rPr>
+              <a:t>聞こえる前」を定量化</a:t>
+            </a:r>
+            <a:r>
+              <a:rPr sz="1600" b="0" dirty="0">
+                <a:solidFill>
+                  <a:srgbClr val="3A4658"/>
+                </a:solidFill>
+                <a:latin typeface="Meiryo"/>
+                <a:ea typeface="メイリオ"/>
+              </a:rPr>
+              <a:t> — </a:t>
+            </a:r>
+            <a:r>
+              <a:rPr sz="1600" b="0" dirty="0" err="1">
+                <a:solidFill>
+                  <a:srgbClr val="3A4658"/>
+                </a:solidFill>
+                <a:latin typeface="Meiryo"/>
+                <a:ea typeface="メイリオ"/>
+              </a:rPr>
+              <a:t>サイレン初検知</a:t>
+            </a:r>
+            <a:r>
+              <a:rPr sz="1600" b="0" dirty="0">
+                <a:solidFill>
+                  <a:srgbClr val="3A4658"/>
+                </a:solidFill>
+                <a:latin typeface="Meiryo"/>
+                <a:ea typeface="メイリオ"/>
+              </a:rPr>
+              <a:t> </a:t>
+            </a:r>
+            <a:r>
+              <a:rPr sz="3000" b="1" dirty="0">
                 <a:solidFill>
                   <a:srgbClr val="16233A"/>
                 </a:solidFill>
@@ -13019,7 +13301,7 @@
               <a:t>208m</a:t>
             </a:r>
             <a:r>
-              <a:rPr sz="1600" b="0">
+              <a:rPr sz="1600" b="0" dirty="0">
                 <a:solidFill>
                   <a:srgbClr val="3A4658"/>
                 </a:solidFill>
@@ -13042,7 +13324,7 @@
               </a:spcAft>
             </a:pPr>
             <a:r>
-              <a:rPr sz="1600" b="1">
+              <a:rPr sz="1600" b="1" dirty="0">
                 <a:solidFill>
                   <a:srgbClr val="16233A"/>
                 </a:solidFill>
@@ -13052,7 +13334,7 @@
               <a:t>■ </a:t>
             </a:r>
             <a:r>
-              <a:rPr sz="1600" b="0">
+              <a:rPr sz="1600" b="0" dirty="0" err="1">
                 <a:solidFill>
                   <a:srgbClr val="3A4658"/>
                 </a:solidFill>
@@ -13062,7 +13344,7 @@
               <a:t>次：</a:t>
             </a:r>
             <a:r>
-              <a:rPr sz="1600" b="1">
+              <a:rPr sz="1600" b="1" dirty="0" err="1">
                 <a:solidFill>
                   <a:srgbClr val="16233A"/>
                 </a:solidFill>
@@ -13072,7 +13354,7 @@
               <a:t>実環境録音での評価</a:t>
             </a:r>
             <a:r>
-              <a:rPr sz="1600" b="0">
+              <a:rPr sz="1600" b="0" dirty="0" err="1">
                 <a:solidFill>
                   <a:srgbClr val="3A4658"/>
                 </a:solidFill>
@@ -13082,7 +13364,7 @@
               <a:t>と</a:t>
             </a:r>
             <a:r>
-              <a:rPr sz="1600" b="1">
+              <a:rPr sz="1600" b="1" dirty="0" err="1">
                 <a:solidFill>
                   <a:srgbClr val="16233A"/>
                 </a:solidFill>
@@ -13092,7 +13374,7 @@
               <a:t>物理要素の切り分け実験</a:t>
             </a:r>
             <a:r>
-              <a:rPr sz="1600" b="0">
+              <a:rPr sz="1600" b="0" dirty="0" err="1">
                 <a:solidFill>
                   <a:srgbClr val="3A4658"/>
                 </a:solidFill>
@@ -13101,6 +13383,13 @@
               </a:rPr>
               <a:t>で「どの物理が必要か」に答える</a:t>
             </a:r>
+            <a:endParaRPr sz="1600" b="0" dirty="0">
+              <a:solidFill>
+                <a:srgbClr val="3A4658"/>
+              </a:solidFill>
+              <a:latin typeface="Meiryo"/>
+              <a:ea typeface="メイリオ"/>
+            </a:endParaRPr>
           </a:p>
         </p:txBody>
       </p:sp>
@@ -13141,10 +13430,11 @@
           </a:fontRef>
         </p:style>
         <p:txBody>
-          <a:bodyPr rtlCol="0" anchor="ctr" wrap="square"/>
+          <a:bodyPr wrap="square" rtlCol="0" anchor="ctr"/>
           <a:lstStyle/>
           <a:p>
             <a:pPr algn="ctr"/>
+            <a:endParaRPr/>
           </a:p>
         </p:txBody>
       </p:sp>
@@ -13185,10 +13475,11 @@
           </a:fontRef>
         </p:style>
         <p:txBody>
-          <a:bodyPr rtlCol="0" anchor="ctr" wrap="square"/>
+          <a:bodyPr wrap="square" rtlCol="0" anchor="ctr"/>
           <a:lstStyle/>
           <a:p>
             <a:pPr algn="ctr"/>
+            <a:endParaRPr/>
           </a:p>
         </p:txBody>
       </p:sp>
@@ -13229,10 +13520,11 @@
           </a:fontRef>
         </p:style>
         <p:txBody>
-          <a:bodyPr rtlCol="0" anchor="ctr" wrap="square"/>
+          <a:bodyPr wrap="square" rtlCol="0" anchor="ctr"/>
           <a:lstStyle/>
           <a:p>
             <a:pPr algn="ctr"/>
+            <a:endParaRPr/>
           </a:p>
         </p:txBody>
       </p:sp>
@@ -13273,10 +13565,11 @@
           </a:fontRef>
         </p:style>
         <p:txBody>
-          <a:bodyPr rtlCol="0" anchor="ctr" wrap="square"/>
+          <a:bodyPr wrap="square" rtlCol="0" anchor="ctr"/>
           <a:lstStyle/>
           <a:p>
             <a:pPr algn="ctr"/>
+            <a:endParaRPr/>
           </a:p>
         </p:txBody>
       </p:sp>
@@ -13317,10 +13610,11 @@
           </a:fontRef>
         </p:style>
         <p:txBody>
-          <a:bodyPr rtlCol="0" anchor="ctr" wrap="square"/>
+          <a:bodyPr wrap="square" rtlCol="0" anchor="ctr"/>
           <a:lstStyle/>
           <a:p>
             <a:pPr algn="ctr"/>
+            <a:endParaRPr/>
           </a:p>
         </p:txBody>
       </p:sp>
@@ -13361,10 +13655,11 @@
           </a:fontRef>
         </p:style>
         <p:txBody>
-          <a:bodyPr rtlCol="0" anchor="ctr" wrap="square"/>
+          <a:bodyPr wrap="square" rtlCol="0" anchor="ctr"/>
           <a:lstStyle/>
           <a:p>
             <a:pPr algn="ctr"/>
+            <a:endParaRPr/>
           </a:p>
         </p:txBody>
       </p:sp>
@@ -13405,10 +13700,11 @@
           </a:fontRef>
         </p:style>
         <p:txBody>
-          <a:bodyPr rtlCol="0" anchor="ctr" wrap="square"/>
+          <a:bodyPr wrap="square" rtlCol="0" anchor="ctr"/>
           <a:lstStyle/>
           <a:p>
             <a:pPr algn="ctr"/>
+            <a:endParaRPr/>
           </a:p>
         </p:txBody>
       </p:sp>
@@ -13449,10 +13745,11 @@
           </a:fontRef>
         </p:style>
         <p:txBody>
-          <a:bodyPr rtlCol="0" anchor="ctr" wrap="square"/>
+          <a:bodyPr wrap="square" rtlCol="0" anchor="ctr"/>
           <a:lstStyle/>
           <a:p>
             <a:pPr algn="ctr"/>
+            <a:endParaRPr/>
           </a:p>
         </p:txBody>
       </p:sp>
@@ -13493,10 +13790,11 @@
           </a:fontRef>
         </p:style>
         <p:txBody>
-          <a:bodyPr rtlCol="0" anchor="ctr" wrap="square"/>
+          <a:bodyPr wrap="square" rtlCol="0" anchor="ctr"/>
           <a:lstStyle/>
           <a:p>
             <a:pPr algn="ctr"/>
+            <a:endParaRPr/>
           </a:p>
         </p:txBody>
       </p:sp>
@@ -13537,10 +13835,11 @@
           </a:fontRef>
         </p:style>
         <p:txBody>
-          <a:bodyPr rtlCol="0" anchor="ctr" wrap="square"/>
+          <a:bodyPr wrap="square" rtlCol="0" anchor="ctr"/>
           <a:lstStyle/>
           <a:p>
             <a:pPr algn="ctr"/>
+            <a:endParaRPr/>
           </a:p>
         </p:txBody>
       </p:sp>
@@ -13581,10 +13880,11 @@
           </a:fontRef>
         </p:style>
         <p:txBody>
-          <a:bodyPr rtlCol="0" anchor="ctr" wrap="square"/>
+          <a:bodyPr wrap="square" rtlCol="0" anchor="ctr"/>
           <a:lstStyle/>
           <a:p>
             <a:pPr algn="ctr"/>
+            <a:endParaRPr/>
           </a:p>
         </p:txBody>
       </p:sp>
@@ -13625,10 +13925,11 @@
           </a:fontRef>
         </p:style>
         <p:txBody>
-          <a:bodyPr rtlCol="0" anchor="ctr" wrap="square"/>
+          <a:bodyPr wrap="square" rtlCol="0" anchor="ctr"/>
           <a:lstStyle/>
           <a:p>
             <a:pPr algn="ctr"/>
+            <a:endParaRPr/>
           </a:p>
         </p:txBody>
       </p:sp>
@@ -13669,10 +13970,11 @@
           </a:fontRef>
         </p:style>
         <p:txBody>
-          <a:bodyPr rtlCol="0" anchor="ctr" wrap="square"/>
+          <a:bodyPr wrap="square" rtlCol="0" anchor="ctr"/>
           <a:lstStyle/>
           <a:p>
             <a:pPr algn="ctr"/>
+            <a:endParaRPr/>
           </a:p>
         </p:txBody>
       </p:sp>
@@ -13713,10 +14015,11 @@
           </a:fontRef>
         </p:style>
         <p:txBody>
-          <a:bodyPr rtlCol="0" anchor="ctr" wrap="square"/>
+          <a:bodyPr wrap="square" rtlCol="0" anchor="ctr"/>
           <a:lstStyle/>
           <a:p>
             <a:pPr algn="ctr"/>
+            <a:endParaRPr/>
           </a:p>
         </p:txBody>
       </p:sp>
@@ -13757,10 +14060,11 @@
           </a:fontRef>
         </p:style>
         <p:txBody>
-          <a:bodyPr rtlCol="0" anchor="ctr" wrap="square"/>
+          <a:bodyPr wrap="square" rtlCol="0" anchor="ctr"/>
           <a:lstStyle/>
           <a:p>
             <a:pPr algn="ctr"/>
+            <a:endParaRPr/>
           </a:p>
         </p:txBody>
       </p:sp>
@@ -13801,10 +14105,11 @@
           </a:fontRef>
         </p:style>
         <p:txBody>
-          <a:bodyPr rtlCol="0" anchor="ctr" wrap="square"/>
+          <a:bodyPr wrap="square" rtlCol="0" anchor="ctr"/>
           <a:lstStyle/>
           <a:p>
             <a:pPr algn="ctr"/>
+            <a:endParaRPr/>
           </a:p>
         </p:txBody>
       </p:sp>
@@ -13845,10 +14150,11 @@
           </a:fontRef>
         </p:style>
         <p:txBody>
-          <a:bodyPr rtlCol="0" anchor="ctr" wrap="square"/>
+          <a:bodyPr wrap="square" rtlCol="0" anchor="ctr"/>
           <a:lstStyle/>
           <a:p>
             <a:pPr algn="ctr"/>
+            <a:endParaRPr/>
           </a:p>
         </p:txBody>
       </p:sp>
@@ -13889,10 +14195,11 @@
           </a:fontRef>
         </p:style>
         <p:txBody>
-          <a:bodyPr rtlCol="0" anchor="ctr" wrap="square"/>
+          <a:bodyPr wrap="square" rtlCol="0" anchor="ctr"/>
           <a:lstStyle/>
           <a:p>
             <a:pPr algn="ctr"/>
+            <a:endParaRPr/>
           </a:p>
         </p:txBody>
       </p:sp>
@@ -13933,10 +14240,11 @@
           </a:fontRef>
         </p:style>
         <p:txBody>
-          <a:bodyPr rtlCol="0" anchor="ctr" wrap="square"/>
+          <a:bodyPr wrap="square" rtlCol="0" anchor="ctr"/>
           <a:lstStyle/>
           <a:p>
             <a:pPr algn="ctr"/>
+            <a:endParaRPr/>
           </a:p>
         </p:txBody>
       </p:sp>
@@ -13977,10 +14285,11 @@
           </a:fontRef>
         </p:style>
         <p:txBody>
-          <a:bodyPr rtlCol="0" anchor="ctr" wrap="square"/>
+          <a:bodyPr wrap="square" rtlCol="0" anchor="ctr"/>
           <a:lstStyle/>
           <a:p>
             <a:pPr algn="ctr"/>
+            <a:endParaRPr/>
           </a:p>
         </p:txBody>
       </p:sp>
@@ -14021,10 +14330,11 @@
           </a:fontRef>
         </p:style>
         <p:txBody>
-          <a:bodyPr rtlCol="0" anchor="ctr" wrap="square"/>
+          <a:bodyPr wrap="square" rtlCol="0" anchor="ctr"/>
           <a:lstStyle/>
           <a:p>
             <a:pPr algn="ctr"/>
+            <a:endParaRPr/>
           </a:p>
         </p:txBody>
       </p:sp>
@@ -14065,10 +14375,11 @@
           </a:fontRef>
         </p:style>
         <p:txBody>
-          <a:bodyPr rtlCol="0" anchor="ctr" wrap="square"/>
+          <a:bodyPr wrap="square" rtlCol="0" anchor="ctr"/>
           <a:lstStyle/>
           <a:p>
             <a:pPr algn="ctr"/>
+            <a:endParaRPr/>
           </a:p>
         </p:txBody>
       </p:sp>
@@ -14109,10 +14420,11 @@
           </a:fontRef>
         </p:style>
         <p:txBody>
-          <a:bodyPr rtlCol="0" anchor="ctr" wrap="square"/>
+          <a:bodyPr wrap="square" rtlCol="0" anchor="ctr"/>
           <a:lstStyle/>
           <a:p>
             <a:pPr algn="ctr"/>
+            <a:endParaRPr/>
           </a:p>
         </p:txBody>
       </p:sp>
@@ -14153,10 +14465,11 @@
           </a:fontRef>
         </p:style>
         <p:txBody>
-          <a:bodyPr rtlCol="0" anchor="ctr" wrap="square"/>
+          <a:bodyPr wrap="square" rtlCol="0" anchor="ctr"/>
           <a:lstStyle/>
           <a:p>
             <a:pPr algn="ctr"/>
+            <a:endParaRPr/>
           </a:p>
         </p:txBody>
       </p:sp>
@@ -14197,10 +14510,11 @@
           </a:fontRef>
         </p:style>
         <p:txBody>
-          <a:bodyPr rtlCol="0" anchor="ctr" wrap="square"/>
+          <a:bodyPr wrap="square" rtlCol="0" anchor="ctr"/>
           <a:lstStyle/>
           <a:p>
             <a:pPr algn="ctr"/>
+            <a:endParaRPr/>
           </a:p>
         </p:txBody>
       </p:sp>
@@ -14241,10 +14555,11 @@
           </a:fontRef>
         </p:style>
         <p:txBody>
-          <a:bodyPr rtlCol="0" anchor="ctr" wrap="square"/>
+          <a:bodyPr wrap="square" rtlCol="0" anchor="ctr"/>
           <a:lstStyle/>
           <a:p>
             <a:pPr algn="ctr"/>
+            <a:endParaRPr/>
           </a:p>
         </p:txBody>
       </p:sp>
@@ -14285,10 +14600,11 @@
           </a:fontRef>
         </p:style>
         <p:txBody>
-          <a:bodyPr rtlCol="0" anchor="ctr" wrap="square"/>
+          <a:bodyPr wrap="square" rtlCol="0" anchor="ctr"/>
           <a:lstStyle/>
           <a:p>
             <a:pPr algn="ctr"/>
+            <a:endParaRPr/>
           </a:p>
         </p:txBody>
       </p:sp>
@@ -14329,10 +14645,11 @@
           </a:fontRef>
         </p:style>
         <p:txBody>
-          <a:bodyPr rtlCol="0" anchor="ctr" wrap="square"/>
+          <a:bodyPr wrap="square" rtlCol="0" anchor="ctr"/>
           <a:lstStyle/>
           <a:p>
             <a:pPr algn="ctr"/>
+            <a:endParaRPr/>
           </a:p>
         </p:txBody>
       </p:sp>
@@ -14373,10 +14690,11 @@
           </a:fontRef>
         </p:style>
         <p:txBody>
-          <a:bodyPr rtlCol="0" anchor="ctr" wrap="square"/>
+          <a:bodyPr wrap="square" rtlCol="0" anchor="ctr"/>
           <a:lstStyle/>
           <a:p>
             <a:pPr algn="ctr"/>
+            <a:endParaRPr/>
           </a:p>
         </p:txBody>
       </p:sp>
@@ -14417,10 +14735,11 @@
           </a:fontRef>
         </p:style>
         <p:txBody>
-          <a:bodyPr rtlCol="0" anchor="ctr" wrap="square"/>
+          <a:bodyPr wrap="square" rtlCol="0" anchor="ctr"/>
           <a:lstStyle/>
           <a:p>
             <a:pPr algn="ctr"/>
+            <a:endParaRPr/>
           </a:p>
         </p:txBody>
       </p:sp>
@@ -14461,10 +14780,11 @@
           </a:fontRef>
         </p:style>
         <p:txBody>
-          <a:bodyPr rtlCol="0" anchor="ctr" wrap="square"/>
+          <a:bodyPr wrap="square" rtlCol="0" anchor="ctr"/>
           <a:lstStyle/>
           <a:p>
             <a:pPr algn="ctr"/>
+            <a:endParaRPr/>
           </a:p>
         </p:txBody>
       </p:sp>
@@ -14505,10 +14825,11 @@
           </a:fontRef>
         </p:style>
         <p:txBody>
-          <a:bodyPr rtlCol="0" anchor="ctr" wrap="square"/>
+          <a:bodyPr wrap="square" rtlCol="0" anchor="ctr"/>
           <a:lstStyle/>
           <a:p>
             <a:pPr algn="ctr"/>
+            <a:endParaRPr/>
           </a:p>
         </p:txBody>
       </p:sp>
@@ -14549,10 +14870,11 @@
           </a:fontRef>
         </p:style>
         <p:txBody>
-          <a:bodyPr rtlCol="0" anchor="ctr" wrap="square"/>
+          <a:bodyPr wrap="square" rtlCol="0" anchor="ctr"/>
           <a:lstStyle/>
           <a:p>
             <a:pPr algn="ctr"/>
+            <a:endParaRPr/>
           </a:p>
         </p:txBody>
       </p:sp>
@@ -14593,10 +14915,11 @@
           </a:fontRef>
         </p:style>
         <p:txBody>
-          <a:bodyPr rtlCol="0" anchor="ctr" wrap="square"/>
+          <a:bodyPr wrap="square" rtlCol="0" anchor="ctr"/>
           <a:lstStyle/>
           <a:p>
             <a:pPr algn="ctr"/>
+            <a:endParaRPr/>
           </a:p>
         </p:txBody>
       </p:sp>
@@ -14637,10 +14960,11 @@
           </a:fontRef>
         </p:style>
         <p:txBody>
-          <a:bodyPr rtlCol="0" anchor="ctr" wrap="square"/>
+          <a:bodyPr wrap="square" rtlCol="0" anchor="ctr"/>
           <a:lstStyle/>
           <a:p>
             <a:pPr algn="ctr"/>
+            <a:endParaRPr/>
           </a:p>
         </p:txBody>
       </p:sp>
@@ -14681,10 +15005,11 @@
           </a:fontRef>
         </p:style>
         <p:txBody>
-          <a:bodyPr rtlCol="0" anchor="ctr" wrap="square"/>
+          <a:bodyPr wrap="square" rtlCol="0" anchor="ctr"/>
           <a:lstStyle/>
           <a:p>
             <a:pPr algn="ctr"/>
+            <a:endParaRPr/>
           </a:p>
         </p:txBody>
       </p:sp>
@@ -14725,10 +15050,11 @@
           </a:fontRef>
         </p:style>
         <p:txBody>
-          <a:bodyPr rtlCol="0" anchor="ctr" wrap="square"/>
+          <a:bodyPr wrap="square" rtlCol="0" anchor="ctr"/>
           <a:lstStyle/>
           <a:p>
             <a:pPr algn="ctr"/>
+            <a:endParaRPr/>
           </a:p>
         </p:txBody>
       </p:sp>
@@ -14769,10 +15095,11 @@
           </a:fontRef>
         </p:style>
         <p:txBody>
-          <a:bodyPr rtlCol="0" anchor="ctr" wrap="square"/>
+          <a:bodyPr wrap="square" rtlCol="0" anchor="ctr"/>
           <a:lstStyle/>
           <a:p>
             <a:pPr algn="ctr"/>
+            <a:endParaRPr/>
           </a:p>
         </p:txBody>
       </p:sp>
@@ -14813,10 +15140,11 @@
           </a:fontRef>
         </p:style>
         <p:txBody>
-          <a:bodyPr rtlCol="0" anchor="ctr" wrap="square"/>
+          <a:bodyPr wrap="square" rtlCol="0" anchor="ctr"/>
           <a:lstStyle/>
           <a:p>
             <a:pPr algn="ctr"/>
+            <a:endParaRPr/>
           </a:p>
         </p:txBody>
       </p:sp>
@@ -14857,10 +15185,11 @@
           </a:fontRef>
         </p:style>
         <p:txBody>
-          <a:bodyPr rtlCol="0" anchor="ctr" wrap="square"/>
+          <a:bodyPr wrap="square" rtlCol="0" anchor="ctr"/>
           <a:lstStyle/>
           <a:p>
             <a:pPr algn="ctr"/>
+            <a:endParaRPr/>
           </a:p>
         </p:txBody>
       </p:sp>
@@ -14901,10 +15230,11 @@
           </a:fontRef>
         </p:style>
         <p:txBody>
-          <a:bodyPr rtlCol="0" anchor="ctr" wrap="square"/>
+          <a:bodyPr wrap="square" rtlCol="0" anchor="ctr"/>
           <a:lstStyle/>
           <a:p>
             <a:pPr algn="ctr"/>
+            <a:endParaRPr/>
           </a:p>
         </p:txBody>
       </p:sp>
@@ -14945,10 +15275,11 @@
           </a:fontRef>
         </p:style>
         <p:txBody>
-          <a:bodyPr rtlCol="0" anchor="ctr" wrap="square"/>
+          <a:bodyPr wrap="square" rtlCol="0" anchor="ctr"/>
           <a:lstStyle/>
           <a:p>
             <a:pPr algn="ctr"/>
+            <a:endParaRPr/>
           </a:p>
         </p:txBody>
       </p:sp>
@@ -14989,10 +15320,11 @@
           </a:fontRef>
         </p:style>
         <p:txBody>
-          <a:bodyPr rtlCol="0" anchor="ctr" wrap="square"/>
+          <a:bodyPr wrap="square" rtlCol="0" anchor="ctr"/>
           <a:lstStyle/>
           <a:p>
             <a:pPr algn="ctr"/>
+            <a:endParaRPr/>
           </a:p>
         </p:txBody>
       </p:sp>
@@ -15033,10 +15365,11 @@
           </a:fontRef>
         </p:style>
         <p:txBody>
-          <a:bodyPr rtlCol="0" anchor="ctr" wrap="square"/>
+          <a:bodyPr wrap="square" rtlCol="0" anchor="ctr"/>
           <a:lstStyle/>
           <a:p>
             <a:pPr algn="ctr"/>
+            <a:endParaRPr/>
           </a:p>
         </p:txBody>
       </p:sp>
@@ -15077,10 +15410,11 @@
           </a:fontRef>
         </p:style>
         <p:txBody>
-          <a:bodyPr rtlCol="0" anchor="ctr" wrap="square"/>
+          <a:bodyPr wrap="square" rtlCol="0" anchor="ctr"/>
           <a:lstStyle/>
           <a:p>
             <a:pPr algn="ctr"/>
+            <a:endParaRPr/>
           </a:p>
         </p:txBody>
       </p:sp>
@@ -15121,10 +15455,11 @@
           </a:fontRef>
         </p:style>
         <p:txBody>
-          <a:bodyPr rtlCol="0" anchor="ctr" wrap="square"/>
+          <a:bodyPr wrap="square" rtlCol="0" anchor="ctr"/>
           <a:lstStyle/>
           <a:p>
             <a:pPr algn="ctr"/>
+            <a:endParaRPr/>
           </a:p>
         </p:txBody>
       </p:sp>
@@ -15165,10 +15500,11 @@
           </a:fontRef>
         </p:style>
         <p:txBody>
-          <a:bodyPr rtlCol="0" anchor="ctr" wrap="square"/>
+          <a:bodyPr wrap="square" rtlCol="0" anchor="ctr"/>
           <a:lstStyle/>
           <a:p>
             <a:pPr algn="ctr"/>
+            <a:endParaRPr/>
           </a:p>
         </p:txBody>
       </p:sp>
@@ -15209,10 +15545,11 @@
           </a:fontRef>
         </p:style>
         <p:txBody>
-          <a:bodyPr rtlCol="0" anchor="ctr" wrap="square"/>
+          <a:bodyPr wrap="square" rtlCol="0" anchor="ctr"/>
           <a:lstStyle/>
           <a:p>
             <a:pPr algn="ctr"/>
+            <a:endParaRPr/>
           </a:p>
         </p:txBody>
       </p:sp>
@@ -15253,10 +15590,11 @@
           </a:fontRef>
         </p:style>
         <p:txBody>
-          <a:bodyPr rtlCol="0" anchor="ctr" wrap="square"/>
+          <a:bodyPr wrap="square" rtlCol="0" anchor="ctr"/>
           <a:lstStyle/>
           <a:p>
             <a:pPr algn="ctr"/>
+            <a:endParaRPr/>
           </a:p>
         </p:txBody>
       </p:sp>
@@ -15297,10 +15635,11 @@
           </a:fontRef>
         </p:style>
         <p:txBody>
-          <a:bodyPr rtlCol="0" anchor="ctr" wrap="square"/>
+          <a:bodyPr wrap="square" rtlCol="0" anchor="ctr"/>
           <a:lstStyle/>
           <a:p>
             <a:pPr algn="ctr"/>
+            <a:endParaRPr/>
           </a:p>
         </p:txBody>
       </p:sp>
@@ -15341,10 +15680,11 @@
           </a:fontRef>
         </p:style>
         <p:txBody>
-          <a:bodyPr rtlCol="0" anchor="ctr" wrap="square"/>
+          <a:bodyPr wrap="square" rtlCol="0" anchor="ctr"/>
           <a:lstStyle/>
           <a:p>
             <a:pPr algn="ctr"/>
+            <a:endParaRPr/>
           </a:p>
         </p:txBody>
       </p:sp>
@@ -15385,10 +15725,11 @@
           </a:fontRef>
         </p:style>
         <p:txBody>
-          <a:bodyPr rtlCol="0" anchor="ctr" wrap="square"/>
+          <a:bodyPr wrap="square" rtlCol="0" anchor="ctr"/>
           <a:lstStyle/>
           <a:p>
             <a:pPr algn="ctr"/>
+            <a:endParaRPr/>
           </a:p>
         </p:txBody>
       </p:sp>
@@ -15429,10 +15770,11 @@
           </a:fontRef>
         </p:style>
         <p:txBody>
-          <a:bodyPr rtlCol="0" anchor="ctr" wrap="square"/>
+          <a:bodyPr wrap="square" rtlCol="0" anchor="ctr"/>
           <a:lstStyle/>
           <a:p>
             <a:pPr algn="ctr"/>
+            <a:endParaRPr/>
           </a:p>
         </p:txBody>
       </p:sp>
@@ -15473,10 +15815,11 @@
           </a:fontRef>
         </p:style>
         <p:txBody>
-          <a:bodyPr rtlCol="0" anchor="ctr" wrap="square"/>
+          <a:bodyPr wrap="square" rtlCol="0" anchor="ctr"/>
           <a:lstStyle/>
           <a:p>
             <a:pPr algn="ctr"/>
+            <a:endParaRPr/>
           </a:p>
         </p:txBody>
       </p:sp>
@@ -15517,10 +15860,11 @@
           </a:fontRef>
         </p:style>
         <p:txBody>
-          <a:bodyPr rtlCol="0" anchor="ctr" wrap="square"/>
+          <a:bodyPr wrap="square" rtlCol="0" anchor="ctr"/>
           <a:lstStyle/>
           <a:p>
             <a:pPr algn="ctr"/>
+            <a:endParaRPr/>
           </a:p>
         </p:txBody>
       </p:sp>
@@ -15561,10 +15905,11 @@
           </a:fontRef>
         </p:style>
         <p:txBody>
-          <a:bodyPr rtlCol="0" anchor="ctr" wrap="square"/>
+          <a:bodyPr wrap="square" rtlCol="0" anchor="ctr"/>
           <a:lstStyle/>
           <a:p>
             <a:pPr algn="ctr"/>
+            <a:endParaRPr/>
           </a:p>
         </p:txBody>
       </p:sp>
@@ -15605,10 +15950,11 @@
           </a:fontRef>
         </p:style>
         <p:txBody>
-          <a:bodyPr rtlCol="0" anchor="ctr" wrap="square"/>
+          <a:bodyPr wrap="square" rtlCol="0" anchor="ctr"/>
           <a:lstStyle/>
           <a:p>
             <a:pPr algn="ctr"/>
+            <a:endParaRPr/>
           </a:p>
         </p:txBody>
       </p:sp>
@@ -15649,10 +15995,11 @@
           </a:fontRef>
         </p:style>
         <p:txBody>
-          <a:bodyPr rtlCol="0" anchor="ctr" wrap="square"/>
+          <a:bodyPr wrap="square" rtlCol="0" anchor="ctr"/>
           <a:lstStyle/>
           <a:p>
             <a:pPr algn="ctr"/>
+            <a:endParaRPr/>
           </a:p>
         </p:txBody>
       </p:sp>
@@ -15693,10 +16040,11 @@
           </a:fontRef>
         </p:style>
         <p:txBody>
-          <a:bodyPr rtlCol="0" anchor="ctr" wrap="square"/>
+          <a:bodyPr wrap="square" rtlCol="0" anchor="ctr"/>
           <a:lstStyle/>
           <a:p>
             <a:pPr algn="ctr"/>
+            <a:endParaRPr/>
           </a:p>
         </p:txBody>
       </p:sp>
@@ -15737,10 +16085,11 @@
           </a:fontRef>
         </p:style>
         <p:txBody>
-          <a:bodyPr rtlCol="0" anchor="ctr" wrap="square"/>
+          <a:bodyPr wrap="square" rtlCol="0" anchor="ctr"/>
           <a:lstStyle/>
           <a:p>
             <a:pPr algn="ctr"/>
+            <a:endParaRPr/>
           </a:p>
         </p:txBody>
       </p:sp>
@@ -15781,10 +16130,11 @@
           </a:fontRef>
         </p:style>
         <p:txBody>
-          <a:bodyPr rtlCol="0" anchor="ctr" wrap="square"/>
+          <a:bodyPr wrap="square" rtlCol="0" anchor="ctr"/>
           <a:lstStyle/>
           <a:p>
             <a:pPr algn="ctr"/>
+            <a:endParaRPr/>
           </a:p>
         </p:txBody>
       </p:sp>
@@ -15825,10 +16175,11 @@
           </a:fontRef>
         </p:style>
         <p:txBody>
-          <a:bodyPr rtlCol="0" anchor="ctr" wrap="square"/>
+          <a:bodyPr wrap="square" rtlCol="0" anchor="ctr"/>
           <a:lstStyle/>
           <a:p>
             <a:pPr algn="ctr"/>
+            <a:endParaRPr/>
           </a:p>
         </p:txBody>
       </p:sp>
@@ -15869,10 +16220,11 @@
           </a:fontRef>
         </p:style>
         <p:txBody>
-          <a:bodyPr rtlCol="0" anchor="ctr" wrap="square"/>
+          <a:bodyPr wrap="square" rtlCol="0" anchor="ctr"/>
           <a:lstStyle/>
           <a:p>
             <a:pPr algn="ctr"/>
+            <a:endParaRPr/>
           </a:p>
         </p:txBody>
       </p:sp>
@@ -15913,10 +16265,11 @@
           </a:fontRef>
         </p:style>
         <p:txBody>
-          <a:bodyPr rtlCol="0" anchor="ctr" wrap="square"/>
+          <a:bodyPr wrap="square" rtlCol="0" anchor="ctr"/>
           <a:lstStyle/>
           <a:p>
             <a:pPr algn="ctr"/>
+            <a:endParaRPr/>
           </a:p>
         </p:txBody>
       </p:sp>
@@ -15957,10 +16310,11 @@
           </a:fontRef>
         </p:style>
         <p:txBody>
-          <a:bodyPr rtlCol="0" anchor="ctr" wrap="square"/>
+          <a:bodyPr wrap="square" rtlCol="0" anchor="ctr"/>
           <a:lstStyle/>
           <a:p>
             <a:pPr algn="ctr"/>
+            <a:endParaRPr/>
           </a:p>
         </p:txBody>
       </p:sp>
@@ -16001,10 +16355,11 @@
           </a:fontRef>
         </p:style>
         <p:txBody>
-          <a:bodyPr rtlCol="0" anchor="ctr" wrap="square"/>
+          <a:bodyPr wrap="square" rtlCol="0" anchor="ctr"/>
           <a:lstStyle/>
           <a:p>
             <a:pPr algn="ctr"/>
+            <a:endParaRPr/>
           </a:p>
         </p:txBody>
       </p:sp>
@@ -16045,10 +16400,11 @@
           </a:fontRef>
         </p:style>
         <p:txBody>
-          <a:bodyPr rtlCol="0" anchor="ctr" wrap="square"/>
+          <a:bodyPr wrap="square" rtlCol="0" anchor="ctr"/>
           <a:lstStyle/>
           <a:p>
             <a:pPr algn="ctr"/>
+            <a:endParaRPr/>
           </a:p>
         </p:txBody>
       </p:sp>
@@ -16089,10 +16445,11 @@
           </a:fontRef>
         </p:style>
         <p:txBody>
-          <a:bodyPr rtlCol="0" anchor="ctr" wrap="square"/>
+          <a:bodyPr wrap="square" rtlCol="0" anchor="ctr"/>
           <a:lstStyle/>
           <a:p>
             <a:pPr algn="ctr"/>
+            <a:endParaRPr/>
           </a:p>
         </p:txBody>
       </p:sp>
@@ -16133,10 +16490,11 @@
           </a:fontRef>
         </p:style>
         <p:txBody>
-          <a:bodyPr rtlCol="0" anchor="ctr" wrap="square"/>
+          <a:bodyPr wrap="square" rtlCol="0" anchor="ctr"/>
           <a:lstStyle/>
           <a:p>
             <a:pPr algn="ctr"/>
+            <a:endParaRPr/>
           </a:p>
         </p:txBody>
       </p:sp>
@@ -16177,10 +16535,11 @@
           </a:fontRef>
         </p:style>
         <p:txBody>
-          <a:bodyPr rtlCol="0" anchor="ctr" wrap="square"/>
+          <a:bodyPr wrap="square" rtlCol="0" anchor="ctr"/>
           <a:lstStyle/>
           <a:p>
             <a:pPr algn="ctr"/>
+            <a:endParaRPr/>
           </a:p>
         </p:txBody>
       </p:sp>
@@ -16221,10 +16580,11 @@
           </a:fontRef>
         </p:style>
         <p:txBody>
-          <a:bodyPr rtlCol="0" anchor="ctr" wrap="square"/>
+          <a:bodyPr wrap="square" rtlCol="0" anchor="ctr"/>
           <a:lstStyle/>
           <a:p>
             <a:pPr algn="ctr"/>
+            <a:endParaRPr/>
           </a:p>
         </p:txBody>
       </p:sp>
@@ -16265,10 +16625,11 @@
           </a:fontRef>
         </p:style>
         <p:txBody>
-          <a:bodyPr rtlCol="0" anchor="ctr" wrap="square"/>
+          <a:bodyPr wrap="square" rtlCol="0" anchor="ctr"/>
           <a:lstStyle/>
           <a:p>
             <a:pPr algn="ctr"/>
+            <a:endParaRPr/>
           </a:p>
         </p:txBody>
       </p:sp>
@@ -16309,10 +16670,11 @@
           </a:fontRef>
         </p:style>
         <p:txBody>
-          <a:bodyPr rtlCol="0" anchor="ctr" wrap="square"/>
+          <a:bodyPr wrap="square" rtlCol="0" anchor="ctr"/>
           <a:lstStyle/>
           <a:p>
             <a:pPr algn="ctr"/>
+            <a:endParaRPr/>
           </a:p>
         </p:txBody>
       </p:sp>
@@ -16353,10 +16715,11 @@
           </a:fontRef>
         </p:style>
         <p:txBody>
-          <a:bodyPr rtlCol="0" anchor="ctr" wrap="square"/>
+          <a:bodyPr wrap="square" rtlCol="0" anchor="ctr"/>
           <a:lstStyle/>
           <a:p>
             <a:pPr algn="ctr"/>
+            <a:endParaRPr/>
           </a:p>
         </p:txBody>
       </p:sp>
@@ -16397,10 +16760,11 @@
           </a:fontRef>
         </p:style>
         <p:txBody>
-          <a:bodyPr rtlCol="0" anchor="ctr" wrap="square"/>
+          <a:bodyPr wrap="square" rtlCol="0" anchor="ctr"/>
           <a:lstStyle/>
           <a:p>
             <a:pPr algn="ctr"/>
+            <a:endParaRPr/>
           </a:p>
         </p:txBody>
       </p:sp>
@@ -16441,10 +16805,11 @@
           </a:fontRef>
         </p:style>
         <p:txBody>
-          <a:bodyPr rtlCol="0" anchor="ctr" wrap="square"/>
+          <a:bodyPr wrap="square" rtlCol="0" anchor="ctr"/>
           <a:lstStyle/>
           <a:p>
             <a:pPr algn="ctr"/>
+            <a:endParaRPr/>
           </a:p>
         </p:txBody>
       </p:sp>
@@ -16485,10 +16850,11 @@
           </a:fontRef>
         </p:style>
         <p:txBody>
-          <a:bodyPr rtlCol="0" anchor="ctr" wrap="square"/>
+          <a:bodyPr wrap="square" rtlCol="0" anchor="ctr"/>
           <a:lstStyle/>
           <a:p>
             <a:pPr algn="ctr"/>
+            <a:endParaRPr/>
           </a:p>
         </p:txBody>
       </p:sp>
@@ -16529,10 +16895,11 @@
           </a:fontRef>
         </p:style>
         <p:txBody>
-          <a:bodyPr rtlCol="0" anchor="ctr" wrap="square"/>
+          <a:bodyPr wrap="square" rtlCol="0" anchor="ctr"/>
           <a:lstStyle/>
           <a:p>
             <a:pPr algn="ctr"/>
+            <a:endParaRPr/>
           </a:p>
         </p:txBody>
       </p:sp>
@@ -16573,10 +16940,11 @@
           </a:fontRef>
         </p:style>
         <p:txBody>
-          <a:bodyPr rtlCol="0" anchor="ctr" wrap="square"/>
+          <a:bodyPr wrap="square" rtlCol="0" anchor="ctr"/>
           <a:lstStyle/>
           <a:p>
             <a:pPr algn="ctr"/>
+            <a:endParaRPr/>
           </a:p>
         </p:txBody>
       </p:sp>
@@ -16617,10 +16985,11 @@
           </a:fontRef>
         </p:style>
         <p:txBody>
-          <a:bodyPr rtlCol="0" anchor="ctr" wrap="square"/>
+          <a:bodyPr wrap="square" rtlCol="0" anchor="ctr"/>
           <a:lstStyle/>
           <a:p>
             <a:pPr algn="ctr"/>
+            <a:endParaRPr/>
           </a:p>
         </p:txBody>
       </p:sp>
@@ -16697,7 +17066,7 @@
           </a:fontRef>
         </p:style>
         <p:txBody>
-          <a:bodyPr rtlCol="0" anchor="ctr" wrap="square" lIns="25400" rIns="25400" tIns="12700" bIns="12700"/>
+          <a:bodyPr wrap="square" lIns="25400" tIns="12700" rIns="25400" bIns="12700" rtlCol="0" anchor="ctr"/>
           <a:lstStyle/>
           <a:p>
             <a:pPr algn="ctr">
@@ -16758,7 +17127,7 @@
           </a:fontRef>
         </p:style>
         <p:txBody>
-          <a:bodyPr rtlCol="0" anchor="ctr" wrap="square" lIns="25400" rIns="25400" tIns="12700" bIns="12700"/>
+          <a:bodyPr wrap="square" lIns="25400" tIns="12700" rIns="25400" bIns="12700" rtlCol="0" anchor="ctr"/>
           <a:lstStyle/>
           <a:p>
             <a:pPr algn="ctr">
@@ -16819,7 +17188,7 @@
           </a:fontRef>
         </p:style>
         <p:txBody>
-          <a:bodyPr rtlCol="0" anchor="ctr" wrap="square" lIns="25400" rIns="25400" tIns="12700" bIns="12700"/>
+          <a:bodyPr wrap="square" lIns="25400" tIns="12700" rIns="25400" bIns="12700" rtlCol="0" anchor="ctr"/>
           <a:lstStyle/>
           <a:p>
             <a:pPr algn="ctr">
@@ -16880,7 +17249,7 @@
           </a:fontRef>
         </p:style>
         <p:txBody>
-          <a:bodyPr rtlCol="0" anchor="ctr" wrap="square" lIns="25400" rIns="25400" tIns="12700" bIns="12700"/>
+          <a:bodyPr wrap="square" lIns="25400" tIns="12700" rIns="25400" bIns="12700" rtlCol="0" anchor="ctr"/>
           <a:lstStyle/>
           <a:p>
             <a:pPr algn="ctr">
@@ -16941,7 +17310,7 @@
           </a:fontRef>
         </p:style>
         <p:txBody>
-          <a:bodyPr rtlCol="0" anchor="ctr" wrap="square" lIns="25400" rIns="25400" tIns="12700" bIns="12700"/>
+          <a:bodyPr wrap="square" lIns="25400" tIns="12700" rIns="25400" bIns="12700" rtlCol="0" anchor="ctr"/>
           <a:lstStyle/>
           <a:p>
             <a:pPr algn="ctr">
@@ -17002,7 +17371,7 @@
           </a:fontRef>
         </p:style>
         <p:txBody>
-          <a:bodyPr rtlCol="0" anchor="ctr" wrap="square" lIns="25400" rIns="25400" tIns="12700" bIns="12700"/>
+          <a:bodyPr wrap="square" lIns="25400" tIns="12700" rIns="25400" bIns="12700" rtlCol="0" anchor="ctr"/>
           <a:lstStyle/>
           <a:p>
             <a:pPr algn="ctr">
@@ -17078,7 +17447,7 @@
 </file>
 
 <file path=ppt/slides/slide15.xml><?xml version="1.0" encoding="utf-8"?>
-<p:sld xmlns:a="http://schemas.openxmlformats.org/drawingml/2006/main" xmlns:p="http://schemas.openxmlformats.org/presentationml/2006/main" xmlns:r="http://schemas.openxmlformats.org/officeDocument/2006/relationships">
+<p:sld xmlns:a="http://schemas.openxmlformats.org/drawingml/2006/main" xmlns:r="http://schemas.openxmlformats.org/officeDocument/2006/relationships" xmlns:p="http://schemas.openxmlformats.org/presentationml/2006/main">
   <p:cSld>
     <p:spTree>
       <p:nvGrpSpPr>
@@ -17086,7 +17455,14 @@
         <p:cNvGrpSpPr/>
         <p:nvPr/>
       </p:nvGrpSpPr>
-      <p:grpSpPr/>
+      <p:grpSpPr>
+        <a:xfrm>
+          <a:off x="0" y="0"/>
+          <a:ext cx="0" cy="0"/>
+          <a:chOff x="0" y="0"/>
+          <a:chExt cx="0" cy="0"/>
+        </a:xfrm>
+      </p:grpSpPr>
       <p:sp>
         <p:nvSpPr>
           <p:cNvPr id="2" name="Rectangle 1"/>
@@ -17124,10 +17500,11 @@
           </a:fontRef>
         </p:style>
         <p:txBody>
-          <a:bodyPr rtlCol="0" anchor="ctr" wrap="square"/>
+          <a:bodyPr wrap="square" rtlCol="0" anchor="ctr"/>
           <a:lstStyle/>
           <a:p>
             <a:pPr algn="ctr"/>
+            <a:endParaRPr/>
           </a:p>
         </p:txBody>
       </p:sp>
@@ -17251,14 +17628,34 @@
               </a:spcAft>
             </a:pPr>
             <a:r>
-              <a:rPr sz="1250" b="0">
+              <a:rPr sz="1250" b="0" dirty="0">
                 <a:solidFill>
                   <a:srgbClr val="3A4658"/>
                 </a:solidFill>
                 <a:latin typeface="Meiryo"/>
                 <a:ea typeface="メイリオ"/>
               </a:rPr>
-              <a:t>[1] J. Hu et al., "PSELDNets: Pre-trained Neural Networks on Large-scale Synthetic Datasets for Sound Event Localization and Detection," arXiv:2411.06399, 2024.</a:t>
+              <a:t>[1] J. Hu et al., "</a:t>
+            </a:r>
+            <a:r>
+              <a:rPr sz="1250" b="0" dirty="0" err="1">
+                <a:solidFill>
+                  <a:srgbClr val="3A4658"/>
+                </a:solidFill>
+                <a:latin typeface="Meiryo"/>
+                <a:ea typeface="メイリオ"/>
+              </a:rPr>
+              <a:t>PSELDNets</a:t>
+            </a:r>
+            <a:r>
+              <a:rPr sz="1250" b="0" dirty="0">
+                <a:solidFill>
+                  <a:srgbClr val="3A4658"/>
+                </a:solidFill>
+                <a:latin typeface="Meiryo"/>
+                <a:ea typeface="メイリオ"/>
+              </a:rPr>
+              <a:t>: Pre-trained Neural Networks on Large-scale Synthetic Datasets for Sound Event Localization and Detection," arXiv:2411.06399, 2024.</a:t>
             </a:r>
           </a:p>
           <a:p>
@@ -17274,14 +17671,54 @@
               </a:spcAft>
             </a:pPr>
             <a:r>
-              <a:rPr sz="1250" b="0">
+              <a:rPr sz="1250" b="0" dirty="0">
                 <a:solidFill>
                   <a:srgbClr val="3A4658"/>
                 </a:solidFill>
                 <a:latin typeface="Meiryo"/>
                 <a:ea typeface="メイリオ"/>
               </a:rPr>
-              <a:t>[2] L. Barbisan et al., "DynamicSound simulator for simulating moving sources and microphone arrays," arXiv:2601.15433, 2026.</a:t>
+              <a:t>[2] L. </a:t>
+            </a:r>
+            <a:r>
+              <a:rPr sz="1250" b="0" dirty="0" err="1">
+                <a:solidFill>
+                  <a:srgbClr val="3A4658"/>
+                </a:solidFill>
+                <a:latin typeface="Meiryo"/>
+                <a:ea typeface="メイリオ"/>
+              </a:rPr>
+              <a:t>Barbisan</a:t>
+            </a:r>
+            <a:r>
+              <a:rPr sz="1250" b="0" dirty="0">
+                <a:solidFill>
+                  <a:srgbClr val="3A4658"/>
+                </a:solidFill>
+                <a:latin typeface="Meiryo"/>
+                <a:ea typeface="メイリオ"/>
+              </a:rPr>
+              <a:t> et al., "</a:t>
+            </a:r>
+            <a:r>
+              <a:rPr sz="1250" b="0" dirty="0" err="1">
+                <a:solidFill>
+                  <a:srgbClr val="3A4658"/>
+                </a:solidFill>
+                <a:latin typeface="Meiryo"/>
+                <a:ea typeface="メイリオ"/>
+              </a:rPr>
+              <a:t>DynamicSound</a:t>
+            </a:r>
+            <a:r>
+              <a:rPr sz="1250" b="0" dirty="0">
+                <a:solidFill>
+                  <a:srgbClr val="3A4658"/>
+                </a:solidFill>
+                <a:latin typeface="Meiryo"/>
+                <a:ea typeface="メイリオ"/>
+              </a:rPr>
+              <a:t> simulator for simulating moving sources and microphone arrays," arXiv:2601.15433, 2026.</a:t>
             </a:r>
           </a:p>
           <a:p>
@@ -17297,7 +17734,7 @@
               </a:spcAft>
             </a:pPr>
             <a:r>
-              <a:rPr sz="1250" b="0">
+              <a:rPr sz="1250" b="0" dirty="0">
                 <a:solidFill>
                   <a:srgbClr val="3A4658"/>
                 </a:solidFill>
@@ -17320,7 +17757,7 @@
               </a:spcAft>
             </a:pPr>
             <a:r>
-              <a:rPr sz="1250" b="0">
+              <a:rPr sz="1250" b="0" dirty="0">
                 <a:solidFill>
                   <a:srgbClr val="3A4658"/>
                 </a:solidFill>
@@ -17366,7 +17803,7 @@
               </a:spcAft>
             </a:pPr>
             <a:r>
-              <a:rPr sz="1250" b="0">
+              <a:rPr sz="1250" b="0" dirty="0">
                 <a:solidFill>
                   <a:srgbClr val="3A4658"/>
                 </a:solidFill>
@@ -17451,7 +17888,7 @@
           </a:fontRef>
         </p:style>
         <p:txBody>
-          <a:bodyPr rtlCol="0" anchor="ctr" wrap="square" lIns="25400" rIns="25400" tIns="12700" bIns="12700"/>
+          <a:bodyPr wrap="square" lIns="25400" tIns="12700" rIns="25400" bIns="12700" rtlCol="0" anchor="ctr"/>
           <a:lstStyle/>
           <a:p>
             <a:pPr algn="ctr">
@@ -17512,7 +17949,7 @@
           </a:fontRef>
         </p:style>
         <p:txBody>
-          <a:bodyPr rtlCol="0" anchor="ctr" wrap="square" lIns="25400" rIns="25400" tIns="12700" bIns="12700"/>
+          <a:bodyPr wrap="square" lIns="25400" tIns="12700" rIns="25400" bIns="12700" rtlCol="0" anchor="ctr"/>
           <a:lstStyle/>
           <a:p>
             <a:pPr algn="ctr">
@@ -17573,7 +18010,7 @@
           </a:fontRef>
         </p:style>
         <p:txBody>
-          <a:bodyPr rtlCol="0" anchor="ctr" wrap="square" lIns="25400" rIns="25400" tIns="12700" bIns="12700"/>
+          <a:bodyPr wrap="square" lIns="25400" tIns="12700" rIns="25400" bIns="12700" rtlCol="0" anchor="ctr"/>
           <a:lstStyle/>
           <a:p>
             <a:pPr algn="ctr">
@@ -17634,7 +18071,7 @@
           </a:fontRef>
         </p:style>
         <p:txBody>
-          <a:bodyPr rtlCol="0" anchor="ctr" wrap="square" lIns="25400" rIns="25400" tIns="12700" bIns="12700"/>
+          <a:bodyPr wrap="square" lIns="25400" tIns="12700" rIns="25400" bIns="12700" rtlCol="0" anchor="ctr"/>
           <a:lstStyle/>
           <a:p>
             <a:pPr algn="ctr">
@@ -17695,7 +18132,7 @@
           </a:fontRef>
         </p:style>
         <p:txBody>
-          <a:bodyPr rtlCol="0" anchor="ctr" wrap="square" lIns="25400" rIns="25400" tIns="12700" bIns="12700"/>
+          <a:bodyPr wrap="square" lIns="25400" tIns="12700" rIns="25400" bIns="12700" rtlCol="0" anchor="ctr"/>
           <a:lstStyle/>
           <a:p>
             <a:pPr algn="ctr">
@@ -17756,7 +18193,7 @@
           </a:fontRef>
         </p:style>
         <p:txBody>
-          <a:bodyPr rtlCol="0" anchor="ctr" wrap="square" lIns="25400" rIns="25400" tIns="12700" bIns="12700"/>
+          <a:bodyPr wrap="square" lIns="25400" tIns="12700" rIns="25400" bIns="12700" rtlCol="0" anchor="ctr"/>
           <a:lstStyle/>
           <a:p>
             <a:pPr algn="ctr">
@@ -17832,7 +18269,7 @@
 </file>
 
 <file path=ppt/slides/slide16.xml><?xml version="1.0" encoding="utf-8"?>
-<p:sld xmlns:a="http://schemas.openxmlformats.org/drawingml/2006/main" xmlns:p="http://schemas.openxmlformats.org/presentationml/2006/main" xmlns:r="http://schemas.openxmlformats.org/officeDocument/2006/relationships">
+<p:sld xmlns:a="http://schemas.openxmlformats.org/drawingml/2006/main" xmlns:r="http://schemas.openxmlformats.org/officeDocument/2006/relationships" xmlns:p="http://schemas.openxmlformats.org/presentationml/2006/main">
   <p:cSld>
     <p:spTree>
       <p:nvGrpSpPr>
@@ -17840,7 +18277,14 @@
         <p:cNvGrpSpPr/>
         <p:nvPr/>
       </p:nvGrpSpPr>
-      <p:grpSpPr/>
+      <p:grpSpPr>
+        <a:xfrm>
+          <a:off x="0" y="0"/>
+          <a:ext cx="0" cy="0"/>
+          <a:chOff x="0" y="0"/>
+          <a:chExt cx="0" cy="0"/>
+        </a:xfrm>
+      </p:grpSpPr>
       <p:sp>
         <p:nvSpPr>
           <p:cNvPr id="2" name="Rectangle 1"/>
@@ -17878,10 +18322,11 @@
           </a:fontRef>
         </p:style>
         <p:txBody>
-          <a:bodyPr rtlCol="0" anchor="ctr" wrap="square"/>
+          <a:bodyPr wrap="square" rtlCol="0" anchor="ctr"/>
           <a:lstStyle/>
           <a:p>
             <a:pPr algn="ctr"/>
+            <a:endParaRPr/>
           </a:p>
         </p:txBody>
       </p:sp>
@@ -17990,13 +18435,25 @@
                 <a:tableStyleId>{5C22544A-7EE6-4342-B048-85BDC9FD1C3A}</a:tableStyleId>
               </a:tblPr>
               <a:tblGrid>
-                <a:gridCol w="2286000"/>
-                <a:gridCol w="8534400"/>
+                <a:gridCol w="2286000">
+                  <a:extLst>
+                    <a:ext uri="{9D8B030D-6E8A-4147-A177-3AD203B41FA5}">
+                      <a16:colId xmlns:a16="http://schemas.microsoft.com/office/drawing/2014/main" val="20000"/>
+                    </a:ext>
+                  </a:extLst>
+                </a:gridCol>
+                <a:gridCol w="8534400">
+                  <a:extLst>
+                    <a:ext uri="{9D8B030D-6E8A-4147-A177-3AD203B41FA5}">
+                      <a16:colId xmlns:a16="http://schemas.microsoft.com/office/drawing/2014/main" val="20001"/>
+                    </a:ext>
+                  </a:extLst>
+                </a:gridCol>
               </a:tblGrid>
               <a:tr h="592666">
                 <a:tc>
                   <a:txBody>
-                    <a:bodyPr wrap="square"/>
+                    <a:bodyPr/>
                     <a:lstStyle/>
                     <a:p>
                       <a:pPr algn="l">
@@ -18027,7 +18484,7 @@
                 </a:tc>
                 <a:tc>
                   <a:txBody>
-                    <a:bodyPr wrap="square"/>
+                    <a:bodyPr/>
                     <a:lstStyle/>
                     <a:p>
                       <a:pPr algn="l">
@@ -18056,11 +18513,16 @@
                     </a:solidFill>
                   </a:tcPr>
                 </a:tc>
+                <a:extLst>
+                  <a:ext uri="{0D108BD9-81ED-4DB2-BD59-A6C34878D82A}">
+                    <a16:rowId xmlns:a16="http://schemas.microsoft.com/office/drawing/2014/main" val="10000"/>
+                  </a:ext>
+                </a:extLst>
               </a:tr>
               <a:tr h="592666">
                 <a:tc>
                   <a:txBody>
-                    <a:bodyPr wrap="square"/>
+                    <a:bodyPr/>
                     <a:lstStyle/>
                     <a:p>
                       <a:pPr algn="l">
@@ -18091,7 +18553,7 @@
                 </a:tc>
                 <a:tc>
                   <a:txBody>
-                    <a:bodyPr wrap="square"/>
+                    <a:bodyPr/>
                     <a:lstStyle/>
                     <a:p>
                       <a:pPr algn="l">
@@ -18120,11 +18582,16 @@
                     </a:solidFill>
                   </a:tcPr>
                 </a:tc>
+                <a:extLst>
+                  <a:ext uri="{0D108BD9-81ED-4DB2-BD59-A6C34878D82A}">
+                    <a16:rowId xmlns:a16="http://schemas.microsoft.com/office/drawing/2014/main" val="10001"/>
+                  </a:ext>
+                </a:extLst>
               </a:tr>
               <a:tr h="592666">
                 <a:tc>
                   <a:txBody>
-                    <a:bodyPr wrap="square"/>
+                    <a:bodyPr/>
                     <a:lstStyle/>
                     <a:p>
                       <a:pPr algn="l">
@@ -18155,7 +18622,7 @@
                 </a:tc>
                 <a:tc>
                   <a:txBody>
-                    <a:bodyPr wrap="square"/>
+                    <a:bodyPr/>
                     <a:lstStyle/>
                     <a:p>
                       <a:pPr algn="l">
@@ -18184,11 +18651,16 @@
                     </a:solidFill>
                   </a:tcPr>
                 </a:tc>
+                <a:extLst>
+                  <a:ext uri="{0D108BD9-81ED-4DB2-BD59-A6C34878D82A}">
+                    <a16:rowId xmlns:a16="http://schemas.microsoft.com/office/drawing/2014/main" val="10002"/>
+                  </a:ext>
+                </a:extLst>
               </a:tr>
               <a:tr h="592666">
                 <a:tc>
                   <a:txBody>
-                    <a:bodyPr wrap="square"/>
+                    <a:bodyPr/>
                     <a:lstStyle/>
                     <a:p>
                       <a:pPr algn="l">
@@ -18219,7 +18691,7 @@
                 </a:tc>
                 <a:tc>
                   <a:txBody>
-                    <a:bodyPr wrap="square"/>
+                    <a:bodyPr/>
                     <a:lstStyle/>
                     <a:p>
                       <a:pPr algn="l">
@@ -18248,11 +18720,16 @@
                     </a:solidFill>
                   </a:tcPr>
                 </a:tc>
+                <a:extLst>
+                  <a:ext uri="{0D108BD9-81ED-4DB2-BD59-A6C34878D82A}">
+                    <a16:rowId xmlns:a16="http://schemas.microsoft.com/office/drawing/2014/main" val="10003"/>
+                  </a:ext>
+                </a:extLst>
               </a:tr>
               <a:tr h="592666">
                 <a:tc>
                   <a:txBody>
-                    <a:bodyPr wrap="square"/>
+                    <a:bodyPr/>
                     <a:lstStyle/>
                     <a:p>
                       <a:pPr algn="l">
@@ -18283,7 +18760,7 @@
                 </a:tc>
                 <a:tc>
                   <a:txBody>
-                    <a:bodyPr wrap="square"/>
+                    <a:bodyPr/>
                     <a:lstStyle/>
                     <a:p>
                       <a:pPr algn="l">
@@ -18312,11 +18789,16 @@
                     </a:solidFill>
                   </a:tcPr>
                 </a:tc>
+                <a:extLst>
+                  <a:ext uri="{0D108BD9-81ED-4DB2-BD59-A6C34878D82A}">
+                    <a16:rowId xmlns:a16="http://schemas.microsoft.com/office/drawing/2014/main" val="10004"/>
+                  </a:ext>
+                </a:extLst>
               </a:tr>
               <a:tr h="592670">
                 <a:tc>
                   <a:txBody>
-                    <a:bodyPr wrap="square"/>
+                    <a:bodyPr/>
                     <a:lstStyle/>
                     <a:p>
                       <a:pPr algn="l">
@@ -18347,7 +18829,7 @@
                 </a:tc>
                 <a:tc>
                   <a:txBody>
-                    <a:bodyPr wrap="square"/>
+                    <a:bodyPr/>
                     <a:lstStyle/>
                     <a:p>
                       <a:pPr algn="l">
@@ -18376,6 +18858,11 @@
                     </a:solidFill>
                   </a:tcPr>
                 </a:tc>
+                <a:extLst>
+                  <a:ext uri="{0D108BD9-81ED-4DB2-BD59-A6C34878D82A}">
+                    <a16:rowId xmlns:a16="http://schemas.microsoft.com/office/drawing/2014/main" val="10005"/>
+                  </a:ext>
+                </a:extLst>
               </a:tr>
             </a:tbl>
           </a:graphicData>
@@ -18497,7 +18984,7 @@
           </a:fontRef>
         </p:style>
         <p:txBody>
-          <a:bodyPr rtlCol="0" anchor="ctr" wrap="square" lIns="25400" rIns="25400" tIns="12700" bIns="12700"/>
+          <a:bodyPr wrap="square" lIns="25400" tIns="12700" rIns="25400" bIns="12700" rtlCol="0" anchor="ctr"/>
           <a:lstStyle/>
           <a:p>
             <a:pPr algn="ctr">
@@ -18558,7 +19045,7 @@
           </a:fontRef>
         </p:style>
         <p:txBody>
-          <a:bodyPr rtlCol="0" anchor="ctr" wrap="square" lIns="25400" rIns="25400" tIns="12700" bIns="12700"/>
+          <a:bodyPr wrap="square" lIns="25400" tIns="12700" rIns="25400" bIns="12700" rtlCol="0" anchor="ctr"/>
           <a:lstStyle/>
           <a:p>
             <a:pPr algn="ctr">
@@ -18619,7 +19106,7 @@
           </a:fontRef>
         </p:style>
         <p:txBody>
-          <a:bodyPr rtlCol="0" anchor="ctr" wrap="square" lIns="25400" rIns="25400" tIns="12700" bIns="12700"/>
+          <a:bodyPr wrap="square" lIns="25400" tIns="12700" rIns="25400" bIns="12700" rtlCol="0" anchor="ctr"/>
           <a:lstStyle/>
           <a:p>
             <a:pPr algn="ctr">
@@ -18680,7 +19167,7 @@
           </a:fontRef>
         </p:style>
         <p:txBody>
-          <a:bodyPr rtlCol="0" anchor="ctr" wrap="square" lIns="25400" rIns="25400" tIns="12700" bIns="12700"/>
+          <a:bodyPr wrap="square" lIns="25400" tIns="12700" rIns="25400" bIns="12700" rtlCol="0" anchor="ctr"/>
           <a:lstStyle/>
           <a:p>
             <a:pPr algn="ctr">
@@ -18741,7 +19228,7 @@
           </a:fontRef>
         </p:style>
         <p:txBody>
-          <a:bodyPr rtlCol="0" anchor="ctr" wrap="square" lIns="25400" rIns="25400" tIns="12700" bIns="12700"/>
+          <a:bodyPr wrap="square" lIns="25400" tIns="12700" rIns="25400" bIns="12700" rtlCol="0" anchor="ctr"/>
           <a:lstStyle/>
           <a:p>
             <a:pPr algn="ctr">
@@ -18802,7 +19289,7 @@
           </a:fontRef>
         </p:style>
         <p:txBody>
-          <a:bodyPr rtlCol="0" anchor="ctr" wrap="square" lIns="25400" rIns="25400" tIns="12700" bIns="12700"/>
+          <a:bodyPr wrap="square" lIns="25400" tIns="12700" rIns="25400" bIns="12700" rtlCol="0" anchor="ctr"/>
           <a:lstStyle/>
           <a:p>
             <a:pPr algn="ctr">
@@ -18878,7 +19365,7 @@
 </file>
 
 <file path=ppt/slides/slide17.xml><?xml version="1.0" encoding="utf-8"?>
-<p:sld xmlns:a="http://schemas.openxmlformats.org/drawingml/2006/main" xmlns:p="http://schemas.openxmlformats.org/presentationml/2006/main" xmlns:r="http://schemas.openxmlformats.org/officeDocument/2006/relationships">
+<p:sld xmlns:a="http://schemas.openxmlformats.org/drawingml/2006/main" xmlns:r="http://schemas.openxmlformats.org/officeDocument/2006/relationships" xmlns:p="http://schemas.openxmlformats.org/presentationml/2006/main">
   <p:cSld>
     <p:spTree>
       <p:nvGrpSpPr>
@@ -18886,7 +19373,14 @@
         <p:cNvGrpSpPr/>
         <p:nvPr/>
       </p:nvGrpSpPr>
-      <p:grpSpPr/>
+      <p:grpSpPr>
+        <a:xfrm>
+          <a:off x="0" y="0"/>
+          <a:ext cx="0" cy="0"/>
+          <a:chOff x="0" y="0"/>
+          <a:chExt cx="0" cy="0"/>
+        </a:xfrm>
+      </p:grpSpPr>
       <p:sp>
         <p:nvSpPr>
           <p:cNvPr id="2" name="Rectangle 1"/>
@@ -18924,10 +19418,11 @@
           </a:fontRef>
         </p:style>
         <p:txBody>
-          <a:bodyPr rtlCol="0" anchor="ctr" wrap="square"/>
+          <a:bodyPr wrap="square" rtlCol="0" anchor="ctr"/>
           <a:lstStyle/>
           <a:p>
             <a:pPr algn="ctr"/>
+            <a:endParaRPr/>
           </a:p>
         </p:txBody>
       </p:sp>
@@ -19058,17 +19553,7 @@
                 <a:latin typeface="Meiryo"/>
                 <a:ea typeface="メイリオ"/>
               </a:rPr>
-              <a:t>■ </a:t>
-            </a:r>
-            <a:r>
-              <a:rPr sz="1450" b="1">
-                <a:solidFill>
-                  <a:srgbClr val="16233A"/>
-                </a:solidFill>
-                <a:latin typeface="Meiryo"/>
-                <a:ea typeface="メイリオ"/>
-              </a:rPr>
-              <a:t>確定評価セット</a:t>
+              <a:t>■ 確定評価セット</a:t>
             </a:r>
             <a:r>
               <a:rPr sz="1450" b="0">
@@ -19154,17 +19639,7 @@
                 <a:latin typeface="Meiryo"/>
                 <a:ea typeface="メイリオ"/>
               </a:rPr>
-              <a:t>■ </a:t>
-            </a:r>
-            <a:r>
-              <a:rPr sz="1450" b="1">
-                <a:solidFill>
-                  <a:srgbClr val="16233A"/>
-                </a:solidFill>
-                <a:latin typeface="Meiryo"/>
-                <a:ea typeface="メイリオ"/>
-              </a:rPr>
-              <a:t>AI外部監査</a:t>
+              <a:t>■ AI外部監査</a:t>
             </a:r>
             <a:r>
               <a:rPr sz="1450" b="0">
@@ -19197,37 +19672,7 @@
                 <a:latin typeface="Meiryo"/>
                 <a:ea typeface="メイリオ"/>
               </a:rPr>
-              <a:t>■ </a:t>
-            </a:r>
-            <a:r>
-              <a:rPr sz="1450" b="0">
-                <a:solidFill>
-                  <a:srgbClr val="3A4658"/>
-                </a:solidFill>
-                <a:latin typeface="Meiryo"/>
-                <a:ea typeface="メイリオ"/>
-              </a:rPr>
-              <a:t>失敗ケースは</a:t>
-            </a:r>
-            <a:r>
-              <a:rPr sz="1450" b="1">
-                <a:solidFill>
-                  <a:srgbClr val="16233A"/>
-                </a:solidFill>
-                <a:latin typeface="Meiryo"/>
-                <a:ea typeface="メイリオ"/>
-              </a:rPr>
-              <a:t>個票監査</a:t>
-            </a:r>
-            <a:r>
-              <a:rPr sz="1450" b="0">
-                <a:solidFill>
-                  <a:srgbClr val="3A4658"/>
-                </a:solidFill>
-                <a:latin typeface="Meiryo"/>
-                <a:ea typeface="メイリオ"/>
-              </a:rPr>
-              <a:t>で全数分類（至近警告に届かなかった重大車153台の内訳まで記録）</a:t>
+              <a:t>■ 失敗ケースは個票監査で全数分類（至近警告に届かなかった重大車153台の内訳まで記録）</a:t>
             </a:r>
           </a:p>
         </p:txBody>
@@ -19305,7 +19750,7 @@
           </a:fontRef>
         </p:style>
         <p:txBody>
-          <a:bodyPr rtlCol="0" anchor="ctr" wrap="square" lIns="25400" rIns="25400" tIns="12700" bIns="12700"/>
+          <a:bodyPr wrap="square" lIns="25400" tIns="12700" rIns="25400" bIns="12700" rtlCol="0" anchor="ctr"/>
           <a:lstStyle/>
           <a:p>
             <a:pPr algn="ctr">
@@ -19366,7 +19811,7 @@
           </a:fontRef>
         </p:style>
         <p:txBody>
-          <a:bodyPr rtlCol="0" anchor="ctr" wrap="square" lIns="25400" rIns="25400" tIns="12700" bIns="12700"/>
+          <a:bodyPr wrap="square" lIns="25400" tIns="12700" rIns="25400" bIns="12700" rtlCol="0" anchor="ctr"/>
           <a:lstStyle/>
           <a:p>
             <a:pPr algn="ctr">
@@ -19427,7 +19872,7 @@
           </a:fontRef>
         </p:style>
         <p:txBody>
-          <a:bodyPr rtlCol="0" anchor="ctr" wrap="square" lIns="25400" rIns="25400" tIns="12700" bIns="12700"/>
+          <a:bodyPr wrap="square" lIns="25400" tIns="12700" rIns="25400" bIns="12700" rtlCol="0" anchor="ctr"/>
           <a:lstStyle/>
           <a:p>
             <a:pPr algn="ctr">
@@ -19488,7 +19933,7 @@
           </a:fontRef>
         </p:style>
         <p:txBody>
-          <a:bodyPr rtlCol="0" anchor="ctr" wrap="square" lIns="25400" rIns="25400" tIns="12700" bIns="12700"/>
+          <a:bodyPr wrap="square" lIns="25400" tIns="12700" rIns="25400" bIns="12700" rtlCol="0" anchor="ctr"/>
           <a:lstStyle/>
           <a:p>
             <a:pPr algn="ctr">
@@ -19549,7 +19994,7 @@
           </a:fontRef>
         </p:style>
         <p:txBody>
-          <a:bodyPr rtlCol="0" anchor="ctr" wrap="square" lIns="25400" rIns="25400" tIns="12700" bIns="12700"/>
+          <a:bodyPr wrap="square" lIns="25400" tIns="12700" rIns="25400" bIns="12700" rtlCol="0" anchor="ctr"/>
           <a:lstStyle/>
           <a:p>
             <a:pPr algn="ctr">
@@ -19610,7 +20055,7 @@
           </a:fontRef>
         </p:style>
         <p:txBody>
-          <a:bodyPr rtlCol="0" anchor="ctr" wrap="square" lIns="25400" rIns="25400" tIns="12700" bIns="12700"/>
+          <a:bodyPr wrap="square" lIns="25400" tIns="12700" rIns="25400" bIns="12700" rtlCol="0" anchor="ctr"/>
           <a:lstStyle/>
           <a:p>
             <a:pPr algn="ctr">
@@ -19686,7 +20131,7 @@
 </file>
 
 <file path=ppt/slides/slide2.xml><?xml version="1.0" encoding="utf-8"?>
-<p:sld xmlns:a="http://schemas.openxmlformats.org/drawingml/2006/main" xmlns:p="http://schemas.openxmlformats.org/presentationml/2006/main" xmlns:r="http://schemas.openxmlformats.org/officeDocument/2006/relationships">
+<p:sld xmlns:a="http://schemas.openxmlformats.org/drawingml/2006/main" xmlns:r="http://schemas.openxmlformats.org/officeDocument/2006/relationships" xmlns:p="http://schemas.openxmlformats.org/presentationml/2006/main">
   <p:cSld>
     <p:spTree>
       <p:nvGrpSpPr>
@@ -19694,7 +20139,14 @@
         <p:cNvGrpSpPr/>
         <p:nvPr/>
       </p:nvGrpSpPr>
-      <p:grpSpPr/>
+      <p:grpSpPr>
+        <a:xfrm>
+          <a:off x="0" y="0"/>
+          <a:ext cx="0" cy="0"/>
+          <a:chOff x="0" y="0"/>
+          <a:chExt cx="0" cy="0"/>
+        </a:xfrm>
+      </p:grpSpPr>
       <p:sp>
         <p:nvSpPr>
           <p:cNvPr id="2" name="Rectangle 1"/>
@@ -19732,10 +20184,11 @@
           </a:fontRef>
         </p:style>
         <p:txBody>
-          <a:bodyPr rtlCol="0" anchor="ctr" wrap="square"/>
+          <a:bodyPr wrap="square" rtlCol="0" anchor="ctr"/>
           <a:lstStyle/>
           <a:p>
             <a:pPr algn="ctr"/>
+            <a:endParaRPr/>
           </a:p>
         </p:txBody>
       </p:sp>
@@ -20060,10 +20513,11 @@
           </a:fontRef>
         </p:style>
         <p:txBody>
-          <a:bodyPr rtlCol="0" anchor="ctr" wrap="square"/>
+          <a:bodyPr wrap="square" rtlCol="0" anchor="ctr"/>
           <a:lstStyle/>
           <a:p>
             <a:pPr algn="ctr"/>
+            <a:endParaRPr/>
           </a:p>
         </p:txBody>
       </p:sp>
@@ -20104,10 +20558,11 @@
           </a:fontRef>
         </p:style>
         <p:txBody>
-          <a:bodyPr rtlCol="0" anchor="ctr" wrap="square"/>
+          <a:bodyPr wrap="square" rtlCol="0" anchor="ctr"/>
           <a:lstStyle/>
           <a:p>
             <a:pPr algn="ctr"/>
+            <a:endParaRPr/>
           </a:p>
         </p:txBody>
       </p:sp>
@@ -20191,10 +20646,11 @@
           </a:fontRef>
         </p:style>
         <p:txBody>
-          <a:bodyPr rtlCol="0" anchor="ctr" wrap="square"/>
+          <a:bodyPr wrap="square" rtlCol="0" anchor="ctr"/>
           <a:lstStyle/>
           <a:p>
             <a:pPr algn="ctr"/>
+            <a:endParaRPr/>
           </a:p>
         </p:txBody>
       </p:sp>
@@ -20634,7 +21090,7 @@
           </a:fontRef>
         </p:style>
         <p:txBody>
-          <a:bodyPr rtlCol="0" anchor="ctr" wrap="square" lIns="25400" rIns="25400" tIns="12700" bIns="12700"/>
+          <a:bodyPr wrap="square" lIns="25400" tIns="12700" rIns="25400" bIns="12700" rtlCol="0" anchor="ctr"/>
           <a:lstStyle/>
           <a:p>
             <a:pPr algn="ctr">
@@ -20695,7 +21151,7 @@
           </a:fontRef>
         </p:style>
         <p:txBody>
-          <a:bodyPr rtlCol="0" anchor="ctr" wrap="square" lIns="25400" rIns="25400" tIns="12700" bIns="12700"/>
+          <a:bodyPr wrap="square" lIns="25400" tIns="12700" rIns="25400" bIns="12700" rtlCol="0" anchor="ctr"/>
           <a:lstStyle/>
           <a:p>
             <a:pPr algn="ctr">
@@ -20756,7 +21212,7 @@
           </a:fontRef>
         </p:style>
         <p:txBody>
-          <a:bodyPr rtlCol="0" anchor="ctr" wrap="square" lIns="25400" rIns="25400" tIns="12700" bIns="12700"/>
+          <a:bodyPr wrap="square" lIns="25400" tIns="12700" rIns="25400" bIns="12700" rtlCol="0" anchor="ctr"/>
           <a:lstStyle/>
           <a:p>
             <a:pPr algn="ctr">
@@ -20817,7 +21273,7 @@
           </a:fontRef>
         </p:style>
         <p:txBody>
-          <a:bodyPr rtlCol="0" anchor="ctr" wrap="square" lIns="25400" rIns="25400" tIns="12700" bIns="12700"/>
+          <a:bodyPr wrap="square" lIns="25400" tIns="12700" rIns="25400" bIns="12700" rtlCol="0" anchor="ctr"/>
           <a:lstStyle/>
           <a:p>
             <a:pPr algn="ctr">
@@ -20878,7 +21334,7 @@
           </a:fontRef>
         </p:style>
         <p:txBody>
-          <a:bodyPr rtlCol="0" anchor="ctr" wrap="square" lIns="25400" rIns="25400" tIns="12700" bIns="12700"/>
+          <a:bodyPr wrap="square" lIns="25400" tIns="12700" rIns="25400" bIns="12700" rtlCol="0" anchor="ctr"/>
           <a:lstStyle/>
           <a:p>
             <a:pPr algn="ctr">
@@ -20939,7 +21395,7 @@
           </a:fontRef>
         </p:style>
         <p:txBody>
-          <a:bodyPr rtlCol="0" anchor="ctr" wrap="square" lIns="25400" rIns="25400" tIns="12700" bIns="12700"/>
+          <a:bodyPr wrap="square" lIns="25400" tIns="12700" rIns="25400" bIns="12700" rtlCol="0" anchor="ctr"/>
           <a:lstStyle/>
           <a:p>
             <a:pPr algn="ctr">
@@ -21015,7 +21471,7 @@
 </file>
 
 <file path=ppt/slides/slide3.xml><?xml version="1.0" encoding="utf-8"?>
-<p:sld xmlns:a="http://schemas.openxmlformats.org/drawingml/2006/main" xmlns:p="http://schemas.openxmlformats.org/presentationml/2006/main" xmlns:r="http://schemas.openxmlformats.org/officeDocument/2006/relationships">
+<p:sld xmlns:a="http://schemas.openxmlformats.org/drawingml/2006/main" xmlns:r="http://schemas.openxmlformats.org/officeDocument/2006/relationships" xmlns:p="http://schemas.openxmlformats.org/presentationml/2006/main">
   <p:cSld>
     <p:spTree>
       <p:nvGrpSpPr>
@@ -21023,7 +21479,14 @@
         <p:cNvGrpSpPr/>
         <p:nvPr/>
       </p:nvGrpSpPr>
-      <p:grpSpPr/>
+      <p:grpSpPr>
+        <a:xfrm>
+          <a:off x="0" y="0"/>
+          <a:ext cx="0" cy="0"/>
+          <a:chOff x="0" y="0"/>
+          <a:chExt cx="0" cy="0"/>
+        </a:xfrm>
+      </p:grpSpPr>
       <p:sp>
         <p:nvSpPr>
           <p:cNvPr id="2" name="Rectangle 1"/>
@@ -21061,10 +21524,11 @@
           </a:fontRef>
         </p:style>
         <p:txBody>
-          <a:bodyPr rtlCol="0" anchor="ctr" wrap="square"/>
+          <a:bodyPr wrap="square" rtlCol="0" anchor="ctr"/>
           <a:lstStyle/>
           <a:p>
             <a:pPr algn="ctr"/>
+            <a:endParaRPr/>
           </a:p>
         </p:txBody>
       </p:sp>
@@ -21193,7 +21657,7 @@
           </a:fontRef>
         </p:style>
         <p:txBody>
-          <a:bodyPr rtlCol="0" anchor="t" wrap="square" lIns="177800" rIns="177800" tIns="127000" bIns="101600"/>
+          <a:bodyPr wrap="square" lIns="177800" tIns="127000" rIns="177800" bIns="101600" rtlCol="0" anchor="t"/>
           <a:lstStyle/>
           <a:p>
             <a:pPr algn="l">
@@ -21279,7 +21743,7 @@
           </a:fontRef>
         </p:style>
         <p:txBody>
-          <a:bodyPr rtlCol="0" anchor="t" wrap="square" lIns="177800" rIns="177800" tIns="127000" bIns="101600"/>
+          <a:bodyPr wrap="square" lIns="177800" tIns="127000" rIns="177800" bIns="101600" rtlCol="0" anchor="t"/>
           <a:lstStyle/>
           <a:p>
             <a:pPr algn="l">
@@ -21365,7 +21829,7 @@
           </a:fontRef>
         </p:style>
         <p:txBody>
-          <a:bodyPr rtlCol="0" anchor="t" wrap="square" lIns="177800" rIns="177800" tIns="127000" bIns="101600"/>
+          <a:bodyPr wrap="square" lIns="177800" tIns="127000" rIns="177800" bIns="101600" rtlCol="0" anchor="t"/>
           <a:lstStyle/>
           <a:p>
             <a:pPr algn="l">
@@ -21449,10 +21913,11 @@
           </a:fontRef>
         </p:style>
         <p:txBody>
-          <a:bodyPr rtlCol="0" anchor="ctr" wrap="square"/>
+          <a:bodyPr wrap="square" rtlCol="0" anchor="ctr"/>
           <a:lstStyle/>
           <a:p>
             <a:pPr algn="ctr"/>
+            <a:endParaRPr/>
           </a:p>
         </p:txBody>
       </p:sp>
@@ -21495,7 +21960,7 @@
           </a:fontRef>
         </p:style>
         <p:txBody>
-          <a:bodyPr rtlCol="0" anchor="ctr" wrap="square" lIns="203200" tIns="127000"/>
+          <a:bodyPr wrap="square" lIns="203200" tIns="127000" rtlCol="0" anchor="ctr"/>
           <a:lstStyle/>
           <a:p>
             <a:pPr algn="l">
@@ -21655,7 +22120,7 @@
           </a:fontRef>
         </p:style>
         <p:txBody>
-          <a:bodyPr rtlCol="0" anchor="ctr" wrap="square" lIns="25400" rIns="25400" tIns="12700" bIns="12700"/>
+          <a:bodyPr wrap="square" lIns="25400" tIns="12700" rIns="25400" bIns="12700" rtlCol="0" anchor="ctr"/>
           <a:lstStyle/>
           <a:p>
             <a:pPr algn="ctr">
@@ -21716,7 +22181,7 @@
           </a:fontRef>
         </p:style>
         <p:txBody>
-          <a:bodyPr rtlCol="0" anchor="ctr" wrap="square" lIns="25400" rIns="25400" tIns="12700" bIns="12700"/>
+          <a:bodyPr wrap="square" lIns="25400" tIns="12700" rIns="25400" bIns="12700" rtlCol="0" anchor="ctr"/>
           <a:lstStyle/>
           <a:p>
             <a:pPr algn="ctr">
@@ -21777,7 +22242,7 @@
           </a:fontRef>
         </p:style>
         <p:txBody>
-          <a:bodyPr rtlCol="0" anchor="ctr" wrap="square" lIns="25400" rIns="25400" tIns="12700" bIns="12700"/>
+          <a:bodyPr wrap="square" lIns="25400" tIns="12700" rIns="25400" bIns="12700" rtlCol="0" anchor="ctr"/>
           <a:lstStyle/>
           <a:p>
             <a:pPr algn="ctr">
@@ -21838,7 +22303,7 @@
           </a:fontRef>
         </p:style>
         <p:txBody>
-          <a:bodyPr rtlCol="0" anchor="ctr" wrap="square" lIns="25400" rIns="25400" tIns="12700" bIns="12700"/>
+          <a:bodyPr wrap="square" lIns="25400" tIns="12700" rIns="25400" bIns="12700" rtlCol="0" anchor="ctr"/>
           <a:lstStyle/>
           <a:p>
             <a:pPr algn="ctr">
@@ -21899,7 +22364,7 @@
           </a:fontRef>
         </p:style>
         <p:txBody>
-          <a:bodyPr rtlCol="0" anchor="ctr" wrap="square" lIns="25400" rIns="25400" tIns="12700" bIns="12700"/>
+          <a:bodyPr wrap="square" lIns="25400" tIns="12700" rIns="25400" bIns="12700" rtlCol="0" anchor="ctr"/>
           <a:lstStyle/>
           <a:p>
             <a:pPr algn="ctr">
@@ -21960,7 +22425,7 @@
           </a:fontRef>
         </p:style>
         <p:txBody>
-          <a:bodyPr rtlCol="0" anchor="ctr" wrap="square" lIns="25400" rIns="25400" tIns="12700" bIns="12700"/>
+          <a:bodyPr wrap="square" lIns="25400" tIns="12700" rIns="25400" bIns="12700" rtlCol="0" anchor="ctr"/>
           <a:lstStyle/>
           <a:p>
             <a:pPr algn="ctr">
@@ -22036,7 +22501,7 @@
 </file>
 
 <file path=ppt/slides/slide4.xml><?xml version="1.0" encoding="utf-8"?>
-<p:sld xmlns:a="http://schemas.openxmlformats.org/drawingml/2006/main" xmlns:p="http://schemas.openxmlformats.org/presentationml/2006/main" xmlns:r="http://schemas.openxmlformats.org/officeDocument/2006/relationships">
+<p:sld xmlns:a="http://schemas.openxmlformats.org/drawingml/2006/main" xmlns:r="http://schemas.openxmlformats.org/officeDocument/2006/relationships" xmlns:p="http://schemas.openxmlformats.org/presentationml/2006/main">
   <p:cSld>
     <p:spTree>
       <p:nvGrpSpPr>
@@ -22044,7 +22509,14 @@
         <p:cNvGrpSpPr/>
         <p:nvPr/>
       </p:nvGrpSpPr>
-      <p:grpSpPr/>
+      <p:grpSpPr>
+        <a:xfrm>
+          <a:off x="0" y="0"/>
+          <a:ext cx="0" cy="0"/>
+          <a:chOff x="0" y="0"/>
+          <a:chExt cx="0" cy="0"/>
+        </a:xfrm>
+      </p:grpSpPr>
       <p:sp>
         <p:nvSpPr>
           <p:cNvPr id="2" name="Rectangle 1"/>
@@ -22082,10 +22554,11 @@
           </a:fontRef>
         </p:style>
         <p:txBody>
-          <a:bodyPr rtlCol="0" anchor="ctr" wrap="square"/>
+          <a:bodyPr wrap="square" rtlCol="0" anchor="ctr"/>
           <a:lstStyle/>
           <a:p>
             <a:pPr algn="ctr"/>
+            <a:endParaRPr/>
           </a:p>
         </p:txBody>
       </p:sp>
@@ -22327,10 +22800,11 @@
           </a:fontRef>
         </p:style>
         <p:txBody>
-          <a:bodyPr rtlCol="0" anchor="ctr" wrap="square"/>
+          <a:bodyPr wrap="square" rtlCol="0" anchor="ctr"/>
           <a:lstStyle/>
           <a:p>
             <a:pPr algn="ctr"/>
+            <a:endParaRPr/>
           </a:p>
         </p:txBody>
       </p:sp>
@@ -22450,7 +22924,7 @@
           </a:fontRef>
         </p:style>
         <p:txBody>
-          <a:bodyPr rtlCol="0" anchor="ctr" wrap="square" lIns="76200" tIns="12700"/>
+          <a:bodyPr wrap="square" lIns="76200" tIns="12700" rtlCol="0" anchor="ctr"/>
           <a:lstStyle/>
           <a:p>
             <a:pPr algn="l">
@@ -22511,7 +22985,7 @@
           </a:fontRef>
         </p:style>
         <p:txBody>
-          <a:bodyPr rtlCol="0" anchor="ctr" wrap="square" lIns="76200" tIns="12700"/>
+          <a:bodyPr wrap="square" lIns="76200" tIns="12700" rtlCol="0" anchor="ctr"/>
           <a:lstStyle/>
           <a:p>
             <a:pPr algn="l">
@@ -22572,7 +23046,7 @@
           </a:fontRef>
         </p:style>
         <p:txBody>
-          <a:bodyPr rtlCol="0" anchor="ctr" wrap="square" lIns="76200" tIns="12700"/>
+          <a:bodyPr wrap="square" lIns="76200" tIns="12700" rtlCol="0" anchor="ctr"/>
           <a:lstStyle/>
           <a:p>
             <a:pPr algn="l">
@@ -22678,10 +23152,11 @@
           </a:fontRef>
         </p:style>
         <p:txBody>
-          <a:bodyPr rtlCol="0" anchor="ctr" wrap="square"/>
+          <a:bodyPr wrap="square" rtlCol="0" anchor="ctr"/>
           <a:lstStyle/>
           <a:p>
             <a:pPr algn="ctr"/>
+            <a:endParaRPr/>
           </a:p>
         </p:txBody>
       </p:sp>
@@ -22722,10 +23197,11 @@
           </a:fontRef>
         </p:style>
         <p:txBody>
-          <a:bodyPr rtlCol="0" anchor="ctr" wrap="square"/>
+          <a:bodyPr wrap="square" rtlCol="0" anchor="ctr"/>
           <a:lstStyle/>
           <a:p>
             <a:pPr algn="ctr"/>
+            <a:endParaRPr/>
           </a:p>
         </p:txBody>
       </p:sp>
@@ -22766,10 +23242,11 @@
           </a:fontRef>
         </p:style>
         <p:txBody>
-          <a:bodyPr rtlCol="0" anchor="ctr" wrap="square"/>
+          <a:bodyPr wrap="square" rtlCol="0" anchor="ctr"/>
           <a:lstStyle/>
           <a:p>
             <a:pPr algn="ctr"/>
+            <a:endParaRPr/>
           </a:p>
         </p:txBody>
       </p:sp>
@@ -23095,7 +23572,7 @@
           </a:fontRef>
         </p:style>
         <p:txBody>
-          <a:bodyPr rtlCol="0" anchor="ctr" wrap="square" lIns="25400" rIns="25400" tIns="12700" bIns="12700"/>
+          <a:bodyPr wrap="square" lIns="25400" tIns="12700" rIns="25400" bIns="12700" rtlCol="0" anchor="ctr"/>
           <a:lstStyle/>
           <a:p>
             <a:pPr algn="ctr">
@@ -23156,7 +23633,7 @@
           </a:fontRef>
         </p:style>
         <p:txBody>
-          <a:bodyPr rtlCol="0" anchor="ctr" wrap="square" lIns="25400" rIns="25400" tIns="12700" bIns="12700"/>
+          <a:bodyPr wrap="square" lIns="25400" tIns="12700" rIns="25400" bIns="12700" rtlCol="0" anchor="ctr"/>
           <a:lstStyle/>
           <a:p>
             <a:pPr algn="ctr">
@@ -23217,7 +23694,7 @@
           </a:fontRef>
         </p:style>
         <p:txBody>
-          <a:bodyPr rtlCol="0" anchor="ctr" wrap="square" lIns="25400" rIns="25400" tIns="12700" bIns="12700"/>
+          <a:bodyPr wrap="square" lIns="25400" tIns="12700" rIns="25400" bIns="12700" rtlCol="0" anchor="ctr"/>
           <a:lstStyle/>
           <a:p>
             <a:pPr algn="ctr">
@@ -23278,7 +23755,7 @@
           </a:fontRef>
         </p:style>
         <p:txBody>
-          <a:bodyPr rtlCol="0" anchor="ctr" wrap="square" lIns="25400" rIns="25400" tIns="12700" bIns="12700"/>
+          <a:bodyPr wrap="square" lIns="25400" tIns="12700" rIns="25400" bIns="12700" rtlCol="0" anchor="ctr"/>
           <a:lstStyle/>
           <a:p>
             <a:pPr algn="ctr">
@@ -23339,7 +23816,7 @@
           </a:fontRef>
         </p:style>
         <p:txBody>
-          <a:bodyPr rtlCol="0" anchor="ctr" wrap="square" lIns="25400" rIns="25400" tIns="12700" bIns="12700"/>
+          <a:bodyPr wrap="square" lIns="25400" tIns="12700" rIns="25400" bIns="12700" rtlCol="0" anchor="ctr"/>
           <a:lstStyle/>
           <a:p>
             <a:pPr algn="ctr">
@@ -23400,7 +23877,7 @@
           </a:fontRef>
         </p:style>
         <p:txBody>
-          <a:bodyPr rtlCol="0" anchor="ctr" wrap="square" lIns="25400" rIns="25400" tIns="12700" bIns="12700"/>
+          <a:bodyPr wrap="square" lIns="25400" tIns="12700" rIns="25400" bIns="12700" rtlCol="0" anchor="ctr"/>
           <a:lstStyle/>
           <a:p>
             <a:pPr algn="ctr">
@@ -23476,7 +23953,7 @@
 </file>
 
 <file path=ppt/slides/slide5.xml><?xml version="1.0" encoding="utf-8"?>
-<p:sld xmlns:a="http://schemas.openxmlformats.org/drawingml/2006/main" xmlns:p="http://schemas.openxmlformats.org/presentationml/2006/main" xmlns:r="http://schemas.openxmlformats.org/officeDocument/2006/relationships">
+<p:sld xmlns:a="http://schemas.openxmlformats.org/drawingml/2006/main" xmlns:r="http://schemas.openxmlformats.org/officeDocument/2006/relationships" xmlns:p="http://schemas.openxmlformats.org/presentationml/2006/main">
   <p:cSld>
     <p:spTree>
       <p:nvGrpSpPr>
@@ -23484,7 +23961,14 @@
         <p:cNvGrpSpPr/>
         <p:nvPr/>
       </p:nvGrpSpPr>
-      <p:grpSpPr/>
+      <p:grpSpPr>
+        <a:xfrm>
+          <a:off x="0" y="0"/>
+          <a:ext cx="0" cy="0"/>
+          <a:chOff x="0" y="0"/>
+          <a:chExt cx="0" cy="0"/>
+        </a:xfrm>
+      </p:grpSpPr>
       <p:sp>
         <p:nvSpPr>
           <p:cNvPr id="2" name="Rectangle 1"/>
@@ -23522,10 +24006,11 @@
           </a:fontRef>
         </p:style>
         <p:txBody>
-          <a:bodyPr rtlCol="0" anchor="ctr" wrap="square"/>
+          <a:bodyPr wrap="square" rtlCol="0" anchor="ctr"/>
           <a:lstStyle/>
           <a:p>
             <a:pPr algn="ctr"/>
+            <a:endParaRPr/>
           </a:p>
         </p:txBody>
       </p:sp>
@@ -23849,10 +24334,11 @@
           </a:fontRef>
         </p:style>
         <p:txBody>
-          <a:bodyPr rtlCol="0" anchor="ctr" wrap="square"/>
+          <a:bodyPr wrap="square" rtlCol="0" anchor="ctr"/>
           <a:lstStyle/>
           <a:p>
             <a:pPr algn="ctr"/>
+            <a:endParaRPr/>
           </a:p>
         </p:txBody>
       </p:sp>
@@ -23895,10 +24381,11 @@
           </a:fontRef>
         </p:style>
         <p:txBody>
-          <a:bodyPr rtlCol="0" anchor="ctr" wrap="square"/>
+          <a:bodyPr wrap="square" rtlCol="0" anchor="ctr"/>
           <a:lstStyle/>
           <a:p>
             <a:pPr algn="ctr"/>
+            <a:endParaRPr/>
           </a:p>
         </p:txBody>
       </p:sp>
@@ -23941,7 +24428,7 @@
           </a:fontRef>
         </p:style>
         <p:txBody>
-          <a:bodyPr rtlCol="0" anchor="ctr" wrap="square" tIns="76200"/>
+          <a:bodyPr wrap="square" tIns="76200" rtlCol="0" anchor="ctr"/>
           <a:lstStyle/>
           <a:p>
             <a:pPr algn="ctr">
@@ -24103,7 +24590,7 @@
           </a:fontRef>
         </p:style>
         <p:txBody>
-          <a:bodyPr rtlCol="0" anchor="ctr" wrap="square" tIns="101600"/>
+          <a:bodyPr wrap="square" tIns="101600" rtlCol="0" anchor="ctr"/>
           <a:lstStyle/>
           <a:p>
             <a:pPr algn="ctr">
@@ -24290,7 +24777,7 @@
           </a:fontRef>
         </p:style>
         <p:txBody>
-          <a:bodyPr rtlCol="0" anchor="ctr" wrap="square" tIns="50800"/>
+          <a:bodyPr wrap="square" tIns="50800" rtlCol="0" anchor="ctr"/>
           <a:lstStyle/>
           <a:p>
             <a:pPr algn="ctr">
@@ -24432,10 +24919,11 @@
           </a:fontRef>
         </p:style>
         <p:txBody>
-          <a:bodyPr rtlCol="0" anchor="ctr" wrap="square"/>
+          <a:bodyPr wrap="square" rtlCol="0" anchor="ctr"/>
           <a:lstStyle/>
           <a:p>
             <a:pPr algn="ctr"/>
+            <a:endParaRPr/>
           </a:p>
         </p:txBody>
       </p:sp>
@@ -24521,7 +25009,7 @@
           </a:fontRef>
         </p:style>
         <p:txBody>
-          <a:bodyPr rtlCol="0" anchor="ctr" wrap="square"/>
+          <a:bodyPr wrap="square" rtlCol="0" anchor="ctr"/>
           <a:lstStyle/>
           <a:p>
             <a:pPr algn="ctr">
@@ -24584,7 +25072,7 @@
           </a:fontRef>
         </p:style>
         <p:txBody>
-          <a:bodyPr rtlCol="0" anchor="ctr" wrap="square"/>
+          <a:bodyPr wrap="square" rtlCol="0" anchor="ctr"/>
           <a:lstStyle/>
           <a:p>
             <a:pPr algn="ctr">
@@ -24647,7 +25135,7 @@
           </a:fontRef>
         </p:style>
         <p:txBody>
-          <a:bodyPr rtlCol="0" anchor="ctr" wrap="square"/>
+          <a:bodyPr wrap="square" rtlCol="0" anchor="ctr"/>
           <a:lstStyle/>
           <a:p>
             <a:pPr algn="ctr">
@@ -24710,7 +25198,7 @@
           </a:fontRef>
         </p:style>
         <p:txBody>
-          <a:bodyPr rtlCol="0" anchor="ctr" wrap="square"/>
+          <a:bodyPr wrap="square" rtlCol="0" anchor="ctr"/>
           <a:lstStyle/>
           <a:p>
             <a:pPr algn="ctr">
@@ -24897,7 +25385,7 @@
           </a:fontRef>
         </p:style>
         <p:txBody>
-          <a:bodyPr rtlCol="0" anchor="ctr" wrap="square" lIns="25400" rIns="25400" tIns="12700" bIns="12700"/>
+          <a:bodyPr wrap="square" lIns="25400" tIns="12700" rIns="25400" bIns="12700" rtlCol="0" anchor="ctr"/>
           <a:lstStyle/>
           <a:p>
             <a:pPr algn="ctr">
@@ -24958,7 +25446,7 @@
           </a:fontRef>
         </p:style>
         <p:txBody>
-          <a:bodyPr rtlCol="0" anchor="ctr" wrap="square" lIns="25400" rIns="25400" tIns="12700" bIns="12700"/>
+          <a:bodyPr wrap="square" lIns="25400" tIns="12700" rIns="25400" bIns="12700" rtlCol="0" anchor="ctr"/>
           <a:lstStyle/>
           <a:p>
             <a:pPr algn="ctr">
@@ -25019,7 +25507,7 @@
           </a:fontRef>
         </p:style>
         <p:txBody>
-          <a:bodyPr rtlCol="0" anchor="ctr" wrap="square" lIns="25400" rIns="25400" tIns="12700" bIns="12700"/>
+          <a:bodyPr wrap="square" lIns="25400" tIns="12700" rIns="25400" bIns="12700" rtlCol="0" anchor="ctr"/>
           <a:lstStyle/>
           <a:p>
             <a:pPr algn="ctr">
@@ -25080,7 +25568,7 @@
           </a:fontRef>
         </p:style>
         <p:txBody>
-          <a:bodyPr rtlCol="0" anchor="ctr" wrap="square" lIns="25400" rIns="25400" tIns="12700" bIns="12700"/>
+          <a:bodyPr wrap="square" lIns="25400" tIns="12700" rIns="25400" bIns="12700" rtlCol="0" anchor="ctr"/>
           <a:lstStyle/>
           <a:p>
             <a:pPr algn="ctr">
@@ -25141,7 +25629,7 @@
           </a:fontRef>
         </p:style>
         <p:txBody>
-          <a:bodyPr rtlCol="0" anchor="ctr" wrap="square" lIns="25400" rIns="25400" tIns="12700" bIns="12700"/>
+          <a:bodyPr wrap="square" lIns="25400" tIns="12700" rIns="25400" bIns="12700" rtlCol="0" anchor="ctr"/>
           <a:lstStyle/>
           <a:p>
             <a:pPr algn="ctr">
@@ -25202,7 +25690,7 @@
           </a:fontRef>
         </p:style>
         <p:txBody>
-          <a:bodyPr rtlCol="0" anchor="ctr" wrap="square" lIns="25400" rIns="25400" tIns="12700" bIns="12700"/>
+          <a:bodyPr wrap="square" lIns="25400" tIns="12700" rIns="25400" bIns="12700" rtlCol="0" anchor="ctr"/>
           <a:lstStyle/>
           <a:p>
             <a:pPr algn="ctr">
@@ -25278,7 +25766,7 @@
 </file>
 
 <file path=ppt/slides/slide6.xml><?xml version="1.0" encoding="utf-8"?>
-<p:sld xmlns:a="http://schemas.openxmlformats.org/drawingml/2006/main" xmlns:p="http://schemas.openxmlformats.org/presentationml/2006/main" xmlns:r="http://schemas.openxmlformats.org/officeDocument/2006/relationships">
+<p:sld xmlns:a="http://schemas.openxmlformats.org/drawingml/2006/main" xmlns:r="http://schemas.openxmlformats.org/officeDocument/2006/relationships" xmlns:p="http://schemas.openxmlformats.org/presentationml/2006/main">
   <p:cSld>
     <p:spTree>
       <p:nvGrpSpPr>
@@ -25286,7 +25774,14 @@
         <p:cNvGrpSpPr/>
         <p:nvPr/>
       </p:nvGrpSpPr>
-      <p:grpSpPr/>
+      <p:grpSpPr>
+        <a:xfrm>
+          <a:off x="0" y="0"/>
+          <a:ext cx="0" cy="0"/>
+          <a:chOff x="0" y="0"/>
+          <a:chExt cx="0" cy="0"/>
+        </a:xfrm>
+      </p:grpSpPr>
       <p:sp>
         <p:nvSpPr>
           <p:cNvPr id="2" name="Rectangle 1"/>
@@ -25324,10 +25819,11 @@
           </a:fontRef>
         </p:style>
         <p:txBody>
-          <a:bodyPr rtlCol="0" anchor="ctr" wrap="square"/>
+          <a:bodyPr wrap="square" rtlCol="0" anchor="ctr"/>
           <a:lstStyle/>
           <a:p>
             <a:pPr algn="ctr"/>
+            <a:endParaRPr/>
           </a:p>
         </p:txBody>
       </p:sp>
@@ -25578,10 +26074,11 @@
           </a:fontRef>
         </p:style>
         <p:txBody>
-          <a:bodyPr rtlCol="0" anchor="ctr" wrap="square"/>
+          <a:bodyPr wrap="square" rtlCol="0" anchor="ctr"/>
           <a:lstStyle/>
           <a:p>
             <a:pPr algn="ctr"/>
+            <a:endParaRPr/>
           </a:p>
         </p:txBody>
       </p:sp>
@@ -25622,10 +26119,11 @@
           </a:fontRef>
         </p:style>
         <p:txBody>
-          <a:bodyPr rtlCol="0" anchor="ctr" wrap="square"/>
+          <a:bodyPr wrap="square" rtlCol="0" anchor="ctr"/>
           <a:lstStyle/>
           <a:p>
             <a:pPr algn="ctr"/>
+            <a:endParaRPr/>
           </a:p>
         </p:txBody>
       </p:sp>
@@ -25666,10 +26164,11 @@
           </a:fontRef>
         </p:style>
         <p:txBody>
-          <a:bodyPr rtlCol="0" anchor="ctr" wrap="square"/>
+          <a:bodyPr wrap="square" rtlCol="0" anchor="ctr"/>
           <a:lstStyle/>
           <a:p>
             <a:pPr algn="ctr"/>
+            <a:endParaRPr/>
           </a:p>
         </p:txBody>
       </p:sp>
@@ -25710,10 +26209,11 @@
           </a:fontRef>
         </p:style>
         <p:txBody>
-          <a:bodyPr rtlCol="0" anchor="ctr" wrap="square"/>
+          <a:bodyPr wrap="square" rtlCol="0" anchor="ctr"/>
           <a:lstStyle/>
           <a:p>
             <a:pPr algn="ctr"/>
+            <a:endParaRPr/>
           </a:p>
         </p:txBody>
       </p:sp>
@@ -25754,10 +26254,11 @@
           </a:fontRef>
         </p:style>
         <p:txBody>
-          <a:bodyPr rtlCol="0" anchor="ctr" wrap="square"/>
+          <a:bodyPr wrap="square" rtlCol="0" anchor="ctr"/>
           <a:lstStyle/>
           <a:p>
             <a:pPr algn="ctr"/>
+            <a:endParaRPr/>
           </a:p>
         </p:txBody>
       </p:sp>
@@ -25917,7 +26418,7 @@
           </a:fontRef>
         </p:style>
         <p:txBody>
-          <a:bodyPr rtlCol="0" anchor="ctr" wrap="square"/>
+          <a:bodyPr wrap="square" rtlCol="0" anchor="ctr"/>
           <a:lstStyle/>
           <a:p>
             <a:pPr algn="ctr">
@@ -25980,7 +26481,7 @@
           </a:fontRef>
         </p:style>
         <p:txBody>
-          <a:bodyPr rtlCol="0" anchor="ctr" wrap="square"/>
+          <a:bodyPr wrap="square" rtlCol="0" anchor="ctr"/>
           <a:lstStyle/>
           <a:p>
             <a:pPr algn="ctr">
@@ -26043,7 +26544,7 @@
           </a:fontRef>
         </p:style>
         <p:txBody>
-          <a:bodyPr rtlCol="0" anchor="ctr" wrap="square"/>
+          <a:bodyPr wrap="square" rtlCol="0" anchor="ctr"/>
           <a:lstStyle/>
           <a:p>
             <a:pPr algn="ctr">
@@ -26106,7 +26607,7 @@
           </a:fontRef>
         </p:style>
         <p:txBody>
-          <a:bodyPr rtlCol="0" anchor="ctr" wrap="square"/>
+          <a:bodyPr wrap="square" rtlCol="0" anchor="ctr"/>
           <a:lstStyle/>
           <a:p>
             <a:pPr algn="ctr">
@@ -26364,10 +26865,11 @@
           </a:fontRef>
         </p:style>
         <p:txBody>
-          <a:bodyPr rtlCol="0" anchor="ctr" wrap="square"/>
+          <a:bodyPr wrap="square" rtlCol="0" anchor="ctr"/>
           <a:lstStyle/>
           <a:p>
             <a:pPr algn="ctr"/>
+            <a:endParaRPr/>
           </a:p>
         </p:txBody>
       </p:sp>
@@ -26408,10 +26910,11 @@
           </a:fontRef>
         </p:style>
         <p:txBody>
-          <a:bodyPr rtlCol="0" anchor="ctr" wrap="square"/>
+          <a:bodyPr wrap="square" rtlCol="0" anchor="ctr"/>
           <a:lstStyle/>
           <a:p>
             <a:pPr algn="ctr"/>
+            <a:endParaRPr/>
           </a:p>
         </p:txBody>
       </p:sp>
@@ -26452,10 +26955,11 @@
           </a:fontRef>
         </p:style>
         <p:txBody>
-          <a:bodyPr rtlCol="0" anchor="ctr" wrap="square"/>
+          <a:bodyPr wrap="square" rtlCol="0" anchor="ctr"/>
           <a:lstStyle/>
           <a:p>
             <a:pPr algn="ctr"/>
+            <a:endParaRPr/>
           </a:p>
         </p:txBody>
       </p:sp>
@@ -26496,10 +27000,11 @@
           </a:fontRef>
         </p:style>
         <p:txBody>
-          <a:bodyPr rtlCol="0" anchor="ctr" wrap="square"/>
+          <a:bodyPr wrap="square" rtlCol="0" anchor="ctr"/>
           <a:lstStyle/>
           <a:p>
             <a:pPr algn="ctr"/>
+            <a:endParaRPr/>
           </a:p>
         </p:txBody>
       </p:sp>
@@ -26540,10 +27045,11 @@
           </a:fontRef>
         </p:style>
         <p:txBody>
-          <a:bodyPr rtlCol="0" anchor="ctr" wrap="square"/>
+          <a:bodyPr wrap="square" rtlCol="0" anchor="ctr"/>
           <a:lstStyle/>
           <a:p>
             <a:pPr algn="ctr"/>
+            <a:endParaRPr/>
           </a:p>
         </p:txBody>
       </p:sp>
@@ -26627,10 +27133,11 @@
           </a:fontRef>
         </p:style>
         <p:txBody>
-          <a:bodyPr rtlCol="0" anchor="ctr" wrap="square"/>
+          <a:bodyPr wrap="square" rtlCol="0" anchor="ctr"/>
           <a:lstStyle/>
           <a:p>
             <a:pPr algn="ctr"/>
+            <a:endParaRPr/>
           </a:p>
         </p:txBody>
       </p:sp>
@@ -26673,7 +27180,7 @@
           </a:fontRef>
         </p:style>
         <p:txBody>
-          <a:bodyPr rtlCol="0" anchor="ctr" wrap="square" lIns="203200" tIns="101600"/>
+          <a:bodyPr wrap="square" lIns="203200" tIns="101600" rtlCol="0" anchor="ctr"/>
           <a:lstStyle/>
           <a:p>
             <a:pPr algn="l">
@@ -26803,7 +27310,7 @@
           </a:fontRef>
         </p:style>
         <p:txBody>
-          <a:bodyPr rtlCol="0" anchor="ctr" wrap="square" lIns="25400" rIns="25400" tIns="12700" bIns="12700"/>
+          <a:bodyPr wrap="square" lIns="25400" tIns="12700" rIns="25400" bIns="12700" rtlCol="0" anchor="ctr"/>
           <a:lstStyle/>
           <a:p>
             <a:pPr algn="ctr">
@@ -26864,7 +27371,7 @@
           </a:fontRef>
         </p:style>
         <p:txBody>
-          <a:bodyPr rtlCol="0" anchor="ctr" wrap="square" lIns="25400" rIns="25400" tIns="12700" bIns="12700"/>
+          <a:bodyPr wrap="square" lIns="25400" tIns="12700" rIns="25400" bIns="12700" rtlCol="0" anchor="ctr"/>
           <a:lstStyle/>
           <a:p>
             <a:pPr algn="ctr">
@@ -26925,7 +27432,7 @@
           </a:fontRef>
         </p:style>
         <p:txBody>
-          <a:bodyPr rtlCol="0" anchor="ctr" wrap="square" lIns="25400" rIns="25400" tIns="12700" bIns="12700"/>
+          <a:bodyPr wrap="square" lIns="25400" tIns="12700" rIns="25400" bIns="12700" rtlCol="0" anchor="ctr"/>
           <a:lstStyle/>
           <a:p>
             <a:pPr algn="ctr">
@@ -26986,7 +27493,7 @@
           </a:fontRef>
         </p:style>
         <p:txBody>
-          <a:bodyPr rtlCol="0" anchor="ctr" wrap="square" lIns="25400" rIns="25400" tIns="12700" bIns="12700"/>
+          <a:bodyPr wrap="square" lIns="25400" tIns="12700" rIns="25400" bIns="12700" rtlCol="0" anchor="ctr"/>
           <a:lstStyle/>
           <a:p>
             <a:pPr algn="ctr">
@@ -27047,7 +27554,7 @@
           </a:fontRef>
         </p:style>
         <p:txBody>
-          <a:bodyPr rtlCol="0" anchor="ctr" wrap="square" lIns="25400" rIns="25400" tIns="12700" bIns="12700"/>
+          <a:bodyPr wrap="square" lIns="25400" tIns="12700" rIns="25400" bIns="12700" rtlCol="0" anchor="ctr"/>
           <a:lstStyle/>
           <a:p>
             <a:pPr algn="ctr">
@@ -27108,7 +27615,7 @@
           </a:fontRef>
         </p:style>
         <p:txBody>
-          <a:bodyPr rtlCol="0" anchor="ctr" wrap="square" lIns="25400" rIns="25400" tIns="12700" bIns="12700"/>
+          <a:bodyPr wrap="square" lIns="25400" tIns="12700" rIns="25400" bIns="12700" rtlCol="0" anchor="ctr"/>
           <a:lstStyle/>
           <a:p>
             <a:pPr algn="ctr">
@@ -27184,7 +27691,7 @@
 </file>
 
 <file path=ppt/slides/slide7.xml><?xml version="1.0" encoding="utf-8"?>
-<p:sld xmlns:a="http://schemas.openxmlformats.org/drawingml/2006/main" xmlns:p="http://schemas.openxmlformats.org/presentationml/2006/main" xmlns:r="http://schemas.openxmlformats.org/officeDocument/2006/relationships">
+<p:sld xmlns:a="http://schemas.openxmlformats.org/drawingml/2006/main" xmlns:r="http://schemas.openxmlformats.org/officeDocument/2006/relationships" xmlns:p="http://schemas.openxmlformats.org/presentationml/2006/main">
   <p:cSld>
     <p:spTree>
       <p:nvGrpSpPr>
@@ -27192,7 +27699,14 @@
         <p:cNvGrpSpPr/>
         <p:nvPr/>
       </p:nvGrpSpPr>
-      <p:grpSpPr/>
+      <p:grpSpPr>
+        <a:xfrm>
+          <a:off x="0" y="0"/>
+          <a:ext cx="0" cy="0"/>
+          <a:chOff x="0" y="0"/>
+          <a:chExt cx="0" cy="0"/>
+        </a:xfrm>
+      </p:grpSpPr>
       <p:sp>
         <p:nvSpPr>
           <p:cNvPr id="2" name="Rectangle 1"/>
@@ -27230,10 +27744,11 @@
           </a:fontRef>
         </p:style>
         <p:txBody>
-          <a:bodyPr rtlCol="0" anchor="ctr" wrap="square"/>
+          <a:bodyPr wrap="square" rtlCol="0" anchor="ctr"/>
           <a:lstStyle/>
           <a:p>
             <a:pPr algn="ctr"/>
+            <a:endParaRPr/>
           </a:p>
         </p:txBody>
       </p:sp>
@@ -27362,7 +27877,7 @@
           </a:fontRef>
         </p:style>
         <p:txBody>
-          <a:bodyPr rtlCol="0" anchor="t" wrap="square" lIns="177800" rIns="177800" tIns="127000" bIns="101600"/>
+          <a:bodyPr wrap="square" lIns="177800" tIns="127000" rIns="177800" bIns="101600" rtlCol="0" anchor="t"/>
           <a:lstStyle/>
           <a:p>
             <a:pPr algn="l">
@@ -27485,7 +28000,7 @@
           </a:fontRef>
         </p:style>
         <p:txBody>
-          <a:bodyPr rtlCol="0" anchor="t" wrap="square" lIns="177800" rIns="177800" tIns="127000" bIns="101600"/>
+          <a:bodyPr wrap="square" lIns="177800" tIns="127000" rIns="177800" bIns="101600" rtlCol="0" anchor="t"/>
           <a:lstStyle/>
           <a:p>
             <a:pPr algn="l">
@@ -27608,7 +28123,7 @@
           </a:fontRef>
         </p:style>
         <p:txBody>
-          <a:bodyPr rtlCol="0" anchor="t" wrap="square" lIns="177800" rIns="177800" tIns="127000" bIns="101600"/>
+          <a:bodyPr wrap="square" lIns="177800" tIns="127000" rIns="177800" bIns="101600" rtlCol="0" anchor="t"/>
           <a:lstStyle/>
           <a:p>
             <a:pPr algn="l">
@@ -27910,7 +28425,7 @@
           </a:fontRef>
         </p:style>
         <p:txBody>
-          <a:bodyPr rtlCol="0" anchor="ctr" wrap="square" lIns="25400" rIns="25400" tIns="12700" bIns="12700"/>
+          <a:bodyPr wrap="square" lIns="25400" tIns="12700" rIns="25400" bIns="12700" rtlCol="0" anchor="ctr"/>
           <a:lstStyle/>
           <a:p>
             <a:pPr algn="ctr">
@@ -27971,7 +28486,7 @@
           </a:fontRef>
         </p:style>
         <p:txBody>
-          <a:bodyPr rtlCol="0" anchor="ctr" wrap="square" lIns="25400" rIns="25400" tIns="12700" bIns="12700"/>
+          <a:bodyPr wrap="square" lIns="25400" tIns="12700" rIns="25400" bIns="12700" rtlCol="0" anchor="ctr"/>
           <a:lstStyle/>
           <a:p>
             <a:pPr algn="ctr">
@@ -28032,7 +28547,7 @@
           </a:fontRef>
         </p:style>
         <p:txBody>
-          <a:bodyPr rtlCol="0" anchor="ctr" wrap="square" lIns="25400" rIns="25400" tIns="12700" bIns="12700"/>
+          <a:bodyPr wrap="square" lIns="25400" tIns="12700" rIns="25400" bIns="12700" rtlCol="0" anchor="ctr"/>
           <a:lstStyle/>
           <a:p>
             <a:pPr algn="ctr">
@@ -28093,7 +28608,7 @@
           </a:fontRef>
         </p:style>
         <p:txBody>
-          <a:bodyPr rtlCol="0" anchor="ctr" wrap="square" lIns="25400" rIns="25400" tIns="12700" bIns="12700"/>
+          <a:bodyPr wrap="square" lIns="25400" tIns="12700" rIns="25400" bIns="12700" rtlCol="0" anchor="ctr"/>
           <a:lstStyle/>
           <a:p>
             <a:pPr algn="ctr">
@@ -28154,7 +28669,7 @@
           </a:fontRef>
         </p:style>
         <p:txBody>
-          <a:bodyPr rtlCol="0" anchor="ctr" wrap="square" lIns="25400" rIns="25400" tIns="12700" bIns="12700"/>
+          <a:bodyPr wrap="square" lIns="25400" tIns="12700" rIns="25400" bIns="12700" rtlCol="0" anchor="ctr"/>
           <a:lstStyle/>
           <a:p>
             <a:pPr algn="ctr">
@@ -28215,7 +28730,7 @@
           </a:fontRef>
         </p:style>
         <p:txBody>
-          <a:bodyPr rtlCol="0" anchor="ctr" wrap="square" lIns="25400" rIns="25400" tIns="12700" bIns="12700"/>
+          <a:bodyPr wrap="square" lIns="25400" tIns="12700" rIns="25400" bIns="12700" rtlCol="0" anchor="ctr"/>
           <a:lstStyle/>
           <a:p>
             <a:pPr algn="ctr">
@@ -28291,7 +28806,7 @@
 </file>
 
 <file path=ppt/slides/slide8.xml><?xml version="1.0" encoding="utf-8"?>
-<p:sld xmlns:a="http://schemas.openxmlformats.org/drawingml/2006/main" xmlns:p="http://schemas.openxmlformats.org/presentationml/2006/main" xmlns:r="http://schemas.openxmlformats.org/officeDocument/2006/relationships">
+<p:sld xmlns:a="http://schemas.openxmlformats.org/drawingml/2006/main" xmlns:r="http://schemas.openxmlformats.org/officeDocument/2006/relationships" xmlns:p="http://schemas.openxmlformats.org/presentationml/2006/main">
   <p:cSld>
     <p:spTree>
       <p:nvGrpSpPr>
@@ -28299,7 +28814,14 @@
         <p:cNvGrpSpPr/>
         <p:nvPr/>
       </p:nvGrpSpPr>
-      <p:grpSpPr/>
+      <p:grpSpPr>
+        <a:xfrm>
+          <a:off x="0" y="0"/>
+          <a:ext cx="0" cy="0"/>
+          <a:chOff x="0" y="0"/>
+          <a:chExt cx="0" cy="0"/>
+        </a:xfrm>
+      </p:grpSpPr>
       <p:sp>
         <p:nvSpPr>
           <p:cNvPr id="2" name="Rectangle 1"/>
@@ -28337,10 +28859,11 @@
           </a:fontRef>
         </p:style>
         <p:txBody>
-          <a:bodyPr rtlCol="0" anchor="ctr" wrap="square"/>
+          <a:bodyPr wrap="square" rtlCol="0" anchor="ctr"/>
           <a:lstStyle/>
           <a:p>
             <a:pPr algn="ctr"/>
+            <a:endParaRPr/>
           </a:p>
         </p:txBody>
       </p:sp>
@@ -28469,7 +28992,7 @@
           </a:fontRef>
         </p:style>
         <p:txBody>
-          <a:bodyPr rtlCol="0" anchor="t" wrap="square" lIns="177800" rIns="177800" tIns="127000" bIns="101600"/>
+          <a:bodyPr wrap="square" lIns="177800" tIns="127000" rIns="177800" bIns="101600" rtlCol="0" anchor="t"/>
           <a:lstStyle/>
           <a:p>
             <a:pPr algn="l">
@@ -28595,7 +29118,7 @@
           </a:fontRef>
         </p:style>
         <p:txBody>
-          <a:bodyPr rtlCol="0" anchor="t" wrap="square" lIns="177800" rIns="177800" tIns="127000" bIns="101600"/>
+          <a:bodyPr wrap="square" lIns="177800" tIns="127000" rIns="177800" bIns="101600" rtlCol="0" anchor="t"/>
           <a:lstStyle/>
           <a:p>
             <a:pPr algn="l">
@@ -28787,7 +29310,7 @@
           </a:fontRef>
         </p:style>
         <p:txBody>
-          <a:bodyPr rtlCol="0" anchor="t" wrap="square" lIns="177800" rIns="177800" tIns="127000" bIns="101600"/>
+          <a:bodyPr wrap="square" lIns="177800" tIns="127000" rIns="177800" bIns="101600" rtlCol="0" anchor="t"/>
           <a:lstStyle/>
           <a:p>
             <a:pPr algn="l">
@@ -28917,10 +29440,11 @@
           </a:fontRef>
         </p:style>
         <p:txBody>
-          <a:bodyPr rtlCol="0" anchor="ctr" wrap="square"/>
+          <a:bodyPr wrap="square" rtlCol="0" anchor="ctr"/>
           <a:lstStyle/>
           <a:p>
             <a:pPr algn="ctr"/>
+            <a:endParaRPr/>
           </a:p>
         </p:txBody>
       </p:sp>
@@ -28963,10 +29487,11 @@
           </a:fontRef>
         </p:style>
         <p:txBody>
-          <a:bodyPr rtlCol="0" anchor="ctr" wrap="square"/>
+          <a:bodyPr wrap="square" rtlCol="0" anchor="ctr"/>
           <a:lstStyle/>
           <a:p>
             <a:pPr algn="ctr"/>
+            <a:endParaRPr/>
           </a:p>
         </p:txBody>
       </p:sp>
@@ -29009,10 +29534,11 @@
           </a:fontRef>
         </p:style>
         <p:txBody>
-          <a:bodyPr rtlCol="0" anchor="ctr" wrap="square"/>
+          <a:bodyPr wrap="square" rtlCol="0" anchor="ctr"/>
           <a:lstStyle/>
           <a:p>
             <a:pPr algn="ctr"/>
+            <a:endParaRPr/>
           </a:p>
         </p:txBody>
       </p:sp>
@@ -29053,10 +29579,11 @@
           </a:fontRef>
         </p:style>
         <p:txBody>
-          <a:bodyPr rtlCol="0" anchor="ctr" wrap="square"/>
+          <a:bodyPr wrap="square" rtlCol="0" anchor="ctr"/>
           <a:lstStyle/>
           <a:p>
             <a:pPr algn="ctr"/>
+            <a:endParaRPr/>
           </a:p>
         </p:txBody>
       </p:sp>
@@ -29305,7 +29832,7 @@
           </a:fontRef>
         </p:style>
         <p:txBody>
-          <a:bodyPr rtlCol="0" anchor="ctr" wrap="square" lIns="25400" rIns="25400" tIns="12700" bIns="12700"/>
+          <a:bodyPr wrap="square" lIns="25400" tIns="12700" rIns="25400" bIns="12700" rtlCol="0" anchor="ctr"/>
           <a:lstStyle/>
           <a:p>
             <a:pPr algn="ctr">
@@ -29366,7 +29893,7 @@
           </a:fontRef>
         </p:style>
         <p:txBody>
-          <a:bodyPr rtlCol="0" anchor="ctr" wrap="square" lIns="25400" rIns="25400" tIns="12700" bIns="12700"/>
+          <a:bodyPr wrap="square" lIns="25400" tIns="12700" rIns="25400" bIns="12700" rtlCol="0" anchor="ctr"/>
           <a:lstStyle/>
           <a:p>
             <a:pPr algn="ctr">
@@ -29427,7 +29954,7 @@
           </a:fontRef>
         </p:style>
         <p:txBody>
-          <a:bodyPr rtlCol="0" anchor="ctr" wrap="square" lIns="25400" rIns="25400" tIns="12700" bIns="12700"/>
+          <a:bodyPr wrap="square" lIns="25400" tIns="12700" rIns="25400" bIns="12700" rtlCol="0" anchor="ctr"/>
           <a:lstStyle/>
           <a:p>
             <a:pPr algn="ctr">
@@ -29488,7 +30015,7 @@
           </a:fontRef>
         </p:style>
         <p:txBody>
-          <a:bodyPr rtlCol="0" anchor="ctr" wrap="square" lIns="25400" rIns="25400" tIns="12700" bIns="12700"/>
+          <a:bodyPr wrap="square" lIns="25400" tIns="12700" rIns="25400" bIns="12700" rtlCol="0" anchor="ctr"/>
           <a:lstStyle/>
           <a:p>
             <a:pPr algn="ctr">
@@ -29549,7 +30076,7 @@
           </a:fontRef>
         </p:style>
         <p:txBody>
-          <a:bodyPr rtlCol="0" anchor="ctr" wrap="square" lIns="25400" rIns="25400" tIns="12700" bIns="12700"/>
+          <a:bodyPr wrap="square" lIns="25400" tIns="12700" rIns="25400" bIns="12700" rtlCol="0" anchor="ctr"/>
           <a:lstStyle/>
           <a:p>
             <a:pPr algn="ctr">
@@ -29610,7 +30137,7 @@
           </a:fontRef>
         </p:style>
         <p:txBody>
-          <a:bodyPr rtlCol="0" anchor="ctr" wrap="square" lIns="25400" rIns="25400" tIns="12700" bIns="12700"/>
+          <a:bodyPr wrap="square" lIns="25400" tIns="12700" rIns="25400" bIns="12700" rtlCol="0" anchor="ctr"/>
           <a:lstStyle/>
           <a:p>
             <a:pPr algn="ctr">
@@ -29686,7 +30213,7 @@
 </file>
 
 <file path=ppt/slides/slide9.xml><?xml version="1.0" encoding="utf-8"?>
-<p:sld xmlns:a="http://schemas.openxmlformats.org/drawingml/2006/main" xmlns:p="http://schemas.openxmlformats.org/presentationml/2006/main" xmlns:r="http://schemas.openxmlformats.org/officeDocument/2006/relationships">
+<p:sld xmlns:a="http://schemas.openxmlformats.org/drawingml/2006/main" xmlns:r="http://schemas.openxmlformats.org/officeDocument/2006/relationships" xmlns:p="http://schemas.openxmlformats.org/presentationml/2006/main">
   <p:cSld>
     <p:spTree>
       <p:nvGrpSpPr>
@@ -29694,51 +30221,14 @@
         <p:cNvGrpSpPr/>
         <p:nvPr/>
       </p:nvGrpSpPr>
-      <p:grpSpPr/>
-      <p:sp>
-        <p:nvSpPr>
-          <p:cNvPr id="2" name="Rectangle 1"/>
-          <p:cNvSpPr/>
-          <p:nvPr/>
-        </p:nvSpPr>
-        <p:spPr>
-          <a:xfrm>
-            <a:off x="-25400" y="-25400"/>
-            <a:ext cx="12242800" cy="6908800"/>
-          </a:xfrm>
-          <a:prstGeom prst="rect">
-            <a:avLst/>
-          </a:prstGeom>
-          <a:solidFill>
-            <a:srgbClr val="F7F7F3"/>
-          </a:solidFill>
-          <a:ln>
-            <a:noFill/>
-          </a:ln>
-          <a:effectLst/>
-        </p:spPr>
-        <p:style>
-          <a:lnRef idx="1">
-            <a:schemeClr val="accent1"/>
-          </a:lnRef>
-          <a:fillRef idx="3">
-            <a:schemeClr val="accent1"/>
-          </a:fillRef>
-          <a:effectRef idx="2">
-            <a:schemeClr val="accent1"/>
-          </a:effectRef>
-          <a:fontRef idx="minor">
-            <a:schemeClr val="lt1"/>
-          </a:fontRef>
-        </p:style>
-        <p:txBody>
-          <a:bodyPr rtlCol="0" anchor="ctr" wrap="square"/>
-          <a:lstStyle/>
-          <a:p>
-            <a:pPr algn="ctr"/>
-          </a:p>
-        </p:txBody>
-      </p:sp>
+      <p:grpSpPr>
+        <a:xfrm>
+          <a:off x="0" y="0"/>
+          <a:ext cx="0" cy="0"/>
+          <a:chOff x="0" y="0"/>
+          <a:chExt cx="0" cy="0"/>
+        </a:xfrm>
+      </p:grpSpPr>
       <p:sp>
         <p:nvSpPr>
           <p:cNvPr id="3" name="TextBox 2"/>
@@ -29813,14 +30303,24 @@
               </a:spcAft>
             </a:pPr>
             <a:r>
-              <a:rPr sz="2700" b="1">
+              <a:rPr sz="2700" b="1" dirty="0" err="1">
                 <a:solidFill>
                   <a:srgbClr val="16233A"/>
                 </a:solidFill>
                 <a:latin typeface="Meiryo"/>
                 <a:ea typeface="メイリオ"/>
               </a:rPr>
-              <a:t>検証 — 8クラスの検出・方向・距離</a:t>
+              <a:t>検証</a:t>
+            </a:r>
+            <a:r>
+              <a:rPr sz="2700" b="1" dirty="0">
+                <a:solidFill>
+                  <a:srgbClr val="16233A"/>
+                </a:solidFill>
+                <a:latin typeface="Meiryo"/>
+                <a:ea typeface="メイリオ"/>
+              </a:rPr>
+              <a:t> — 8クラスの検出・方向・距離</a:t>
             </a:r>
           </a:p>
         </p:txBody>
@@ -29930,14 +30430,32 @@
                 <a:tableStyleId>{5C22544A-7EE6-4342-B048-85BDC9FD1C3A}</a:tableStyleId>
               </a:tblPr>
               <a:tblGrid>
-                <a:gridCol w="3556000"/>
-                <a:gridCol w="2286000"/>
-                <a:gridCol w="2032000"/>
+                <a:gridCol w="3556000">
+                  <a:extLst>
+                    <a:ext uri="{9D8B030D-6E8A-4147-A177-3AD203B41FA5}">
+                      <a16:colId xmlns:a16="http://schemas.microsoft.com/office/drawing/2014/main" val="20000"/>
+                    </a:ext>
+                  </a:extLst>
+                </a:gridCol>
+                <a:gridCol w="2286000">
+                  <a:extLst>
+                    <a:ext uri="{9D8B030D-6E8A-4147-A177-3AD203B41FA5}">
+                      <a16:colId xmlns:a16="http://schemas.microsoft.com/office/drawing/2014/main" val="20001"/>
+                    </a:ext>
+                  </a:extLst>
+                </a:gridCol>
+                <a:gridCol w="2032000">
+                  <a:extLst>
+                    <a:ext uri="{9D8B030D-6E8A-4147-A177-3AD203B41FA5}">
+                      <a16:colId xmlns:a16="http://schemas.microsoft.com/office/drawing/2014/main" val="20002"/>
+                    </a:ext>
+                  </a:extLst>
+                </a:gridCol>
               </a:tblGrid>
               <a:tr h="412044">
                 <a:tc>
                   <a:txBody>
-                    <a:bodyPr wrap="square"/>
+                    <a:bodyPr/>
                     <a:lstStyle/>
                     <a:p>
                       <a:pPr algn="l">
@@ -29968,7 +30486,7 @@
                 </a:tc>
                 <a:tc>
                   <a:txBody>
-                    <a:bodyPr wrap="square"/>
+                    <a:bodyPr/>
                     <a:lstStyle/>
                     <a:p>
                       <a:pPr algn="r">
@@ -29999,7 +30517,7 @@
                 </a:tc>
                 <a:tc>
                   <a:txBody>
-                    <a:bodyPr wrap="square"/>
+                    <a:bodyPr/>
                     <a:lstStyle/>
                     <a:p>
                       <a:pPr algn="r">
@@ -30028,11 +30546,16 @@
                     </a:solidFill>
                   </a:tcPr>
                 </a:tc>
+                <a:extLst>
+                  <a:ext uri="{0D108BD9-81ED-4DB2-BD59-A6C34878D82A}">
+                    <a16:rowId xmlns:a16="http://schemas.microsoft.com/office/drawing/2014/main" val="10000"/>
+                  </a:ext>
+                </a:extLst>
               </a:tr>
               <a:tr h="412044">
                 <a:tc>
                   <a:txBody>
-                    <a:bodyPr wrap="square"/>
+                    <a:bodyPr/>
                     <a:lstStyle/>
                     <a:p>
                       <a:pPr algn="l">
@@ -30063,7 +30586,7 @@
                 </a:tc>
                 <a:tc>
                   <a:txBody>
-                    <a:bodyPr wrap="square"/>
+                    <a:bodyPr/>
                     <a:lstStyle/>
                     <a:p>
                       <a:pPr algn="r">
@@ -30094,7 +30617,7 @@
                 </a:tc>
                 <a:tc>
                   <a:txBody>
-                    <a:bodyPr wrap="square"/>
+                    <a:bodyPr/>
                     <a:lstStyle/>
                     <a:p>
                       <a:pPr algn="r">
@@ -30123,11 +30646,16 @@
                     </a:solidFill>
                   </a:tcPr>
                 </a:tc>
+                <a:extLst>
+                  <a:ext uri="{0D108BD9-81ED-4DB2-BD59-A6C34878D82A}">
+                    <a16:rowId xmlns:a16="http://schemas.microsoft.com/office/drawing/2014/main" val="10001"/>
+                  </a:ext>
+                </a:extLst>
               </a:tr>
               <a:tr h="412044">
                 <a:tc>
                   <a:txBody>
-                    <a:bodyPr wrap="square"/>
+                    <a:bodyPr/>
                     <a:lstStyle/>
                     <a:p>
                       <a:pPr algn="l">
@@ -30158,7 +30686,7 @@
                 </a:tc>
                 <a:tc>
                   <a:txBody>
-                    <a:bodyPr wrap="square"/>
+                    <a:bodyPr/>
                     <a:lstStyle/>
                     <a:p>
                       <a:pPr algn="r">
@@ -30189,7 +30717,7 @@
                 </a:tc>
                 <a:tc>
                   <a:txBody>
-                    <a:bodyPr wrap="square"/>
+                    <a:bodyPr/>
                     <a:lstStyle/>
                     <a:p>
                       <a:pPr algn="r">
@@ -30218,11 +30746,16 @@
                     </a:solidFill>
                   </a:tcPr>
                 </a:tc>
+                <a:extLst>
+                  <a:ext uri="{0D108BD9-81ED-4DB2-BD59-A6C34878D82A}">
+                    <a16:rowId xmlns:a16="http://schemas.microsoft.com/office/drawing/2014/main" val="10002"/>
+                  </a:ext>
+                </a:extLst>
               </a:tr>
               <a:tr h="412044">
                 <a:tc>
                   <a:txBody>
-                    <a:bodyPr wrap="square"/>
+                    <a:bodyPr/>
                     <a:lstStyle/>
                     <a:p>
                       <a:pPr algn="l">
@@ -30253,7 +30786,7 @@
                 </a:tc>
                 <a:tc>
                   <a:txBody>
-                    <a:bodyPr wrap="square"/>
+                    <a:bodyPr/>
                     <a:lstStyle/>
                     <a:p>
                       <a:pPr algn="r">
@@ -30284,7 +30817,7 @@
                 </a:tc>
                 <a:tc>
                   <a:txBody>
-                    <a:bodyPr wrap="square"/>
+                    <a:bodyPr/>
                     <a:lstStyle/>
                     <a:p>
                       <a:pPr algn="r">
@@ -30313,11 +30846,16 @@
                     </a:solidFill>
                   </a:tcPr>
                 </a:tc>
+                <a:extLst>
+                  <a:ext uri="{0D108BD9-81ED-4DB2-BD59-A6C34878D82A}">
+                    <a16:rowId xmlns:a16="http://schemas.microsoft.com/office/drawing/2014/main" val="10003"/>
+                  </a:ext>
+                </a:extLst>
               </a:tr>
               <a:tr h="412044">
                 <a:tc>
                   <a:txBody>
-                    <a:bodyPr wrap="square"/>
+                    <a:bodyPr/>
                     <a:lstStyle/>
                     <a:p>
                       <a:pPr algn="l">
@@ -30348,7 +30886,7 @@
                 </a:tc>
                 <a:tc>
                   <a:txBody>
-                    <a:bodyPr wrap="square"/>
+                    <a:bodyPr/>
                     <a:lstStyle/>
                     <a:p>
                       <a:pPr algn="r">
@@ -30379,7 +30917,7 @@
                 </a:tc>
                 <a:tc>
                   <a:txBody>
-                    <a:bodyPr wrap="square"/>
+                    <a:bodyPr/>
                     <a:lstStyle/>
                     <a:p>
                       <a:pPr algn="r">
@@ -30408,11 +30946,16 @@
                     </a:solidFill>
                   </a:tcPr>
                 </a:tc>
+                <a:extLst>
+                  <a:ext uri="{0D108BD9-81ED-4DB2-BD59-A6C34878D82A}">
+                    <a16:rowId xmlns:a16="http://schemas.microsoft.com/office/drawing/2014/main" val="10004"/>
+                  </a:ext>
+                </a:extLst>
               </a:tr>
               <a:tr h="412044">
                 <a:tc>
                   <a:txBody>
-                    <a:bodyPr wrap="square"/>
+                    <a:bodyPr/>
                     <a:lstStyle/>
                     <a:p>
                       <a:pPr algn="l">
@@ -30443,7 +30986,7 @@
                 </a:tc>
                 <a:tc>
                   <a:txBody>
-                    <a:bodyPr wrap="square"/>
+                    <a:bodyPr/>
                     <a:lstStyle/>
                     <a:p>
                       <a:pPr algn="r">
@@ -30474,7 +31017,7 @@
                 </a:tc>
                 <a:tc>
                   <a:txBody>
-                    <a:bodyPr wrap="square"/>
+                    <a:bodyPr/>
                     <a:lstStyle/>
                     <a:p>
                       <a:pPr algn="r">
@@ -30503,11 +31046,16 @@
                     </a:solidFill>
                   </a:tcPr>
                 </a:tc>
+                <a:extLst>
+                  <a:ext uri="{0D108BD9-81ED-4DB2-BD59-A6C34878D82A}">
+                    <a16:rowId xmlns:a16="http://schemas.microsoft.com/office/drawing/2014/main" val="10005"/>
+                  </a:ext>
+                </a:extLst>
               </a:tr>
               <a:tr h="412044">
                 <a:tc>
                   <a:txBody>
-                    <a:bodyPr wrap="square"/>
+                    <a:bodyPr/>
                     <a:lstStyle/>
                     <a:p>
                       <a:pPr algn="l">
@@ -30538,7 +31086,7 @@
                 </a:tc>
                 <a:tc>
                   <a:txBody>
-                    <a:bodyPr wrap="square"/>
+                    <a:bodyPr/>
                     <a:lstStyle/>
                     <a:p>
                       <a:pPr algn="r">
@@ -30569,7 +31117,7 @@
                 </a:tc>
                 <a:tc>
                   <a:txBody>
-                    <a:bodyPr wrap="square"/>
+                    <a:bodyPr/>
                     <a:lstStyle/>
                     <a:p>
                       <a:pPr algn="r">
@@ -30598,11 +31146,16 @@
                     </a:solidFill>
                   </a:tcPr>
                 </a:tc>
+                <a:extLst>
+                  <a:ext uri="{0D108BD9-81ED-4DB2-BD59-A6C34878D82A}">
+                    <a16:rowId xmlns:a16="http://schemas.microsoft.com/office/drawing/2014/main" val="10006"/>
+                  </a:ext>
+                </a:extLst>
               </a:tr>
               <a:tr h="412044">
                 <a:tc>
                   <a:txBody>
-                    <a:bodyPr wrap="square"/>
+                    <a:bodyPr/>
                     <a:lstStyle/>
                     <a:p>
                       <a:pPr algn="l">
@@ -30633,7 +31186,7 @@
                 </a:tc>
                 <a:tc>
                   <a:txBody>
-                    <a:bodyPr wrap="square"/>
+                    <a:bodyPr/>
                     <a:lstStyle/>
                     <a:p>
                       <a:pPr algn="r">
@@ -30664,7 +31217,7 @@
                 </a:tc>
                 <a:tc>
                   <a:txBody>
-                    <a:bodyPr wrap="square"/>
+                    <a:bodyPr/>
                     <a:lstStyle/>
                     <a:p>
                       <a:pPr algn="r">
@@ -30693,11 +31246,16 @@
                     </a:solidFill>
                   </a:tcPr>
                 </a:tc>
+                <a:extLst>
+                  <a:ext uri="{0D108BD9-81ED-4DB2-BD59-A6C34878D82A}">
+                    <a16:rowId xmlns:a16="http://schemas.microsoft.com/office/drawing/2014/main" val="10007"/>
+                  </a:ext>
+                </a:extLst>
               </a:tr>
               <a:tr h="412048">
                 <a:tc>
                   <a:txBody>
-                    <a:bodyPr wrap="square"/>
+                    <a:bodyPr/>
                     <a:lstStyle/>
                     <a:p>
                       <a:pPr algn="l">
@@ -30728,7 +31286,7 @@
                 </a:tc>
                 <a:tc>
                   <a:txBody>
-                    <a:bodyPr wrap="square"/>
+                    <a:bodyPr/>
                     <a:lstStyle/>
                     <a:p>
                       <a:pPr algn="r">
@@ -30759,7 +31317,7 @@
                 </a:tc>
                 <a:tc>
                   <a:txBody>
-                    <a:bodyPr wrap="square"/>
+                    <a:bodyPr/>
                     <a:lstStyle/>
                     <a:p>
                       <a:pPr algn="r">
@@ -30788,6 +31346,11 @@
                     </a:solidFill>
                   </a:tcPr>
                 </a:tc>
+                <a:extLst>
+                  <a:ext uri="{0D108BD9-81ED-4DB2-BD59-A6C34878D82A}">
+                    <a16:rowId xmlns:a16="http://schemas.microsoft.com/office/drawing/2014/main" val="10008"/>
+                  </a:ext>
+                </a:extLst>
               </a:tr>
             </a:tbl>
           </a:graphicData>
@@ -30832,7 +31395,7 @@
           </a:fontRef>
         </p:style>
         <p:txBody>
-          <a:bodyPr rtlCol="0" anchor="t" wrap="square" lIns="177800" rIns="177800" tIns="127000" bIns="101600"/>
+          <a:bodyPr wrap="square" lIns="177800" tIns="127000" rIns="177800" bIns="101600" rtlCol="0" anchor="t"/>
           <a:lstStyle/>
           <a:p>
             <a:pPr algn="l">
@@ -31039,7 +31602,7 @@
           </a:fontRef>
         </p:style>
         <p:txBody>
-          <a:bodyPr rtlCol="0" anchor="ctr" wrap="square" lIns="25400" rIns="25400" tIns="12700" bIns="12700"/>
+          <a:bodyPr wrap="square" lIns="25400" tIns="12700" rIns="25400" bIns="12700" rtlCol="0" anchor="ctr"/>
           <a:lstStyle/>
           <a:p>
             <a:pPr algn="ctr">
@@ -31100,7 +31663,7 @@
           </a:fontRef>
         </p:style>
         <p:txBody>
-          <a:bodyPr rtlCol="0" anchor="ctr" wrap="square" lIns="25400" rIns="25400" tIns="12700" bIns="12700"/>
+          <a:bodyPr wrap="square" lIns="25400" tIns="12700" rIns="25400" bIns="12700" rtlCol="0" anchor="ctr"/>
           <a:lstStyle/>
           <a:p>
             <a:pPr algn="ctr">
@@ -31161,7 +31724,7 @@
           </a:fontRef>
         </p:style>
         <p:txBody>
-          <a:bodyPr rtlCol="0" anchor="ctr" wrap="square" lIns="25400" rIns="25400" tIns="12700" bIns="12700"/>
+          <a:bodyPr wrap="square" lIns="25400" tIns="12700" rIns="25400" bIns="12700" rtlCol="0" anchor="ctr"/>
           <a:lstStyle/>
           <a:p>
             <a:pPr algn="ctr">
@@ -31222,7 +31785,7 @@
           </a:fontRef>
         </p:style>
         <p:txBody>
-          <a:bodyPr rtlCol="0" anchor="ctr" wrap="square" lIns="25400" rIns="25400" tIns="12700" bIns="12700"/>
+          <a:bodyPr wrap="square" lIns="25400" tIns="12700" rIns="25400" bIns="12700" rtlCol="0" anchor="ctr"/>
           <a:lstStyle/>
           <a:p>
             <a:pPr algn="ctr">
@@ -31283,7 +31846,7 @@
           </a:fontRef>
         </p:style>
         <p:txBody>
-          <a:bodyPr rtlCol="0" anchor="ctr" wrap="square" lIns="25400" rIns="25400" tIns="12700" bIns="12700"/>
+          <a:bodyPr wrap="square" lIns="25400" tIns="12700" rIns="25400" bIns="12700" rtlCol="0" anchor="ctr"/>
           <a:lstStyle/>
           <a:p>
             <a:pPr algn="ctr">
@@ -31344,7 +31907,7 @@
           </a:fontRef>
         </p:style>
         <p:txBody>
-          <a:bodyPr rtlCol="0" anchor="ctr" wrap="square" lIns="25400" rIns="25400" tIns="12700" bIns="12700"/>
+          <a:bodyPr wrap="square" lIns="25400" tIns="12700" rIns="25400" bIns="12700" rtlCol="0" anchor="ctr"/>
           <a:lstStyle/>
           <a:p>
             <a:pPr algn="ctr">

--- a/md/seminar/中間発表スライド_2026-08-10.pptx
+++ b/md/seminar/中間発表スライド_2026-08-10.pptx
@@ -7753,34 +7753,14 @@
               </a:spcAft>
             </a:pPr>
             <a:r>
-              <a:rPr sz="2700" b="1" dirty="0" err="1">
+              <a:rPr sz="2700" b="1">
                 <a:solidFill>
                   <a:srgbClr val="16233A"/>
                 </a:solidFill>
                 <a:latin typeface="Meiryo"/>
                 <a:ea typeface="メイリオ"/>
               </a:rPr>
-              <a:t>検証</a:t>
-            </a:r>
-            <a:r>
-              <a:rPr sz="2700" b="1" dirty="0">
-                <a:solidFill>
-                  <a:srgbClr val="16233A"/>
-                </a:solidFill>
-                <a:latin typeface="Meiryo"/>
-                <a:ea typeface="メイリオ"/>
-              </a:rPr>
-              <a:t> — </a:t>
-            </a:r>
-            <a:r>
-              <a:rPr sz="2700" b="1" dirty="0" err="1">
-                <a:solidFill>
-                  <a:srgbClr val="16233A"/>
-                </a:solidFill>
-                <a:latin typeface="Meiryo"/>
-                <a:ea typeface="メイリオ"/>
-              </a:rPr>
-              <a:t>人の耳より先に気づけるか</a:t>
+              <a:t>検証 — 遠方の危険への「気づき」を距離で測る</a:t>
             </a:r>
             <a:endParaRPr sz="2700" b="1" dirty="0">
               <a:solidFill>
@@ -8554,7 +8534,7 @@
                 <a:latin typeface="Meiryo"/>
                 <a:ea typeface="メイリオ"/>
               </a:rPr>
-              <a:t>サイレン初検知距離（100〜300mの遠方配置・未検知ゼロ）—「人が気づく前から機械の耳は聞いている」を距離で定量化</a:t>
+              <a:t>サイレン初検知距離（100〜300mの遠方配置・未検知ゼロ・開発評価セット）— 常時監視による早期の気づきを距離で定量化</a:t>
             </a:r>
           </a:p>
         </p:txBody>
@@ -8974,7 +8954,7 @@
                 <a:latin typeface="Meiryo"/>
                 <a:ea typeface="メイリオ"/>
               </a:rPr>
-              <a:t>（静穏環境で10m先まで検出）</a:t>
+              <a:t>（合成の成立性試験で10m・実機は9月確認）</a:t>
             </a:r>
           </a:p>
         </p:txBody>
@@ -11991,7 +11971,7 @@
                 <a:latin typeface="Meiryo"/>
                 <a:ea typeface="メイリオ"/>
               </a:rPr>
-              <a:t>総合SELDスコアは事前基準に僅差未達（0.087 vs 0.085。個別性能は全達成）</a:t>
+              <a:t>総合SELDスコア（学習時指標）は事前基準に僅差未達（0.087 vs 0.085。確定評価の個別性能は全達成）</a:t>
             </a:r>
           </a:p>
         </p:txBody>
@@ -12312,7 +12292,7 @@
                 <a:latin typeface="Meiryo"/>
                 <a:ea typeface="メイリオ"/>
               </a:rPr>
-              <a:t>通知の同一物体判定は方位連結による近似（完全なトラッキングは将来課題）</a:t>
+              <a:t>通知の同一物体判定は方位連結（±60°）による近似（完全なトラッキングは将来課題）</a:t>
             </a:r>
           </a:p>
         </p:txBody>
@@ -13231,84 +13211,14 @@
               </a:spcAft>
             </a:pPr>
             <a:r>
-              <a:rPr sz="1600" b="1" dirty="0">
+              <a:rPr sz="1600" b="1">
                 <a:solidFill>
                   <a:srgbClr val="16233A"/>
                 </a:solidFill>
                 <a:latin typeface="Meiryo"/>
                 <a:ea typeface="メイリオ"/>
               </a:rPr>
-              <a:t>■ </a:t>
-            </a:r>
-            <a:r>
-              <a:rPr sz="1600" b="0" dirty="0">
-                <a:solidFill>
-                  <a:srgbClr val="3A4658"/>
-                </a:solidFill>
-                <a:latin typeface="Meiryo"/>
-                <a:ea typeface="メイリオ"/>
-              </a:rPr>
-              <a:t>「</a:t>
-            </a:r>
-            <a:r>
-              <a:rPr sz="1600" b="0" dirty="0" err="1">
-                <a:solidFill>
-                  <a:srgbClr val="3A4658"/>
-                </a:solidFill>
-                <a:latin typeface="Meiryo"/>
-                <a:ea typeface="メイリオ"/>
-              </a:rPr>
-              <a:t>聞こえる前」を定量化</a:t>
-            </a:r>
-            <a:r>
-              <a:rPr sz="1600" b="0" dirty="0">
-                <a:solidFill>
-                  <a:srgbClr val="3A4658"/>
-                </a:solidFill>
-                <a:latin typeface="Meiryo"/>
-                <a:ea typeface="メイリオ"/>
-              </a:rPr>
-              <a:t> — </a:t>
-            </a:r>
-            <a:r>
-              <a:rPr sz="1600" b="0" dirty="0" err="1">
-                <a:solidFill>
-                  <a:srgbClr val="3A4658"/>
-                </a:solidFill>
-                <a:latin typeface="Meiryo"/>
-                <a:ea typeface="メイリオ"/>
-              </a:rPr>
-              <a:t>サイレン初検知</a:t>
-            </a:r>
-            <a:r>
-              <a:rPr sz="1600" b="0" dirty="0">
-                <a:solidFill>
-                  <a:srgbClr val="3A4658"/>
-                </a:solidFill>
-                <a:latin typeface="Meiryo"/>
-                <a:ea typeface="メイリオ"/>
-              </a:rPr>
-              <a:t> </a:t>
-            </a:r>
-            <a:r>
-              <a:rPr sz="3000" b="1" dirty="0">
-                <a:solidFill>
-                  <a:srgbClr val="16233A"/>
-                </a:solidFill>
-                <a:latin typeface="Meiryo"/>
-                <a:ea typeface="メイリオ"/>
-              </a:rPr>
-              <a:t>208m</a:t>
-            </a:r>
-            <a:r>
-              <a:rPr sz="1600" b="0" dirty="0">
-                <a:solidFill>
-                  <a:srgbClr val="3A4658"/>
-                </a:solidFill>
-                <a:latin typeface="Meiryo"/>
-                <a:ea typeface="メイリオ"/>
-              </a:rPr>
-              <a:t>・40kHz超音波検出も初実装</a:t>
+              <a:t>■ 遠方サイレンの初検知 中央208m（開発評価）— 40kHz検出系も実装（合成試験）</a:t>
             </a:r>
           </a:p>
           <a:p>
@@ -19606,17 +19516,7 @@
                 <a:latin typeface="Meiryo"/>
                 <a:ea typeface="メイリオ"/>
               </a:rPr>
-              <a:t>■ </a:t>
-            </a:r>
-            <a:r>
-              <a:rPr sz="1450" b="0">
-                <a:solidFill>
-                  <a:srgbClr val="3A4658"/>
-                </a:solidFill>
-                <a:latin typeface="Meiryo"/>
-                <a:ea typeface="メイリオ"/>
-              </a:rPr>
-              <a:t>開発値と確定値の乖離は全指標±2pt以内 ＝ 過学習ではなく汎化している直接証拠</a:t>
+              <a:t>■ 開発値と確定値の乖離は全指標±2pt以内 ＝ 同一生成方式の未知シードへ汎化している直接証拠（実環境への汎化は9月に検証）</a:t>
             </a:r>
           </a:p>
           <a:p>
@@ -20438,38 +20338,18 @@
                 <a:latin typeface="Meiryo"/>
                 <a:ea typeface="メイリオ"/>
               </a:rPr>
-              <a:t>■ </a:t>
-            </a:r>
-            <a:r>
-              <a:rPr sz="1500" b="0">
-                <a:solidFill>
-                  <a:srgbClr val="3A4658"/>
-                </a:solidFill>
-                <a:latin typeface="Meiryo"/>
-                <a:ea typeface="メイリオ"/>
-              </a:rPr>
-              <a:t>機械の耳は人間の耳の限界（可聴域・可聴距離）に縛られない
-→「耳の代わり」を超えて</a:t>
-            </a:r>
+              <a:t>■ 機械の耳は疲れず全方位を常時監視でき、可聴域の外の信号も扱える</a:t>
+            </a:r>
+            <a:br/>
             <a:r>
               <a:rPr sz="1500" b="1">
                 <a:solidFill>
-                  <a:srgbClr val="B37E00"/>
-                </a:solidFill>
-                <a:latin typeface="Meiryo"/>
-                <a:ea typeface="メイリオ"/>
-              </a:rPr>
-              <a:t>人の耳を超える支援</a:t>
-            </a:r>
-            <a:r>
-              <a:rPr sz="1500" b="0">
-                <a:solidFill>
-                  <a:srgbClr val="3A4658"/>
-                </a:solidFill>
-                <a:latin typeface="Meiryo"/>
-                <a:ea typeface="メイリオ"/>
-              </a:rPr>
-              <a:t>まで狙える</a:t>
+                  <a:srgbClr val="E8A200"/>
+                </a:solidFill>
+                <a:latin typeface="Meiryo"/>
+                <a:ea typeface="メイリオ"/>
+              </a:rPr>
+              <a:t>→「耳の代わり」にとどまらない支援まで狙える</a:t>
             </a:r>
           </a:p>
         </p:txBody>
@@ -27222,17 +27102,7 @@
                 <a:latin typeface="Meiryo"/>
                 <a:ea typeface="メイリオ"/>
               </a:rPr>
-              <a:t>歩行者装着 × 複数危険クラス同時 × 距離まで</a:t>
-            </a:r>
-            <a:r>
-              <a:rPr sz="1300" b="0">
-                <a:solidFill>
-                  <a:srgbClr val="3A4658"/>
-                </a:solidFill>
-                <a:latin typeface="Meiryo"/>
-                <a:ea typeface="メイリオ"/>
-              </a:rPr>
-              <a:t>を屋外で扱った研究は存在しない。分業型（分類CNN＋信号処理DOA）は複数音源の同時発生で対応付けが壊れる → 同時推定型SELDを採用</a:t>
+              <a:t>歩行者装着 × 複数危険クラス同時 × 距離までを屋外で扱った研究は調査した範囲で見当たらない。分業型（分類CNN＋信号処理DOA）は複数音源の同時発生で対応付けが壊れやすい → 同時推定型SELDを採用</a:t>
             </a:r>
           </a:p>
         </p:txBody>
@@ -28211,37 +28081,7 @@
                 <a:latin typeface="Meiryo"/>
                 <a:ea typeface="メイリオ"/>
               </a:rPr>
-              <a:t>■ </a:t>
-            </a:r>
-            <a:r>
-              <a:rPr sz="1400" b="0">
-                <a:solidFill>
-                  <a:srgbClr val="3A4658"/>
-                </a:solidFill>
-                <a:latin typeface="Meiryo"/>
-                <a:ea typeface="メイリオ"/>
-              </a:rPr>
-              <a:t>なぜ合成か：① 屋外の方向つきデータが他に存在しない　② 物理を自分で持てば1つずつ外せる＝</a:t>
-            </a:r>
-            <a:r>
-              <a:rPr sz="1400" b="1">
-                <a:solidFill>
-                  <a:srgbClr val="16233A"/>
-                </a:solidFill>
-                <a:latin typeface="Meiryo"/>
-                <a:ea typeface="メイリオ"/>
-              </a:rPr>
-              <a:t>ablationができる土俵</a:t>
-            </a:r>
-            <a:r>
-              <a:rPr sz="1400" b="0">
-                <a:solidFill>
-                  <a:srgbClr val="3A4658"/>
-                </a:solidFill>
-                <a:latin typeface="Meiryo"/>
-                <a:ea typeface="メイリオ"/>
-              </a:rPr>
-              <a:t>になる</a:t>
+              <a:t>■ なぜ合成か：① 屋外・歩行者視点・距離つきの学習データが他に存在しない　② 物理を自分で持てば1つずつ外せる＝ablationができる土俵になる</a:t>
             </a:r>
           </a:p>
           <a:p>
@@ -29160,17 +29000,7 @@
                 <a:latin typeface="Meiryo"/>
                 <a:ea typeface="メイリオ"/>
               </a:rPr>
-              <a:t>至近警告</a:t>
-            </a:r>
-            <a:r>
-              <a:rPr sz="1200" b="0">
-                <a:solidFill>
-                  <a:srgbClr val="3A4658"/>
-                </a:solidFill>
-                <a:latin typeface="Meiryo"/>
-                <a:ea typeface="メイリオ"/>
-              </a:rPr>
-              <a:t>　推定距離≤1.5mが2フレーム連続（同一物体の方位連続性つき）</a:t>
+              <a:t>至近警告　推定距離≤1.5mが2フレーム連続（同一物体は方位連結±60°の近似）</a:t>
             </a:r>
           </a:p>
           <a:p>

--- a/md/seminar/中間発表スライド_2026-08-10.pptx
+++ b/md/seminar/中間発表スライド_2026-08-10.pptx
@@ -19417,7 +19417,7 @@
                 <a:latin typeface="Meiryo"/>
                 <a:ea typeface="メイリオ"/>
               </a:rPr>
-              <a:t>付録 — 確定評価と外部監査の仕組み</a:t>
+              <a:t>付録 — 確定評価の仕組み</a:t>
             </a:r>
           </a:p>
         </p:txBody>
@@ -19539,17 +19539,7 @@
                 <a:latin typeface="Meiryo"/>
                 <a:ea typeface="メイリオ"/>
               </a:rPr>
-              <a:t>■ AI外部監査</a:t>
-            </a:r>
-            <a:r>
-              <a:rPr sz="1450" b="0">
-                <a:solidFill>
-                  <a:srgbClr val="3A4658"/>
-                </a:solidFill>
-                <a:latin typeface="Meiryo"/>
-                <a:ea typeface="メイリオ"/>
-              </a:rPr>
-              <a:t>：別のAI（監査役）による敵対的レビュー。不合格指摘 → 全対応 → 再検証3巡 → 完全合格。指摘には通知ルールの欠陥発見（同一物体の連続性）も含まれ、ルール改訂の契機になった</a:t>
+              <a:t>■ 採点系の検証：採点スクリプトは単体テストと独立実装の突き合わせで検証済み。通知ルールの同一物体連続性（±60°連結）もこの過程で追加された</a:t>
             </a:r>
           </a:p>
           <a:p>

--- a/md/seminar/中間発表スライド_2026-08-10.pptx
+++ b/md/seminar/中間発表スライド_2026-08-10.pptx
@@ -8954,7 +8954,7 @@
                 <a:latin typeface="Meiryo"/>
                 <a:ea typeface="メイリオ"/>
               </a:rPr>
-              <a:t>（合成の成立性試験で10m・実機は9月確認）</a:t>
+              <a:t>（仮定受信機・設計音圧の合成試験で10m・実機は9月確認）</a:t>
             </a:r>
           </a:p>
         </p:txBody>
@@ -21655,7 +21655,7 @@
                 <a:latin typeface="Meiryo"/>
                 <a:ea typeface="メイリオ"/>
               </a:rPr>
-              <a:t>音の種類・方向・距離を推定し、危険度3段階（至近警告／注意／抑制）を首元の振動で伝える。行動の判断は本人に委ねる</a:t>
+              <a:t>音の種類・方向・距離を推定し、危険度3段階（至近警告／注意／抑制）を将来的には首元の振動で伝える構成を想定。行動の判断は本人に委ねる</a:t>
             </a:r>
           </a:p>
         </p:txBody>
@@ -26257,8 +26257,8 @@
         </p:nvSpPr>
         <p:spPr>
           <a:xfrm>
-            <a:off x="7442200" y="2159000"/>
-            <a:ext cx="736600" cy="254000"/>
+            <a:off x="7061200" y="2159000"/>
+            <a:ext cx="787400" cy="254000"/>
           </a:xfrm>
           <a:prstGeom prst="rect">
             <a:avLst/>
@@ -26320,8 +26320,8 @@
         </p:nvSpPr>
         <p:spPr>
           <a:xfrm>
-            <a:off x="8229600" y="2362200"/>
-            <a:ext cx="736600" cy="254000"/>
+            <a:off x="7874000" y="2362200"/>
+            <a:ext cx="787400" cy="254000"/>
           </a:xfrm>
           <a:prstGeom prst="rect">
             <a:avLst/>
@@ -26383,8 +26383,8 @@
         </p:nvSpPr>
         <p:spPr>
           <a:xfrm>
-            <a:off x="9017000" y="2565400"/>
-            <a:ext cx="736600" cy="254000"/>
+            <a:off x="8686800" y="2565400"/>
+            <a:ext cx="787400" cy="254000"/>
           </a:xfrm>
           <a:prstGeom prst="rect">
             <a:avLst/>
@@ -26446,8 +26446,8 @@
         </p:nvSpPr>
         <p:spPr>
           <a:xfrm>
-            <a:off x="9804400" y="2768600"/>
-            <a:ext cx="736600" cy="254000"/>
+            <a:off x="9499600" y="2768600"/>
+            <a:ext cx="787400" cy="254000"/>
           </a:xfrm>
           <a:prstGeom prst="rect">
             <a:avLst/>
@@ -27902,7 +27902,7 @@
                 <a:latin typeface="Meiryo"/>
                 <a:ea typeface="メイリオ"/>
               </a:rPr>
-              <a:t>同一経路から同時に出力（FOA）。ラベル誤差ゼロの「教科書」</a:t>
+              <a:t>同一経路から同時に出力（FOA）。生成誤差ゼロの教師ラベル（シミュレータ内部基準・実世界とのモデル化誤差は残る）</a:t>
             </a:r>
           </a:p>
         </p:txBody>
@@ -28071,7 +28071,7 @@
                 <a:latin typeface="Meiryo"/>
                 <a:ea typeface="メイリオ"/>
               </a:rPr>
-              <a:t>■ なぜ合成か：① 屋外・歩行者視点・距離つきの学習データが他に存在しない　② 物理を自分で持てば1つずつ外せる＝ablationができる土俵になる</a:t>
+              <a:t>なぜ合成か：① 屋外・歩行者視点・距離つきの学習データが調査した範囲で存在しない　② 物理を自分で持てば1つずつ外せる＝ablationができる土俵になる</a:t>
             </a:r>
           </a:p>
           <a:p>
@@ -28967,7 +28967,7 @@
                 <a:latin typeface="Meiryo"/>
                 <a:ea typeface="メイリオ"/>
               </a:rPr>
-              <a:t>通知層（3役割）— 推定距離で出し分け</a:t>
+              <a:t>通知層（規則v3.4）— 推定距離で出し分け</a:t>
             </a:r>
           </a:p>
           <a:p>

--- a/md/seminar/中間発表スライド_2026-08-10.pptx
+++ b/md/seminar/中間発表スライド_2026-08-10.pptx
@@ -21902,7 +21902,7 @@
                 <a:latin typeface="Meiryo"/>
                 <a:ea typeface="メイリオ"/>
               </a:rPr>
-              <a:t>危険な接近だけを3段階の振動で伝える</a:t>
+              <a:t>危険な接近だけを3段階で通知する（提示は首元振動を将来構想）</a:t>
             </a:r>
             <a:r>
               <a:rPr sz="1400" b="0">

--- a/md/seminar/中間発表スライド_2026-08-10.pptx
+++ b/md/seminar/中間発表スライド_2026-08-10.pptx
@@ -10978,6 +10978,16 @@
               </a:spcAft>
             </a:pPr>
             <a:r>
+              <a:rPr sz="1350">
+                <a:solidFill>
+                  <a:srgbClr val="3A4658"/>
+                </a:solidFill>
+                <a:latin typeface="Meiryo"/>
+                <a:ea typeface="メイリオ"/>
+              </a:rPr>
+              <a:t>注釈（車種・目視速度・横距離・風速・LAeq）を正解として</a:t>
+            </a:r>
+            <a:r>
               <a:rPr sz="1350" b="1">
                 <a:solidFill>
                   <a:srgbClr val="16233A"/>
@@ -10985,37 +10995,17 @@
                 <a:latin typeface="Meiryo"/>
                 <a:ea typeface="メイリオ"/>
               </a:rPr>
-              <a:t>■ </a:t>
-            </a:r>
-            <a:r>
-              <a:rPr sz="1350" b="0">
+              <a:t>同じモデル・同じ通知閾値</a:t>
+            </a:r>
+            <a:r>
+              <a:rPr sz="1350">
                 <a:solidFill>
                   <a:srgbClr val="3A4658"/>
                 </a:solidFill>
                 <a:latin typeface="Meiryo"/>
                 <a:ea typeface="メイリオ"/>
               </a:rPr>
-              <a:t>注釈（車種・目視速度・横距離・風速・LAeq）を正解として</a:t>
-            </a:r>
-            <a:r>
-              <a:rPr sz="1350" b="1">
-                <a:solidFill>
-                  <a:srgbClr val="16233A"/>
-                </a:solidFill>
-                <a:latin typeface="Meiryo"/>
-                <a:ea typeface="メイリオ"/>
-              </a:rPr>
-              <a:t>合成と同一の採点系</a:t>
-            </a:r>
-            <a:r>
-              <a:rPr sz="1350" b="0">
-                <a:solidFill>
-                  <a:srgbClr val="3A4658"/>
-                </a:solidFill>
-                <a:latin typeface="Meiryo"/>
-                <a:ea typeface="メイリオ"/>
-              </a:rPr>
-              <a:t>で比較（計65本）</a:t>
+              <a:t>で比較（正解は実録注釈の粒度・計65本）</a:t>
             </a:r>
           </a:p>
         </p:txBody>

--- a/md/seminar/中間発表スライド_2026-08-10.pptx
+++ b/md/seminar/中間発表スライド_2026-08-10.pptx
@@ -12181,7 +12181,7 @@
                 <a:latin typeface="Meiryo"/>
                 <a:ea typeface="メイリオ"/>
               </a:rPr>
-              <a:t>車（速度×横距離を散らす）・EV・キックボード・踏切＋列車。台本どおり幾何を合成シナリオに揃える</a:t>
+              <a:t>走行車20・弱点20（EV/発進/自転車/見通し不良）・キックボード20。速度×横距離×左右を散らし、幾何を合成シナリオに揃える</a:t>
             </a:r>
           </a:p>
         </p:txBody>
@@ -12308,7 +12308,7 @@
                 <a:latin typeface="Meiryo"/>
                 <a:ea typeface="メイリオ"/>
               </a:rPr>
-              <a:t>サイレン・クラクション・バック音。遭遇したら他を中断して最優先記録</a:t>
+              <a:t>踏切8＋バック音の統制4＋機会枠8。サイレン・クラクションは遭遇したら他を中断して最優先記録</a:t>
             </a:r>
           </a:p>
         </p:txBody>
@@ -12322,7 +12322,7 @@
         <p:spPr>
           <a:xfrm>
             <a:off x="4555066" y="1498600"/>
-            <a:ext cx="1041400" cy="254000"/>
+            <a:ext cx="1181100" cy="254000"/>
           </a:xfrm>
           <a:prstGeom prst="rect">
             <a:avLst/>
@@ -12369,7 +12369,7 @@
                 <a:latin typeface="Meiryo"/>
                 <a:ea typeface="メイリオ"/>
               </a:rPr>
-              <a:t>② 機会捕捉</a:t>
+              <a:t>② 固定・機会</a:t>
             </a:r>
           </a:p>
         </p:txBody>
@@ -12435,7 +12435,7 @@
                 <a:latin typeface="Meiryo"/>
                 <a:ea typeface="メイリオ"/>
               </a:rPr>
-              <a:t>静穏・繁華街・風。誤警告率／時の実世界試験</a:t>
+              <a:t>静穏・繁華街・雨上がり・風 計20本＋連続録音100分。誤警告率／時の実世界試験</a:t>
             </a:r>
           </a:p>
         </p:txBody>
@@ -12605,7 +12605,7 @@
                 <a:latin typeface="Meiryo"/>
                 <a:ea typeface="メイリオ"/>
               </a:rPr>
-              <a:t>で比較（正解は実録注釈の粒度・計65本）</a:t>
+              <a:t>で比較（正解は実録注釈の粒度・計100本＋静止/歩行対比20本＝計画値）</a:t>
             </a:r>
           </a:p>
         </p:txBody>
@@ -13351,7 +13351,7 @@
         </p:nvSpPr>
         <p:spPr>
           <a:xfrm>
-            <a:off x="685800" y="1498600"/>
+            <a:off x="685800" y="1447800"/>
             <a:ext cx="482600" cy="254000"/>
           </a:xfrm>
           <a:prstGeom prst="rect">
@@ -13412,8 +13412,8 @@
         </p:nvSpPr>
         <p:spPr>
           <a:xfrm>
-            <a:off x="1473200" y="1422400"/>
-            <a:ext cx="10033000" cy="762000"/>
+            <a:off x="1473200" y="1371600"/>
+            <a:ext cx="10033000" cy="711200"/>
           </a:xfrm>
           <a:prstGeom prst="rect">
             <a:avLst/>
@@ -13428,7 +13428,7 @@
           <a:p>
             <a:pPr algn="l">
               <a:lnSpc>
-                <a:spcPct val="130000"/>
+                <a:spcPct val="125000"/>
               </a:lnSpc>
               <a:spcBef>
                 <a:spcPts val="0"/>
@@ -13438,14 +13438,14 @@
               </a:spcAft>
             </a:pPr>
             <a:r>
-              <a:rPr sz="1350" b="0">
+              <a:rPr sz="1300" b="0">
                 <a:solidFill>
                   <a:srgbClr val="3A4658"/>
                 </a:solidFill>
                 <a:latin typeface="Meiryo"/>
                 <a:ea typeface="メイリオ"/>
               </a:rPr>
-              <a:t>実環境は未検証（9月に測定）。合成の空間手がかりは理想的過ぎる可能性</a:t>
+              <a:t>実環境は未検証。9月に120本（統制100＋静止/歩行対比20）で測るが、測れるのは「胸部装着・実環境での通知性能」まで</a:t>
             </a:r>
           </a:p>
         </p:txBody>
@@ -13458,7 +13458,7 @@
         </p:nvSpPr>
         <p:spPr>
           <a:xfrm>
-            <a:off x="685800" y="2286000"/>
+            <a:off x="685800" y="2184400"/>
             <a:ext cx="482600" cy="254000"/>
           </a:xfrm>
           <a:prstGeom prst="rect">
@@ -13506,7 +13506,7 @@
                 <a:latin typeface="Meiryo"/>
                 <a:ea typeface="メイリオ"/>
               </a:rPr>
-              <a:t>指標</a:t>
+              <a:t>至近</a:t>
             </a:r>
           </a:p>
         </p:txBody>
@@ -13519,8 +13519,8 @@
         </p:nvSpPr>
         <p:spPr>
           <a:xfrm>
-            <a:off x="1473200" y="2209800"/>
-            <a:ext cx="10033000" cy="762000"/>
+            <a:off x="1473200" y="2108200"/>
+            <a:ext cx="10033000" cy="711200"/>
           </a:xfrm>
           <a:prstGeom prst="rect">
             <a:avLst/>
@@ -13535,7 +13535,7 @@
           <a:p>
             <a:pPr algn="l">
               <a:lnSpc>
-                <a:spcPct val="130000"/>
+                <a:spcPct val="125000"/>
               </a:lnSpc>
               <a:spcBef>
                 <a:spcPts val="0"/>
@@ -13545,14 +13545,14 @@
               </a:spcAft>
             </a:pPr>
             <a:r>
-              <a:rPr sz="1350" b="0">
+              <a:rPr sz="1300" b="0">
                 <a:solidFill>
                   <a:srgbClr val="3A4658"/>
                 </a:solidFill>
                 <a:latin typeface="Meiryo"/>
                 <a:ea typeface="メイリオ"/>
               </a:rPr>
-              <a:t>総合SELDスコア（学習時指標）は事前基準に僅差未達（0.087 vs 0.085。確定評価の個別性能は全達成）</a:t>
+              <a:t>車の至近帯（≤1.5m）は安全上そもそも再現できない — 至近警告の実環境確認は自転車・キックボードでの部分検証にとどまる</a:t>
             </a:r>
           </a:p>
         </p:txBody>
@@ -13565,7 +13565,7 @@
         </p:nvSpPr>
         <p:spPr>
           <a:xfrm>
-            <a:off x="685800" y="3073400"/>
+            <a:off x="685800" y="2921000"/>
             <a:ext cx="482600" cy="254000"/>
           </a:xfrm>
           <a:prstGeom prst="rect">
@@ -13613,7 +13613,7 @@
                 <a:latin typeface="Meiryo"/>
                 <a:ea typeface="メイリオ"/>
               </a:rPr>
-              <a:t>通知</a:t>
+              <a:t>指標</a:t>
             </a:r>
           </a:p>
         </p:txBody>
@@ -13626,8 +13626,8 @@
         </p:nvSpPr>
         <p:spPr>
           <a:xfrm>
-            <a:off x="1473200" y="2997200"/>
-            <a:ext cx="10033000" cy="762000"/>
+            <a:off x="1473200" y="2844800"/>
+            <a:ext cx="10033000" cy="711200"/>
           </a:xfrm>
           <a:prstGeom prst="rect">
             <a:avLst/>
@@ -13642,7 +13642,7 @@
           <a:p>
             <a:pPr algn="l">
               <a:lnSpc>
-                <a:spcPct val="130000"/>
+                <a:spcPct val="125000"/>
               </a:lnSpc>
               <a:spcBef>
                 <a:spcPts val="0"/>
@@ -13652,14 +13652,14 @@
               </a:spcAft>
             </a:pPr>
             <a:r>
-              <a:rPr sz="1350" b="0">
+              <a:rPr sz="1300" b="0">
                 <a:solidFill>
                   <a:srgbClr val="3A4658"/>
                 </a:solidFill>
                 <a:latin typeface="Meiryo"/>
                 <a:ea typeface="メイリオ"/>
               </a:rPr>
-              <a:t>至近警告の到達は約7割。未達の主因は距離推定が2フレーム連続で1.5mに届かないケース（失敗例は全数分類済み・安全な車への誤帰属はほぼ無し）</a:t>
+              <a:t>総合SELDスコアは事前基準に僅差未達（0.087 vs 0.085）。実録では0.1秒刻みの正解位置が無いため実測SELDスコアは出さない（通知評価と幾何近似の誤差のみ）</a:t>
             </a:r>
           </a:p>
         </p:txBody>
@@ -13672,7 +13672,7 @@
         </p:nvSpPr>
         <p:spPr>
           <a:xfrm>
-            <a:off x="685800" y="3860800"/>
+            <a:off x="685800" y="3657600"/>
             <a:ext cx="482600" cy="254000"/>
           </a:xfrm>
           <a:prstGeom prst="rect">
@@ -13720,7 +13720,7 @@
                 <a:latin typeface="Meiryo"/>
                 <a:ea typeface="メイリオ"/>
               </a:rPr>
-              <a:t>学習</a:t>
+              <a:t>通知</a:t>
             </a:r>
           </a:p>
         </p:txBody>
@@ -13733,8 +13733,8 @@
         </p:nvSpPr>
         <p:spPr>
           <a:xfrm>
-            <a:off x="1473200" y="3784600"/>
-            <a:ext cx="10033000" cy="762000"/>
+            <a:off x="1473200" y="3581400"/>
+            <a:ext cx="10033000" cy="711200"/>
           </a:xfrm>
           <a:prstGeom prst="rect">
             <a:avLst/>
@@ -13749,7 +13749,7 @@
           <a:p>
             <a:pPr algn="l">
               <a:lnSpc>
-                <a:spcPct val="130000"/>
+                <a:spcPct val="125000"/>
               </a:lnSpc>
               <a:spcBef>
                 <a:spcPts val="0"/>
@@ -13759,14 +13759,14 @@
               </a:spcAft>
             </a:pPr>
             <a:r>
-              <a:rPr sz="1350" b="0">
+              <a:rPr sz="1300" b="0">
                 <a:solidFill>
                   <a:srgbClr val="3A4658"/>
                 </a:solidFill>
                 <a:latin typeface="Meiryo"/>
                 <a:ea typeface="メイリオ"/>
               </a:rPr>
-              <a:t>キックボードの高騒音下検出は88.7% — 距離重視の学習とのトレードオフが残る</a:t>
+              <a:t>至近警告の到達は約7割。未達の主因は距離推定が2フレーム連続で1.5mに届かないケース（失敗例は全数分類済み・安全な車への誤帰属はほぼ無し）</a:t>
             </a:r>
           </a:p>
         </p:txBody>
@@ -13779,7 +13779,7 @@
         </p:nvSpPr>
         <p:spPr>
           <a:xfrm>
-            <a:off x="685800" y="4648200"/>
+            <a:off x="685800" y="4394200"/>
             <a:ext cx="482600" cy="254000"/>
           </a:xfrm>
           <a:prstGeom prst="rect">
@@ -13827,7 +13827,7 @@
                 <a:latin typeface="Meiryo"/>
                 <a:ea typeface="メイリオ"/>
               </a:rPr>
-              <a:t>設計</a:t>
+              <a:t>学習</a:t>
             </a:r>
           </a:p>
         </p:txBody>
@@ -13840,8 +13840,8 @@
         </p:nvSpPr>
         <p:spPr>
           <a:xfrm>
-            <a:off x="1473200" y="4572000"/>
-            <a:ext cx="10033000" cy="762000"/>
+            <a:off x="1473200" y="4318000"/>
+            <a:ext cx="10033000" cy="711200"/>
           </a:xfrm>
           <a:prstGeom prst="rect">
             <a:avLst/>
@@ -13856,7 +13856,7 @@
           <a:p>
             <a:pPr algn="l">
               <a:lnSpc>
-                <a:spcPct val="130000"/>
+                <a:spcPct val="125000"/>
               </a:lnSpc>
               <a:spcBef>
                 <a:spcPts val="0"/>
@@ -13866,28 +13866,89 @@
               </a:spcAft>
             </a:pPr>
             <a:r>
-              <a:rPr sz="1350" b="0">
+              <a:rPr sz="1300" b="0">
                 <a:solidFill>
                   <a:srgbClr val="3A4658"/>
                 </a:solidFill>
                 <a:latin typeface="Meiryo"/>
                 <a:ea typeface="メイリオ"/>
               </a:rPr>
-              <a:t>通知の同一物体判定は方位連結（±60°）による近似（完全なトラッキングは将来課題）</a:t>
-            </a:r>
-          </a:p>
-        </p:txBody>
-      </p:sp>
-      <p:sp>
-        <p:nvSpPr>
-          <p:cNvPr id="15" name="TextBox 14"/>
+              <a:t>キックボードの高騒音下検出は88.7% — 距離重視の学習とのトレードオフが残る</a:t>
+            </a:r>
+          </a:p>
+        </p:txBody>
+      </p:sp>
+      <p:sp>
+        <p:nvSpPr>
+          <p:cNvPr id="15" name="Rectangle 14"/>
+          <p:cNvSpPr/>
+          <p:nvPr/>
+        </p:nvSpPr>
+        <p:spPr>
+          <a:xfrm>
+            <a:off x="685800" y="5130800"/>
+            <a:ext cx="482600" cy="254000"/>
+          </a:xfrm>
+          <a:prstGeom prst="rect">
+            <a:avLst/>
+          </a:prstGeom>
+          <a:noFill/>
+          <a:ln w="15240">
+            <a:solidFill>
+              <a:srgbClr val="3A4658"/>
+            </a:solidFill>
+          </a:ln>
+          <a:effectLst/>
+        </p:spPr>
+        <p:style>
+          <a:lnRef idx="1">
+            <a:schemeClr val="accent1"/>
+          </a:lnRef>
+          <a:fillRef idx="3">
+            <a:schemeClr val="accent1"/>
+          </a:fillRef>
+          <a:effectRef idx="2">
+            <a:schemeClr val="accent1"/>
+          </a:effectRef>
+          <a:fontRef idx="minor">
+            <a:schemeClr val="lt1"/>
+          </a:fontRef>
+        </p:style>
+        <p:txBody>
+          <a:bodyPr rtlCol="0" anchor="ctr" wrap="square" lIns="38100" rIns="38100" tIns="0" bIns="0"/>
+          <a:lstStyle/>
+          <a:p>
+            <a:pPr algn="ctr">
+              <a:spcBef>
+                <a:spcPts val="0"/>
+              </a:spcBef>
+              <a:spcAft>
+                <a:spcPts val="0"/>
+              </a:spcAft>
+            </a:pPr>
+            <a:r>
+              <a:rPr sz="1000" b="1">
+                <a:solidFill>
+                  <a:srgbClr val="3A4658"/>
+                </a:solidFill>
+                <a:latin typeface="Meiryo"/>
+                <a:ea typeface="メイリオ"/>
+              </a:rPr>
+              <a:t>設計</a:t>
+            </a:r>
+          </a:p>
+        </p:txBody>
+      </p:sp>
+      <p:sp>
+        <p:nvSpPr>
+          <p:cNvPr id="16" name="TextBox 15"/>
           <p:cNvSpPr txBox="1"/>
           <p:nvPr/>
         </p:nvSpPr>
         <p:spPr>
           <a:xfrm>
-            <a:off x="685800" y="5486400"/>
-            <a:ext cx="10820400" cy="381000"/>
+            <a:off x="1473200" y="5054600"/>
+            <a:ext cx="10033000" cy="711200"/>
           </a:xfrm>
           <a:prstGeom prst="rect">
             <a:avLst/>
@@ -13901,6 +13962,9 @@
           <a:lstStyle/>
           <a:p>
             <a:pPr algn="l">
+              <a:lnSpc>
+                <a:spcPct val="125000"/>
+              </a:lnSpc>
               <a:spcBef>
                 <a:spcPts val="0"/>
               </a:spcBef>
@@ -13909,6 +13973,49 @@
               </a:spcAft>
             </a:pPr>
             <a:r>
+              <a:rPr sz="1300" b="0">
+                <a:solidFill>
+                  <a:srgbClr val="3A4658"/>
+                </a:solidFill>
+                <a:latin typeface="Meiryo"/>
+                <a:ea typeface="メイリオ"/>
+              </a:rPr>
+              <a:t>通知の同一物体判定は方位連結（±60°）による近似（完全なトラッキングは将来課題）</a:t>
+            </a:r>
+          </a:p>
+        </p:txBody>
+      </p:sp>
+      <p:sp>
+        <p:nvSpPr>
+          <p:cNvPr id="17" name="TextBox 16"/>
+          <p:cNvSpPr txBox="1"/>
+          <p:nvPr/>
+        </p:nvSpPr>
+        <p:spPr>
+          <a:xfrm>
+            <a:off x="685800" y="5892800"/>
+            <a:ext cx="10820400" cy="381000"/>
+          </a:xfrm>
+          <a:prstGeom prst="rect">
+            <a:avLst/>
+          </a:prstGeom>
+          <a:noFill/>
+        </p:spPr>
+        <p:txBody>
+          <a:bodyPr wrap="square">
+            <a:spAutoFit/>
+          </a:bodyPr>
+          <a:lstStyle/>
+          <a:p>
+            <a:pPr algn="l">
+              <a:spcBef>
+                <a:spcPts val="0"/>
+              </a:spcBef>
+              <a:spcAft>
+                <a:spcPts val="0"/>
+              </a:spcAft>
+            </a:pPr>
+            <a:r>
               <a:rPr sz="1200" b="0">
                 <a:solidFill>
                   <a:srgbClr val="66707F"/>
@@ -13916,14 +14023,14 @@
                 <a:latin typeface="Meiryo"/>
                 <a:ea typeface="メイリオ"/>
               </a:rPr>
-              <a:t>限界も「どのケースが・何台・なぜ」まで個票レベルで分解できているのが現在の状態。</a:t>
+              <a:t>限界は「どのケースが・何台・なぜ」まで個票で分解済み。測れないものは測れないと先に宣言してから9月の収録に入る。</a:t>
             </a:r>
           </a:p>
         </p:txBody>
       </p:sp>
       <p:cxnSp>
         <p:nvCxnSpPr>
-          <p:cNvPr id="16" name="Connector 15"/>
+          <p:cNvPr id="18" name="Connector 17"/>
           <p:cNvCxnSpPr/>
           <p:nvPr/>
         </p:nvCxnSpPr>
@@ -13959,7 +14066,7 @@
       </p:cxnSp>
       <p:sp>
         <p:nvSpPr>
-          <p:cNvPr id="17" name="Rounded Rectangle 16"/>
+          <p:cNvPr id="19" name="Rounded Rectangle 18"/>
           <p:cNvSpPr/>
           <p:nvPr/>
         </p:nvSpPr>
@@ -14020,7 +14127,7 @@
       </p:sp>
       <p:sp>
         <p:nvSpPr>
-          <p:cNvPr id="18" name="Rounded Rectangle 17"/>
+          <p:cNvPr id="20" name="Rounded Rectangle 19"/>
           <p:cNvSpPr/>
           <p:nvPr/>
         </p:nvSpPr>
@@ -14081,7 +14188,7 @@
       </p:sp>
       <p:sp>
         <p:nvSpPr>
-          <p:cNvPr id="19" name="Rounded Rectangle 18"/>
+          <p:cNvPr id="21" name="Rounded Rectangle 20"/>
           <p:cNvSpPr/>
           <p:nvPr/>
         </p:nvSpPr>
@@ -14142,7 +14249,7 @@
       </p:sp>
       <p:sp>
         <p:nvSpPr>
-          <p:cNvPr id="20" name="Rounded Rectangle 19"/>
+          <p:cNvPr id="22" name="Rounded Rectangle 21"/>
           <p:cNvSpPr/>
           <p:nvPr/>
         </p:nvSpPr>
@@ -14203,7 +14310,7 @@
       </p:sp>
       <p:sp>
         <p:nvSpPr>
-          <p:cNvPr id="21" name="Rounded Rectangle 20"/>
+          <p:cNvPr id="23" name="Rounded Rectangle 22"/>
           <p:cNvSpPr/>
           <p:nvPr/>
         </p:nvSpPr>
@@ -14264,7 +14371,7 @@
       </p:sp>
       <p:sp>
         <p:nvSpPr>
-          <p:cNvPr id="22" name="Rounded Rectangle 21"/>
+          <p:cNvPr id="24" name="Rounded Rectangle 23"/>
           <p:cNvSpPr/>
           <p:nvPr/>
         </p:nvSpPr>
@@ -14325,7 +14432,7 @@
       </p:sp>
       <p:sp>
         <p:nvSpPr>
-          <p:cNvPr id="23" name="TextBox 22"/>
+          <p:cNvPr id="25" name="TextBox 24"/>
           <p:cNvSpPr txBox="1"/>
           <p:nvPr/>
         </p:nvSpPr>
@@ -14710,6 +14817,16 @@
               </a:rPr>
               <a:t>88.7%</a:t>
             </a:r>
+            <a:r>
+              <a:rPr sz="1600" b="0">
+                <a:solidFill>
+                  <a:srgbClr val="3A4658"/>
+                </a:solidFill>
+                <a:latin typeface="Meiryo"/>
+                <a:ea typeface="メイリオ"/>
+              </a:rPr>
+              <a:t>（すべて合成データでの評価）</a:t>
+            </a:r>
           </a:p>
           <a:p>
             <a:pPr algn="l">
@@ -14794,7 +14911,7 @@
                 <a:latin typeface="Meiryo"/>
                 <a:ea typeface="メイリオ"/>
               </a:rPr>
-              <a:t>次：</a:t>
+              <a:t>次：9月の</a:t>
             </a:r>
             <a:r>
               <a:rPr sz="1600" b="1">
@@ -14804,7 +14921,7 @@
                 <a:latin typeface="Meiryo"/>
                 <a:ea typeface="メイリオ"/>
               </a:rPr>
-              <a:t>実環境録音での評価</a:t>
+              <a:t>実環境120本</a:t>
             </a:r>
             <a:r>
               <a:rPr sz="1600" b="0">
@@ -14814,7 +14931,7 @@
                 <a:latin typeface="Meiryo"/>
                 <a:ea typeface="メイリオ"/>
               </a:rPr>
-              <a:t>と</a:t>
+              <a:t>を全ablation版の</a:t>
             </a:r>
             <a:r>
               <a:rPr sz="1600" b="1">
@@ -14824,7 +14941,7 @@
                 <a:latin typeface="Meiryo"/>
                 <a:ea typeface="メイリオ"/>
               </a:rPr>
-              <a:t>物理要素の切り分け実験</a:t>
+              <a:t>共通試験</a:t>
             </a:r>
             <a:r>
               <a:rPr sz="1600" b="0">
@@ -14834,7 +14951,7 @@
                 <a:latin typeface="Meiryo"/>
                 <a:ea typeface="メイリオ"/>
               </a:rPr>
-              <a:t>で「どの物理が必要か」に答える</a:t>
+              <a:t>にして、「どの物理が必要か」と「実環境でどれだけ落ちるか」を同じ土俵で測る</a:t>
             </a:r>
           </a:p>
         </p:txBody>

--- a/md/seminar/中間発表スライド_2026-08-10.pptx
+++ b/md/seminar/中間発表スライド_2026-08-10.pptx
@@ -13445,7 +13445,7 @@
                 <a:latin typeface="Meiryo"/>
                 <a:ea typeface="メイリオ"/>
               </a:rPr>
-              <a:t>実環境は未検証。9月に120本（統制100＋静止/歩行対比20）で測るが、測れるのは「胸部装着・実環境での通知性能」まで</a:t>
+              <a:t>実環境は未検証。9月に120本（ablation共通の静止100＋静止/歩行対比20）で測るが、測れるのは「胸部装着・実環境での通知性能」まで</a:t>
             </a:r>
           </a:p>
         </p:txBody>
@@ -14911,7 +14911,7 @@
                 <a:latin typeface="Meiryo"/>
                 <a:ea typeface="メイリオ"/>
               </a:rPr>
-              <a:t>次：9月の</a:t>
+              <a:t>次：9月の実環境録音——</a:t>
             </a:r>
             <a:r>
               <a:rPr sz="1600" b="1">
@@ -14921,7 +14921,7 @@
                 <a:latin typeface="Meiryo"/>
                 <a:ea typeface="メイリオ"/>
               </a:rPr>
-              <a:t>実環境120本</a:t>
+              <a:t>静止100本を全ablation版の共通試験</a:t>
             </a:r>
             <a:r>
               <a:rPr sz="1600" b="0">
@@ -14931,7 +14931,7 @@
                 <a:latin typeface="Meiryo"/>
                 <a:ea typeface="メイリオ"/>
               </a:rPr>
-              <a:t>を全ablation版の</a:t>
+              <a:t>、</a:t>
             </a:r>
             <a:r>
               <a:rPr sz="1600" b="1">
@@ -14941,7 +14941,7 @@
                 <a:latin typeface="Meiryo"/>
                 <a:ea typeface="メイリオ"/>
               </a:rPr>
-              <a:t>共通試験</a:t>
+              <a:t>歩行20本は別枠で評価</a:t>
             </a:r>
             <a:r>
               <a:rPr sz="1600" b="0">
@@ -14951,7 +14951,7 @@
                 <a:latin typeface="Meiryo"/>
                 <a:ea typeface="メイリオ"/>
               </a:rPr>
-              <a:t>にして、「どの物理が必要か」と「実環境でどれだけ落ちるか」を同じ土俵で測る</a:t>
+              <a:t>——で「どの物理が必要か」と「実環境でどれだけ落ちるか」を測る</a:t>
             </a:r>
           </a:p>
         </p:txBody>

--- a/md/seminar/中間発表スライド_2026-08-10.pptx
+++ b/md/seminar/中間発表スライド_2026-08-10.pptx
@@ -13445,7 +13445,7 @@
                 <a:latin typeface="Meiryo"/>
                 <a:ea typeface="メイリオ"/>
               </a:rPr>
-              <a:t>実環境は未検証。9月に120本（ablation共通の静止100＋静止/歩行対比20）で測るが、測れるのは「胸部装着・実環境での通知性能」まで</a:t>
+              <a:t>実環境は未検証。これから実録で測るが、測れるのは「胸部装着・実環境での通知性能」までにとどまる</a:t>
             </a:r>
           </a:p>
         </p:txBody>
@@ -13552,7 +13552,7 @@
                 <a:latin typeface="Meiryo"/>
                 <a:ea typeface="メイリオ"/>
               </a:rPr>
-              <a:t>車の至近帯（≤1.5m）は安全上そもそも再現できない — 至近警告の実環境確認は自転車・キックボードでの部分検証にとどまる</a:t>
+              <a:t>車の至近帯は安全上そもそも再現できない — 至近警告の実環境確認は自転車・キックボードでの部分検証にとどまる</a:t>
             </a:r>
           </a:p>
         </p:txBody>
@@ -13659,7 +13659,7 @@
                 <a:latin typeface="Meiryo"/>
                 <a:ea typeface="メイリオ"/>
               </a:rPr>
-              <a:t>総合SELDスコアは事前基準に僅差未達（0.087 vs 0.085）。実録では0.1秒刻みの正解位置が無いため実測SELDスコアは出さない（通知評価と幾何近似の誤差のみ）</a:t>
+              <a:t>総合SELDスコアは事前基準に僅差で未達。実録ではフレーム単位の正解位置が得られないため、実測のSELDスコアは出さない（通知評価と幾何近似の誤差のみ）</a:t>
             </a:r>
           </a:p>
         </p:txBody>
@@ -13766,7 +13766,7 @@
                 <a:latin typeface="Meiryo"/>
                 <a:ea typeface="メイリオ"/>
               </a:rPr>
-              <a:t>至近警告の到達は約7割。未達の主因は距離推定が2フレーム連続で1.5mに届かないケース（失敗例は全数分類済み・安全な車への誤帰属はほぼ無し）</a:t>
+              <a:t>至近警告が届かない主因は、距離推定が閾値まで下がりきらないケース（失敗例は全数分類済み・安全な車への誤帰属はほぼ無し）</a:t>
             </a:r>
           </a:p>
         </p:txBody>
@@ -13873,7 +13873,7 @@
                 <a:latin typeface="Meiryo"/>
                 <a:ea typeface="メイリオ"/>
               </a:rPr>
-              <a:t>キックボードの高騒音下検出は88.7% — 距離重視の学習とのトレードオフが残る</a:t>
+              <a:t>キックボードの高騒音下検出は他クラスより低い — 距離重視の学習とのトレードオフが残る</a:t>
             </a:r>
           </a:p>
         </p:txBody>
@@ -13980,7 +13980,7 @@
                 <a:latin typeface="Meiryo"/>
                 <a:ea typeface="メイリオ"/>
               </a:rPr>
-              <a:t>通知の同一物体判定は方位連結（±60°）による近似（完全なトラッキングは将来課題）</a:t>
+              <a:t>通知の同一物体判定は方位の連続性による近似（完全なトラッキングは将来課題）</a:t>
             </a:r>
           </a:p>
         </p:txBody>
@@ -14023,7 +14023,7 @@
                 <a:latin typeface="Meiryo"/>
                 <a:ea typeface="メイリオ"/>
               </a:rPr>
-              <a:t>限界は「どのケースが・何台・なぜ」まで個票で分解済み。測れないものは測れないと先に宣言してから9月の収録に入る。</a:t>
+              <a:t>限界は「どのケースが・何台・なぜ」まで個票で分解済み。測れないものは測れないと先に宣言してから実録の収録に入る。</a:t>
             </a:r>
           </a:p>
         </p:txBody>
@@ -14672,7 +14672,7 @@
                 <a:latin typeface="Meiryo"/>
                 <a:ea typeface="メイリオ"/>
               </a:rPr>
-              <a:t>8クラス・</a:t>
+              <a:t>屋外の危険音クラスを対象に、</a:t>
             </a:r>
             <a:r>
               <a:rPr sz="1600" b="1">
@@ -14682,7 +14682,7 @@
                 <a:latin typeface="Meiryo"/>
                 <a:ea typeface="メイリオ"/>
               </a:rPr>
-              <a:t>距離つき</a:t>
+              <a:t>距離つきSELD</a:t>
             </a:r>
             <a:r>
               <a:rPr sz="1600" b="0">
@@ -14692,7 +14692,7 @@
                 <a:latin typeface="Meiryo"/>
                 <a:ea typeface="メイリオ"/>
               </a:rPr>
-              <a:t>屋外SELDを日本準拠の合成データで構築し、</a:t>
+              <a:t>を日本準拠の合成データで構築し、</a:t>
             </a:r>
             <a:r>
               <a:rPr sz="1600" b="1">
@@ -14712,7 +14712,7 @@
                 <a:latin typeface="Meiryo"/>
                 <a:ea typeface="メイリオ"/>
               </a:rPr>
-              <a:t>（事前設定の目標5項目中4項目を達成）</a:t>
+              <a:t>（事前設定の目標をおおむね達成）</a:t>
             </a:r>
           </a:p>
           <a:p>
@@ -14755,7 +14755,7 @@
                 <a:latin typeface="Meiryo"/>
                 <a:ea typeface="メイリオ"/>
               </a:rPr>
-              <a:t>推定距離で3段階</a:t>
+              <a:t>推定距離で段階的に出し分け</a:t>
             </a:r>
             <a:r>
               <a:rPr sz="1600" b="0">
@@ -14765,17 +14765,17 @@
                 <a:latin typeface="Meiryo"/>
                 <a:ea typeface="メイリオ"/>
               </a:rPr>
-              <a:t>に出し分け — 至近警告到達 </a:t>
-            </a:r>
-            <a:r>
-              <a:rPr sz="1700" b="1">
+              <a:t> — 至近への警告・安全な車の抑制・静かなキックボードへの警告をいずれも確認（数値は検証のページ。</a:t>
+            </a:r>
+            <a:r>
+              <a:rPr sz="1600" b="1">
                 <a:solidFill>
                   <a:srgbClr val="16233A"/>
                 </a:solidFill>
                 <a:latin typeface="Meiryo"/>
                 <a:ea typeface="メイリオ"/>
               </a:rPr>
-              <a:t>69.9%</a:t>
+              <a:t>すべて合成データでの評価</a:t>
             </a:r>
             <a:r>
               <a:rPr sz="1600" b="0">
@@ -14785,47 +14785,7 @@
                 <a:latin typeface="Meiryo"/>
                 <a:ea typeface="メイリオ"/>
               </a:rPr>
-              <a:t>・安全車の抑制 </a:t>
-            </a:r>
-            <a:r>
-              <a:rPr sz="1700" b="1">
-                <a:solidFill>
-                  <a:srgbClr val="16233A"/>
-                </a:solidFill>
-                <a:latin typeface="Meiryo"/>
-                <a:ea typeface="メイリオ"/>
-              </a:rPr>
-              <a:t>90.4%</a:t>
-            </a:r>
-            <a:r>
-              <a:rPr sz="1600" b="0">
-                <a:solidFill>
-                  <a:srgbClr val="3A4658"/>
-                </a:solidFill>
-                <a:latin typeface="Meiryo"/>
-                <a:ea typeface="メイリオ"/>
-              </a:rPr>
-              <a:t>・キックボード </a:t>
-            </a:r>
-            <a:r>
-              <a:rPr sz="1700" b="1">
-                <a:solidFill>
-                  <a:srgbClr val="16233A"/>
-                </a:solidFill>
-                <a:latin typeface="Meiryo"/>
-                <a:ea typeface="メイリオ"/>
-              </a:rPr>
-              <a:t>88.7%</a:t>
-            </a:r>
-            <a:r>
-              <a:rPr sz="1600" b="0">
-                <a:solidFill>
-                  <a:srgbClr val="3A4658"/>
-                </a:solidFill>
-                <a:latin typeface="Meiryo"/>
-                <a:ea typeface="メイリオ"/>
-              </a:rPr>
-              <a:t>（すべて合成データでの評価）</a:t>
+              <a:t>）</a:t>
             </a:r>
           </a:p>
           <a:p>
@@ -14858,17 +14818,17 @@
                 <a:latin typeface="Meiryo"/>
                 <a:ea typeface="メイリオ"/>
               </a:rPr>
-              <a:t>遠方サイレンの初検知 中央 </a:t>
-            </a:r>
-            <a:r>
-              <a:rPr sz="3000" b="1">
+              <a:t>遠方サイレンの</a:t>
+            </a:r>
+            <a:r>
+              <a:rPr sz="1600" b="1">
                 <a:solidFill>
                   <a:srgbClr val="16233A"/>
                 </a:solidFill>
                 <a:latin typeface="Meiryo"/>
                 <a:ea typeface="メイリオ"/>
               </a:rPr>
-              <a:t>208m</a:t>
+              <a:t>初検知距離を定量化</a:t>
             </a:r>
             <a:r>
               <a:rPr sz="1600" b="0">
@@ -14878,7 +14838,7 @@
                 <a:latin typeface="Meiryo"/>
                 <a:ea typeface="メイリオ"/>
               </a:rPr>
-              <a:t>（開発評価）・40kHz検出系も実装（合成試験）</a:t>
+              <a:t>（開発評価）・超音波帯の検出系も実装（合成試験）</a:t>
             </a:r>
           </a:p>
           <a:p>
@@ -14911,7 +14871,7 @@
                 <a:latin typeface="Meiryo"/>
                 <a:ea typeface="メイリオ"/>
               </a:rPr>
-              <a:t>次：9月の実環境録音——</a:t>
+              <a:t>次：実環境録音——</a:t>
             </a:r>
             <a:r>
               <a:rPr sz="1600" b="1">
@@ -14921,7 +14881,7 @@
                 <a:latin typeface="Meiryo"/>
                 <a:ea typeface="メイリオ"/>
               </a:rPr>
-              <a:t>静止100本を全ablation版の共通試験</a:t>
+              <a:t>静止条件を全ablation版の共通試験</a:t>
             </a:r>
             <a:r>
               <a:rPr sz="1600" b="0">
@@ -14941,7 +14901,7 @@
                 <a:latin typeface="Meiryo"/>
                 <a:ea typeface="メイリオ"/>
               </a:rPr>
-              <a:t>歩行20本は別枠で評価</a:t>
+              <a:t>歩行条件は別枠で評価</a:t>
             </a:r>
             <a:r>
               <a:rPr sz="1600" b="0">
